--- a/RESUME_TUPOKSI_egov.pptx
+++ b/RESUME_TUPOKSI_egov.pptx
@@ -13,7 +13,7 @@
     <p:sldId id="261" r:id="rId12"/>
     <p:sldId id="262" r:id="rId13"/>
   </p:sldIdLst>
-  <p:sldSz cx="12188952" cy="6858000" type="screen4x3"/>
+  <p:sldSz cx="12191695" cy="6858000" type="screen4x3"/>
   <p:notesSz cx="6858000" cy="9144000"/>
   <p:defaultTextStyle>
     <a:defPPr>
@@ -3090,7 +3090,7 @@
     <p:bg>
       <p:bgPr>
         <a:solidFill>
-          <a:srgbClr val="1A365D"/>
+          <a:srgbClr val="0A1628"/>
         </a:solidFill>
         <a:effectLst/>
       </p:bgPr>
@@ -3104,20 +3104,20 @@
       <p:grpSpPr/>
       <p:sp>
         <p:nvSpPr>
-          <p:cNvPr id="2" name="Right Triangle 1"/>
+          <p:cNvPr id="2" name="Rectangle 1"/>
           <p:cNvSpPr/>
           <p:nvPr/>
         </p:nvSpPr>
         <p:spPr>
           <a:xfrm>
-            <a:off x="8686800" y="0"/>
-            <a:ext cx="4572000" cy="6858000"/>
-          </a:xfrm>
-          <a:prstGeom prst="rtTriangle">
+            <a:off x="0" y="7"/>
+            <a:ext cx="13" cy="0"/>
+          </a:xfrm>
+          <a:prstGeom prst="rect">
             <a:avLst/>
           </a:prstGeom>
           <a:solidFill>
-            <a:srgbClr val="152D50"/>
+            <a:srgbClr val="C8962E"/>
           </a:solidFill>
           <a:ln>
             <a:noFill/>
@@ -3147,20 +3147,128 @@
       </p:sp>
       <p:sp>
         <p:nvSpPr>
-          <p:cNvPr id="3" name="Right Triangle 2"/>
+          <p:cNvPr id="3" name="TextBox 2"/>
+          <p:cNvSpPr txBox="1"/>
+          <p:nvPr/>
+        </p:nvSpPr>
+        <p:spPr>
+          <a:xfrm>
+            <a:off x="0" y="2"/>
+            <a:ext cx="12" cy="1"/>
+          </a:xfrm>
+          <a:prstGeom prst="rect">
+            <a:avLst/>
+          </a:prstGeom>
+          <a:noFill/>
+        </p:spPr>
+        <p:txBody>
+          <a:bodyPr wrap="square">
+            <a:spAutoFit/>
+          </a:bodyPr>
+          <a:lstStyle/>
+          <a:p>
+            <a:pPr algn="l">
+              <a:defRPr sz="4800" b="1">
+                <a:solidFill>
+                  <a:srgbClr val="FFFFFF"/>
+                </a:solidFill>
+                <a:latin typeface="Calibri"/>
+              </a:defRPr>
+            </a:pPr>
+            <a:r>
+              <a:t>RESUME TUPOKSI</a:t>
+            </a:r>
+          </a:p>
+        </p:txBody>
+      </p:sp>
+      <p:sp>
+        <p:nvSpPr>
+          <p:cNvPr id="4" name="TextBox 3"/>
+          <p:cNvSpPr txBox="1"/>
+          <p:nvPr/>
+        </p:nvSpPr>
+        <p:spPr>
+          <a:xfrm>
+            <a:off x="0" y="3"/>
+            <a:ext cx="12" cy="0"/>
+          </a:xfrm>
+          <a:prstGeom prst="rect">
+            <a:avLst/>
+          </a:prstGeom>
+          <a:noFill/>
+        </p:spPr>
+        <p:txBody>
+          <a:bodyPr wrap="square">
+            <a:spAutoFit/>
+          </a:bodyPr>
+          <a:lstStyle/>
+          <a:p>
+            <a:pPr algn="l">
+              <a:defRPr sz="2200" b="0">
+                <a:solidFill>
+                  <a:srgbClr val="8899B0"/>
+                </a:solidFill>
+                <a:latin typeface="Calibri"/>
+              </a:defRPr>
+            </a:pPr>
+            <a:r>
+              <a:t>Bidang e-Government</a:t>
+            </a:r>
+          </a:p>
+        </p:txBody>
+      </p:sp>
+      <p:sp>
+        <p:nvSpPr>
+          <p:cNvPr id="5" name="TextBox 4"/>
+          <p:cNvSpPr txBox="1"/>
+          <p:nvPr/>
+        </p:nvSpPr>
+        <p:spPr>
+          <a:xfrm>
+            <a:off x="0" y="4"/>
+            <a:ext cx="12" cy="0"/>
+          </a:xfrm>
+          <a:prstGeom prst="rect">
+            <a:avLst/>
+          </a:prstGeom>
+          <a:noFill/>
+        </p:spPr>
+        <p:txBody>
+          <a:bodyPr wrap="square">
+            <a:spAutoFit/>
+          </a:bodyPr>
+          <a:lstStyle/>
+          <a:p>
+            <a:pPr algn="l">
+              <a:defRPr sz="1400" b="0">
+                <a:solidFill>
+                  <a:srgbClr val="64748B"/>
+                </a:solidFill>
+                <a:latin typeface="Calibri"/>
+              </a:defRPr>
+            </a:pPr>
+            <a:r>
+              <a:t>Diskominfostandi Kota Bekasi</a:t>
+            </a:r>
+          </a:p>
+        </p:txBody>
+      </p:sp>
+      <p:sp>
+        <p:nvSpPr>
+          <p:cNvPr id="6" name="Rectangle 5"/>
           <p:cNvSpPr/>
           <p:nvPr/>
         </p:nvSpPr>
         <p:spPr>
           <a:xfrm>
-            <a:off x="9326880" y="1371600"/>
-            <a:ext cx="3657600" cy="5486400"/>
-          </a:xfrm>
-          <a:prstGeom prst="rtTriangle">
+            <a:off x="0" y="4"/>
+            <a:ext cx="2" cy="38100"/>
+          </a:xfrm>
+          <a:prstGeom prst="rect">
             <a:avLst/>
           </a:prstGeom>
           <a:solidFill>
-            <a:srgbClr val="122645"/>
+            <a:srgbClr val="C8962E"/>
           </a:solidFill>
           <a:ln>
             <a:noFill/>
@@ -3190,100 +3298,14 @@
       </p:sp>
       <p:sp>
         <p:nvSpPr>
-          <p:cNvPr id="4" name="Rectangle 3"/>
-          <p:cNvSpPr/>
-          <p:nvPr/>
-        </p:nvSpPr>
-        <p:spPr>
-          <a:xfrm>
-            <a:off x="0" y="0"/>
-            <a:ext cx="12188952" cy="38100"/>
-          </a:xfrm>
-          <a:prstGeom prst="rect">
-            <a:avLst/>
-          </a:prstGeom>
-          <a:solidFill>
-            <a:srgbClr val="D69E2E"/>
-          </a:solidFill>
-          <a:ln>
-            <a:noFill/>
-          </a:ln>
-        </p:spPr>
-        <p:style>
-          <a:lnRef idx="1">
-            <a:schemeClr val="accent1"/>
-          </a:lnRef>
-          <a:fillRef idx="3">
-            <a:schemeClr val="accent1"/>
-          </a:fillRef>
-          <a:effectRef idx="2">
-            <a:schemeClr val="accent1"/>
-          </a:effectRef>
-          <a:fontRef idx="minor">
-            <a:schemeClr val="lt1"/>
-          </a:fontRef>
-        </p:style>
-        <p:txBody>
-          <a:bodyPr rtlCol="0" anchor="ctr"/>
-          <a:lstStyle/>
-          <a:p>
-            <a:pPr algn="ctr"/>
-          </a:p>
-        </p:txBody>
-      </p:sp>
-      <p:sp>
-        <p:nvSpPr>
-          <p:cNvPr id="5" name="Rectangle 4"/>
-          <p:cNvSpPr/>
-          <p:nvPr/>
-        </p:nvSpPr>
-        <p:spPr>
-          <a:xfrm>
-            <a:off x="822960" y="3657600"/>
-            <a:ext cx="1828800" cy="38100"/>
-          </a:xfrm>
-          <a:prstGeom prst="rect">
-            <a:avLst/>
-          </a:prstGeom>
-          <a:solidFill>
-            <a:srgbClr val="D69E2E"/>
-          </a:solidFill>
-          <a:ln>
-            <a:noFill/>
-          </a:ln>
-        </p:spPr>
-        <p:style>
-          <a:lnRef idx="1">
-            <a:schemeClr val="accent1"/>
-          </a:lnRef>
-          <a:fillRef idx="3">
-            <a:schemeClr val="accent1"/>
-          </a:fillRef>
-          <a:effectRef idx="2">
-            <a:schemeClr val="accent1"/>
-          </a:effectRef>
-          <a:fontRef idx="minor">
-            <a:schemeClr val="lt1"/>
-          </a:fontRef>
-        </p:style>
-        <p:txBody>
-          <a:bodyPr rtlCol="0" anchor="ctr"/>
-          <a:lstStyle/>
-          <a:p>
-            <a:pPr algn="ctr"/>
-          </a:p>
-        </p:txBody>
-      </p:sp>
-      <p:sp>
-        <p:nvSpPr>
-          <p:cNvPr id="6" name="TextBox 5"/>
+          <p:cNvPr id="7" name="TextBox 6"/>
           <p:cNvSpPr txBox="1"/>
           <p:nvPr/>
         </p:nvSpPr>
         <p:spPr>
           <a:xfrm>
-            <a:off x="822960" y="1645920"/>
-            <a:ext cx="7315200" cy="914400"/>
+            <a:off x="0" y="5"/>
+            <a:ext cx="12" cy="0"/>
           </a:xfrm>
           <a:prstGeom prst="rect">
             <a:avLst/>
@@ -3297,117 +3319,9 @@
           <a:lstStyle/>
           <a:p>
             <a:pPr algn="l">
-              <a:defRPr sz="5200" b="1">
-                <a:solidFill>
-                  <a:srgbClr val="FFFFFF"/>
-                </a:solidFill>
-                <a:latin typeface="Calibri"/>
-              </a:defRPr>
-            </a:pPr>
-            <a:r>
-              <a:t>RESUME TUPOKSI</a:t>
-            </a:r>
-          </a:p>
-        </p:txBody>
-      </p:sp>
-      <p:sp>
-        <p:nvSpPr>
-          <p:cNvPr id="7" name="TextBox 6"/>
-          <p:cNvSpPr txBox="1"/>
-          <p:nvPr/>
-        </p:nvSpPr>
-        <p:spPr>
-          <a:xfrm>
-            <a:off x="822960" y="2743200"/>
-            <a:ext cx="7315200" cy="640080"/>
-          </a:xfrm>
-          <a:prstGeom prst="rect">
-            <a:avLst/>
-          </a:prstGeom>
-          <a:noFill/>
-        </p:spPr>
-        <p:txBody>
-          <a:bodyPr wrap="square">
-            <a:spAutoFit/>
-          </a:bodyPr>
-          <a:lstStyle/>
-          <a:p>
-            <a:pPr algn="l">
-              <a:defRPr sz="2600" b="0">
-                <a:solidFill>
-                  <a:srgbClr val="BBD0E5"/>
-                </a:solidFill>
-                <a:latin typeface="Calibri"/>
-              </a:defRPr>
-            </a:pPr>
-            <a:r>
-              <a:t>Bidang e-Government</a:t>
-            </a:r>
-          </a:p>
-        </p:txBody>
-      </p:sp>
-      <p:sp>
-        <p:nvSpPr>
-          <p:cNvPr id="8" name="TextBox 7"/>
-          <p:cNvSpPr txBox="1"/>
-          <p:nvPr/>
-        </p:nvSpPr>
-        <p:spPr>
-          <a:xfrm>
-            <a:off x="822960" y="3931920"/>
-            <a:ext cx="7315200" cy="457200"/>
-          </a:xfrm>
-          <a:prstGeom prst="rect">
-            <a:avLst/>
-          </a:prstGeom>
-          <a:noFill/>
-        </p:spPr>
-        <p:txBody>
-          <a:bodyPr wrap="square">
-            <a:spAutoFit/>
-          </a:bodyPr>
-          <a:lstStyle/>
-          <a:p>
-            <a:pPr algn="l">
-              <a:defRPr sz="1600" b="0">
-                <a:solidFill>
-                  <a:srgbClr val="88A8C8"/>
-                </a:solidFill>
-                <a:latin typeface="Calibri"/>
-              </a:defRPr>
-            </a:pPr>
-            <a:r>
-              <a:t>Diskominfostandi Kota Bekasi</a:t>
-            </a:r>
-          </a:p>
-        </p:txBody>
-      </p:sp>
-      <p:sp>
-        <p:nvSpPr>
-          <p:cNvPr id="9" name="TextBox 8"/>
-          <p:cNvSpPr txBox="1"/>
-          <p:nvPr/>
-        </p:nvSpPr>
-        <p:spPr>
-          <a:xfrm>
-            <a:off x="822960" y="5029200"/>
-            <a:ext cx="2743200" cy="365760"/>
-          </a:xfrm>
-          <a:prstGeom prst="rect">
-            <a:avLst/>
-          </a:prstGeom>
-          <a:noFill/>
-        </p:spPr>
-        <p:txBody>
-          <a:bodyPr wrap="square">
-            <a:spAutoFit/>
-          </a:bodyPr>
-          <a:lstStyle/>
-          <a:p>
-            <a:pPr algn="l">
-              <a:defRPr sz="1300" b="0">
-                <a:solidFill>
-                  <a:srgbClr val="8B97A8"/>
+              <a:defRPr sz="1100" b="0">
+                <a:solidFill>
+                  <a:srgbClr val="64748B"/>
                 </a:solidFill>
                 <a:latin typeface="Calibri"/>
               </a:defRPr>
@@ -3429,6 +3343,14 @@
 <file path=ppt/slides/slide2.xml><?xml version="1.0" encoding="utf-8"?>
 <p:sld xmlns:a="http://schemas.openxmlformats.org/drawingml/2006/main" xmlns:p="http://schemas.openxmlformats.org/presentationml/2006/main" xmlns:r="http://schemas.openxmlformats.org/officeDocument/2006/relationships">
   <p:cSld>
+    <p:bg>
+      <p:bgPr>
+        <a:solidFill>
+          <a:srgbClr val="F5F7FA"/>
+        </a:solidFill>
+        <a:effectLst/>
+      </p:bgPr>
+    </p:bg>
     <p:spTree>
       <p:nvGrpSpPr>
         <p:cNvPr id="1" name=""/>
@@ -3445,13 +3367,13 @@
         <p:spPr>
           <a:xfrm>
             <a:off x="0" y="0"/>
-            <a:ext cx="12188952" cy="50800"/>
+            <a:ext cx="13" cy="38100"/>
           </a:xfrm>
           <a:prstGeom prst="rect">
             <a:avLst/>
           </a:prstGeom>
           <a:solidFill>
-            <a:srgbClr val="D69E2E"/>
+            <a:srgbClr val="C8962E"/>
           </a:solidFill>
           <a:ln>
             <a:noFill/>
@@ -3481,56 +3403,20 @@
       </p:sp>
       <p:sp>
         <p:nvSpPr>
-          <p:cNvPr id="3" name="TextBox 2"/>
-          <p:cNvSpPr txBox="1"/>
-          <p:nvPr/>
-        </p:nvSpPr>
-        <p:spPr>
-          <a:xfrm>
-            <a:off x="822960" y="457200"/>
-            <a:ext cx="10543032" cy="640080"/>
-          </a:xfrm>
-          <a:prstGeom prst="rect">
-            <a:avLst/>
-          </a:prstGeom>
-          <a:noFill/>
-        </p:spPr>
-        <p:txBody>
-          <a:bodyPr wrap="square">
-            <a:spAutoFit/>
-          </a:bodyPr>
-          <a:lstStyle/>
-          <a:p>
-            <a:pPr algn="l">
-              <a:defRPr sz="3000" b="1">
-                <a:solidFill>
-                  <a:srgbClr val="1A365D"/>
-                </a:solidFill>
-                <a:latin typeface="Calibri"/>
-              </a:defRPr>
-            </a:pPr>
-            <a:r>
-              <a:t>Tiga Pilar Utama Tugas Pokok</a:t>
-            </a:r>
-          </a:p>
-        </p:txBody>
-      </p:sp>
-      <p:sp>
-        <p:nvSpPr>
-          <p:cNvPr id="4" name="Rectangle 3"/>
+          <p:cNvPr id="3" name="Rectangle 2"/>
           <p:cNvSpPr/>
           <p:nvPr/>
         </p:nvSpPr>
         <p:spPr>
           <a:xfrm>
-            <a:off x="822960" y="1143000"/>
-            <a:ext cx="1371600" cy="25400"/>
+            <a:off x="0" y="38100"/>
+            <a:ext cx="13" cy="822959"/>
           </a:xfrm>
           <a:prstGeom prst="rect">
             <a:avLst/>
           </a:prstGeom>
           <a:solidFill>
-            <a:srgbClr val="D69E2E"/>
+            <a:srgbClr val="0A1628"/>
           </a:solidFill>
           <a:ln>
             <a:noFill/>
@@ -3560,14 +3446,57 @@
       </p:sp>
       <p:sp>
         <p:nvSpPr>
+          <p:cNvPr id="4" name="Rectangle 3"/>
+          <p:cNvSpPr/>
+          <p:nvPr/>
+        </p:nvSpPr>
+        <p:spPr>
+          <a:xfrm>
+            <a:off x="0" y="0"/>
+            <a:ext cx="0" cy="0"/>
+          </a:xfrm>
+          <a:prstGeom prst="rect">
+            <a:avLst/>
+          </a:prstGeom>
+          <a:solidFill>
+            <a:srgbClr val="C8962E"/>
+          </a:solidFill>
+          <a:ln>
+            <a:noFill/>
+          </a:ln>
+        </p:spPr>
+        <p:style>
+          <a:lnRef idx="1">
+            <a:schemeClr val="accent1"/>
+          </a:lnRef>
+          <a:fillRef idx="3">
+            <a:schemeClr val="accent1"/>
+          </a:fillRef>
+          <a:effectRef idx="2">
+            <a:schemeClr val="accent1"/>
+          </a:effectRef>
+          <a:fontRef idx="minor">
+            <a:schemeClr val="lt1"/>
+          </a:fontRef>
+        </p:style>
+        <p:txBody>
+          <a:bodyPr rtlCol="0" anchor="ctr"/>
+          <a:lstStyle/>
+          <a:p>
+            <a:pPr algn="ctr"/>
+          </a:p>
+        </p:txBody>
+      </p:sp>
+      <p:sp>
+        <p:nvSpPr>
           <p:cNvPr id="5" name="TextBox 4"/>
           <p:cNvSpPr txBox="1"/>
           <p:nvPr/>
         </p:nvSpPr>
         <p:spPr>
           <a:xfrm>
-            <a:off x="822960" y="1234440"/>
-            <a:ext cx="10543032" cy="365760"/>
+            <a:off x="0" y="0"/>
+            <a:ext cx="11" cy="0"/>
           </a:xfrm>
           <a:prstGeom prst="rect">
             <a:avLst/>
@@ -3581,14 +3510,50 @@
           <a:lstStyle/>
           <a:p>
             <a:pPr algn="l">
-              <a:defRPr sz="1400" b="0">
-                <a:solidFill>
-                  <a:srgbClr val="4A5568"/>
+              <a:defRPr sz="2000" b="1">
+                <a:solidFill>
+                  <a:srgbClr val="FFFFFF"/>
                 </a:solidFill>
                 <a:latin typeface="Calibri"/>
               </a:defRPr>
             </a:pPr>
             <a:r>
+              <a:t>Tiga Pilar Utama Tugas Pokok</a:t>
+            </a:r>
+          </a:p>
+        </p:txBody>
+      </p:sp>
+      <p:sp>
+        <p:nvSpPr>
+          <p:cNvPr id="6" name="TextBox 5"/>
+          <p:cNvSpPr txBox="1"/>
+          <p:nvPr/>
+        </p:nvSpPr>
+        <p:spPr>
+          <a:xfrm>
+            <a:off x="0" y="0"/>
+            <a:ext cx="11" cy="0"/>
+          </a:xfrm>
+          <a:prstGeom prst="rect">
+            <a:avLst/>
+          </a:prstGeom>
+          <a:noFill/>
+        </p:spPr>
+        <p:txBody>
+          <a:bodyPr wrap="square">
+            <a:spAutoFit/>
+          </a:bodyPr>
+          <a:lstStyle/>
+          <a:p>
+            <a:pPr algn="l">
+              <a:defRPr sz="900" b="0">
+                <a:solidFill>
+                  <a:srgbClr val="64748B"/>
+                </a:solidFill>
+                <a:latin typeface="Calibri"/>
+              </a:defRPr>
+            </a:pPr>
+            <a:r>
               <a:t>Bidang e-Government mencakup 3 area strategis dalam transformasi digital daerah</a:t>
             </a:r>
           </a:p>
@@ -3596,24 +3561,26 @@
       </p:sp>
       <p:sp>
         <p:nvSpPr>
-          <p:cNvPr id="6" name="Rectangle 5"/>
+          <p:cNvPr id="7" name="Rounded Rectangle 6"/>
           <p:cNvSpPr/>
           <p:nvPr/>
         </p:nvSpPr>
         <p:spPr>
           <a:xfrm>
-            <a:off x="608076" y="2103120"/>
-            <a:ext cx="3291840" cy="3657600"/>
-          </a:xfrm>
-          <a:prstGeom prst="rect">
-            <a:avLst/>
+            <a:off x="0" y="1"/>
+            <a:ext cx="3" cy="3"/>
+          </a:xfrm>
+          <a:prstGeom prst="roundRect">
+            <a:avLst>
+              <a:gd name="adj" fmla="val 4000"/>
+            </a:avLst>
           </a:prstGeom>
           <a:solidFill>
             <a:srgbClr val="FFFFFF"/>
           </a:solidFill>
           <a:ln w="6350">
             <a:solidFill>
-              <a:srgbClr val="DDDDDD"/>
+              <a:srgbClr val="E8EDF5"/>
             </a:solidFill>
           </a:ln>
         </p:spPr>
@@ -3641,20 +3608,20 @@
       </p:sp>
       <p:sp>
         <p:nvSpPr>
-          <p:cNvPr id="7" name="Rectangle 6"/>
+          <p:cNvPr id="8" name="Rectangle 7"/>
           <p:cNvSpPr/>
           <p:nvPr/>
         </p:nvSpPr>
         <p:spPr>
           <a:xfrm>
-            <a:off x="608076" y="2103120"/>
-            <a:ext cx="3291840" cy="63500"/>
+            <a:off x="0" y="1"/>
+            <a:ext cx="3" cy="63500"/>
           </a:xfrm>
           <a:prstGeom prst="rect">
             <a:avLst/>
           </a:prstGeom>
           <a:solidFill>
-            <a:srgbClr val="1A365D"/>
+            <a:srgbClr val="0A1628"/>
           </a:solidFill>
           <a:ln>
             <a:noFill/>
@@ -3684,20 +3651,96 @@
       </p:sp>
       <p:sp>
         <p:nvSpPr>
-          <p:cNvPr id="8" name="Oval 7"/>
+          <p:cNvPr id="9" name="TextBox 8"/>
+          <p:cNvSpPr txBox="1"/>
+          <p:nvPr/>
+        </p:nvSpPr>
+        <p:spPr>
+          <a:xfrm>
+            <a:off x="0" y="1"/>
+            <a:ext cx="0" cy="0"/>
+          </a:xfrm>
+          <a:prstGeom prst="rect">
+            <a:avLst/>
+          </a:prstGeom>
+          <a:noFill/>
+        </p:spPr>
+        <p:txBody>
+          <a:bodyPr wrap="square">
+            <a:spAutoFit/>
+          </a:bodyPr>
+          <a:lstStyle/>
+          <a:p>
+            <a:pPr algn="l">
+              <a:defRPr sz="1600" b="1">
+                <a:solidFill>
+                  <a:srgbClr val="0A1628"/>
+                </a:solidFill>
+                <a:latin typeface="Calibri"/>
+              </a:defRPr>
+            </a:pPr>
+            <a:r>
+              <a:t>01</a:t>
+            </a:r>
+          </a:p>
+        </p:txBody>
+      </p:sp>
+      <p:sp>
+        <p:nvSpPr>
+          <p:cNvPr id="10" name="TextBox 9"/>
+          <p:cNvSpPr txBox="1"/>
+          <p:nvPr/>
+        </p:nvSpPr>
+        <p:spPr>
+          <a:xfrm>
+            <a:off x="0" y="2"/>
+            <a:ext cx="3" cy="0"/>
+          </a:xfrm>
+          <a:prstGeom prst="rect">
+            <a:avLst/>
+          </a:prstGeom>
+          <a:noFill/>
+        </p:spPr>
+        <p:txBody>
+          <a:bodyPr wrap="square">
+            <a:spAutoFit/>
+          </a:bodyPr>
+          <a:lstStyle/>
+          <a:p>
+            <a:pPr algn="l">
+              <a:defRPr sz="1500" b="1">
+                <a:solidFill>
+                  <a:srgbClr val="0A1628"/>
+                </a:solidFill>
+                <a:latin typeface="Calibri"/>
+              </a:defRPr>
+            </a:pPr>
+            <a:r>
+              <a:t>Pengembangan Aplikasi</a:t>
+            </a:r>
+            <a:br/>
+            <a:r>
+              <a:t>&amp; Sistem Informasi</a:t>
+            </a:r>
+          </a:p>
+        </p:txBody>
+      </p:sp>
+      <p:sp>
+        <p:nvSpPr>
+          <p:cNvPr id="11" name="Rectangle 10"/>
           <p:cNvSpPr/>
           <p:nvPr/>
         </p:nvSpPr>
         <p:spPr>
           <a:xfrm>
-            <a:off x="836676" y="2468880"/>
-            <a:ext cx="502920" cy="502920"/>
-          </a:xfrm>
-          <a:prstGeom prst="ellipse">
+            <a:off x="0" y="3"/>
+            <a:ext cx="3" cy="12700"/>
+          </a:xfrm>
+          <a:prstGeom prst="rect">
             <a:avLst/>
           </a:prstGeom>
           <a:solidFill>
-            <a:srgbClr val="1A365D"/>
+            <a:srgbClr val="E8EDF5"/>
           </a:solidFill>
           <a:ln>
             <a:noFill/>
@@ -3718,39 +3761,23 @@
           </a:fontRef>
         </p:style>
         <p:txBody>
-          <a:bodyPr rtlCol="0" anchor="ctr" wrap="none"/>
-          <a:lstStyle/>
-          <a:p>
-            <a:pPr algn="ctr">
-              <a:spcBef>
-                <a:spcPts val="0"/>
-              </a:spcBef>
-              <a:spcAft>
-                <a:spcPts val="0"/>
-              </a:spcAft>
-              <a:defRPr sz="1800" b="1">
-                <a:solidFill>
-                  <a:srgbClr val="FFFFFF"/>
-                </a:solidFill>
-                <a:latin typeface="Calibri"/>
-              </a:defRPr>
-            </a:pPr>
-            <a:r>
-              <a:t>1</a:t>
-            </a:r>
-          </a:p>
-        </p:txBody>
-      </p:sp>
-      <p:sp>
-        <p:nvSpPr>
-          <p:cNvPr id="9" name="TextBox 8"/>
+          <a:bodyPr rtlCol="0" anchor="ctr"/>
+          <a:lstStyle/>
+          <a:p>
+            <a:pPr algn="ctr"/>
+          </a:p>
+        </p:txBody>
+      </p:sp>
+      <p:sp>
+        <p:nvSpPr>
+          <p:cNvPr id="12" name="TextBox 11"/>
           <p:cNvSpPr txBox="1"/>
           <p:nvPr/>
         </p:nvSpPr>
         <p:spPr>
           <a:xfrm>
-            <a:off x="1476756" y="2468880"/>
-            <a:ext cx="2194560" cy="731520"/>
+            <a:off x="0" y="3"/>
+            <a:ext cx="3" cy="1"/>
           </a:xfrm>
           <a:prstGeom prst="rect">
             <a:avLst/>
@@ -3764,45 +3791,46 @@
           <a:lstStyle/>
           <a:p>
             <a:pPr algn="l">
-              <a:spcAft>
-                <a:spcPts val="400"/>
-              </a:spcAft>
-              <a:defRPr sz="1500" b="1">
-                <a:solidFill>
-                  <a:srgbClr val="1A365D"/>
+              <a:defRPr sz="1200" b="0">
+                <a:solidFill>
+                  <a:srgbClr val="8899B0"/>
                 </a:solidFill>
                 <a:latin typeface="Calibri"/>
               </a:defRPr>
             </a:pPr>
             <a:r>
-              <a:t>Pengembangan Aplikasi</a:t>
+              <a:t>Supervisi, standarisasi, dan</a:t>
             </a:r>
             <a:br/>
             <a:r>
-              <a:t>&amp; Sistem Informasi</a:t>
-            </a:r>
-          </a:p>
-        </p:txBody>
-      </p:sp>
-      <p:sp>
-        <p:nvSpPr>
-          <p:cNvPr id="10" name="Rectangle 9"/>
+              <a:t>pengelolaan SPLP</a:t>
+            </a:r>
+          </a:p>
+        </p:txBody>
+      </p:sp>
+      <p:sp>
+        <p:nvSpPr>
+          <p:cNvPr id="13" name="Rounded Rectangle 12"/>
           <p:cNvSpPr/>
           <p:nvPr/>
         </p:nvSpPr>
         <p:spPr>
           <a:xfrm>
-            <a:off x="836676" y="3383280"/>
-            <a:ext cx="2834640" cy="12700"/>
-          </a:xfrm>
-          <a:prstGeom prst="rect">
-            <a:avLst/>
+            <a:off x="4" y="1"/>
+            <a:ext cx="3" cy="3"/>
+          </a:xfrm>
+          <a:prstGeom prst="roundRect">
+            <a:avLst>
+              <a:gd name="adj" fmla="val 4000"/>
+            </a:avLst>
           </a:prstGeom>
           <a:solidFill>
-            <a:srgbClr val="DDDDDD"/>
+            <a:srgbClr val="FFFFFF"/>
           </a:solidFill>
-          <a:ln>
-            <a:noFill/>
+          <a:ln w="6350">
+            <a:solidFill>
+              <a:srgbClr val="E8EDF5"/>
+            </a:solidFill>
           </a:ln>
         </p:spPr>
         <p:style>
@@ -3829,14 +3857,57 @@
       </p:sp>
       <p:sp>
         <p:nvSpPr>
-          <p:cNvPr id="11" name="TextBox 10"/>
+          <p:cNvPr id="14" name="Rectangle 13"/>
+          <p:cNvSpPr/>
+          <p:nvPr/>
+        </p:nvSpPr>
+        <p:spPr>
+          <a:xfrm>
+            <a:off x="4" y="1"/>
+            <a:ext cx="3" cy="63500"/>
+          </a:xfrm>
+          <a:prstGeom prst="rect">
+            <a:avLst/>
+          </a:prstGeom>
+          <a:solidFill>
+            <a:srgbClr val="2563EB"/>
+          </a:solidFill>
+          <a:ln>
+            <a:noFill/>
+          </a:ln>
+        </p:spPr>
+        <p:style>
+          <a:lnRef idx="1">
+            <a:schemeClr val="accent1"/>
+          </a:lnRef>
+          <a:fillRef idx="3">
+            <a:schemeClr val="accent1"/>
+          </a:fillRef>
+          <a:effectRef idx="2">
+            <a:schemeClr val="accent1"/>
+          </a:effectRef>
+          <a:fontRef idx="minor">
+            <a:schemeClr val="lt1"/>
+          </a:fontRef>
+        </p:style>
+        <p:txBody>
+          <a:bodyPr rtlCol="0" anchor="ctr"/>
+          <a:lstStyle/>
+          <a:p>
+            <a:pPr algn="ctr"/>
+          </a:p>
+        </p:txBody>
+      </p:sp>
+      <p:sp>
+        <p:nvSpPr>
+          <p:cNvPr id="15" name="TextBox 14"/>
           <p:cNvSpPr txBox="1"/>
           <p:nvPr/>
         </p:nvSpPr>
         <p:spPr>
           <a:xfrm>
-            <a:off x="836676" y="3566160"/>
-            <a:ext cx="2834640" cy="1645920"/>
+            <a:off x="4" y="1"/>
+            <a:ext cx="0" cy="0"/>
           </a:xfrm>
           <a:prstGeom prst="rect">
             <a:avLst/>
@@ -3850,46 +3921,164 @@
           <a:lstStyle/>
           <a:p>
             <a:pPr algn="l">
-              <a:spcAft>
-                <a:spcPts val="600"/>
-              </a:spcAft>
+              <a:defRPr sz="1600" b="1">
+                <a:solidFill>
+                  <a:srgbClr val="2563EB"/>
+                </a:solidFill>
+                <a:latin typeface="Calibri"/>
+              </a:defRPr>
+            </a:pPr>
+            <a:r>
+              <a:t>02</a:t>
+            </a:r>
+          </a:p>
+        </p:txBody>
+      </p:sp>
+      <p:sp>
+        <p:nvSpPr>
+          <p:cNvPr id="16" name="TextBox 15"/>
+          <p:cNvSpPr txBox="1"/>
+          <p:nvPr/>
+        </p:nvSpPr>
+        <p:spPr>
+          <a:xfrm>
+            <a:off x="4" y="2"/>
+            <a:ext cx="3" cy="0"/>
+          </a:xfrm>
+          <a:prstGeom prst="rect">
+            <a:avLst/>
+          </a:prstGeom>
+          <a:noFill/>
+        </p:spPr>
+        <p:txBody>
+          <a:bodyPr wrap="square">
+            <a:spAutoFit/>
+          </a:bodyPr>
+          <a:lstStyle/>
+          <a:p>
+            <a:pPr algn="l">
+              <a:defRPr sz="1500" b="1">
+                <a:solidFill>
+                  <a:srgbClr val="0A1628"/>
+                </a:solidFill>
+                <a:latin typeface="Calibri"/>
+              </a:defRPr>
+            </a:pPr>
+            <a:r>
+              <a:t>Tata Kelola e-Government</a:t>
+            </a:r>
+            <a:br/>
+            <a:r>
+              <a:t>(SPBE)</a:t>
+            </a:r>
+          </a:p>
+        </p:txBody>
+      </p:sp>
+      <p:sp>
+        <p:nvSpPr>
+          <p:cNvPr id="17" name="Rectangle 16"/>
+          <p:cNvSpPr/>
+          <p:nvPr/>
+        </p:nvSpPr>
+        <p:spPr>
+          <a:xfrm>
+            <a:off x="4" y="3"/>
+            <a:ext cx="3" cy="12700"/>
+          </a:xfrm>
+          <a:prstGeom prst="rect">
+            <a:avLst/>
+          </a:prstGeom>
+          <a:solidFill>
+            <a:srgbClr val="E8EDF5"/>
+          </a:solidFill>
+          <a:ln>
+            <a:noFill/>
+          </a:ln>
+        </p:spPr>
+        <p:style>
+          <a:lnRef idx="1">
+            <a:schemeClr val="accent1"/>
+          </a:lnRef>
+          <a:fillRef idx="3">
+            <a:schemeClr val="accent1"/>
+          </a:fillRef>
+          <a:effectRef idx="2">
+            <a:schemeClr val="accent1"/>
+          </a:effectRef>
+          <a:fontRef idx="minor">
+            <a:schemeClr val="lt1"/>
+          </a:fontRef>
+        </p:style>
+        <p:txBody>
+          <a:bodyPr rtlCol="0" anchor="ctr"/>
+          <a:lstStyle/>
+          <a:p>
+            <a:pPr algn="ctr"/>
+          </a:p>
+        </p:txBody>
+      </p:sp>
+      <p:sp>
+        <p:nvSpPr>
+          <p:cNvPr id="18" name="TextBox 17"/>
+          <p:cNvSpPr txBox="1"/>
+          <p:nvPr/>
+        </p:nvSpPr>
+        <p:spPr>
+          <a:xfrm>
+            <a:off x="4" y="3"/>
+            <a:ext cx="3" cy="1"/>
+          </a:xfrm>
+          <a:prstGeom prst="rect">
+            <a:avLst/>
+          </a:prstGeom>
+          <a:noFill/>
+        </p:spPr>
+        <p:txBody>
+          <a:bodyPr wrap="square">
+            <a:spAutoFit/>
+          </a:bodyPr>
+          <a:lstStyle/>
+          <a:p>
+            <a:pPr algn="l">
               <a:defRPr sz="1200" b="0">
                 <a:solidFill>
-                  <a:srgbClr val="4A5568"/>
+                  <a:srgbClr val="8899B0"/>
                 </a:solidFill>
                 <a:latin typeface="Calibri"/>
               </a:defRPr>
             </a:pPr>
             <a:r>
-              <a:t>Supervisi, standarisasi, dan pengelolaan</a:t>
+              <a:t>Strategi, roadmap, arsitektur,</a:t>
             </a:r>
             <a:br/>
             <a:r>
-              <a:t>sistem penghubung layanan pemerintah</a:t>
-            </a:r>
-          </a:p>
-        </p:txBody>
-      </p:sp>
-      <p:sp>
-        <p:nvSpPr>
-          <p:cNvPr id="12" name="Rectangle 11"/>
+              <a:t>dan kapasitas SDM &amp; GCIO</a:t>
+            </a:r>
+          </a:p>
+        </p:txBody>
+      </p:sp>
+      <p:sp>
+        <p:nvSpPr>
+          <p:cNvPr id="19" name="Rounded Rectangle 18"/>
           <p:cNvSpPr/>
           <p:nvPr/>
         </p:nvSpPr>
         <p:spPr>
           <a:xfrm>
-            <a:off x="4448556" y="2103120"/>
-            <a:ext cx="3291840" cy="3657600"/>
-          </a:xfrm>
-          <a:prstGeom prst="rect">
-            <a:avLst/>
+            <a:off x="8" y="1"/>
+            <a:ext cx="3" cy="3"/>
+          </a:xfrm>
+          <a:prstGeom prst="roundRect">
+            <a:avLst>
+              <a:gd name="adj" fmla="val 4000"/>
+            </a:avLst>
           </a:prstGeom>
           <a:solidFill>
             <a:srgbClr val="FFFFFF"/>
           </a:solidFill>
           <a:ln w="6350">
             <a:solidFill>
-              <a:srgbClr val="DDDDDD"/>
+              <a:srgbClr val="E8EDF5"/>
             </a:solidFill>
           </a:ln>
         </p:spPr>
@@ -3917,20 +4106,20 @@
       </p:sp>
       <p:sp>
         <p:nvSpPr>
-          <p:cNvPr id="13" name="Rectangle 12"/>
+          <p:cNvPr id="20" name="Rectangle 19"/>
           <p:cNvSpPr/>
           <p:nvPr/>
         </p:nvSpPr>
         <p:spPr>
           <a:xfrm>
-            <a:off x="4448556" y="2103120"/>
-            <a:ext cx="3291840" cy="63500"/>
+            <a:off x="8" y="1"/>
+            <a:ext cx="3" cy="63500"/>
           </a:xfrm>
           <a:prstGeom prst="rect">
             <a:avLst/>
           </a:prstGeom>
           <a:solidFill>
-            <a:srgbClr val="2B6CB0"/>
+            <a:srgbClr val="0B7C72"/>
           </a:solidFill>
           <a:ln>
             <a:noFill/>
@@ -3960,20 +4149,96 @@
       </p:sp>
       <p:sp>
         <p:nvSpPr>
-          <p:cNvPr id="14" name="Oval 13"/>
+          <p:cNvPr id="21" name="TextBox 20"/>
+          <p:cNvSpPr txBox="1"/>
+          <p:nvPr/>
+        </p:nvSpPr>
+        <p:spPr>
+          <a:xfrm>
+            <a:off x="9" y="1"/>
+            <a:ext cx="0" cy="0"/>
+          </a:xfrm>
+          <a:prstGeom prst="rect">
+            <a:avLst/>
+          </a:prstGeom>
+          <a:noFill/>
+        </p:spPr>
+        <p:txBody>
+          <a:bodyPr wrap="square">
+            <a:spAutoFit/>
+          </a:bodyPr>
+          <a:lstStyle/>
+          <a:p>
+            <a:pPr algn="l">
+              <a:defRPr sz="1600" b="1">
+                <a:solidFill>
+                  <a:srgbClr val="0B7C72"/>
+                </a:solidFill>
+                <a:latin typeface="Calibri"/>
+              </a:defRPr>
+            </a:pPr>
+            <a:r>
+              <a:t>03</a:t>
+            </a:r>
+          </a:p>
+        </p:txBody>
+      </p:sp>
+      <p:sp>
+        <p:nvSpPr>
+          <p:cNvPr id="22" name="TextBox 21"/>
+          <p:cNvSpPr txBox="1"/>
+          <p:nvPr/>
+        </p:nvSpPr>
+        <p:spPr>
+          <a:xfrm>
+            <a:off x="9" y="2"/>
+            <a:ext cx="3" cy="0"/>
+          </a:xfrm>
+          <a:prstGeom prst="rect">
+            <a:avLst/>
+          </a:prstGeom>
+          <a:noFill/>
+        </p:spPr>
+        <p:txBody>
+          <a:bodyPr wrap="square">
+            <a:spAutoFit/>
+          </a:bodyPr>
+          <a:lstStyle/>
+          <a:p>
+            <a:pPr algn="l">
+              <a:defRPr sz="1500" b="1">
+                <a:solidFill>
+                  <a:srgbClr val="0A1628"/>
+                </a:solidFill>
+                <a:latin typeface="Calibri"/>
+              </a:defRPr>
+            </a:pPr>
+            <a:r>
+              <a:t>Pengembangan Kota Cerdas</a:t>
+            </a:r>
+            <a:br/>
+            <a:r>
+              <a:t>(Smart City)</a:t>
+            </a:r>
+          </a:p>
+        </p:txBody>
+      </p:sp>
+      <p:sp>
+        <p:nvSpPr>
+          <p:cNvPr id="23" name="Rectangle 22"/>
           <p:cNvSpPr/>
           <p:nvPr/>
         </p:nvSpPr>
         <p:spPr>
           <a:xfrm>
-            <a:off x="4677156" y="2468880"/>
-            <a:ext cx="502920" cy="502920"/>
-          </a:xfrm>
-          <a:prstGeom prst="ellipse">
+            <a:off x="9" y="3"/>
+            <a:ext cx="3" cy="12700"/>
+          </a:xfrm>
+          <a:prstGeom prst="rect">
             <a:avLst/>
           </a:prstGeom>
           <a:solidFill>
-            <a:srgbClr val="2B6CB0"/>
+            <a:srgbClr val="E8EDF5"/>
           </a:solidFill>
           <a:ln>
             <a:noFill/>
@@ -3994,39 +4259,23 @@
           </a:fontRef>
         </p:style>
         <p:txBody>
-          <a:bodyPr rtlCol="0" anchor="ctr" wrap="none"/>
-          <a:lstStyle/>
-          <a:p>
-            <a:pPr algn="ctr">
-              <a:spcBef>
-                <a:spcPts val="0"/>
-              </a:spcBef>
-              <a:spcAft>
-                <a:spcPts val="0"/>
-              </a:spcAft>
-              <a:defRPr sz="1800" b="1">
-                <a:solidFill>
-                  <a:srgbClr val="FFFFFF"/>
-                </a:solidFill>
-                <a:latin typeface="Calibri"/>
-              </a:defRPr>
-            </a:pPr>
-            <a:r>
-              <a:t>2</a:t>
-            </a:r>
-          </a:p>
-        </p:txBody>
-      </p:sp>
-      <p:sp>
-        <p:nvSpPr>
-          <p:cNvPr id="15" name="TextBox 14"/>
+          <a:bodyPr rtlCol="0" anchor="ctr"/>
+          <a:lstStyle/>
+          <a:p>
+            <a:pPr algn="ctr"/>
+          </a:p>
+        </p:txBody>
+      </p:sp>
+      <p:sp>
+        <p:nvSpPr>
+          <p:cNvPr id="24" name="TextBox 23"/>
           <p:cNvSpPr txBox="1"/>
           <p:nvPr/>
         </p:nvSpPr>
         <p:spPr>
           <a:xfrm>
-            <a:off x="5317236" y="2468880"/>
-            <a:ext cx="2194560" cy="731520"/>
+            <a:off x="9" y="3"/>
+            <a:ext cx="3" cy="1"/>
           </a:xfrm>
           <a:prstGeom prst="rect">
             <a:avLst/>
@@ -4040,42 +4289,39 @@
           <a:lstStyle/>
           <a:p>
             <a:pPr algn="l">
-              <a:spcAft>
-                <a:spcPts val="400"/>
-              </a:spcAft>
-              <a:defRPr sz="1500" b="1">
-                <a:solidFill>
-                  <a:srgbClr val="1A365D"/>
+              <a:defRPr sz="1200" b="0">
+                <a:solidFill>
+                  <a:srgbClr val="8899B0"/>
                 </a:solidFill>
                 <a:latin typeface="Calibri"/>
               </a:defRPr>
             </a:pPr>
             <a:r>
-              <a:t>Tata Kelola e-Government</a:t>
+              <a:t>Masterplan, kolaborasi lintas</a:t>
             </a:r>
             <a:br/>
             <a:r>
-              <a:t>(SPBE)</a:t>
-            </a:r>
-          </a:p>
-        </p:txBody>
-      </p:sp>
-      <p:sp>
-        <p:nvSpPr>
-          <p:cNvPr id="16" name="Rectangle 15"/>
+              <a:t>sektor, dan evaluasi program</a:t>
+            </a:r>
+          </a:p>
+        </p:txBody>
+      </p:sp>
+      <p:sp>
+        <p:nvSpPr>
+          <p:cNvPr id="25" name="Rectangle 24"/>
           <p:cNvSpPr/>
           <p:nvPr/>
         </p:nvSpPr>
         <p:spPr>
           <a:xfrm>
-            <a:off x="4677156" y="3383280"/>
-            <a:ext cx="2834640" cy="12700"/>
+            <a:off x="0" y="7"/>
+            <a:ext cx="13" cy="25400"/>
           </a:xfrm>
           <a:prstGeom prst="rect">
             <a:avLst/>
           </a:prstGeom>
           <a:solidFill>
-            <a:srgbClr val="DDDDDD"/>
+            <a:srgbClr val="0A1628"/>
           </a:solidFill>
           <a:ln>
             <a:noFill/>
@@ -4105,14 +4351,14 @@
       </p:sp>
       <p:sp>
         <p:nvSpPr>
-          <p:cNvPr id="17" name="TextBox 16"/>
+          <p:cNvPr id="26" name="TextBox 25"/>
           <p:cNvSpPr txBox="1"/>
           <p:nvPr/>
         </p:nvSpPr>
         <p:spPr>
           <a:xfrm>
-            <a:off x="4677156" y="3566160"/>
-            <a:ext cx="2834640" cy="1645920"/>
+            <a:off x="0" y="7"/>
+            <a:ext cx="4" cy="0"/>
           </a:xfrm>
           <a:prstGeom prst="rect">
             <a:avLst/>
@@ -4126,183 +4372,29 @@
           <a:lstStyle/>
           <a:p>
             <a:pPr algn="l">
-              <a:spcAft>
-                <a:spcPts val="600"/>
-              </a:spcAft>
-              <a:defRPr sz="1200" b="0">
-                <a:solidFill>
-                  <a:srgbClr val="4A5568"/>
+              <a:defRPr sz="700" b="0">
+                <a:solidFill>
+                  <a:srgbClr val="64748B"/>
                 </a:solidFill>
                 <a:latin typeface="Calibri"/>
               </a:defRPr>
             </a:pPr>
             <a:r>
-              <a:t>Strategi, roadmap, arsitektur, dan</a:t>
-            </a:r>
-            <a:br/>
-            <a:r>
-              <a:t>peningkatan kapasitas SDM &amp; GCIO</a:t>
-            </a:r>
-          </a:p>
-        </p:txBody>
-      </p:sp>
-      <p:sp>
-        <p:nvSpPr>
-          <p:cNvPr id="18" name="Rectangle 17"/>
-          <p:cNvSpPr/>
-          <p:nvPr/>
-        </p:nvSpPr>
-        <p:spPr>
-          <a:xfrm>
-            <a:off x="8289036" y="2103120"/>
-            <a:ext cx="3291840" cy="3657600"/>
-          </a:xfrm>
-          <a:prstGeom prst="rect">
-            <a:avLst/>
-          </a:prstGeom>
-          <a:solidFill>
-            <a:srgbClr val="FFFFFF"/>
-          </a:solidFill>
-          <a:ln w="6350">
-            <a:solidFill>
-              <a:srgbClr val="DDDDDD"/>
-            </a:solidFill>
-          </a:ln>
-        </p:spPr>
-        <p:style>
-          <a:lnRef idx="1">
-            <a:schemeClr val="accent1"/>
-          </a:lnRef>
-          <a:fillRef idx="3">
-            <a:schemeClr val="accent1"/>
-          </a:fillRef>
-          <a:effectRef idx="2">
-            <a:schemeClr val="accent1"/>
-          </a:effectRef>
-          <a:fontRef idx="minor">
-            <a:schemeClr val="lt1"/>
-          </a:fontRef>
-        </p:style>
-        <p:txBody>
-          <a:bodyPr rtlCol="0" anchor="ctr"/>
-          <a:lstStyle/>
-          <a:p>
-            <a:pPr algn="ctr"/>
-          </a:p>
-        </p:txBody>
-      </p:sp>
-      <p:sp>
-        <p:nvSpPr>
-          <p:cNvPr id="19" name="Rectangle 18"/>
-          <p:cNvSpPr/>
-          <p:nvPr/>
-        </p:nvSpPr>
-        <p:spPr>
-          <a:xfrm>
-            <a:off x="8289036" y="2103120"/>
-            <a:ext cx="3291840" cy="63500"/>
-          </a:xfrm>
-          <a:prstGeom prst="rect">
-            <a:avLst/>
-          </a:prstGeom>
-          <a:solidFill>
-            <a:srgbClr val="0B839F"/>
-          </a:solidFill>
-          <a:ln>
-            <a:noFill/>
-          </a:ln>
-        </p:spPr>
-        <p:style>
-          <a:lnRef idx="1">
-            <a:schemeClr val="accent1"/>
-          </a:lnRef>
-          <a:fillRef idx="3">
-            <a:schemeClr val="accent1"/>
-          </a:fillRef>
-          <a:effectRef idx="2">
-            <a:schemeClr val="accent1"/>
-          </a:effectRef>
-          <a:fontRef idx="minor">
-            <a:schemeClr val="lt1"/>
-          </a:fontRef>
-        </p:style>
-        <p:txBody>
-          <a:bodyPr rtlCol="0" anchor="ctr"/>
-          <a:lstStyle/>
-          <a:p>
-            <a:pPr algn="ctr"/>
-          </a:p>
-        </p:txBody>
-      </p:sp>
-      <p:sp>
-        <p:nvSpPr>
-          <p:cNvPr id="20" name="Oval 19"/>
-          <p:cNvSpPr/>
-          <p:nvPr/>
-        </p:nvSpPr>
-        <p:spPr>
-          <a:xfrm>
-            <a:off x="8517636" y="2468880"/>
-            <a:ext cx="502920" cy="502920"/>
-          </a:xfrm>
-          <a:prstGeom prst="ellipse">
-            <a:avLst/>
-          </a:prstGeom>
-          <a:solidFill>
-            <a:srgbClr val="0B839F"/>
-          </a:solidFill>
-          <a:ln>
-            <a:noFill/>
-          </a:ln>
-        </p:spPr>
-        <p:style>
-          <a:lnRef idx="1">
-            <a:schemeClr val="accent1"/>
-          </a:lnRef>
-          <a:fillRef idx="3">
-            <a:schemeClr val="accent1"/>
-          </a:fillRef>
-          <a:effectRef idx="2">
-            <a:schemeClr val="accent1"/>
-          </a:effectRef>
-          <a:fontRef idx="minor">
-            <a:schemeClr val="lt1"/>
-          </a:fontRef>
-        </p:style>
-        <p:txBody>
-          <a:bodyPr rtlCol="0" anchor="ctr" wrap="none"/>
-          <a:lstStyle/>
-          <a:p>
-            <a:pPr algn="ctr">
-              <a:spcBef>
-                <a:spcPts val="0"/>
-              </a:spcBef>
-              <a:spcAft>
-                <a:spcPts val="0"/>
-              </a:spcAft>
-              <a:defRPr sz="1800" b="1">
-                <a:solidFill>
-                  <a:srgbClr val="FFFFFF"/>
-                </a:solidFill>
-                <a:latin typeface="Calibri"/>
-              </a:defRPr>
-            </a:pPr>
-            <a:r>
-              <a:t>3</a:t>
-            </a:r>
-          </a:p>
-        </p:txBody>
-      </p:sp>
-      <p:sp>
-        <p:nvSpPr>
-          <p:cNvPr id="21" name="TextBox 20"/>
+              <a:t>Sumber: RESUME TUPOKSI egov.docx</a:t>
+            </a:r>
+          </a:p>
+        </p:txBody>
+      </p:sp>
+      <p:sp>
+        <p:nvSpPr>
+          <p:cNvPr id="27" name="TextBox 26"/>
           <p:cNvSpPr txBox="1"/>
           <p:nvPr/>
         </p:nvSpPr>
         <p:spPr>
           <a:xfrm>
-            <a:off x="9157716" y="2468880"/>
-            <a:ext cx="2194560" cy="731520"/>
+            <a:off x="12" y="7"/>
+            <a:ext cx="0" cy="0"/>
           </a:xfrm>
           <a:prstGeom prst="rect">
             <a:avLst/>
@@ -4315,231 +4407,16 @@
           </a:bodyPr>
           <a:lstStyle/>
           <a:p>
-            <a:pPr algn="l">
-              <a:spcAft>
-                <a:spcPts val="400"/>
-              </a:spcAft>
-              <a:defRPr sz="1500" b="1">
-                <a:solidFill>
-                  <a:srgbClr val="1A365D"/>
+            <a:pPr algn="r">
+              <a:defRPr sz="800" b="0">
+                <a:solidFill>
+                  <a:srgbClr val="64748B"/>
                 </a:solidFill>
                 <a:latin typeface="Calibri"/>
               </a:defRPr>
             </a:pPr>
             <a:r>
-              <a:t>Pengembangan Kota Cerdas</a:t>
-            </a:r>
-            <a:br/>
-            <a:r>
-              <a:t>(Smart City)</a:t>
-            </a:r>
-          </a:p>
-        </p:txBody>
-      </p:sp>
-      <p:sp>
-        <p:nvSpPr>
-          <p:cNvPr id="22" name="Rectangle 21"/>
-          <p:cNvSpPr/>
-          <p:nvPr/>
-        </p:nvSpPr>
-        <p:spPr>
-          <a:xfrm>
-            <a:off x="8517636" y="3383280"/>
-            <a:ext cx="2834640" cy="12700"/>
-          </a:xfrm>
-          <a:prstGeom prst="rect">
-            <a:avLst/>
-          </a:prstGeom>
-          <a:solidFill>
-            <a:srgbClr val="DDDDDD"/>
-          </a:solidFill>
-          <a:ln>
-            <a:noFill/>
-          </a:ln>
-        </p:spPr>
-        <p:style>
-          <a:lnRef idx="1">
-            <a:schemeClr val="accent1"/>
-          </a:lnRef>
-          <a:fillRef idx="3">
-            <a:schemeClr val="accent1"/>
-          </a:fillRef>
-          <a:effectRef idx="2">
-            <a:schemeClr val="accent1"/>
-          </a:effectRef>
-          <a:fontRef idx="minor">
-            <a:schemeClr val="lt1"/>
-          </a:fontRef>
-        </p:style>
-        <p:txBody>
-          <a:bodyPr rtlCol="0" anchor="ctr"/>
-          <a:lstStyle/>
-          <a:p>
-            <a:pPr algn="ctr"/>
-          </a:p>
-        </p:txBody>
-      </p:sp>
-      <p:sp>
-        <p:nvSpPr>
-          <p:cNvPr id="23" name="TextBox 22"/>
-          <p:cNvSpPr txBox="1"/>
-          <p:nvPr/>
-        </p:nvSpPr>
-        <p:spPr>
-          <a:xfrm>
-            <a:off x="8517636" y="3566160"/>
-            <a:ext cx="2834640" cy="1645920"/>
-          </a:xfrm>
-          <a:prstGeom prst="rect">
-            <a:avLst/>
-          </a:prstGeom>
-          <a:noFill/>
-        </p:spPr>
-        <p:txBody>
-          <a:bodyPr wrap="square">
-            <a:spAutoFit/>
-          </a:bodyPr>
-          <a:lstStyle/>
-          <a:p>
-            <a:pPr algn="l">
-              <a:spcAft>
-                <a:spcPts val="600"/>
-              </a:spcAft>
-              <a:defRPr sz="1200" b="0">
-                <a:solidFill>
-                  <a:srgbClr val="4A5568"/>
-                </a:solidFill>
-                <a:latin typeface="Calibri"/>
-              </a:defRPr>
-            </a:pPr>
-            <a:r>
-              <a:t>Masterplan, kolaborasi lintas sektor,</a:t>
-            </a:r>
-            <a:br/>
-            <a:r>
-              <a:t>dan evaluasi program kota cerdas</a:t>
-            </a:r>
-          </a:p>
-        </p:txBody>
-      </p:sp>
-      <p:sp>
-        <p:nvSpPr>
-          <p:cNvPr id="24" name="Rectangle 23"/>
-          <p:cNvSpPr/>
-          <p:nvPr/>
-        </p:nvSpPr>
-        <p:spPr>
-          <a:xfrm>
-            <a:off x="0" y="6446520"/>
-            <a:ext cx="12188952" cy="411480"/>
-          </a:xfrm>
-          <a:prstGeom prst="rect">
-            <a:avLst/>
-          </a:prstGeom>
-          <a:solidFill>
-            <a:srgbClr val="FAFAFA"/>
-          </a:solidFill>
-          <a:ln>
-            <a:noFill/>
-          </a:ln>
-        </p:spPr>
-        <p:style>
-          <a:lnRef idx="1">
-            <a:schemeClr val="accent1"/>
-          </a:lnRef>
-          <a:fillRef idx="3">
-            <a:schemeClr val="accent1"/>
-          </a:fillRef>
-          <a:effectRef idx="2">
-            <a:schemeClr val="accent1"/>
-          </a:effectRef>
-          <a:fontRef idx="minor">
-            <a:schemeClr val="lt1"/>
-          </a:fontRef>
-        </p:style>
-        <p:txBody>
-          <a:bodyPr rtlCol="0" anchor="ctr"/>
-          <a:lstStyle/>
-          <a:p>
-            <a:pPr algn="ctr"/>
-          </a:p>
-        </p:txBody>
-      </p:sp>
-      <p:sp>
-        <p:nvSpPr>
-          <p:cNvPr id="25" name="Rectangle 24"/>
-          <p:cNvSpPr/>
-          <p:nvPr/>
-        </p:nvSpPr>
-        <p:spPr>
-          <a:xfrm>
-            <a:off x="0" y="6446520"/>
-            <a:ext cx="12188952" cy="12700"/>
-          </a:xfrm>
-          <a:prstGeom prst="rect">
-            <a:avLst/>
-          </a:prstGeom>
-          <a:solidFill>
-            <a:srgbClr val="DDDDDD"/>
-          </a:solidFill>
-          <a:ln>
-            <a:noFill/>
-          </a:ln>
-        </p:spPr>
-        <p:style>
-          <a:lnRef idx="1">
-            <a:schemeClr val="accent1"/>
-          </a:lnRef>
-          <a:fillRef idx="3">
-            <a:schemeClr val="accent1"/>
-          </a:fillRef>
-          <a:effectRef idx="2">
-            <a:schemeClr val="accent1"/>
-          </a:effectRef>
-          <a:fontRef idx="minor">
-            <a:schemeClr val="lt1"/>
-          </a:fontRef>
-        </p:style>
-        <p:txBody>
-          <a:bodyPr rtlCol="0" anchor="ctr"/>
-          <a:lstStyle/>
-          <a:p>
-            <a:pPr algn="ctr"/>
-          </a:p>
-        </p:txBody>
-      </p:sp>
-      <p:sp>
-        <p:nvSpPr>
-          <p:cNvPr id="26" name="TextBox 25"/>
-          <p:cNvSpPr txBox="1"/>
-          <p:nvPr/>
-        </p:nvSpPr>
-        <p:spPr>
-          <a:xfrm>
-            <a:off x="822960" y="6510528"/>
-            <a:ext cx="10543032" cy="274320"/>
-          </a:xfrm>
-          <a:prstGeom prst="rect">
-            <a:avLst/>
-          </a:prstGeom>
-          <a:noFill/>
-        </p:spPr>
-        <p:txBody>
-          <a:bodyPr wrap="square">
-            <a:spAutoFit/>
-          </a:bodyPr>
-          <a:lstStyle/>
-          <a:p>
-            <a:pPr algn="l">
-              <a:defRPr sz="900" b="0">
-                <a:solidFill>
-                  <a:srgbClr val="8B97A8"/>
-                </a:solidFill>
-                <a:latin typeface="Calibri"/>
-              </a:defRPr>
-            </a:pPr>
-            <a:r>
-              <a:t>Bidang e-Government — Diskominfostandi Kota Bekasi</a:t>
+              <a:t>2</a:t>
             </a:r>
           </a:p>
         </p:txBody>
@@ -4555,6 +4432,14 @@
 <file path=ppt/slides/slide3.xml><?xml version="1.0" encoding="utf-8"?>
 <p:sld xmlns:a="http://schemas.openxmlformats.org/drawingml/2006/main" xmlns:p="http://schemas.openxmlformats.org/presentationml/2006/main" xmlns:r="http://schemas.openxmlformats.org/officeDocument/2006/relationships">
   <p:cSld>
+    <p:bg>
+      <p:bgPr>
+        <a:solidFill>
+          <a:srgbClr val="F5F7FA"/>
+        </a:solidFill>
+        <a:effectLst/>
+      </p:bgPr>
+    </p:bg>
     <p:spTree>
       <p:nvGrpSpPr>
         <p:cNvPr id="1" name=""/>
@@ -4571,13 +4456,13 @@
         <p:spPr>
           <a:xfrm>
             <a:off x="0" y="0"/>
-            <a:ext cx="12188952" cy="50800"/>
+            <a:ext cx="13" cy="38100"/>
           </a:xfrm>
           <a:prstGeom prst="rect">
             <a:avLst/>
           </a:prstGeom>
           <a:solidFill>
-            <a:srgbClr val="D69E2E"/>
+            <a:srgbClr val="C8962E"/>
           </a:solidFill>
           <a:ln>
             <a:noFill/>
@@ -4607,56 +4492,20 @@
       </p:sp>
       <p:sp>
         <p:nvSpPr>
-          <p:cNvPr id="3" name="TextBox 2"/>
-          <p:cNvSpPr txBox="1"/>
-          <p:nvPr/>
-        </p:nvSpPr>
-        <p:spPr>
-          <a:xfrm>
-            <a:off x="822960" y="457200"/>
-            <a:ext cx="10543032" cy="640080"/>
-          </a:xfrm>
-          <a:prstGeom prst="rect">
-            <a:avLst/>
-          </a:prstGeom>
-          <a:noFill/>
-        </p:spPr>
-        <p:txBody>
-          <a:bodyPr wrap="square">
-            <a:spAutoFit/>
-          </a:bodyPr>
-          <a:lstStyle/>
-          <a:p>
-            <a:pPr algn="l">
-              <a:defRPr sz="3000" b="1">
-                <a:solidFill>
-                  <a:srgbClr val="1A365D"/>
-                </a:solidFill>
-                <a:latin typeface="Calibri"/>
-              </a:defRPr>
-            </a:pPr>
-            <a:r>
-              <a:t>Empat Sistem &amp; Aplikasi Strategis yang Dikelola</a:t>
-            </a:r>
-          </a:p>
-        </p:txBody>
-      </p:sp>
-      <p:sp>
-        <p:nvSpPr>
-          <p:cNvPr id="4" name="Rectangle 3"/>
+          <p:cNvPr id="3" name="Rectangle 2"/>
           <p:cNvSpPr/>
           <p:nvPr/>
         </p:nvSpPr>
         <p:spPr>
           <a:xfrm>
-            <a:off x="822960" y="1143000"/>
-            <a:ext cx="1371600" cy="25400"/>
+            <a:off x="0" y="38100"/>
+            <a:ext cx="13" cy="822959"/>
           </a:xfrm>
           <a:prstGeom prst="rect">
             <a:avLst/>
           </a:prstGeom>
           <a:solidFill>
-            <a:srgbClr val="D69E2E"/>
+            <a:srgbClr val="0A1628"/>
           </a:solidFill>
           <a:ln>
             <a:noFill/>
@@ -4686,14 +4535,57 @@
       </p:sp>
       <p:sp>
         <p:nvSpPr>
+          <p:cNvPr id="4" name="Rectangle 3"/>
+          <p:cNvSpPr/>
+          <p:nvPr/>
+        </p:nvSpPr>
+        <p:spPr>
+          <a:xfrm>
+            <a:off x="0" y="0"/>
+            <a:ext cx="0" cy="0"/>
+          </a:xfrm>
+          <a:prstGeom prst="rect">
+            <a:avLst/>
+          </a:prstGeom>
+          <a:solidFill>
+            <a:srgbClr val="C8962E"/>
+          </a:solidFill>
+          <a:ln>
+            <a:noFill/>
+          </a:ln>
+        </p:spPr>
+        <p:style>
+          <a:lnRef idx="1">
+            <a:schemeClr val="accent1"/>
+          </a:lnRef>
+          <a:fillRef idx="3">
+            <a:schemeClr val="accent1"/>
+          </a:fillRef>
+          <a:effectRef idx="2">
+            <a:schemeClr val="accent1"/>
+          </a:effectRef>
+          <a:fontRef idx="minor">
+            <a:schemeClr val="lt1"/>
+          </a:fontRef>
+        </p:style>
+        <p:txBody>
+          <a:bodyPr rtlCol="0" anchor="ctr"/>
+          <a:lstStyle/>
+          <a:p>
+            <a:pPr algn="ctr"/>
+          </a:p>
+        </p:txBody>
+      </p:sp>
+      <p:sp>
+        <p:nvSpPr>
           <p:cNvPr id="5" name="TextBox 4"/>
           <p:cNvSpPr txBox="1"/>
           <p:nvPr/>
         </p:nvSpPr>
         <p:spPr>
           <a:xfrm>
-            <a:off x="822960" y="1234440"/>
-            <a:ext cx="10543032" cy="365760"/>
+            <a:off x="0" y="0"/>
+            <a:ext cx="11" cy="0"/>
           </a:xfrm>
           <a:prstGeom prst="rect">
             <a:avLst/>
@@ -4707,14 +4599,50 @@
           <a:lstStyle/>
           <a:p>
             <a:pPr algn="l">
-              <a:defRPr sz="1400" b="0">
-                <a:solidFill>
-                  <a:srgbClr val="4A5568"/>
+              <a:defRPr sz="2000" b="1">
+                <a:solidFill>
+                  <a:srgbClr val="FFFFFF"/>
                 </a:solidFill>
                 <a:latin typeface="Calibri"/>
               </a:defRPr>
             </a:pPr>
             <a:r>
+              <a:t>Empat Sistem &amp; Aplikasi Strategis yang Dikelola</a:t>
+            </a:r>
+          </a:p>
+        </p:txBody>
+      </p:sp>
+      <p:sp>
+        <p:nvSpPr>
+          <p:cNvPr id="6" name="TextBox 5"/>
+          <p:cNvSpPr txBox="1"/>
+          <p:nvPr/>
+        </p:nvSpPr>
+        <p:spPr>
+          <a:xfrm>
+            <a:off x="0" y="0"/>
+            <a:ext cx="11" cy="0"/>
+          </a:xfrm>
+          <a:prstGeom prst="rect">
+            <a:avLst/>
+          </a:prstGeom>
+          <a:noFill/>
+        </p:spPr>
+        <p:txBody>
+          <a:bodyPr wrap="square">
+            <a:spAutoFit/>
+          </a:bodyPr>
+          <a:lstStyle/>
+          <a:p>
+            <a:pPr algn="l">
+              <a:defRPr sz="900" b="0">
+                <a:solidFill>
+                  <a:srgbClr val="64748B"/>
+                </a:solidFill>
+                <a:latin typeface="Calibri"/>
+              </a:defRPr>
+            </a:pPr>
+            <a:r>
               <a:t>Layanan digital yang dioperasikan dan dipelihara oleh Bidang e-Government</a:t>
             </a:r>
           </a:p>
@@ -4722,24 +4650,26 @@
       </p:sp>
       <p:sp>
         <p:nvSpPr>
-          <p:cNvPr id="6" name="Rectangle 5"/>
+          <p:cNvPr id="7" name="Rounded Rectangle 6"/>
           <p:cNvSpPr/>
           <p:nvPr/>
         </p:nvSpPr>
         <p:spPr>
           <a:xfrm>
-            <a:off x="745236" y="2103120"/>
-            <a:ext cx="5029200" cy="2011680"/>
-          </a:xfrm>
-          <a:prstGeom prst="rect">
-            <a:avLst/>
+            <a:off x="0" y="1"/>
+            <a:ext cx="5" cy="1"/>
+          </a:xfrm>
+          <a:prstGeom prst="roundRect">
+            <a:avLst>
+              <a:gd name="adj" fmla="val 4000"/>
+            </a:avLst>
           </a:prstGeom>
           <a:solidFill>
             <a:srgbClr val="FFFFFF"/>
           </a:solidFill>
           <a:ln w="6350">
             <a:solidFill>
-              <a:srgbClr val="DDDDDD"/>
+              <a:srgbClr val="E8EDF5"/>
             </a:solidFill>
           </a:ln>
         </p:spPr>
@@ -4767,20 +4697,20 @@
       </p:sp>
       <p:sp>
         <p:nvSpPr>
-          <p:cNvPr id="7" name="Rectangle 6"/>
+          <p:cNvPr id="8" name="Rectangle 7"/>
           <p:cNvSpPr/>
           <p:nvPr/>
         </p:nvSpPr>
         <p:spPr>
           <a:xfrm>
-            <a:off x="745236" y="2103120"/>
-            <a:ext cx="76200" cy="2011680"/>
+            <a:off x="0" y="1"/>
+            <a:ext cx="63500" cy="1"/>
           </a:xfrm>
           <a:prstGeom prst="rect">
             <a:avLst/>
           </a:prstGeom>
           <a:solidFill>
-            <a:srgbClr val="0B839F"/>
+            <a:srgbClr val="0A1628"/>
           </a:solidFill>
           <a:ln>
             <a:noFill/>
@@ -4810,23 +4740,99 @@
       </p:sp>
       <p:sp>
         <p:nvSpPr>
-          <p:cNvPr id="8" name="Oval 7"/>
+          <p:cNvPr id="9" name="TextBox 8"/>
+          <p:cNvSpPr txBox="1"/>
+          <p:nvPr/>
+        </p:nvSpPr>
+        <p:spPr>
+          <a:xfrm>
+            <a:off x="0" y="1"/>
+            <a:ext cx="5" cy="0"/>
+          </a:xfrm>
+          <a:prstGeom prst="rect">
+            <a:avLst/>
+          </a:prstGeom>
+          <a:noFill/>
+        </p:spPr>
+        <p:txBody>
+          <a:bodyPr wrap="square">
+            <a:spAutoFit/>
+          </a:bodyPr>
+          <a:lstStyle/>
+          <a:p>
+            <a:pPr algn="l">
+              <a:defRPr sz="1700" b="1">
+                <a:solidFill>
+                  <a:srgbClr val="0A1628"/>
+                </a:solidFill>
+                <a:latin typeface="Calibri"/>
+              </a:defRPr>
+            </a:pPr>
+            <a:r>
+              <a:t>Web Pemerintah Kota</a:t>
+            </a:r>
+          </a:p>
+        </p:txBody>
+      </p:sp>
+      <p:sp>
+        <p:nvSpPr>
+          <p:cNvPr id="10" name="TextBox 9"/>
+          <p:cNvSpPr txBox="1"/>
+          <p:nvPr/>
+        </p:nvSpPr>
+        <p:spPr>
+          <a:xfrm>
+            <a:off x="0" y="1"/>
+            <a:ext cx="5" cy="0"/>
+          </a:xfrm>
+          <a:prstGeom prst="rect">
+            <a:avLst/>
+          </a:prstGeom>
+          <a:noFill/>
+        </p:spPr>
+        <p:txBody>
+          <a:bodyPr wrap="square">
+            <a:spAutoFit/>
+          </a:bodyPr>
+          <a:lstStyle/>
+          <a:p>
+            <a:pPr algn="l">
+              <a:defRPr sz="1300" b="0">
+                <a:solidFill>
+                  <a:srgbClr val="1A1A2E"/>
+                </a:solidFill>
+                <a:latin typeface="Calibri"/>
+              </a:defRPr>
+            </a:pPr>
+            <a:r>
+              <a:t>Admin Teknis Web Pemkot &amp; Web Diskominfo</a:t>
+            </a:r>
+          </a:p>
+        </p:txBody>
+      </p:sp>
+      <p:sp>
+        <p:nvSpPr>
+          <p:cNvPr id="11" name="Rounded Rectangle 10"/>
           <p:cNvSpPr/>
           <p:nvPr/>
         </p:nvSpPr>
         <p:spPr>
           <a:xfrm>
-            <a:off x="1065276" y="2560320"/>
-            <a:ext cx="640080" cy="640080"/>
-          </a:xfrm>
-          <a:prstGeom prst="ellipse">
-            <a:avLst/>
+            <a:off x="6" y="1"/>
+            <a:ext cx="5" cy="1"/>
+          </a:xfrm>
+          <a:prstGeom prst="roundRect">
+            <a:avLst>
+              <a:gd name="adj" fmla="val 4000"/>
+            </a:avLst>
           </a:prstGeom>
           <a:solidFill>
-            <a:srgbClr val="0B839F"/>
+            <a:srgbClr val="FFFFFF"/>
           </a:solidFill>
-          <a:ln>
-            <a:noFill/>
+          <a:ln w="6350">
+            <a:solidFill>
+              <a:srgbClr val="E8EDF5"/>
+            </a:solidFill>
           </a:ln>
         </p:spPr>
         <p:style>
@@ -4844,33 +4850,66 @@
           </a:fontRef>
         </p:style>
         <p:txBody>
-          <a:bodyPr rtlCol="0" anchor="ctr" wrap="none"/>
-          <a:lstStyle/>
-          <a:p>
-            <a:pPr algn="ctr">
-              <a:defRPr sz="2200" b="1">
-                <a:solidFill>
-                  <a:srgbClr val="FFFFFF"/>
-                </a:solidFill>
-                <a:latin typeface="Calibri"/>
-              </a:defRPr>
-            </a:pPr>
-            <a:r>
-              <a:t>W</a:t>
-            </a:r>
-          </a:p>
-        </p:txBody>
-      </p:sp>
-      <p:sp>
-        <p:nvSpPr>
-          <p:cNvPr id="9" name="TextBox 8"/>
+          <a:bodyPr rtlCol="0" anchor="ctr"/>
+          <a:lstStyle/>
+          <a:p>
+            <a:pPr algn="ctr"/>
+          </a:p>
+        </p:txBody>
+      </p:sp>
+      <p:sp>
+        <p:nvSpPr>
+          <p:cNvPr id="12" name="Rectangle 11"/>
+          <p:cNvSpPr/>
+          <p:nvPr/>
+        </p:nvSpPr>
+        <p:spPr>
+          <a:xfrm>
+            <a:off x="6" y="1"/>
+            <a:ext cx="63500" cy="1"/>
+          </a:xfrm>
+          <a:prstGeom prst="rect">
+            <a:avLst/>
+          </a:prstGeom>
+          <a:solidFill>
+            <a:srgbClr val="2563EB"/>
+          </a:solidFill>
+          <a:ln>
+            <a:noFill/>
+          </a:ln>
+        </p:spPr>
+        <p:style>
+          <a:lnRef idx="1">
+            <a:schemeClr val="accent1"/>
+          </a:lnRef>
+          <a:fillRef idx="3">
+            <a:schemeClr val="accent1"/>
+          </a:fillRef>
+          <a:effectRef idx="2">
+            <a:schemeClr val="accent1"/>
+          </a:effectRef>
+          <a:fontRef idx="minor">
+            <a:schemeClr val="lt1"/>
+          </a:fontRef>
+        </p:style>
+        <p:txBody>
+          <a:bodyPr rtlCol="0" anchor="ctr"/>
+          <a:lstStyle/>
+          <a:p>
+            <a:pPr algn="ctr"/>
+          </a:p>
+        </p:txBody>
+      </p:sp>
+      <p:sp>
+        <p:nvSpPr>
+          <p:cNvPr id="13" name="TextBox 12"/>
           <p:cNvSpPr txBox="1"/>
           <p:nvPr/>
         </p:nvSpPr>
         <p:spPr>
           <a:xfrm>
-            <a:off x="1933956" y="2468880"/>
-            <a:ext cx="3566160" cy="411480"/>
+            <a:off x="7" y="1"/>
+            <a:ext cx="5" cy="0"/>
           </a:xfrm>
           <a:prstGeom prst="rect">
             <a:avLst/>
@@ -4884,29 +4923,29 @@
           <a:lstStyle/>
           <a:p>
             <a:pPr algn="l">
-              <a:defRPr sz="1800" b="1">
-                <a:solidFill>
-                  <a:srgbClr val="1A365D"/>
+              <a:defRPr sz="1700" b="1">
+                <a:solidFill>
+                  <a:srgbClr val="2563EB"/>
                 </a:solidFill>
                 <a:latin typeface="Calibri"/>
               </a:defRPr>
             </a:pPr>
             <a:r>
-              <a:t>Web Pemerintah Kota</a:t>
-            </a:r>
-          </a:p>
-        </p:txBody>
-      </p:sp>
-      <p:sp>
-        <p:nvSpPr>
-          <p:cNvPr id="10" name="TextBox 9"/>
+              <a:t>Mobile App PSW</a:t>
+            </a:r>
+          </a:p>
+        </p:txBody>
+      </p:sp>
+      <p:sp>
+        <p:nvSpPr>
+          <p:cNvPr id="14" name="TextBox 13"/>
           <p:cNvSpPr txBox="1"/>
           <p:nvPr/>
         </p:nvSpPr>
         <p:spPr>
           <a:xfrm>
-            <a:off x="1933956" y="2971800"/>
-            <a:ext cx="3566160" cy="822960"/>
+            <a:off x="7" y="1"/>
+            <a:ext cx="5" cy="0"/>
           </a:xfrm>
           <a:prstGeom prst="rect">
             <a:avLst/>
@@ -4922,37 +4961,39 @@
             <a:pPr algn="l">
               <a:defRPr sz="1300" b="0">
                 <a:solidFill>
-                  <a:srgbClr val="4A5568"/>
+                  <a:srgbClr val="1A1A2E"/>
                 </a:solidFill>
                 <a:latin typeface="Calibri"/>
               </a:defRPr>
             </a:pPr>
             <a:r>
-              <a:t>Admin Teknis Web Pemkot &amp; Web Diskominfo</a:t>
-            </a:r>
-          </a:p>
-        </p:txBody>
-      </p:sp>
-      <p:sp>
-        <p:nvSpPr>
-          <p:cNvPr id="11" name="Rectangle 10"/>
+              <a:t>Platform Smart City — Pekan Smart City</a:t>
+            </a:r>
+          </a:p>
+        </p:txBody>
+      </p:sp>
+      <p:sp>
+        <p:nvSpPr>
+          <p:cNvPr id="15" name="Rounded Rectangle 14"/>
           <p:cNvSpPr/>
           <p:nvPr/>
         </p:nvSpPr>
         <p:spPr>
           <a:xfrm>
-            <a:off x="6414516" y="2103120"/>
-            <a:ext cx="5029200" cy="2011680"/>
-          </a:xfrm>
-          <a:prstGeom prst="rect">
-            <a:avLst/>
+            <a:off x="0" y="3"/>
+            <a:ext cx="5" cy="1"/>
+          </a:xfrm>
+          <a:prstGeom prst="roundRect">
+            <a:avLst>
+              <a:gd name="adj" fmla="val 4000"/>
+            </a:avLst>
           </a:prstGeom>
           <a:solidFill>
             <a:srgbClr val="FFFFFF"/>
           </a:solidFill>
           <a:ln w="6350">
             <a:solidFill>
-              <a:srgbClr val="DDDDDD"/>
+              <a:srgbClr val="E8EDF5"/>
             </a:solidFill>
           </a:ln>
         </p:spPr>
@@ -4980,20 +5021,20 @@
       </p:sp>
       <p:sp>
         <p:nvSpPr>
-          <p:cNvPr id="12" name="Rectangle 11"/>
+          <p:cNvPr id="16" name="Rectangle 15"/>
           <p:cNvSpPr/>
           <p:nvPr/>
         </p:nvSpPr>
         <p:spPr>
           <a:xfrm>
-            <a:off x="6414516" y="2103120"/>
-            <a:ext cx="76200" cy="2011680"/>
+            <a:off x="0" y="3"/>
+            <a:ext cx="63500" cy="1"/>
           </a:xfrm>
           <a:prstGeom prst="rect">
             <a:avLst/>
           </a:prstGeom>
           <a:solidFill>
-            <a:srgbClr val="2B6CB0"/>
+            <a:srgbClr val="0B7C72"/>
           </a:solidFill>
           <a:ln>
             <a:noFill/>
@@ -5023,23 +5064,99 @@
       </p:sp>
       <p:sp>
         <p:nvSpPr>
-          <p:cNvPr id="13" name="Oval 12"/>
+          <p:cNvPr id="17" name="TextBox 16"/>
+          <p:cNvSpPr txBox="1"/>
+          <p:nvPr/>
+        </p:nvSpPr>
+        <p:spPr>
+          <a:xfrm>
+            <a:off x="0" y="3"/>
+            <a:ext cx="5" cy="0"/>
+          </a:xfrm>
+          <a:prstGeom prst="rect">
+            <a:avLst/>
+          </a:prstGeom>
+          <a:noFill/>
+        </p:spPr>
+        <p:txBody>
+          <a:bodyPr wrap="square">
+            <a:spAutoFit/>
+          </a:bodyPr>
+          <a:lstStyle/>
+          <a:p>
+            <a:pPr algn="l">
+              <a:defRPr sz="1700" b="1">
+                <a:solidFill>
+                  <a:srgbClr val="0B7C72"/>
+                </a:solidFill>
+                <a:latin typeface="Calibri"/>
+              </a:defRPr>
+            </a:pPr>
+            <a:r>
+              <a:t>Web Kota Cerdas</a:t>
+            </a:r>
+          </a:p>
+        </p:txBody>
+      </p:sp>
+      <p:sp>
+        <p:nvSpPr>
+          <p:cNvPr id="18" name="TextBox 17"/>
+          <p:cNvSpPr txBox="1"/>
+          <p:nvPr/>
+        </p:nvSpPr>
+        <p:spPr>
+          <a:xfrm>
+            <a:off x="0" y="3"/>
+            <a:ext cx="5" cy="0"/>
+          </a:xfrm>
+          <a:prstGeom prst="rect">
+            <a:avLst/>
+          </a:prstGeom>
+          <a:noFill/>
+        </p:spPr>
+        <p:txBody>
+          <a:bodyPr wrap="square">
+            <a:spAutoFit/>
+          </a:bodyPr>
+          <a:lstStyle/>
+          <a:p>
+            <a:pPr algn="l">
+              <a:defRPr sz="1300" b="0">
+                <a:solidFill>
+                  <a:srgbClr val="1A1A2E"/>
+                </a:solidFill>
+                <a:latin typeface="Calibri"/>
+              </a:defRPr>
+            </a:pPr>
+            <a:r>
+              <a:t>Admin Teknis Portal Kota Cerdas</a:t>
+            </a:r>
+          </a:p>
+        </p:txBody>
+      </p:sp>
+      <p:sp>
+        <p:nvSpPr>
+          <p:cNvPr id="19" name="Rounded Rectangle 18"/>
           <p:cNvSpPr/>
           <p:nvPr/>
         </p:nvSpPr>
         <p:spPr>
           <a:xfrm>
-            <a:off x="6734556" y="2560320"/>
-            <a:ext cx="640080" cy="640080"/>
-          </a:xfrm>
-          <a:prstGeom prst="ellipse">
-            <a:avLst/>
+            <a:off x="6" y="3"/>
+            <a:ext cx="5" cy="1"/>
+          </a:xfrm>
+          <a:prstGeom prst="roundRect">
+            <a:avLst>
+              <a:gd name="adj" fmla="val 4000"/>
+            </a:avLst>
           </a:prstGeom>
           <a:solidFill>
-            <a:srgbClr val="2B6CB0"/>
+            <a:srgbClr val="FFFFFF"/>
           </a:solidFill>
-          <a:ln>
-            <a:noFill/>
+          <a:ln w="6350">
+            <a:solidFill>
+              <a:srgbClr val="E8EDF5"/>
+            </a:solidFill>
           </a:ln>
         </p:spPr>
         <p:style>
@@ -5057,116 +5174,32 @@
           </a:fontRef>
         </p:style>
         <p:txBody>
-          <a:bodyPr rtlCol="0" anchor="ctr" wrap="none"/>
-          <a:lstStyle/>
-          <a:p>
-            <a:pPr algn="ctr">
-              <a:defRPr sz="2200" b="1">
-                <a:solidFill>
-                  <a:srgbClr val="FFFFFF"/>
-                </a:solidFill>
-                <a:latin typeface="Calibri"/>
-              </a:defRPr>
-            </a:pPr>
-            <a:r>
-              <a:t>M</a:t>
-            </a:r>
-          </a:p>
-        </p:txBody>
-      </p:sp>
-      <p:sp>
-        <p:nvSpPr>
-          <p:cNvPr id="14" name="TextBox 13"/>
-          <p:cNvSpPr txBox="1"/>
-          <p:nvPr/>
-        </p:nvSpPr>
-        <p:spPr>
-          <a:xfrm>
-            <a:off x="7603236" y="2468880"/>
-            <a:ext cx="3566160" cy="411480"/>
-          </a:xfrm>
-          <a:prstGeom prst="rect">
-            <a:avLst/>
-          </a:prstGeom>
-          <a:noFill/>
-        </p:spPr>
-        <p:txBody>
-          <a:bodyPr wrap="square">
-            <a:spAutoFit/>
-          </a:bodyPr>
-          <a:lstStyle/>
-          <a:p>
-            <a:pPr algn="l">
-              <a:defRPr sz="1800" b="1">
-                <a:solidFill>
-                  <a:srgbClr val="1A365D"/>
-                </a:solidFill>
-                <a:latin typeface="Calibri"/>
-              </a:defRPr>
-            </a:pPr>
-            <a:r>
-              <a:t>Mobile App PSW</a:t>
-            </a:r>
-          </a:p>
-        </p:txBody>
-      </p:sp>
-      <p:sp>
-        <p:nvSpPr>
-          <p:cNvPr id="15" name="TextBox 14"/>
-          <p:cNvSpPr txBox="1"/>
-          <p:nvPr/>
-        </p:nvSpPr>
-        <p:spPr>
-          <a:xfrm>
-            <a:off x="7603236" y="2971800"/>
-            <a:ext cx="3566160" cy="822960"/>
-          </a:xfrm>
-          <a:prstGeom prst="rect">
-            <a:avLst/>
-          </a:prstGeom>
-          <a:noFill/>
-        </p:spPr>
-        <p:txBody>
-          <a:bodyPr wrap="square">
-            <a:spAutoFit/>
-          </a:bodyPr>
-          <a:lstStyle/>
-          <a:p>
-            <a:pPr algn="l">
-              <a:defRPr sz="1300" b="0">
-                <a:solidFill>
-                  <a:srgbClr val="4A5568"/>
-                </a:solidFill>
-                <a:latin typeface="Calibri"/>
-              </a:defRPr>
-            </a:pPr>
-            <a:r>
-              <a:t>Platform Smart City (Pekan Smart City)</a:t>
-            </a:r>
-          </a:p>
-        </p:txBody>
-      </p:sp>
-      <p:sp>
-        <p:nvSpPr>
-          <p:cNvPr id="16" name="Rectangle 15"/>
+          <a:bodyPr rtlCol="0" anchor="ctr"/>
+          <a:lstStyle/>
+          <a:p>
+            <a:pPr algn="ctr"/>
+          </a:p>
+        </p:txBody>
+      </p:sp>
+      <p:sp>
+        <p:nvSpPr>
+          <p:cNvPr id="20" name="Rectangle 19"/>
           <p:cNvSpPr/>
           <p:nvPr/>
         </p:nvSpPr>
         <p:spPr>
           <a:xfrm>
-            <a:off x="745236" y="4572000"/>
-            <a:ext cx="5029200" cy="2011680"/>
+            <a:off x="6" y="3"/>
+            <a:ext cx="63500" cy="1"/>
           </a:xfrm>
           <a:prstGeom prst="rect">
             <a:avLst/>
           </a:prstGeom>
           <a:solidFill>
-            <a:srgbClr val="FFFFFF"/>
+            <a:srgbClr val="C8962E"/>
           </a:solidFill>
-          <a:ln w="6350">
-            <a:solidFill>
-              <a:srgbClr val="DDDDDD"/>
-            </a:solidFill>
+          <a:ln>
+            <a:noFill/>
           </a:ln>
         </p:spPr>
         <p:style>
@@ -5193,20 +5226,92 @@
       </p:sp>
       <p:sp>
         <p:nvSpPr>
-          <p:cNvPr id="17" name="Rectangle 16"/>
+          <p:cNvPr id="21" name="TextBox 20"/>
+          <p:cNvSpPr txBox="1"/>
+          <p:nvPr/>
+        </p:nvSpPr>
+        <p:spPr>
+          <a:xfrm>
+            <a:off x="7" y="3"/>
+            <a:ext cx="5" cy="0"/>
+          </a:xfrm>
+          <a:prstGeom prst="rect">
+            <a:avLst/>
+          </a:prstGeom>
+          <a:noFill/>
+        </p:spPr>
+        <p:txBody>
+          <a:bodyPr wrap="square">
+            <a:spAutoFit/>
+          </a:bodyPr>
+          <a:lstStyle/>
+          <a:p>
+            <a:pPr algn="l">
+              <a:defRPr sz="1700" b="1">
+                <a:solidFill>
+                  <a:srgbClr val="C8962E"/>
+                </a:solidFill>
+                <a:latin typeface="Calibri"/>
+              </a:defRPr>
+            </a:pPr>
+            <a:r>
+              <a:t>Aplikasi SPLP</a:t>
+            </a:r>
+          </a:p>
+        </p:txBody>
+      </p:sp>
+      <p:sp>
+        <p:nvSpPr>
+          <p:cNvPr id="22" name="TextBox 21"/>
+          <p:cNvSpPr txBox="1"/>
+          <p:nvPr/>
+        </p:nvSpPr>
+        <p:spPr>
+          <a:xfrm>
+            <a:off x="7" y="3"/>
+            <a:ext cx="5" cy="0"/>
+          </a:xfrm>
+          <a:prstGeom prst="rect">
+            <a:avLst/>
+          </a:prstGeom>
+          <a:noFill/>
+        </p:spPr>
+        <p:txBody>
+          <a:bodyPr wrap="square">
+            <a:spAutoFit/>
+          </a:bodyPr>
+          <a:lstStyle/>
+          <a:p>
+            <a:pPr algn="l">
+              <a:defRPr sz="1300" b="0">
+                <a:solidFill>
+                  <a:srgbClr val="1A1A2E"/>
+                </a:solidFill>
+                <a:latin typeface="Calibri"/>
+              </a:defRPr>
+            </a:pPr>
+            <a:r>
+              <a:t>Sistem Penghubung Layanan Pemerintah (Kemenkomdigi)</a:t>
+            </a:r>
+          </a:p>
+        </p:txBody>
+      </p:sp>
+      <p:sp>
+        <p:nvSpPr>
+          <p:cNvPr id="23" name="Rectangle 22"/>
           <p:cNvSpPr/>
           <p:nvPr/>
         </p:nvSpPr>
         <p:spPr>
           <a:xfrm>
-            <a:off x="745236" y="4572000"/>
-            <a:ext cx="76200" cy="2011680"/>
+            <a:off x="0" y="7"/>
+            <a:ext cx="13" cy="25400"/>
           </a:xfrm>
           <a:prstGeom prst="rect">
             <a:avLst/>
           </a:prstGeom>
           <a:solidFill>
-            <a:srgbClr val="38A169"/>
+            <a:srgbClr val="0A1628"/>
           </a:solidFill>
           <a:ln>
             <a:noFill/>
@@ -5236,67 +5341,14 @@
       </p:sp>
       <p:sp>
         <p:nvSpPr>
-          <p:cNvPr id="18" name="Oval 17"/>
-          <p:cNvSpPr/>
-          <p:nvPr/>
-        </p:nvSpPr>
-        <p:spPr>
-          <a:xfrm>
-            <a:off x="1065276" y="5029200"/>
-            <a:ext cx="640080" cy="640080"/>
-          </a:xfrm>
-          <a:prstGeom prst="ellipse">
-            <a:avLst/>
-          </a:prstGeom>
-          <a:solidFill>
-            <a:srgbClr val="38A169"/>
-          </a:solidFill>
-          <a:ln>
-            <a:noFill/>
-          </a:ln>
-        </p:spPr>
-        <p:style>
-          <a:lnRef idx="1">
-            <a:schemeClr val="accent1"/>
-          </a:lnRef>
-          <a:fillRef idx="3">
-            <a:schemeClr val="accent1"/>
-          </a:fillRef>
-          <a:effectRef idx="2">
-            <a:schemeClr val="accent1"/>
-          </a:effectRef>
-          <a:fontRef idx="minor">
-            <a:schemeClr val="lt1"/>
-          </a:fontRef>
-        </p:style>
-        <p:txBody>
-          <a:bodyPr rtlCol="0" anchor="ctr" wrap="none"/>
-          <a:lstStyle/>
-          <a:p>
-            <a:pPr algn="ctr">
-              <a:defRPr sz="2200" b="1">
-                <a:solidFill>
-                  <a:srgbClr val="FFFFFF"/>
-                </a:solidFill>
-                <a:latin typeface="Calibri"/>
-              </a:defRPr>
-            </a:pPr>
-            <a:r>
-              <a:t>W</a:t>
-            </a:r>
-          </a:p>
-        </p:txBody>
-      </p:sp>
-      <p:sp>
-        <p:nvSpPr>
-          <p:cNvPr id="19" name="TextBox 18"/>
+          <p:cNvPr id="24" name="TextBox 23"/>
           <p:cNvSpPr txBox="1"/>
           <p:nvPr/>
         </p:nvSpPr>
         <p:spPr>
           <a:xfrm>
-            <a:off x="1933956" y="4937760"/>
-            <a:ext cx="3566160" cy="411480"/>
+            <a:off x="0" y="7"/>
+            <a:ext cx="4" cy="0"/>
           </a:xfrm>
           <a:prstGeom prst="rect">
             <a:avLst/>
@@ -5310,29 +5362,29 @@
           <a:lstStyle/>
           <a:p>
             <a:pPr algn="l">
-              <a:defRPr sz="1800" b="1">
-                <a:solidFill>
-                  <a:srgbClr val="1A365D"/>
+              <a:defRPr sz="700" b="0">
+                <a:solidFill>
+                  <a:srgbClr val="64748B"/>
                 </a:solidFill>
                 <a:latin typeface="Calibri"/>
               </a:defRPr>
             </a:pPr>
             <a:r>
-              <a:t>Web Kota Cerdas</a:t>
-            </a:r>
-          </a:p>
-        </p:txBody>
-      </p:sp>
-      <p:sp>
-        <p:nvSpPr>
-          <p:cNvPr id="20" name="TextBox 19"/>
+              <a:t>Sumber: RESUME TUPOKSI egov.docx</a:t>
+            </a:r>
+          </a:p>
+        </p:txBody>
+      </p:sp>
+      <p:sp>
+        <p:nvSpPr>
+          <p:cNvPr id="25" name="TextBox 24"/>
           <p:cNvSpPr txBox="1"/>
           <p:nvPr/>
         </p:nvSpPr>
         <p:spPr>
           <a:xfrm>
-            <a:off x="1933956" y="5440680"/>
-            <a:ext cx="3566160" cy="822960"/>
+            <a:off x="12" y="7"/>
+            <a:ext cx="0" cy="0"/>
           </a:xfrm>
           <a:prstGeom prst="rect">
             <a:avLst/>
@@ -5345,351 +5397,16 @@
           </a:bodyPr>
           <a:lstStyle/>
           <a:p>
-            <a:pPr algn="l">
-              <a:defRPr sz="1300" b="0">
-                <a:solidFill>
-                  <a:srgbClr val="4A5568"/>
+            <a:pPr algn="r">
+              <a:defRPr sz="800" b="0">
+                <a:solidFill>
+                  <a:srgbClr val="64748B"/>
                 </a:solidFill>
                 <a:latin typeface="Calibri"/>
               </a:defRPr>
             </a:pPr>
             <a:r>
-              <a:t>Admin Teknis Portal Kota Cerdas</a:t>
-            </a:r>
-          </a:p>
-        </p:txBody>
-      </p:sp>
-      <p:sp>
-        <p:nvSpPr>
-          <p:cNvPr id="21" name="Rectangle 20"/>
-          <p:cNvSpPr/>
-          <p:nvPr/>
-        </p:nvSpPr>
-        <p:spPr>
-          <a:xfrm>
-            <a:off x="6414516" y="4572000"/>
-            <a:ext cx="5029200" cy="2011680"/>
-          </a:xfrm>
-          <a:prstGeom prst="rect">
-            <a:avLst/>
-          </a:prstGeom>
-          <a:solidFill>
-            <a:srgbClr val="FFFFFF"/>
-          </a:solidFill>
-          <a:ln w="6350">
-            <a:solidFill>
-              <a:srgbClr val="DDDDDD"/>
-            </a:solidFill>
-          </a:ln>
-        </p:spPr>
-        <p:style>
-          <a:lnRef idx="1">
-            <a:schemeClr val="accent1"/>
-          </a:lnRef>
-          <a:fillRef idx="3">
-            <a:schemeClr val="accent1"/>
-          </a:fillRef>
-          <a:effectRef idx="2">
-            <a:schemeClr val="accent1"/>
-          </a:effectRef>
-          <a:fontRef idx="minor">
-            <a:schemeClr val="lt1"/>
-          </a:fontRef>
-        </p:style>
-        <p:txBody>
-          <a:bodyPr rtlCol="0" anchor="ctr"/>
-          <a:lstStyle/>
-          <a:p>
-            <a:pPr algn="ctr"/>
-          </a:p>
-        </p:txBody>
-      </p:sp>
-      <p:sp>
-        <p:nvSpPr>
-          <p:cNvPr id="22" name="Rectangle 21"/>
-          <p:cNvSpPr/>
-          <p:nvPr/>
-        </p:nvSpPr>
-        <p:spPr>
-          <a:xfrm>
-            <a:off x="6414516" y="4572000"/>
-            <a:ext cx="76200" cy="2011680"/>
-          </a:xfrm>
-          <a:prstGeom prst="rect">
-            <a:avLst/>
-          </a:prstGeom>
-          <a:solidFill>
-            <a:srgbClr val="D69E2E"/>
-          </a:solidFill>
-          <a:ln>
-            <a:noFill/>
-          </a:ln>
-        </p:spPr>
-        <p:style>
-          <a:lnRef idx="1">
-            <a:schemeClr val="accent1"/>
-          </a:lnRef>
-          <a:fillRef idx="3">
-            <a:schemeClr val="accent1"/>
-          </a:fillRef>
-          <a:effectRef idx="2">
-            <a:schemeClr val="accent1"/>
-          </a:effectRef>
-          <a:fontRef idx="minor">
-            <a:schemeClr val="lt1"/>
-          </a:fontRef>
-        </p:style>
-        <p:txBody>
-          <a:bodyPr rtlCol="0" anchor="ctr"/>
-          <a:lstStyle/>
-          <a:p>
-            <a:pPr algn="ctr"/>
-          </a:p>
-        </p:txBody>
-      </p:sp>
-      <p:sp>
-        <p:nvSpPr>
-          <p:cNvPr id="23" name="Oval 22"/>
-          <p:cNvSpPr/>
-          <p:nvPr/>
-        </p:nvSpPr>
-        <p:spPr>
-          <a:xfrm>
-            <a:off x="6734556" y="5029200"/>
-            <a:ext cx="640080" cy="640080"/>
-          </a:xfrm>
-          <a:prstGeom prst="ellipse">
-            <a:avLst/>
-          </a:prstGeom>
-          <a:solidFill>
-            <a:srgbClr val="D69E2E"/>
-          </a:solidFill>
-          <a:ln>
-            <a:noFill/>
-          </a:ln>
-        </p:spPr>
-        <p:style>
-          <a:lnRef idx="1">
-            <a:schemeClr val="accent1"/>
-          </a:lnRef>
-          <a:fillRef idx="3">
-            <a:schemeClr val="accent1"/>
-          </a:fillRef>
-          <a:effectRef idx="2">
-            <a:schemeClr val="accent1"/>
-          </a:effectRef>
-          <a:fontRef idx="minor">
-            <a:schemeClr val="lt1"/>
-          </a:fontRef>
-        </p:style>
-        <p:txBody>
-          <a:bodyPr rtlCol="0" anchor="ctr" wrap="none"/>
-          <a:lstStyle/>
-          <a:p>
-            <a:pPr algn="ctr">
-              <a:defRPr sz="2200" b="1">
-                <a:solidFill>
-                  <a:srgbClr val="FFFFFF"/>
-                </a:solidFill>
-                <a:latin typeface="Calibri"/>
-              </a:defRPr>
-            </a:pPr>
-            <a:r>
-              <a:t>A</a:t>
-            </a:r>
-          </a:p>
-        </p:txBody>
-      </p:sp>
-      <p:sp>
-        <p:nvSpPr>
-          <p:cNvPr id="24" name="TextBox 23"/>
-          <p:cNvSpPr txBox="1"/>
-          <p:nvPr/>
-        </p:nvSpPr>
-        <p:spPr>
-          <a:xfrm>
-            <a:off x="7603236" y="4937760"/>
-            <a:ext cx="3566160" cy="411480"/>
-          </a:xfrm>
-          <a:prstGeom prst="rect">
-            <a:avLst/>
-          </a:prstGeom>
-          <a:noFill/>
-        </p:spPr>
-        <p:txBody>
-          <a:bodyPr wrap="square">
-            <a:spAutoFit/>
-          </a:bodyPr>
-          <a:lstStyle/>
-          <a:p>
-            <a:pPr algn="l">
-              <a:defRPr sz="1800" b="1">
-                <a:solidFill>
-                  <a:srgbClr val="1A365D"/>
-                </a:solidFill>
-                <a:latin typeface="Calibri"/>
-              </a:defRPr>
-            </a:pPr>
-            <a:r>
-              <a:t>Aplikasi SPLP</a:t>
-            </a:r>
-          </a:p>
-        </p:txBody>
-      </p:sp>
-      <p:sp>
-        <p:nvSpPr>
-          <p:cNvPr id="25" name="TextBox 24"/>
-          <p:cNvSpPr txBox="1"/>
-          <p:nvPr/>
-        </p:nvSpPr>
-        <p:spPr>
-          <a:xfrm>
-            <a:off x="7603236" y="5440680"/>
-            <a:ext cx="3566160" cy="822960"/>
-          </a:xfrm>
-          <a:prstGeom prst="rect">
-            <a:avLst/>
-          </a:prstGeom>
-          <a:noFill/>
-        </p:spPr>
-        <p:txBody>
-          <a:bodyPr wrap="square">
-            <a:spAutoFit/>
-          </a:bodyPr>
-          <a:lstStyle/>
-          <a:p>
-            <a:pPr algn="l">
-              <a:defRPr sz="1300" b="0">
-                <a:solidFill>
-                  <a:srgbClr val="4A5568"/>
-                </a:solidFill>
-                <a:latin typeface="Calibri"/>
-              </a:defRPr>
-            </a:pPr>
-            <a:r>
-              <a:t>Sistem Penghubung Layanan Pemerintah — Kemenkomdigi</a:t>
-            </a:r>
-          </a:p>
-        </p:txBody>
-      </p:sp>
-      <p:sp>
-        <p:nvSpPr>
-          <p:cNvPr id="26" name="Rectangle 25"/>
-          <p:cNvSpPr/>
-          <p:nvPr/>
-        </p:nvSpPr>
-        <p:spPr>
-          <a:xfrm>
-            <a:off x="0" y="6446520"/>
-            <a:ext cx="12188952" cy="411480"/>
-          </a:xfrm>
-          <a:prstGeom prst="rect">
-            <a:avLst/>
-          </a:prstGeom>
-          <a:solidFill>
-            <a:srgbClr val="FAFAFA"/>
-          </a:solidFill>
-          <a:ln>
-            <a:noFill/>
-          </a:ln>
-        </p:spPr>
-        <p:style>
-          <a:lnRef idx="1">
-            <a:schemeClr val="accent1"/>
-          </a:lnRef>
-          <a:fillRef idx="3">
-            <a:schemeClr val="accent1"/>
-          </a:fillRef>
-          <a:effectRef idx="2">
-            <a:schemeClr val="accent1"/>
-          </a:effectRef>
-          <a:fontRef idx="minor">
-            <a:schemeClr val="lt1"/>
-          </a:fontRef>
-        </p:style>
-        <p:txBody>
-          <a:bodyPr rtlCol="0" anchor="ctr"/>
-          <a:lstStyle/>
-          <a:p>
-            <a:pPr algn="ctr"/>
-          </a:p>
-        </p:txBody>
-      </p:sp>
-      <p:sp>
-        <p:nvSpPr>
-          <p:cNvPr id="27" name="Rectangle 26"/>
-          <p:cNvSpPr/>
-          <p:nvPr/>
-        </p:nvSpPr>
-        <p:spPr>
-          <a:xfrm>
-            <a:off x="0" y="6446520"/>
-            <a:ext cx="12188952" cy="12700"/>
-          </a:xfrm>
-          <a:prstGeom prst="rect">
-            <a:avLst/>
-          </a:prstGeom>
-          <a:solidFill>
-            <a:srgbClr val="DDDDDD"/>
-          </a:solidFill>
-          <a:ln>
-            <a:noFill/>
-          </a:ln>
-        </p:spPr>
-        <p:style>
-          <a:lnRef idx="1">
-            <a:schemeClr val="accent1"/>
-          </a:lnRef>
-          <a:fillRef idx="3">
-            <a:schemeClr val="accent1"/>
-          </a:fillRef>
-          <a:effectRef idx="2">
-            <a:schemeClr val="accent1"/>
-          </a:effectRef>
-          <a:fontRef idx="minor">
-            <a:schemeClr val="lt1"/>
-          </a:fontRef>
-        </p:style>
-        <p:txBody>
-          <a:bodyPr rtlCol="0" anchor="ctr"/>
-          <a:lstStyle/>
-          <a:p>
-            <a:pPr algn="ctr"/>
-          </a:p>
-        </p:txBody>
-      </p:sp>
-      <p:sp>
-        <p:nvSpPr>
-          <p:cNvPr id="28" name="TextBox 27"/>
-          <p:cNvSpPr txBox="1"/>
-          <p:nvPr/>
-        </p:nvSpPr>
-        <p:spPr>
-          <a:xfrm>
-            <a:off x="822960" y="6510528"/>
-            <a:ext cx="10543032" cy="274320"/>
-          </a:xfrm>
-          <a:prstGeom prst="rect">
-            <a:avLst/>
-          </a:prstGeom>
-          <a:noFill/>
-        </p:spPr>
-        <p:txBody>
-          <a:bodyPr wrap="square">
-            <a:spAutoFit/>
-          </a:bodyPr>
-          <a:lstStyle/>
-          <a:p>
-            <a:pPr algn="l">
-              <a:defRPr sz="900" b="0">
-                <a:solidFill>
-                  <a:srgbClr val="8B97A8"/>
-                </a:solidFill>
-                <a:latin typeface="Calibri"/>
-              </a:defRPr>
-            </a:pPr>
-            <a:r>
-              <a:t>Bidang e-Government — Diskominfostandi Kota Bekasi</a:t>
+              <a:t>3</a:t>
             </a:r>
           </a:p>
         </p:txBody>
@@ -5705,6 +5422,14 @@
 <file path=ppt/slides/slide4.xml><?xml version="1.0" encoding="utf-8"?>
 <p:sld xmlns:a="http://schemas.openxmlformats.org/drawingml/2006/main" xmlns:p="http://schemas.openxmlformats.org/presentationml/2006/main" xmlns:r="http://schemas.openxmlformats.org/officeDocument/2006/relationships">
   <p:cSld>
+    <p:bg>
+      <p:bgPr>
+        <a:solidFill>
+          <a:srgbClr val="F5F7FA"/>
+        </a:solidFill>
+        <a:effectLst/>
+      </p:bgPr>
+    </p:bg>
     <p:spTree>
       <p:nvGrpSpPr>
         <p:cNvPr id="1" name=""/>
@@ -5721,13 +5446,13 @@
         <p:spPr>
           <a:xfrm>
             <a:off x="0" y="0"/>
-            <a:ext cx="12188952" cy="50800"/>
+            <a:ext cx="13" cy="38100"/>
           </a:xfrm>
           <a:prstGeom prst="rect">
             <a:avLst/>
           </a:prstGeom>
           <a:solidFill>
-            <a:srgbClr val="D69E2E"/>
+            <a:srgbClr val="C8962E"/>
           </a:solidFill>
           <a:ln>
             <a:noFill/>
@@ -5757,56 +5482,20 @@
       </p:sp>
       <p:sp>
         <p:nvSpPr>
-          <p:cNvPr id="3" name="TextBox 2"/>
-          <p:cNvSpPr txBox="1"/>
-          <p:nvPr/>
-        </p:nvSpPr>
-        <p:spPr>
-          <a:xfrm>
-            <a:off x="822960" y="457200"/>
-            <a:ext cx="10543032" cy="640080"/>
-          </a:xfrm>
-          <a:prstGeom prst="rect">
-            <a:avLst/>
-          </a:prstGeom>
-          <a:noFill/>
-        </p:spPr>
-        <p:txBody>
-          <a:bodyPr wrap="square">
-            <a:spAutoFit/>
-          </a:bodyPr>
-          <a:lstStyle/>
-          <a:p>
-            <a:pPr algn="l">
-              <a:defRPr sz="3000" b="1">
-                <a:solidFill>
-                  <a:srgbClr val="1A365D"/>
-                </a:solidFill>
-                <a:latin typeface="Calibri"/>
-              </a:defRPr>
-            </a:pPr>
-            <a:r>
-              <a:t>Supervisi &amp; Pengembangan Aplikasi Daerah</a:t>
-            </a:r>
-          </a:p>
-        </p:txBody>
-      </p:sp>
-      <p:sp>
-        <p:nvSpPr>
-          <p:cNvPr id="4" name="Rectangle 3"/>
+          <p:cNvPr id="3" name="Rectangle 2"/>
           <p:cNvSpPr/>
           <p:nvPr/>
         </p:nvSpPr>
         <p:spPr>
           <a:xfrm>
-            <a:off x="822960" y="1143000"/>
-            <a:ext cx="1371600" cy="25400"/>
+            <a:off x="0" y="38100"/>
+            <a:ext cx="13" cy="822959"/>
           </a:xfrm>
           <a:prstGeom prst="rect">
             <a:avLst/>
           </a:prstGeom>
           <a:solidFill>
-            <a:srgbClr val="D69E2E"/>
+            <a:srgbClr val="0A1628"/>
           </a:solidFill>
           <a:ln>
             <a:noFill/>
@@ -5836,56 +5525,20 @@
       </p:sp>
       <p:sp>
         <p:nvSpPr>
-          <p:cNvPr id="5" name="TextBox 4"/>
-          <p:cNvSpPr txBox="1"/>
-          <p:nvPr/>
-        </p:nvSpPr>
-        <p:spPr>
-          <a:xfrm>
-            <a:off x="822960" y="1234440"/>
-            <a:ext cx="10543032" cy="365760"/>
-          </a:xfrm>
-          <a:prstGeom prst="rect">
-            <a:avLst/>
-          </a:prstGeom>
-          <a:noFill/>
-        </p:spPr>
-        <p:txBody>
-          <a:bodyPr wrap="square">
-            <a:spAutoFit/>
-          </a:bodyPr>
-          <a:lstStyle/>
-          <a:p>
-            <a:pPr algn="l">
-              <a:defRPr sz="1400" b="0">
-                <a:solidFill>
-                  <a:srgbClr val="4A5568"/>
-                </a:solidFill>
-                <a:latin typeface="Calibri"/>
-              </a:defRPr>
-            </a:pPr>
-            <a:r>
-              <a:t>Lingkup kerja pengembangan sistem informasi dan aplikasi</a:t>
-            </a:r>
-          </a:p>
-        </p:txBody>
-      </p:sp>
-      <p:sp>
-        <p:nvSpPr>
-          <p:cNvPr id="6" name="Rectangle 5"/>
+          <p:cNvPr id="4" name="Rectangle 3"/>
           <p:cNvSpPr/>
           <p:nvPr/>
         </p:nvSpPr>
         <p:spPr>
           <a:xfrm>
-            <a:off x="822960" y="1645920"/>
-            <a:ext cx="50800" cy="4114800"/>
+            <a:off x="0" y="0"/>
+            <a:ext cx="0" cy="0"/>
           </a:xfrm>
           <a:prstGeom prst="rect">
             <a:avLst/>
           </a:prstGeom>
           <a:solidFill>
-            <a:srgbClr val="1A365D"/>
+            <a:srgbClr val="C8962E"/>
           </a:solidFill>
           <a:ln>
             <a:noFill/>
@@ -5915,14 +5568,14 @@
       </p:sp>
       <p:sp>
         <p:nvSpPr>
-          <p:cNvPr id="7" name="TextBox 6"/>
+          <p:cNvPr id="5" name="TextBox 4"/>
           <p:cNvSpPr txBox="1"/>
           <p:nvPr/>
         </p:nvSpPr>
         <p:spPr>
           <a:xfrm>
-            <a:off x="1097280" y="1737360"/>
-            <a:ext cx="10268712" cy="91440"/>
+            <a:off x="0" y="0"/>
+            <a:ext cx="11" cy="0"/>
           </a:xfrm>
           <a:prstGeom prst="rect">
             <a:avLst/>
@@ -5936,86 +5589,71 @@
           <a:lstStyle/>
           <a:p>
             <a:pPr algn="l">
-              <a:spcAft>
-                <a:spcPts val="1200"/>
-              </a:spcAft>
-              <a:defRPr sz="1500" b="0">
-                <a:solidFill>
-                  <a:srgbClr val="1A202C"/>
+              <a:defRPr sz="2000" b="1">
+                <a:solidFill>
+                  <a:srgbClr val="FFFFFF"/>
                 </a:solidFill>
                 <a:latin typeface="Calibri"/>
               </a:defRPr>
             </a:pPr>
             <a:r>
-              <a:t>▸  Supervisi, analisis, dan standarisasi pengembangan aplikasi perangkat daerah</a:t>
-            </a:r>
-          </a:p>
-          <a:p>
-            <a:pPr>
-              <a:spcAft>
-                <a:spcPts val="1200"/>
-              </a:spcAft>
-              <a:defRPr sz="1500">
-                <a:solidFill>
-                  <a:srgbClr val="1A202C"/>
+              <a:t>Supervisi &amp; Pengembangan Aplikasi Daerah</a:t>
+            </a:r>
+          </a:p>
+        </p:txBody>
+      </p:sp>
+      <p:sp>
+        <p:nvSpPr>
+          <p:cNvPr id="6" name="TextBox 5"/>
+          <p:cNvSpPr txBox="1"/>
+          <p:nvPr/>
+        </p:nvSpPr>
+        <p:spPr>
+          <a:xfrm>
+            <a:off x="0" y="0"/>
+            <a:ext cx="11" cy="0"/>
+          </a:xfrm>
+          <a:prstGeom prst="rect">
+            <a:avLst/>
+          </a:prstGeom>
+          <a:noFill/>
+        </p:spPr>
+        <p:txBody>
+          <a:bodyPr wrap="square">
+            <a:spAutoFit/>
+          </a:bodyPr>
+          <a:lstStyle/>
+          <a:p>
+            <a:pPr algn="l">
+              <a:defRPr sz="900" b="0">
+                <a:solidFill>
+                  <a:srgbClr val="64748B"/>
                 </a:solidFill>
                 <a:latin typeface="Calibri"/>
               </a:defRPr>
             </a:pPr>
             <a:r>
-              <a:t>▸  Mengelola dan mengembangkan Sistem Penghubung Layanan Pemerintah (SPLP)</a:t>
-            </a:r>
-          </a:p>
-          <a:p>
-            <a:pPr>
-              <a:spcAft>
-                <a:spcPts val="1200"/>
-              </a:spcAft>
-              <a:defRPr sz="1500">
-                <a:solidFill>
-                  <a:srgbClr val="1A202C"/>
-                </a:solidFill>
-                <a:latin typeface="Calibri"/>
-              </a:defRPr>
-            </a:pPr>
-            <a:r>
-              <a:t>▸  Pengelolaan domain dan subdomain pemerintah daerah</a:t>
-            </a:r>
-          </a:p>
-          <a:p>
-            <a:pPr>
-              <a:spcAft>
-                <a:spcPts val="1200"/>
-              </a:spcAft>
-              <a:defRPr sz="1500">
-                <a:solidFill>
-                  <a:srgbClr val="1A202C"/>
-                </a:solidFill>
-                <a:latin typeface="Calibri"/>
-              </a:defRPr>
-            </a:pPr>
-            <a:r>
-              <a:t>▸  Sosialisasi dan peningkatan kapasitas SDM pengelola sistem</a:t>
-            </a:r>
-          </a:p>
-        </p:txBody>
-      </p:sp>
-      <p:sp>
-        <p:nvSpPr>
-          <p:cNvPr id="8" name="Rectangle 7"/>
+              <a:t>Lingkup kerja pengembangan sistem informasi dan aplikasi perangkat daerah</a:t>
+            </a:r>
+          </a:p>
+        </p:txBody>
+      </p:sp>
+      <p:sp>
+        <p:nvSpPr>
+          <p:cNvPr id="7" name="Rectangle 6"/>
           <p:cNvSpPr/>
           <p:nvPr/>
         </p:nvSpPr>
         <p:spPr>
           <a:xfrm>
-            <a:off x="0" y="6446520"/>
-            <a:ext cx="12188952" cy="411480"/>
+            <a:off x="0" y="1"/>
+            <a:ext cx="50800" cy="3474720"/>
           </a:xfrm>
           <a:prstGeom prst="rect">
             <a:avLst/>
           </a:prstGeom>
           <a:solidFill>
-            <a:srgbClr val="FAFAFA"/>
+            <a:srgbClr val="0A1628"/>
           </a:solidFill>
           <a:ln>
             <a:noFill/>
@@ -6045,20 +5683,92 @@
       </p:sp>
       <p:sp>
         <p:nvSpPr>
-          <p:cNvPr id="9" name="Rectangle 8"/>
+          <p:cNvPr id="8" name="TextBox 7"/>
+          <p:cNvSpPr txBox="1"/>
+          <p:nvPr/>
+        </p:nvSpPr>
+        <p:spPr>
+          <a:xfrm>
+            <a:off x="0" y="1"/>
+            <a:ext cx="0" cy="0"/>
+          </a:xfrm>
+          <a:prstGeom prst="rect">
+            <a:avLst/>
+          </a:prstGeom>
+          <a:noFill/>
+        </p:spPr>
+        <p:txBody>
+          <a:bodyPr wrap="square">
+            <a:spAutoFit/>
+          </a:bodyPr>
+          <a:lstStyle/>
+          <a:p>
+            <a:pPr algn="l">
+              <a:defRPr sz="1600" b="1">
+                <a:solidFill>
+                  <a:srgbClr val="C8962E"/>
+                </a:solidFill>
+                <a:latin typeface="Calibri"/>
+              </a:defRPr>
+            </a:pPr>
+            <a:r>
+              <a:t>1.</a:t>
+            </a:r>
+          </a:p>
+        </p:txBody>
+      </p:sp>
+      <p:sp>
+        <p:nvSpPr>
+          <p:cNvPr id="9" name="TextBox 8"/>
+          <p:cNvSpPr txBox="1"/>
+          <p:nvPr/>
+        </p:nvSpPr>
+        <p:spPr>
+          <a:xfrm>
+            <a:off x="1" y="1"/>
+            <a:ext cx="11" cy="0"/>
+          </a:xfrm>
+          <a:prstGeom prst="rect">
+            <a:avLst/>
+          </a:prstGeom>
+          <a:noFill/>
+        </p:spPr>
+        <p:txBody>
+          <a:bodyPr wrap="square">
+            <a:spAutoFit/>
+          </a:bodyPr>
+          <a:lstStyle/>
+          <a:p>
+            <a:pPr algn="l">
+              <a:defRPr sz="1400" b="0">
+                <a:solidFill>
+                  <a:srgbClr val="1A1A2E"/>
+                </a:solidFill>
+                <a:latin typeface="Calibri"/>
+              </a:defRPr>
+            </a:pPr>
+            <a:r>
+              <a:t>Supervisi, analisis, dan standarisasi pengembangan aplikasi perangkat daerah</a:t>
+            </a:r>
+          </a:p>
+        </p:txBody>
+      </p:sp>
+      <p:sp>
+        <p:nvSpPr>
+          <p:cNvPr id="10" name="Rectangle 9"/>
           <p:cNvSpPr/>
           <p:nvPr/>
         </p:nvSpPr>
         <p:spPr>
           <a:xfrm>
-            <a:off x="0" y="6446520"/>
-            <a:ext cx="12188952" cy="12700"/>
+            <a:off x="1" y="1"/>
+            <a:ext cx="11" cy="6350"/>
           </a:xfrm>
           <a:prstGeom prst="rect">
             <a:avLst/>
           </a:prstGeom>
           <a:solidFill>
-            <a:srgbClr val="DDDDDD"/>
+            <a:srgbClr val="D0D8E8"/>
           </a:solidFill>
           <a:ln>
             <a:noFill/>
@@ -6088,14 +5798,14 @@
       </p:sp>
       <p:sp>
         <p:nvSpPr>
-          <p:cNvPr id="10" name="TextBox 9"/>
+          <p:cNvPr id="11" name="TextBox 10"/>
           <p:cNvSpPr txBox="1"/>
           <p:nvPr/>
         </p:nvSpPr>
         <p:spPr>
           <a:xfrm>
-            <a:off x="822960" y="6510528"/>
-            <a:ext cx="10543032" cy="274320"/>
+            <a:off x="0" y="1"/>
+            <a:ext cx="0" cy="0"/>
           </a:xfrm>
           <a:prstGeom prst="rect">
             <a:avLst/>
@@ -6109,15 +5819,396 @@
           <a:lstStyle/>
           <a:p>
             <a:pPr algn="l">
-              <a:defRPr sz="900" b="0">
-                <a:solidFill>
-                  <a:srgbClr val="8B97A8"/>
+              <a:defRPr sz="1600" b="1">
+                <a:solidFill>
+                  <a:srgbClr val="C8962E"/>
                 </a:solidFill>
                 <a:latin typeface="Calibri"/>
               </a:defRPr>
             </a:pPr>
             <a:r>
-              <a:t>Bidang e-Government — Diskominfostandi Kota Bekasi</a:t>
+              <a:t>2.</a:t>
+            </a:r>
+          </a:p>
+        </p:txBody>
+      </p:sp>
+      <p:sp>
+        <p:nvSpPr>
+          <p:cNvPr id="12" name="TextBox 11"/>
+          <p:cNvSpPr txBox="1"/>
+          <p:nvPr/>
+        </p:nvSpPr>
+        <p:spPr>
+          <a:xfrm>
+            <a:off x="1" y="1"/>
+            <a:ext cx="11" cy="0"/>
+          </a:xfrm>
+          <a:prstGeom prst="rect">
+            <a:avLst/>
+          </a:prstGeom>
+          <a:noFill/>
+        </p:spPr>
+        <p:txBody>
+          <a:bodyPr wrap="square">
+            <a:spAutoFit/>
+          </a:bodyPr>
+          <a:lstStyle/>
+          <a:p>
+            <a:pPr algn="l">
+              <a:defRPr sz="1400" b="0">
+                <a:solidFill>
+                  <a:srgbClr val="1A1A2E"/>
+                </a:solidFill>
+                <a:latin typeface="Calibri"/>
+              </a:defRPr>
+            </a:pPr>
+            <a:r>
+              <a:t>Mengelola dan mengembangkan Sistem Penghubung Layanan Pemerintah (SPLP)</a:t>
+            </a:r>
+          </a:p>
+        </p:txBody>
+      </p:sp>
+      <p:sp>
+        <p:nvSpPr>
+          <p:cNvPr id="13" name="Rectangle 12"/>
+          <p:cNvSpPr/>
+          <p:nvPr/>
+        </p:nvSpPr>
+        <p:spPr>
+          <a:xfrm>
+            <a:off x="1" y="2"/>
+            <a:ext cx="11" cy="6350"/>
+          </a:xfrm>
+          <a:prstGeom prst="rect">
+            <a:avLst/>
+          </a:prstGeom>
+          <a:solidFill>
+            <a:srgbClr val="D0D8E8"/>
+          </a:solidFill>
+          <a:ln>
+            <a:noFill/>
+          </a:ln>
+        </p:spPr>
+        <p:style>
+          <a:lnRef idx="1">
+            <a:schemeClr val="accent1"/>
+          </a:lnRef>
+          <a:fillRef idx="3">
+            <a:schemeClr val="accent1"/>
+          </a:fillRef>
+          <a:effectRef idx="2">
+            <a:schemeClr val="accent1"/>
+          </a:effectRef>
+          <a:fontRef idx="minor">
+            <a:schemeClr val="lt1"/>
+          </a:fontRef>
+        </p:style>
+        <p:txBody>
+          <a:bodyPr rtlCol="0" anchor="ctr"/>
+          <a:lstStyle/>
+          <a:p>
+            <a:pPr algn="ctr"/>
+          </a:p>
+        </p:txBody>
+      </p:sp>
+      <p:sp>
+        <p:nvSpPr>
+          <p:cNvPr id="14" name="TextBox 13"/>
+          <p:cNvSpPr txBox="1"/>
+          <p:nvPr/>
+        </p:nvSpPr>
+        <p:spPr>
+          <a:xfrm>
+            <a:off x="0" y="2"/>
+            <a:ext cx="0" cy="0"/>
+          </a:xfrm>
+          <a:prstGeom prst="rect">
+            <a:avLst/>
+          </a:prstGeom>
+          <a:noFill/>
+        </p:spPr>
+        <p:txBody>
+          <a:bodyPr wrap="square">
+            <a:spAutoFit/>
+          </a:bodyPr>
+          <a:lstStyle/>
+          <a:p>
+            <a:pPr algn="l">
+              <a:defRPr sz="1600" b="1">
+                <a:solidFill>
+                  <a:srgbClr val="C8962E"/>
+                </a:solidFill>
+                <a:latin typeface="Calibri"/>
+              </a:defRPr>
+            </a:pPr>
+            <a:r>
+              <a:t>3.</a:t>
+            </a:r>
+          </a:p>
+        </p:txBody>
+      </p:sp>
+      <p:sp>
+        <p:nvSpPr>
+          <p:cNvPr id="15" name="TextBox 14"/>
+          <p:cNvSpPr txBox="1"/>
+          <p:nvPr/>
+        </p:nvSpPr>
+        <p:spPr>
+          <a:xfrm>
+            <a:off x="1" y="2"/>
+            <a:ext cx="11" cy="0"/>
+          </a:xfrm>
+          <a:prstGeom prst="rect">
+            <a:avLst/>
+          </a:prstGeom>
+          <a:noFill/>
+        </p:spPr>
+        <p:txBody>
+          <a:bodyPr wrap="square">
+            <a:spAutoFit/>
+          </a:bodyPr>
+          <a:lstStyle/>
+          <a:p>
+            <a:pPr algn="l">
+              <a:defRPr sz="1400" b="0">
+                <a:solidFill>
+                  <a:srgbClr val="1A1A2E"/>
+                </a:solidFill>
+                <a:latin typeface="Calibri"/>
+              </a:defRPr>
+            </a:pPr>
+            <a:r>
+              <a:t>Pengelolaan domain dan subdomain pemerintah daerah</a:t>
+            </a:r>
+          </a:p>
+        </p:txBody>
+      </p:sp>
+      <p:sp>
+        <p:nvSpPr>
+          <p:cNvPr id="16" name="Rectangle 15"/>
+          <p:cNvSpPr/>
+          <p:nvPr/>
+        </p:nvSpPr>
+        <p:spPr>
+          <a:xfrm>
+            <a:off x="1" y="2"/>
+            <a:ext cx="11" cy="6350"/>
+          </a:xfrm>
+          <a:prstGeom prst="rect">
+            <a:avLst/>
+          </a:prstGeom>
+          <a:solidFill>
+            <a:srgbClr val="D0D8E8"/>
+          </a:solidFill>
+          <a:ln>
+            <a:noFill/>
+          </a:ln>
+        </p:spPr>
+        <p:style>
+          <a:lnRef idx="1">
+            <a:schemeClr val="accent1"/>
+          </a:lnRef>
+          <a:fillRef idx="3">
+            <a:schemeClr val="accent1"/>
+          </a:fillRef>
+          <a:effectRef idx="2">
+            <a:schemeClr val="accent1"/>
+          </a:effectRef>
+          <a:fontRef idx="minor">
+            <a:schemeClr val="lt1"/>
+          </a:fontRef>
+        </p:style>
+        <p:txBody>
+          <a:bodyPr rtlCol="0" anchor="ctr"/>
+          <a:lstStyle/>
+          <a:p>
+            <a:pPr algn="ctr"/>
+          </a:p>
+        </p:txBody>
+      </p:sp>
+      <p:sp>
+        <p:nvSpPr>
+          <p:cNvPr id="17" name="TextBox 16"/>
+          <p:cNvSpPr txBox="1"/>
+          <p:nvPr/>
+        </p:nvSpPr>
+        <p:spPr>
+          <a:xfrm>
+            <a:off x="0" y="2"/>
+            <a:ext cx="0" cy="0"/>
+          </a:xfrm>
+          <a:prstGeom prst="rect">
+            <a:avLst/>
+          </a:prstGeom>
+          <a:noFill/>
+        </p:spPr>
+        <p:txBody>
+          <a:bodyPr wrap="square">
+            <a:spAutoFit/>
+          </a:bodyPr>
+          <a:lstStyle/>
+          <a:p>
+            <a:pPr algn="l">
+              <a:defRPr sz="1600" b="1">
+                <a:solidFill>
+                  <a:srgbClr val="C8962E"/>
+                </a:solidFill>
+                <a:latin typeface="Calibri"/>
+              </a:defRPr>
+            </a:pPr>
+            <a:r>
+              <a:t>4.</a:t>
+            </a:r>
+          </a:p>
+        </p:txBody>
+      </p:sp>
+      <p:sp>
+        <p:nvSpPr>
+          <p:cNvPr id="18" name="TextBox 17"/>
+          <p:cNvSpPr txBox="1"/>
+          <p:nvPr/>
+        </p:nvSpPr>
+        <p:spPr>
+          <a:xfrm>
+            <a:off x="1" y="2"/>
+            <a:ext cx="11" cy="0"/>
+          </a:xfrm>
+          <a:prstGeom prst="rect">
+            <a:avLst/>
+          </a:prstGeom>
+          <a:noFill/>
+        </p:spPr>
+        <p:txBody>
+          <a:bodyPr wrap="square">
+            <a:spAutoFit/>
+          </a:bodyPr>
+          <a:lstStyle/>
+          <a:p>
+            <a:pPr algn="l">
+              <a:defRPr sz="1400" b="0">
+                <a:solidFill>
+                  <a:srgbClr val="1A1A2E"/>
+                </a:solidFill>
+                <a:latin typeface="Calibri"/>
+              </a:defRPr>
+            </a:pPr>
+            <a:r>
+              <a:t>Sosialisasi dan peningkatan kapasitas SDM pengelola sistem</a:t>
+            </a:r>
+          </a:p>
+        </p:txBody>
+      </p:sp>
+      <p:sp>
+        <p:nvSpPr>
+          <p:cNvPr id="19" name="Rectangle 18"/>
+          <p:cNvSpPr/>
+          <p:nvPr/>
+        </p:nvSpPr>
+        <p:spPr>
+          <a:xfrm>
+            <a:off x="0" y="7"/>
+            <a:ext cx="13" cy="25400"/>
+          </a:xfrm>
+          <a:prstGeom prst="rect">
+            <a:avLst/>
+          </a:prstGeom>
+          <a:solidFill>
+            <a:srgbClr val="0A1628"/>
+          </a:solidFill>
+          <a:ln>
+            <a:noFill/>
+          </a:ln>
+        </p:spPr>
+        <p:style>
+          <a:lnRef idx="1">
+            <a:schemeClr val="accent1"/>
+          </a:lnRef>
+          <a:fillRef idx="3">
+            <a:schemeClr val="accent1"/>
+          </a:fillRef>
+          <a:effectRef idx="2">
+            <a:schemeClr val="accent1"/>
+          </a:effectRef>
+          <a:fontRef idx="minor">
+            <a:schemeClr val="lt1"/>
+          </a:fontRef>
+        </p:style>
+        <p:txBody>
+          <a:bodyPr rtlCol="0" anchor="ctr"/>
+          <a:lstStyle/>
+          <a:p>
+            <a:pPr algn="ctr"/>
+          </a:p>
+        </p:txBody>
+      </p:sp>
+      <p:sp>
+        <p:nvSpPr>
+          <p:cNvPr id="20" name="TextBox 19"/>
+          <p:cNvSpPr txBox="1"/>
+          <p:nvPr/>
+        </p:nvSpPr>
+        <p:spPr>
+          <a:xfrm>
+            <a:off x="0" y="7"/>
+            <a:ext cx="4" cy="0"/>
+          </a:xfrm>
+          <a:prstGeom prst="rect">
+            <a:avLst/>
+          </a:prstGeom>
+          <a:noFill/>
+        </p:spPr>
+        <p:txBody>
+          <a:bodyPr wrap="square">
+            <a:spAutoFit/>
+          </a:bodyPr>
+          <a:lstStyle/>
+          <a:p>
+            <a:pPr algn="l">
+              <a:defRPr sz="700" b="0">
+                <a:solidFill>
+                  <a:srgbClr val="64748B"/>
+                </a:solidFill>
+                <a:latin typeface="Calibri"/>
+              </a:defRPr>
+            </a:pPr>
+            <a:r>
+              <a:t>Sumber: RESUME TUPOKSI egov.docx</a:t>
+            </a:r>
+          </a:p>
+        </p:txBody>
+      </p:sp>
+      <p:sp>
+        <p:nvSpPr>
+          <p:cNvPr id="21" name="TextBox 20"/>
+          <p:cNvSpPr txBox="1"/>
+          <p:nvPr/>
+        </p:nvSpPr>
+        <p:spPr>
+          <a:xfrm>
+            <a:off x="12" y="7"/>
+            <a:ext cx="0" cy="0"/>
+          </a:xfrm>
+          <a:prstGeom prst="rect">
+            <a:avLst/>
+          </a:prstGeom>
+          <a:noFill/>
+        </p:spPr>
+        <p:txBody>
+          <a:bodyPr wrap="square">
+            <a:spAutoFit/>
+          </a:bodyPr>
+          <a:lstStyle/>
+          <a:p>
+            <a:pPr algn="r">
+              <a:defRPr sz="800" b="0">
+                <a:solidFill>
+                  <a:srgbClr val="64748B"/>
+                </a:solidFill>
+                <a:latin typeface="Calibri"/>
+              </a:defRPr>
+            </a:pPr>
+            <a:r>
+              <a:t>4</a:t>
             </a:r>
           </a:p>
         </p:txBody>
@@ -6133,6 +6224,14 @@
 <file path=ppt/slides/slide5.xml><?xml version="1.0" encoding="utf-8"?>
 <p:sld xmlns:a="http://schemas.openxmlformats.org/drawingml/2006/main" xmlns:p="http://schemas.openxmlformats.org/presentationml/2006/main" xmlns:r="http://schemas.openxmlformats.org/officeDocument/2006/relationships">
   <p:cSld>
+    <p:bg>
+      <p:bgPr>
+        <a:solidFill>
+          <a:srgbClr val="F5F7FA"/>
+        </a:solidFill>
+        <a:effectLst/>
+      </p:bgPr>
+    </p:bg>
     <p:spTree>
       <p:nvGrpSpPr>
         <p:cNvPr id="1" name=""/>
@@ -6149,13 +6248,13 @@
         <p:spPr>
           <a:xfrm>
             <a:off x="0" y="0"/>
-            <a:ext cx="12188952" cy="50800"/>
+            <a:ext cx="13" cy="38100"/>
           </a:xfrm>
           <a:prstGeom prst="rect">
             <a:avLst/>
           </a:prstGeom>
           <a:solidFill>
-            <a:srgbClr val="D69E2E"/>
+            <a:srgbClr val="C8962E"/>
           </a:solidFill>
           <a:ln>
             <a:noFill/>
@@ -6185,56 +6284,20 @@
       </p:sp>
       <p:sp>
         <p:nvSpPr>
-          <p:cNvPr id="3" name="TextBox 2"/>
-          <p:cNvSpPr txBox="1"/>
-          <p:nvPr/>
-        </p:nvSpPr>
-        <p:spPr>
-          <a:xfrm>
-            <a:off x="822960" y="457200"/>
-            <a:ext cx="10543032" cy="640080"/>
-          </a:xfrm>
-          <a:prstGeom prst="rect">
-            <a:avLst/>
-          </a:prstGeom>
-          <a:noFill/>
-        </p:spPr>
-        <p:txBody>
-          <a:bodyPr wrap="square">
-            <a:spAutoFit/>
-          </a:bodyPr>
-          <a:lstStyle/>
-          <a:p>
-            <a:pPr algn="l">
-              <a:defRPr sz="3000" b="1">
-                <a:solidFill>
-                  <a:srgbClr val="1A365D"/>
-                </a:solidFill>
-                <a:latin typeface="Calibri"/>
-              </a:defRPr>
-            </a:pPr>
-            <a:r>
-              <a:t>Akselerasi Program Kota Cerdas</a:t>
-            </a:r>
-          </a:p>
-        </p:txBody>
-      </p:sp>
-      <p:sp>
-        <p:nvSpPr>
-          <p:cNvPr id="4" name="Rectangle 3"/>
+          <p:cNvPr id="3" name="Rectangle 2"/>
           <p:cNvSpPr/>
           <p:nvPr/>
         </p:nvSpPr>
         <p:spPr>
           <a:xfrm>
-            <a:off x="822960" y="1143000"/>
-            <a:ext cx="1371600" cy="25400"/>
+            <a:off x="0" y="38100"/>
+            <a:ext cx="13" cy="822959"/>
           </a:xfrm>
           <a:prstGeom prst="rect">
             <a:avLst/>
           </a:prstGeom>
           <a:solidFill>
-            <a:srgbClr val="D69E2E"/>
+            <a:srgbClr val="0A1628"/>
           </a:solidFill>
           <a:ln>
             <a:noFill/>
@@ -6264,56 +6327,20 @@
       </p:sp>
       <p:sp>
         <p:nvSpPr>
-          <p:cNvPr id="5" name="TextBox 4"/>
-          <p:cNvSpPr txBox="1"/>
-          <p:nvPr/>
-        </p:nvSpPr>
-        <p:spPr>
-          <a:xfrm>
-            <a:off x="822960" y="1234440"/>
-            <a:ext cx="10543032" cy="365760"/>
-          </a:xfrm>
-          <a:prstGeom prst="rect">
-            <a:avLst/>
-          </a:prstGeom>
-          <a:noFill/>
-        </p:spPr>
-        <p:txBody>
-          <a:bodyPr wrap="square">
-            <a:spAutoFit/>
-          </a:bodyPr>
-          <a:lstStyle/>
-          <a:p>
-            <a:pPr algn="l">
-              <a:defRPr sz="1400" b="0">
-                <a:solidFill>
-                  <a:srgbClr val="4A5568"/>
-                </a:solidFill>
-                <a:latin typeface="Calibri"/>
-              </a:defRPr>
-            </a:pPr>
-            <a:r>
-              <a:t>Strategi dan kolaborasi menuju Smart City yang terintegrasi</a:t>
-            </a:r>
-          </a:p>
-        </p:txBody>
-      </p:sp>
-      <p:sp>
-        <p:nvSpPr>
-          <p:cNvPr id="6" name="Rectangle 5"/>
+          <p:cNvPr id="4" name="Rectangle 3"/>
           <p:cNvSpPr/>
           <p:nvPr/>
         </p:nvSpPr>
         <p:spPr>
           <a:xfrm>
-            <a:off x="822960" y="1645920"/>
-            <a:ext cx="50800" cy="4114800"/>
+            <a:off x="0" y="0"/>
+            <a:ext cx="0" cy="0"/>
           </a:xfrm>
           <a:prstGeom prst="rect">
             <a:avLst/>
           </a:prstGeom>
           <a:solidFill>
-            <a:srgbClr val="0B839F"/>
+            <a:srgbClr val="C8962E"/>
           </a:solidFill>
           <a:ln>
             <a:noFill/>
@@ -6343,14 +6370,14 @@
       </p:sp>
       <p:sp>
         <p:nvSpPr>
-          <p:cNvPr id="7" name="TextBox 6"/>
+          <p:cNvPr id="5" name="TextBox 4"/>
           <p:cNvSpPr txBox="1"/>
           <p:nvPr/>
         </p:nvSpPr>
         <p:spPr>
           <a:xfrm>
-            <a:off x="1097280" y="1737360"/>
-            <a:ext cx="10268712" cy="91440"/>
+            <a:off x="0" y="0"/>
+            <a:ext cx="11" cy="0"/>
           </a:xfrm>
           <a:prstGeom prst="rect">
             <a:avLst/>
@@ -6364,86 +6391,71 @@
           <a:lstStyle/>
           <a:p>
             <a:pPr algn="l">
-              <a:spcAft>
-                <a:spcPts val="1200"/>
-              </a:spcAft>
-              <a:defRPr sz="1500" b="0">
-                <a:solidFill>
-                  <a:srgbClr val="1A202C"/>
+              <a:defRPr sz="2000" b="1">
+                <a:solidFill>
+                  <a:srgbClr val="FFFFFF"/>
                 </a:solidFill>
                 <a:latin typeface="Calibri"/>
               </a:defRPr>
             </a:pPr>
             <a:r>
-              <a:t>▸  Menyusun strategi, rencana aksi, dan masterplan Kota Cerdas</a:t>
-            </a:r>
-          </a:p>
-          <a:p>
-            <a:pPr>
-              <a:spcAft>
-                <a:spcPts val="1200"/>
-              </a:spcAft>
-              <a:defRPr sz="1500">
-                <a:solidFill>
-                  <a:srgbClr val="1A202C"/>
+              <a:t>Akselerasi Program Kota Cerdas</a:t>
+            </a:r>
+          </a:p>
+        </p:txBody>
+      </p:sp>
+      <p:sp>
+        <p:nvSpPr>
+          <p:cNvPr id="6" name="TextBox 5"/>
+          <p:cNvSpPr txBox="1"/>
+          <p:nvPr/>
+        </p:nvSpPr>
+        <p:spPr>
+          <a:xfrm>
+            <a:off x="0" y="0"/>
+            <a:ext cx="11" cy="0"/>
+          </a:xfrm>
+          <a:prstGeom prst="rect">
+            <a:avLst/>
+          </a:prstGeom>
+          <a:noFill/>
+        </p:spPr>
+        <p:txBody>
+          <a:bodyPr wrap="square">
+            <a:spAutoFit/>
+          </a:bodyPr>
+          <a:lstStyle/>
+          <a:p>
+            <a:pPr algn="l">
+              <a:defRPr sz="900" b="0">
+                <a:solidFill>
+                  <a:srgbClr val="64748B"/>
                 </a:solidFill>
                 <a:latin typeface="Calibri"/>
               </a:defRPr>
             </a:pPr>
             <a:r>
-              <a:t>▸  Membangun kolaborasi dengan pemangku kepentingan (pemerintah, swasta, akademisi, masyarakat)</a:t>
-            </a:r>
-          </a:p>
-          <a:p>
-            <a:pPr>
-              <a:spcAft>
-                <a:spcPts val="1200"/>
-              </a:spcAft>
-              <a:defRPr sz="1500">
-                <a:solidFill>
-                  <a:srgbClr val="1A202C"/>
-                </a:solidFill>
-                <a:latin typeface="Calibri"/>
-              </a:defRPr>
-            </a:pPr>
-            <a:r>
-              <a:t>▸  Mengoordinasikan dan mengevaluasi program Kota Cerdas</a:t>
-            </a:r>
-          </a:p>
-          <a:p>
-            <a:pPr>
-              <a:spcAft>
-                <a:spcPts val="1200"/>
-              </a:spcAft>
-              <a:defRPr sz="1500">
-                <a:solidFill>
-                  <a:srgbClr val="1A202C"/>
-                </a:solidFill>
-                <a:latin typeface="Calibri"/>
-              </a:defRPr>
-            </a:pPr>
-            <a:r>
-              <a:t>▸  Menyelaraskan rencana induk dengan dokumen perencanaan daerah</a:t>
-            </a:r>
-          </a:p>
-        </p:txBody>
-      </p:sp>
-      <p:sp>
-        <p:nvSpPr>
-          <p:cNvPr id="8" name="Rectangle 7"/>
+              <a:t>Strategi dan kolaborasi menuju Smart City yang terintegrasi</a:t>
+            </a:r>
+          </a:p>
+        </p:txBody>
+      </p:sp>
+      <p:sp>
+        <p:nvSpPr>
+          <p:cNvPr id="7" name="Rectangle 6"/>
           <p:cNvSpPr/>
           <p:nvPr/>
         </p:nvSpPr>
         <p:spPr>
           <a:xfrm>
-            <a:off x="0" y="6446520"/>
-            <a:ext cx="12188952" cy="411480"/>
+            <a:off x="0" y="1"/>
+            <a:ext cx="50800" cy="3474720"/>
           </a:xfrm>
           <a:prstGeom prst="rect">
             <a:avLst/>
           </a:prstGeom>
           <a:solidFill>
-            <a:srgbClr val="FAFAFA"/>
+            <a:srgbClr val="0A1628"/>
           </a:solidFill>
           <a:ln>
             <a:noFill/>
@@ -6473,20 +6485,92 @@
       </p:sp>
       <p:sp>
         <p:nvSpPr>
-          <p:cNvPr id="9" name="Rectangle 8"/>
+          <p:cNvPr id="8" name="TextBox 7"/>
+          <p:cNvSpPr txBox="1"/>
+          <p:nvPr/>
+        </p:nvSpPr>
+        <p:spPr>
+          <a:xfrm>
+            <a:off x="0" y="1"/>
+            <a:ext cx="0" cy="0"/>
+          </a:xfrm>
+          <a:prstGeom prst="rect">
+            <a:avLst/>
+          </a:prstGeom>
+          <a:noFill/>
+        </p:spPr>
+        <p:txBody>
+          <a:bodyPr wrap="square">
+            <a:spAutoFit/>
+          </a:bodyPr>
+          <a:lstStyle/>
+          <a:p>
+            <a:pPr algn="l">
+              <a:defRPr sz="1600" b="1">
+                <a:solidFill>
+                  <a:srgbClr val="C8962E"/>
+                </a:solidFill>
+                <a:latin typeface="Calibri"/>
+              </a:defRPr>
+            </a:pPr>
+            <a:r>
+              <a:t>1.</a:t>
+            </a:r>
+          </a:p>
+        </p:txBody>
+      </p:sp>
+      <p:sp>
+        <p:nvSpPr>
+          <p:cNvPr id="9" name="TextBox 8"/>
+          <p:cNvSpPr txBox="1"/>
+          <p:nvPr/>
+        </p:nvSpPr>
+        <p:spPr>
+          <a:xfrm>
+            <a:off x="1" y="1"/>
+            <a:ext cx="11" cy="0"/>
+          </a:xfrm>
+          <a:prstGeom prst="rect">
+            <a:avLst/>
+          </a:prstGeom>
+          <a:noFill/>
+        </p:spPr>
+        <p:txBody>
+          <a:bodyPr wrap="square">
+            <a:spAutoFit/>
+          </a:bodyPr>
+          <a:lstStyle/>
+          <a:p>
+            <a:pPr algn="l">
+              <a:defRPr sz="1400" b="0">
+                <a:solidFill>
+                  <a:srgbClr val="1A1A2E"/>
+                </a:solidFill>
+                <a:latin typeface="Calibri"/>
+              </a:defRPr>
+            </a:pPr>
+            <a:r>
+              <a:t>Menyusun strategi, rencana aksi, dan masterplan Kota Cerdas</a:t>
+            </a:r>
+          </a:p>
+        </p:txBody>
+      </p:sp>
+      <p:sp>
+        <p:nvSpPr>
+          <p:cNvPr id="10" name="Rectangle 9"/>
           <p:cNvSpPr/>
           <p:nvPr/>
         </p:nvSpPr>
         <p:spPr>
           <a:xfrm>
-            <a:off x="0" y="6446520"/>
-            <a:ext cx="12188952" cy="12700"/>
+            <a:off x="1" y="1"/>
+            <a:ext cx="11" cy="6350"/>
           </a:xfrm>
           <a:prstGeom prst="rect">
             <a:avLst/>
           </a:prstGeom>
           <a:solidFill>
-            <a:srgbClr val="DDDDDD"/>
+            <a:srgbClr val="D0D8E8"/>
           </a:solidFill>
           <a:ln>
             <a:noFill/>
@@ -6516,14 +6600,14 @@
       </p:sp>
       <p:sp>
         <p:nvSpPr>
-          <p:cNvPr id="10" name="TextBox 9"/>
+          <p:cNvPr id="11" name="TextBox 10"/>
           <p:cNvSpPr txBox="1"/>
           <p:nvPr/>
         </p:nvSpPr>
         <p:spPr>
           <a:xfrm>
-            <a:off x="822960" y="6510528"/>
-            <a:ext cx="10543032" cy="274320"/>
+            <a:off x="0" y="1"/>
+            <a:ext cx="0" cy="0"/>
           </a:xfrm>
           <a:prstGeom prst="rect">
             <a:avLst/>
@@ -6537,15 +6621,396 @@
           <a:lstStyle/>
           <a:p>
             <a:pPr algn="l">
-              <a:defRPr sz="900" b="0">
-                <a:solidFill>
-                  <a:srgbClr val="8B97A8"/>
+              <a:defRPr sz="1600" b="1">
+                <a:solidFill>
+                  <a:srgbClr val="C8962E"/>
                 </a:solidFill>
                 <a:latin typeface="Calibri"/>
               </a:defRPr>
             </a:pPr>
             <a:r>
-              <a:t>Bidang e-Government — Diskominfostandi Kota Bekasi</a:t>
+              <a:t>2.</a:t>
+            </a:r>
+          </a:p>
+        </p:txBody>
+      </p:sp>
+      <p:sp>
+        <p:nvSpPr>
+          <p:cNvPr id="12" name="TextBox 11"/>
+          <p:cNvSpPr txBox="1"/>
+          <p:nvPr/>
+        </p:nvSpPr>
+        <p:spPr>
+          <a:xfrm>
+            <a:off x="1" y="1"/>
+            <a:ext cx="11" cy="0"/>
+          </a:xfrm>
+          <a:prstGeom prst="rect">
+            <a:avLst/>
+          </a:prstGeom>
+          <a:noFill/>
+        </p:spPr>
+        <p:txBody>
+          <a:bodyPr wrap="square">
+            <a:spAutoFit/>
+          </a:bodyPr>
+          <a:lstStyle/>
+          <a:p>
+            <a:pPr algn="l">
+              <a:defRPr sz="1400" b="0">
+                <a:solidFill>
+                  <a:srgbClr val="1A1A2E"/>
+                </a:solidFill>
+                <a:latin typeface="Calibri"/>
+              </a:defRPr>
+            </a:pPr>
+            <a:r>
+              <a:t>Membangun kolaborasi dengan pemangku kepentingan lintas sektor</a:t>
+            </a:r>
+          </a:p>
+        </p:txBody>
+      </p:sp>
+      <p:sp>
+        <p:nvSpPr>
+          <p:cNvPr id="13" name="Rectangle 12"/>
+          <p:cNvSpPr/>
+          <p:nvPr/>
+        </p:nvSpPr>
+        <p:spPr>
+          <a:xfrm>
+            <a:off x="1" y="2"/>
+            <a:ext cx="11" cy="6350"/>
+          </a:xfrm>
+          <a:prstGeom prst="rect">
+            <a:avLst/>
+          </a:prstGeom>
+          <a:solidFill>
+            <a:srgbClr val="D0D8E8"/>
+          </a:solidFill>
+          <a:ln>
+            <a:noFill/>
+          </a:ln>
+        </p:spPr>
+        <p:style>
+          <a:lnRef idx="1">
+            <a:schemeClr val="accent1"/>
+          </a:lnRef>
+          <a:fillRef idx="3">
+            <a:schemeClr val="accent1"/>
+          </a:fillRef>
+          <a:effectRef idx="2">
+            <a:schemeClr val="accent1"/>
+          </a:effectRef>
+          <a:fontRef idx="minor">
+            <a:schemeClr val="lt1"/>
+          </a:fontRef>
+        </p:style>
+        <p:txBody>
+          <a:bodyPr rtlCol="0" anchor="ctr"/>
+          <a:lstStyle/>
+          <a:p>
+            <a:pPr algn="ctr"/>
+          </a:p>
+        </p:txBody>
+      </p:sp>
+      <p:sp>
+        <p:nvSpPr>
+          <p:cNvPr id="14" name="TextBox 13"/>
+          <p:cNvSpPr txBox="1"/>
+          <p:nvPr/>
+        </p:nvSpPr>
+        <p:spPr>
+          <a:xfrm>
+            <a:off x="0" y="2"/>
+            <a:ext cx="0" cy="0"/>
+          </a:xfrm>
+          <a:prstGeom prst="rect">
+            <a:avLst/>
+          </a:prstGeom>
+          <a:noFill/>
+        </p:spPr>
+        <p:txBody>
+          <a:bodyPr wrap="square">
+            <a:spAutoFit/>
+          </a:bodyPr>
+          <a:lstStyle/>
+          <a:p>
+            <a:pPr algn="l">
+              <a:defRPr sz="1600" b="1">
+                <a:solidFill>
+                  <a:srgbClr val="C8962E"/>
+                </a:solidFill>
+                <a:latin typeface="Calibri"/>
+              </a:defRPr>
+            </a:pPr>
+            <a:r>
+              <a:t>3.</a:t>
+            </a:r>
+          </a:p>
+        </p:txBody>
+      </p:sp>
+      <p:sp>
+        <p:nvSpPr>
+          <p:cNvPr id="15" name="TextBox 14"/>
+          <p:cNvSpPr txBox="1"/>
+          <p:nvPr/>
+        </p:nvSpPr>
+        <p:spPr>
+          <a:xfrm>
+            <a:off x="1" y="2"/>
+            <a:ext cx="11" cy="0"/>
+          </a:xfrm>
+          <a:prstGeom prst="rect">
+            <a:avLst/>
+          </a:prstGeom>
+          <a:noFill/>
+        </p:spPr>
+        <p:txBody>
+          <a:bodyPr wrap="square">
+            <a:spAutoFit/>
+          </a:bodyPr>
+          <a:lstStyle/>
+          <a:p>
+            <a:pPr algn="l">
+              <a:defRPr sz="1400" b="0">
+                <a:solidFill>
+                  <a:srgbClr val="1A1A2E"/>
+                </a:solidFill>
+                <a:latin typeface="Calibri"/>
+              </a:defRPr>
+            </a:pPr>
+            <a:r>
+              <a:t>Mengoordinasikan dan mengevaluasi program Kota Cerdas</a:t>
+            </a:r>
+          </a:p>
+        </p:txBody>
+      </p:sp>
+      <p:sp>
+        <p:nvSpPr>
+          <p:cNvPr id="16" name="Rectangle 15"/>
+          <p:cNvSpPr/>
+          <p:nvPr/>
+        </p:nvSpPr>
+        <p:spPr>
+          <a:xfrm>
+            <a:off x="1" y="2"/>
+            <a:ext cx="11" cy="6350"/>
+          </a:xfrm>
+          <a:prstGeom prst="rect">
+            <a:avLst/>
+          </a:prstGeom>
+          <a:solidFill>
+            <a:srgbClr val="D0D8E8"/>
+          </a:solidFill>
+          <a:ln>
+            <a:noFill/>
+          </a:ln>
+        </p:spPr>
+        <p:style>
+          <a:lnRef idx="1">
+            <a:schemeClr val="accent1"/>
+          </a:lnRef>
+          <a:fillRef idx="3">
+            <a:schemeClr val="accent1"/>
+          </a:fillRef>
+          <a:effectRef idx="2">
+            <a:schemeClr val="accent1"/>
+          </a:effectRef>
+          <a:fontRef idx="minor">
+            <a:schemeClr val="lt1"/>
+          </a:fontRef>
+        </p:style>
+        <p:txBody>
+          <a:bodyPr rtlCol="0" anchor="ctr"/>
+          <a:lstStyle/>
+          <a:p>
+            <a:pPr algn="ctr"/>
+          </a:p>
+        </p:txBody>
+      </p:sp>
+      <p:sp>
+        <p:nvSpPr>
+          <p:cNvPr id="17" name="TextBox 16"/>
+          <p:cNvSpPr txBox="1"/>
+          <p:nvPr/>
+        </p:nvSpPr>
+        <p:spPr>
+          <a:xfrm>
+            <a:off x="0" y="2"/>
+            <a:ext cx="0" cy="0"/>
+          </a:xfrm>
+          <a:prstGeom prst="rect">
+            <a:avLst/>
+          </a:prstGeom>
+          <a:noFill/>
+        </p:spPr>
+        <p:txBody>
+          <a:bodyPr wrap="square">
+            <a:spAutoFit/>
+          </a:bodyPr>
+          <a:lstStyle/>
+          <a:p>
+            <a:pPr algn="l">
+              <a:defRPr sz="1600" b="1">
+                <a:solidFill>
+                  <a:srgbClr val="C8962E"/>
+                </a:solidFill>
+                <a:latin typeface="Calibri"/>
+              </a:defRPr>
+            </a:pPr>
+            <a:r>
+              <a:t>4.</a:t>
+            </a:r>
+          </a:p>
+        </p:txBody>
+      </p:sp>
+      <p:sp>
+        <p:nvSpPr>
+          <p:cNvPr id="18" name="TextBox 17"/>
+          <p:cNvSpPr txBox="1"/>
+          <p:nvPr/>
+        </p:nvSpPr>
+        <p:spPr>
+          <a:xfrm>
+            <a:off x="1" y="2"/>
+            <a:ext cx="11" cy="0"/>
+          </a:xfrm>
+          <a:prstGeom prst="rect">
+            <a:avLst/>
+          </a:prstGeom>
+          <a:noFill/>
+        </p:spPr>
+        <p:txBody>
+          <a:bodyPr wrap="square">
+            <a:spAutoFit/>
+          </a:bodyPr>
+          <a:lstStyle/>
+          <a:p>
+            <a:pPr algn="l">
+              <a:defRPr sz="1400" b="0">
+                <a:solidFill>
+                  <a:srgbClr val="1A1A2E"/>
+                </a:solidFill>
+                <a:latin typeface="Calibri"/>
+              </a:defRPr>
+            </a:pPr>
+            <a:r>
+              <a:t>Menyelaraskan rencana induk dengan dokumen perencanaan daerah</a:t>
+            </a:r>
+          </a:p>
+        </p:txBody>
+      </p:sp>
+      <p:sp>
+        <p:nvSpPr>
+          <p:cNvPr id="19" name="Rectangle 18"/>
+          <p:cNvSpPr/>
+          <p:nvPr/>
+        </p:nvSpPr>
+        <p:spPr>
+          <a:xfrm>
+            <a:off x="0" y="7"/>
+            <a:ext cx="13" cy="25400"/>
+          </a:xfrm>
+          <a:prstGeom prst="rect">
+            <a:avLst/>
+          </a:prstGeom>
+          <a:solidFill>
+            <a:srgbClr val="0A1628"/>
+          </a:solidFill>
+          <a:ln>
+            <a:noFill/>
+          </a:ln>
+        </p:spPr>
+        <p:style>
+          <a:lnRef idx="1">
+            <a:schemeClr val="accent1"/>
+          </a:lnRef>
+          <a:fillRef idx="3">
+            <a:schemeClr val="accent1"/>
+          </a:fillRef>
+          <a:effectRef idx="2">
+            <a:schemeClr val="accent1"/>
+          </a:effectRef>
+          <a:fontRef idx="minor">
+            <a:schemeClr val="lt1"/>
+          </a:fontRef>
+        </p:style>
+        <p:txBody>
+          <a:bodyPr rtlCol="0" anchor="ctr"/>
+          <a:lstStyle/>
+          <a:p>
+            <a:pPr algn="ctr"/>
+          </a:p>
+        </p:txBody>
+      </p:sp>
+      <p:sp>
+        <p:nvSpPr>
+          <p:cNvPr id="20" name="TextBox 19"/>
+          <p:cNvSpPr txBox="1"/>
+          <p:nvPr/>
+        </p:nvSpPr>
+        <p:spPr>
+          <a:xfrm>
+            <a:off x="0" y="7"/>
+            <a:ext cx="4" cy="0"/>
+          </a:xfrm>
+          <a:prstGeom prst="rect">
+            <a:avLst/>
+          </a:prstGeom>
+          <a:noFill/>
+        </p:spPr>
+        <p:txBody>
+          <a:bodyPr wrap="square">
+            <a:spAutoFit/>
+          </a:bodyPr>
+          <a:lstStyle/>
+          <a:p>
+            <a:pPr algn="l">
+              <a:defRPr sz="700" b="0">
+                <a:solidFill>
+                  <a:srgbClr val="64748B"/>
+                </a:solidFill>
+                <a:latin typeface="Calibri"/>
+              </a:defRPr>
+            </a:pPr>
+            <a:r>
+              <a:t>Sumber: RESUME TUPOKSI egov.docx</a:t>
+            </a:r>
+          </a:p>
+        </p:txBody>
+      </p:sp>
+      <p:sp>
+        <p:nvSpPr>
+          <p:cNvPr id="21" name="TextBox 20"/>
+          <p:cNvSpPr txBox="1"/>
+          <p:nvPr/>
+        </p:nvSpPr>
+        <p:spPr>
+          <a:xfrm>
+            <a:off x="12" y="7"/>
+            <a:ext cx="0" cy="0"/>
+          </a:xfrm>
+          <a:prstGeom prst="rect">
+            <a:avLst/>
+          </a:prstGeom>
+          <a:noFill/>
+        </p:spPr>
+        <p:txBody>
+          <a:bodyPr wrap="square">
+            <a:spAutoFit/>
+          </a:bodyPr>
+          <a:lstStyle/>
+          <a:p>
+            <a:pPr algn="r">
+              <a:defRPr sz="800" b="0">
+                <a:solidFill>
+                  <a:srgbClr val="64748B"/>
+                </a:solidFill>
+                <a:latin typeface="Calibri"/>
+              </a:defRPr>
+            </a:pPr>
+            <a:r>
+              <a:t>5</a:t>
             </a:r>
           </a:p>
         </p:txBody>
@@ -6561,6 +7026,14 @@
 <file path=ppt/slides/slide6.xml><?xml version="1.0" encoding="utf-8"?>
 <p:sld xmlns:a="http://schemas.openxmlformats.org/drawingml/2006/main" xmlns:p="http://schemas.openxmlformats.org/presentationml/2006/main" xmlns:r="http://schemas.openxmlformats.org/officeDocument/2006/relationships">
   <p:cSld>
+    <p:bg>
+      <p:bgPr>
+        <a:solidFill>
+          <a:srgbClr val="F5F7FA"/>
+        </a:solidFill>
+        <a:effectLst/>
+      </p:bgPr>
+    </p:bg>
     <p:spTree>
       <p:nvGrpSpPr>
         <p:cNvPr id="1" name=""/>
@@ -6577,13 +7050,13 @@
         <p:spPr>
           <a:xfrm>
             <a:off x="0" y="0"/>
-            <a:ext cx="12188952" cy="50800"/>
+            <a:ext cx="13" cy="38100"/>
           </a:xfrm>
           <a:prstGeom prst="rect">
             <a:avLst/>
           </a:prstGeom>
           <a:solidFill>
-            <a:srgbClr val="D69E2E"/>
+            <a:srgbClr val="C8962E"/>
           </a:solidFill>
           <a:ln>
             <a:noFill/>
@@ -6613,56 +7086,20 @@
       </p:sp>
       <p:sp>
         <p:nvSpPr>
-          <p:cNvPr id="3" name="TextBox 2"/>
-          <p:cNvSpPr txBox="1"/>
-          <p:nvPr/>
-        </p:nvSpPr>
-        <p:spPr>
-          <a:xfrm>
-            <a:off x="822960" y="457200"/>
-            <a:ext cx="10543032" cy="640080"/>
-          </a:xfrm>
-          <a:prstGeom prst="rect">
-            <a:avLst/>
-          </a:prstGeom>
-          <a:noFill/>
-        </p:spPr>
-        <p:txBody>
-          <a:bodyPr wrap="square">
-            <a:spAutoFit/>
-          </a:bodyPr>
-          <a:lstStyle/>
-          <a:p>
-            <a:pPr algn="l">
-              <a:defRPr sz="3000" b="1">
-                <a:solidFill>
-                  <a:srgbClr val="1A365D"/>
-                </a:solidFill>
-                <a:latin typeface="Calibri"/>
-              </a:defRPr>
-            </a:pPr>
-            <a:r>
-              <a:t>Penguatan Tata Kelola SPBE</a:t>
-            </a:r>
-          </a:p>
-        </p:txBody>
-      </p:sp>
-      <p:sp>
-        <p:nvSpPr>
-          <p:cNvPr id="4" name="Rectangle 3"/>
+          <p:cNvPr id="3" name="Rectangle 2"/>
           <p:cNvSpPr/>
           <p:nvPr/>
         </p:nvSpPr>
         <p:spPr>
           <a:xfrm>
-            <a:off x="822960" y="1143000"/>
-            <a:ext cx="1371600" cy="25400"/>
+            <a:off x="0" y="38100"/>
+            <a:ext cx="13" cy="822959"/>
           </a:xfrm>
           <a:prstGeom prst="rect">
             <a:avLst/>
           </a:prstGeom>
           <a:solidFill>
-            <a:srgbClr val="D69E2E"/>
+            <a:srgbClr val="0A1628"/>
           </a:solidFill>
           <a:ln>
             <a:noFill/>
@@ -6692,56 +7129,20 @@
       </p:sp>
       <p:sp>
         <p:nvSpPr>
-          <p:cNvPr id="5" name="TextBox 4"/>
-          <p:cNvSpPr txBox="1"/>
-          <p:nvPr/>
-        </p:nvSpPr>
-        <p:spPr>
-          <a:xfrm>
-            <a:off x="822960" y="1234440"/>
-            <a:ext cx="10543032" cy="365760"/>
-          </a:xfrm>
-          <a:prstGeom prst="rect">
-            <a:avLst/>
-          </a:prstGeom>
-          <a:noFill/>
-        </p:spPr>
-        <p:txBody>
-          <a:bodyPr wrap="square">
-            <a:spAutoFit/>
-          </a:bodyPr>
-          <a:lstStyle/>
-          <a:p>
-            <a:pPr algn="l">
-              <a:defRPr sz="1400" b="0">
-                <a:solidFill>
-                  <a:srgbClr val="4A5568"/>
-                </a:solidFill>
-                <a:latin typeface="Calibri"/>
-              </a:defRPr>
-            </a:pPr>
-            <a:r>
-              <a:t>Kerangka kerja menuju Sistem Pemerintahan Berbasis Elektronik yang matang</a:t>
-            </a:r>
-          </a:p>
-        </p:txBody>
-      </p:sp>
-      <p:sp>
-        <p:nvSpPr>
-          <p:cNvPr id="6" name="Rectangle 5"/>
+          <p:cNvPr id="4" name="Rectangle 3"/>
           <p:cNvSpPr/>
           <p:nvPr/>
         </p:nvSpPr>
         <p:spPr>
           <a:xfrm>
-            <a:off x="822960" y="1645920"/>
-            <a:ext cx="50800" cy="4114800"/>
+            <a:off x="0" y="0"/>
+            <a:ext cx="0" cy="0"/>
           </a:xfrm>
           <a:prstGeom prst="rect">
             <a:avLst/>
           </a:prstGeom>
           <a:solidFill>
-            <a:srgbClr val="2B6CB0"/>
+            <a:srgbClr val="C8962E"/>
           </a:solidFill>
           <a:ln>
             <a:noFill/>
@@ -6771,14 +7172,14 @@
       </p:sp>
       <p:sp>
         <p:nvSpPr>
-          <p:cNvPr id="7" name="TextBox 6"/>
+          <p:cNvPr id="5" name="TextBox 4"/>
           <p:cNvSpPr txBox="1"/>
           <p:nvPr/>
         </p:nvSpPr>
         <p:spPr>
           <a:xfrm>
-            <a:off x="1097280" y="1737360"/>
-            <a:ext cx="10268712" cy="91440"/>
+            <a:off x="0" y="0"/>
+            <a:ext cx="11" cy="0"/>
           </a:xfrm>
           <a:prstGeom prst="rect">
             <a:avLst/>
@@ -6792,86 +7193,71 @@
           <a:lstStyle/>
           <a:p>
             <a:pPr algn="l">
-              <a:spcAft>
-                <a:spcPts val="1200"/>
-              </a:spcAft>
-              <a:defRPr sz="1500" b="0">
-                <a:solidFill>
-                  <a:srgbClr val="1A202C"/>
+              <a:defRPr sz="2000" b="1">
+                <a:solidFill>
+                  <a:srgbClr val="FFFFFF"/>
                 </a:solidFill>
                 <a:latin typeface="Calibri"/>
               </a:defRPr>
             </a:pPr>
             <a:r>
-              <a:t>▸  Menyusun strategi, roadmap, arsitektur, dan peta rencana SPBE</a:t>
-            </a:r>
-          </a:p>
-          <a:p>
-            <a:pPr>
-              <a:spcAft>
-                <a:spcPts val="1200"/>
-              </a:spcAft>
-              <a:defRPr sz="1500">
-                <a:solidFill>
-                  <a:srgbClr val="1A202C"/>
+              <a:t>Penguatan Tata Kelola SPBE</a:t>
+            </a:r>
+          </a:p>
+        </p:txBody>
+      </p:sp>
+      <p:sp>
+        <p:nvSpPr>
+          <p:cNvPr id="6" name="TextBox 5"/>
+          <p:cNvSpPr txBox="1"/>
+          <p:nvPr/>
+        </p:nvSpPr>
+        <p:spPr>
+          <a:xfrm>
+            <a:off x="0" y="0"/>
+            <a:ext cx="11" cy="0"/>
+          </a:xfrm>
+          <a:prstGeom prst="rect">
+            <a:avLst/>
+          </a:prstGeom>
+          <a:noFill/>
+        </p:spPr>
+        <p:txBody>
+          <a:bodyPr wrap="square">
+            <a:spAutoFit/>
+          </a:bodyPr>
+          <a:lstStyle/>
+          <a:p>
+            <a:pPr algn="l">
+              <a:defRPr sz="900" b="0">
+                <a:solidFill>
+                  <a:srgbClr val="64748B"/>
                 </a:solidFill>
                 <a:latin typeface="Calibri"/>
               </a:defRPr>
             </a:pPr>
             <a:r>
-              <a:t>▸  Melaksanakan dan mengoordinasikan program SPBE lintas perangkat daerah</a:t>
-            </a:r>
-          </a:p>
-          <a:p>
-            <a:pPr>
-              <a:spcAft>
-                <a:spcPts val="1200"/>
-              </a:spcAft>
-              <a:defRPr sz="1500">
-                <a:solidFill>
-                  <a:srgbClr val="1A202C"/>
-                </a:solidFill>
-                <a:latin typeface="Calibri"/>
-              </a:defRPr>
-            </a:pPr>
-            <a:r>
-              <a:t>▸  Mengembangkan kebijakan dan tata kelola SPBE</a:t>
-            </a:r>
-          </a:p>
-          <a:p>
-            <a:pPr>
-              <a:spcAft>
-                <a:spcPts val="1200"/>
-              </a:spcAft>
-              <a:defRPr sz="1500">
-                <a:solidFill>
-                  <a:srgbClr val="1A202C"/>
-                </a:solidFill>
-                <a:latin typeface="Calibri"/>
-              </a:defRPr>
-            </a:pPr>
-            <a:r>
-              <a:t>▸  Monitoring, evaluasi, dan rekomendasi perbaikan berkelanjutan</a:t>
-            </a:r>
-          </a:p>
-        </p:txBody>
-      </p:sp>
-      <p:sp>
-        <p:nvSpPr>
-          <p:cNvPr id="8" name="Rectangle 7"/>
+              <a:t>Kerangka kerja menuju Sistem Pemerintahan Berbasis Elektronik yang matang</a:t>
+            </a:r>
+          </a:p>
+        </p:txBody>
+      </p:sp>
+      <p:sp>
+        <p:nvSpPr>
+          <p:cNvPr id="7" name="Rectangle 6"/>
           <p:cNvSpPr/>
           <p:nvPr/>
         </p:nvSpPr>
         <p:spPr>
           <a:xfrm>
-            <a:off x="0" y="6446520"/>
-            <a:ext cx="12188952" cy="411480"/>
+            <a:off x="0" y="1"/>
+            <a:ext cx="50800" cy="3474720"/>
           </a:xfrm>
           <a:prstGeom prst="rect">
             <a:avLst/>
           </a:prstGeom>
           <a:solidFill>
-            <a:srgbClr val="FAFAFA"/>
+            <a:srgbClr val="0A1628"/>
           </a:solidFill>
           <a:ln>
             <a:noFill/>
@@ -6901,20 +7287,92 @@
       </p:sp>
       <p:sp>
         <p:nvSpPr>
-          <p:cNvPr id="9" name="Rectangle 8"/>
+          <p:cNvPr id="8" name="TextBox 7"/>
+          <p:cNvSpPr txBox="1"/>
+          <p:nvPr/>
+        </p:nvSpPr>
+        <p:spPr>
+          <a:xfrm>
+            <a:off x="0" y="1"/>
+            <a:ext cx="0" cy="0"/>
+          </a:xfrm>
+          <a:prstGeom prst="rect">
+            <a:avLst/>
+          </a:prstGeom>
+          <a:noFill/>
+        </p:spPr>
+        <p:txBody>
+          <a:bodyPr wrap="square">
+            <a:spAutoFit/>
+          </a:bodyPr>
+          <a:lstStyle/>
+          <a:p>
+            <a:pPr algn="l">
+              <a:defRPr sz="1600" b="1">
+                <a:solidFill>
+                  <a:srgbClr val="C8962E"/>
+                </a:solidFill>
+                <a:latin typeface="Calibri"/>
+              </a:defRPr>
+            </a:pPr>
+            <a:r>
+              <a:t>1.</a:t>
+            </a:r>
+          </a:p>
+        </p:txBody>
+      </p:sp>
+      <p:sp>
+        <p:nvSpPr>
+          <p:cNvPr id="9" name="TextBox 8"/>
+          <p:cNvSpPr txBox="1"/>
+          <p:nvPr/>
+        </p:nvSpPr>
+        <p:spPr>
+          <a:xfrm>
+            <a:off x="1" y="1"/>
+            <a:ext cx="11" cy="0"/>
+          </a:xfrm>
+          <a:prstGeom prst="rect">
+            <a:avLst/>
+          </a:prstGeom>
+          <a:noFill/>
+        </p:spPr>
+        <p:txBody>
+          <a:bodyPr wrap="square">
+            <a:spAutoFit/>
+          </a:bodyPr>
+          <a:lstStyle/>
+          <a:p>
+            <a:pPr algn="l">
+              <a:defRPr sz="1400" b="0">
+                <a:solidFill>
+                  <a:srgbClr val="1A1A2E"/>
+                </a:solidFill>
+                <a:latin typeface="Calibri"/>
+              </a:defRPr>
+            </a:pPr>
+            <a:r>
+              <a:t>Menyusun strategi, roadmap, arsitektur, dan peta rencana SPBE</a:t>
+            </a:r>
+          </a:p>
+        </p:txBody>
+      </p:sp>
+      <p:sp>
+        <p:nvSpPr>
+          <p:cNvPr id="10" name="Rectangle 9"/>
           <p:cNvSpPr/>
           <p:nvPr/>
         </p:nvSpPr>
         <p:spPr>
           <a:xfrm>
-            <a:off x="0" y="6446520"/>
-            <a:ext cx="12188952" cy="12700"/>
+            <a:off x="1" y="1"/>
+            <a:ext cx="11" cy="6350"/>
           </a:xfrm>
           <a:prstGeom prst="rect">
             <a:avLst/>
           </a:prstGeom>
           <a:solidFill>
-            <a:srgbClr val="DDDDDD"/>
+            <a:srgbClr val="D0D8E8"/>
           </a:solidFill>
           <a:ln>
             <a:noFill/>
@@ -6944,14 +7402,14 @@
       </p:sp>
       <p:sp>
         <p:nvSpPr>
-          <p:cNvPr id="10" name="TextBox 9"/>
+          <p:cNvPr id="11" name="TextBox 10"/>
           <p:cNvSpPr txBox="1"/>
           <p:nvPr/>
         </p:nvSpPr>
         <p:spPr>
           <a:xfrm>
-            <a:off x="822960" y="6510528"/>
-            <a:ext cx="10543032" cy="274320"/>
+            <a:off x="0" y="1"/>
+            <a:ext cx="0" cy="0"/>
           </a:xfrm>
           <a:prstGeom prst="rect">
             <a:avLst/>
@@ -6965,15 +7423,396 @@
           <a:lstStyle/>
           <a:p>
             <a:pPr algn="l">
-              <a:defRPr sz="900" b="0">
-                <a:solidFill>
-                  <a:srgbClr val="8B97A8"/>
+              <a:defRPr sz="1600" b="1">
+                <a:solidFill>
+                  <a:srgbClr val="C8962E"/>
                 </a:solidFill>
                 <a:latin typeface="Calibri"/>
               </a:defRPr>
             </a:pPr>
             <a:r>
-              <a:t>Bidang e-Government — Diskominfostandi Kota Bekasi</a:t>
+              <a:t>2.</a:t>
+            </a:r>
+          </a:p>
+        </p:txBody>
+      </p:sp>
+      <p:sp>
+        <p:nvSpPr>
+          <p:cNvPr id="12" name="TextBox 11"/>
+          <p:cNvSpPr txBox="1"/>
+          <p:nvPr/>
+        </p:nvSpPr>
+        <p:spPr>
+          <a:xfrm>
+            <a:off x="1" y="1"/>
+            <a:ext cx="11" cy="0"/>
+          </a:xfrm>
+          <a:prstGeom prst="rect">
+            <a:avLst/>
+          </a:prstGeom>
+          <a:noFill/>
+        </p:spPr>
+        <p:txBody>
+          <a:bodyPr wrap="square">
+            <a:spAutoFit/>
+          </a:bodyPr>
+          <a:lstStyle/>
+          <a:p>
+            <a:pPr algn="l">
+              <a:defRPr sz="1400" b="0">
+                <a:solidFill>
+                  <a:srgbClr val="1A1A2E"/>
+                </a:solidFill>
+                <a:latin typeface="Calibri"/>
+              </a:defRPr>
+            </a:pPr>
+            <a:r>
+              <a:t>Melaksanakan dan mengoordinasikan program SPBE lintas perangkat daerah</a:t>
+            </a:r>
+          </a:p>
+        </p:txBody>
+      </p:sp>
+      <p:sp>
+        <p:nvSpPr>
+          <p:cNvPr id="13" name="Rectangle 12"/>
+          <p:cNvSpPr/>
+          <p:nvPr/>
+        </p:nvSpPr>
+        <p:spPr>
+          <a:xfrm>
+            <a:off x="1" y="2"/>
+            <a:ext cx="11" cy="6350"/>
+          </a:xfrm>
+          <a:prstGeom prst="rect">
+            <a:avLst/>
+          </a:prstGeom>
+          <a:solidFill>
+            <a:srgbClr val="D0D8E8"/>
+          </a:solidFill>
+          <a:ln>
+            <a:noFill/>
+          </a:ln>
+        </p:spPr>
+        <p:style>
+          <a:lnRef idx="1">
+            <a:schemeClr val="accent1"/>
+          </a:lnRef>
+          <a:fillRef idx="3">
+            <a:schemeClr val="accent1"/>
+          </a:fillRef>
+          <a:effectRef idx="2">
+            <a:schemeClr val="accent1"/>
+          </a:effectRef>
+          <a:fontRef idx="minor">
+            <a:schemeClr val="lt1"/>
+          </a:fontRef>
+        </p:style>
+        <p:txBody>
+          <a:bodyPr rtlCol="0" anchor="ctr"/>
+          <a:lstStyle/>
+          <a:p>
+            <a:pPr algn="ctr"/>
+          </a:p>
+        </p:txBody>
+      </p:sp>
+      <p:sp>
+        <p:nvSpPr>
+          <p:cNvPr id="14" name="TextBox 13"/>
+          <p:cNvSpPr txBox="1"/>
+          <p:nvPr/>
+        </p:nvSpPr>
+        <p:spPr>
+          <a:xfrm>
+            <a:off x="0" y="2"/>
+            <a:ext cx="0" cy="0"/>
+          </a:xfrm>
+          <a:prstGeom prst="rect">
+            <a:avLst/>
+          </a:prstGeom>
+          <a:noFill/>
+        </p:spPr>
+        <p:txBody>
+          <a:bodyPr wrap="square">
+            <a:spAutoFit/>
+          </a:bodyPr>
+          <a:lstStyle/>
+          <a:p>
+            <a:pPr algn="l">
+              <a:defRPr sz="1600" b="1">
+                <a:solidFill>
+                  <a:srgbClr val="C8962E"/>
+                </a:solidFill>
+                <a:latin typeface="Calibri"/>
+              </a:defRPr>
+            </a:pPr>
+            <a:r>
+              <a:t>3.</a:t>
+            </a:r>
+          </a:p>
+        </p:txBody>
+      </p:sp>
+      <p:sp>
+        <p:nvSpPr>
+          <p:cNvPr id="15" name="TextBox 14"/>
+          <p:cNvSpPr txBox="1"/>
+          <p:nvPr/>
+        </p:nvSpPr>
+        <p:spPr>
+          <a:xfrm>
+            <a:off x="1" y="2"/>
+            <a:ext cx="11" cy="0"/>
+          </a:xfrm>
+          <a:prstGeom prst="rect">
+            <a:avLst/>
+          </a:prstGeom>
+          <a:noFill/>
+        </p:spPr>
+        <p:txBody>
+          <a:bodyPr wrap="square">
+            <a:spAutoFit/>
+          </a:bodyPr>
+          <a:lstStyle/>
+          <a:p>
+            <a:pPr algn="l">
+              <a:defRPr sz="1400" b="0">
+                <a:solidFill>
+                  <a:srgbClr val="1A1A2E"/>
+                </a:solidFill>
+                <a:latin typeface="Calibri"/>
+              </a:defRPr>
+            </a:pPr>
+            <a:r>
+              <a:t>Mengembangkan kebijakan dan tata kelola SPBE</a:t>
+            </a:r>
+          </a:p>
+        </p:txBody>
+      </p:sp>
+      <p:sp>
+        <p:nvSpPr>
+          <p:cNvPr id="16" name="Rectangle 15"/>
+          <p:cNvSpPr/>
+          <p:nvPr/>
+        </p:nvSpPr>
+        <p:spPr>
+          <a:xfrm>
+            <a:off x="1" y="2"/>
+            <a:ext cx="11" cy="6350"/>
+          </a:xfrm>
+          <a:prstGeom prst="rect">
+            <a:avLst/>
+          </a:prstGeom>
+          <a:solidFill>
+            <a:srgbClr val="D0D8E8"/>
+          </a:solidFill>
+          <a:ln>
+            <a:noFill/>
+          </a:ln>
+        </p:spPr>
+        <p:style>
+          <a:lnRef idx="1">
+            <a:schemeClr val="accent1"/>
+          </a:lnRef>
+          <a:fillRef idx="3">
+            <a:schemeClr val="accent1"/>
+          </a:fillRef>
+          <a:effectRef idx="2">
+            <a:schemeClr val="accent1"/>
+          </a:effectRef>
+          <a:fontRef idx="minor">
+            <a:schemeClr val="lt1"/>
+          </a:fontRef>
+        </p:style>
+        <p:txBody>
+          <a:bodyPr rtlCol="0" anchor="ctr"/>
+          <a:lstStyle/>
+          <a:p>
+            <a:pPr algn="ctr"/>
+          </a:p>
+        </p:txBody>
+      </p:sp>
+      <p:sp>
+        <p:nvSpPr>
+          <p:cNvPr id="17" name="TextBox 16"/>
+          <p:cNvSpPr txBox="1"/>
+          <p:nvPr/>
+        </p:nvSpPr>
+        <p:spPr>
+          <a:xfrm>
+            <a:off x="0" y="2"/>
+            <a:ext cx="0" cy="0"/>
+          </a:xfrm>
+          <a:prstGeom prst="rect">
+            <a:avLst/>
+          </a:prstGeom>
+          <a:noFill/>
+        </p:spPr>
+        <p:txBody>
+          <a:bodyPr wrap="square">
+            <a:spAutoFit/>
+          </a:bodyPr>
+          <a:lstStyle/>
+          <a:p>
+            <a:pPr algn="l">
+              <a:defRPr sz="1600" b="1">
+                <a:solidFill>
+                  <a:srgbClr val="C8962E"/>
+                </a:solidFill>
+                <a:latin typeface="Calibri"/>
+              </a:defRPr>
+            </a:pPr>
+            <a:r>
+              <a:t>4.</a:t>
+            </a:r>
+          </a:p>
+        </p:txBody>
+      </p:sp>
+      <p:sp>
+        <p:nvSpPr>
+          <p:cNvPr id="18" name="TextBox 17"/>
+          <p:cNvSpPr txBox="1"/>
+          <p:nvPr/>
+        </p:nvSpPr>
+        <p:spPr>
+          <a:xfrm>
+            <a:off x="1" y="2"/>
+            <a:ext cx="11" cy="0"/>
+          </a:xfrm>
+          <a:prstGeom prst="rect">
+            <a:avLst/>
+          </a:prstGeom>
+          <a:noFill/>
+        </p:spPr>
+        <p:txBody>
+          <a:bodyPr wrap="square">
+            <a:spAutoFit/>
+          </a:bodyPr>
+          <a:lstStyle/>
+          <a:p>
+            <a:pPr algn="l">
+              <a:defRPr sz="1400" b="0">
+                <a:solidFill>
+                  <a:srgbClr val="1A1A2E"/>
+                </a:solidFill>
+                <a:latin typeface="Calibri"/>
+              </a:defRPr>
+            </a:pPr>
+            <a:r>
+              <a:t>Monitoring, evaluasi, dan rekomendasi perbaikan berkelanjutan</a:t>
+            </a:r>
+          </a:p>
+        </p:txBody>
+      </p:sp>
+      <p:sp>
+        <p:nvSpPr>
+          <p:cNvPr id="19" name="Rectangle 18"/>
+          <p:cNvSpPr/>
+          <p:nvPr/>
+        </p:nvSpPr>
+        <p:spPr>
+          <a:xfrm>
+            <a:off x="0" y="7"/>
+            <a:ext cx="13" cy="25400"/>
+          </a:xfrm>
+          <a:prstGeom prst="rect">
+            <a:avLst/>
+          </a:prstGeom>
+          <a:solidFill>
+            <a:srgbClr val="0A1628"/>
+          </a:solidFill>
+          <a:ln>
+            <a:noFill/>
+          </a:ln>
+        </p:spPr>
+        <p:style>
+          <a:lnRef idx="1">
+            <a:schemeClr val="accent1"/>
+          </a:lnRef>
+          <a:fillRef idx="3">
+            <a:schemeClr val="accent1"/>
+          </a:fillRef>
+          <a:effectRef idx="2">
+            <a:schemeClr val="accent1"/>
+          </a:effectRef>
+          <a:fontRef idx="minor">
+            <a:schemeClr val="lt1"/>
+          </a:fontRef>
+        </p:style>
+        <p:txBody>
+          <a:bodyPr rtlCol="0" anchor="ctr"/>
+          <a:lstStyle/>
+          <a:p>
+            <a:pPr algn="ctr"/>
+          </a:p>
+        </p:txBody>
+      </p:sp>
+      <p:sp>
+        <p:nvSpPr>
+          <p:cNvPr id="20" name="TextBox 19"/>
+          <p:cNvSpPr txBox="1"/>
+          <p:nvPr/>
+        </p:nvSpPr>
+        <p:spPr>
+          <a:xfrm>
+            <a:off x="0" y="7"/>
+            <a:ext cx="4" cy="0"/>
+          </a:xfrm>
+          <a:prstGeom prst="rect">
+            <a:avLst/>
+          </a:prstGeom>
+          <a:noFill/>
+        </p:spPr>
+        <p:txBody>
+          <a:bodyPr wrap="square">
+            <a:spAutoFit/>
+          </a:bodyPr>
+          <a:lstStyle/>
+          <a:p>
+            <a:pPr algn="l">
+              <a:defRPr sz="700" b="0">
+                <a:solidFill>
+                  <a:srgbClr val="64748B"/>
+                </a:solidFill>
+                <a:latin typeface="Calibri"/>
+              </a:defRPr>
+            </a:pPr>
+            <a:r>
+              <a:t>Sumber: RESUME TUPOKSI egov.docx</a:t>
+            </a:r>
+          </a:p>
+        </p:txBody>
+      </p:sp>
+      <p:sp>
+        <p:nvSpPr>
+          <p:cNvPr id="21" name="TextBox 20"/>
+          <p:cNvSpPr txBox="1"/>
+          <p:nvPr/>
+        </p:nvSpPr>
+        <p:spPr>
+          <a:xfrm>
+            <a:off x="12" y="7"/>
+            <a:ext cx="0" cy="0"/>
+          </a:xfrm>
+          <a:prstGeom prst="rect">
+            <a:avLst/>
+          </a:prstGeom>
+          <a:noFill/>
+        </p:spPr>
+        <p:txBody>
+          <a:bodyPr wrap="square">
+            <a:spAutoFit/>
+          </a:bodyPr>
+          <a:lstStyle/>
+          <a:p>
+            <a:pPr algn="r">
+              <a:defRPr sz="800" b="0">
+                <a:solidFill>
+                  <a:srgbClr val="64748B"/>
+                </a:solidFill>
+                <a:latin typeface="Calibri"/>
+              </a:defRPr>
+            </a:pPr>
+            <a:r>
+              <a:t>6</a:t>
             </a:r>
           </a:p>
         </p:txBody>
@@ -6992,7 +7831,7 @@
     <p:bg>
       <p:bgPr>
         <a:solidFill>
-          <a:srgbClr val="1A365D"/>
+          <a:srgbClr val="0A1628"/>
         </a:solidFill>
         <a:effectLst/>
       </p:bgPr>
@@ -7012,14 +7851,14 @@
         </p:nvSpPr>
         <p:spPr>
           <a:xfrm>
-            <a:off x="0" y="0"/>
-            <a:ext cx="12188952" cy="38100"/>
+            <a:off x="0" y="7"/>
+            <a:ext cx="13" cy="0"/>
           </a:xfrm>
           <a:prstGeom prst="rect">
             <a:avLst/>
           </a:prstGeom>
           <a:solidFill>
-            <a:srgbClr val="D69E2E"/>
+            <a:srgbClr val="C8962E"/>
           </a:solidFill>
           <a:ln>
             <a:noFill/>
@@ -7049,57 +7888,14 @@
       </p:sp>
       <p:sp>
         <p:nvSpPr>
-          <p:cNvPr id="3" name="Rectangle 2"/>
-          <p:cNvSpPr/>
-          <p:nvPr/>
-        </p:nvSpPr>
-        <p:spPr>
-          <a:xfrm>
-            <a:off x="822960" y="3291840"/>
-            <a:ext cx="1828800" cy="38100"/>
-          </a:xfrm>
-          <a:prstGeom prst="rect">
-            <a:avLst/>
-          </a:prstGeom>
-          <a:solidFill>
-            <a:srgbClr val="D69E2E"/>
-          </a:solidFill>
-          <a:ln>
-            <a:noFill/>
-          </a:ln>
-        </p:spPr>
-        <p:style>
-          <a:lnRef idx="1">
-            <a:schemeClr val="accent1"/>
-          </a:lnRef>
-          <a:fillRef idx="3">
-            <a:schemeClr val="accent1"/>
-          </a:fillRef>
-          <a:effectRef idx="2">
-            <a:schemeClr val="accent1"/>
-          </a:effectRef>
-          <a:fontRef idx="minor">
-            <a:schemeClr val="lt1"/>
-          </a:fontRef>
-        </p:style>
-        <p:txBody>
-          <a:bodyPr rtlCol="0" anchor="ctr"/>
-          <a:lstStyle/>
-          <a:p>
-            <a:pPr algn="ctr"/>
-          </a:p>
-        </p:txBody>
-      </p:sp>
-      <p:sp>
-        <p:nvSpPr>
-          <p:cNvPr id="4" name="TextBox 3"/>
+          <p:cNvPr id="3" name="TextBox 2"/>
           <p:cNvSpPr txBox="1"/>
           <p:nvPr/>
         </p:nvSpPr>
         <p:spPr>
           <a:xfrm>
-            <a:off x="822960" y="1828800"/>
-            <a:ext cx="10543032" cy="914400"/>
+            <a:off x="0" y="2"/>
+            <a:ext cx="12" cy="1"/>
           </a:xfrm>
           <a:prstGeom prst="rect">
             <a:avLst/>
@@ -7128,14 +7924,14 @@
       </p:sp>
       <p:sp>
         <p:nvSpPr>
-          <p:cNvPr id="5" name="TextBox 4"/>
+          <p:cNvPr id="4" name="TextBox 3"/>
           <p:cNvSpPr txBox="1"/>
           <p:nvPr/>
         </p:nvSpPr>
         <p:spPr>
           <a:xfrm>
-            <a:off x="822960" y="2743200"/>
-            <a:ext cx="10543032" cy="548640"/>
+            <a:off x="0" y="3"/>
+            <a:ext cx="12" cy="0"/>
           </a:xfrm>
           <a:prstGeom prst="rect">
             <a:avLst/>
@@ -7151,7 +7947,7 @@
             <a:pPr algn="ctr">
               <a:defRPr sz="1800" b="0">
                 <a:solidFill>
-                  <a:srgbClr val="BBD0E5"/>
+                  <a:srgbClr val="8899B0"/>
                 </a:solidFill>
                 <a:latin typeface="Calibri"/>
               </a:defRPr>
@@ -7164,14 +7960,14 @@
       </p:sp>
       <p:sp>
         <p:nvSpPr>
-          <p:cNvPr id="6" name="TextBox 5"/>
+          <p:cNvPr id="5" name="TextBox 4"/>
           <p:cNvSpPr txBox="1"/>
           <p:nvPr/>
         </p:nvSpPr>
         <p:spPr>
           <a:xfrm>
-            <a:off x="822960" y="3657600"/>
-            <a:ext cx="10543032" cy="457200"/>
+            <a:off x="0" y="4"/>
+            <a:ext cx="12" cy="0"/>
           </a:xfrm>
           <a:prstGeom prst="rect">
             <a:avLst/>
@@ -7185,9 +7981,9 @@
           <a:lstStyle/>
           <a:p>
             <a:pPr algn="ctr">
-              <a:defRPr sz="1300" b="0">
-                <a:solidFill>
-                  <a:srgbClr val="8B97A8"/>
+              <a:defRPr sz="1200" b="0">
+                <a:solidFill>
+                  <a:srgbClr val="64748B"/>
                 </a:solidFill>
                 <a:latin typeface="Calibri"/>
               </a:defRPr>

--- a/RESUME_TUPOKSI_egov.pptx
+++ b/RESUME_TUPOKSI_egov.pptx
@@ -3110,14 +3110,14 @@
         </p:nvSpPr>
         <p:spPr>
           <a:xfrm>
-            <a:off x="0" y="7"/>
-            <a:ext cx="13" cy="0"/>
-          </a:xfrm>
-          <a:prstGeom prst="rect">
-            <a:avLst/>
-          </a:prstGeom>
-          <a:solidFill>
-            <a:srgbClr val="C8962E"/>
+            <a:off x="0" y="0"/>
+            <a:ext cx="12191695" cy="36576"/>
+          </a:xfrm>
+          <a:prstGeom prst="rect">
+            <a:avLst/>
+          </a:prstGeom>
+          <a:solidFill>
+            <a:srgbClr val="F59E0B"/>
           </a:solidFill>
           <a:ln>
             <a:noFill/>
@@ -3147,14 +3147,186 @@
       </p:sp>
       <p:sp>
         <p:nvSpPr>
-          <p:cNvPr id="3" name="TextBox 2"/>
+          <p:cNvPr id="3" name="Rectangle 2"/>
+          <p:cNvSpPr/>
+          <p:nvPr/>
+        </p:nvSpPr>
+        <p:spPr>
+          <a:xfrm>
+            <a:off x="8076895" y="-457200"/>
+            <a:ext cx="4572000" cy="4114800"/>
+          </a:xfrm>
+          <a:prstGeom prst="rect">
+            <a:avLst/>
+          </a:prstGeom>
+          <a:solidFill>
+            <a:srgbClr val="0F2A4A"/>
+          </a:solidFill>
+          <a:ln>
+            <a:noFill/>
+          </a:ln>
+        </p:spPr>
+        <p:style>
+          <a:lnRef idx="1">
+            <a:schemeClr val="accent1"/>
+          </a:lnRef>
+          <a:fillRef idx="3">
+            <a:schemeClr val="accent1"/>
+          </a:fillRef>
+          <a:effectRef idx="2">
+            <a:schemeClr val="accent1"/>
+          </a:effectRef>
+          <a:fontRef idx="minor">
+            <a:schemeClr val="lt1"/>
+          </a:fontRef>
+        </p:style>
+        <p:txBody>
+          <a:bodyPr rtlCol="0" anchor="ctr"/>
+          <a:lstStyle/>
+          <a:p>
+            <a:pPr algn="ctr"/>
+          </a:p>
+        </p:txBody>
+      </p:sp>
+      <p:sp>
+        <p:nvSpPr>
+          <p:cNvPr id="4" name="Rectangle 3"/>
+          <p:cNvSpPr/>
+          <p:nvPr/>
+        </p:nvSpPr>
+        <p:spPr>
+          <a:xfrm>
+            <a:off x="8991295" y="2926080"/>
+            <a:ext cx="3657600" cy="4114800"/>
+          </a:xfrm>
+          <a:prstGeom prst="rect">
+            <a:avLst/>
+          </a:prstGeom>
+          <a:solidFill>
+            <a:srgbClr val="0F2A4A"/>
+          </a:solidFill>
+          <a:ln>
+            <a:noFill/>
+          </a:ln>
+        </p:spPr>
+        <p:style>
+          <a:lnRef idx="1">
+            <a:schemeClr val="accent1"/>
+          </a:lnRef>
+          <a:fillRef idx="3">
+            <a:schemeClr val="accent1"/>
+          </a:fillRef>
+          <a:effectRef idx="2">
+            <a:schemeClr val="accent1"/>
+          </a:effectRef>
+          <a:fontRef idx="minor">
+            <a:schemeClr val="lt1"/>
+          </a:fontRef>
+        </p:style>
+        <p:txBody>
+          <a:bodyPr rtlCol="0" anchor="ctr"/>
+          <a:lstStyle/>
+          <a:p>
+            <a:pPr algn="ctr"/>
+          </a:p>
+        </p:txBody>
+      </p:sp>
+      <p:sp>
+        <p:nvSpPr>
+          <p:cNvPr id="5" name="Rectangle 4"/>
+          <p:cNvSpPr/>
+          <p:nvPr/>
+        </p:nvSpPr>
+        <p:spPr>
+          <a:xfrm>
+            <a:off x="-457200" y="5029200"/>
+            <a:ext cx="2743200" cy="2286000"/>
+          </a:xfrm>
+          <a:prstGeom prst="rect">
+            <a:avLst/>
+          </a:prstGeom>
+          <a:solidFill>
+            <a:srgbClr val="0F2A4A"/>
+          </a:solidFill>
+          <a:ln>
+            <a:noFill/>
+          </a:ln>
+        </p:spPr>
+        <p:style>
+          <a:lnRef idx="1">
+            <a:schemeClr val="accent1"/>
+          </a:lnRef>
+          <a:fillRef idx="3">
+            <a:schemeClr val="accent1"/>
+          </a:fillRef>
+          <a:effectRef idx="2">
+            <a:schemeClr val="accent1"/>
+          </a:effectRef>
+          <a:fontRef idx="minor">
+            <a:schemeClr val="lt1"/>
+          </a:fontRef>
+        </p:style>
+        <p:txBody>
+          <a:bodyPr rtlCol="0" anchor="ctr"/>
+          <a:lstStyle/>
+          <a:p>
+            <a:pPr algn="ctr"/>
+          </a:p>
+        </p:txBody>
+      </p:sp>
+      <p:sp>
+        <p:nvSpPr>
+          <p:cNvPr id="6" name="Rectangle 5"/>
+          <p:cNvSpPr/>
+          <p:nvPr/>
+        </p:nvSpPr>
+        <p:spPr>
+          <a:xfrm>
+            <a:off x="0" y="6629400"/>
+            <a:ext cx="12191695" cy="228600"/>
+          </a:xfrm>
+          <a:prstGeom prst="rect">
+            <a:avLst/>
+          </a:prstGeom>
+          <a:solidFill>
+            <a:srgbClr val="0D9488"/>
+          </a:solidFill>
+          <a:ln>
+            <a:noFill/>
+          </a:ln>
+        </p:spPr>
+        <p:style>
+          <a:lnRef idx="1">
+            <a:schemeClr val="accent1"/>
+          </a:lnRef>
+          <a:fillRef idx="3">
+            <a:schemeClr val="accent1"/>
+          </a:fillRef>
+          <a:effectRef idx="2">
+            <a:schemeClr val="accent1"/>
+          </a:effectRef>
+          <a:fontRef idx="minor">
+            <a:schemeClr val="lt1"/>
+          </a:fontRef>
+        </p:style>
+        <p:txBody>
+          <a:bodyPr rtlCol="0" anchor="ctr"/>
+          <a:lstStyle/>
+          <a:p>
+            <a:pPr algn="ctr"/>
+          </a:p>
+        </p:txBody>
+      </p:sp>
+      <p:sp>
+        <p:nvSpPr>
+          <p:cNvPr id="7" name="TextBox 6"/>
           <p:cNvSpPr txBox="1"/>
           <p:nvPr/>
         </p:nvSpPr>
         <p:spPr>
           <a:xfrm>
-            <a:off x="0" y="2"/>
-            <a:ext cx="12" cy="1"/>
+            <a:off x="548640" y="1828800"/>
+            <a:ext cx="11094415" cy="914400"/>
           </a:xfrm>
           <a:prstGeom prst="rect">
             <a:avLst/>
@@ -3168,7 +3340,7 @@
           <a:lstStyle/>
           <a:p>
             <a:pPr algn="l">
-              <a:defRPr sz="4800" b="1">
+              <a:defRPr sz="4600" b="1">
                 <a:solidFill>
                   <a:srgbClr val="FFFFFF"/>
                 </a:solidFill>
@@ -3183,14 +3355,14 @@
       </p:sp>
       <p:sp>
         <p:nvSpPr>
-          <p:cNvPr id="4" name="TextBox 3"/>
+          <p:cNvPr id="8" name="TextBox 7"/>
           <p:cNvSpPr txBox="1"/>
           <p:nvPr/>
         </p:nvSpPr>
         <p:spPr>
           <a:xfrm>
-            <a:off x="0" y="3"/>
-            <a:ext cx="12" cy="0"/>
+            <a:off x="548640" y="2926080"/>
+            <a:ext cx="11094415" cy="457200"/>
           </a:xfrm>
           <a:prstGeom prst="rect">
             <a:avLst/>
@@ -3206,7 +3378,7 @@
             <a:pPr algn="l">
               <a:defRPr sz="2200" b="0">
                 <a:solidFill>
-                  <a:srgbClr val="8899B0"/>
+                  <a:srgbClr val="E6F7F5"/>
                 </a:solidFill>
                 <a:latin typeface="Calibri"/>
               </a:defRPr>
@@ -3219,14 +3391,14 @@
       </p:sp>
       <p:sp>
         <p:nvSpPr>
-          <p:cNvPr id="5" name="TextBox 4"/>
+          <p:cNvPr id="9" name="TextBox 8"/>
           <p:cNvSpPr txBox="1"/>
           <p:nvPr/>
         </p:nvSpPr>
         <p:spPr>
           <a:xfrm>
-            <a:off x="0" y="4"/>
-            <a:ext cx="12" cy="0"/>
+            <a:off x="548640" y="3474720"/>
+            <a:ext cx="11094415" cy="365760"/>
           </a:xfrm>
           <a:prstGeom prst="rect">
             <a:avLst/>
@@ -3242,7 +3414,7 @@
             <a:pPr algn="l">
               <a:defRPr sz="1400" b="0">
                 <a:solidFill>
-                  <a:srgbClr val="64748B"/>
+                  <a:srgbClr val="94A3B8"/>
                 </a:solidFill>
                 <a:latin typeface="Calibri"/>
               </a:defRPr>
@@ -3255,20 +3427,20 @@
       </p:sp>
       <p:sp>
         <p:nvSpPr>
-          <p:cNvPr id="6" name="Rectangle 5"/>
+          <p:cNvPr id="10" name="Rectangle 9"/>
           <p:cNvSpPr/>
           <p:nvPr/>
         </p:nvSpPr>
         <p:spPr>
           <a:xfrm>
-            <a:off x="0" y="4"/>
-            <a:ext cx="2" cy="38100"/>
-          </a:xfrm>
-          <a:prstGeom prst="rect">
-            <a:avLst/>
-          </a:prstGeom>
-          <a:solidFill>
-            <a:srgbClr val="C8962E"/>
+            <a:off x="548640" y="4023360"/>
+            <a:ext cx="2286000" cy="34838640000"/>
+          </a:xfrm>
+          <a:prstGeom prst="rect">
+            <a:avLst/>
+          </a:prstGeom>
+          <a:solidFill>
+            <a:srgbClr val="F59E0B"/>
           </a:solidFill>
           <a:ln>
             <a:noFill/>
@@ -3298,14 +3470,14 @@
       </p:sp>
       <p:sp>
         <p:nvSpPr>
-          <p:cNvPr id="7" name="TextBox 6"/>
+          <p:cNvPr id="11" name="TextBox 10"/>
           <p:cNvSpPr txBox="1"/>
           <p:nvPr/>
         </p:nvSpPr>
         <p:spPr>
           <a:xfrm>
-            <a:off x="0" y="5"/>
-            <a:ext cx="12" cy="0"/>
+            <a:off x="548640" y="4297680"/>
+            <a:ext cx="11094415" cy="274320"/>
           </a:xfrm>
           <a:prstGeom prst="rect">
             <a:avLst/>
@@ -3321,7 +3493,7 @@
             <a:pPr algn="l">
               <a:defRPr sz="1100" b="0">
                 <a:solidFill>
-                  <a:srgbClr val="64748B"/>
+                  <a:srgbClr val="94A3B8"/>
                 </a:solidFill>
                 <a:latin typeface="Calibri"/>
               </a:defRPr>
@@ -3346,7 +3518,7 @@
     <p:bg>
       <p:bgPr>
         <a:solidFill>
-          <a:srgbClr val="F5F7FA"/>
+          <a:srgbClr val="FFFFFF"/>
         </a:solidFill>
         <a:effectLst/>
       </p:bgPr>
@@ -3367,13 +3539,13 @@
         <p:spPr>
           <a:xfrm>
             <a:off x="0" y="0"/>
-            <a:ext cx="13" cy="38100"/>
-          </a:xfrm>
-          <a:prstGeom prst="rect">
-            <a:avLst/>
-          </a:prstGeom>
-          <a:solidFill>
-            <a:srgbClr val="C8962E"/>
+            <a:ext cx="12191695" cy="36576"/>
+          </a:xfrm>
+          <a:prstGeom prst="rect">
+            <a:avLst/>
+          </a:prstGeom>
+          <a:solidFill>
+            <a:srgbClr val="F59E0B"/>
           </a:solidFill>
           <a:ln>
             <a:noFill/>
@@ -3409,8 +3581,8 @@
         </p:nvSpPr>
         <p:spPr>
           <a:xfrm>
-            <a:off x="0" y="38100"/>
-            <a:ext cx="13" cy="822959"/>
+            <a:off x="0" y="36576"/>
+            <a:ext cx="12191695" cy="1051560"/>
           </a:xfrm>
           <a:prstGeom prst="rect">
             <a:avLst/>
@@ -3452,14 +3624,14 @@
         </p:nvSpPr>
         <p:spPr>
           <a:xfrm>
-            <a:off x="0" y="0"/>
-            <a:ext cx="0" cy="0"/>
-          </a:xfrm>
-          <a:prstGeom prst="rect">
-            <a:avLst/>
-          </a:prstGeom>
-          <a:solidFill>
-            <a:srgbClr val="C8962E"/>
+            <a:off x="0" y="1088136"/>
+            <a:ext cx="12191695" cy="27432"/>
+          </a:xfrm>
+          <a:prstGeom prst="rect">
+            <a:avLst/>
+          </a:prstGeom>
+          <a:solidFill>
+            <a:srgbClr val="0D9488"/>
           </a:solidFill>
           <a:ln>
             <a:noFill/>
@@ -3495,8 +3667,170 @@
         </p:nvSpPr>
         <p:spPr>
           <a:xfrm>
-            <a:off x="0" y="0"/>
-            <a:ext cx="11" cy="0"/>
+            <a:off x="685800" y="164592"/>
+            <a:ext cx="10820095" cy="502920"/>
+          </a:xfrm>
+          <a:prstGeom prst="rect">
+            <a:avLst/>
+          </a:prstGeom>
+          <a:noFill/>
+        </p:spPr>
+        <p:txBody>
+          <a:bodyPr wrap="square">
+            <a:spAutoFit/>
+          </a:bodyPr>
+          <a:lstStyle/>
+          <a:p>
+            <a:pPr algn="l">
+              <a:defRPr sz="2200" b="1">
+                <a:solidFill>
+                  <a:srgbClr val="FFFFFF"/>
+                </a:solidFill>
+                <a:latin typeface="Calibri"/>
+              </a:defRPr>
+            </a:pPr>
+            <a:r>
+              <a:t>Tiga Pilar Utama Tugas Pokok</a:t>
+            </a:r>
+          </a:p>
+        </p:txBody>
+      </p:sp>
+      <p:sp>
+        <p:nvSpPr>
+          <p:cNvPr id="6" name="TextBox 5"/>
+          <p:cNvSpPr txBox="1"/>
+          <p:nvPr/>
+        </p:nvSpPr>
+        <p:spPr>
+          <a:xfrm>
+            <a:off x="685800" y="658368"/>
+            <a:ext cx="10820095" cy="320040"/>
+          </a:xfrm>
+          <a:prstGeom prst="rect">
+            <a:avLst/>
+          </a:prstGeom>
+          <a:noFill/>
+        </p:spPr>
+        <p:txBody>
+          <a:bodyPr wrap="square">
+            <a:spAutoFit/>
+          </a:bodyPr>
+          <a:lstStyle/>
+          <a:p>
+            <a:pPr algn="l">
+              <a:defRPr sz="900" b="0">
+                <a:solidFill>
+                  <a:srgbClr val="E6F7F5"/>
+                </a:solidFill>
+                <a:latin typeface="Calibri"/>
+              </a:defRPr>
+            </a:pPr>
+            <a:r>
+              <a:t>Bidang e-Government mencakup 3 area strategis dalam transformasi digital daerah</a:t>
+            </a:r>
+          </a:p>
+        </p:txBody>
+      </p:sp>
+      <p:sp>
+        <p:nvSpPr>
+          <p:cNvPr id="7" name="Rounded Rectangle 6"/>
+          <p:cNvSpPr/>
+          <p:nvPr/>
+        </p:nvSpPr>
+        <p:spPr>
+          <a:xfrm>
+            <a:off x="548639" y="1463040"/>
+            <a:ext cx="3484778" cy="3291840"/>
+          </a:xfrm>
+          <a:prstGeom prst="roundRect">
+            <a:avLst>
+              <a:gd name="adj" fmla="val 4000"/>
+            </a:avLst>
+          </a:prstGeom>
+          <a:solidFill>
+            <a:srgbClr val="FFFFFF"/>
+          </a:solidFill>
+          <a:ln w="6350">
+            <a:solidFill>
+              <a:srgbClr val="E2E8F0"/>
+            </a:solidFill>
+          </a:ln>
+        </p:spPr>
+        <p:style>
+          <a:lnRef idx="1">
+            <a:schemeClr val="accent1"/>
+          </a:lnRef>
+          <a:fillRef idx="3">
+            <a:schemeClr val="accent1"/>
+          </a:fillRef>
+          <a:effectRef idx="2">
+            <a:schemeClr val="accent1"/>
+          </a:effectRef>
+          <a:fontRef idx="minor">
+            <a:schemeClr val="lt1"/>
+          </a:fontRef>
+        </p:style>
+        <p:txBody>
+          <a:bodyPr rtlCol="0" anchor="ctr"/>
+          <a:lstStyle/>
+          <a:p>
+            <a:pPr algn="ctr"/>
+          </a:p>
+        </p:txBody>
+      </p:sp>
+      <p:sp>
+        <p:nvSpPr>
+          <p:cNvPr id="8" name="Rectangle 7"/>
+          <p:cNvSpPr/>
+          <p:nvPr/>
+        </p:nvSpPr>
+        <p:spPr>
+          <a:xfrm>
+            <a:off x="548639" y="1463040"/>
+            <a:ext cx="3484778" cy="594360"/>
+          </a:xfrm>
+          <a:prstGeom prst="rect">
+            <a:avLst/>
+          </a:prstGeom>
+          <a:solidFill>
+            <a:srgbClr val="0A1628"/>
+          </a:solidFill>
+          <a:ln>
+            <a:noFill/>
+          </a:ln>
+        </p:spPr>
+        <p:style>
+          <a:lnRef idx="1">
+            <a:schemeClr val="accent1"/>
+          </a:lnRef>
+          <a:fillRef idx="3">
+            <a:schemeClr val="accent1"/>
+          </a:fillRef>
+          <a:effectRef idx="2">
+            <a:schemeClr val="accent1"/>
+          </a:effectRef>
+          <a:fontRef idx="minor">
+            <a:schemeClr val="lt1"/>
+          </a:fontRef>
+        </p:style>
+        <p:txBody>
+          <a:bodyPr rtlCol="0" anchor="ctr"/>
+          <a:lstStyle/>
+          <a:p>
+            <a:pPr algn="ctr"/>
+          </a:p>
+        </p:txBody>
+      </p:sp>
+      <p:sp>
+        <p:nvSpPr>
+          <p:cNvPr id="9" name="TextBox 8"/>
+          <p:cNvSpPr txBox="1"/>
+          <p:nvPr/>
+        </p:nvSpPr>
+        <p:spPr>
+          <a:xfrm>
+            <a:off x="731519" y="1572768"/>
+            <a:ext cx="457200" cy="320040"/>
           </a:xfrm>
           <a:prstGeom prst="rect">
             <a:avLst/>
@@ -3518,21 +3852,21 @@
               </a:defRPr>
             </a:pPr>
             <a:r>
-              <a:t>Tiga Pilar Utama Tugas Pokok</a:t>
-            </a:r>
-          </a:p>
-        </p:txBody>
-      </p:sp>
-      <p:sp>
-        <p:nvSpPr>
-          <p:cNvPr id="6" name="TextBox 5"/>
+              <a:t>01</a:t>
+            </a:r>
+          </a:p>
+        </p:txBody>
+      </p:sp>
+      <p:sp>
+        <p:nvSpPr>
+          <p:cNvPr id="10" name="TextBox 9"/>
           <p:cNvSpPr txBox="1"/>
           <p:nvPr/>
         </p:nvSpPr>
         <p:spPr>
           <a:xfrm>
-            <a:off x="0" y="0"/>
-            <a:ext cx="11" cy="0"/>
+            <a:off x="1188719" y="1600200"/>
+            <a:ext cx="1371600" cy="228600"/>
           </a:xfrm>
           <a:prstGeom prst="rect">
             <a:avLst/>
@@ -3546,119 +3880,29 @@
           <a:lstStyle/>
           <a:p>
             <a:pPr algn="l">
-              <a:defRPr sz="900" b="0">
+              <a:defRPr sz="700" b="0">
                 <a:solidFill>
-                  <a:srgbClr val="64748B"/>
+                  <a:srgbClr val="E6F7F5"/>
                 </a:solidFill>
                 <a:latin typeface="Calibri"/>
               </a:defRPr>
             </a:pPr>
             <a:r>
-              <a:t>Bidang e-Government mencakup 3 area strategis dalam transformasi digital daerah</a:t>
-            </a:r>
-          </a:p>
-        </p:txBody>
-      </p:sp>
-      <p:sp>
-        <p:nvSpPr>
-          <p:cNvPr id="7" name="Rounded Rectangle 6"/>
-          <p:cNvSpPr/>
-          <p:nvPr/>
-        </p:nvSpPr>
-        <p:spPr>
-          <a:xfrm>
-            <a:off x="0" y="1"/>
-            <a:ext cx="3" cy="3"/>
-          </a:xfrm>
-          <a:prstGeom prst="roundRect">
-            <a:avLst>
-              <a:gd name="adj" fmla="val 4000"/>
-            </a:avLst>
-          </a:prstGeom>
-          <a:solidFill>
-            <a:srgbClr val="FFFFFF"/>
-          </a:solidFill>
-          <a:ln w="6350">
-            <a:solidFill>
-              <a:srgbClr val="E8EDF5"/>
-            </a:solidFill>
-          </a:ln>
-        </p:spPr>
-        <p:style>
-          <a:lnRef idx="1">
-            <a:schemeClr val="accent1"/>
-          </a:lnRef>
-          <a:fillRef idx="3">
-            <a:schemeClr val="accent1"/>
-          </a:fillRef>
-          <a:effectRef idx="2">
-            <a:schemeClr val="accent1"/>
-          </a:effectRef>
-          <a:fontRef idx="minor">
-            <a:schemeClr val="lt1"/>
-          </a:fontRef>
-        </p:style>
-        <p:txBody>
-          <a:bodyPr rtlCol="0" anchor="ctr"/>
-          <a:lstStyle/>
-          <a:p>
-            <a:pPr algn="ctr"/>
-          </a:p>
-        </p:txBody>
-      </p:sp>
-      <p:sp>
-        <p:nvSpPr>
-          <p:cNvPr id="8" name="Rectangle 7"/>
-          <p:cNvSpPr/>
-          <p:nvPr/>
-        </p:nvSpPr>
-        <p:spPr>
-          <a:xfrm>
-            <a:off x="0" y="1"/>
-            <a:ext cx="3" cy="63500"/>
-          </a:xfrm>
-          <a:prstGeom prst="rect">
-            <a:avLst/>
-          </a:prstGeom>
-          <a:solidFill>
-            <a:srgbClr val="0A1628"/>
-          </a:solidFill>
-          <a:ln>
-            <a:noFill/>
-          </a:ln>
-        </p:spPr>
-        <p:style>
-          <a:lnRef idx="1">
-            <a:schemeClr val="accent1"/>
-          </a:lnRef>
-          <a:fillRef idx="3">
-            <a:schemeClr val="accent1"/>
-          </a:fillRef>
-          <a:effectRef idx="2">
-            <a:schemeClr val="accent1"/>
-          </a:effectRef>
-          <a:fontRef idx="minor">
-            <a:schemeClr val="lt1"/>
-          </a:fontRef>
-        </p:style>
-        <p:txBody>
-          <a:bodyPr rtlCol="0" anchor="ctr"/>
-          <a:lstStyle/>
-          <a:p>
-            <a:pPr algn="ctr"/>
-          </a:p>
-        </p:txBody>
-      </p:sp>
-      <p:sp>
-        <p:nvSpPr>
-          <p:cNvPr id="9" name="TextBox 8"/>
+              <a:t>PILAR UTAMA</a:t>
+            </a:r>
+          </a:p>
+        </p:txBody>
+      </p:sp>
+      <p:sp>
+        <p:nvSpPr>
+          <p:cNvPr id="11" name="TextBox 10"/>
           <p:cNvSpPr txBox="1"/>
           <p:nvPr/>
         </p:nvSpPr>
         <p:spPr>
           <a:xfrm>
-            <a:off x="0" y="1"/>
-            <a:ext cx="0" cy="0"/>
+            <a:off x="777239" y="2240280"/>
+            <a:ext cx="3027578" cy="777240"/>
           </a:xfrm>
           <a:prstGeom prst="rect">
             <a:avLst/>
@@ -3680,21 +3924,68 @@
               </a:defRPr>
             </a:pPr>
             <a:r>
-              <a:t>01</a:t>
-            </a:r>
-          </a:p>
-        </p:txBody>
-      </p:sp>
-      <p:sp>
-        <p:nvSpPr>
-          <p:cNvPr id="10" name="TextBox 9"/>
+              <a:t>Pengembangan Aplikasi</a:t>
+            </a:r>
+            <a:br/>
+            <a:r>
+              <a:t>&amp; Sistem Informasi</a:t>
+            </a:r>
+          </a:p>
+        </p:txBody>
+      </p:sp>
+      <p:sp>
+        <p:nvSpPr>
+          <p:cNvPr id="12" name="Rectangle 11"/>
+          <p:cNvSpPr/>
+          <p:nvPr/>
+        </p:nvSpPr>
+        <p:spPr>
+          <a:xfrm>
+            <a:off x="777239" y="3108960"/>
+            <a:ext cx="3027578" cy="17419320000"/>
+          </a:xfrm>
+          <a:prstGeom prst="rect">
+            <a:avLst/>
+          </a:prstGeom>
+          <a:solidFill>
+            <a:srgbClr val="E2E8F0"/>
+          </a:solidFill>
+          <a:ln>
+            <a:noFill/>
+          </a:ln>
+        </p:spPr>
+        <p:style>
+          <a:lnRef idx="1">
+            <a:schemeClr val="accent1"/>
+          </a:lnRef>
+          <a:fillRef idx="3">
+            <a:schemeClr val="accent1"/>
+          </a:fillRef>
+          <a:effectRef idx="2">
+            <a:schemeClr val="accent1"/>
+          </a:effectRef>
+          <a:fontRef idx="minor">
+            <a:schemeClr val="lt1"/>
+          </a:fontRef>
+        </p:style>
+        <p:txBody>
+          <a:bodyPr rtlCol="0" anchor="ctr"/>
+          <a:lstStyle/>
+          <a:p>
+            <a:pPr algn="ctr"/>
+          </a:p>
+        </p:txBody>
+      </p:sp>
+      <p:sp>
+        <p:nvSpPr>
+          <p:cNvPr id="13" name="TextBox 12"/>
           <p:cNvSpPr txBox="1"/>
           <p:nvPr/>
         </p:nvSpPr>
         <p:spPr>
           <a:xfrm>
-            <a:off x="0" y="2"/>
-            <a:ext cx="3" cy="0"/>
+            <a:off x="777239" y="3291840"/>
+            <a:ext cx="3027578" cy="1097280"/>
           </a:xfrm>
           <a:prstGeom prst="rect">
             <a:avLst/>
@@ -3708,7 +3999,209 @@
           <a:lstStyle/>
           <a:p>
             <a:pPr algn="l">
-              <a:defRPr sz="1500" b="1">
+              <a:defRPr sz="1200" b="0">
+                <a:solidFill>
+                  <a:srgbClr val="475569"/>
+                </a:solidFill>
+                <a:latin typeface="Calibri"/>
+              </a:defRPr>
+            </a:pPr>
+            <a:r>
+              <a:t>Supervisi, standarisasi, dan</a:t>
+            </a:r>
+            <a:br/>
+            <a:r>
+              <a:t>pengelolaan SPLP</a:t>
+            </a:r>
+          </a:p>
+        </p:txBody>
+      </p:sp>
+      <p:sp>
+        <p:nvSpPr>
+          <p:cNvPr id="14" name="Rounded Rectangle 13"/>
+          <p:cNvSpPr/>
+          <p:nvPr/>
+        </p:nvSpPr>
+        <p:spPr>
+          <a:xfrm>
+            <a:off x="4353458" y="1463040"/>
+            <a:ext cx="3484778" cy="3291840"/>
+          </a:xfrm>
+          <a:prstGeom prst="roundRect">
+            <a:avLst>
+              <a:gd name="adj" fmla="val 4000"/>
+            </a:avLst>
+          </a:prstGeom>
+          <a:solidFill>
+            <a:srgbClr val="FFFFFF"/>
+          </a:solidFill>
+          <a:ln w="6350">
+            <a:solidFill>
+              <a:srgbClr val="E2E8F0"/>
+            </a:solidFill>
+          </a:ln>
+        </p:spPr>
+        <p:style>
+          <a:lnRef idx="1">
+            <a:schemeClr val="accent1"/>
+          </a:lnRef>
+          <a:fillRef idx="3">
+            <a:schemeClr val="accent1"/>
+          </a:fillRef>
+          <a:effectRef idx="2">
+            <a:schemeClr val="accent1"/>
+          </a:effectRef>
+          <a:fontRef idx="minor">
+            <a:schemeClr val="lt1"/>
+          </a:fontRef>
+        </p:style>
+        <p:txBody>
+          <a:bodyPr rtlCol="0" anchor="ctr"/>
+          <a:lstStyle/>
+          <a:p>
+            <a:pPr algn="ctr"/>
+          </a:p>
+        </p:txBody>
+      </p:sp>
+      <p:sp>
+        <p:nvSpPr>
+          <p:cNvPr id="15" name="Rectangle 14"/>
+          <p:cNvSpPr/>
+          <p:nvPr/>
+        </p:nvSpPr>
+        <p:spPr>
+          <a:xfrm>
+            <a:off x="4353458" y="1463040"/>
+            <a:ext cx="3484778" cy="594360"/>
+          </a:xfrm>
+          <a:prstGeom prst="rect">
+            <a:avLst/>
+          </a:prstGeom>
+          <a:solidFill>
+            <a:srgbClr val="1A5676"/>
+          </a:solidFill>
+          <a:ln>
+            <a:noFill/>
+          </a:ln>
+        </p:spPr>
+        <p:style>
+          <a:lnRef idx="1">
+            <a:schemeClr val="accent1"/>
+          </a:lnRef>
+          <a:fillRef idx="3">
+            <a:schemeClr val="accent1"/>
+          </a:fillRef>
+          <a:effectRef idx="2">
+            <a:schemeClr val="accent1"/>
+          </a:effectRef>
+          <a:fontRef idx="minor">
+            <a:schemeClr val="lt1"/>
+          </a:fontRef>
+        </p:style>
+        <p:txBody>
+          <a:bodyPr rtlCol="0" anchor="ctr"/>
+          <a:lstStyle/>
+          <a:p>
+            <a:pPr algn="ctr"/>
+          </a:p>
+        </p:txBody>
+      </p:sp>
+      <p:sp>
+        <p:nvSpPr>
+          <p:cNvPr id="16" name="TextBox 15"/>
+          <p:cNvSpPr txBox="1"/>
+          <p:nvPr/>
+        </p:nvSpPr>
+        <p:spPr>
+          <a:xfrm>
+            <a:off x="4536338" y="1572768"/>
+            <a:ext cx="457200" cy="320040"/>
+          </a:xfrm>
+          <a:prstGeom prst="rect">
+            <a:avLst/>
+          </a:prstGeom>
+          <a:noFill/>
+        </p:spPr>
+        <p:txBody>
+          <a:bodyPr wrap="square">
+            <a:spAutoFit/>
+          </a:bodyPr>
+          <a:lstStyle/>
+          <a:p>
+            <a:pPr algn="l">
+              <a:defRPr sz="2000" b="1">
+                <a:solidFill>
+                  <a:srgbClr val="FFFFFF"/>
+                </a:solidFill>
+                <a:latin typeface="Calibri"/>
+              </a:defRPr>
+            </a:pPr>
+            <a:r>
+              <a:t>02</a:t>
+            </a:r>
+          </a:p>
+        </p:txBody>
+      </p:sp>
+      <p:sp>
+        <p:nvSpPr>
+          <p:cNvPr id="17" name="TextBox 16"/>
+          <p:cNvSpPr txBox="1"/>
+          <p:nvPr/>
+        </p:nvSpPr>
+        <p:spPr>
+          <a:xfrm>
+            <a:off x="4993538" y="1600200"/>
+            <a:ext cx="1371600" cy="228600"/>
+          </a:xfrm>
+          <a:prstGeom prst="rect">
+            <a:avLst/>
+          </a:prstGeom>
+          <a:noFill/>
+        </p:spPr>
+        <p:txBody>
+          <a:bodyPr wrap="square">
+            <a:spAutoFit/>
+          </a:bodyPr>
+          <a:lstStyle/>
+          <a:p>
+            <a:pPr algn="l">
+              <a:defRPr sz="700" b="0">
+                <a:solidFill>
+                  <a:srgbClr val="E6F7F5"/>
+                </a:solidFill>
+                <a:latin typeface="Calibri"/>
+              </a:defRPr>
+            </a:pPr>
+            <a:r>
+              <a:t>PILAR UTAMA</a:t>
+            </a:r>
+          </a:p>
+        </p:txBody>
+      </p:sp>
+      <p:sp>
+        <p:nvSpPr>
+          <p:cNvPr id="18" name="TextBox 17"/>
+          <p:cNvSpPr txBox="1"/>
+          <p:nvPr/>
+        </p:nvSpPr>
+        <p:spPr>
+          <a:xfrm>
+            <a:off x="4582058" y="2240280"/>
+            <a:ext cx="3027578" cy="777240"/>
+          </a:xfrm>
+          <a:prstGeom prst="rect">
+            <a:avLst/>
+          </a:prstGeom>
+          <a:noFill/>
+        </p:spPr>
+        <p:txBody>
+          <a:bodyPr wrap="square">
+            <a:spAutoFit/>
+          </a:bodyPr>
+          <a:lstStyle/>
+          <a:p>
+            <a:pPr algn="l">
+              <a:defRPr sz="1600" b="1">
                 <a:solidFill>
                   <a:srgbClr val="0A1628"/>
                 </a:solidFill>
@@ -3716,31 +4209,31 @@
               </a:defRPr>
             </a:pPr>
             <a:r>
-              <a:t>Pengembangan Aplikasi</a:t>
+              <a:t>Tata Kelola e-Government</a:t>
             </a:r>
             <a:br/>
             <a:r>
-              <a:t>&amp; Sistem Informasi</a:t>
-            </a:r>
-          </a:p>
-        </p:txBody>
-      </p:sp>
-      <p:sp>
-        <p:nvSpPr>
-          <p:cNvPr id="11" name="Rectangle 10"/>
+              <a:t>(SPBE)</a:t>
+            </a:r>
+          </a:p>
+        </p:txBody>
+      </p:sp>
+      <p:sp>
+        <p:nvSpPr>
+          <p:cNvPr id="19" name="Rectangle 18"/>
           <p:cNvSpPr/>
           <p:nvPr/>
         </p:nvSpPr>
         <p:spPr>
           <a:xfrm>
-            <a:off x="0" y="3"/>
-            <a:ext cx="3" cy="12700"/>
-          </a:xfrm>
-          <a:prstGeom prst="rect">
-            <a:avLst/>
-          </a:prstGeom>
-          <a:solidFill>
-            <a:srgbClr val="E8EDF5"/>
+            <a:off x="4582058" y="3108960"/>
+            <a:ext cx="3027578" cy="17419320000"/>
+          </a:xfrm>
+          <a:prstGeom prst="rect">
+            <a:avLst/>
+          </a:prstGeom>
+          <a:solidFill>
+            <a:srgbClr val="E2E8F0"/>
           </a:solidFill>
           <a:ln>
             <a:noFill/>
@@ -3770,14 +4263,14 @@
       </p:sp>
       <p:sp>
         <p:nvSpPr>
-          <p:cNvPr id="12" name="TextBox 11"/>
+          <p:cNvPr id="20" name="TextBox 19"/>
           <p:cNvSpPr txBox="1"/>
           <p:nvPr/>
         </p:nvSpPr>
         <p:spPr>
           <a:xfrm>
-            <a:off x="0" y="3"/>
-            <a:ext cx="3" cy="1"/>
+            <a:off x="4582058" y="3291840"/>
+            <a:ext cx="3027578" cy="1097280"/>
           </a:xfrm>
           <a:prstGeom prst="rect">
             <a:avLst/>
@@ -3793,31 +4286,31 @@
             <a:pPr algn="l">
               <a:defRPr sz="1200" b="0">
                 <a:solidFill>
-                  <a:srgbClr val="8899B0"/>
+                  <a:srgbClr val="475569"/>
                 </a:solidFill>
                 <a:latin typeface="Calibri"/>
               </a:defRPr>
             </a:pPr>
             <a:r>
-              <a:t>Supervisi, standarisasi, dan</a:t>
+              <a:t>Strategi, roadmap, arsitektur,</a:t>
             </a:r>
             <a:br/>
             <a:r>
-              <a:t>pengelolaan SPLP</a:t>
-            </a:r>
-          </a:p>
-        </p:txBody>
-      </p:sp>
-      <p:sp>
-        <p:nvSpPr>
-          <p:cNvPr id="13" name="Rounded Rectangle 12"/>
+              <a:t>dan kapasitas SDM &amp; GCIO</a:t>
+            </a:r>
+          </a:p>
+        </p:txBody>
+      </p:sp>
+      <p:sp>
+        <p:nvSpPr>
+          <p:cNvPr id="21" name="Rounded Rectangle 20"/>
           <p:cNvSpPr/>
           <p:nvPr/>
         </p:nvSpPr>
         <p:spPr>
           <a:xfrm>
-            <a:off x="4" y="1"/>
-            <a:ext cx="3" cy="3"/>
+            <a:off x="8158276" y="1463040"/>
+            <a:ext cx="3484778" cy="3291840"/>
           </a:xfrm>
           <a:prstGeom prst="roundRect">
             <a:avLst>
@@ -3829,7 +4322,7 @@
           </a:solidFill>
           <a:ln w="6350">
             <a:solidFill>
-              <a:srgbClr val="E8EDF5"/>
+              <a:srgbClr val="E2E8F0"/>
             </a:solidFill>
           </a:ln>
         </p:spPr>
@@ -3857,20 +4350,20 @@
       </p:sp>
       <p:sp>
         <p:nvSpPr>
-          <p:cNvPr id="14" name="Rectangle 13"/>
+          <p:cNvPr id="22" name="Rectangle 21"/>
           <p:cNvSpPr/>
           <p:nvPr/>
         </p:nvSpPr>
         <p:spPr>
           <a:xfrm>
-            <a:off x="4" y="1"/>
-            <a:ext cx="3" cy="63500"/>
-          </a:xfrm>
-          <a:prstGeom prst="rect">
-            <a:avLst/>
-          </a:prstGeom>
-          <a:solidFill>
-            <a:srgbClr val="2563EB"/>
+            <a:off x="8158276" y="1463040"/>
+            <a:ext cx="3484778" cy="594360"/>
+          </a:xfrm>
+          <a:prstGeom prst="rect">
+            <a:avLst/>
+          </a:prstGeom>
+          <a:solidFill>
+            <a:srgbClr val="0D9488"/>
           </a:solidFill>
           <a:ln>
             <a:noFill/>
@@ -3900,14 +4393,14 @@
       </p:sp>
       <p:sp>
         <p:nvSpPr>
-          <p:cNvPr id="15" name="TextBox 14"/>
+          <p:cNvPr id="23" name="TextBox 22"/>
           <p:cNvSpPr txBox="1"/>
           <p:nvPr/>
         </p:nvSpPr>
         <p:spPr>
           <a:xfrm>
-            <a:off x="4" y="1"/>
-            <a:ext cx="0" cy="0"/>
+            <a:off x="8341156" y="1572768"/>
+            <a:ext cx="457200" cy="320040"/>
           </a:xfrm>
           <a:prstGeom prst="rect">
             <a:avLst/>
@@ -3921,29 +4414,29 @@
           <a:lstStyle/>
           <a:p>
             <a:pPr algn="l">
-              <a:defRPr sz="1600" b="1">
+              <a:defRPr sz="2000" b="1">
                 <a:solidFill>
-                  <a:srgbClr val="2563EB"/>
+                  <a:srgbClr val="FFFFFF"/>
                 </a:solidFill>
                 <a:latin typeface="Calibri"/>
               </a:defRPr>
             </a:pPr>
             <a:r>
-              <a:t>02</a:t>
-            </a:r>
-          </a:p>
-        </p:txBody>
-      </p:sp>
-      <p:sp>
-        <p:nvSpPr>
-          <p:cNvPr id="16" name="TextBox 15"/>
+              <a:t>03</a:t>
+            </a:r>
+          </a:p>
+        </p:txBody>
+      </p:sp>
+      <p:sp>
+        <p:nvSpPr>
+          <p:cNvPr id="24" name="TextBox 23"/>
           <p:cNvSpPr txBox="1"/>
           <p:nvPr/>
         </p:nvSpPr>
         <p:spPr>
           <a:xfrm>
-            <a:off x="4" y="2"/>
-            <a:ext cx="3" cy="0"/>
+            <a:off x="8798356" y="1600200"/>
+            <a:ext cx="1371600" cy="228600"/>
           </a:xfrm>
           <a:prstGeom prst="rect">
             <a:avLst/>
@@ -3957,7 +4450,43 @@
           <a:lstStyle/>
           <a:p>
             <a:pPr algn="l">
-              <a:defRPr sz="1500" b="1">
+              <a:defRPr sz="700" b="0">
+                <a:solidFill>
+                  <a:srgbClr val="E6F7F5"/>
+                </a:solidFill>
+                <a:latin typeface="Calibri"/>
+              </a:defRPr>
+            </a:pPr>
+            <a:r>
+              <a:t>PILAR UTAMA</a:t>
+            </a:r>
+          </a:p>
+        </p:txBody>
+      </p:sp>
+      <p:sp>
+        <p:nvSpPr>
+          <p:cNvPr id="25" name="TextBox 24"/>
+          <p:cNvSpPr txBox="1"/>
+          <p:nvPr/>
+        </p:nvSpPr>
+        <p:spPr>
+          <a:xfrm>
+            <a:off x="8386876" y="2240280"/>
+            <a:ext cx="3027578" cy="777240"/>
+          </a:xfrm>
+          <a:prstGeom prst="rect">
+            <a:avLst/>
+          </a:prstGeom>
+          <a:noFill/>
+        </p:spPr>
+        <p:txBody>
+          <a:bodyPr wrap="square">
+            <a:spAutoFit/>
+          </a:bodyPr>
+          <a:lstStyle/>
+          <a:p>
+            <a:pPr algn="l">
+              <a:defRPr sz="1600" b="1">
                 <a:solidFill>
                   <a:srgbClr val="0A1628"/>
                 </a:solidFill>
@@ -3965,31 +4494,31 @@
               </a:defRPr>
             </a:pPr>
             <a:r>
-              <a:t>Tata Kelola e-Government</a:t>
+              <a:t>Pengembangan Kota Cerdas</a:t>
             </a:r>
             <a:br/>
             <a:r>
-              <a:t>(SPBE)</a:t>
-            </a:r>
-          </a:p>
-        </p:txBody>
-      </p:sp>
-      <p:sp>
-        <p:nvSpPr>
-          <p:cNvPr id="17" name="Rectangle 16"/>
+              <a:t>(Smart City)</a:t>
+            </a:r>
+          </a:p>
+        </p:txBody>
+      </p:sp>
+      <p:sp>
+        <p:nvSpPr>
+          <p:cNvPr id="26" name="Rectangle 25"/>
           <p:cNvSpPr/>
           <p:nvPr/>
         </p:nvSpPr>
         <p:spPr>
           <a:xfrm>
-            <a:off x="4" y="3"/>
-            <a:ext cx="3" cy="12700"/>
-          </a:xfrm>
-          <a:prstGeom prst="rect">
-            <a:avLst/>
-          </a:prstGeom>
-          <a:solidFill>
-            <a:srgbClr val="E8EDF5"/>
+            <a:off x="8386876" y="3108960"/>
+            <a:ext cx="3027578" cy="17419320000"/>
+          </a:xfrm>
+          <a:prstGeom prst="rect">
+            <a:avLst/>
+          </a:prstGeom>
+          <a:solidFill>
+            <a:srgbClr val="E2E8F0"/>
           </a:solidFill>
           <a:ln>
             <a:noFill/>
@@ -4019,14 +4548,14 @@
       </p:sp>
       <p:sp>
         <p:nvSpPr>
-          <p:cNvPr id="18" name="TextBox 17"/>
+          <p:cNvPr id="27" name="TextBox 26"/>
           <p:cNvSpPr txBox="1"/>
           <p:nvPr/>
         </p:nvSpPr>
         <p:spPr>
           <a:xfrm>
-            <a:off x="4" y="3"/>
-            <a:ext cx="3" cy="1"/>
+            <a:off x="8386876" y="3291840"/>
+            <a:ext cx="3027578" cy="1097280"/>
           </a:xfrm>
           <a:prstGeom prst="rect">
             <a:avLst/>
@@ -4042,44 +4571,40 @@
             <a:pPr algn="l">
               <a:defRPr sz="1200" b="0">
                 <a:solidFill>
-                  <a:srgbClr val="8899B0"/>
+                  <a:srgbClr val="475569"/>
                 </a:solidFill>
                 <a:latin typeface="Calibri"/>
               </a:defRPr>
             </a:pPr>
             <a:r>
-              <a:t>Strategi, roadmap, arsitektur,</a:t>
+              <a:t>Masterplan, kolaborasi lintas</a:t>
             </a:r>
             <a:br/>
             <a:r>
-              <a:t>dan kapasitas SDM &amp; GCIO</a:t>
-            </a:r>
-          </a:p>
-        </p:txBody>
-      </p:sp>
-      <p:sp>
-        <p:nvSpPr>
-          <p:cNvPr id="19" name="Rounded Rectangle 18"/>
+              <a:t>sektor, dan evaluasi program</a:t>
+            </a:r>
+          </a:p>
+        </p:txBody>
+      </p:sp>
+      <p:sp>
+        <p:nvSpPr>
+          <p:cNvPr id="28" name="Rectangle 27"/>
           <p:cNvSpPr/>
           <p:nvPr/>
         </p:nvSpPr>
         <p:spPr>
           <a:xfrm>
-            <a:off x="8" y="1"/>
-            <a:ext cx="3" cy="3"/>
-          </a:xfrm>
-          <a:prstGeom prst="roundRect">
-            <a:avLst>
-              <a:gd name="adj" fmla="val 4000"/>
-            </a:avLst>
-          </a:prstGeom>
-          <a:solidFill>
-            <a:srgbClr val="FFFFFF"/>
-          </a:solidFill>
-          <a:ln w="6350">
-            <a:solidFill>
-              <a:srgbClr val="E8EDF5"/>
-            </a:solidFill>
+            <a:off x="0" y="6446520"/>
+            <a:ext cx="12191695" cy="411480"/>
+          </a:xfrm>
+          <a:prstGeom prst="rect">
+            <a:avLst/>
+          </a:prstGeom>
+          <a:solidFill>
+            <a:srgbClr val="F8FAFC"/>
+          </a:solidFill>
+          <a:ln>
+            <a:noFill/>
           </a:ln>
         </p:spPr>
         <p:style>
@@ -4106,20 +4631,20 @@
       </p:sp>
       <p:sp>
         <p:nvSpPr>
-          <p:cNvPr id="20" name="Rectangle 19"/>
+          <p:cNvPr id="29" name="Rectangle 28"/>
           <p:cNvSpPr/>
           <p:nvPr/>
         </p:nvSpPr>
         <p:spPr>
           <a:xfrm>
-            <a:off x="8" y="1"/>
-            <a:ext cx="3" cy="63500"/>
-          </a:xfrm>
-          <a:prstGeom prst="rect">
-            <a:avLst/>
-          </a:prstGeom>
-          <a:solidFill>
-            <a:srgbClr val="0B7C72"/>
+            <a:off x="0" y="6446520"/>
+            <a:ext cx="12191695" cy="17419320000"/>
+          </a:xfrm>
+          <a:prstGeom prst="rect">
+            <a:avLst/>
+          </a:prstGeom>
+          <a:solidFill>
+            <a:srgbClr val="E2E8F0"/>
           </a:solidFill>
           <a:ln>
             <a:noFill/>
@@ -4149,14 +4674,14 @@
       </p:sp>
       <p:sp>
         <p:nvSpPr>
-          <p:cNvPr id="21" name="TextBox 20"/>
+          <p:cNvPr id="30" name="TextBox 29"/>
           <p:cNvSpPr txBox="1"/>
           <p:nvPr/>
         </p:nvSpPr>
         <p:spPr>
           <a:xfrm>
-            <a:off x="9" y="1"/>
-            <a:ext cx="0" cy="0"/>
+            <a:off x="548640" y="6510528"/>
+            <a:ext cx="3657600" cy="201168"/>
           </a:xfrm>
           <a:prstGeom prst="rect">
             <a:avLst/>
@@ -4170,29 +4695,29 @@
           <a:lstStyle/>
           <a:p>
             <a:pPr algn="l">
-              <a:defRPr sz="1600" b="1">
+              <a:defRPr sz="700" b="0">
                 <a:solidFill>
-                  <a:srgbClr val="0B7C72"/>
+                  <a:srgbClr val="94A3B8"/>
                 </a:solidFill>
                 <a:latin typeface="Calibri"/>
               </a:defRPr>
             </a:pPr>
             <a:r>
-              <a:t>03</a:t>
-            </a:r>
-          </a:p>
-        </p:txBody>
-      </p:sp>
-      <p:sp>
-        <p:nvSpPr>
-          <p:cNvPr id="22" name="TextBox 21"/>
+              <a:t>Sumber: RESUME TUPOKSI egov.docx</a:t>
+            </a:r>
+          </a:p>
+        </p:txBody>
+      </p:sp>
+      <p:sp>
+        <p:nvSpPr>
+          <p:cNvPr id="31" name="TextBox 30"/>
           <p:cNvSpPr txBox="1"/>
           <p:nvPr/>
         </p:nvSpPr>
         <p:spPr>
           <a:xfrm>
-            <a:off x="9" y="2"/>
-            <a:ext cx="3" cy="0"/>
+            <a:off x="11277295" y="6510528"/>
+            <a:ext cx="731520" cy="201168"/>
           </a:xfrm>
           <a:prstGeom prst="rect">
             <a:avLst/>
@@ -4205,212 +4730,10 @@
           </a:bodyPr>
           <a:lstStyle/>
           <a:p>
-            <a:pPr algn="l">
-              <a:defRPr sz="1500" b="1">
-                <a:solidFill>
-                  <a:srgbClr val="0A1628"/>
-                </a:solidFill>
-                <a:latin typeface="Calibri"/>
-              </a:defRPr>
-            </a:pPr>
-            <a:r>
-              <a:t>Pengembangan Kota Cerdas</a:t>
-            </a:r>
-            <a:br/>
-            <a:r>
-              <a:t>(Smart City)</a:t>
-            </a:r>
-          </a:p>
-        </p:txBody>
-      </p:sp>
-      <p:sp>
-        <p:nvSpPr>
-          <p:cNvPr id="23" name="Rectangle 22"/>
-          <p:cNvSpPr/>
-          <p:nvPr/>
-        </p:nvSpPr>
-        <p:spPr>
-          <a:xfrm>
-            <a:off x="9" y="3"/>
-            <a:ext cx="3" cy="12700"/>
-          </a:xfrm>
-          <a:prstGeom prst="rect">
-            <a:avLst/>
-          </a:prstGeom>
-          <a:solidFill>
-            <a:srgbClr val="E8EDF5"/>
-          </a:solidFill>
-          <a:ln>
-            <a:noFill/>
-          </a:ln>
-        </p:spPr>
-        <p:style>
-          <a:lnRef idx="1">
-            <a:schemeClr val="accent1"/>
-          </a:lnRef>
-          <a:fillRef idx="3">
-            <a:schemeClr val="accent1"/>
-          </a:fillRef>
-          <a:effectRef idx="2">
-            <a:schemeClr val="accent1"/>
-          </a:effectRef>
-          <a:fontRef idx="minor">
-            <a:schemeClr val="lt1"/>
-          </a:fontRef>
-        </p:style>
-        <p:txBody>
-          <a:bodyPr rtlCol="0" anchor="ctr"/>
-          <a:lstStyle/>
-          <a:p>
-            <a:pPr algn="ctr"/>
-          </a:p>
-        </p:txBody>
-      </p:sp>
-      <p:sp>
-        <p:nvSpPr>
-          <p:cNvPr id="24" name="TextBox 23"/>
-          <p:cNvSpPr txBox="1"/>
-          <p:nvPr/>
-        </p:nvSpPr>
-        <p:spPr>
-          <a:xfrm>
-            <a:off x="9" y="3"/>
-            <a:ext cx="3" cy="1"/>
-          </a:xfrm>
-          <a:prstGeom prst="rect">
-            <a:avLst/>
-          </a:prstGeom>
-          <a:noFill/>
-        </p:spPr>
-        <p:txBody>
-          <a:bodyPr wrap="square">
-            <a:spAutoFit/>
-          </a:bodyPr>
-          <a:lstStyle/>
-          <a:p>
-            <a:pPr algn="l">
-              <a:defRPr sz="1200" b="0">
-                <a:solidFill>
-                  <a:srgbClr val="8899B0"/>
-                </a:solidFill>
-                <a:latin typeface="Calibri"/>
-              </a:defRPr>
-            </a:pPr>
-            <a:r>
-              <a:t>Masterplan, kolaborasi lintas</a:t>
-            </a:r>
-            <a:br/>
-            <a:r>
-              <a:t>sektor, dan evaluasi program</a:t>
-            </a:r>
-          </a:p>
-        </p:txBody>
-      </p:sp>
-      <p:sp>
-        <p:nvSpPr>
-          <p:cNvPr id="25" name="Rectangle 24"/>
-          <p:cNvSpPr/>
-          <p:nvPr/>
-        </p:nvSpPr>
-        <p:spPr>
-          <a:xfrm>
-            <a:off x="0" y="7"/>
-            <a:ext cx="13" cy="25400"/>
-          </a:xfrm>
-          <a:prstGeom prst="rect">
-            <a:avLst/>
-          </a:prstGeom>
-          <a:solidFill>
-            <a:srgbClr val="0A1628"/>
-          </a:solidFill>
-          <a:ln>
-            <a:noFill/>
-          </a:ln>
-        </p:spPr>
-        <p:style>
-          <a:lnRef idx="1">
-            <a:schemeClr val="accent1"/>
-          </a:lnRef>
-          <a:fillRef idx="3">
-            <a:schemeClr val="accent1"/>
-          </a:fillRef>
-          <a:effectRef idx="2">
-            <a:schemeClr val="accent1"/>
-          </a:effectRef>
-          <a:fontRef idx="minor">
-            <a:schemeClr val="lt1"/>
-          </a:fontRef>
-        </p:style>
-        <p:txBody>
-          <a:bodyPr rtlCol="0" anchor="ctr"/>
-          <a:lstStyle/>
-          <a:p>
-            <a:pPr algn="ctr"/>
-          </a:p>
-        </p:txBody>
-      </p:sp>
-      <p:sp>
-        <p:nvSpPr>
-          <p:cNvPr id="26" name="TextBox 25"/>
-          <p:cNvSpPr txBox="1"/>
-          <p:nvPr/>
-        </p:nvSpPr>
-        <p:spPr>
-          <a:xfrm>
-            <a:off x="0" y="7"/>
-            <a:ext cx="4" cy="0"/>
-          </a:xfrm>
-          <a:prstGeom prst="rect">
-            <a:avLst/>
-          </a:prstGeom>
-          <a:noFill/>
-        </p:spPr>
-        <p:txBody>
-          <a:bodyPr wrap="square">
-            <a:spAutoFit/>
-          </a:bodyPr>
-          <a:lstStyle/>
-          <a:p>
-            <a:pPr algn="l">
-              <a:defRPr sz="700" b="0">
-                <a:solidFill>
-                  <a:srgbClr val="64748B"/>
-                </a:solidFill>
-                <a:latin typeface="Calibri"/>
-              </a:defRPr>
-            </a:pPr>
-            <a:r>
-              <a:t>Sumber: RESUME TUPOKSI egov.docx</a:t>
-            </a:r>
-          </a:p>
-        </p:txBody>
-      </p:sp>
-      <p:sp>
-        <p:nvSpPr>
-          <p:cNvPr id="27" name="TextBox 26"/>
-          <p:cNvSpPr txBox="1"/>
-          <p:nvPr/>
-        </p:nvSpPr>
-        <p:spPr>
-          <a:xfrm>
-            <a:off x="12" y="7"/>
-            <a:ext cx="0" cy="0"/>
-          </a:xfrm>
-          <a:prstGeom prst="rect">
-            <a:avLst/>
-          </a:prstGeom>
-          <a:noFill/>
-        </p:spPr>
-        <p:txBody>
-          <a:bodyPr wrap="square">
-            <a:spAutoFit/>
-          </a:bodyPr>
-          <a:lstStyle/>
-          <a:p>
             <a:pPr algn="r">
               <a:defRPr sz="800" b="0">
                 <a:solidFill>
-                  <a:srgbClr val="64748B"/>
+                  <a:srgbClr val="94A3B8"/>
                 </a:solidFill>
                 <a:latin typeface="Calibri"/>
               </a:defRPr>
@@ -4435,7 +4758,7 @@
     <p:bg>
       <p:bgPr>
         <a:solidFill>
-          <a:srgbClr val="F5F7FA"/>
+          <a:srgbClr val="FFFFFF"/>
         </a:solidFill>
         <a:effectLst/>
       </p:bgPr>
@@ -4456,13 +4779,13 @@
         <p:spPr>
           <a:xfrm>
             <a:off x="0" y="0"/>
-            <a:ext cx="13" cy="38100"/>
-          </a:xfrm>
-          <a:prstGeom prst="rect">
-            <a:avLst/>
-          </a:prstGeom>
-          <a:solidFill>
-            <a:srgbClr val="C8962E"/>
+            <a:ext cx="12191695" cy="36576"/>
+          </a:xfrm>
+          <a:prstGeom prst="rect">
+            <a:avLst/>
+          </a:prstGeom>
+          <a:solidFill>
+            <a:srgbClr val="F59E0B"/>
           </a:solidFill>
           <a:ln>
             <a:noFill/>
@@ -4498,8 +4821,8 @@
         </p:nvSpPr>
         <p:spPr>
           <a:xfrm>
-            <a:off x="0" y="38100"/>
-            <a:ext cx="13" cy="822959"/>
+            <a:off x="0" y="36576"/>
+            <a:ext cx="12191695" cy="1051560"/>
           </a:xfrm>
           <a:prstGeom prst="rect">
             <a:avLst/>
@@ -4541,14 +4864,14 @@
         </p:nvSpPr>
         <p:spPr>
           <a:xfrm>
-            <a:off x="0" y="0"/>
-            <a:ext cx="0" cy="0"/>
-          </a:xfrm>
-          <a:prstGeom prst="rect">
-            <a:avLst/>
-          </a:prstGeom>
-          <a:solidFill>
-            <a:srgbClr val="C8962E"/>
+            <a:off x="0" y="1088136"/>
+            <a:ext cx="12191695" cy="27432"/>
+          </a:xfrm>
+          <a:prstGeom prst="rect">
+            <a:avLst/>
+          </a:prstGeom>
+          <a:solidFill>
+            <a:srgbClr val="0D9488"/>
           </a:solidFill>
           <a:ln>
             <a:noFill/>
@@ -4584,8 +4907,8 @@
         </p:nvSpPr>
         <p:spPr>
           <a:xfrm>
-            <a:off x="0" y="0"/>
-            <a:ext cx="11" cy="0"/>
+            <a:off x="685800" y="164592"/>
+            <a:ext cx="10820095" cy="502920"/>
           </a:xfrm>
           <a:prstGeom prst="rect">
             <a:avLst/>
@@ -4599,7 +4922,7 @@
           <a:lstStyle/>
           <a:p>
             <a:pPr algn="l">
-              <a:defRPr sz="2000" b="1">
+              <a:defRPr sz="2200" b="1">
                 <a:solidFill>
                   <a:srgbClr val="FFFFFF"/>
                 </a:solidFill>
@@ -4607,7 +4930,7 @@
               </a:defRPr>
             </a:pPr>
             <a:r>
-              <a:t>Empat Sistem &amp; Aplikasi Strategis yang Dikelola</a:t>
+              <a:t>Empat Sistem &amp; Aplikasi Strategis</a:t>
             </a:r>
           </a:p>
         </p:txBody>
@@ -4620,8 +4943,8 @@
         </p:nvSpPr>
         <p:spPr>
           <a:xfrm>
-            <a:off x="0" y="0"/>
-            <a:ext cx="11" cy="0"/>
+            <a:off x="685800" y="658368"/>
+            <a:ext cx="10820095" cy="320040"/>
           </a:xfrm>
           <a:prstGeom prst="rect">
             <a:avLst/>
@@ -4637,7 +4960,7 @@
             <a:pPr algn="l">
               <a:defRPr sz="900" b="0">
                 <a:solidFill>
-                  <a:srgbClr val="64748B"/>
+                  <a:srgbClr val="E6F7F5"/>
                 </a:solidFill>
                 <a:latin typeface="Calibri"/>
               </a:defRPr>
@@ -4656,8 +4979,8 @@
         </p:nvSpPr>
         <p:spPr>
           <a:xfrm>
-            <a:off x="0" y="1"/>
-            <a:ext cx="5" cy="1"/>
+            <a:off x="548639" y="1463040"/>
+            <a:ext cx="5364327" cy="1554480"/>
           </a:xfrm>
           <a:prstGeom prst="roundRect">
             <a:avLst>
@@ -4669,7 +4992,7 @@
           </a:solidFill>
           <a:ln w="6350">
             <a:solidFill>
-              <a:srgbClr val="E8EDF5"/>
+              <a:srgbClr val="E2E8F0"/>
             </a:solidFill>
           </a:ln>
         </p:spPr>
@@ -4703,8 +5026,8 @@
         </p:nvSpPr>
         <p:spPr>
           <a:xfrm>
-            <a:off x="0" y="1"/>
-            <a:ext cx="63500" cy="1"/>
+            <a:off x="548639" y="1463040"/>
+            <a:ext cx="73152" cy="1554480"/>
           </a:xfrm>
           <a:prstGeom prst="rect">
             <a:avLst/>
@@ -4746,8 +5069,8 @@
         </p:nvSpPr>
         <p:spPr>
           <a:xfrm>
-            <a:off x="0" y="1"/>
-            <a:ext cx="5" cy="0"/>
+            <a:off x="822959" y="1691640"/>
+            <a:ext cx="4907127" cy="365760"/>
           </a:xfrm>
           <a:prstGeom prst="rect">
             <a:avLst/>
@@ -4761,7 +5084,7 @@
           <a:lstStyle/>
           <a:p>
             <a:pPr algn="l">
-              <a:defRPr sz="1700" b="1">
+              <a:defRPr sz="1800" b="1">
                 <a:solidFill>
                   <a:srgbClr val="0A1628"/>
                 </a:solidFill>
@@ -4782,8 +5105,8 @@
         </p:nvSpPr>
         <p:spPr>
           <a:xfrm>
-            <a:off x="0" y="1"/>
-            <a:ext cx="5" cy="0"/>
+            <a:off x="822959" y="2148840"/>
+            <a:ext cx="4907127" cy="640080"/>
           </a:xfrm>
           <a:prstGeom prst="rect">
             <a:avLst/>
@@ -4797,15 +5120,19 @@
           <a:lstStyle/>
           <a:p>
             <a:pPr algn="l">
-              <a:defRPr sz="1300" b="0">
+              <a:defRPr sz="1200" b="0">
                 <a:solidFill>
-                  <a:srgbClr val="1A1A2E"/>
+                  <a:srgbClr val="475569"/>
                 </a:solidFill>
                 <a:latin typeface="Calibri"/>
               </a:defRPr>
             </a:pPr>
             <a:r>
-              <a:t>Admin Teknis Web Pemkot &amp; Web Diskominfo</a:t>
+              <a:t>Admin Teknis Web Pemkot</a:t>
+            </a:r>
+            <a:br/>
+            <a:r>
+              <a:t>&amp; Web Diskominfo</a:t>
             </a:r>
           </a:p>
         </p:txBody>
@@ -4818,8 +5145,8 @@
         </p:nvSpPr>
         <p:spPr>
           <a:xfrm>
-            <a:off x="6" y="1"/>
-            <a:ext cx="5" cy="1"/>
+            <a:off x="6278727" y="1463040"/>
+            <a:ext cx="5364327" cy="1554480"/>
           </a:xfrm>
           <a:prstGeom prst="roundRect">
             <a:avLst>
@@ -4831,7 +5158,7 @@
           </a:solidFill>
           <a:ln w="6350">
             <a:solidFill>
-              <a:srgbClr val="E8EDF5"/>
+              <a:srgbClr val="E2E8F0"/>
             </a:solidFill>
           </a:ln>
         </p:spPr>
@@ -4865,14 +5192,14 @@
         </p:nvSpPr>
         <p:spPr>
           <a:xfrm>
-            <a:off x="6" y="1"/>
-            <a:ext cx="63500" cy="1"/>
-          </a:xfrm>
-          <a:prstGeom prst="rect">
-            <a:avLst/>
-          </a:prstGeom>
-          <a:solidFill>
-            <a:srgbClr val="2563EB"/>
+            <a:off x="6278727" y="1463040"/>
+            <a:ext cx="73152" cy="1554480"/>
+          </a:xfrm>
+          <a:prstGeom prst="rect">
+            <a:avLst/>
+          </a:prstGeom>
+          <a:solidFill>
+            <a:srgbClr val="1A5676"/>
           </a:solidFill>
           <a:ln>
             <a:noFill/>
@@ -4908,8 +5235,8 @@
         </p:nvSpPr>
         <p:spPr>
           <a:xfrm>
-            <a:off x="7" y="1"/>
-            <a:ext cx="5" cy="0"/>
+            <a:off x="6553047" y="1691640"/>
+            <a:ext cx="4907127" cy="365760"/>
           </a:xfrm>
           <a:prstGeom prst="rect">
             <a:avLst/>
@@ -4923,9 +5250,9 @@
           <a:lstStyle/>
           <a:p>
             <a:pPr algn="l">
-              <a:defRPr sz="1700" b="1">
+              <a:defRPr sz="1800" b="1">
                 <a:solidFill>
-                  <a:srgbClr val="2563EB"/>
+                  <a:srgbClr val="1A5676"/>
                 </a:solidFill>
                 <a:latin typeface="Calibri"/>
               </a:defRPr>
@@ -4944,8 +5271,8 @@
         </p:nvSpPr>
         <p:spPr>
           <a:xfrm>
-            <a:off x="7" y="1"/>
-            <a:ext cx="5" cy="0"/>
+            <a:off x="6553047" y="2148840"/>
+            <a:ext cx="4907127" cy="640080"/>
           </a:xfrm>
           <a:prstGeom prst="rect">
             <a:avLst/>
@@ -4959,15 +5286,19 @@
           <a:lstStyle/>
           <a:p>
             <a:pPr algn="l">
-              <a:defRPr sz="1300" b="0">
+              <a:defRPr sz="1200" b="0">
                 <a:solidFill>
-                  <a:srgbClr val="1A1A2E"/>
+                  <a:srgbClr val="475569"/>
                 </a:solidFill>
                 <a:latin typeface="Calibri"/>
               </a:defRPr>
             </a:pPr>
             <a:r>
-              <a:t>Platform Smart City — Pekan Smart City</a:t>
+              <a:t>Platform Smart City</a:t>
+            </a:r>
+            <a:br/>
+            <a:r>
+              <a:t>— Pekan Smart City</a:t>
             </a:r>
           </a:p>
         </p:txBody>
@@ -4980,8 +5311,8 @@
         </p:nvSpPr>
         <p:spPr>
           <a:xfrm>
-            <a:off x="0" y="3"/>
-            <a:ext cx="5" cy="1"/>
+            <a:off x="548639" y="3291840"/>
+            <a:ext cx="5364327" cy="1554480"/>
           </a:xfrm>
           <a:prstGeom prst="roundRect">
             <a:avLst>
@@ -4993,7 +5324,7 @@
           </a:solidFill>
           <a:ln w="6350">
             <a:solidFill>
-              <a:srgbClr val="E8EDF5"/>
+              <a:srgbClr val="E2E8F0"/>
             </a:solidFill>
           </a:ln>
         </p:spPr>
@@ -5027,14 +5358,14 @@
         </p:nvSpPr>
         <p:spPr>
           <a:xfrm>
-            <a:off x="0" y="3"/>
-            <a:ext cx="63500" cy="1"/>
-          </a:xfrm>
-          <a:prstGeom prst="rect">
-            <a:avLst/>
-          </a:prstGeom>
-          <a:solidFill>
-            <a:srgbClr val="0B7C72"/>
+            <a:off x="548639" y="3291840"/>
+            <a:ext cx="73152" cy="1554480"/>
+          </a:xfrm>
+          <a:prstGeom prst="rect">
+            <a:avLst/>
+          </a:prstGeom>
+          <a:solidFill>
+            <a:srgbClr val="0D9488"/>
           </a:solidFill>
           <a:ln>
             <a:noFill/>
@@ -5070,8 +5401,8 @@
         </p:nvSpPr>
         <p:spPr>
           <a:xfrm>
-            <a:off x="0" y="3"/>
-            <a:ext cx="5" cy="0"/>
+            <a:off x="822959" y="3520440"/>
+            <a:ext cx="4907127" cy="365760"/>
           </a:xfrm>
           <a:prstGeom prst="rect">
             <a:avLst/>
@@ -5085,9 +5416,9 @@
           <a:lstStyle/>
           <a:p>
             <a:pPr algn="l">
-              <a:defRPr sz="1700" b="1">
+              <a:defRPr sz="1800" b="1">
                 <a:solidFill>
-                  <a:srgbClr val="0B7C72"/>
+                  <a:srgbClr val="0D9488"/>
                 </a:solidFill>
                 <a:latin typeface="Calibri"/>
               </a:defRPr>
@@ -5106,8 +5437,8 @@
         </p:nvSpPr>
         <p:spPr>
           <a:xfrm>
-            <a:off x="0" y="3"/>
-            <a:ext cx="5" cy="0"/>
+            <a:off x="822959" y="3977639"/>
+            <a:ext cx="4907127" cy="640080"/>
           </a:xfrm>
           <a:prstGeom prst="rect">
             <a:avLst/>
@@ -5121,15 +5452,19 @@
           <a:lstStyle/>
           <a:p>
             <a:pPr algn="l">
-              <a:defRPr sz="1300" b="0">
+              <a:defRPr sz="1200" b="0">
                 <a:solidFill>
-                  <a:srgbClr val="1A1A2E"/>
+                  <a:srgbClr val="475569"/>
                 </a:solidFill>
                 <a:latin typeface="Calibri"/>
               </a:defRPr>
             </a:pPr>
             <a:r>
-              <a:t>Admin Teknis Portal Kota Cerdas</a:t>
+              <a:t>Admin Teknis</a:t>
+            </a:r>
+            <a:br/>
+            <a:r>
+              <a:t>Portal Kota Cerdas</a:t>
             </a:r>
           </a:p>
         </p:txBody>
@@ -5142,8 +5477,8 @@
         </p:nvSpPr>
         <p:spPr>
           <a:xfrm>
-            <a:off x="6" y="3"/>
-            <a:ext cx="5" cy="1"/>
+            <a:off x="6278727" y="3291840"/>
+            <a:ext cx="5364327" cy="1554480"/>
           </a:xfrm>
           <a:prstGeom prst="roundRect">
             <a:avLst>
@@ -5155,7 +5490,7 @@
           </a:solidFill>
           <a:ln w="6350">
             <a:solidFill>
-              <a:srgbClr val="E8EDF5"/>
+              <a:srgbClr val="E2E8F0"/>
             </a:solidFill>
           </a:ln>
         </p:spPr>
@@ -5189,14 +5524,14 @@
         </p:nvSpPr>
         <p:spPr>
           <a:xfrm>
-            <a:off x="6" y="3"/>
-            <a:ext cx="63500" cy="1"/>
-          </a:xfrm>
-          <a:prstGeom prst="rect">
-            <a:avLst/>
-          </a:prstGeom>
-          <a:solidFill>
-            <a:srgbClr val="C8962E"/>
+            <a:off x="6278727" y="3291840"/>
+            <a:ext cx="73152" cy="1554480"/>
+          </a:xfrm>
+          <a:prstGeom prst="rect">
+            <a:avLst/>
+          </a:prstGeom>
+          <a:solidFill>
+            <a:srgbClr val="F59E0B"/>
           </a:solidFill>
           <a:ln>
             <a:noFill/>
@@ -5232,8 +5567,8 @@
         </p:nvSpPr>
         <p:spPr>
           <a:xfrm>
-            <a:off x="7" y="3"/>
-            <a:ext cx="5" cy="0"/>
+            <a:off x="6553047" y="3520440"/>
+            <a:ext cx="4907127" cy="365760"/>
           </a:xfrm>
           <a:prstGeom prst="rect">
             <a:avLst/>
@@ -5247,9 +5582,9 @@
           <a:lstStyle/>
           <a:p>
             <a:pPr algn="l">
-              <a:defRPr sz="1700" b="1">
+              <a:defRPr sz="1800" b="1">
                 <a:solidFill>
-                  <a:srgbClr val="C8962E"/>
+                  <a:srgbClr val="F59E0B"/>
                 </a:solidFill>
                 <a:latin typeface="Calibri"/>
               </a:defRPr>
@@ -5268,8 +5603,8 @@
         </p:nvSpPr>
         <p:spPr>
           <a:xfrm>
-            <a:off x="7" y="3"/>
-            <a:ext cx="5" cy="0"/>
+            <a:off x="6553047" y="3977639"/>
+            <a:ext cx="4907127" cy="640080"/>
           </a:xfrm>
           <a:prstGeom prst="rect">
             <a:avLst/>
@@ -5283,15 +5618,19 @@
           <a:lstStyle/>
           <a:p>
             <a:pPr algn="l">
-              <a:defRPr sz="1300" b="0">
+              <a:defRPr sz="1200" b="0">
                 <a:solidFill>
-                  <a:srgbClr val="1A1A2E"/>
+                  <a:srgbClr val="475569"/>
                 </a:solidFill>
                 <a:latin typeface="Calibri"/>
               </a:defRPr>
             </a:pPr>
             <a:r>
-              <a:t>Sistem Penghubung Layanan Pemerintah (Kemenkomdigi)</a:t>
+              <a:t>Sistem Penghubung Layanan</a:t>
+            </a:r>
+            <a:br/>
+            <a:r>
+              <a:t>Pemerintah (Kemenkomdigi)</a:t>
             </a:r>
           </a:p>
         </p:txBody>
@@ -5304,14 +5643,14 @@
         </p:nvSpPr>
         <p:spPr>
           <a:xfrm>
-            <a:off x="0" y="7"/>
-            <a:ext cx="13" cy="25400"/>
-          </a:xfrm>
-          <a:prstGeom prst="rect">
-            <a:avLst/>
-          </a:prstGeom>
-          <a:solidFill>
-            <a:srgbClr val="0A1628"/>
+            <a:off x="0" y="6446520"/>
+            <a:ext cx="12191695" cy="411480"/>
+          </a:xfrm>
+          <a:prstGeom prst="rect">
+            <a:avLst/>
+          </a:prstGeom>
+          <a:solidFill>
+            <a:srgbClr val="F8FAFC"/>
           </a:solidFill>
           <a:ln>
             <a:noFill/>
@@ -5341,14 +5680,57 @@
       </p:sp>
       <p:sp>
         <p:nvSpPr>
-          <p:cNvPr id="24" name="TextBox 23"/>
+          <p:cNvPr id="24" name="Rectangle 23"/>
+          <p:cNvSpPr/>
+          <p:nvPr/>
+        </p:nvSpPr>
+        <p:spPr>
+          <a:xfrm>
+            <a:off x="0" y="6446520"/>
+            <a:ext cx="12191695" cy="17419320000"/>
+          </a:xfrm>
+          <a:prstGeom prst="rect">
+            <a:avLst/>
+          </a:prstGeom>
+          <a:solidFill>
+            <a:srgbClr val="E2E8F0"/>
+          </a:solidFill>
+          <a:ln>
+            <a:noFill/>
+          </a:ln>
+        </p:spPr>
+        <p:style>
+          <a:lnRef idx="1">
+            <a:schemeClr val="accent1"/>
+          </a:lnRef>
+          <a:fillRef idx="3">
+            <a:schemeClr val="accent1"/>
+          </a:fillRef>
+          <a:effectRef idx="2">
+            <a:schemeClr val="accent1"/>
+          </a:effectRef>
+          <a:fontRef idx="minor">
+            <a:schemeClr val="lt1"/>
+          </a:fontRef>
+        </p:style>
+        <p:txBody>
+          <a:bodyPr rtlCol="0" anchor="ctr"/>
+          <a:lstStyle/>
+          <a:p>
+            <a:pPr algn="ctr"/>
+          </a:p>
+        </p:txBody>
+      </p:sp>
+      <p:sp>
+        <p:nvSpPr>
+          <p:cNvPr id="25" name="TextBox 24"/>
           <p:cNvSpPr txBox="1"/>
           <p:nvPr/>
         </p:nvSpPr>
         <p:spPr>
           <a:xfrm>
-            <a:off x="0" y="7"/>
-            <a:ext cx="4" cy="0"/>
+            <a:off x="548640" y="6510528"/>
+            <a:ext cx="3657600" cy="201168"/>
           </a:xfrm>
           <a:prstGeom prst="rect">
             <a:avLst/>
@@ -5364,7 +5746,7 @@
             <a:pPr algn="l">
               <a:defRPr sz="700" b="0">
                 <a:solidFill>
-                  <a:srgbClr val="64748B"/>
+                  <a:srgbClr val="94A3B8"/>
                 </a:solidFill>
                 <a:latin typeface="Calibri"/>
               </a:defRPr>
@@ -5377,14 +5759,14 @@
       </p:sp>
       <p:sp>
         <p:nvSpPr>
-          <p:cNvPr id="25" name="TextBox 24"/>
+          <p:cNvPr id="26" name="TextBox 25"/>
           <p:cNvSpPr txBox="1"/>
           <p:nvPr/>
         </p:nvSpPr>
         <p:spPr>
           <a:xfrm>
-            <a:off x="12" y="7"/>
-            <a:ext cx="0" cy="0"/>
+            <a:off x="11277295" y="6510528"/>
+            <a:ext cx="731520" cy="201168"/>
           </a:xfrm>
           <a:prstGeom prst="rect">
             <a:avLst/>
@@ -5400,7 +5782,7 @@
             <a:pPr algn="r">
               <a:defRPr sz="800" b="0">
                 <a:solidFill>
-                  <a:srgbClr val="64748B"/>
+                  <a:srgbClr val="94A3B8"/>
                 </a:solidFill>
                 <a:latin typeface="Calibri"/>
               </a:defRPr>
@@ -5425,7 +5807,7 @@
     <p:bg>
       <p:bgPr>
         <a:solidFill>
-          <a:srgbClr val="F5F7FA"/>
+          <a:srgbClr val="FFFFFF"/>
         </a:solidFill>
         <a:effectLst/>
       </p:bgPr>
@@ -5446,13 +5828,13 @@
         <p:spPr>
           <a:xfrm>
             <a:off x="0" y="0"/>
-            <a:ext cx="13" cy="38100"/>
-          </a:xfrm>
-          <a:prstGeom prst="rect">
-            <a:avLst/>
-          </a:prstGeom>
-          <a:solidFill>
-            <a:srgbClr val="C8962E"/>
+            <a:ext cx="12191695" cy="36576"/>
+          </a:xfrm>
+          <a:prstGeom prst="rect">
+            <a:avLst/>
+          </a:prstGeom>
+          <a:solidFill>
+            <a:srgbClr val="F59E0B"/>
           </a:solidFill>
           <a:ln>
             <a:noFill/>
@@ -5488,8 +5870,8 @@
         </p:nvSpPr>
         <p:spPr>
           <a:xfrm>
-            <a:off x="0" y="38100"/>
-            <a:ext cx="13" cy="822959"/>
+            <a:off x="0" y="36576"/>
+            <a:ext cx="12191695" cy="1051560"/>
           </a:xfrm>
           <a:prstGeom prst="rect">
             <a:avLst/>
@@ -5531,14 +5913,14 @@
         </p:nvSpPr>
         <p:spPr>
           <a:xfrm>
-            <a:off x="0" y="0"/>
-            <a:ext cx="0" cy="0"/>
-          </a:xfrm>
-          <a:prstGeom prst="rect">
-            <a:avLst/>
-          </a:prstGeom>
-          <a:solidFill>
-            <a:srgbClr val="C8962E"/>
+            <a:off x="0" y="1088136"/>
+            <a:ext cx="12191695" cy="27432"/>
+          </a:xfrm>
+          <a:prstGeom prst="rect">
+            <a:avLst/>
+          </a:prstGeom>
+          <a:solidFill>
+            <a:srgbClr val="0D9488"/>
           </a:solidFill>
           <a:ln>
             <a:noFill/>
@@ -5574,8 +5956,8 @@
         </p:nvSpPr>
         <p:spPr>
           <a:xfrm>
-            <a:off x="0" y="0"/>
-            <a:ext cx="11" cy="0"/>
+            <a:off x="685800" y="164592"/>
+            <a:ext cx="10820095" cy="502920"/>
           </a:xfrm>
           <a:prstGeom prst="rect">
             <a:avLst/>
@@ -5589,7 +5971,7 @@
           <a:lstStyle/>
           <a:p>
             <a:pPr algn="l">
-              <a:defRPr sz="2000" b="1">
+              <a:defRPr sz="2200" b="1">
                 <a:solidFill>
                   <a:srgbClr val="FFFFFF"/>
                 </a:solidFill>
@@ -5610,8 +5992,8 @@
         </p:nvSpPr>
         <p:spPr>
           <a:xfrm>
-            <a:off x="0" y="0"/>
-            <a:ext cx="11" cy="0"/>
+            <a:off x="685800" y="658368"/>
+            <a:ext cx="10820095" cy="320040"/>
           </a:xfrm>
           <a:prstGeom prst="rect">
             <a:avLst/>
@@ -5627,7 +6009,7 @@
             <a:pPr algn="l">
               <a:defRPr sz="900" b="0">
                 <a:solidFill>
-                  <a:srgbClr val="64748B"/>
+                  <a:srgbClr val="E6F7F5"/>
                 </a:solidFill>
                 <a:latin typeface="Calibri"/>
               </a:defRPr>
@@ -5646,8 +6028,8 @@
         </p:nvSpPr>
         <p:spPr>
           <a:xfrm>
-            <a:off x="0" y="1"/>
-            <a:ext cx="50800" cy="3474720"/>
+            <a:off x="548640" y="1371600"/>
+            <a:ext cx="109728" cy="4389120"/>
           </a:xfrm>
           <a:prstGeom prst="rect">
             <a:avLst/>
@@ -5683,92 +6065,20 @@
       </p:sp>
       <p:sp>
         <p:nvSpPr>
-          <p:cNvPr id="8" name="TextBox 7"/>
-          <p:cNvSpPr txBox="1"/>
-          <p:nvPr/>
-        </p:nvSpPr>
-        <p:spPr>
-          <a:xfrm>
-            <a:off x="0" y="1"/>
-            <a:ext cx="0" cy="0"/>
-          </a:xfrm>
-          <a:prstGeom prst="rect">
-            <a:avLst/>
-          </a:prstGeom>
-          <a:noFill/>
-        </p:spPr>
-        <p:txBody>
-          <a:bodyPr wrap="square">
-            <a:spAutoFit/>
-          </a:bodyPr>
-          <a:lstStyle/>
-          <a:p>
-            <a:pPr algn="l">
-              <a:defRPr sz="1600" b="1">
-                <a:solidFill>
-                  <a:srgbClr val="C8962E"/>
-                </a:solidFill>
-                <a:latin typeface="Calibri"/>
-              </a:defRPr>
-            </a:pPr>
-            <a:r>
-              <a:t>1.</a:t>
-            </a:r>
-          </a:p>
-        </p:txBody>
-      </p:sp>
-      <p:sp>
-        <p:nvSpPr>
-          <p:cNvPr id="9" name="TextBox 8"/>
-          <p:cNvSpPr txBox="1"/>
-          <p:nvPr/>
-        </p:nvSpPr>
-        <p:spPr>
-          <a:xfrm>
-            <a:off x="1" y="1"/>
-            <a:ext cx="11" cy="0"/>
-          </a:xfrm>
-          <a:prstGeom prst="rect">
-            <a:avLst/>
-          </a:prstGeom>
-          <a:noFill/>
-        </p:spPr>
-        <p:txBody>
-          <a:bodyPr wrap="square">
-            <a:spAutoFit/>
-          </a:bodyPr>
-          <a:lstStyle/>
-          <a:p>
-            <a:pPr algn="l">
-              <a:defRPr sz="1400" b="0">
-                <a:solidFill>
-                  <a:srgbClr val="1A1A2E"/>
-                </a:solidFill>
-                <a:latin typeface="Calibri"/>
-              </a:defRPr>
-            </a:pPr>
-            <a:r>
-              <a:t>Supervisi, analisis, dan standarisasi pengembangan aplikasi perangkat daerah</a:t>
-            </a:r>
-          </a:p>
-        </p:txBody>
-      </p:sp>
-      <p:sp>
-        <p:nvSpPr>
-          <p:cNvPr id="10" name="Rectangle 9"/>
+          <p:cNvPr id="8" name="Rectangle 7"/>
           <p:cNvSpPr/>
           <p:nvPr/>
         </p:nvSpPr>
         <p:spPr>
           <a:xfrm>
-            <a:off x="1" y="1"/>
-            <a:ext cx="11" cy="6350"/>
-          </a:xfrm>
-          <a:prstGeom prst="rect">
-            <a:avLst/>
-          </a:prstGeom>
-          <a:solidFill>
-            <a:srgbClr val="D0D8E8"/>
+            <a:off x="548640" y="1371600"/>
+            <a:ext cx="1645920" cy="54864"/>
+          </a:xfrm>
+          <a:prstGeom prst="rect">
+            <a:avLst/>
+          </a:prstGeom>
+          <a:solidFill>
+            <a:srgbClr val="0A1628"/>
           </a:solidFill>
           <a:ln>
             <a:noFill/>
@@ -5798,92 +6108,20 @@
       </p:sp>
       <p:sp>
         <p:nvSpPr>
-          <p:cNvPr id="11" name="TextBox 10"/>
-          <p:cNvSpPr txBox="1"/>
-          <p:nvPr/>
-        </p:nvSpPr>
-        <p:spPr>
-          <a:xfrm>
-            <a:off x="0" y="1"/>
-            <a:ext cx="0" cy="0"/>
-          </a:xfrm>
-          <a:prstGeom prst="rect">
-            <a:avLst/>
-          </a:prstGeom>
-          <a:noFill/>
-        </p:spPr>
-        <p:txBody>
-          <a:bodyPr wrap="square">
-            <a:spAutoFit/>
-          </a:bodyPr>
-          <a:lstStyle/>
-          <a:p>
-            <a:pPr algn="l">
-              <a:defRPr sz="1600" b="1">
-                <a:solidFill>
-                  <a:srgbClr val="C8962E"/>
-                </a:solidFill>
-                <a:latin typeface="Calibri"/>
-              </a:defRPr>
-            </a:pPr>
-            <a:r>
-              <a:t>2.</a:t>
-            </a:r>
-          </a:p>
-        </p:txBody>
-      </p:sp>
-      <p:sp>
-        <p:nvSpPr>
-          <p:cNvPr id="12" name="TextBox 11"/>
-          <p:cNvSpPr txBox="1"/>
-          <p:nvPr/>
-        </p:nvSpPr>
-        <p:spPr>
-          <a:xfrm>
-            <a:off x="1" y="1"/>
-            <a:ext cx="11" cy="0"/>
-          </a:xfrm>
-          <a:prstGeom prst="rect">
-            <a:avLst/>
-          </a:prstGeom>
-          <a:noFill/>
-        </p:spPr>
-        <p:txBody>
-          <a:bodyPr wrap="square">
-            <a:spAutoFit/>
-          </a:bodyPr>
-          <a:lstStyle/>
-          <a:p>
-            <a:pPr algn="l">
-              <a:defRPr sz="1400" b="0">
-                <a:solidFill>
-                  <a:srgbClr val="1A1A2E"/>
-                </a:solidFill>
-                <a:latin typeface="Calibri"/>
-              </a:defRPr>
-            </a:pPr>
-            <a:r>
-              <a:t>Mengelola dan mengembangkan Sistem Penghubung Layanan Pemerintah (SPLP)</a:t>
-            </a:r>
-          </a:p>
-        </p:txBody>
-      </p:sp>
-      <p:sp>
-        <p:nvSpPr>
-          <p:cNvPr id="13" name="Rectangle 12"/>
+          <p:cNvPr id="9" name="Rectangle 8"/>
           <p:cNvSpPr/>
           <p:nvPr/>
         </p:nvSpPr>
         <p:spPr>
           <a:xfrm>
-            <a:off x="1" y="2"/>
-            <a:ext cx="11" cy="6350"/>
-          </a:xfrm>
-          <a:prstGeom prst="rect">
-            <a:avLst/>
-          </a:prstGeom>
-          <a:solidFill>
-            <a:srgbClr val="D0D8E8"/>
+            <a:off x="914400" y="1645920"/>
+            <a:ext cx="457200" cy="457200"/>
+          </a:xfrm>
+          <a:prstGeom prst="rect">
+            <a:avLst/>
+          </a:prstGeom>
+          <a:solidFill>
+            <a:srgbClr val="0A1628"/>
           </a:solidFill>
           <a:ln>
             <a:noFill/>
@@ -5913,14 +6151,14 @@
       </p:sp>
       <p:sp>
         <p:nvSpPr>
-          <p:cNvPr id="14" name="TextBox 13"/>
+          <p:cNvPr id="10" name="TextBox 9"/>
           <p:cNvSpPr txBox="1"/>
           <p:nvPr/>
         </p:nvSpPr>
         <p:spPr>
           <a:xfrm>
-            <a:off x="0" y="2"/>
-            <a:ext cx="0" cy="0"/>
+            <a:off x="914400" y="1700784"/>
+            <a:ext cx="457200" cy="365760"/>
           </a:xfrm>
           <a:prstGeom prst="rect">
             <a:avLst/>
@@ -5933,30 +6171,30 @@
           </a:bodyPr>
           <a:lstStyle/>
           <a:p>
-            <a:pPr algn="l">
-              <a:defRPr sz="1600" b="1">
+            <a:pPr algn="ctr">
+              <a:defRPr sz="1800" b="1">
                 <a:solidFill>
-                  <a:srgbClr val="C8962E"/>
+                  <a:srgbClr val="FFFFFF"/>
                 </a:solidFill>
                 <a:latin typeface="Calibri"/>
               </a:defRPr>
             </a:pPr>
             <a:r>
-              <a:t>3.</a:t>
-            </a:r>
-          </a:p>
-        </p:txBody>
-      </p:sp>
-      <p:sp>
-        <p:nvSpPr>
-          <p:cNvPr id="15" name="TextBox 14"/>
+              <a:t>1</a:t>
+            </a:r>
+          </a:p>
+        </p:txBody>
+      </p:sp>
+      <p:sp>
+        <p:nvSpPr>
+          <p:cNvPr id="11" name="TextBox 10"/>
           <p:cNvSpPr txBox="1"/>
           <p:nvPr/>
         </p:nvSpPr>
         <p:spPr>
           <a:xfrm>
-            <a:off x="1" y="2"/>
-            <a:ext cx="11" cy="0"/>
+            <a:off x="1600200" y="1664208"/>
+            <a:ext cx="9814255" cy="731520"/>
           </a:xfrm>
           <a:prstGeom prst="rect">
             <a:avLst/>
@@ -5970,35 +6208,39 @@
           <a:lstStyle/>
           <a:p>
             <a:pPr algn="l">
-              <a:defRPr sz="1400" b="0">
+              <a:defRPr sz="1300" b="0">
                 <a:solidFill>
-                  <a:srgbClr val="1A1A2E"/>
+                  <a:srgbClr val="1E293B"/>
                 </a:solidFill>
                 <a:latin typeface="Calibri"/>
               </a:defRPr>
             </a:pPr>
             <a:r>
-              <a:t>Pengelolaan domain dan subdomain pemerintah daerah</a:t>
-            </a:r>
-          </a:p>
-        </p:txBody>
-      </p:sp>
-      <p:sp>
-        <p:nvSpPr>
-          <p:cNvPr id="16" name="Rectangle 15"/>
+              <a:t>Supervisi, analisis, dan standarisasi pengembangan</a:t>
+            </a:r>
+            <a:br/>
+            <a:r>
+              <a:t> aplikasi perangkat daerah</a:t>
+            </a:r>
+          </a:p>
+        </p:txBody>
+      </p:sp>
+      <p:sp>
+        <p:nvSpPr>
+          <p:cNvPr id="12" name="Rectangle 11"/>
           <p:cNvSpPr/>
           <p:nvPr/>
         </p:nvSpPr>
         <p:spPr>
           <a:xfrm>
-            <a:off x="1" y="2"/>
-            <a:ext cx="11" cy="6350"/>
-          </a:xfrm>
-          <a:prstGeom prst="rect">
-            <a:avLst/>
-          </a:prstGeom>
-          <a:solidFill>
-            <a:srgbClr val="D0D8E8"/>
+            <a:off x="1143000" y="2148840"/>
+            <a:ext cx="17419320000" cy="457200"/>
+          </a:xfrm>
+          <a:prstGeom prst="rect">
+            <a:avLst/>
+          </a:prstGeom>
+          <a:solidFill>
+            <a:srgbClr val="E2E8F0"/>
           </a:solidFill>
           <a:ln>
             <a:noFill/>
@@ -6028,86 +6270,14 @@
       </p:sp>
       <p:sp>
         <p:nvSpPr>
-          <p:cNvPr id="17" name="TextBox 16"/>
-          <p:cNvSpPr txBox="1"/>
-          <p:nvPr/>
-        </p:nvSpPr>
-        <p:spPr>
-          <a:xfrm>
-            <a:off x="0" y="2"/>
-            <a:ext cx="0" cy="0"/>
-          </a:xfrm>
-          <a:prstGeom prst="rect">
-            <a:avLst/>
-          </a:prstGeom>
-          <a:noFill/>
-        </p:spPr>
-        <p:txBody>
-          <a:bodyPr wrap="square">
-            <a:spAutoFit/>
-          </a:bodyPr>
-          <a:lstStyle/>
-          <a:p>
-            <a:pPr algn="l">
-              <a:defRPr sz="1600" b="1">
-                <a:solidFill>
-                  <a:srgbClr val="C8962E"/>
-                </a:solidFill>
-                <a:latin typeface="Calibri"/>
-              </a:defRPr>
-            </a:pPr>
-            <a:r>
-              <a:t>4.</a:t>
-            </a:r>
-          </a:p>
-        </p:txBody>
-      </p:sp>
-      <p:sp>
-        <p:nvSpPr>
-          <p:cNvPr id="18" name="TextBox 17"/>
-          <p:cNvSpPr txBox="1"/>
-          <p:nvPr/>
-        </p:nvSpPr>
-        <p:spPr>
-          <a:xfrm>
-            <a:off x="1" y="2"/>
-            <a:ext cx="11" cy="0"/>
-          </a:xfrm>
-          <a:prstGeom prst="rect">
-            <a:avLst/>
-          </a:prstGeom>
-          <a:noFill/>
-        </p:spPr>
-        <p:txBody>
-          <a:bodyPr wrap="square">
-            <a:spAutoFit/>
-          </a:bodyPr>
-          <a:lstStyle/>
-          <a:p>
-            <a:pPr algn="l">
-              <a:defRPr sz="1400" b="0">
-                <a:solidFill>
-                  <a:srgbClr val="1A1A2E"/>
-                </a:solidFill>
-                <a:latin typeface="Calibri"/>
-              </a:defRPr>
-            </a:pPr>
-            <a:r>
-              <a:t>Sosialisasi dan peningkatan kapasitas SDM pengelola sistem</a:t>
-            </a:r>
-          </a:p>
-        </p:txBody>
-      </p:sp>
-      <p:sp>
-        <p:nvSpPr>
-          <p:cNvPr id="19" name="Rectangle 18"/>
+          <p:cNvPr id="13" name="Rectangle 12"/>
           <p:cNvSpPr/>
           <p:nvPr/>
         </p:nvSpPr>
         <p:spPr>
           <a:xfrm>
-            <a:off x="0" y="7"/>
-            <a:ext cx="13" cy="25400"/>
+            <a:off x="914400" y="2651760"/>
+            <a:ext cx="457200" cy="457200"/>
           </a:xfrm>
           <a:prstGeom prst="rect">
             <a:avLst/>
@@ -6143,14 +6313,14 @@
       </p:sp>
       <p:sp>
         <p:nvSpPr>
-          <p:cNvPr id="20" name="TextBox 19"/>
+          <p:cNvPr id="14" name="TextBox 13"/>
           <p:cNvSpPr txBox="1"/>
           <p:nvPr/>
         </p:nvSpPr>
         <p:spPr>
           <a:xfrm>
-            <a:off x="0" y="7"/>
-            <a:ext cx="4" cy="0"/>
+            <a:off x="914400" y="2706624"/>
+            <a:ext cx="457200" cy="365760"/>
           </a:xfrm>
           <a:prstGeom prst="rect">
             <a:avLst/>
@@ -6163,30 +6333,30 @@
           </a:bodyPr>
           <a:lstStyle/>
           <a:p>
-            <a:pPr algn="l">
-              <a:defRPr sz="700" b="0">
+            <a:pPr algn="ctr">
+              <a:defRPr sz="1800" b="1">
                 <a:solidFill>
-                  <a:srgbClr val="64748B"/>
+                  <a:srgbClr val="FFFFFF"/>
                 </a:solidFill>
                 <a:latin typeface="Calibri"/>
               </a:defRPr>
             </a:pPr>
             <a:r>
-              <a:t>Sumber: RESUME TUPOKSI egov.docx</a:t>
-            </a:r>
-          </a:p>
-        </p:txBody>
-      </p:sp>
-      <p:sp>
-        <p:nvSpPr>
-          <p:cNvPr id="21" name="TextBox 20"/>
+              <a:t>2</a:t>
+            </a:r>
+          </a:p>
+        </p:txBody>
+      </p:sp>
+      <p:sp>
+        <p:nvSpPr>
+          <p:cNvPr id="15" name="TextBox 14"/>
           <p:cNvSpPr txBox="1"/>
           <p:nvPr/>
         </p:nvSpPr>
         <p:spPr>
           <a:xfrm>
-            <a:off x="12" y="7"/>
-            <a:ext cx="0" cy="0"/>
+            <a:off x="1600200" y="2670048"/>
+            <a:ext cx="9814255" cy="731520"/>
           </a:xfrm>
           <a:prstGeom prst="rect">
             <a:avLst/>
@@ -6199,10 +6369,496 @@
           </a:bodyPr>
           <a:lstStyle/>
           <a:p>
+            <a:pPr algn="l">
+              <a:defRPr sz="1300" b="0">
+                <a:solidFill>
+                  <a:srgbClr val="1E293B"/>
+                </a:solidFill>
+                <a:latin typeface="Calibri"/>
+              </a:defRPr>
+            </a:pPr>
+            <a:r>
+              <a:t>Mengelola dan mengembangkan Sistem Penghubung</a:t>
+            </a:r>
+            <a:br/>
+            <a:r>
+              <a:t> Layanan Pemerintah (SPLP)</a:t>
+            </a:r>
+          </a:p>
+        </p:txBody>
+      </p:sp>
+      <p:sp>
+        <p:nvSpPr>
+          <p:cNvPr id="16" name="Rectangle 15"/>
+          <p:cNvSpPr/>
+          <p:nvPr/>
+        </p:nvSpPr>
+        <p:spPr>
+          <a:xfrm>
+            <a:off x="1143000" y="3154680"/>
+            <a:ext cx="17419320000" cy="457200"/>
+          </a:xfrm>
+          <a:prstGeom prst="rect">
+            <a:avLst/>
+          </a:prstGeom>
+          <a:solidFill>
+            <a:srgbClr val="E2E8F0"/>
+          </a:solidFill>
+          <a:ln>
+            <a:noFill/>
+          </a:ln>
+        </p:spPr>
+        <p:style>
+          <a:lnRef idx="1">
+            <a:schemeClr val="accent1"/>
+          </a:lnRef>
+          <a:fillRef idx="3">
+            <a:schemeClr val="accent1"/>
+          </a:fillRef>
+          <a:effectRef idx="2">
+            <a:schemeClr val="accent1"/>
+          </a:effectRef>
+          <a:fontRef idx="minor">
+            <a:schemeClr val="lt1"/>
+          </a:fontRef>
+        </p:style>
+        <p:txBody>
+          <a:bodyPr rtlCol="0" anchor="ctr"/>
+          <a:lstStyle/>
+          <a:p>
+            <a:pPr algn="ctr"/>
+          </a:p>
+        </p:txBody>
+      </p:sp>
+      <p:sp>
+        <p:nvSpPr>
+          <p:cNvPr id="17" name="Rectangle 16"/>
+          <p:cNvSpPr/>
+          <p:nvPr/>
+        </p:nvSpPr>
+        <p:spPr>
+          <a:xfrm>
+            <a:off x="914400" y="3657600"/>
+            <a:ext cx="457200" cy="457200"/>
+          </a:xfrm>
+          <a:prstGeom prst="rect">
+            <a:avLst/>
+          </a:prstGeom>
+          <a:solidFill>
+            <a:srgbClr val="0A1628"/>
+          </a:solidFill>
+          <a:ln>
+            <a:noFill/>
+          </a:ln>
+        </p:spPr>
+        <p:style>
+          <a:lnRef idx="1">
+            <a:schemeClr val="accent1"/>
+          </a:lnRef>
+          <a:fillRef idx="3">
+            <a:schemeClr val="accent1"/>
+          </a:fillRef>
+          <a:effectRef idx="2">
+            <a:schemeClr val="accent1"/>
+          </a:effectRef>
+          <a:fontRef idx="minor">
+            <a:schemeClr val="lt1"/>
+          </a:fontRef>
+        </p:style>
+        <p:txBody>
+          <a:bodyPr rtlCol="0" anchor="ctr"/>
+          <a:lstStyle/>
+          <a:p>
+            <a:pPr algn="ctr"/>
+          </a:p>
+        </p:txBody>
+      </p:sp>
+      <p:sp>
+        <p:nvSpPr>
+          <p:cNvPr id="18" name="TextBox 17"/>
+          <p:cNvSpPr txBox="1"/>
+          <p:nvPr/>
+        </p:nvSpPr>
+        <p:spPr>
+          <a:xfrm>
+            <a:off x="914400" y="3712463"/>
+            <a:ext cx="457200" cy="365760"/>
+          </a:xfrm>
+          <a:prstGeom prst="rect">
+            <a:avLst/>
+          </a:prstGeom>
+          <a:noFill/>
+        </p:spPr>
+        <p:txBody>
+          <a:bodyPr wrap="square">
+            <a:spAutoFit/>
+          </a:bodyPr>
+          <a:lstStyle/>
+          <a:p>
+            <a:pPr algn="ctr">
+              <a:defRPr sz="1800" b="1">
+                <a:solidFill>
+                  <a:srgbClr val="FFFFFF"/>
+                </a:solidFill>
+                <a:latin typeface="Calibri"/>
+              </a:defRPr>
+            </a:pPr>
+            <a:r>
+              <a:t>3</a:t>
+            </a:r>
+          </a:p>
+        </p:txBody>
+      </p:sp>
+      <p:sp>
+        <p:nvSpPr>
+          <p:cNvPr id="19" name="TextBox 18"/>
+          <p:cNvSpPr txBox="1"/>
+          <p:nvPr/>
+        </p:nvSpPr>
+        <p:spPr>
+          <a:xfrm>
+            <a:off x="1600200" y="3675887"/>
+            <a:ext cx="9814255" cy="731520"/>
+          </a:xfrm>
+          <a:prstGeom prst="rect">
+            <a:avLst/>
+          </a:prstGeom>
+          <a:noFill/>
+        </p:spPr>
+        <p:txBody>
+          <a:bodyPr wrap="square">
+            <a:spAutoFit/>
+          </a:bodyPr>
+          <a:lstStyle/>
+          <a:p>
+            <a:pPr algn="l">
+              <a:defRPr sz="1300" b="0">
+                <a:solidFill>
+                  <a:srgbClr val="1E293B"/>
+                </a:solidFill>
+                <a:latin typeface="Calibri"/>
+              </a:defRPr>
+            </a:pPr>
+            <a:r>
+              <a:t>Pengelolaan domain dan subdomain</a:t>
+            </a:r>
+            <a:br/>
+            <a:r>
+              <a:t> pemerintah daerah</a:t>
+            </a:r>
+          </a:p>
+        </p:txBody>
+      </p:sp>
+      <p:sp>
+        <p:nvSpPr>
+          <p:cNvPr id="20" name="Rectangle 19"/>
+          <p:cNvSpPr/>
+          <p:nvPr/>
+        </p:nvSpPr>
+        <p:spPr>
+          <a:xfrm>
+            <a:off x="1143000" y="4160520"/>
+            <a:ext cx="17419320000" cy="457200"/>
+          </a:xfrm>
+          <a:prstGeom prst="rect">
+            <a:avLst/>
+          </a:prstGeom>
+          <a:solidFill>
+            <a:srgbClr val="E2E8F0"/>
+          </a:solidFill>
+          <a:ln>
+            <a:noFill/>
+          </a:ln>
+        </p:spPr>
+        <p:style>
+          <a:lnRef idx="1">
+            <a:schemeClr val="accent1"/>
+          </a:lnRef>
+          <a:fillRef idx="3">
+            <a:schemeClr val="accent1"/>
+          </a:fillRef>
+          <a:effectRef idx="2">
+            <a:schemeClr val="accent1"/>
+          </a:effectRef>
+          <a:fontRef idx="minor">
+            <a:schemeClr val="lt1"/>
+          </a:fontRef>
+        </p:style>
+        <p:txBody>
+          <a:bodyPr rtlCol="0" anchor="ctr"/>
+          <a:lstStyle/>
+          <a:p>
+            <a:pPr algn="ctr"/>
+          </a:p>
+        </p:txBody>
+      </p:sp>
+      <p:sp>
+        <p:nvSpPr>
+          <p:cNvPr id="21" name="Rectangle 20"/>
+          <p:cNvSpPr/>
+          <p:nvPr/>
+        </p:nvSpPr>
+        <p:spPr>
+          <a:xfrm>
+            <a:off x="914400" y="4663440"/>
+            <a:ext cx="457200" cy="457200"/>
+          </a:xfrm>
+          <a:prstGeom prst="rect">
+            <a:avLst/>
+          </a:prstGeom>
+          <a:solidFill>
+            <a:srgbClr val="0A1628"/>
+          </a:solidFill>
+          <a:ln>
+            <a:noFill/>
+          </a:ln>
+        </p:spPr>
+        <p:style>
+          <a:lnRef idx="1">
+            <a:schemeClr val="accent1"/>
+          </a:lnRef>
+          <a:fillRef idx="3">
+            <a:schemeClr val="accent1"/>
+          </a:fillRef>
+          <a:effectRef idx="2">
+            <a:schemeClr val="accent1"/>
+          </a:effectRef>
+          <a:fontRef idx="minor">
+            <a:schemeClr val="lt1"/>
+          </a:fontRef>
+        </p:style>
+        <p:txBody>
+          <a:bodyPr rtlCol="0" anchor="ctr"/>
+          <a:lstStyle/>
+          <a:p>
+            <a:pPr algn="ctr"/>
+          </a:p>
+        </p:txBody>
+      </p:sp>
+      <p:sp>
+        <p:nvSpPr>
+          <p:cNvPr id="22" name="TextBox 21"/>
+          <p:cNvSpPr txBox="1"/>
+          <p:nvPr/>
+        </p:nvSpPr>
+        <p:spPr>
+          <a:xfrm>
+            <a:off x="914400" y="4718304"/>
+            <a:ext cx="457200" cy="365760"/>
+          </a:xfrm>
+          <a:prstGeom prst="rect">
+            <a:avLst/>
+          </a:prstGeom>
+          <a:noFill/>
+        </p:spPr>
+        <p:txBody>
+          <a:bodyPr wrap="square">
+            <a:spAutoFit/>
+          </a:bodyPr>
+          <a:lstStyle/>
+          <a:p>
+            <a:pPr algn="ctr">
+              <a:defRPr sz="1800" b="1">
+                <a:solidFill>
+                  <a:srgbClr val="FFFFFF"/>
+                </a:solidFill>
+                <a:latin typeface="Calibri"/>
+              </a:defRPr>
+            </a:pPr>
+            <a:r>
+              <a:t>4</a:t>
+            </a:r>
+          </a:p>
+        </p:txBody>
+      </p:sp>
+      <p:sp>
+        <p:nvSpPr>
+          <p:cNvPr id="23" name="TextBox 22"/>
+          <p:cNvSpPr txBox="1"/>
+          <p:nvPr/>
+        </p:nvSpPr>
+        <p:spPr>
+          <a:xfrm>
+            <a:off x="1600200" y="4681728"/>
+            <a:ext cx="9814255" cy="731520"/>
+          </a:xfrm>
+          <a:prstGeom prst="rect">
+            <a:avLst/>
+          </a:prstGeom>
+          <a:noFill/>
+        </p:spPr>
+        <p:txBody>
+          <a:bodyPr wrap="square">
+            <a:spAutoFit/>
+          </a:bodyPr>
+          <a:lstStyle/>
+          <a:p>
+            <a:pPr algn="l">
+              <a:defRPr sz="1300" b="0">
+                <a:solidFill>
+                  <a:srgbClr val="1E293B"/>
+                </a:solidFill>
+                <a:latin typeface="Calibri"/>
+              </a:defRPr>
+            </a:pPr>
+            <a:r>
+              <a:t>Sosialisasi dan peningkatan kapasitas</a:t>
+            </a:r>
+            <a:br/>
+            <a:r>
+              <a:t> SDM pengelola sistem</a:t>
+            </a:r>
+          </a:p>
+        </p:txBody>
+      </p:sp>
+      <p:sp>
+        <p:nvSpPr>
+          <p:cNvPr id="24" name="Rectangle 23"/>
+          <p:cNvSpPr/>
+          <p:nvPr/>
+        </p:nvSpPr>
+        <p:spPr>
+          <a:xfrm>
+            <a:off x="0" y="6446520"/>
+            <a:ext cx="12191695" cy="411480"/>
+          </a:xfrm>
+          <a:prstGeom prst="rect">
+            <a:avLst/>
+          </a:prstGeom>
+          <a:solidFill>
+            <a:srgbClr val="F8FAFC"/>
+          </a:solidFill>
+          <a:ln>
+            <a:noFill/>
+          </a:ln>
+        </p:spPr>
+        <p:style>
+          <a:lnRef idx="1">
+            <a:schemeClr val="accent1"/>
+          </a:lnRef>
+          <a:fillRef idx="3">
+            <a:schemeClr val="accent1"/>
+          </a:fillRef>
+          <a:effectRef idx="2">
+            <a:schemeClr val="accent1"/>
+          </a:effectRef>
+          <a:fontRef idx="minor">
+            <a:schemeClr val="lt1"/>
+          </a:fontRef>
+        </p:style>
+        <p:txBody>
+          <a:bodyPr rtlCol="0" anchor="ctr"/>
+          <a:lstStyle/>
+          <a:p>
+            <a:pPr algn="ctr"/>
+          </a:p>
+        </p:txBody>
+      </p:sp>
+      <p:sp>
+        <p:nvSpPr>
+          <p:cNvPr id="25" name="Rectangle 24"/>
+          <p:cNvSpPr/>
+          <p:nvPr/>
+        </p:nvSpPr>
+        <p:spPr>
+          <a:xfrm>
+            <a:off x="0" y="6446520"/>
+            <a:ext cx="12191695" cy="17419320000"/>
+          </a:xfrm>
+          <a:prstGeom prst="rect">
+            <a:avLst/>
+          </a:prstGeom>
+          <a:solidFill>
+            <a:srgbClr val="E2E8F0"/>
+          </a:solidFill>
+          <a:ln>
+            <a:noFill/>
+          </a:ln>
+        </p:spPr>
+        <p:style>
+          <a:lnRef idx="1">
+            <a:schemeClr val="accent1"/>
+          </a:lnRef>
+          <a:fillRef idx="3">
+            <a:schemeClr val="accent1"/>
+          </a:fillRef>
+          <a:effectRef idx="2">
+            <a:schemeClr val="accent1"/>
+          </a:effectRef>
+          <a:fontRef idx="minor">
+            <a:schemeClr val="lt1"/>
+          </a:fontRef>
+        </p:style>
+        <p:txBody>
+          <a:bodyPr rtlCol="0" anchor="ctr"/>
+          <a:lstStyle/>
+          <a:p>
+            <a:pPr algn="ctr"/>
+          </a:p>
+        </p:txBody>
+      </p:sp>
+      <p:sp>
+        <p:nvSpPr>
+          <p:cNvPr id="26" name="TextBox 25"/>
+          <p:cNvSpPr txBox="1"/>
+          <p:nvPr/>
+        </p:nvSpPr>
+        <p:spPr>
+          <a:xfrm>
+            <a:off x="548640" y="6510528"/>
+            <a:ext cx="3657600" cy="201168"/>
+          </a:xfrm>
+          <a:prstGeom prst="rect">
+            <a:avLst/>
+          </a:prstGeom>
+          <a:noFill/>
+        </p:spPr>
+        <p:txBody>
+          <a:bodyPr wrap="square">
+            <a:spAutoFit/>
+          </a:bodyPr>
+          <a:lstStyle/>
+          <a:p>
+            <a:pPr algn="l">
+              <a:defRPr sz="700" b="0">
+                <a:solidFill>
+                  <a:srgbClr val="94A3B8"/>
+                </a:solidFill>
+                <a:latin typeface="Calibri"/>
+              </a:defRPr>
+            </a:pPr>
+            <a:r>
+              <a:t>Sumber: RESUME TUPOKSI egov.docx</a:t>
+            </a:r>
+          </a:p>
+        </p:txBody>
+      </p:sp>
+      <p:sp>
+        <p:nvSpPr>
+          <p:cNvPr id="27" name="TextBox 26"/>
+          <p:cNvSpPr txBox="1"/>
+          <p:nvPr/>
+        </p:nvSpPr>
+        <p:spPr>
+          <a:xfrm>
+            <a:off x="11277295" y="6510528"/>
+            <a:ext cx="731520" cy="201168"/>
+          </a:xfrm>
+          <a:prstGeom prst="rect">
+            <a:avLst/>
+          </a:prstGeom>
+          <a:noFill/>
+        </p:spPr>
+        <p:txBody>
+          <a:bodyPr wrap="square">
+            <a:spAutoFit/>
+          </a:bodyPr>
+          <a:lstStyle/>
+          <a:p>
             <a:pPr algn="r">
               <a:defRPr sz="800" b="0">
                 <a:solidFill>
-                  <a:srgbClr val="64748B"/>
+                  <a:srgbClr val="94A3B8"/>
                 </a:solidFill>
                 <a:latin typeface="Calibri"/>
               </a:defRPr>
@@ -6227,7 +6883,7 @@
     <p:bg>
       <p:bgPr>
         <a:solidFill>
-          <a:srgbClr val="F5F7FA"/>
+          <a:srgbClr val="FFFFFF"/>
         </a:solidFill>
         <a:effectLst/>
       </p:bgPr>
@@ -6248,13 +6904,13 @@
         <p:spPr>
           <a:xfrm>
             <a:off x="0" y="0"/>
-            <a:ext cx="13" cy="38100"/>
-          </a:xfrm>
-          <a:prstGeom prst="rect">
-            <a:avLst/>
-          </a:prstGeom>
-          <a:solidFill>
-            <a:srgbClr val="C8962E"/>
+            <a:ext cx="12191695" cy="36576"/>
+          </a:xfrm>
+          <a:prstGeom prst="rect">
+            <a:avLst/>
+          </a:prstGeom>
+          <a:solidFill>
+            <a:srgbClr val="F59E0B"/>
           </a:solidFill>
           <a:ln>
             <a:noFill/>
@@ -6290,8 +6946,8 @@
         </p:nvSpPr>
         <p:spPr>
           <a:xfrm>
-            <a:off x="0" y="38100"/>
-            <a:ext cx="13" cy="822959"/>
+            <a:off x="0" y="36576"/>
+            <a:ext cx="12191695" cy="1051560"/>
           </a:xfrm>
           <a:prstGeom prst="rect">
             <a:avLst/>
@@ -6333,14 +6989,14 @@
         </p:nvSpPr>
         <p:spPr>
           <a:xfrm>
-            <a:off x="0" y="0"/>
-            <a:ext cx="0" cy="0"/>
-          </a:xfrm>
-          <a:prstGeom prst="rect">
-            <a:avLst/>
-          </a:prstGeom>
-          <a:solidFill>
-            <a:srgbClr val="C8962E"/>
+            <a:off x="0" y="1088136"/>
+            <a:ext cx="12191695" cy="27432"/>
+          </a:xfrm>
+          <a:prstGeom prst="rect">
+            <a:avLst/>
+          </a:prstGeom>
+          <a:solidFill>
+            <a:srgbClr val="0D9488"/>
           </a:solidFill>
           <a:ln>
             <a:noFill/>
@@ -6376,8 +7032,8 @@
         </p:nvSpPr>
         <p:spPr>
           <a:xfrm>
-            <a:off x="0" y="0"/>
-            <a:ext cx="11" cy="0"/>
+            <a:off x="685800" y="164592"/>
+            <a:ext cx="10820095" cy="502920"/>
           </a:xfrm>
           <a:prstGeom prst="rect">
             <a:avLst/>
@@ -6391,7 +7047,7 @@
           <a:lstStyle/>
           <a:p>
             <a:pPr algn="l">
-              <a:defRPr sz="2000" b="1">
+              <a:defRPr sz="2200" b="1">
                 <a:solidFill>
                   <a:srgbClr val="FFFFFF"/>
                 </a:solidFill>
@@ -6412,8 +7068,8 @@
         </p:nvSpPr>
         <p:spPr>
           <a:xfrm>
-            <a:off x="0" y="0"/>
-            <a:ext cx="11" cy="0"/>
+            <a:off x="685800" y="658368"/>
+            <a:ext cx="10820095" cy="320040"/>
           </a:xfrm>
           <a:prstGeom prst="rect">
             <a:avLst/>
@@ -6429,7 +7085,7 @@
             <a:pPr algn="l">
               <a:defRPr sz="900" b="0">
                 <a:solidFill>
-                  <a:srgbClr val="64748B"/>
+                  <a:srgbClr val="E6F7F5"/>
                 </a:solidFill>
                 <a:latin typeface="Calibri"/>
               </a:defRPr>
@@ -6448,14 +7104,14 @@
         </p:nvSpPr>
         <p:spPr>
           <a:xfrm>
-            <a:off x="0" y="1"/>
-            <a:ext cx="50800" cy="3474720"/>
-          </a:xfrm>
-          <a:prstGeom prst="rect">
-            <a:avLst/>
-          </a:prstGeom>
-          <a:solidFill>
-            <a:srgbClr val="0A1628"/>
+            <a:off x="548640" y="1371600"/>
+            <a:ext cx="109728" cy="4389120"/>
+          </a:xfrm>
+          <a:prstGeom prst="rect">
+            <a:avLst/>
+          </a:prstGeom>
+          <a:solidFill>
+            <a:srgbClr val="0D9488"/>
           </a:solidFill>
           <a:ln>
             <a:noFill/>
@@ -6485,92 +7141,20 @@
       </p:sp>
       <p:sp>
         <p:nvSpPr>
-          <p:cNvPr id="8" name="TextBox 7"/>
-          <p:cNvSpPr txBox="1"/>
-          <p:nvPr/>
-        </p:nvSpPr>
-        <p:spPr>
-          <a:xfrm>
-            <a:off x="0" y="1"/>
-            <a:ext cx="0" cy="0"/>
-          </a:xfrm>
-          <a:prstGeom prst="rect">
-            <a:avLst/>
-          </a:prstGeom>
-          <a:noFill/>
-        </p:spPr>
-        <p:txBody>
-          <a:bodyPr wrap="square">
-            <a:spAutoFit/>
-          </a:bodyPr>
-          <a:lstStyle/>
-          <a:p>
-            <a:pPr algn="l">
-              <a:defRPr sz="1600" b="1">
-                <a:solidFill>
-                  <a:srgbClr val="C8962E"/>
-                </a:solidFill>
-                <a:latin typeface="Calibri"/>
-              </a:defRPr>
-            </a:pPr>
-            <a:r>
-              <a:t>1.</a:t>
-            </a:r>
-          </a:p>
-        </p:txBody>
-      </p:sp>
-      <p:sp>
-        <p:nvSpPr>
-          <p:cNvPr id="9" name="TextBox 8"/>
-          <p:cNvSpPr txBox="1"/>
-          <p:nvPr/>
-        </p:nvSpPr>
-        <p:spPr>
-          <a:xfrm>
-            <a:off x="1" y="1"/>
-            <a:ext cx="11" cy="0"/>
-          </a:xfrm>
-          <a:prstGeom prst="rect">
-            <a:avLst/>
-          </a:prstGeom>
-          <a:noFill/>
-        </p:spPr>
-        <p:txBody>
-          <a:bodyPr wrap="square">
-            <a:spAutoFit/>
-          </a:bodyPr>
-          <a:lstStyle/>
-          <a:p>
-            <a:pPr algn="l">
-              <a:defRPr sz="1400" b="0">
-                <a:solidFill>
-                  <a:srgbClr val="1A1A2E"/>
-                </a:solidFill>
-                <a:latin typeface="Calibri"/>
-              </a:defRPr>
-            </a:pPr>
-            <a:r>
-              <a:t>Menyusun strategi, rencana aksi, dan masterplan Kota Cerdas</a:t>
-            </a:r>
-          </a:p>
-        </p:txBody>
-      </p:sp>
-      <p:sp>
-        <p:nvSpPr>
-          <p:cNvPr id="10" name="Rectangle 9"/>
+          <p:cNvPr id="8" name="Rectangle 7"/>
           <p:cNvSpPr/>
           <p:nvPr/>
         </p:nvSpPr>
         <p:spPr>
           <a:xfrm>
-            <a:off x="1" y="1"/>
-            <a:ext cx="11" cy="6350"/>
-          </a:xfrm>
-          <a:prstGeom prst="rect">
-            <a:avLst/>
-          </a:prstGeom>
-          <a:solidFill>
-            <a:srgbClr val="D0D8E8"/>
+            <a:off x="548640" y="1371600"/>
+            <a:ext cx="1645920" cy="54864"/>
+          </a:xfrm>
+          <a:prstGeom prst="rect">
+            <a:avLst/>
+          </a:prstGeom>
+          <a:solidFill>
+            <a:srgbClr val="0D9488"/>
           </a:solidFill>
           <a:ln>
             <a:noFill/>
@@ -6600,92 +7184,20 @@
       </p:sp>
       <p:sp>
         <p:nvSpPr>
-          <p:cNvPr id="11" name="TextBox 10"/>
-          <p:cNvSpPr txBox="1"/>
-          <p:nvPr/>
-        </p:nvSpPr>
-        <p:spPr>
-          <a:xfrm>
-            <a:off x="0" y="1"/>
-            <a:ext cx="0" cy="0"/>
-          </a:xfrm>
-          <a:prstGeom prst="rect">
-            <a:avLst/>
-          </a:prstGeom>
-          <a:noFill/>
-        </p:spPr>
-        <p:txBody>
-          <a:bodyPr wrap="square">
-            <a:spAutoFit/>
-          </a:bodyPr>
-          <a:lstStyle/>
-          <a:p>
-            <a:pPr algn="l">
-              <a:defRPr sz="1600" b="1">
-                <a:solidFill>
-                  <a:srgbClr val="C8962E"/>
-                </a:solidFill>
-                <a:latin typeface="Calibri"/>
-              </a:defRPr>
-            </a:pPr>
-            <a:r>
-              <a:t>2.</a:t>
-            </a:r>
-          </a:p>
-        </p:txBody>
-      </p:sp>
-      <p:sp>
-        <p:nvSpPr>
-          <p:cNvPr id="12" name="TextBox 11"/>
-          <p:cNvSpPr txBox="1"/>
-          <p:nvPr/>
-        </p:nvSpPr>
-        <p:spPr>
-          <a:xfrm>
-            <a:off x="1" y="1"/>
-            <a:ext cx="11" cy="0"/>
-          </a:xfrm>
-          <a:prstGeom prst="rect">
-            <a:avLst/>
-          </a:prstGeom>
-          <a:noFill/>
-        </p:spPr>
-        <p:txBody>
-          <a:bodyPr wrap="square">
-            <a:spAutoFit/>
-          </a:bodyPr>
-          <a:lstStyle/>
-          <a:p>
-            <a:pPr algn="l">
-              <a:defRPr sz="1400" b="0">
-                <a:solidFill>
-                  <a:srgbClr val="1A1A2E"/>
-                </a:solidFill>
-                <a:latin typeface="Calibri"/>
-              </a:defRPr>
-            </a:pPr>
-            <a:r>
-              <a:t>Membangun kolaborasi dengan pemangku kepentingan lintas sektor</a:t>
-            </a:r>
-          </a:p>
-        </p:txBody>
-      </p:sp>
-      <p:sp>
-        <p:nvSpPr>
-          <p:cNvPr id="13" name="Rectangle 12"/>
+          <p:cNvPr id="9" name="Rectangle 8"/>
           <p:cNvSpPr/>
           <p:nvPr/>
         </p:nvSpPr>
         <p:spPr>
           <a:xfrm>
-            <a:off x="1" y="2"/>
-            <a:ext cx="11" cy="6350"/>
-          </a:xfrm>
-          <a:prstGeom prst="rect">
-            <a:avLst/>
-          </a:prstGeom>
-          <a:solidFill>
-            <a:srgbClr val="D0D8E8"/>
+            <a:off x="914400" y="1645920"/>
+            <a:ext cx="457200" cy="457200"/>
+          </a:xfrm>
+          <a:prstGeom prst="rect">
+            <a:avLst/>
+          </a:prstGeom>
+          <a:solidFill>
+            <a:srgbClr val="0D9488"/>
           </a:solidFill>
           <a:ln>
             <a:noFill/>
@@ -6715,14 +7227,14 @@
       </p:sp>
       <p:sp>
         <p:nvSpPr>
-          <p:cNvPr id="14" name="TextBox 13"/>
+          <p:cNvPr id="10" name="TextBox 9"/>
           <p:cNvSpPr txBox="1"/>
           <p:nvPr/>
         </p:nvSpPr>
         <p:spPr>
           <a:xfrm>
-            <a:off x="0" y="2"/>
-            <a:ext cx="0" cy="0"/>
+            <a:off x="914400" y="1700784"/>
+            <a:ext cx="457200" cy="365760"/>
           </a:xfrm>
           <a:prstGeom prst="rect">
             <a:avLst/>
@@ -6735,30 +7247,30 @@
           </a:bodyPr>
           <a:lstStyle/>
           <a:p>
-            <a:pPr algn="l">
-              <a:defRPr sz="1600" b="1">
+            <a:pPr algn="ctr">
+              <a:defRPr sz="1800" b="1">
                 <a:solidFill>
-                  <a:srgbClr val="C8962E"/>
+                  <a:srgbClr val="FFFFFF"/>
                 </a:solidFill>
                 <a:latin typeface="Calibri"/>
               </a:defRPr>
             </a:pPr>
             <a:r>
-              <a:t>3.</a:t>
-            </a:r>
-          </a:p>
-        </p:txBody>
-      </p:sp>
-      <p:sp>
-        <p:nvSpPr>
-          <p:cNvPr id="15" name="TextBox 14"/>
+              <a:t>1</a:t>
+            </a:r>
+          </a:p>
+        </p:txBody>
+      </p:sp>
+      <p:sp>
+        <p:nvSpPr>
+          <p:cNvPr id="11" name="TextBox 10"/>
           <p:cNvSpPr txBox="1"/>
           <p:nvPr/>
         </p:nvSpPr>
         <p:spPr>
           <a:xfrm>
-            <a:off x="1" y="2"/>
-            <a:ext cx="11" cy="0"/>
+            <a:off x="1600200" y="1664208"/>
+            <a:ext cx="9814255" cy="731520"/>
           </a:xfrm>
           <a:prstGeom prst="rect">
             <a:avLst/>
@@ -6772,35 +7284,39 @@
           <a:lstStyle/>
           <a:p>
             <a:pPr algn="l">
-              <a:defRPr sz="1400" b="0">
+              <a:defRPr sz="1300" b="0">
                 <a:solidFill>
-                  <a:srgbClr val="1A1A2E"/>
+                  <a:srgbClr val="1E293B"/>
                 </a:solidFill>
                 <a:latin typeface="Calibri"/>
               </a:defRPr>
             </a:pPr>
             <a:r>
-              <a:t>Mengoordinasikan dan mengevaluasi program Kota Cerdas</a:t>
-            </a:r>
-          </a:p>
-        </p:txBody>
-      </p:sp>
-      <p:sp>
-        <p:nvSpPr>
-          <p:cNvPr id="16" name="Rectangle 15"/>
+              <a:t>Menyusun strategi, rencana aksi,</a:t>
+            </a:r>
+            <a:br/>
+            <a:r>
+              <a:t> dan masterplan Kota Cerdas</a:t>
+            </a:r>
+          </a:p>
+        </p:txBody>
+      </p:sp>
+      <p:sp>
+        <p:nvSpPr>
+          <p:cNvPr id="12" name="Rectangle 11"/>
           <p:cNvSpPr/>
           <p:nvPr/>
         </p:nvSpPr>
         <p:spPr>
           <a:xfrm>
-            <a:off x="1" y="2"/>
-            <a:ext cx="11" cy="6350"/>
-          </a:xfrm>
-          <a:prstGeom prst="rect">
-            <a:avLst/>
-          </a:prstGeom>
-          <a:solidFill>
-            <a:srgbClr val="D0D8E8"/>
+            <a:off x="1143000" y="2148840"/>
+            <a:ext cx="17419320000" cy="457200"/>
+          </a:xfrm>
+          <a:prstGeom prst="rect">
+            <a:avLst/>
+          </a:prstGeom>
+          <a:solidFill>
+            <a:srgbClr val="E2E8F0"/>
           </a:solidFill>
           <a:ln>
             <a:noFill/>
@@ -6830,92 +7346,20 @@
       </p:sp>
       <p:sp>
         <p:nvSpPr>
-          <p:cNvPr id="17" name="TextBox 16"/>
-          <p:cNvSpPr txBox="1"/>
-          <p:nvPr/>
-        </p:nvSpPr>
-        <p:spPr>
-          <a:xfrm>
-            <a:off x="0" y="2"/>
-            <a:ext cx="0" cy="0"/>
-          </a:xfrm>
-          <a:prstGeom prst="rect">
-            <a:avLst/>
-          </a:prstGeom>
-          <a:noFill/>
-        </p:spPr>
-        <p:txBody>
-          <a:bodyPr wrap="square">
-            <a:spAutoFit/>
-          </a:bodyPr>
-          <a:lstStyle/>
-          <a:p>
-            <a:pPr algn="l">
-              <a:defRPr sz="1600" b="1">
-                <a:solidFill>
-                  <a:srgbClr val="C8962E"/>
-                </a:solidFill>
-                <a:latin typeface="Calibri"/>
-              </a:defRPr>
-            </a:pPr>
-            <a:r>
-              <a:t>4.</a:t>
-            </a:r>
-          </a:p>
-        </p:txBody>
-      </p:sp>
-      <p:sp>
-        <p:nvSpPr>
-          <p:cNvPr id="18" name="TextBox 17"/>
-          <p:cNvSpPr txBox="1"/>
-          <p:nvPr/>
-        </p:nvSpPr>
-        <p:spPr>
-          <a:xfrm>
-            <a:off x="1" y="2"/>
-            <a:ext cx="11" cy="0"/>
-          </a:xfrm>
-          <a:prstGeom prst="rect">
-            <a:avLst/>
-          </a:prstGeom>
-          <a:noFill/>
-        </p:spPr>
-        <p:txBody>
-          <a:bodyPr wrap="square">
-            <a:spAutoFit/>
-          </a:bodyPr>
-          <a:lstStyle/>
-          <a:p>
-            <a:pPr algn="l">
-              <a:defRPr sz="1400" b="0">
-                <a:solidFill>
-                  <a:srgbClr val="1A1A2E"/>
-                </a:solidFill>
-                <a:latin typeface="Calibri"/>
-              </a:defRPr>
-            </a:pPr>
-            <a:r>
-              <a:t>Menyelaraskan rencana induk dengan dokumen perencanaan daerah</a:t>
-            </a:r>
-          </a:p>
-        </p:txBody>
-      </p:sp>
-      <p:sp>
-        <p:nvSpPr>
-          <p:cNvPr id="19" name="Rectangle 18"/>
+          <p:cNvPr id="13" name="Rectangle 12"/>
           <p:cNvSpPr/>
           <p:nvPr/>
         </p:nvSpPr>
         <p:spPr>
           <a:xfrm>
-            <a:off x="0" y="7"/>
-            <a:ext cx="13" cy="25400"/>
-          </a:xfrm>
-          <a:prstGeom prst="rect">
-            <a:avLst/>
-          </a:prstGeom>
-          <a:solidFill>
-            <a:srgbClr val="0A1628"/>
+            <a:off x="914400" y="2651760"/>
+            <a:ext cx="457200" cy="457200"/>
+          </a:xfrm>
+          <a:prstGeom prst="rect">
+            <a:avLst/>
+          </a:prstGeom>
+          <a:solidFill>
+            <a:srgbClr val="0D9488"/>
           </a:solidFill>
           <a:ln>
             <a:noFill/>
@@ -6945,14 +7389,14 @@
       </p:sp>
       <p:sp>
         <p:nvSpPr>
-          <p:cNvPr id="20" name="TextBox 19"/>
+          <p:cNvPr id="14" name="TextBox 13"/>
           <p:cNvSpPr txBox="1"/>
           <p:nvPr/>
         </p:nvSpPr>
         <p:spPr>
           <a:xfrm>
-            <a:off x="0" y="7"/>
-            <a:ext cx="4" cy="0"/>
+            <a:off x="914400" y="2706624"/>
+            <a:ext cx="457200" cy="365760"/>
           </a:xfrm>
           <a:prstGeom prst="rect">
             <a:avLst/>
@@ -6965,30 +7409,30 @@
           </a:bodyPr>
           <a:lstStyle/>
           <a:p>
-            <a:pPr algn="l">
-              <a:defRPr sz="700" b="0">
+            <a:pPr algn="ctr">
+              <a:defRPr sz="1800" b="1">
                 <a:solidFill>
-                  <a:srgbClr val="64748B"/>
+                  <a:srgbClr val="FFFFFF"/>
                 </a:solidFill>
                 <a:latin typeface="Calibri"/>
               </a:defRPr>
             </a:pPr>
             <a:r>
-              <a:t>Sumber: RESUME TUPOKSI egov.docx</a:t>
-            </a:r>
-          </a:p>
-        </p:txBody>
-      </p:sp>
-      <p:sp>
-        <p:nvSpPr>
-          <p:cNvPr id="21" name="TextBox 20"/>
+              <a:t>2</a:t>
+            </a:r>
+          </a:p>
+        </p:txBody>
+      </p:sp>
+      <p:sp>
+        <p:nvSpPr>
+          <p:cNvPr id="15" name="TextBox 14"/>
           <p:cNvSpPr txBox="1"/>
           <p:nvPr/>
         </p:nvSpPr>
         <p:spPr>
           <a:xfrm>
-            <a:off x="12" y="7"/>
-            <a:ext cx="0" cy="0"/>
+            <a:off x="1600200" y="2670048"/>
+            <a:ext cx="9814255" cy="731520"/>
           </a:xfrm>
           <a:prstGeom prst="rect">
             <a:avLst/>
@@ -7001,10 +7445,496 @@
           </a:bodyPr>
           <a:lstStyle/>
           <a:p>
+            <a:pPr algn="l">
+              <a:defRPr sz="1300" b="0">
+                <a:solidFill>
+                  <a:srgbClr val="1E293B"/>
+                </a:solidFill>
+                <a:latin typeface="Calibri"/>
+              </a:defRPr>
+            </a:pPr>
+            <a:r>
+              <a:t>Membangun kolaborasi dengan pemangku</a:t>
+            </a:r>
+            <a:br/>
+            <a:r>
+              <a:t> kepentingan lintas sektor</a:t>
+            </a:r>
+          </a:p>
+        </p:txBody>
+      </p:sp>
+      <p:sp>
+        <p:nvSpPr>
+          <p:cNvPr id="16" name="Rectangle 15"/>
+          <p:cNvSpPr/>
+          <p:nvPr/>
+        </p:nvSpPr>
+        <p:spPr>
+          <a:xfrm>
+            <a:off x="1143000" y="3154680"/>
+            <a:ext cx="17419320000" cy="457200"/>
+          </a:xfrm>
+          <a:prstGeom prst="rect">
+            <a:avLst/>
+          </a:prstGeom>
+          <a:solidFill>
+            <a:srgbClr val="E2E8F0"/>
+          </a:solidFill>
+          <a:ln>
+            <a:noFill/>
+          </a:ln>
+        </p:spPr>
+        <p:style>
+          <a:lnRef idx="1">
+            <a:schemeClr val="accent1"/>
+          </a:lnRef>
+          <a:fillRef idx="3">
+            <a:schemeClr val="accent1"/>
+          </a:fillRef>
+          <a:effectRef idx="2">
+            <a:schemeClr val="accent1"/>
+          </a:effectRef>
+          <a:fontRef idx="minor">
+            <a:schemeClr val="lt1"/>
+          </a:fontRef>
+        </p:style>
+        <p:txBody>
+          <a:bodyPr rtlCol="0" anchor="ctr"/>
+          <a:lstStyle/>
+          <a:p>
+            <a:pPr algn="ctr"/>
+          </a:p>
+        </p:txBody>
+      </p:sp>
+      <p:sp>
+        <p:nvSpPr>
+          <p:cNvPr id="17" name="Rectangle 16"/>
+          <p:cNvSpPr/>
+          <p:nvPr/>
+        </p:nvSpPr>
+        <p:spPr>
+          <a:xfrm>
+            <a:off x="914400" y="3657600"/>
+            <a:ext cx="457200" cy="457200"/>
+          </a:xfrm>
+          <a:prstGeom prst="rect">
+            <a:avLst/>
+          </a:prstGeom>
+          <a:solidFill>
+            <a:srgbClr val="0D9488"/>
+          </a:solidFill>
+          <a:ln>
+            <a:noFill/>
+          </a:ln>
+        </p:spPr>
+        <p:style>
+          <a:lnRef idx="1">
+            <a:schemeClr val="accent1"/>
+          </a:lnRef>
+          <a:fillRef idx="3">
+            <a:schemeClr val="accent1"/>
+          </a:fillRef>
+          <a:effectRef idx="2">
+            <a:schemeClr val="accent1"/>
+          </a:effectRef>
+          <a:fontRef idx="minor">
+            <a:schemeClr val="lt1"/>
+          </a:fontRef>
+        </p:style>
+        <p:txBody>
+          <a:bodyPr rtlCol="0" anchor="ctr"/>
+          <a:lstStyle/>
+          <a:p>
+            <a:pPr algn="ctr"/>
+          </a:p>
+        </p:txBody>
+      </p:sp>
+      <p:sp>
+        <p:nvSpPr>
+          <p:cNvPr id="18" name="TextBox 17"/>
+          <p:cNvSpPr txBox="1"/>
+          <p:nvPr/>
+        </p:nvSpPr>
+        <p:spPr>
+          <a:xfrm>
+            <a:off x="914400" y="3712463"/>
+            <a:ext cx="457200" cy="365760"/>
+          </a:xfrm>
+          <a:prstGeom prst="rect">
+            <a:avLst/>
+          </a:prstGeom>
+          <a:noFill/>
+        </p:spPr>
+        <p:txBody>
+          <a:bodyPr wrap="square">
+            <a:spAutoFit/>
+          </a:bodyPr>
+          <a:lstStyle/>
+          <a:p>
+            <a:pPr algn="ctr">
+              <a:defRPr sz="1800" b="1">
+                <a:solidFill>
+                  <a:srgbClr val="FFFFFF"/>
+                </a:solidFill>
+                <a:latin typeface="Calibri"/>
+              </a:defRPr>
+            </a:pPr>
+            <a:r>
+              <a:t>3</a:t>
+            </a:r>
+          </a:p>
+        </p:txBody>
+      </p:sp>
+      <p:sp>
+        <p:nvSpPr>
+          <p:cNvPr id="19" name="TextBox 18"/>
+          <p:cNvSpPr txBox="1"/>
+          <p:nvPr/>
+        </p:nvSpPr>
+        <p:spPr>
+          <a:xfrm>
+            <a:off x="1600200" y="3675887"/>
+            <a:ext cx="9814255" cy="731520"/>
+          </a:xfrm>
+          <a:prstGeom prst="rect">
+            <a:avLst/>
+          </a:prstGeom>
+          <a:noFill/>
+        </p:spPr>
+        <p:txBody>
+          <a:bodyPr wrap="square">
+            <a:spAutoFit/>
+          </a:bodyPr>
+          <a:lstStyle/>
+          <a:p>
+            <a:pPr algn="l">
+              <a:defRPr sz="1300" b="0">
+                <a:solidFill>
+                  <a:srgbClr val="1E293B"/>
+                </a:solidFill>
+                <a:latin typeface="Calibri"/>
+              </a:defRPr>
+            </a:pPr>
+            <a:r>
+              <a:t>Mengoordinasikan dan mengevaluasi</a:t>
+            </a:r>
+            <a:br/>
+            <a:r>
+              <a:t> program Kota Cerdas</a:t>
+            </a:r>
+          </a:p>
+        </p:txBody>
+      </p:sp>
+      <p:sp>
+        <p:nvSpPr>
+          <p:cNvPr id="20" name="Rectangle 19"/>
+          <p:cNvSpPr/>
+          <p:nvPr/>
+        </p:nvSpPr>
+        <p:spPr>
+          <a:xfrm>
+            <a:off x="1143000" y="4160520"/>
+            <a:ext cx="17419320000" cy="457200"/>
+          </a:xfrm>
+          <a:prstGeom prst="rect">
+            <a:avLst/>
+          </a:prstGeom>
+          <a:solidFill>
+            <a:srgbClr val="E2E8F0"/>
+          </a:solidFill>
+          <a:ln>
+            <a:noFill/>
+          </a:ln>
+        </p:spPr>
+        <p:style>
+          <a:lnRef idx="1">
+            <a:schemeClr val="accent1"/>
+          </a:lnRef>
+          <a:fillRef idx="3">
+            <a:schemeClr val="accent1"/>
+          </a:fillRef>
+          <a:effectRef idx="2">
+            <a:schemeClr val="accent1"/>
+          </a:effectRef>
+          <a:fontRef idx="minor">
+            <a:schemeClr val="lt1"/>
+          </a:fontRef>
+        </p:style>
+        <p:txBody>
+          <a:bodyPr rtlCol="0" anchor="ctr"/>
+          <a:lstStyle/>
+          <a:p>
+            <a:pPr algn="ctr"/>
+          </a:p>
+        </p:txBody>
+      </p:sp>
+      <p:sp>
+        <p:nvSpPr>
+          <p:cNvPr id="21" name="Rectangle 20"/>
+          <p:cNvSpPr/>
+          <p:nvPr/>
+        </p:nvSpPr>
+        <p:spPr>
+          <a:xfrm>
+            <a:off x="914400" y="4663440"/>
+            <a:ext cx="457200" cy="457200"/>
+          </a:xfrm>
+          <a:prstGeom prst="rect">
+            <a:avLst/>
+          </a:prstGeom>
+          <a:solidFill>
+            <a:srgbClr val="0D9488"/>
+          </a:solidFill>
+          <a:ln>
+            <a:noFill/>
+          </a:ln>
+        </p:spPr>
+        <p:style>
+          <a:lnRef idx="1">
+            <a:schemeClr val="accent1"/>
+          </a:lnRef>
+          <a:fillRef idx="3">
+            <a:schemeClr val="accent1"/>
+          </a:fillRef>
+          <a:effectRef idx="2">
+            <a:schemeClr val="accent1"/>
+          </a:effectRef>
+          <a:fontRef idx="minor">
+            <a:schemeClr val="lt1"/>
+          </a:fontRef>
+        </p:style>
+        <p:txBody>
+          <a:bodyPr rtlCol="0" anchor="ctr"/>
+          <a:lstStyle/>
+          <a:p>
+            <a:pPr algn="ctr"/>
+          </a:p>
+        </p:txBody>
+      </p:sp>
+      <p:sp>
+        <p:nvSpPr>
+          <p:cNvPr id="22" name="TextBox 21"/>
+          <p:cNvSpPr txBox="1"/>
+          <p:nvPr/>
+        </p:nvSpPr>
+        <p:spPr>
+          <a:xfrm>
+            <a:off x="914400" y="4718304"/>
+            <a:ext cx="457200" cy="365760"/>
+          </a:xfrm>
+          <a:prstGeom prst="rect">
+            <a:avLst/>
+          </a:prstGeom>
+          <a:noFill/>
+        </p:spPr>
+        <p:txBody>
+          <a:bodyPr wrap="square">
+            <a:spAutoFit/>
+          </a:bodyPr>
+          <a:lstStyle/>
+          <a:p>
+            <a:pPr algn="ctr">
+              <a:defRPr sz="1800" b="1">
+                <a:solidFill>
+                  <a:srgbClr val="FFFFFF"/>
+                </a:solidFill>
+                <a:latin typeface="Calibri"/>
+              </a:defRPr>
+            </a:pPr>
+            <a:r>
+              <a:t>4</a:t>
+            </a:r>
+          </a:p>
+        </p:txBody>
+      </p:sp>
+      <p:sp>
+        <p:nvSpPr>
+          <p:cNvPr id="23" name="TextBox 22"/>
+          <p:cNvSpPr txBox="1"/>
+          <p:nvPr/>
+        </p:nvSpPr>
+        <p:spPr>
+          <a:xfrm>
+            <a:off x="1600200" y="4681728"/>
+            <a:ext cx="9814255" cy="731520"/>
+          </a:xfrm>
+          <a:prstGeom prst="rect">
+            <a:avLst/>
+          </a:prstGeom>
+          <a:noFill/>
+        </p:spPr>
+        <p:txBody>
+          <a:bodyPr wrap="square">
+            <a:spAutoFit/>
+          </a:bodyPr>
+          <a:lstStyle/>
+          <a:p>
+            <a:pPr algn="l">
+              <a:defRPr sz="1300" b="0">
+                <a:solidFill>
+                  <a:srgbClr val="1E293B"/>
+                </a:solidFill>
+                <a:latin typeface="Calibri"/>
+              </a:defRPr>
+            </a:pPr>
+            <a:r>
+              <a:t>Menyelaraskan rencana induk dengan</a:t>
+            </a:r>
+            <a:br/>
+            <a:r>
+              <a:t> dokumen perencanaan daerah</a:t>
+            </a:r>
+          </a:p>
+        </p:txBody>
+      </p:sp>
+      <p:sp>
+        <p:nvSpPr>
+          <p:cNvPr id="24" name="Rectangle 23"/>
+          <p:cNvSpPr/>
+          <p:nvPr/>
+        </p:nvSpPr>
+        <p:spPr>
+          <a:xfrm>
+            <a:off x="0" y="6446520"/>
+            <a:ext cx="12191695" cy="411480"/>
+          </a:xfrm>
+          <a:prstGeom prst="rect">
+            <a:avLst/>
+          </a:prstGeom>
+          <a:solidFill>
+            <a:srgbClr val="F8FAFC"/>
+          </a:solidFill>
+          <a:ln>
+            <a:noFill/>
+          </a:ln>
+        </p:spPr>
+        <p:style>
+          <a:lnRef idx="1">
+            <a:schemeClr val="accent1"/>
+          </a:lnRef>
+          <a:fillRef idx="3">
+            <a:schemeClr val="accent1"/>
+          </a:fillRef>
+          <a:effectRef idx="2">
+            <a:schemeClr val="accent1"/>
+          </a:effectRef>
+          <a:fontRef idx="minor">
+            <a:schemeClr val="lt1"/>
+          </a:fontRef>
+        </p:style>
+        <p:txBody>
+          <a:bodyPr rtlCol="0" anchor="ctr"/>
+          <a:lstStyle/>
+          <a:p>
+            <a:pPr algn="ctr"/>
+          </a:p>
+        </p:txBody>
+      </p:sp>
+      <p:sp>
+        <p:nvSpPr>
+          <p:cNvPr id="25" name="Rectangle 24"/>
+          <p:cNvSpPr/>
+          <p:nvPr/>
+        </p:nvSpPr>
+        <p:spPr>
+          <a:xfrm>
+            <a:off x="0" y="6446520"/>
+            <a:ext cx="12191695" cy="17419320000"/>
+          </a:xfrm>
+          <a:prstGeom prst="rect">
+            <a:avLst/>
+          </a:prstGeom>
+          <a:solidFill>
+            <a:srgbClr val="E2E8F0"/>
+          </a:solidFill>
+          <a:ln>
+            <a:noFill/>
+          </a:ln>
+        </p:spPr>
+        <p:style>
+          <a:lnRef idx="1">
+            <a:schemeClr val="accent1"/>
+          </a:lnRef>
+          <a:fillRef idx="3">
+            <a:schemeClr val="accent1"/>
+          </a:fillRef>
+          <a:effectRef idx="2">
+            <a:schemeClr val="accent1"/>
+          </a:effectRef>
+          <a:fontRef idx="minor">
+            <a:schemeClr val="lt1"/>
+          </a:fontRef>
+        </p:style>
+        <p:txBody>
+          <a:bodyPr rtlCol="0" anchor="ctr"/>
+          <a:lstStyle/>
+          <a:p>
+            <a:pPr algn="ctr"/>
+          </a:p>
+        </p:txBody>
+      </p:sp>
+      <p:sp>
+        <p:nvSpPr>
+          <p:cNvPr id="26" name="TextBox 25"/>
+          <p:cNvSpPr txBox="1"/>
+          <p:nvPr/>
+        </p:nvSpPr>
+        <p:spPr>
+          <a:xfrm>
+            <a:off x="548640" y="6510528"/>
+            <a:ext cx="3657600" cy="201168"/>
+          </a:xfrm>
+          <a:prstGeom prst="rect">
+            <a:avLst/>
+          </a:prstGeom>
+          <a:noFill/>
+        </p:spPr>
+        <p:txBody>
+          <a:bodyPr wrap="square">
+            <a:spAutoFit/>
+          </a:bodyPr>
+          <a:lstStyle/>
+          <a:p>
+            <a:pPr algn="l">
+              <a:defRPr sz="700" b="0">
+                <a:solidFill>
+                  <a:srgbClr val="94A3B8"/>
+                </a:solidFill>
+                <a:latin typeface="Calibri"/>
+              </a:defRPr>
+            </a:pPr>
+            <a:r>
+              <a:t>Sumber: RESUME TUPOKSI egov.docx</a:t>
+            </a:r>
+          </a:p>
+        </p:txBody>
+      </p:sp>
+      <p:sp>
+        <p:nvSpPr>
+          <p:cNvPr id="27" name="TextBox 26"/>
+          <p:cNvSpPr txBox="1"/>
+          <p:nvPr/>
+        </p:nvSpPr>
+        <p:spPr>
+          <a:xfrm>
+            <a:off x="11277295" y="6510528"/>
+            <a:ext cx="731520" cy="201168"/>
+          </a:xfrm>
+          <a:prstGeom prst="rect">
+            <a:avLst/>
+          </a:prstGeom>
+          <a:noFill/>
+        </p:spPr>
+        <p:txBody>
+          <a:bodyPr wrap="square">
+            <a:spAutoFit/>
+          </a:bodyPr>
+          <a:lstStyle/>
+          <a:p>
             <a:pPr algn="r">
               <a:defRPr sz="800" b="0">
                 <a:solidFill>
-                  <a:srgbClr val="64748B"/>
+                  <a:srgbClr val="94A3B8"/>
                 </a:solidFill>
                 <a:latin typeface="Calibri"/>
               </a:defRPr>
@@ -7029,7 +7959,7 @@
     <p:bg>
       <p:bgPr>
         <a:solidFill>
-          <a:srgbClr val="F5F7FA"/>
+          <a:srgbClr val="FFFFFF"/>
         </a:solidFill>
         <a:effectLst/>
       </p:bgPr>
@@ -7050,13 +7980,13 @@
         <p:spPr>
           <a:xfrm>
             <a:off x="0" y="0"/>
-            <a:ext cx="13" cy="38100"/>
-          </a:xfrm>
-          <a:prstGeom prst="rect">
-            <a:avLst/>
-          </a:prstGeom>
-          <a:solidFill>
-            <a:srgbClr val="C8962E"/>
+            <a:ext cx="12191695" cy="36576"/>
+          </a:xfrm>
+          <a:prstGeom prst="rect">
+            <a:avLst/>
+          </a:prstGeom>
+          <a:solidFill>
+            <a:srgbClr val="F59E0B"/>
           </a:solidFill>
           <a:ln>
             <a:noFill/>
@@ -7092,8 +8022,8 @@
         </p:nvSpPr>
         <p:spPr>
           <a:xfrm>
-            <a:off x="0" y="38100"/>
-            <a:ext cx="13" cy="822959"/>
+            <a:off x="0" y="36576"/>
+            <a:ext cx="12191695" cy="1051560"/>
           </a:xfrm>
           <a:prstGeom prst="rect">
             <a:avLst/>
@@ -7135,14 +8065,14 @@
         </p:nvSpPr>
         <p:spPr>
           <a:xfrm>
-            <a:off x="0" y="0"/>
-            <a:ext cx="0" cy="0"/>
-          </a:xfrm>
-          <a:prstGeom prst="rect">
-            <a:avLst/>
-          </a:prstGeom>
-          <a:solidFill>
-            <a:srgbClr val="C8962E"/>
+            <a:off x="0" y="1088136"/>
+            <a:ext cx="12191695" cy="27432"/>
+          </a:xfrm>
+          <a:prstGeom prst="rect">
+            <a:avLst/>
+          </a:prstGeom>
+          <a:solidFill>
+            <a:srgbClr val="0D9488"/>
           </a:solidFill>
           <a:ln>
             <a:noFill/>
@@ -7178,8 +8108,8 @@
         </p:nvSpPr>
         <p:spPr>
           <a:xfrm>
-            <a:off x="0" y="0"/>
-            <a:ext cx="11" cy="0"/>
+            <a:off x="685800" y="164592"/>
+            <a:ext cx="10820095" cy="502920"/>
           </a:xfrm>
           <a:prstGeom prst="rect">
             <a:avLst/>
@@ -7193,7 +8123,7 @@
           <a:lstStyle/>
           <a:p>
             <a:pPr algn="l">
-              <a:defRPr sz="2000" b="1">
+              <a:defRPr sz="2200" b="1">
                 <a:solidFill>
                   <a:srgbClr val="FFFFFF"/>
                 </a:solidFill>
@@ -7214,8 +8144,8 @@
         </p:nvSpPr>
         <p:spPr>
           <a:xfrm>
-            <a:off x="0" y="0"/>
-            <a:ext cx="11" cy="0"/>
+            <a:off x="685800" y="658368"/>
+            <a:ext cx="10820095" cy="320040"/>
           </a:xfrm>
           <a:prstGeom prst="rect">
             <a:avLst/>
@@ -7231,13 +8161,17 @@
             <a:pPr algn="l">
               <a:defRPr sz="900" b="0">
                 <a:solidFill>
-                  <a:srgbClr val="64748B"/>
+                  <a:srgbClr val="E6F7F5"/>
                 </a:solidFill>
                 <a:latin typeface="Calibri"/>
               </a:defRPr>
             </a:pPr>
             <a:r>
-              <a:t>Kerangka kerja menuju Sistem Pemerintahan Berbasis Elektronik yang matang</a:t>
+              <a:t>Kerangka kerja menuju Sistem Pemerintahan</a:t>
+            </a:r>
+            <a:br/>
+            <a:r>
+              <a:t> Berbasis Elektronik yang matang</a:t>
             </a:r>
           </a:p>
         </p:txBody>
@@ -7250,14 +8184,14 @@
         </p:nvSpPr>
         <p:spPr>
           <a:xfrm>
-            <a:off x="0" y="1"/>
-            <a:ext cx="50800" cy="3474720"/>
-          </a:xfrm>
-          <a:prstGeom prst="rect">
-            <a:avLst/>
-          </a:prstGeom>
-          <a:solidFill>
-            <a:srgbClr val="0A1628"/>
+            <a:off x="548640" y="1371600"/>
+            <a:ext cx="109728" cy="4389120"/>
+          </a:xfrm>
+          <a:prstGeom prst="rect">
+            <a:avLst/>
+          </a:prstGeom>
+          <a:solidFill>
+            <a:srgbClr val="1A5676"/>
           </a:solidFill>
           <a:ln>
             <a:noFill/>
@@ -7287,92 +8221,20 @@
       </p:sp>
       <p:sp>
         <p:nvSpPr>
-          <p:cNvPr id="8" name="TextBox 7"/>
-          <p:cNvSpPr txBox="1"/>
-          <p:nvPr/>
-        </p:nvSpPr>
-        <p:spPr>
-          <a:xfrm>
-            <a:off x="0" y="1"/>
-            <a:ext cx="0" cy="0"/>
-          </a:xfrm>
-          <a:prstGeom prst="rect">
-            <a:avLst/>
-          </a:prstGeom>
-          <a:noFill/>
-        </p:spPr>
-        <p:txBody>
-          <a:bodyPr wrap="square">
-            <a:spAutoFit/>
-          </a:bodyPr>
-          <a:lstStyle/>
-          <a:p>
-            <a:pPr algn="l">
-              <a:defRPr sz="1600" b="1">
-                <a:solidFill>
-                  <a:srgbClr val="C8962E"/>
-                </a:solidFill>
-                <a:latin typeface="Calibri"/>
-              </a:defRPr>
-            </a:pPr>
-            <a:r>
-              <a:t>1.</a:t>
-            </a:r>
-          </a:p>
-        </p:txBody>
-      </p:sp>
-      <p:sp>
-        <p:nvSpPr>
-          <p:cNvPr id="9" name="TextBox 8"/>
-          <p:cNvSpPr txBox="1"/>
-          <p:nvPr/>
-        </p:nvSpPr>
-        <p:spPr>
-          <a:xfrm>
-            <a:off x="1" y="1"/>
-            <a:ext cx="11" cy="0"/>
-          </a:xfrm>
-          <a:prstGeom prst="rect">
-            <a:avLst/>
-          </a:prstGeom>
-          <a:noFill/>
-        </p:spPr>
-        <p:txBody>
-          <a:bodyPr wrap="square">
-            <a:spAutoFit/>
-          </a:bodyPr>
-          <a:lstStyle/>
-          <a:p>
-            <a:pPr algn="l">
-              <a:defRPr sz="1400" b="0">
-                <a:solidFill>
-                  <a:srgbClr val="1A1A2E"/>
-                </a:solidFill>
-                <a:latin typeface="Calibri"/>
-              </a:defRPr>
-            </a:pPr>
-            <a:r>
-              <a:t>Menyusun strategi, roadmap, arsitektur, dan peta rencana SPBE</a:t>
-            </a:r>
-          </a:p>
-        </p:txBody>
-      </p:sp>
-      <p:sp>
-        <p:nvSpPr>
-          <p:cNvPr id="10" name="Rectangle 9"/>
+          <p:cNvPr id="8" name="Rectangle 7"/>
           <p:cNvSpPr/>
           <p:nvPr/>
         </p:nvSpPr>
         <p:spPr>
           <a:xfrm>
-            <a:off x="1" y="1"/>
-            <a:ext cx="11" cy="6350"/>
-          </a:xfrm>
-          <a:prstGeom prst="rect">
-            <a:avLst/>
-          </a:prstGeom>
-          <a:solidFill>
-            <a:srgbClr val="D0D8E8"/>
+            <a:off x="548640" y="1371600"/>
+            <a:ext cx="1645920" cy="54864"/>
+          </a:xfrm>
+          <a:prstGeom prst="rect">
+            <a:avLst/>
+          </a:prstGeom>
+          <a:solidFill>
+            <a:srgbClr val="1A5676"/>
           </a:solidFill>
           <a:ln>
             <a:noFill/>
@@ -7402,92 +8264,20 @@
       </p:sp>
       <p:sp>
         <p:nvSpPr>
-          <p:cNvPr id="11" name="TextBox 10"/>
-          <p:cNvSpPr txBox="1"/>
-          <p:nvPr/>
-        </p:nvSpPr>
-        <p:spPr>
-          <a:xfrm>
-            <a:off x="0" y="1"/>
-            <a:ext cx="0" cy="0"/>
-          </a:xfrm>
-          <a:prstGeom prst="rect">
-            <a:avLst/>
-          </a:prstGeom>
-          <a:noFill/>
-        </p:spPr>
-        <p:txBody>
-          <a:bodyPr wrap="square">
-            <a:spAutoFit/>
-          </a:bodyPr>
-          <a:lstStyle/>
-          <a:p>
-            <a:pPr algn="l">
-              <a:defRPr sz="1600" b="1">
-                <a:solidFill>
-                  <a:srgbClr val="C8962E"/>
-                </a:solidFill>
-                <a:latin typeface="Calibri"/>
-              </a:defRPr>
-            </a:pPr>
-            <a:r>
-              <a:t>2.</a:t>
-            </a:r>
-          </a:p>
-        </p:txBody>
-      </p:sp>
-      <p:sp>
-        <p:nvSpPr>
-          <p:cNvPr id="12" name="TextBox 11"/>
-          <p:cNvSpPr txBox="1"/>
-          <p:nvPr/>
-        </p:nvSpPr>
-        <p:spPr>
-          <a:xfrm>
-            <a:off x="1" y="1"/>
-            <a:ext cx="11" cy="0"/>
-          </a:xfrm>
-          <a:prstGeom prst="rect">
-            <a:avLst/>
-          </a:prstGeom>
-          <a:noFill/>
-        </p:spPr>
-        <p:txBody>
-          <a:bodyPr wrap="square">
-            <a:spAutoFit/>
-          </a:bodyPr>
-          <a:lstStyle/>
-          <a:p>
-            <a:pPr algn="l">
-              <a:defRPr sz="1400" b="0">
-                <a:solidFill>
-                  <a:srgbClr val="1A1A2E"/>
-                </a:solidFill>
-                <a:latin typeface="Calibri"/>
-              </a:defRPr>
-            </a:pPr>
-            <a:r>
-              <a:t>Melaksanakan dan mengoordinasikan program SPBE lintas perangkat daerah</a:t>
-            </a:r>
-          </a:p>
-        </p:txBody>
-      </p:sp>
-      <p:sp>
-        <p:nvSpPr>
-          <p:cNvPr id="13" name="Rectangle 12"/>
+          <p:cNvPr id="9" name="Rectangle 8"/>
           <p:cNvSpPr/>
           <p:nvPr/>
         </p:nvSpPr>
         <p:spPr>
           <a:xfrm>
-            <a:off x="1" y="2"/>
-            <a:ext cx="11" cy="6350"/>
-          </a:xfrm>
-          <a:prstGeom prst="rect">
-            <a:avLst/>
-          </a:prstGeom>
-          <a:solidFill>
-            <a:srgbClr val="D0D8E8"/>
+            <a:off x="914400" y="1645920"/>
+            <a:ext cx="457200" cy="457200"/>
+          </a:xfrm>
+          <a:prstGeom prst="rect">
+            <a:avLst/>
+          </a:prstGeom>
+          <a:solidFill>
+            <a:srgbClr val="1A5676"/>
           </a:solidFill>
           <a:ln>
             <a:noFill/>
@@ -7517,14 +8307,14 @@
       </p:sp>
       <p:sp>
         <p:nvSpPr>
-          <p:cNvPr id="14" name="TextBox 13"/>
+          <p:cNvPr id="10" name="TextBox 9"/>
           <p:cNvSpPr txBox="1"/>
           <p:nvPr/>
         </p:nvSpPr>
         <p:spPr>
           <a:xfrm>
-            <a:off x="0" y="2"/>
-            <a:ext cx="0" cy="0"/>
+            <a:off x="914400" y="1700784"/>
+            <a:ext cx="457200" cy="365760"/>
           </a:xfrm>
           <a:prstGeom prst="rect">
             <a:avLst/>
@@ -7537,30 +8327,30 @@
           </a:bodyPr>
           <a:lstStyle/>
           <a:p>
-            <a:pPr algn="l">
-              <a:defRPr sz="1600" b="1">
+            <a:pPr algn="ctr">
+              <a:defRPr sz="1800" b="1">
                 <a:solidFill>
-                  <a:srgbClr val="C8962E"/>
+                  <a:srgbClr val="FFFFFF"/>
                 </a:solidFill>
                 <a:latin typeface="Calibri"/>
               </a:defRPr>
             </a:pPr>
             <a:r>
-              <a:t>3.</a:t>
-            </a:r>
-          </a:p>
-        </p:txBody>
-      </p:sp>
-      <p:sp>
-        <p:nvSpPr>
-          <p:cNvPr id="15" name="TextBox 14"/>
+              <a:t>1</a:t>
+            </a:r>
+          </a:p>
+        </p:txBody>
+      </p:sp>
+      <p:sp>
+        <p:nvSpPr>
+          <p:cNvPr id="11" name="TextBox 10"/>
           <p:cNvSpPr txBox="1"/>
           <p:nvPr/>
         </p:nvSpPr>
         <p:spPr>
           <a:xfrm>
-            <a:off x="1" y="2"/>
-            <a:ext cx="11" cy="0"/>
+            <a:off x="1600200" y="1664208"/>
+            <a:ext cx="9814255" cy="731520"/>
           </a:xfrm>
           <a:prstGeom prst="rect">
             <a:avLst/>
@@ -7574,35 +8364,39 @@
           <a:lstStyle/>
           <a:p>
             <a:pPr algn="l">
-              <a:defRPr sz="1400" b="0">
+              <a:defRPr sz="1300" b="0">
                 <a:solidFill>
-                  <a:srgbClr val="1A1A2E"/>
+                  <a:srgbClr val="1E293B"/>
                 </a:solidFill>
                 <a:latin typeface="Calibri"/>
               </a:defRPr>
             </a:pPr>
             <a:r>
-              <a:t>Mengembangkan kebijakan dan tata kelola SPBE</a:t>
-            </a:r>
-          </a:p>
-        </p:txBody>
-      </p:sp>
-      <p:sp>
-        <p:nvSpPr>
-          <p:cNvPr id="16" name="Rectangle 15"/>
+              <a:t>Menyusun strategi, roadmap, arsitektur,</a:t>
+            </a:r>
+            <a:br/>
+            <a:r>
+              <a:t> dan peta rencana SPBE</a:t>
+            </a:r>
+          </a:p>
+        </p:txBody>
+      </p:sp>
+      <p:sp>
+        <p:nvSpPr>
+          <p:cNvPr id="12" name="Rectangle 11"/>
           <p:cNvSpPr/>
           <p:nvPr/>
         </p:nvSpPr>
         <p:spPr>
           <a:xfrm>
-            <a:off x="1" y="2"/>
-            <a:ext cx="11" cy="6350"/>
-          </a:xfrm>
-          <a:prstGeom prst="rect">
-            <a:avLst/>
-          </a:prstGeom>
-          <a:solidFill>
-            <a:srgbClr val="D0D8E8"/>
+            <a:off x="1143000" y="2148840"/>
+            <a:ext cx="17419320000" cy="457200"/>
+          </a:xfrm>
+          <a:prstGeom prst="rect">
+            <a:avLst/>
+          </a:prstGeom>
+          <a:solidFill>
+            <a:srgbClr val="E2E8F0"/>
           </a:solidFill>
           <a:ln>
             <a:noFill/>
@@ -7632,92 +8426,20 @@
       </p:sp>
       <p:sp>
         <p:nvSpPr>
-          <p:cNvPr id="17" name="TextBox 16"/>
-          <p:cNvSpPr txBox="1"/>
-          <p:nvPr/>
-        </p:nvSpPr>
-        <p:spPr>
-          <a:xfrm>
-            <a:off x="0" y="2"/>
-            <a:ext cx="0" cy="0"/>
-          </a:xfrm>
-          <a:prstGeom prst="rect">
-            <a:avLst/>
-          </a:prstGeom>
-          <a:noFill/>
-        </p:spPr>
-        <p:txBody>
-          <a:bodyPr wrap="square">
-            <a:spAutoFit/>
-          </a:bodyPr>
-          <a:lstStyle/>
-          <a:p>
-            <a:pPr algn="l">
-              <a:defRPr sz="1600" b="1">
-                <a:solidFill>
-                  <a:srgbClr val="C8962E"/>
-                </a:solidFill>
-                <a:latin typeface="Calibri"/>
-              </a:defRPr>
-            </a:pPr>
-            <a:r>
-              <a:t>4.</a:t>
-            </a:r>
-          </a:p>
-        </p:txBody>
-      </p:sp>
-      <p:sp>
-        <p:nvSpPr>
-          <p:cNvPr id="18" name="TextBox 17"/>
-          <p:cNvSpPr txBox="1"/>
-          <p:nvPr/>
-        </p:nvSpPr>
-        <p:spPr>
-          <a:xfrm>
-            <a:off x="1" y="2"/>
-            <a:ext cx="11" cy="0"/>
-          </a:xfrm>
-          <a:prstGeom prst="rect">
-            <a:avLst/>
-          </a:prstGeom>
-          <a:noFill/>
-        </p:spPr>
-        <p:txBody>
-          <a:bodyPr wrap="square">
-            <a:spAutoFit/>
-          </a:bodyPr>
-          <a:lstStyle/>
-          <a:p>
-            <a:pPr algn="l">
-              <a:defRPr sz="1400" b="0">
-                <a:solidFill>
-                  <a:srgbClr val="1A1A2E"/>
-                </a:solidFill>
-                <a:latin typeface="Calibri"/>
-              </a:defRPr>
-            </a:pPr>
-            <a:r>
-              <a:t>Monitoring, evaluasi, dan rekomendasi perbaikan berkelanjutan</a:t>
-            </a:r>
-          </a:p>
-        </p:txBody>
-      </p:sp>
-      <p:sp>
-        <p:nvSpPr>
-          <p:cNvPr id="19" name="Rectangle 18"/>
+          <p:cNvPr id="13" name="Rectangle 12"/>
           <p:cNvSpPr/>
           <p:nvPr/>
         </p:nvSpPr>
         <p:spPr>
           <a:xfrm>
-            <a:off x="0" y="7"/>
-            <a:ext cx="13" cy="25400"/>
-          </a:xfrm>
-          <a:prstGeom prst="rect">
-            <a:avLst/>
-          </a:prstGeom>
-          <a:solidFill>
-            <a:srgbClr val="0A1628"/>
+            <a:off x="914400" y="2651760"/>
+            <a:ext cx="457200" cy="457200"/>
+          </a:xfrm>
+          <a:prstGeom prst="rect">
+            <a:avLst/>
+          </a:prstGeom>
+          <a:solidFill>
+            <a:srgbClr val="1A5676"/>
           </a:solidFill>
           <a:ln>
             <a:noFill/>
@@ -7747,14 +8469,14 @@
       </p:sp>
       <p:sp>
         <p:nvSpPr>
-          <p:cNvPr id="20" name="TextBox 19"/>
+          <p:cNvPr id="14" name="TextBox 13"/>
           <p:cNvSpPr txBox="1"/>
           <p:nvPr/>
         </p:nvSpPr>
         <p:spPr>
           <a:xfrm>
-            <a:off x="0" y="7"/>
-            <a:ext cx="4" cy="0"/>
+            <a:off x="914400" y="2706624"/>
+            <a:ext cx="457200" cy="365760"/>
           </a:xfrm>
           <a:prstGeom prst="rect">
             <a:avLst/>
@@ -7767,30 +8489,30 @@
           </a:bodyPr>
           <a:lstStyle/>
           <a:p>
-            <a:pPr algn="l">
-              <a:defRPr sz="700" b="0">
+            <a:pPr algn="ctr">
+              <a:defRPr sz="1800" b="1">
                 <a:solidFill>
-                  <a:srgbClr val="64748B"/>
+                  <a:srgbClr val="FFFFFF"/>
                 </a:solidFill>
                 <a:latin typeface="Calibri"/>
               </a:defRPr>
             </a:pPr>
             <a:r>
-              <a:t>Sumber: RESUME TUPOKSI egov.docx</a:t>
-            </a:r>
-          </a:p>
-        </p:txBody>
-      </p:sp>
-      <p:sp>
-        <p:nvSpPr>
-          <p:cNvPr id="21" name="TextBox 20"/>
+              <a:t>2</a:t>
+            </a:r>
+          </a:p>
+        </p:txBody>
+      </p:sp>
+      <p:sp>
+        <p:nvSpPr>
+          <p:cNvPr id="15" name="TextBox 14"/>
           <p:cNvSpPr txBox="1"/>
           <p:nvPr/>
         </p:nvSpPr>
         <p:spPr>
           <a:xfrm>
-            <a:off x="12" y="7"/>
-            <a:ext cx="0" cy="0"/>
+            <a:off x="1600200" y="2670048"/>
+            <a:ext cx="9814255" cy="731520"/>
           </a:xfrm>
           <a:prstGeom prst="rect">
             <a:avLst/>
@@ -7803,10 +8525,496 @@
           </a:bodyPr>
           <a:lstStyle/>
           <a:p>
+            <a:pPr algn="l">
+              <a:defRPr sz="1300" b="0">
+                <a:solidFill>
+                  <a:srgbClr val="1E293B"/>
+                </a:solidFill>
+                <a:latin typeface="Calibri"/>
+              </a:defRPr>
+            </a:pPr>
+            <a:r>
+              <a:t>Melaksanakan dan mengoordinasikan program</a:t>
+            </a:r>
+            <a:br/>
+            <a:r>
+              <a:t> SPBE lintas perangkat daerah</a:t>
+            </a:r>
+          </a:p>
+        </p:txBody>
+      </p:sp>
+      <p:sp>
+        <p:nvSpPr>
+          <p:cNvPr id="16" name="Rectangle 15"/>
+          <p:cNvSpPr/>
+          <p:nvPr/>
+        </p:nvSpPr>
+        <p:spPr>
+          <a:xfrm>
+            <a:off x="1143000" y="3154680"/>
+            <a:ext cx="17419320000" cy="457200"/>
+          </a:xfrm>
+          <a:prstGeom prst="rect">
+            <a:avLst/>
+          </a:prstGeom>
+          <a:solidFill>
+            <a:srgbClr val="E2E8F0"/>
+          </a:solidFill>
+          <a:ln>
+            <a:noFill/>
+          </a:ln>
+        </p:spPr>
+        <p:style>
+          <a:lnRef idx="1">
+            <a:schemeClr val="accent1"/>
+          </a:lnRef>
+          <a:fillRef idx="3">
+            <a:schemeClr val="accent1"/>
+          </a:fillRef>
+          <a:effectRef idx="2">
+            <a:schemeClr val="accent1"/>
+          </a:effectRef>
+          <a:fontRef idx="minor">
+            <a:schemeClr val="lt1"/>
+          </a:fontRef>
+        </p:style>
+        <p:txBody>
+          <a:bodyPr rtlCol="0" anchor="ctr"/>
+          <a:lstStyle/>
+          <a:p>
+            <a:pPr algn="ctr"/>
+          </a:p>
+        </p:txBody>
+      </p:sp>
+      <p:sp>
+        <p:nvSpPr>
+          <p:cNvPr id="17" name="Rectangle 16"/>
+          <p:cNvSpPr/>
+          <p:nvPr/>
+        </p:nvSpPr>
+        <p:spPr>
+          <a:xfrm>
+            <a:off x="914400" y="3657600"/>
+            <a:ext cx="457200" cy="457200"/>
+          </a:xfrm>
+          <a:prstGeom prst="rect">
+            <a:avLst/>
+          </a:prstGeom>
+          <a:solidFill>
+            <a:srgbClr val="1A5676"/>
+          </a:solidFill>
+          <a:ln>
+            <a:noFill/>
+          </a:ln>
+        </p:spPr>
+        <p:style>
+          <a:lnRef idx="1">
+            <a:schemeClr val="accent1"/>
+          </a:lnRef>
+          <a:fillRef idx="3">
+            <a:schemeClr val="accent1"/>
+          </a:fillRef>
+          <a:effectRef idx="2">
+            <a:schemeClr val="accent1"/>
+          </a:effectRef>
+          <a:fontRef idx="minor">
+            <a:schemeClr val="lt1"/>
+          </a:fontRef>
+        </p:style>
+        <p:txBody>
+          <a:bodyPr rtlCol="0" anchor="ctr"/>
+          <a:lstStyle/>
+          <a:p>
+            <a:pPr algn="ctr"/>
+          </a:p>
+        </p:txBody>
+      </p:sp>
+      <p:sp>
+        <p:nvSpPr>
+          <p:cNvPr id="18" name="TextBox 17"/>
+          <p:cNvSpPr txBox="1"/>
+          <p:nvPr/>
+        </p:nvSpPr>
+        <p:spPr>
+          <a:xfrm>
+            <a:off x="914400" y="3712463"/>
+            <a:ext cx="457200" cy="365760"/>
+          </a:xfrm>
+          <a:prstGeom prst="rect">
+            <a:avLst/>
+          </a:prstGeom>
+          <a:noFill/>
+        </p:spPr>
+        <p:txBody>
+          <a:bodyPr wrap="square">
+            <a:spAutoFit/>
+          </a:bodyPr>
+          <a:lstStyle/>
+          <a:p>
+            <a:pPr algn="ctr">
+              <a:defRPr sz="1800" b="1">
+                <a:solidFill>
+                  <a:srgbClr val="FFFFFF"/>
+                </a:solidFill>
+                <a:latin typeface="Calibri"/>
+              </a:defRPr>
+            </a:pPr>
+            <a:r>
+              <a:t>3</a:t>
+            </a:r>
+          </a:p>
+        </p:txBody>
+      </p:sp>
+      <p:sp>
+        <p:nvSpPr>
+          <p:cNvPr id="19" name="TextBox 18"/>
+          <p:cNvSpPr txBox="1"/>
+          <p:nvPr/>
+        </p:nvSpPr>
+        <p:spPr>
+          <a:xfrm>
+            <a:off x="1600200" y="3675887"/>
+            <a:ext cx="9814255" cy="731520"/>
+          </a:xfrm>
+          <a:prstGeom prst="rect">
+            <a:avLst/>
+          </a:prstGeom>
+          <a:noFill/>
+        </p:spPr>
+        <p:txBody>
+          <a:bodyPr wrap="square">
+            <a:spAutoFit/>
+          </a:bodyPr>
+          <a:lstStyle/>
+          <a:p>
+            <a:pPr algn="l">
+              <a:defRPr sz="1300" b="0">
+                <a:solidFill>
+                  <a:srgbClr val="1E293B"/>
+                </a:solidFill>
+                <a:latin typeface="Calibri"/>
+              </a:defRPr>
+            </a:pPr>
+            <a:r>
+              <a:t>Mengembangkan kebijakan dan</a:t>
+            </a:r>
+            <a:br/>
+            <a:r>
+              <a:t> tata kelola SPBE</a:t>
+            </a:r>
+          </a:p>
+        </p:txBody>
+      </p:sp>
+      <p:sp>
+        <p:nvSpPr>
+          <p:cNvPr id="20" name="Rectangle 19"/>
+          <p:cNvSpPr/>
+          <p:nvPr/>
+        </p:nvSpPr>
+        <p:spPr>
+          <a:xfrm>
+            <a:off x="1143000" y="4160520"/>
+            <a:ext cx="17419320000" cy="457200"/>
+          </a:xfrm>
+          <a:prstGeom prst="rect">
+            <a:avLst/>
+          </a:prstGeom>
+          <a:solidFill>
+            <a:srgbClr val="E2E8F0"/>
+          </a:solidFill>
+          <a:ln>
+            <a:noFill/>
+          </a:ln>
+        </p:spPr>
+        <p:style>
+          <a:lnRef idx="1">
+            <a:schemeClr val="accent1"/>
+          </a:lnRef>
+          <a:fillRef idx="3">
+            <a:schemeClr val="accent1"/>
+          </a:fillRef>
+          <a:effectRef idx="2">
+            <a:schemeClr val="accent1"/>
+          </a:effectRef>
+          <a:fontRef idx="minor">
+            <a:schemeClr val="lt1"/>
+          </a:fontRef>
+        </p:style>
+        <p:txBody>
+          <a:bodyPr rtlCol="0" anchor="ctr"/>
+          <a:lstStyle/>
+          <a:p>
+            <a:pPr algn="ctr"/>
+          </a:p>
+        </p:txBody>
+      </p:sp>
+      <p:sp>
+        <p:nvSpPr>
+          <p:cNvPr id="21" name="Rectangle 20"/>
+          <p:cNvSpPr/>
+          <p:nvPr/>
+        </p:nvSpPr>
+        <p:spPr>
+          <a:xfrm>
+            <a:off x="914400" y="4663440"/>
+            <a:ext cx="457200" cy="457200"/>
+          </a:xfrm>
+          <a:prstGeom prst="rect">
+            <a:avLst/>
+          </a:prstGeom>
+          <a:solidFill>
+            <a:srgbClr val="1A5676"/>
+          </a:solidFill>
+          <a:ln>
+            <a:noFill/>
+          </a:ln>
+        </p:spPr>
+        <p:style>
+          <a:lnRef idx="1">
+            <a:schemeClr val="accent1"/>
+          </a:lnRef>
+          <a:fillRef idx="3">
+            <a:schemeClr val="accent1"/>
+          </a:fillRef>
+          <a:effectRef idx="2">
+            <a:schemeClr val="accent1"/>
+          </a:effectRef>
+          <a:fontRef idx="minor">
+            <a:schemeClr val="lt1"/>
+          </a:fontRef>
+        </p:style>
+        <p:txBody>
+          <a:bodyPr rtlCol="0" anchor="ctr"/>
+          <a:lstStyle/>
+          <a:p>
+            <a:pPr algn="ctr"/>
+          </a:p>
+        </p:txBody>
+      </p:sp>
+      <p:sp>
+        <p:nvSpPr>
+          <p:cNvPr id="22" name="TextBox 21"/>
+          <p:cNvSpPr txBox="1"/>
+          <p:nvPr/>
+        </p:nvSpPr>
+        <p:spPr>
+          <a:xfrm>
+            <a:off x="914400" y="4718304"/>
+            <a:ext cx="457200" cy="365760"/>
+          </a:xfrm>
+          <a:prstGeom prst="rect">
+            <a:avLst/>
+          </a:prstGeom>
+          <a:noFill/>
+        </p:spPr>
+        <p:txBody>
+          <a:bodyPr wrap="square">
+            <a:spAutoFit/>
+          </a:bodyPr>
+          <a:lstStyle/>
+          <a:p>
+            <a:pPr algn="ctr">
+              <a:defRPr sz="1800" b="1">
+                <a:solidFill>
+                  <a:srgbClr val="FFFFFF"/>
+                </a:solidFill>
+                <a:latin typeface="Calibri"/>
+              </a:defRPr>
+            </a:pPr>
+            <a:r>
+              <a:t>4</a:t>
+            </a:r>
+          </a:p>
+        </p:txBody>
+      </p:sp>
+      <p:sp>
+        <p:nvSpPr>
+          <p:cNvPr id="23" name="TextBox 22"/>
+          <p:cNvSpPr txBox="1"/>
+          <p:nvPr/>
+        </p:nvSpPr>
+        <p:spPr>
+          <a:xfrm>
+            <a:off x="1600200" y="4681728"/>
+            <a:ext cx="9814255" cy="731520"/>
+          </a:xfrm>
+          <a:prstGeom prst="rect">
+            <a:avLst/>
+          </a:prstGeom>
+          <a:noFill/>
+        </p:spPr>
+        <p:txBody>
+          <a:bodyPr wrap="square">
+            <a:spAutoFit/>
+          </a:bodyPr>
+          <a:lstStyle/>
+          <a:p>
+            <a:pPr algn="l">
+              <a:defRPr sz="1300" b="0">
+                <a:solidFill>
+                  <a:srgbClr val="1E293B"/>
+                </a:solidFill>
+                <a:latin typeface="Calibri"/>
+              </a:defRPr>
+            </a:pPr>
+            <a:r>
+              <a:t>Monitoring, evaluasi, dan rekomendasi</a:t>
+            </a:r>
+            <a:br/>
+            <a:r>
+              <a:t> perbaikan berkelanjutan</a:t>
+            </a:r>
+          </a:p>
+        </p:txBody>
+      </p:sp>
+      <p:sp>
+        <p:nvSpPr>
+          <p:cNvPr id="24" name="Rectangle 23"/>
+          <p:cNvSpPr/>
+          <p:nvPr/>
+        </p:nvSpPr>
+        <p:spPr>
+          <a:xfrm>
+            <a:off x="0" y="6446520"/>
+            <a:ext cx="12191695" cy="411480"/>
+          </a:xfrm>
+          <a:prstGeom prst="rect">
+            <a:avLst/>
+          </a:prstGeom>
+          <a:solidFill>
+            <a:srgbClr val="F8FAFC"/>
+          </a:solidFill>
+          <a:ln>
+            <a:noFill/>
+          </a:ln>
+        </p:spPr>
+        <p:style>
+          <a:lnRef idx="1">
+            <a:schemeClr val="accent1"/>
+          </a:lnRef>
+          <a:fillRef idx="3">
+            <a:schemeClr val="accent1"/>
+          </a:fillRef>
+          <a:effectRef idx="2">
+            <a:schemeClr val="accent1"/>
+          </a:effectRef>
+          <a:fontRef idx="minor">
+            <a:schemeClr val="lt1"/>
+          </a:fontRef>
+        </p:style>
+        <p:txBody>
+          <a:bodyPr rtlCol="0" anchor="ctr"/>
+          <a:lstStyle/>
+          <a:p>
+            <a:pPr algn="ctr"/>
+          </a:p>
+        </p:txBody>
+      </p:sp>
+      <p:sp>
+        <p:nvSpPr>
+          <p:cNvPr id="25" name="Rectangle 24"/>
+          <p:cNvSpPr/>
+          <p:nvPr/>
+        </p:nvSpPr>
+        <p:spPr>
+          <a:xfrm>
+            <a:off x="0" y="6446520"/>
+            <a:ext cx="12191695" cy="17419320000"/>
+          </a:xfrm>
+          <a:prstGeom prst="rect">
+            <a:avLst/>
+          </a:prstGeom>
+          <a:solidFill>
+            <a:srgbClr val="E2E8F0"/>
+          </a:solidFill>
+          <a:ln>
+            <a:noFill/>
+          </a:ln>
+        </p:spPr>
+        <p:style>
+          <a:lnRef idx="1">
+            <a:schemeClr val="accent1"/>
+          </a:lnRef>
+          <a:fillRef idx="3">
+            <a:schemeClr val="accent1"/>
+          </a:fillRef>
+          <a:effectRef idx="2">
+            <a:schemeClr val="accent1"/>
+          </a:effectRef>
+          <a:fontRef idx="minor">
+            <a:schemeClr val="lt1"/>
+          </a:fontRef>
+        </p:style>
+        <p:txBody>
+          <a:bodyPr rtlCol="0" anchor="ctr"/>
+          <a:lstStyle/>
+          <a:p>
+            <a:pPr algn="ctr"/>
+          </a:p>
+        </p:txBody>
+      </p:sp>
+      <p:sp>
+        <p:nvSpPr>
+          <p:cNvPr id="26" name="TextBox 25"/>
+          <p:cNvSpPr txBox="1"/>
+          <p:nvPr/>
+        </p:nvSpPr>
+        <p:spPr>
+          <a:xfrm>
+            <a:off x="548640" y="6510528"/>
+            <a:ext cx="3657600" cy="201168"/>
+          </a:xfrm>
+          <a:prstGeom prst="rect">
+            <a:avLst/>
+          </a:prstGeom>
+          <a:noFill/>
+        </p:spPr>
+        <p:txBody>
+          <a:bodyPr wrap="square">
+            <a:spAutoFit/>
+          </a:bodyPr>
+          <a:lstStyle/>
+          <a:p>
+            <a:pPr algn="l">
+              <a:defRPr sz="700" b="0">
+                <a:solidFill>
+                  <a:srgbClr val="94A3B8"/>
+                </a:solidFill>
+                <a:latin typeface="Calibri"/>
+              </a:defRPr>
+            </a:pPr>
+            <a:r>
+              <a:t>Sumber: RESUME TUPOKSI egov.docx</a:t>
+            </a:r>
+          </a:p>
+        </p:txBody>
+      </p:sp>
+      <p:sp>
+        <p:nvSpPr>
+          <p:cNvPr id="27" name="TextBox 26"/>
+          <p:cNvSpPr txBox="1"/>
+          <p:nvPr/>
+        </p:nvSpPr>
+        <p:spPr>
+          <a:xfrm>
+            <a:off x="11277295" y="6510528"/>
+            <a:ext cx="731520" cy="201168"/>
+          </a:xfrm>
+          <a:prstGeom prst="rect">
+            <a:avLst/>
+          </a:prstGeom>
+          <a:noFill/>
+        </p:spPr>
+        <p:txBody>
+          <a:bodyPr wrap="square">
+            <a:spAutoFit/>
+          </a:bodyPr>
+          <a:lstStyle/>
+          <a:p>
             <a:pPr algn="r">
               <a:defRPr sz="800" b="0">
                 <a:solidFill>
-                  <a:srgbClr val="64748B"/>
+                  <a:srgbClr val="94A3B8"/>
                 </a:solidFill>
                 <a:latin typeface="Calibri"/>
               </a:defRPr>
@@ -7851,14 +9059,14 @@
         </p:nvSpPr>
         <p:spPr>
           <a:xfrm>
-            <a:off x="0" y="7"/>
-            <a:ext cx="13" cy="0"/>
-          </a:xfrm>
-          <a:prstGeom prst="rect">
-            <a:avLst/>
-          </a:prstGeom>
-          <a:solidFill>
-            <a:srgbClr val="C8962E"/>
+            <a:off x="0" y="0"/>
+            <a:ext cx="12191695" cy="36576"/>
+          </a:xfrm>
+          <a:prstGeom prst="rect">
+            <a:avLst/>
+          </a:prstGeom>
+          <a:solidFill>
+            <a:srgbClr val="F59E0B"/>
           </a:solidFill>
           <a:ln>
             <a:noFill/>
@@ -7888,14 +9096,143 @@
       </p:sp>
       <p:sp>
         <p:nvSpPr>
-          <p:cNvPr id="3" name="TextBox 2"/>
+          <p:cNvPr id="3" name="Rectangle 2"/>
+          <p:cNvSpPr/>
+          <p:nvPr/>
+        </p:nvSpPr>
+        <p:spPr>
+          <a:xfrm>
+            <a:off x="8534095" y="-457200"/>
+            <a:ext cx="4572000" cy="3657600"/>
+          </a:xfrm>
+          <a:prstGeom prst="rect">
+            <a:avLst/>
+          </a:prstGeom>
+          <a:solidFill>
+            <a:srgbClr val="0F2A4A"/>
+          </a:solidFill>
+          <a:ln>
+            <a:noFill/>
+          </a:ln>
+        </p:spPr>
+        <p:style>
+          <a:lnRef idx="1">
+            <a:schemeClr val="accent1"/>
+          </a:lnRef>
+          <a:fillRef idx="3">
+            <a:schemeClr val="accent1"/>
+          </a:fillRef>
+          <a:effectRef idx="2">
+            <a:schemeClr val="accent1"/>
+          </a:effectRef>
+          <a:fontRef idx="minor">
+            <a:schemeClr val="lt1"/>
+          </a:fontRef>
+        </p:style>
+        <p:txBody>
+          <a:bodyPr rtlCol="0" anchor="ctr"/>
+          <a:lstStyle/>
+          <a:p>
+            <a:pPr algn="ctr"/>
+          </a:p>
+        </p:txBody>
+      </p:sp>
+      <p:sp>
+        <p:nvSpPr>
+          <p:cNvPr id="4" name="Rectangle 3"/>
+          <p:cNvSpPr/>
+          <p:nvPr/>
+        </p:nvSpPr>
+        <p:spPr>
+          <a:xfrm>
+            <a:off x="9448495" y="3657600"/>
+            <a:ext cx="3200400" cy="3657600"/>
+          </a:xfrm>
+          <a:prstGeom prst="rect">
+            <a:avLst/>
+          </a:prstGeom>
+          <a:solidFill>
+            <a:srgbClr val="0F2A4A"/>
+          </a:solidFill>
+          <a:ln>
+            <a:noFill/>
+          </a:ln>
+        </p:spPr>
+        <p:style>
+          <a:lnRef idx="1">
+            <a:schemeClr val="accent1"/>
+          </a:lnRef>
+          <a:fillRef idx="3">
+            <a:schemeClr val="accent1"/>
+          </a:fillRef>
+          <a:effectRef idx="2">
+            <a:schemeClr val="accent1"/>
+          </a:effectRef>
+          <a:fontRef idx="minor">
+            <a:schemeClr val="lt1"/>
+          </a:fontRef>
+        </p:style>
+        <p:txBody>
+          <a:bodyPr rtlCol="0" anchor="ctr"/>
+          <a:lstStyle/>
+          <a:p>
+            <a:pPr algn="ctr"/>
+          </a:p>
+        </p:txBody>
+      </p:sp>
+      <p:sp>
+        <p:nvSpPr>
+          <p:cNvPr id="5" name="Rectangle 4"/>
+          <p:cNvSpPr/>
+          <p:nvPr/>
+        </p:nvSpPr>
+        <p:spPr>
+          <a:xfrm>
+            <a:off x="0" y="6629400"/>
+            <a:ext cx="12191695" cy="228600"/>
+          </a:xfrm>
+          <a:prstGeom prst="rect">
+            <a:avLst/>
+          </a:prstGeom>
+          <a:solidFill>
+            <a:srgbClr val="0D9488"/>
+          </a:solidFill>
+          <a:ln>
+            <a:noFill/>
+          </a:ln>
+        </p:spPr>
+        <p:style>
+          <a:lnRef idx="1">
+            <a:schemeClr val="accent1"/>
+          </a:lnRef>
+          <a:fillRef idx="3">
+            <a:schemeClr val="accent1"/>
+          </a:fillRef>
+          <a:effectRef idx="2">
+            <a:schemeClr val="accent1"/>
+          </a:effectRef>
+          <a:fontRef idx="minor">
+            <a:schemeClr val="lt1"/>
+          </a:fontRef>
+        </p:style>
+        <p:txBody>
+          <a:bodyPr rtlCol="0" anchor="ctr"/>
+          <a:lstStyle/>
+          <a:p>
+            <a:pPr algn="ctr"/>
+          </a:p>
+        </p:txBody>
+      </p:sp>
+      <p:sp>
+        <p:nvSpPr>
+          <p:cNvPr id="6" name="TextBox 5"/>
           <p:cNvSpPr txBox="1"/>
           <p:nvPr/>
         </p:nvSpPr>
         <p:spPr>
           <a:xfrm>
-            <a:off x="0" y="2"/>
-            <a:ext cx="12" cy="1"/>
+            <a:off x="548640" y="2011680"/>
+            <a:ext cx="11094415" cy="914400"/>
           </a:xfrm>
           <a:prstGeom prst="rect">
             <a:avLst/>
@@ -7924,14 +9261,14 @@
       </p:sp>
       <p:sp>
         <p:nvSpPr>
-          <p:cNvPr id="4" name="TextBox 3"/>
+          <p:cNvPr id="7" name="TextBox 6"/>
           <p:cNvSpPr txBox="1"/>
           <p:nvPr/>
         </p:nvSpPr>
         <p:spPr>
           <a:xfrm>
-            <a:off x="0" y="3"/>
-            <a:ext cx="12" cy="0"/>
+            <a:off x="548640" y="3108960"/>
+            <a:ext cx="11094415" cy="457200"/>
           </a:xfrm>
           <a:prstGeom prst="rect">
             <a:avLst/>
@@ -7947,7 +9284,7 @@
             <a:pPr algn="ctr">
               <a:defRPr sz="1800" b="0">
                 <a:solidFill>
-                  <a:srgbClr val="8899B0"/>
+                  <a:srgbClr val="E6F7F5"/>
                 </a:solidFill>
                 <a:latin typeface="Calibri"/>
               </a:defRPr>
@@ -7960,14 +9297,57 @@
       </p:sp>
       <p:sp>
         <p:nvSpPr>
-          <p:cNvPr id="5" name="TextBox 4"/>
+          <p:cNvPr id="8" name="Rectangle 7"/>
+          <p:cNvSpPr/>
+          <p:nvPr/>
+        </p:nvSpPr>
+        <p:spPr>
+          <a:xfrm>
+            <a:off x="5181447" y="3749039"/>
+            <a:ext cx="1828800" cy="23225760000"/>
+          </a:xfrm>
+          <a:prstGeom prst="rect">
+            <a:avLst/>
+          </a:prstGeom>
+          <a:solidFill>
+            <a:srgbClr val="F59E0B"/>
+          </a:solidFill>
+          <a:ln>
+            <a:noFill/>
+          </a:ln>
+        </p:spPr>
+        <p:style>
+          <a:lnRef idx="1">
+            <a:schemeClr val="accent1"/>
+          </a:lnRef>
+          <a:fillRef idx="3">
+            <a:schemeClr val="accent1"/>
+          </a:fillRef>
+          <a:effectRef idx="2">
+            <a:schemeClr val="accent1"/>
+          </a:effectRef>
+          <a:fontRef idx="minor">
+            <a:schemeClr val="lt1"/>
+          </a:fontRef>
+        </p:style>
+        <p:txBody>
+          <a:bodyPr rtlCol="0" anchor="ctr"/>
+          <a:lstStyle/>
+          <a:p>
+            <a:pPr algn="ctr"/>
+          </a:p>
+        </p:txBody>
+      </p:sp>
+      <p:sp>
+        <p:nvSpPr>
+          <p:cNvPr id="9" name="TextBox 8"/>
           <p:cNvSpPr txBox="1"/>
           <p:nvPr/>
         </p:nvSpPr>
         <p:spPr>
           <a:xfrm>
-            <a:off x="0" y="4"/>
-            <a:ext cx="12" cy="0"/>
+            <a:off x="548640" y="4023360"/>
+            <a:ext cx="11094415" cy="457200"/>
           </a:xfrm>
           <a:prstGeom prst="rect">
             <a:avLst/>
@@ -7983,13 +9363,17 @@
             <a:pPr algn="ctr">
               <a:defRPr sz="1200" b="0">
                 <a:solidFill>
-                  <a:srgbClr val="64748B"/>
+                  <a:srgbClr val="94A3B8"/>
                 </a:solidFill>
                 <a:latin typeface="Calibri"/>
               </a:defRPr>
             </a:pPr>
             <a:r>
-              <a:t>"Mewujudkan tata kelola pemerintahan yang cerdas, terpadu, dan berkelanjutan"</a:t>
+              <a:t>"Mewujudkan tata kelola pemerintahan yang cerdas,</a:t>
+            </a:r>
+            <a:br/>
+            <a:r>
+              <a:t> terpadu, dan berkelanjutan"</a:t>
             </a:r>
           </a:p>
         </p:txBody>

--- a/RESUME_TUPOKSI_egov.pptx
+++ b/RESUME_TUPOKSI_egov.pptx
@@ -3153,8 +3153,8 @@
         </p:nvSpPr>
         <p:spPr>
           <a:xfrm>
-            <a:off x="8076895" y="-457200"/>
-            <a:ext cx="4572000" cy="4114800"/>
+            <a:off x="7619695" y="-457200"/>
+            <a:ext cx="5029200" cy="4572000"/>
           </a:xfrm>
           <a:prstGeom prst="rect">
             <a:avLst/>
@@ -3196,8 +3196,8 @@
         </p:nvSpPr>
         <p:spPr>
           <a:xfrm>
-            <a:off x="8991295" y="2926080"/>
-            <a:ext cx="3657600" cy="4114800"/>
+            <a:off x="8716975" y="3200400"/>
+            <a:ext cx="4114800" cy="4114800"/>
           </a:xfrm>
           <a:prstGeom prst="rect">
             <a:avLst/>
@@ -3239,8 +3239,8 @@
         </p:nvSpPr>
         <p:spPr>
           <a:xfrm>
-            <a:off x="-457200" y="5029200"/>
-            <a:ext cx="2743200" cy="2286000"/>
+            <a:off x="-457200" y="5486400"/>
+            <a:ext cx="3200400" cy="1828800"/>
           </a:xfrm>
           <a:prstGeom prst="rect">
             <a:avLst/>
@@ -3282,14 +3282,14 @@
         </p:nvSpPr>
         <p:spPr>
           <a:xfrm>
-            <a:off x="0" y="6629400"/>
-            <a:ext cx="12191695" cy="228600"/>
-          </a:xfrm>
-          <a:prstGeom prst="rect">
-            <a:avLst/>
-          </a:prstGeom>
-          <a:solidFill>
-            <a:srgbClr val="0D9488"/>
+            <a:off x="-457200" y="0"/>
+            <a:ext cx="2286000" cy="1371600"/>
+          </a:xfrm>
+          <a:prstGeom prst="rect">
+            <a:avLst/>
+          </a:prstGeom>
+          <a:solidFill>
+            <a:srgbClr val="0F2A4A"/>
           </a:solidFill>
           <a:ln>
             <a:noFill/>
@@ -3319,128 +3319,20 @@
       </p:sp>
       <p:sp>
         <p:nvSpPr>
-          <p:cNvPr id="7" name="TextBox 6"/>
-          <p:cNvSpPr txBox="1"/>
-          <p:nvPr/>
-        </p:nvSpPr>
-        <p:spPr>
-          <a:xfrm>
-            <a:off x="548640" y="1828800"/>
-            <a:ext cx="11094415" cy="914400"/>
-          </a:xfrm>
-          <a:prstGeom prst="rect">
-            <a:avLst/>
-          </a:prstGeom>
-          <a:noFill/>
-        </p:spPr>
-        <p:txBody>
-          <a:bodyPr wrap="square">
-            <a:spAutoFit/>
-          </a:bodyPr>
-          <a:lstStyle/>
-          <a:p>
-            <a:pPr algn="l">
-              <a:defRPr sz="4600" b="1">
-                <a:solidFill>
-                  <a:srgbClr val="FFFFFF"/>
-                </a:solidFill>
-                <a:latin typeface="Calibri"/>
-              </a:defRPr>
-            </a:pPr>
-            <a:r>
-              <a:t>RESUME TUPOKSI</a:t>
-            </a:r>
-          </a:p>
-        </p:txBody>
-      </p:sp>
-      <p:sp>
-        <p:nvSpPr>
-          <p:cNvPr id="8" name="TextBox 7"/>
-          <p:cNvSpPr txBox="1"/>
-          <p:nvPr/>
-        </p:nvSpPr>
-        <p:spPr>
-          <a:xfrm>
-            <a:off x="548640" y="2926080"/>
-            <a:ext cx="11094415" cy="457200"/>
-          </a:xfrm>
-          <a:prstGeom prst="rect">
-            <a:avLst/>
-          </a:prstGeom>
-          <a:noFill/>
-        </p:spPr>
-        <p:txBody>
-          <a:bodyPr wrap="square">
-            <a:spAutoFit/>
-          </a:bodyPr>
-          <a:lstStyle/>
-          <a:p>
-            <a:pPr algn="l">
-              <a:defRPr sz="2200" b="0">
-                <a:solidFill>
-                  <a:srgbClr val="E6F7F5"/>
-                </a:solidFill>
-                <a:latin typeface="Calibri"/>
-              </a:defRPr>
-            </a:pPr>
-            <a:r>
-              <a:t>Bidang e-Government</a:t>
-            </a:r>
-          </a:p>
-        </p:txBody>
-      </p:sp>
-      <p:sp>
-        <p:nvSpPr>
-          <p:cNvPr id="9" name="TextBox 8"/>
-          <p:cNvSpPr txBox="1"/>
-          <p:nvPr/>
-        </p:nvSpPr>
-        <p:spPr>
-          <a:xfrm>
-            <a:off x="548640" y="3474720"/>
-            <a:ext cx="11094415" cy="365760"/>
-          </a:xfrm>
-          <a:prstGeom prst="rect">
-            <a:avLst/>
-          </a:prstGeom>
-          <a:noFill/>
-        </p:spPr>
-        <p:txBody>
-          <a:bodyPr wrap="square">
-            <a:spAutoFit/>
-          </a:bodyPr>
-          <a:lstStyle/>
-          <a:p>
-            <a:pPr algn="l">
-              <a:defRPr sz="1400" b="0">
-                <a:solidFill>
-                  <a:srgbClr val="94A3B8"/>
-                </a:solidFill>
-                <a:latin typeface="Calibri"/>
-              </a:defRPr>
-            </a:pPr>
-            <a:r>
-              <a:t>Diskominfostandi Kota Bekasi</a:t>
-            </a:r>
-          </a:p>
-        </p:txBody>
-      </p:sp>
-      <p:sp>
-        <p:nvSpPr>
-          <p:cNvPr id="10" name="Rectangle 9"/>
+          <p:cNvPr id="7" name="Rectangle 6"/>
           <p:cNvSpPr/>
           <p:nvPr/>
         </p:nvSpPr>
         <p:spPr>
           <a:xfrm>
-            <a:off x="548640" y="4023360"/>
-            <a:ext cx="2286000" cy="34838640000"/>
-          </a:xfrm>
-          <a:prstGeom prst="rect">
-            <a:avLst/>
-          </a:prstGeom>
-          <a:solidFill>
-            <a:srgbClr val="F59E0B"/>
+            <a:off x="0" y="6601968"/>
+            <a:ext cx="12191695" cy="256032"/>
+          </a:xfrm>
+          <a:prstGeom prst="rect">
+            <a:avLst/>
+          </a:prstGeom>
+          <a:solidFill>
+            <a:srgbClr val="0D9488"/>
           </a:solidFill>
           <a:ln>
             <a:noFill/>
@@ -3470,13 +3362,245 @@
       </p:sp>
       <p:sp>
         <p:nvSpPr>
+          <p:cNvPr id="8" name="Rounded Rectangle 7"/>
+          <p:cNvSpPr/>
+          <p:nvPr/>
+        </p:nvSpPr>
+        <p:spPr>
+          <a:xfrm>
+            <a:off x="548640" y="1463040"/>
+            <a:ext cx="640080" cy="640080"/>
+          </a:xfrm>
+          <a:prstGeom prst="roundRect">
+            <a:avLst>
+              <a:gd name="adj" fmla="val 15000"/>
+            </a:avLst>
+          </a:prstGeom>
+          <a:solidFill>
+            <a:srgbClr val="0D9488"/>
+          </a:solidFill>
+          <a:ln>
+            <a:noFill/>
+          </a:ln>
+        </p:spPr>
+        <p:style>
+          <a:lnRef idx="1">
+            <a:schemeClr val="accent1"/>
+          </a:lnRef>
+          <a:fillRef idx="3">
+            <a:schemeClr val="accent1"/>
+          </a:fillRef>
+          <a:effectRef idx="2">
+            <a:schemeClr val="accent1"/>
+          </a:effectRef>
+          <a:fontRef idx="minor">
+            <a:schemeClr val="lt1"/>
+          </a:fontRef>
+        </p:style>
+        <p:txBody>
+          <a:bodyPr rtlCol="0" anchor="ctr"/>
+          <a:lstStyle/>
+          <a:p>
+            <a:pPr algn="ctr"/>
+          </a:p>
+        </p:txBody>
+      </p:sp>
+      <p:sp>
+        <p:nvSpPr>
+          <p:cNvPr id="9" name="TextBox 8"/>
+          <p:cNvSpPr txBox="1"/>
+          <p:nvPr/>
+        </p:nvSpPr>
+        <p:spPr>
+          <a:xfrm>
+            <a:off x="548640" y="1559052"/>
+            <a:ext cx="640080" cy="448055"/>
+          </a:xfrm>
+          <a:prstGeom prst="rect">
+            <a:avLst/>
+          </a:prstGeom>
+          <a:noFill/>
+        </p:spPr>
+        <p:txBody>
+          <a:bodyPr wrap="square">
+            <a:spAutoFit/>
+          </a:bodyPr>
+          <a:lstStyle/>
+          <a:p>
+            <a:pPr algn="ctr">
+              <a:defRPr sz="2200">
+                <a:solidFill>
+                  <a:srgbClr val="FFFFFF"/>
+                </a:solidFill>
+                <a:latin typeface="Calibri"/>
+              </a:defRPr>
+            </a:pPr>
+            <a:r>
+              <a:t>▣</a:t>
+            </a:r>
+          </a:p>
+        </p:txBody>
+      </p:sp>
+      <p:sp>
+        <p:nvSpPr>
+          <p:cNvPr id="10" name="TextBox 9"/>
+          <p:cNvSpPr txBox="1"/>
+          <p:nvPr/>
+        </p:nvSpPr>
+        <p:spPr>
+          <a:xfrm>
+            <a:off x="1463040" y="1463040"/>
+            <a:ext cx="9722815" cy="731520"/>
+          </a:xfrm>
+          <a:prstGeom prst="rect">
+            <a:avLst/>
+          </a:prstGeom>
+          <a:noFill/>
+        </p:spPr>
+        <p:txBody>
+          <a:bodyPr wrap="square">
+            <a:spAutoFit/>
+          </a:bodyPr>
+          <a:lstStyle/>
+          <a:p>
+            <a:pPr algn="l">
+              <a:defRPr sz="4600" b="1">
+                <a:solidFill>
+                  <a:srgbClr val="FFFFFF"/>
+                </a:solidFill>
+                <a:latin typeface="Calibri"/>
+              </a:defRPr>
+            </a:pPr>
+            <a:r>
+              <a:t>RESUME TUPOKSI</a:t>
+            </a:r>
+          </a:p>
+        </p:txBody>
+      </p:sp>
+      <p:sp>
+        <p:nvSpPr>
           <p:cNvPr id="11" name="TextBox 10"/>
           <p:cNvSpPr txBox="1"/>
           <p:nvPr/>
         </p:nvSpPr>
         <p:spPr>
           <a:xfrm>
-            <a:off x="548640" y="4297680"/>
+            <a:off x="548640" y="2560320"/>
+            <a:ext cx="11094415" cy="457200"/>
+          </a:xfrm>
+          <a:prstGeom prst="rect">
+            <a:avLst/>
+          </a:prstGeom>
+          <a:noFill/>
+        </p:spPr>
+        <p:txBody>
+          <a:bodyPr wrap="square">
+            <a:spAutoFit/>
+          </a:bodyPr>
+          <a:lstStyle/>
+          <a:p>
+            <a:pPr algn="l">
+              <a:defRPr sz="2200" b="0">
+                <a:solidFill>
+                  <a:srgbClr val="E6F7F5"/>
+                </a:solidFill>
+                <a:latin typeface="Calibri"/>
+              </a:defRPr>
+            </a:pPr>
+            <a:r>
+              <a:t>Bidang e-Government</a:t>
+            </a:r>
+          </a:p>
+        </p:txBody>
+      </p:sp>
+      <p:sp>
+        <p:nvSpPr>
+          <p:cNvPr id="12" name="TextBox 11"/>
+          <p:cNvSpPr txBox="1"/>
+          <p:nvPr/>
+        </p:nvSpPr>
+        <p:spPr>
+          <a:xfrm>
+            <a:off x="548640" y="3108960"/>
+            <a:ext cx="11094415" cy="365760"/>
+          </a:xfrm>
+          <a:prstGeom prst="rect">
+            <a:avLst/>
+          </a:prstGeom>
+          <a:noFill/>
+        </p:spPr>
+        <p:txBody>
+          <a:bodyPr wrap="square">
+            <a:spAutoFit/>
+          </a:bodyPr>
+          <a:lstStyle/>
+          <a:p>
+            <a:pPr algn="l">
+              <a:defRPr sz="1400" b="0">
+                <a:solidFill>
+                  <a:srgbClr val="94A3B8"/>
+                </a:solidFill>
+                <a:latin typeface="Calibri"/>
+              </a:defRPr>
+            </a:pPr>
+            <a:r>
+              <a:t>Diskominfostandi Kota Bekasi</a:t>
+            </a:r>
+          </a:p>
+        </p:txBody>
+      </p:sp>
+      <p:sp>
+        <p:nvSpPr>
+          <p:cNvPr id="13" name="Rectangle 12"/>
+          <p:cNvSpPr/>
+          <p:nvPr/>
+        </p:nvSpPr>
+        <p:spPr>
+          <a:xfrm>
+            <a:off x="548640" y="3657600"/>
+            <a:ext cx="2286000" cy="34838640000"/>
+          </a:xfrm>
+          <a:prstGeom prst="rect">
+            <a:avLst/>
+          </a:prstGeom>
+          <a:solidFill>
+            <a:srgbClr val="F59E0B"/>
+          </a:solidFill>
+          <a:ln>
+            <a:noFill/>
+          </a:ln>
+        </p:spPr>
+        <p:style>
+          <a:lnRef idx="1">
+            <a:schemeClr val="accent1"/>
+          </a:lnRef>
+          <a:fillRef idx="3">
+            <a:schemeClr val="accent1"/>
+          </a:fillRef>
+          <a:effectRef idx="2">
+            <a:schemeClr val="accent1"/>
+          </a:effectRef>
+          <a:fontRef idx="minor">
+            <a:schemeClr val="lt1"/>
+          </a:fontRef>
+        </p:style>
+        <p:txBody>
+          <a:bodyPr rtlCol="0" anchor="ctr"/>
+          <a:lstStyle/>
+          <a:p>
+            <a:pPr algn="ctr"/>
+          </a:p>
+        </p:txBody>
+      </p:sp>
+      <p:sp>
+        <p:nvSpPr>
+          <p:cNvPr id="14" name="TextBox 13"/>
+          <p:cNvSpPr txBox="1"/>
+          <p:nvPr/>
+        </p:nvSpPr>
+        <p:spPr>
+          <a:xfrm>
+            <a:off x="548640" y="3931920"/>
             <a:ext cx="11094415" cy="274320"/>
           </a:xfrm>
           <a:prstGeom prst="rect">
@@ -3690,7 +3814,7 @@
               </a:defRPr>
             </a:pPr>
             <a:r>
-              <a:t>Tiga Pilar Utama Tugas Pokok</a:t>
+              <a:t>Tiga Pilar Strategis e-Government</a:t>
             </a:r>
           </a:p>
         </p:txBody>
@@ -3726,7 +3850,7 @@
               </a:defRPr>
             </a:pPr>
             <a:r>
-              <a:t>Bidang e-Government mencakup 3 area strategis dalam transformasi digital daerah</a:t>
+              <a:t>Bidang e-Government menggerakkan 3 pilar utama transformasi digital Kota Bekasi</a:t>
             </a:r>
           </a:p>
         </p:txBody>
@@ -3739,12 +3863,12 @@
         </p:nvSpPr>
         <p:spPr>
           <a:xfrm>
-            <a:off x="548639" y="1463040"/>
-            <a:ext cx="3484778" cy="3291840"/>
+            <a:off x="548639" y="1417320"/>
+            <a:ext cx="3484778" cy="3657600"/>
           </a:xfrm>
           <a:prstGeom prst="roundRect">
             <a:avLst>
-              <a:gd name="adj" fmla="val 4000"/>
+              <a:gd name="adj" fmla="val 6000"/>
             </a:avLst>
           </a:prstGeom>
           <a:solidFill>
@@ -3786,8 +3910,8 @@
         </p:nvSpPr>
         <p:spPr>
           <a:xfrm>
-            <a:off x="548639" y="1463040"/>
-            <a:ext cx="3484778" cy="594360"/>
+            <a:off x="548639" y="1417320"/>
+            <a:ext cx="3484778" cy="73152"/>
           </a:xfrm>
           <a:prstGeom prst="rect">
             <a:avLst/>
@@ -3823,132 +3947,22 @@
       </p:sp>
       <p:sp>
         <p:nvSpPr>
-          <p:cNvPr id="9" name="TextBox 8"/>
-          <p:cNvSpPr txBox="1"/>
-          <p:nvPr/>
-        </p:nvSpPr>
-        <p:spPr>
-          <a:xfrm>
-            <a:off x="731519" y="1572768"/>
-            <a:ext cx="457200" cy="320040"/>
-          </a:xfrm>
-          <a:prstGeom prst="rect">
-            <a:avLst/>
-          </a:prstGeom>
-          <a:noFill/>
-        </p:spPr>
-        <p:txBody>
-          <a:bodyPr wrap="square">
-            <a:spAutoFit/>
-          </a:bodyPr>
-          <a:lstStyle/>
-          <a:p>
-            <a:pPr algn="l">
-              <a:defRPr sz="2000" b="1">
-                <a:solidFill>
-                  <a:srgbClr val="FFFFFF"/>
-                </a:solidFill>
-                <a:latin typeface="Calibri"/>
-              </a:defRPr>
-            </a:pPr>
-            <a:r>
-              <a:t>01</a:t>
-            </a:r>
-          </a:p>
-        </p:txBody>
-      </p:sp>
-      <p:sp>
-        <p:nvSpPr>
-          <p:cNvPr id="10" name="TextBox 9"/>
-          <p:cNvSpPr txBox="1"/>
-          <p:nvPr/>
-        </p:nvSpPr>
-        <p:spPr>
-          <a:xfrm>
-            <a:off x="1188719" y="1600200"/>
-            <a:ext cx="1371600" cy="228600"/>
-          </a:xfrm>
-          <a:prstGeom prst="rect">
-            <a:avLst/>
-          </a:prstGeom>
-          <a:noFill/>
-        </p:spPr>
-        <p:txBody>
-          <a:bodyPr wrap="square">
-            <a:spAutoFit/>
-          </a:bodyPr>
-          <a:lstStyle/>
-          <a:p>
-            <a:pPr algn="l">
-              <a:defRPr sz="700" b="0">
-                <a:solidFill>
-                  <a:srgbClr val="E6F7F5"/>
-                </a:solidFill>
-                <a:latin typeface="Calibri"/>
-              </a:defRPr>
-            </a:pPr>
-            <a:r>
-              <a:t>PILAR UTAMA</a:t>
-            </a:r>
-          </a:p>
-        </p:txBody>
-      </p:sp>
-      <p:sp>
-        <p:nvSpPr>
-          <p:cNvPr id="11" name="TextBox 10"/>
-          <p:cNvSpPr txBox="1"/>
-          <p:nvPr/>
-        </p:nvSpPr>
-        <p:spPr>
-          <a:xfrm>
-            <a:off x="777239" y="2240280"/>
-            <a:ext cx="3027578" cy="777240"/>
-          </a:xfrm>
-          <a:prstGeom prst="rect">
-            <a:avLst/>
-          </a:prstGeom>
-          <a:noFill/>
-        </p:spPr>
-        <p:txBody>
-          <a:bodyPr wrap="square">
-            <a:spAutoFit/>
-          </a:bodyPr>
-          <a:lstStyle/>
-          <a:p>
-            <a:pPr algn="l">
-              <a:defRPr sz="1600" b="1">
-                <a:solidFill>
-                  <a:srgbClr val="0A1628"/>
-                </a:solidFill>
-                <a:latin typeface="Calibri"/>
-              </a:defRPr>
-            </a:pPr>
-            <a:r>
-              <a:t>Pengembangan Aplikasi</a:t>
-            </a:r>
-            <a:br/>
-            <a:r>
-              <a:t>&amp; Sistem Informasi</a:t>
-            </a:r>
-          </a:p>
-        </p:txBody>
-      </p:sp>
-      <p:sp>
-        <p:nvSpPr>
-          <p:cNvPr id="12" name="Rectangle 11"/>
+          <p:cNvPr id="9" name="Rounded Rectangle 8"/>
           <p:cNvSpPr/>
           <p:nvPr/>
         </p:nvSpPr>
         <p:spPr>
           <a:xfrm>
-            <a:off x="777239" y="3108960"/>
-            <a:ext cx="3027578" cy="17419320000"/>
-          </a:xfrm>
-          <a:prstGeom prst="rect">
-            <a:avLst/>
-          </a:prstGeom>
-          <a:solidFill>
-            <a:srgbClr val="E2E8F0"/>
+            <a:off x="777239" y="1691640"/>
+            <a:ext cx="502920" cy="502920"/>
+          </a:xfrm>
+          <a:prstGeom prst="roundRect">
+            <a:avLst>
+              <a:gd name="adj" fmla="val 15000"/>
+            </a:avLst>
+          </a:prstGeom>
+          <a:solidFill>
+            <a:srgbClr val="0A1628"/>
           </a:solidFill>
           <a:ln>
             <a:noFill/>
@@ -3978,14 +3992,14 @@
       </p:sp>
       <p:sp>
         <p:nvSpPr>
-          <p:cNvPr id="13" name="TextBox 12"/>
+          <p:cNvPr id="10" name="TextBox 9"/>
           <p:cNvSpPr txBox="1"/>
           <p:nvPr/>
         </p:nvSpPr>
         <p:spPr>
           <a:xfrm>
-            <a:off x="777239" y="3291840"/>
-            <a:ext cx="3027578" cy="1097280"/>
+            <a:off x="777239" y="1767078"/>
+            <a:ext cx="502920" cy="352044"/>
           </a:xfrm>
           <a:prstGeom prst="rect">
             <a:avLst/>
@@ -3998,8 +4012,163 @@
           </a:bodyPr>
           <a:lstStyle/>
           <a:p>
+            <a:pPr algn="ctr">
+              <a:defRPr sz="2000">
+                <a:solidFill>
+                  <a:srgbClr val="FFFFFF"/>
+                </a:solidFill>
+                <a:latin typeface="Calibri"/>
+              </a:defRPr>
+            </a:pPr>
+            <a:r>
+              <a:t>▣</a:t>
+            </a:r>
+          </a:p>
+        </p:txBody>
+      </p:sp>
+      <p:sp>
+        <p:nvSpPr>
+          <p:cNvPr id="11" name="TextBox 10"/>
+          <p:cNvSpPr txBox="1"/>
+          <p:nvPr/>
+        </p:nvSpPr>
+        <p:spPr>
+          <a:xfrm>
+            <a:off x="1417319" y="1737360"/>
+            <a:ext cx="548640" cy="274320"/>
+          </a:xfrm>
+          <a:prstGeom prst="rect">
+            <a:avLst/>
+          </a:prstGeom>
+          <a:noFill/>
+        </p:spPr>
+        <p:txBody>
+          <a:bodyPr wrap="square">
+            <a:spAutoFit/>
+          </a:bodyPr>
+          <a:lstStyle/>
+          <a:p>
             <a:pPr algn="l">
-              <a:defRPr sz="1200" b="0">
+              <a:defRPr sz="1400" b="1">
+                <a:solidFill>
+                  <a:srgbClr val="0A1628"/>
+                </a:solidFill>
+                <a:latin typeface="Calibri"/>
+              </a:defRPr>
+            </a:pPr>
+            <a:r>
+              <a:t>01</a:t>
+            </a:r>
+          </a:p>
+        </p:txBody>
+      </p:sp>
+      <p:sp>
+        <p:nvSpPr>
+          <p:cNvPr id="12" name="TextBox 11"/>
+          <p:cNvSpPr txBox="1"/>
+          <p:nvPr/>
+        </p:nvSpPr>
+        <p:spPr>
+          <a:xfrm>
+            <a:off x="777239" y="2377440"/>
+            <a:ext cx="3027578" cy="777240"/>
+          </a:xfrm>
+          <a:prstGeom prst="rect">
+            <a:avLst/>
+          </a:prstGeom>
+          <a:noFill/>
+        </p:spPr>
+        <p:txBody>
+          <a:bodyPr wrap="square">
+            <a:spAutoFit/>
+          </a:bodyPr>
+          <a:lstStyle/>
+          <a:p>
+            <a:pPr algn="l">
+              <a:defRPr sz="1700" b="1">
+                <a:solidFill>
+                  <a:srgbClr val="0A1628"/>
+                </a:solidFill>
+                <a:latin typeface="Calibri"/>
+              </a:defRPr>
+            </a:pPr>
+            <a:r>
+              <a:t>Pengembangan Aplikasi</a:t>
+            </a:r>
+            <a:br/>
+            <a:r>
+              <a:t>&amp; Sistem Informasi</a:t>
+            </a:r>
+          </a:p>
+        </p:txBody>
+      </p:sp>
+      <p:sp>
+        <p:nvSpPr>
+          <p:cNvPr id="13" name="Rectangle 12"/>
+          <p:cNvSpPr/>
+          <p:nvPr/>
+        </p:nvSpPr>
+        <p:spPr>
+          <a:xfrm>
+            <a:off x="777239" y="3246120"/>
+            <a:ext cx="3027578" cy="17419320000"/>
+          </a:xfrm>
+          <a:prstGeom prst="rect">
+            <a:avLst/>
+          </a:prstGeom>
+          <a:solidFill>
+            <a:srgbClr val="E2E8F0"/>
+          </a:solidFill>
+          <a:ln>
+            <a:noFill/>
+          </a:ln>
+        </p:spPr>
+        <p:style>
+          <a:lnRef idx="1">
+            <a:schemeClr val="accent1"/>
+          </a:lnRef>
+          <a:fillRef idx="3">
+            <a:schemeClr val="accent1"/>
+          </a:fillRef>
+          <a:effectRef idx="2">
+            <a:schemeClr val="accent1"/>
+          </a:effectRef>
+          <a:fontRef idx="minor">
+            <a:schemeClr val="lt1"/>
+          </a:fontRef>
+        </p:style>
+        <p:txBody>
+          <a:bodyPr rtlCol="0" anchor="ctr"/>
+          <a:lstStyle/>
+          <a:p>
+            <a:pPr algn="ctr"/>
+          </a:p>
+        </p:txBody>
+      </p:sp>
+      <p:sp>
+        <p:nvSpPr>
+          <p:cNvPr id="14" name="TextBox 13"/>
+          <p:cNvSpPr txBox="1"/>
+          <p:nvPr/>
+        </p:nvSpPr>
+        <p:spPr>
+          <a:xfrm>
+            <a:off x="777239" y="3429000"/>
+            <a:ext cx="3027578" cy="1371600"/>
+          </a:xfrm>
+          <a:prstGeom prst="rect">
+            <a:avLst/>
+          </a:prstGeom>
+          <a:noFill/>
+        </p:spPr>
+        <p:txBody>
+          <a:bodyPr wrap="square">
+            <a:spAutoFit/>
+          </a:bodyPr>
+          <a:lstStyle/>
+          <a:p>
+            <a:pPr algn="l">
+              <a:defRPr sz="1100" b="0">
                 <a:solidFill>
                   <a:srgbClr val="475569"/>
                 </a:solidFill>
@@ -4007,29 +4176,37 @@
               </a:defRPr>
             </a:pPr>
             <a:r>
-              <a:t>Supervisi, standarisasi, dan</a:t>
+              <a:t>Mengawal standar &amp; kualitas</a:t>
             </a:r>
             <a:br/>
             <a:r>
-              <a:t>pengelolaan SPLP</a:t>
-            </a:r>
-          </a:p>
-        </p:txBody>
-      </p:sp>
-      <p:sp>
-        <p:nvSpPr>
-          <p:cNvPr id="14" name="Rounded Rectangle 13"/>
+              <a:t>pengembangan aplikasi serta</a:t>
+            </a:r>
+            <a:br/>
+            <a:r>
+              <a:t>menghubungkan layanan daerah</a:t>
+            </a:r>
+            <a:br/>
+            <a:r>
+              <a:t>melalui SPLP</a:t>
+            </a:r>
+          </a:p>
+        </p:txBody>
+      </p:sp>
+      <p:sp>
+        <p:nvSpPr>
+          <p:cNvPr id="15" name="Rounded Rectangle 14"/>
           <p:cNvSpPr/>
           <p:nvPr/>
         </p:nvSpPr>
         <p:spPr>
           <a:xfrm>
-            <a:off x="4353458" y="1463040"/>
-            <a:ext cx="3484778" cy="3291840"/>
+            <a:off x="4353458" y="1417320"/>
+            <a:ext cx="3484778" cy="3657600"/>
           </a:xfrm>
           <a:prstGeom prst="roundRect">
             <a:avLst>
-              <a:gd name="adj" fmla="val 4000"/>
+              <a:gd name="adj" fmla="val 6000"/>
             </a:avLst>
           </a:prstGeom>
           <a:solidFill>
@@ -4065,14 +4242,14 @@
       </p:sp>
       <p:sp>
         <p:nvSpPr>
-          <p:cNvPr id="15" name="Rectangle 14"/>
+          <p:cNvPr id="16" name="Rectangle 15"/>
           <p:cNvSpPr/>
           <p:nvPr/>
         </p:nvSpPr>
         <p:spPr>
           <a:xfrm>
-            <a:off x="4353458" y="1463040"/>
-            <a:ext cx="3484778" cy="594360"/>
+            <a:off x="4353458" y="1417320"/>
+            <a:ext cx="3484778" cy="73152"/>
           </a:xfrm>
           <a:prstGeom prst="rect">
             <a:avLst/>
@@ -4108,132 +4285,22 @@
       </p:sp>
       <p:sp>
         <p:nvSpPr>
-          <p:cNvPr id="16" name="TextBox 15"/>
-          <p:cNvSpPr txBox="1"/>
-          <p:nvPr/>
-        </p:nvSpPr>
-        <p:spPr>
-          <a:xfrm>
-            <a:off x="4536338" y="1572768"/>
-            <a:ext cx="457200" cy="320040"/>
-          </a:xfrm>
-          <a:prstGeom prst="rect">
-            <a:avLst/>
-          </a:prstGeom>
-          <a:noFill/>
-        </p:spPr>
-        <p:txBody>
-          <a:bodyPr wrap="square">
-            <a:spAutoFit/>
-          </a:bodyPr>
-          <a:lstStyle/>
-          <a:p>
-            <a:pPr algn="l">
-              <a:defRPr sz="2000" b="1">
-                <a:solidFill>
-                  <a:srgbClr val="FFFFFF"/>
-                </a:solidFill>
-                <a:latin typeface="Calibri"/>
-              </a:defRPr>
-            </a:pPr>
-            <a:r>
-              <a:t>02</a:t>
-            </a:r>
-          </a:p>
-        </p:txBody>
-      </p:sp>
-      <p:sp>
-        <p:nvSpPr>
-          <p:cNvPr id="17" name="TextBox 16"/>
-          <p:cNvSpPr txBox="1"/>
-          <p:nvPr/>
-        </p:nvSpPr>
-        <p:spPr>
-          <a:xfrm>
-            <a:off x="4993538" y="1600200"/>
-            <a:ext cx="1371600" cy="228600"/>
-          </a:xfrm>
-          <a:prstGeom prst="rect">
-            <a:avLst/>
-          </a:prstGeom>
-          <a:noFill/>
-        </p:spPr>
-        <p:txBody>
-          <a:bodyPr wrap="square">
-            <a:spAutoFit/>
-          </a:bodyPr>
-          <a:lstStyle/>
-          <a:p>
-            <a:pPr algn="l">
-              <a:defRPr sz="700" b="0">
-                <a:solidFill>
-                  <a:srgbClr val="E6F7F5"/>
-                </a:solidFill>
-                <a:latin typeface="Calibri"/>
-              </a:defRPr>
-            </a:pPr>
-            <a:r>
-              <a:t>PILAR UTAMA</a:t>
-            </a:r>
-          </a:p>
-        </p:txBody>
-      </p:sp>
-      <p:sp>
-        <p:nvSpPr>
-          <p:cNvPr id="18" name="TextBox 17"/>
-          <p:cNvSpPr txBox="1"/>
-          <p:nvPr/>
-        </p:nvSpPr>
-        <p:spPr>
-          <a:xfrm>
-            <a:off x="4582058" y="2240280"/>
-            <a:ext cx="3027578" cy="777240"/>
-          </a:xfrm>
-          <a:prstGeom prst="rect">
-            <a:avLst/>
-          </a:prstGeom>
-          <a:noFill/>
-        </p:spPr>
-        <p:txBody>
-          <a:bodyPr wrap="square">
-            <a:spAutoFit/>
-          </a:bodyPr>
-          <a:lstStyle/>
-          <a:p>
-            <a:pPr algn="l">
-              <a:defRPr sz="1600" b="1">
-                <a:solidFill>
-                  <a:srgbClr val="0A1628"/>
-                </a:solidFill>
-                <a:latin typeface="Calibri"/>
-              </a:defRPr>
-            </a:pPr>
-            <a:r>
-              <a:t>Tata Kelola e-Government</a:t>
-            </a:r>
-            <a:br/>
-            <a:r>
-              <a:t>(SPBE)</a:t>
-            </a:r>
-          </a:p>
-        </p:txBody>
-      </p:sp>
-      <p:sp>
-        <p:nvSpPr>
-          <p:cNvPr id="19" name="Rectangle 18"/>
+          <p:cNvPr id="17" name="Rounded Rectangle 16"/>
           <p:cNvSpPr/>
           <p:nvPr/>
         </p:nvSpPr>
         <p:spPr>
           <a:xfrm>
-            <a:off x="4582058" y="3108960"/>
-            <a:ext cx="3027578" cy="17419320000"/>
-          </a:xfrm>
-          <a:prstGeom prst="rect">
-            <a:avLst/>
-          </a:prstGeom>
-          <a:solidFill>
-            <a:srgbClr val="E2E8F0"/>
+            <a:off x="4582058" y="1691640"/>
+            <a:ext cx="502920" cy="502920"/>
+          </a:xfrm>
+          <a:prstGeom prst="roundRect">
+            <a:avLst>
+              <a:gd name="adj" fmla="val 15000"/>
+            </a:avLst>
+          </a:prstGeom>
+          <a:solidFill>
+            <a:srgbClr val="1A5676"/>
           </a:solidFill>
           <a:ln>
             <a:noFill/>
@@ -4263,14 +4330,14 @@
       </p:sp>
       <p:sp>
         <p:nvSpPr>
-          <p:cNvPr id="20" name="TextBox 19"/>
+          <p:cNvPr id="18" name="TextBox 17"/>
           <p:cNvSpPr txBox="1"/>
           <p:nvPr/>
         </p:nvSpPr>
         <p:spPr>
           <a:xfrm>
-            <a:off x="4582058" y="3291840"/>
-            <a:ext cx="3027578" cy="1097280"/>
+            <a:off x="4582058" y="1767078"/>
+            <a:ext cx="502920" cy="352044"/>
           </a:xfrm>
           <a:prstGeom prst="rect">
             <a:avLst/>
@@ -4283,8 +4350,159 @@
           </a:bodyPr>
           <a:lstStyle/>
           <a:p>
+            <a:pPr algn="ctr">
+              <a:defRPr sz="2000">
+                <a:solidFill>
+                  <a:srgbClr val="FFFFFF"/>
+                </a:solidFill>
+                <a:latin typeface="Calibri"/>
+              </a:defRPr>
+            </a:pPr>
+            <a:r>
+              <a:t>⚙</a:t>
+            </a:r>
+          </a:p>
+        </p:txBody>
+      </p:sp>
+      <p:sp>
+        <p:nvSpPr>
+          <p:cNvPr id="19" name="TextBox 18"/>
+          <p:cNvSpPr txBox="1"/>
+          <p:nvPr/>
+        </p:nvSpPr>
+        <p:spPr>
+          <a:xfrm>
+            <a:off x="5222138" y="1737360"/>
+            <a:ext cx="548640" cy="274320"/>
+          </a:xfrm>
+          <a:prstGeom prst="rect">
+            <a:avLst/>
+          </a:prstGeom>
+          <a:noFill/>
+        </p:spPr>
+        <p:txBody>
+          <a:bodyPr wrap="square">
+            <a:spAutoFit/>
+          </a:bodyPr>
+          <a:lstStyle/>
+          <a:p>
             <a:pPr algn="l">
-              <a:defRPr sz="1200" b="0">
+              <a:defRPr sz="1400" b="1">
+                <a:solidFill>
+                  <a:srgbClr val="1A5676"/>
+                </a:solidFill>
+                <a:latin typeface="Calibri"/>
+              </a:defRPr>
+            </a:pPr>
+            <a:r>
+              <a:t>02</a:t>
+            </a:r>
+          </a:p>
+        </p:txBody>
+      </p:sp>
+      <p:sp>
+        <p:nvSpPr>
+          <p:cNvPr id="20" name="TextBox 19"/>
+          <p:cNvSpPr txBox="1"/>
+          <p:nvPr/>
+        </p:nvSpPr>
+        <p:spPr>
+          <a:xfrm>
+            <a:off x="4582058" y="2377440"/>
+            <a:ext cx="3027578" cy="777240"/>
+          </a:xfrm>
+          <a:prstGeom prst="rect">
+            <a:avLst/>
+          </a:prstGeom>
+          <a:noFill/>
+        </p:spPr>
+        <p:txBody>
+          <a:bodyPr wrap="square">
+            <a:spAutoFit/>
+          </a:bodyPr>
+          <a:lstStyle/>
+          <a:p>
+            <a:pPr algn="l">
+              <a:defRPr sz="1700" b="1">
+                <a:solidFill>
+                  <a:srgbClr val="0A1628"/>
+                </a:solidFill>
+                <a:latin typeface="Calibri"/>
+              </a:defRPr>
+            </a:pPr>
+            <a:r>
+              <a:t>Tata Kelola SPBE</a:t>
+            </a:r>
+          </a:p>
+        </p:txBody>
+      </p:sp>
+      <p:sp>
+        <p:nvSpPr>
+          <p:cNvPr id="21" name="Rectangle 20"/>
+          <p:cNvSpPr/>
+          <p:nvPr/>
+        </p:nvSpPr>
+        <p:spPr>
+          <a:xfrm>
+            <a:off x="4582058" y="3246120"/>
+            <a:ext cx="3027578" cy="17419320000"/>
+          </a:xfrm>
+          <a:prstGeom prst="rect">
+            <a:avLst/>
+          </a:prstGeom>
+          <a:solidFill>
+            <a:srgbClr val="E2E8F0"/>
+          </a:solidFill>
+          <a:ln>
+            <a:noFill/>
+          </a:ln>
+        </p:spPr>
+        <p:style>
+          <a:lnRef idx="1">
+            <a:schemeClr val="accent1"/>
+          </a:lnRef>
+          <a:fillRef idx="3">
+            <a:schemeClr val="accent1"/>
+          </a:fillRef>
+          <a:effectRef idx="2">
+            <a:schemeClr val="accent1"/>
+          </a:effectRef>
+          <a:fontRef idx="minor">
+            <a:schemeClr val="lt1"/>
+          </a:fontRef>
+        </p:style>
+        <p:txBody>
+          <a:bodyPr rtlCol="0" anchor="ctr"/>
+          <a:lstStyle/>
+          <a:p>
+            <a:pPr algn="ctr"/>
+          </a:p>
+        </p:txBody>
+      </p:sp>
+      <p:sp>
+        <p:nvSpPr>
+          <p:cNvPr id="22" name="TextBox 21"/>
+          <p:cNvSpPr txBox="1"/>
+          <p:nvPr/>
+        </p:nvSpPr>
+        <p:spPr>
+          <a:xfrm>
+            <a:off x="4582058" y="3429000"/>
+            <a:ext cx="3027578" cy="1371600"/>
+          </a:xfrm>
+          <a:prstGeom prst="rect">
+            <a:avLst/>
+          </a:prstGeom>
+          <a:noFill/>
+        </p:spPr>
+        <p:txBody>
+          <a:bodyPr wrap="square">
+            <a:spAutoFit/>
+          </a:bodyPr>
+          <a:lstStyle/>
+          <a:p>
+            <a:pPr algn="l">
+              <a:defRPr sz="1100" b="0">
                 <a:solidFill>
                   <a:srgbClr val="475569"/>
                 </a:solidFill>
@@ -4292,29 +4510,37 @@
               </a:defRPr>
             </a:pPr>
             <a:r>
-              <a:t>Strategi, roadmap, arsitektur,</a:t>
+              <a:t>Merancang roadmap, arsitektur &amp;</a:t>
             </a:r>
             <a:br/>
             <a:r>
-              <a:t>dan kapasitas SDM &amp; GCIO</a:t>
-            </a:r>
-          </a:p>
-        </p:txBody>
-      </p:sp>
-      <p:sp>
-        <p:nvSpPr>
-          <p:cNvPr id="21" name="Rounded Rectangle 20"/>
+              <a:t>kebijakan SPBE sekaligus</a:t>
+            </a:r>
+            <a:br/>
+            <a:r>
+              <a:t>memperkuat kapasitas SDM</a:t>
+            </a:r>
+            <a:br/>
+            <a:r>
+              <a:t>dan peran Government CIO</a:t>
+            </a:r>
+          </a:p>
+        </p:txBody>
+      </p:sp>
+      <p:sp>
+        <p:nvSpPr>
+          <p:cNvPr id="23" name="Rounded Rectangle 22"/>
           <p:cNvSpPr/>
           <p:nvPr/>
         </p:nvSpPr>
         <p:spPr>
           <a:xfrm>
-            <a:off x="8158276" y="1463040"/>
-            <a:ext cx="3484778" cy="3291840"/>
+            <a:off x="8158276" y="1417320"/>
+            <a:ext cx="3484778" cy="3657600"/>
           </a:xfrm>
           <a:prstGeom prst="roundRect">
             <a:avLst>
-              <a:gd name="adj" fmla="val 4000"/>
+              <a:gd name="adj" fmla="val 6000"/>
             </a:avLst>
           </a:prstGeom>
           <a:solidFill>
@@ -4350,14 +4576,14 @@
       </p:sp>
       <p:sp>
         <p:nvSpPr>
-          <p:cNvPr id="22" name="Rectangle 21"/>
+          <p:cNvPr id="24" name="Rectangle 23"/>
           <p:cNvSpPr/>
           <p:nvPr/>
         </p:nvSpPr>
         <p:spPr>
           <a:xfrm>
-            <a:off x="8158276" y="1463040"/>
-            <a:ext cx="3484778" cy="594360"/>
+            <a:off x="8158276" y="1417320"/>
+            <a:ext cx="3484778" cy="73152"/>
           </a:xfrm>
           <a:prstGeom prst="rect">
             <a:avLst/>
@@ -4393,132 +4619,22 @@
       </p:sp>
       <p:sp>
         <p:nvSpPr>
-          <p:cNvPr id="23" name="TextBox 22"/>
-          <p:cNvSpPr txBox="1"/>
-          <p:nvPr/>
-        </p:nvSpPr>
-        <p:spPr>
-          <a:xfrm>
-            <a:off x="8341156" y="1572768"/>
-            <a:ext cx="457200" cy="320040"/>
-          </a:xfrm>
-          <a:prstGeom prst="rect">
-            <a:avLst/>
-          </a:prstGeom>
-          <a:noFill/>
-        </p:spPr>
-        <p:txBody>
-          <a:bodyPr wrap="square">
-            <a:spAutoFit/>
-          </a:bodyPr>
-          <a:lstStyle/>
-          <a:p>
-            <a:pPr algn="l">
-              <a:defRPr sz="2000" b="1">
-                <a:solidFill>
-                  <a:srgbClr val="FFFFFF"/>
-                </a:solidFill>
-                <a:latin typeface="Calibri"/>
-              </a:defRPr>
-            </a:pPr>
-            <a:r>
-              <a:t>03</a:t>
-            </a:r>
-          </a:p>
-        </p:txBody>
-      </p:sp>
-      <p:sp>
-        <p:nvSpPr>
-          <p:cNvPr id="24" name="TextBox 23"/>
-          <p:cNvSpPr txBox="1"/>
-          <p:nvPr/>
-        </p:nvSpPr>
-        <p:spPr>
-          <a:xfrm>
-            <a:off x="8798356" y="1600200"/>
-            <a:ext cx="1371600" cy="228600"/>
-          </a:xfrm>
-          <a:prstGeom prst="rect">
-            <a:avLst/>
-          </a:prstGeom>
-          <a:noFill/>
-        </p:spPr>
-        <p:txBody>
-          <a:bodyPr wrap="square">
-            <a:spAutoFit/>
-          </a:bodyPr>
-          <a:lstStyle/>
-          <a:p>
-            <a:pPr algn="l">
-              <a:defRPr sz="700" b="0">
-                <a:solidFill>
-                  <a:srgbClr val="E6F7F5"/>
-                </a:solidFill>
-                <a:latin typeface="Calibri"/>
-              </a:defRPr>
-            </a:pPr>
-            <a:r>
-              <a:t>PILAR UTAMA</a:t>
-            </a:r>
-          </a:p>
-        </p:txBody>
-      </p:sp>
-      <p:sp>
-        <p:nvSpPr>
-          <p:cNvPr id="25" name="TextBox 24"/>
-          <p:cNvSpPr txBox="1"/>
-          <p:nvPr/>
-        </p:nvSpPr>
-        <p:spPr>
-          <a:xfrm>
-            <a:off x="8386876" y="2240280"/>
-            <a:ext cx="3027578" cy="777240"/>
-          </a:xfrm>
-          <a:prstGeom prst="rect">
-            <a:avLst/>
-          </a:prstGeom>
-          <a:noFill/>
-        </p:spPr>
-        <p:txBody>
-          <a:bodyPr wrap="square">
-            <a:spAutoFit/>
-          </a:bodyPr>
-          <a:lstStyle/>
-          <a:p>
-            <a:pPr algn="l">
-              <a:defRPr sz="1600" b="1">
-                <a:solidFill>
-                  <a:srgbClr val="0A1628"/>
-                </a:solidFill>
-                <a:latin typeface="Calibri"/>
-              </a:defRPr>
-            </a:pPr>
-            <a:r>
-              <a:t>Pengembangan Kota Cerdas</a:t>
-            </a:r>
-            <a:br/>
-            <a:r>
-              <a:t>(Smart City)</a:t>
-            </a:r>
-          </a:p>
-        </p:txBody>
-      </p:sp>
-      <p:sp>
-        <p:nvSpPr>
-          <p:cNvPr id="26" name="Rectangle 25"/>
+          <p:cNvPr id="25" name="Rounded Rectangle 24"/>
           <p:cNvSpPr/>
           <p:nvPr/>
         </p:nvSpPr>
         <p:spPr>
           <a:xfrm>
-            <a:off x="8386876" y="3108960"/>
-            <a:ext cx="3027578" cy="17419320000"/>
-          </a:xfrm>
-          <a:prstGeom prst="rect">
-            <a:avLst/>
-          </a:prstGeom>
-          <a:solidFill>
-            <a:srgbClr val="E2E8F0"/>
+            <a:off x="8386876" y="1691640"/>
+            <a:ext cx="502920" cy="502920"/>
+          </a:xfrm>
+          <a:prstGeom prst="roundRect">
+            <a:avLst>
+              <a:gd name="adj" fmla="val 15000"/>
+            </a:avLst>
+          </a:prstGeom>
+          <a:solidFill>
+            <a:srgbClr val="0D9488"/>
           </a:solidFill>
           <a:ln>
             <a:noFill/>
@@ -4548,14 +4664,14 @@
       </p:sp>
       <p:sp>
         <p:nvSpPr>
-          <p:cNvPr id="27" name="TextBox 26"/>
+          <p:cNvPr id="26" name="TextBox 25"/>
           <p:cNvSpPr txBox="1"/>
           <p:nvPr/>
         </p:nvSpPr>
         <p:spPr>
           <a:xfrm>
-            <a:off x="8386876" y="3291840"/>
-            <a:ext cx="3027578" cy="1097280"/>
+            <a:off x="8386876" y="1767078"/>
+            <a:ext cx="502920" cy="352044"/>
           </a:xfrm>
           <a:prstGeom prst="rect">
             <a:avLst/>
@@ -4568,40 +4684,112 @@
           </a:bodyPr>
           <a:lstStyle/>
           <a:p>
+            <a:pPr algn="ctr">
+              <a:defRPr sz="2000">
+                <a:solidFill>
+                  <a:srgbClr val="FFFFFF"/>
+                </a:solidFill>
+                <a:latin typeface="Calibri"/>
+              </a:defRPr>
+            </a:pPr>
+            <a:r>
+              <a:t>🏛</a:t>
+            </a:r>
+          </a:p>
+        </p:txBody>
+      </p:sp>
+      <p:sp>
+        <p:nvSpPr>
+          <p:cNvPr id="27" name="TextBox 26"/>
+          <p:cNvSpPr txBox="1"/>
+          <p:nvPr/>
+        </p:nvSpPr>
+        <p:spPr>
+          <a:xfrm>
+            <a:off x="9026956" y="1737360"/>
+            <a:ext cx="548640" cy="274320"/>
+          </a:xfrm>
+          <a:prstGeom prst="rect">
+            <a:avLst/>
+          </a:prstGeom>
+          <a:noFill/>
+        </p:spPr>
+        <p:txBody>
+          <a:bodyPr wrap="square">
+            <a:spAutoFit/>
+          </a:bodyPr>
+          <a:lstStyle/>
+          <a:p>
             <a:pPr algn="l">
-              <a:defRPr sz="1200" b="0">
-                <a:solidFill>
-                  <a:srgbClr val="475569"/>
+              <a:defRPr sz="1400" b="1">
+                <a:solidFill>
+                  <a:srgbClr val="0D9488"/>
                 </a:solidFill>
                 <a:latin typeface="Calibri"/>
               </a:defRPr>
             </a:pPr>
             <a:r>
-              <a:t>Masterplan, kolaborasi lintas</a:t>
+              <a:t>03</a:t>
+            </a:r>
+          </a:p>
+        </p:txBody>
+      </p:sp>
+      <p:sp>
+        <p:nvSpPr>
+          <p:cNvPr id="28" name="TextBox 27"/>
+          <p:cNvSpPr txBox="1"/>
+          <p:nvPr/>
+        </p:nvSpPr>
+        <p:spPr>
+          <a:xfrm>
+            <a:off x="8386876" y="2377440"/>
+            <a:ext cx="3027578" cy="777240"/>
+          </a:xfrm>
+          <a:prstGeom prst="rect">
+            <a:avLst/>
+          </a:prstGeom>
+          <a:noFill/>
+        </p:spPr>
+        <p:txBody>
+          <a:bodyPr wrap="square">
+            <a:spAutoFit/>
+          </a:bodyPr>
+          <a:lstStyle/>
+          <a:p>
+            <a:pPr algn="l">
+              <a:defRPr sz="1700" b="1">
+                <a:solidFill>
+                  <a:srgbClr val="0A1628"/>
+                </a:solidFill>
+                <a:latin typeface="Calibri"/>
+              </a:defRPr>
+            </a:pPr>
+            <a:r>
+              <a:t>Pengembangan</a:t>
             </a:r>
             <a:br/>
             <a:r>
-              <a:t>sektor, dan evaluasi program</a:t>
-            </a:r>
-          </a:p>
-        </p:txBody>
-      </p:sp>
-      <p:sp>
-        <p:nvSpPr>
-          <p:cNvPr id="28" name="Rectangle 27"/>
+              <a:t>Kota Cerdas</a:t>
+            </a:r>
+          </a:p>
+        </p:txBody>
+      </p:sp>
+      <p:sp>
+        <p:nvSpPr>
+          <p:cNvPr id="29" name="Rectangle 28"/>
           <p:cNvSpPr/>
           <p:nvPr/>
         </p:nvSpPr>
         <p:spPr>
           <a:xfrm>
-            <a:off x="0" y="6446520"/>
-            <a:ext cx="12191695" cy="411480"/>
-          </a:xfrm>
-          <a:prstGeom prst="rect">
-            <a:avLst/>
-          </a:prstGeom>
-          <a:solidFill>
-            <a:srgbClr val="F8FAFC"/>
+            <a:off x="8386876" y="3246120"/>
+            <a:ext cx="3027578" cy="17419320000"/>
+          </a:xfrm>
+          <a:prstGeom prst="rect">
+            <a:avLst/>
+          </a:prstGeom>
+          <a:solidFill>
+            <a:srgbClr val="E2E8F0"/>
           </a:solidFill>
           <a:ln>
             <a:noFill/>
@@ -4631,20 +4819,68 @@
       </p:sp>
       <p:sp>
         <p:nvSpPr>
-          <p:cNvPr id="29" name="Rectangle 28"/>
+          <p:cNvPr id="30" name="TextBox 29"/>
+          <p:cNvSpPr txBox="1"/>
+          <p:nvPr/>
+        </p:nvSpPr>
+        <p:spPr>
+          <a:xfrm>
+            <a:off x="8386876" y="3429000"/>
+            <a:ext cx="3027578" cy="1371600"/>
+          </a:xfrm>
+          <a:prstGeom prst="rect">
+            <a:avLst/>
+          </a:prstGeom>
+          <a:noFill/>
+        </p:spPr>
+        <p:txBody>
+          <a:bodyPr wrap="square">
+            <a:spAutoFit/>
+          </a:bodyPr>
+          <a:lstStyle/>
+          <a:p>
+            <a:pPr algn="l">
+              <a:defRPr sz="1100" b="0">
+                <a:solidFill>
+                  <a:srgbClr val="475569"/>
+                </a:solidFill>
+                <a:latin typeface="Calibri"/>
+              </a:defRPr>
+            </a:pPr>
+            <a:r>
+              <a:t>Menyusun masterplan, membangun</a:t>
+            </a:r>
+            <a:br/>
+            <a:r>
+              <a:t>kolaborasi lintas sektor, serta</a:t>
+            </a:r>
+            <a:br/>
+            <a:r>
+              <a:t>mengevaluasi program Smart City</a:t>
+            </a:r>
+            <a:br/>
+            <a:r>
+              <a:t>secara berkelanjutan</a:t>
+            </a:r>
+          </a:p>
+        </p:txBody>
+      </p:sp>
+      <p:sp>
+        <p:nvSpPr>
+          <p:cNvPr id="31" name="Rectangle 30"/>
           <p:cNvSpPr/>
           <p:nvPr/>
         </p:nvSpPr>
         <p:spPr>
           <a:xfrm>
             <a:off x="0" y="6446520"/>
-            <a:ext cx="12191695" cy="17419320000"/>
-          </a:xfrm>
-          <a:prstGeom prst="rect">
-            <a:avLst/>
-          </a:prstGeom>
-          <a:solidFill>
-            <a:srgbClr val="E2E8F0"/>
+            <a:ext cx="12191695" cy="411480"/>
+          </a:xfrm>
+          <a:prstGeom prst="rect">
+            <a:avLst/>
+          </a:prstGeom>
+          <a:solidFill>
+            <a:srgbClr val="F8FAFC"/>
           </a:solidFill>
           <a:ln>
             <a:noFill/>
@@ -4674,7 +4910,50 @@
       </p:sp>
       <p:sp>
         <p:nvSpPr>
-          <p:cNvPr id="30" name="TextBox 29"/>
+          <p:cNvPr id="32" name="Rectangle 31"/>
+          <p:cNvSpPr/>
+          <p:nvPr/>
+        </p:nvSpPr>
+        <p:spPr>
+          <a:xfrm>
+            <a:off x="0" y="6446520"/>
+            <a:ext cx="12191695" cy="17419320000"/>
+          </a:xfrm>
+          <a:prstGeom prst="rect">
+            <a:avLst/>
+          </a:prstGeom>
+          <a:solidFill>
+            <a:srgbClr val="E2E8F0"/>
+          </a:solidFill>
+          <a:ln>
+            <a:noFill/>
+          </a:ln>
+        </p:spPr>
+        <p:style>
+          <a:lnRef idx="1">
+            <a:schemeClr val="accent1"/>
+          </a:lnRef>
+          <a:fillRef idx="3">
+            <a:schemeClr val="accent1"/>
+          </a:fillRef>
+          <a:effectRef idx="2">
+            <a:schemeClr val="accent1"/>
+          </a:effectRef>
+          <a:fontRef idx="minor">
+            <a:schemeClr val="lt1"/>
+          </a:fontRef>
+        </p:style>
+        <p:txBody>
+          <a:bodyPr rtlCol="0" anchor="ctr"/>
+          <a:lstStyle/>
+          <a:p>
+            <a:pPr algn="ctr"/>
+          </a:p>
+        </p:txBody>
+      </p:sp>
+      <p:sp>
+        <p:nvSpPr>
+          <p:cNvPr id="33" name="TextBox 32"/>
           <p:cNvSpPr txBox="1"/>
           <p:nvPr/>
         </p:nvSpPr>
@@ -4710,7 +4989,7 @@
       </p:sp>
       <p:sp>
         <p:nvSpPr>
-          <p:cNvPr id="31" name="TextBox 30"/>
+          <p:cNvPr id="34" name="TextBox 33"/>
           <p:cNvSpPr txBox="1"/>
           <p:nvPr/>
         </p:nvSpPr>
@@ -4979,12 +5258,12 @@
         </p:nvSpPr>
         <p:spPr>
           <a:xfrm>
-            <a:off x="548639" y="1463040"/>
-            <a:ext cx="5364327" cy="1554480"/>
+            <a:off x="548639" y="1417320"/>
+            <a:ext cx="5364327" cy="1645920"/>
           </a:xfrm>
           <a:prstGeom prst="roundRect">
             <a:avLst>
-              <a:gd name="adj" fmla="val 4000"/>
+              <a:gd name="adj" fmla="val 6000"/>
             </a:avLst>
           </a:prstGeom>
           <a:solidFill>
@@ -5020,17 +5299,19 @@
       </p:sp>
       <p:sp>
         <p:nvSpPr>
-          <p:cNvPr id="8" name="Rectangle 7"/>
+          <p:cNvPr id="8" name="Rounded Rectangle 7"/>
           <p:cNvSpPr/>
           <p:nvPr/>
         </p:nvSpPr>
         <p:spPr>
           <a:xfrm>
-            <a:off x="548639" y="1463040"/>
-            <a:ext cx="73152" cy="1554480"/>
-          </a:xfrm>
-          <a:prstGeom prst="rect">
-            <a:avLst/>
+            <a:off x="777239" y="1691640"/>
+            <a:ext cx="594360" cy="594360"/>
+          </a:xfrm>
+          <a:prstGeom prst="roundRect">
+            <a:avLst>
+              <a:gd name="adj" fmla="val 15000"/>
+            </a:avLst>
           </a:prstGeom>
           <a:solidFill>
             <a:srgbClr val="0A1628"/>
@@ -5069,8 +5350,8 @@
         </p:nvSpPr>
         <p:spPr>
           <a:xfrm>
-            <a:off x="822959" y="1691640"/>
-            <a:ext cx="4907127" cy="365760"/>
+            <a:off x="777239" y="1780794"/>
+            <a:ext cx="594360" cy="416051"/>
           </a:xfrm>
           <a:prstGeom prst="rect">
             <a:avLst/>
@@ -5083,16 +5364,16 @@
           </a:bodyPr>
           <a:lstStyle/>
           <a:p>
-            <a:pPr algn="l">
-              <a:defRPr sz="1800" b="1">
-                <a:solidFill>
-                  <a:srgbClr val="0A1628"/>
+            <a:pPr algn="ctr">
+              <a:defRPr sz="2200">
+                <a:solidFill>
+                  <a:srgbClr val="FFFFFF"/>
                 </a:solidFill>
                 <a:latin typeface="Calibri"/>
               </a:defRPr>
             </a:pPr>
             <a:r>
-              <a:t>Web Pemerintah Kota</a:t>
+              <a:t>🌐</a:t>
             </a:r>
           </a:p>
         </p:txBody>
@@ -5105,8 +5386,8 @@
         </p:nvSpPr>
         <p:spPr>
           <a:xfrm>
-            <a:off x="822959" y="2148840"/>
-            <a:ext cx="4907127" cy="640080"/>
+            <a:off x="1554479" y="1691640"/>
+            <a:ext cx="4084167" cy="411480"/>
           </a:xfrm>
           <a:prstGeom prst="rect">
             <a:avLst/>
@@ -5120,6 +5401,42 @@
           <a:lstStyle/>
           <a:p>
             <a:pPr algn="l">
+              <a:defRPr sz="1800" b="1">
+                <a:solidFill>
+                  <a:srgbClr val="0A1628"/>
+                </a:solidFill>
+                <a:latin typeface="Calibri"/>
+              </a:defRPr>
+            </a:pPr>
+            <a:r>
+              <a:t>Web Pemerintah Kota</a:t>
+            </a:r>
+          </a:p>
+        </p:txBody>
+      </p:sp>
+      <p:sp>
+        <p:nvSpPr>
+          <p:cNvPr id="11" name="TextBox 10"/>
+          <p:cNvSpPr txBox="1"/>
+          <p:nvPr/>
+        </p:nvSpPr>
+        <p:spPr>
+          <a:xfrm>
+            <a:off x="1554479" y="2194560"/>
+            <a:ext cx="4084167" cy="640080"/>
+          </a:xfrm>
+          <a:prstGeom prst="rect">
+            <a:avLst/>
+          </a:prstGeom>
+          <a:noFill/>
+        </p:spPr>
+        <p:txBody>
+          <a:bodyPr wrap="square">
+            <a:spAutoFit/>
+          </a:bodyPr>
+          <a:lstStyle/>
+          <a:p>
+            <a:pPr algn="l">
               <a:defRPr sz="1200" b="0">
                 <a:solidFill>
                   <a:srgbClr val="475569"/>
@@ -5128,29 +5445,29 @@
               </a:defRPr>
             </a:pPr>
             <a:r>
-              <a:t>Admin Teknis Web Pemkot</a:t>
+              <a:t>Portal utama pemerintah kota</a:t>
             </a:r>
             <a:br/>
             <a:r>
-              <a:t>&amp; Web Diskominfo</a:t>
-            </a:r>
-          </a:p>
-        </p:txBody>
-      </p:sp>
-      <p:sp>
-        <p:nvSpPr>
-          <p:cNvPr id="11" name="Rounded Rectangle 10"/>
+              <a:t>sebagai pusat informasi &amp; layanan publik</a:t>
+            </a:r>
+          </a:p>
+        </p:txBody>
+      </p:sp>
+      <p:sp>
+        <p:nvSpPr>
+          <p:cNvPr id="12" name="Rounded Rectangle 11"/>
           <p:cNvSpPr/>
           <p:nvPr/>
         </p:nvSpPr>
         <p:spPr>
           <a:xfrm>
-            <a:off x="6278727" y="1463040"/>
-            <a:ext cx="5364327" cy="1554480"/>
+            <a:off x="6278727" y="1417320"/>
+            <a:ext cx="5364327" cy="1645920"/>
           </a:xfrm>
           <a:prstGeom prst="roundRect">
             <a:avLst>
-              <a:gd name="adj" fmla="val 4000"/>
+              <a:gd name="adj" fmla="val 6000"/>
             </a:avLst>
           </a:prstGeom>
           <a:solidFill>
@@ -5186,17 +5503,19 @@
       </p:sp>
       <p:sp>
         <p:nvSpPr>
-          <p:cNvPr id="12" name="Rectangle 11"/>
+          <p:cNvPr id="13" name="Rounded Rectangle 12"/>
           <p:cNvSpPr/>
           <p:nvPr/>
         </p:nvSpPr>
         <p:spPr>
           <a:xfrm>
-            <a:off x="6278727" y="1463040"/>
-            <a:ext cx="73152" cy="1554480"/>
-          </a:xfrm>
-          <a:prstGeom prst="rect">
-            <a:avLst/>
+            <a:off x="6507327" y="1691640"/>
+            <a:ext cx="594360" cy="594360"/>
+          </a:xfrm>
+          <a:prstGeom prst="roundRect">
+            <a:avLst>
+              <a:gd name="adj" fmla="val 15000"/>
+            </a:avLst>
           </a:prstGeom>
           <a:solidFill>
             <a:srgbClr val="1A5676"/>
@@ -5229,14 +5548,14 @@
       </p:sp>
       <p:sp>
         <p:nvSpPr>
-          <p:cNvPr id="13" name="TextBox 12"/>
+          <p:cNvPr id="14" name="TextBox 13"/>
           <p:cNvSpPr txBox="1"/>
           <p:nvPr/>
         </p:nvSpPr>
         <p:spPr>
           <a:xfrm>
-            <a:off x="6553047" y="1691640"/>
-            <a:ext cx="4907127" cy="365760"/>
+            <a:off x="6507327" y="1780794"/>
+            <a:ext cx="594360" cy="416051"/>
           </a:xfrm>
           <a:prstGeom prst="rect">
             <a:avLst/>
@@ -5249,30 +5568,30 @@
           </a:bodyPr>
           <a:lstStyle/>
           <a:p>
-            <a:pPr algn="l">
-              <a:defRPr sz="1800" b="1">
-                <a:solidFill>
-                  <a:srgbClr val="1A5676"/>
+            <a:pPr algn="ctr">
+              <a:defRPr sz="2200">
+                <a:solidFill>
+                  <a:srgbClr val="FFFFFF"/>
                 </a:solidFill>
                 <a:latin typeface="Calibri"/>
               </a:defRPr>
             </a:pPr>
             <a:r>
-              <a:t>Mobile App PSW</a:t>
-            </a:r>
-          </a:p>
-        </p:txBody>
-      </p:sp>
-      <p:sp>
-        <p:nvSpPr>
-          <p:cNvPr id="14" name="TextBox 13"/>
+              <a:t>📱</a:t>
+            </a:r>
+          </a:p>
+        </p:txBody>
+      </p:sp>
+      <p:sp>
+        <p:nvSpPr>
+          <p:cNvPr id="15" name="TextBox 14"/>
           <p:cNvSpPr txBox="1"/>
           <p:nvPr/>
         </p:nvSpPr>
         <p:spPr>
           <a:xfrm>
-            <a:off x="6553047" y="2148840"/>
-            <a:ext cx="4907127" cy="640080"/>
+            <a:off x="7284567" y="1691640"/>
+            <a:ext cx="4084167" cy="411480"/>
           </a:xfrm>
           <a:prstGeom prst="rect">
             <a:avLst/>
@@ -5286,6 +5605,42 @@
           <a:lstStyle/>
           <a:p>
             <a:pPr algn="l">
+              <a:defRPr sz="1800" b="1">
+                <a:solidFill>
+                  <a:srgbClr val="1A5676"/>
+                </a:solidFill>
+                <a:latin typeface="Calibri"/>
+              </a:defRPr>
+            </a:pPr>
+            <a:r>
+              <a:t>Mobile App PSW</a:t>
+            </a:r>
+          </a:p>
+        </p:txBody>
+      </p:sp>
+      <p:sp>
+        <p:nvSpPr>
+          <p:cNvPr id="16" name="TextBox 15"/>
+          <p:cNvSpPr txBox="1"/>
+          <p:nvPr/>
+        </p:nvSpPr>
+        <p:spPr>
+          <a:xfrm>
+            <a:off x="7284567" y="2194560"/>
+            <a:ext cx="4084167" cy="640080"/>
+          </a:xfrm>
+          <a:prstGeom prst="rect">
+            <a:avLst/>
+          </a:prstGeom>
+          <a:noFill/>
+        </p:spPr>
+        <p:txBody>
+          <a:bodyPr wrap="square">
+            <a:spAutoFit/>
+          </a:bodyPr>
+          <a:lstStyle/>
+          <a:p>
+            <a:pPr algn="l">
               <a:defRPr sz="1200" b="0">
                 <a:solidFill>
                   <a:srgbClr val="475569"/>
@@ -5294,29 +5649,29 @@
               </a:defRPr>
             </a:pPr>
             <a:r>
-              <a:t>Platform Smart City</a:t>
+              <a:t>Aplikasi mobile Pekan Smart City</a:t>
             </a:r>
             <a:br/>
             <a:r>
-              <a:t>— Pekan Smart City</a:t>
-            </a:r>
-          </a:p>
-        </p:txBody>
-      </p:sp>
-      <p:sp>
-        <p:nvSpPr>
-          <p:cNvPr id="15" name="Rounded Rectangle 14"/>
+              <a:t>sebagai layanan kota cerdas terintegrasi</a:t>
+            </a:r>
+          </a:p>
+        </p:txBody>
+      </p:sp>
+      <p:sp>
+        <p:nvSpPr>
+          <p:cNvPr id="17" name="Rounded Rectangle 16"/>
           <p:cNvSpPr/>
           <p:nvPr/>
         </p:nvSpPr>
         <p:spPr>
           <a:xfrm>
-            <a:off x="548639" y="3291840"/>
-            <a:ext cx="5364327" cy="1554480"/>
+            <a:off x="548639" y="3383280"/>
+            <a:ext cx="5364327" cy="1645920"/>
           </a:xfrm>
           <a:prstGeom prst="roundRect">
             <a:avLst>
-              <a:gd name="adj" fmla="val 4000"/>
+              <a:gd name="adj" fmla="val 6000"/>
             </a:avLst>
           </a:prstGeom>
           <a:solidFill>
@@ -5352,17 +5707,19 @@
       </p:sp>
       <p:sp>
         <p:nvSpPr>
-          <p:cNvPr id="16" name="Rectangle 15"/>
+          <p:cNvPr id="18" name="Rounded Rectangle 17"/>
           <p:cNvSpPr/>
           <p:nvPr/>
         </p:nvSpPr>
         <p:spPr>
           <a:xfrm>
-            <a:off x="548639" y="3291840"/>
-            <a:ext cx="73152" cy="1554480"/>
-          </a:xfrm>
-          <a:prstGeom prst="rect">
-            <a:avLst/>
+            <a:off x="777239" y="3657600"/>
+            <a:ext cx="594360" cy="594360"/>
+          </a:xfrm>
+          <a:prstGeom prst="roundRect">
+            <a:avLst>
+              <a:gd name="adj" fmla="val 15000"/>
+            </a:avLst>
           </a:prstGeom>
           <a:solidFill>
             <a:srgbClr val="0D9488"/>
@@ -5395,14 +5752,14 @@
       </p:sp>
       <p:sp>
         <p:nvSpPr>
-          <p:cNvPr id="17" name="TextBox 16"/>
+          <p:cNvPr id="19" name="TextBox 18"/>
           <p:cNvSpPr txBox="1"/>
           <p:nvPr/>
         </p:nvSpPr>
         <p:spPr>
           <a:xfrm>
-            <a:off x="822959" y="3520440"/>
-            <a:ext cx="4907127" cy="365760"/>
+            <a:off x="777239" y="3746754"/>
+            <a:ext cx="594360" cy="416051"/>
           </a:xfrm>
           <a:prstGeom prst="rect">
             <a:avLst/>
@@ -5415,30 +5772,30 @@
           </a:bodyPr>
           <a:lstStyle/>
           <a:p>
-            <a:pPr algn="l">
-              <a:defRPr sz="1800" b="1">
-                <a:solidFill>
-                  <a:srgbClr val="0D9488"/>
+            <a:pPr algn="ctr">
+              <a:defRPr sz="2200">
+                <a:solidFill>
+                  <a:srgbClr val="FFFFFF"/>
                 </a:solidFill>
                 <a:latin typeface="Calibri"/>
               </a:defRPr>
             </a:pPr>
             <a:r>
-              <a:t>Web Kota Cerdas</a:t>
-            </a:r>
-          </a:p>
-        </p:txBody>
-      </p:sp>
-      <p:sp>
-        <p:nvSpPr>
-          <p:cNvPr id="18" name="TextBox 17"/>
+              <a:t>🏛</a:t>
+            </a:r>
+          </a:p>
+        </p:txBody>
+      </p:sp>
+      <p:sp>
+        <p:nvSpPr>
+          <p:cNvPr id="20" name="TextBox 19"/>
           <p:cNvSpPr txBox="1"/>
           <p:nvPr/>
         </p:nvSpPr>
         <p:spPr>
           <a:xfrm>
-            <a:off x="822959" y="3977639"/>
-            <a:ext cx="4907127" cy="640080"/>
+            <a:off x="1554479" y="3657600"/>
+            <a:ext cx="4084167" cy="411480"/>
           </a:xfrm>
           <a:prstGeom prst="rect">
             <a:avLst/>
@@ -5452,6 +5809,42 @@
           <a:lstStyle/>
           <a:p>
             <a:pPr algn="l">
+              <a:defRPr sz="1800" b="1">
+                <a:solidFill>
+                  <a:srgbClr val="0D9488"/>
+                </a:solidFill>
+                <a:latin typeface="Calibri"/>
+              </a:defRPr>
+            </a:pPr>
+            <a:r>
+              <a:t>Web Kota Cerdas</a:t>
+            </a:r>
+          </a:p>
+        </p:txBody>
+      </p:sp>
+      <p:sp>
+        <p:nvSpPr>
+          <p:cNvPr id="21" name="TextBox 20"/>
+          <p:cNvSpPr txBox="1"/>
+          <p:nvPr/>
+        </p:nvSpPr>
+        <p:spPr>
+          <a:xfrm>
+            <a:off x="1554479" y="4160520"/>
+            <a:ext cx="4084167" cy="640080"/>
+          </a:xfrm>
+          <a:prstGeom prst="rect">
+            <a:avLst/>
+          </a:prstGeom>
+          <a:noFill/>
+        </p:spPr>
+        <p:txBody>
+          <a:bodyPr wrap="square">
+            <a:spAutoFit/>
+          </a:bodyPr>
+          <a:lstStyle/>
+          <a:p>
+            <a:pPr algn="l">
               <a:defRPr sz="1200" b="0">
                 <a:solidFill>
                   <a:srgbClr val="475569"/>
@@ -5460,29 +5853,29 @@
               </a:defRPr>
             </a:pPr>
             <a:r>
-              <a:t>Admin Teknis</a:t>
+              <a:t>Portal informasi &amp; layanan</a:t>
             </a:r>
             <a:br/>
             <a:r>
-              <a:t>Portal Kota Cerdas</a:t>
-            </a:r>
-          </a:p>
-        </p:txBody>
-      </p:sp>
-      <p:sp>
-        <p:nvSpPr>
-          <p:cNvPr id="19" name="Rounded Rectangle 18"/>
+              <a:t>program Smart City Kota Bekasi</a:t>
+            </a:r>
+          </a:p>
+        </p:txBody>
+      </p:sp>
+      <p:sp>
+        <p:nvSpPr>
+          <p:cNvPr id="22" name="Rounded Rectangle 21"/>
           <p:cNvSpPr/>
           <p:nvPr/>
         </p:nvSpPr>
         <p:spPr>
           <a:xfrm>
-            <a:off x="6278727" y="3291840"/>
-            <a:ext cx="5364327" cy="1554480"/>
+            <a:off x="6278727" y="3383280"/>
+            <a:ext cx="5364327" cy="1645920"/>
           </a:xfrm>
           <a:prstGeom prst="roundRect">
             <a:avLst>
-              <a:gd name="adj" fmla="val 4000"/>
+              <a:gd name="adj" fmla="val 6000"/>
             </a:avLst>
           </a:prstGeom>
           <a:solidFill>
@@ -5518,17 +5911,19 @@
       </p:sp>
       <p:sp>
         <p:nvSpPr>
-          <p:cNvPr id="20" name="Rectangle 19"/>
+          <p:cNvPr id="23" name="Rounded Rectangle 22"/>
           <p:cNvSpPr/>
           <p:nvPr/>
         </p:nvSpPr>
         <p:spPr>
           <a:xfrm>
-            <a:off x="6278727" y="3291840"/>
-            <a:ext cx="73152" cy="1554480"/>
-          </a:xfrm>
-          <a:prstGeom prst="rect">
-            <a:avLst/>
+            <a:off x="6507327" y="3657600"/>
+            <a:ext cx="594360" cy="594360"/>
+          </a:xfrm>
+          <a:prstGeom prst="roundRect">
+            <a:avLst>
+              <a:gd name="adj" fmla="val 15000"/>
+            </a:avLst>
           </a:prstGeom>
           <a:solidFill>
             <a:srgbClr val="F59E0B"/>
@@ -5561,14 +5956,14 @@
       </p:sp>
       <p:sp>
         <p:nvSpPr>
-          <p:cNvPr id="21" name="TextBox 20"/>
+          <p:cNvPr id="24" name="TextBox 23"/>
           <p:cNvSpPr txBox="1"/>
           <p:nvPr/>
         </p:nvSpPr>
         <p:spPr>
           <a:xfrm>
-            <a:off x="6553047" y="3520440"/>
-            <a:ext cx="4907127" cy="365760"/>
+            <a:off x="6507327" y="3746754"/>
+            <a:ext cx="594360" cy="416051"/>
           </a:xfrm>
           <a:prstGeom prst="rect">
             <a:avLst/>
@@ -5581,30 +5976,30 @@
           </a:bodyPr>
           <a:lstStyle/>
           <a:p>
-            <a:pPr algn="l">
-              <a:defRPr sz="1800" b="1">
-                <a:solidFill>
-                  <a:srgbClr val="F59E0B"/>
+            <a:pPr algn="ctr">
+              <a:defRPr sz="2200">
+                <a:solidFill>
+                  <a:srgbClr val="FFFFFF"/>
                 </a:solidFill>
                 <a:latin typeface="Calibri"/>
               </a:defRPr>
             </a:pPr>
             <a:r>
-              <a:t>Aplikasi SPLP</a:t>
-            </a:r>
-          </a:p>
-        </p:txBody>
-      </p:sp>
-      <p:sp>
-        <p:nvSpPr>
-          <p:cNvPr id="22" name="TextBox 21"/>
+              <a:t>🔗</a:t>
+            </a:r>
+          </a:p>
+        </p:txBody>
+      </p:sp>
+      <p:sp>
+        <p:nvSpPr>
+          <p:cNvPr id="25" name="TextBox 24"/>
           <p:cNvSpPr txBox="1"/>
           <p:nvPr/>
         </p:nvSpPr>
         <p:spPr>
           <a:xfrm>
-            <a:off x="6553047" y="3977639"/>
-            <a:ext cx="4907127" cy="640080"/>
+            <a:off x="7284567" y="3657600"/>
+            <a:ext cx="4084167" cy="411480"/>
           </a:xfrm>
           <a:prstGeom prst="rect">
             <a:avLst/>
@@ -5618,6 +6013,42 @@
           <a:lstStyle/>
           <a:p>
             <a:pPr algn="l">
+              <a:defRPr sz="1800" b="1">
+                <a:solidFill>
+                  <a:srgbClr val="F59E0B"/>
+                </a:solidFill>
+                <a:latin typeface="Calibri"/>
+              </a:defRPr>
+            </a:pPr>
+            <a:r>
+              <a:t>Aplikasi SPLP</a:t>
+            </a:r>
+          </a:p>
+        </p:txBody>
+      </p:sp>
+      <p:sp>
+        <p:nvSpPr>
+          <p:cNvPr id="26" name="TextBox 25"/>
+          <p:cNvSpPr txBox="1"/>
+          <p:nvPr/>
+        </p:nvSpPr>
+        <p:spPr>
+          <a:xfrm>
+            <a:off x="7284567" y="4160520"/>
+            <a:ext cx="4084167" cy="640080"/>
+          </a:xfrm>
+          <a:prstGeom prst="rect">
+            <a:avLst/>
+          </a:prstGeom>
+          <a:noFill/>
+        </p:spPr>
+        <p:txBody>
+          <a:bodyPr wrap="square">
+            <a:spAutoFit/>
+          </a:bodyPr>
+          <a:lstStyle/>
+          <a:p>
+            <a:pPr algn="l">
               <a:defRPr sz="1200" b="0">
                 <a:solidFill>
                   <a:srgbClr val="475569"/>
@@ -5626,18 +6057,18 @@
               </a:defRPr>
             </a:pPr>
             <a:r>
-              <a:t>Sistem Penghubung Layanan</a:t>
+              <a:t>Sistem Penghubung Layanan Pemerintah</a:t>
             </a:r>
             <a:br/>
             <a:r>
-              <a:t>Pemerintah (Kemenkomdigi)</a:t>
-            </a:r>
-          </a:p>
-        </p:txBody>
-      </p:sp>
-      <p:sp>
-        <p:nvSpPr>
-          <p:cNvPr id="23" name="Rectangle 22"/>
+              <a:t>terintegrasi dengan Kemenkomdigi</a:t>
+            </a:r>
+          </a:p>
+        </p:txBody>
+      </p:sp>
+      <p:sp>
+        <p:nvSpPr>
+          <p:cNvPr id="27" name="Rectangle 26"/>
           <p:cNvSpPr/>
           <p:nvPr/>
         </p:nvSpPr>
@@ -5680,7 +6111,7 @@
       </p:sp>
       <p:sp>
         <p:nvSpPr>
-          <p:cNvPr id="24" name="Rectangle 23"/>
+          <p:cNvPr id="28" name="Rectangle 27"/>
           <p:cNvSpPr/>
           <p:nvPr/>
         </p:nvSpPr>
@@ -5723,7 +6154,7 @@
       </p:sp>
       <p:sp>
         <p:nvSpPr>
-          <p:cNvPr id="25" name="TextBox 24"/>
+          <p:cNvPr id="29" name="TextBox 28"/>
           <p:cNvSpPr txBox="1"/>
           <p:nvPr/>
         </p:nvSpPr>
@@ -5759,7 +6190,7 @@
       </p:sp>
       <p:sp>
         <p:nvSpPr>
-          <p:cNvPr id="26" name="TextBox 25"/>
+          <p:cNvPr id="30" name="TextBox 29"/>
           <p:cNvSpPr txBox="1"/>
           <p:nvPr/>
         </p:nvSpPr>
@@ -6029,7 +6460,7 @@
         <p:spPr>
           <a:xfrm>
             <a:off x="548640" y="1371600"/>
-            <a:ext cx="109728" cy="4389120"/>
+            <a:ext cx="91440" cy="4572000"/>
           </a:xfrm>
           <a:prstGeom prst="rect">
             <a:avLst/>
@@ -6065,17 +6496,19 @@
       </p:sp>
       <p:sp>
         <p:nvSpPr>
-          <p:cNvPr id="8" name="Rectangle 7"/>
+          <p:cNvPr id="8" name="Rounded Rectangle 7"/>
           <p:cNvSpPr/>
           <p:nvPr/>
         </p:nvSpPr>
         <p:spPr>
           <a:xfrm>
-            <a:off x="548640" y="1371600"/>
-            <a:ext cx="1645920" cy="54864"/>
-          </a:xfrm>
-          <a:prstGeom prst="rect">
-            <a:avLst/>
+            <a:off x="868680" y="1600200"/>
+            <a:ext cx="457200" cy="457200"/>
+          </a:xfrm>
+          <a:prstGeom prst="roundRect">
+            <a:avLst>
+              <a:gd name="adj" fmla="val 15000"/>
+            </a:avLst>
           </a:prstGeom>
           <a:solidFill>
             <a:srgbClr val="0A1628"/>
@@ -6108,20 +6541,56 @@
       </p:sp>
       <p:sp>
         <p:nvSpPr>
-          <p:cNvPr id="9" name="Rectangle 8"/>
+          <p:cNvPr id="9" name="TextBox 8"/>
+          <p:cNvSpPr txBox="1"/>
+          <p:nvPr/>
+        </p:nvSpPr>
+        <p:spPr>
+          <a:xfrm>
+            <a:off x="868680" y="1668780"/>
+            <a:ext cx="457200" cy="320040"/>
+          </a:xfrm>
+          <a:prstGeom prst="rect">
+            <a:avLst/>
+          </a:prstGeom>
+          <a:noFill/>
+        </p:spPr>
+        <p:txBody>
+          <a:bodyPr wrap="square">
+            <a:spAutoFit/>
+          </a:bodyPr>
+          <a:lstStyle/>
+          <a:p>
+            <a:pPr algn="ctr">
+              <a:defRPr sz="1600">
+                <a:solidFill>
+                  <a:srgbClr val="FFFFFF"/>
+                </a:solidFill>
+                <a:latin typeface="Calibri"/>
+              </a:defRPr>
+            </a:pPr>
+            <a:r>
+              <a:t>✓</a:t>
+            </a:r>
+          </a:p>
+        </p:txBody>
+      </p:sp>
+      <p:sp>
+        <p:nvSpPr>
+          <p:cNvPr id="10" name="Rectangle 9"/>
           <p:cNvSpPr/>
           <p:nvPr/>
         </p:nvSpPr>
         <p:spPr>
           <a:xfrm>
-            <a:off x="914400" y="1645920"/>
-            <a:ext cx="457200" cy="457200"/>
-          </a:xfrm>
-          <a:prstGeom prst="rect">
-            <a:avLst/>
-          </a:prstGeom>
-          <a:solidFill>
-            <a:srgbClr val="0A1628"/>
+            <a:off x="1078992" y="2103120"/>
+            <a:ext cx="17419320000" cy="502920"/>
+          </a:xfrm>
+          <a:prstGeom prst="rect">
+            <a:avLst/>
+          </a:prstGeom>
+          <a:solidFill>
+            <a:srgbClr val="E2E8F0"/>
           </a:solidFill>
           <a:ln>
             <a:noFill/>
@@ -6151,14 +6620,14 @@
       </p:sp>
       <p:sp>
         <p:nvSpPr>
-          <p:cNvPr id="10" name="TextBox 9"/>
+          <p:cNvPr id="11" name="TextBox 10"/>
           <p:cNvSpPr txBox="1"/>
           <p:nvPr/>
         </p:nvSpPr>
         <p:spPr>
           <a:xfrm>
-            <a:off x="914400" y="1700784"/>
-            <a:ext cx="457200" cy="365760"/>
+            <a:off x="1554480" y="1618488"/>
+            <a:ext cx="9814255" cy="731520"/>
           </a:xfrm>
           <a:prstGeom prst="rect">
             <a:avLst/>
@@ -6171,43 +6640,26 @@
           </a:bodyPr>
           <a:lstStyle/>
           <a:p>
-            <a:pPr algn="ctr">
-              <a:defRPr sz="1800" b="1">
-                <a:solidFill>
-                  <a:srgbClr val="FFFFFF"/>
+            <a:pPr>
+              <a:spcAft>
+                <a:spcPts val="100"/>
+              </a:spcAft>
+              <a:defRPr sz="1400" b="1">
+                <a:solidFill>
+                  <a:srgbClr val="1E293B"/>
                 </a:solidFill>
                 <a:latin typeface="Calibri"/>
               </a:defRPr>
             </a:pPr>
             <a:r>
-              <a:t>1</a:t>
-            </a:r>
-          </a:p>
-        </p:txBody>
-      </p:sp>
-      <p:sp>
-        <p:nvSpPr>
-          <p:cNvPr id="11" name="TextBox 10"/>
-          <p:cNvSpPr txBox="1"/>
-          <p:nvPr/>
-        </p:nvSpPr>
-        <p:spPr>
-          <a:xfrm>
-            <a:off x="1600200" y="1664208"/>
-            <a:ext cx="9814255" cy="731520"/>
-          </a:xfrm>
-          <a:prstGeom prst="rect">
-            <a:avLst/>
-          </a:prstGeom>
-          <a:noFill/>
-        </p:spPr>
-        <p:txBody>
-          <a:bodyPr wrap="square">
-            <a:spAutoFit/>
-          </a:bodyPr>
-          <a:lstStyle/>
-          <a:p>
-            <a:pPr algn="l">
+              <a:t>Supervisi, analisis, dan standarisasi</a:t>
+            </a:r>
+          </a:p>
+          <a:p>
+            <a:pPr>
+              <a:spcAft>
+                <a:spcPts val="100"/>
+              </a:spcAft>
               <a:defRPr sz="1300" b="0">
                 <a:solidFill>
                   <a:srgbClr val="1E293B"/>
@@ -6216,31 +6668,29 @@
               </a:defRPr>
             </a:pPr>
             <a:r>
-              <a:t>Supervisi, analisis, dan standarisasi pengembangan</a:t>
-            </a:r>
-            <a:br/>
-            <a:r>
-              <a:t> aplikasi perangkat daerah</a:t>
-            </a:r>
-          </a:p>
-        </p:txBody>
-      </p:sp>
-      <p:sp>
-        <p:nvSpPr>
-          <p:cNvPr id="12" name="Rectangle 11"/>
+              <a:t>pengembangan aplikasi perangkat daerah</a:t>
+            </a:r>
+          </a:p>
+        </p:txBody>
+      </p:sp>
+      <p:sp>
+        <p:nvSpPr>
+          <p:cNvPr id="12" name="Rounded Rectangle 11"/>
           <p:cNvSpPr/>
           <p:nvPr/>
         </p:nvSpPr>
         <p:spPr>
           <a:xfrm>
-            <a:off x="1143000" y="2148840"/>
-            <a:ext cx="17419320000" cy="457200"/>
-          </a:xfrm>
-          <a:prstGeom prst="rect">
-            <a:avLst/>
-          </a:prstGeom>
-          <a:solidFill>
-            <a:srgbClr val="E2E8F0"/>
+            <a:off x="868680" y="2651760"/>
+            <a:ext cx="457200" cy="457200"/>
+          </a:xfrm>
+          <a:prstGeom prst="roundRect">
+            <a:avLst>
+              <a:gd name="adj" fmla="val 15000"/>
+            </a:avLst>
+          </a:prstGeom>
+          <a:solidFill>
+            <a:srgbClr val="0A1628"/>
           </a:solidFill>
           <a:ln>
             <a:noFill/>
@@ -6270,20 +6720,56 @@
       </p:sp>
       <p:sp>
         <p:nvSpPr>
-          <p:cNvPr id="13" name="Rectangle 12"/>
+          <p:cNvPr id="13" name="TextBox 12"/>
+          <p:cNvSpPr txBox="1"/>
+          <p:nvPr/>
+        </p:nvSpPr>
+        <p:spPr>
+          <a:xfrm>
+            <a:off x="868680" y="2720340"/>
+            <a:ext cx="457200" cy="320040"/>
+          </a:xfrm>
+          <a:prstGeom prst="rect">
+            <a:avLst/>
+          </a:prstGeom>
+          <a:noFill/>
+        </p:spPr>
+        <p:txBody>
+          <a:bodyPr wrap="square">
+            <a:spAutoFit/>
+          </a:bodyPr>
+          <a:lstStyle/>
+          <a:p>
+            <a:pPr algn="ctr">
+              <a:defRPr sz="1600">
+                <a:solidFill>
+                  <a:srgbClr val="FFFFFF"/>
+                </a:solidFill>
+                <a:latin typeface="Calibri"/>
+              </a:defRPr>
+            </a:pPr>
+            <a:r>
+              <a:t>🔗</a:t>
+            </a:r>
+          </a:p>
+        </p:txBody>
+      </p:sp>
+      <p:sp>
+        <p:nvSpPr>
+          <p:cNvPr id="14" name="Rectangle 13"/>
           <p:cNvSpPr/>
           <p:nvPr/>
         </p:nvSpPr>
         <p:spPr>
           <a:xfrm>
-            <a:off x="914400" y="2651760"/>
-            <a:ext cx="457200" cy="457200"/>
-          </a:xfrm>
-          <a:prstGeom prst="rect">
-            <a:avLst/>
-          </a:prstGeom>
-          <a:solidFill>
-            <a:srgbClr val="0A1628"/>
+            <a:off x="1078992" y="3154680"/>
+            <a:ext cx="17419320000" cy="502920"/>
+          </a:xfrm>
+          <a:prstGeom prst="rect">
+            <a:avLst/>
+          </a:prstGeom>
+          <a:solidFill>
+            <a:srgbClr val="E2E8F0"/>
           </a:solidFill>
           <a:ln>
             <a:noFill/>
@@ -6313,14 +6799,14 @@
       </p:sp>
       <p:sp>
         <p:nvSpPr>
-          <p:cNvPr id="14" name="TextBox 13"/>
+          <p:cNvPr id="15" name="TextBox 14"/>
           <p:cNvSpPr txBox="1"/>
           <p:nvPr/>
         </p:nvSpPr>
         <p:spPr>
           <a:xfrm>
-            <a:off x="914400" y="2706624"/>
-            <a:ext cx="457200" cy="365760"/>
+            <a:off x="1554480" y="2670048"/>
+            <a:ext cx="9814255" cy="731520"/>
           </a:xfrm>
           <a:prstGeom prst="rect">
             <a:avLst/>
@@ -6333,43 +6819,26 @@
           </a:bodyPr>
           <a:lstStyle/>
           <a:p>
-            <a:pPr algn="ctr">
-              <a:defRPr sz="1800" b="1">
-                <a:solidFill>
-                  <a:srgbClr val="FFFFFF"/>
+            <a:pPr>
+              <a:spcAft>
+                <a:spcPts val="100"/>
+              </a:spcAft>
+              <a:defRPr sz="1400" b="1">
+                <a:solidFill>
+                  <a:srgbClr val="1E293B"/>
                 </a:solidFill>
                 <a:latin typeface="Calibri"/>
               </a:defRPr>
             </a:pPr>
             <a:r>
-              <a:t>2</a:t>
-            </a:r>
-          </a:p>
-        </p:txBody>
-      </p:sp>
-      <p:sp>
-        <p:nvSpPr>
-          <p:cNvPr id="15" name="TextBox 14"/>
-          <p:cNvSpPr txBox="1"/>
-          <p:nvPr/>
-        </p:nvSpPr>
-        <p:spPr>
-          <a:xfrm>
-            <a:off x="1600200" y="2670048"/>
-            <a:ext cx="9814255" cy="731520"/>
-          </a:xfrm>
-          <a:prstGeom prst="rect">
-            <a:avLst/>
-          </a:prstGeom>
-          <a:noFill/>
-        </p:spPr>
-        <p:txBody>
-          <a:bodyPr wrap="square">
-            <a:spAutoFit/>
-          </a:bodyPr>
-          <a:lstStyle/>
-          <a:p>
-            <a:pPr algn="l">
+              <a:t>Mengelola &amp; mengembangkan SPLP</a:t>
+            </a:r>
+          </a:p>
+          <a:p>
+            <a:pPr>
+              <a:spcAft>
+                <a:spcPts val="100"/>
+              </a:spcAft>
               <a:defRPr sz="1300" b="0">
                 <a:solidFill>
                   <a:srgbClr val="1E293B"/>
@@ -6378,31 +6847,29 @@
               </a:defRPr>
             </a:pPr>
             <a:r>
-              <a:t>Mengelola dan mengembangkan Sistem Penghubung</a:t>
-            </a:r>
-            <a:br/>
-            <a:r>
-              <a:t> Layanan Pemerintah (SPLP)</a:t>
-            </a:r>
-          </a:p>
-        </p:txBody>
-      </p:sp>
-      <p:sp>
-        <p:nvSpPr>
-          <p:cNvPr id="16" name="Rectangle 15"/>
+              <a:t>sebagai tulang punggung integrasi layanan</a:t>
+            </a:r>
+          </a:p>
+        </p:txBody>
+      </p:sp>
+      <p:sp>
+        <p:nvSpPr>
+          <p:cNvPr id="16" name="Rounded Rectangle 15"/>
           <p:cNvSpPr/>
           <p:nvPr/>
         </p:nvSpPr>
         <p:spPr>
           <a:xfrm>
-            <a:off x="1143000" y="3154680"/>
-            <a:ext cx="17419320000" cy="457200"/>
-          </a:xfrm>
-          <a:prstGeom prst="rect">
-            <a:avLst/>
-          </a:prstGeom>
-          <a:solidFill>
-            <a:srgbClr val="E2E8F0"/>
+            <a:off x="868680" y="3703320"/>
+            <a:ext cx="457200" cy="457200"/>
+          </a:xfrm>
+          <a:prstGeom prst="roundRect">
+            <a:avLst>
+              <a:gd name="adj" fmla="val 15000"/>
+            </a:avLst>
+          </a:prstGeom>
+          <a:solidFill>
+            <a:srgbClr val="0A1628"/>
           </a:solidFill>
           <a:ln>
             <a:noFill/>
@@ -6432,20 +6899,56 @@
       </p:sp>
       <p:sp>
         <p:nvSpPr>
-          <p:cNvPr id="17" name="Rectangle 16"/>
+          <p:cNvPr id="17" name="TextBox 16"/>
+          <p:cNvSpPr txBox="1"/>
+          <p:nvPr/>
+        </p:nvSpPr>
+        <p:spPr>
+          <a:xfrm>
+            <a:off x="868680" y="3771900"/>
+            <a:ext cx="457200" cy="320040"/>
+          </a:xfrm>
+          <a:prstGeom prst="rect">
+            <a:avLst/>
+          </a:prstGeom>
+          <a:noFill/>
+        </p:spPr>
+        <p:txBody>
+          <a:bodyPr wrap="square">
+            <a:spAutoFit/>
+          </a:bodyPr>
+          <a:lstStyle/>
+          <a:p>
+            <a:pPr algn="ctr">
+              <a:defRPr sz="1600">
+                <a:solidFill>
+                  <a:srgbClr val="FFFFFF"/>
+                </a:solidFill>
+                <a:latin typeface="Calibri"/>
+              </a:defRPr>
+            </a:pPr>
+            <a:r>
+              <a:t>🌐</a:t>
+            </a:r>
+          </a:p>
+        </p:txBody>
+      </p:sp>
+      <p:sp>
+        <p:nvSpPr>
+          <p:cNvPr id="18" name="Rectangle 17"/>
           <p:cNvSpPr/>
           <p:nvPr/>
         </p:nvSpPr>
         <p:spPr>
           <a:xfrm>
-            <a:off x="914400" y="3657600"/>
-            <a:ext cx="457200" cy="457200"/>
-          </a:xfrm>
-          <a:prstGeom prst="rect">
-            <a:avLst/>
-          </a:prstGeom>
-          <a:solidFill>
-            <a:srgbClr val="0A1628"/>
+            <a:off x="1078992" y="4206240"/>
+            <a:ext cx="17419320000" cy="502920"/>
+          </a:xfrm>
+          <a:prstGeom prst="rect">
+            <a:avLst/>
+          </a:prstGeom>
+          <a:solidFill>
+            <a:srgbClr val="E2E8F0"/>
           </a:solidFill>
           <a:ln>
             <a:noFill/>
@@ -6475,14 +6978,14 @@
       </p:sp>
       <p:sp>
         <p:nvSpPr>
-          <p:cNvPr id="18" name="TextBox 17"/>
+          <p:cNvPr id="19" name="TextBox 18"/>
           <p:cNvSpPr txBox="1"/>
           <p:nvPr/>
         </p:nvSpPr>
         <p:spPr>
           <a:xfrm>
-            <a:off x="914400" y="3712463"/>
-            <a:ext cx="457200" cy="365760"/>
+            <a:off x="1554480" y="3721607"/>
+            <a:ext cx="9814255" cy="731520"/>
           </a:xfrm>
           <a:prstGeom prst="rect">
             <a:avLst/>
@@ -6495,43 +6998,26 @@
           </a:bodyPr>
           <a:lstStyle/>
           <a:p>
-            <a:pPr algn="ctr">
-              <a:defRPr sz="1800" b="1">
-                <a:solidFill>
-                  <a:srgbClr val="FFFFFF"/>
+            <a:pPr>
+              <a:spcAft>
+                <a:spcPts val="100"/>
+              </a:spcAft>
+              <a:defRPr sz="1400" b="1">
+                <a:solidFill>
+                  <a:srgbClr val="1E293B"/>
                 </a:solidFill>
                 <a:latin typeface="Calibri"/>
               </a:defRPr>
             </a:pPr>
             <a:r>
-              <a:t>3</a:t>
-            </a:r>
-          </a:p>
-        </p:txBody>
-      </p:sp>
-      <p:sp>
-        <p:nvSpPr>
-          <p:cNvPr id="19" name="TextBox 18"/>
-          <p:cNvSpPr txBox="1"/>
-          <p:nvPr/>
-        </p:nvSpPr>
-        <p:spPr>
-          <a:xfrm>
-            <a:off x="1600200" y="3675887"/>
-            <a:ext cx="9814255" cy="731520"/>
-          </a:xfrm>
-          <a:prstGeom prst="rect">
-            <a:avLst/>
-          </a:prstGeom>
-          <a:noFill/>
-        </p:spPr>
-        <p:txBody>
-          <a:bodyPr wrap="square">
-            <a:spAutoFit/>
-          </a:bodyPr>
-          <a:lstStyle/>
-          <a:p>
-            <a:pPr algn="l">
+              <a:t>Pengelolaan domain dan subdomain</a:t>
+            </a:r>
+          </a:p>
+          <a:p>
+            <a:pPr>
+              <a:spcAft>
+                <a:spcPts val="100"/>
+              </a:spcAft>
               <a:defRPr sz="1300" b="0">
                 <a:solidFill>
                   <a:srgbClr val="1E293B"/>
@@ -6540,31 +7026,29 @@
               </a:defRPr>
             </a:pPr>
             <a:r>
-              <a:t>Pengelolaan domain dan subdomain</a:t>
-            </a:r>
-            <a:br/>
-            <a:r>
-              <a:t> pemerintah daerah</a:t>
-            </a:r>
-          </a:p>
-        </p:txBody>
-      </p:sp>
-      <p:sp>
-        <p:nvSpPr>
-          <p:cNvPr id="20" name="Rectangle 19"/>
+              <a:t>pemerintah daerah secara terpusat</a:t>
+            </a:r>
+          </a:p>
+        </p:txBody>
+      </p:sp>
+      <p:sp>
+        <p:nvSpPr>
+          <p:cNvPr id="20" name="Rounded Rectangle 19"/>
           <p:cNvSpPr/>
           <p:nvPr/>
         </p:nvSpPr>
         <p:spPr>
           <a:xfrm>
-            <a:off x="1143000" y="4160520"/>
-            <a:ext cx="17419320000" cy="457200"/>
-          </a:xfrm>
-          <a:prstGeom prst="rect">
-            <a:avLst/>
-          </a:prstGeom>
-          <a:solidFill>
-            <a:srgbClr val="E2E8F0"/>
+            <a:off x="868680" y="4754879"/>
+            <a:ext cx="457200" cy="457200"/>
+          </a:xfrm>
+          <a:prstGeom prst="roundRect">
+            <a:avLst>
+              <a:gd name="adj" fmla="val 15000"/>
+            </a:avLst>
+          </a:prstGeom>
+          <a:solidFill>
+            <a:srgbClr val="0A1628"/>
           </a:solidFill>
           <a:ln>
             <a:noFill/>
@@ -6594,20 +7078,111 @@
       </p:sp>
       <p:sp>
         <p:nvSpPr>
-          <p:cNvPr id="21" name="Rectangle 20"/>
+          <p:cNvPr id="21" name="TextBox 20"/>
+          <p:cNvSpPr txBox="1"/>
+          <p:nvPr/>
+        </p:nvSpPr>
+        <p:spPr>
+          <a:xfrm>
+            <a:off x="868680" y="4823459"/>
+            <a:ext cx="457200" cy="320040"/>
+          </a:xfrm>
+          <a:prstGeom prst="rect">
+            <a:avLst/>
+          </a:prstGeom>
+          <a:noFill/>
+        </p:spPr>
+        <p:txBody>
+          <a:bodyPr wrap="square">
+            <a:spAutoFit/>
+          </a:bodyPr>
+          <a:lstStyle/>
+          <a:p>
+            <a:pPr algn="ctr">
+              <a:defRPr sz="1600">
+                <a:solidFill>
+                  <a:srgbClr val="FFFFFF"/>
+                </a:solidFill>
+                <a:latin typeface="Calibri"/>
+              </a:defRPr>
+            </a:pPr>
+            <a:r>
+              <a:t>⚙</a:t>
+            </a:r>
+          </a:p>
+        </p:txBody>
+      </p:sp>
+      <p:sp>
+        <p:nvSpPr>
+          <p:cNvPr id="22" name="TextBox 21"/>
+          <p:cNvSpPr txBox="1"/>
+          <p:nvPr/>
+        </p:nvSpPr>
+        <p:spPr>
+          <a:xfrm>
+            <a:off x="1554480" y="4773167"/>
+            <a:ext cx="9814255" cy="731520"/>
+          </a:xfrm>
+          <a:prstGeom prst="rect">
+            <a:avLst/>
+          </a:prstGeom>
+          <a:noFill/>
+        </p:spPr>
+        <p:txBody>
+          <a:bodyPr wrap="square">
+            <a:spAutoFit/>
+          </a:bodyPr>
+          <a:lstStyle/>
+          <a:p>
+            <a:pPr>
+              <a:spcAft>
+                <a:spcPts val="100"/>
+              </a:spcAft>
+              <a:defRPr sz="1400" b="1">
+                <a:solidFill>
+                  <a:srgbClr val="1E293B"/>
+                </a:solidFill>
+                <a:latin typeface="Calibri"/>
+              </a:defRPr>
+            </a:pPr>
+            <a:r>
+              <a:t>Sosialisasi &amp; peningkatan kapasitas</a:t>
+            </a:r>
+          </a:p>
+          <a:p>
+            <a:pPr>
+              <a:spcAft>
+                <a:spcPts val="100"/>
+              </a:spcAft>
+              <a:defRPr sz="1300" b="0">
+                <a:solidFill>
+                  <a:srgbClr val="1E293B"/>
+                </a:solidFill>
+                <a:latin typeface="Calibri"/>
+              </a:defRPr>
+            </a:pPr>
+            <a:r>
+              <a:t>SDM pengelola sistem informasi</a:t>
+            </a:r>
+          </a:p>
+        </p:txBody>
+      </p:sp>
+      <p:sp>
+        <p:nvSpPr>
+          <p:cNvPr id="23" name="Rectangle 22"/>
           <p:cNvSpPr/>
           <p:nvPr/>
         </p:nvSpPr>
         <p:spPr>
           <a:xfrm>
-            <a:off x="914400" y="4663440"/>
-            <a:ext cx="457200" cy="457200"/>
-          </a:xfrm>
-          <a:prstGeom prst="rect">
-            <a:avLst/>
-          </a:prstGeom>
-          <a:solidFill>
-            <a:srgbClr val="0A1628"/>
+            <a:off x="0" y="6446520"/>
+            <a:ext cx="12191695" cy="411480"/>
+          </a:xfrm>
+          <a:prstGeom prst="rect">
+            <a:avLst/>
+          </a:prstGeom>
+          <a:solidFill>
+            <a:srgbClr val="F8FAFC"/>
           </a:solidFill>
           <a:ln>
             <a:noFill/>
@@ -6637,82 +7212,6 @@
       </p:sp>
       <p:sp>
         <p:nvSpPr>
-          <p:cNvPr id="22" name="TextBox 21"/>
-          <p:cNvSpPr txBox="1"/>
-          <p:nvPr/>
-        </p:nvSpPr>
-        <p:spPr>
-          <a:xfrm>
-            <a:off x="914400" y="4718304"/>
-            <a:ext cx="457200" cy="365760"/>
-          </a:xfrm>
-          <a:prstGeom prst="rect">
-            <a:avLst/>
-          </a:prstGeom>
-          <a:noFill/>
-        </p:spPr>
-        <p:txBody>
-          <a:bodyPr wrap="square">
-            <a:spAutoFit/>
-          </a:bodyPr>
-          <a:lstStyle/>
-          <a:p>
-            <a:pPr algn="ctr">
-              <a:defRPr sz="1800" b="1">
-                <a:solidFill>
-                  <a:srgbClr val="FFFFFF"/>
-                </a:solidFill>
-                <a:latin typeface="Calibri"/>
-              </a:defRPr>
-            </a:pPr>
-            <a:r>
-              <a:t>4</a:t>
-            </a:r>
-          </a:p>
-        </p:txBody>
-      </p:sp>
-      <p:sp>
-        <p:nvSpPr>
-          <p:cNvPr id="23" name="TextBox 22"/>
-          <p:cNvSpPr txBox="1"/>
-          <p:nvPr/>
-        </p:nvSpPr>
-        <p:spPr>
-          <a:xfrm>
-            <a:off x="1600200" y="4681728"/>
-            <a:ext cx="9814255" cy="731520"/>
-          </a:xfrm>
-          <a:prstGeom prst="rect">
-            <a:avLst/>
-          </a:prstGeom>
-          <a:noFill/>
-        </p:spPr>
-        <p:txBody>
-          <a:bodyPr wrap="square">
-            <a:spAutoFit/>
-          </a:bodyPr>
-          <a:lstStyle/>
-          <a:p>
-            <a:pPr algn="l">
-              <a:defRPr sz="1300" b="0">
-                <a:solidFill>
-                  <a:srgbClr val="1E293B"/>
-                </a:solidFill>
-                <a:latin typeface="Calibri"/>
-              </a:defRPr>
-            </a:pPr>
-            <a:r>
-              <a:t>Sosialisasi dan peningkatan kapasitas</a:t>
-            </a:r>
-            <a:br/>
-            <a:r>
-              <a:t> SDM pengelola sistem</a:t>
-            </a:r>
-          </a:p>
-        </p:txBody>
-      </p:sp>
-      <p:sp>
-        <p:nvSpPr>
           <p:cNvPr id="24" name="Rectangle 23"/>
           <p:cNvSpPr/>
           <p:nvPr/>
@@ -6720,13 +7219,13 @@
         <p:spPr>
           <a:xfrm>
             <a:off x="0" y="6446520"/>
-            <a:ext cx="12191695" cy="411480"/>
-          </a:xfrm>
-          <a:prstGeom prst="rect">
-            <a:avLst/>
-          </a:prstGeom>
-          <a:solidFill>
-            <a:srgbClr val="F8FAFC"/>
+            <a:ext cx="12191695" cy="17419320000"/>
+          </a:xfrm>
+          <a:prstGeom prst="rect">
+            <a:avLst/>
+          </a:prstGeom>
+          <a:solidFill>
+            <a:srgbClr val="E2E8F0"/>
           </a:solidFill>
           <a:ln>
             <a:noFill/>
@@ -6756,50 +7255,7 @@
       </p:sp>
       <p:sp>
         <p:nvSpPr>
-          <p:cNvPr id="25" name="Rectangle 24"/>
-          <p:cNvSpPr/>
-          <p:nvPr/>
-        </p:nvSpPr>
-        <p:spPr>
-          <a:xfrm>
-            <a:off x="0" y="6446520"/>
-            <a:ext cx="12191695" cy="17419320000"/>
-          </a:xfrm>
-          <a:prstGeom prst="rect">
-            <a:avLst/>
-          </a:prstGeom>
-          <a:solidFill>
-            <a:srgbClr val="E2E8F0"/>
-          </a:solidFill>
-          <a:ln>
-            <a:noFill/>
-          </a:ln>
-        </p:spPr>
-        <p:style>
-          <a:lnRef idx="1">
-            <a:schemeClr val="accent1"/>
-          </a:lnRef>
-          <a:fillRef idx="3">
-            <a:schemeClr val="accent1"/>
-          </a:fillRef>
-          <a:effectRef idx="2">
-            <a:schemeClr val="accent1"/>
-          </a:effectRef>
-          <a:fontRef idx="minor">
-            <a:schemeClr val="lt1"/>
-          </a:fontRef>
-        </p:style>
-        <p:txBody>
-          <a:bodyPr rtlCol="0" anchor="ctr"/>
-          <a:lstStyle/>
-          <a:p>
-            <a:pPr algn="ctr"/>
-          </a:p>
-        </p:txBody>
-      </p:sp>
-      <p:sp>
-        <p:nvSpPr>
-          <p:cNvPr id="26" name="TextBox 25"/>
+          <p:cNvPr id="25" name="TextBox 24"/>
           <p:cNvSpPr txBox="1"/>
           <p:nvPr/>
         </p:nvSpPr>
@@ -6835,7 +7291,7 @@
       </p:sp>
       <p:sp>
         <p:nvSpPr>
-          <p:cNvPr id="27" name="TextBox 26"/>
+          <p:cNvPr id="26" name="TextBox 25"/>
           <p:cNvSpPr txBox="1"/>
           <p:nvPr/>
         </p:nvSpPr>
@@ -7105,7 +7561,7 @@
         <p:spPr>
           <a:xfrm>
             <a:off x="548640" y="1371600"/>
-            <a:ext cx="109728" cy="4389120"/>
+            <a:ext cx="91440" cy="4572000"/>
           </a:xfrm>
           <a:prstGeom prst="rect">
             <a:avLst/>
@@ -7141,17 +7597,19 @@
       </p:sp>
       <p:sp>
         <p:nvSpPr>
-          <p:cNvPr id="8" name="Rectangle 7"/>
+          <p:cNvPr id="8" name="Rounded Rectangle 7"/>
           <p:cNvSpPr/>
           <p:nvPr/>
         </p:nvSpPr>
         <p:spPr>
           <a:xfrm>
-            <a:off x="548640" y="1371600"/>
-            <a:ext cx="1645920" cy="54864"/>
-          </a:xfrm>
-          <a:prstGeom prst="rect">
-            <a:avLst/>
+            <a:off x="868680" y="1600200"/>
+            <a:ext cx="457200" cy="457200"/>
+          </a:xfrm>
+          <a:prstGeom prst="roundRect">
+            <a:avLst>
+              <a:gd name="adj" fmla="val 15000"/>
+            </a:avLst>
           </a:prstGeom>
           <a:solidFill>
             <a:srgbClr val="0D9488"/>
@@ -7184,20 +7642,56 @@
       </p:sp>
       <p:sp>
         <p:nvSpPr>
-          <p:cNvPr id="9" name="Rectangle 8"/>
+          <p:cNvPr id="9" name="TextBox 8"/>
+          <p:cNvSpPr txBox="1"/>
+          <p:nvPr/>
+        </p:nvSpPr>
+        <p:spPr>
+          <a:xfrm>
+            <a:off x="868680" y="1668780"/>
+            <a:ext cx="457200" cy="320040"/>
+          </a:xfrm>
+          <a:prstGeom prst="rect">
+            <a:avLst/>
+          </a:prstGeom>
+          <a:noFill/>
+        </p:spPr>
+        <p:txBody>
+          <a:bodyPr wrap="square">
+            <a:spAutoFit/>
+          </a:bodyPr>
+          <a:lstStyle/>
+          <a:p>
+            <a:pPr algn="ctr">
+              <a:defRPr sz="1600">
+                <a:solidFill>
+                  <a:srgbClr val="FFFFFF"/>
+                </a:solidFill>
+                <a:latin typeface="Calibri"/>
+              </a:defRPr>
+            </a:pPr>
+            <a:r>
+              <a:t>◆</a:t>
+            </a:r>
+          </a:p>
+        </p:txBody>
+      </p:sp>
+      <p:sp>
+        <p:nvSpPr>
+          <p:cNvPr id="10" name="Rectangle 9"/>
           <p:cNvSpPr/>
           <p:nvPr/>
         </p:nvSpPr>
         <p:spPr>
           <a:xfrm>
-            <a:off x="914400" y="1645920"/>
-            <a:ext cx="457200" cy="457200"/>
-          </a:xfrm>
-          <a:prstGeom prst="rect">
-            <a:avLst/>
-          </a:prstGeom>
-          <a:solidFill>
-            <a:srgbClr val="0D9488"/>
+            <a:off x="1078992" y="2103120"/>
+            <a:ext cx="17419320000" cy="502920"/>
+          </a:xfrm>
+          <a:prstGeom prst="rect">
+            <a:avLst/>
+          </a:prstGeom>
+          <a:solidFill>
+            <a:srgbClr val="E2E8F0"/>
           </a:solidFill>
           <a:ln>
             <a:noFill/>
@@ -7227,14 +7721,14 @@
       </p:sp>
       <p:sp>
         <p:nvSpPr>
-          <p:cNvPr id="10" name="TextBox 9"/>
+          <p:cNvPr id="11" name="TextBox 10"/>
           <p:cNvSpPr txBox="1"/>
           <p:nvPr/>
         </p:nvSpPr>
         <p:spPr>
           <a:xfrm>
-            <a:off x="914400" y="1700784"/>
-            <a:ext cx="457200" cy="365760"/>
+            <a:off x="1554480" y="1618488"/>
+            <a:ext cx="9814255" cy="731520"/>
           </a:xfrm>
           <a:prstGeom prst="rect">
             <a:avLst/>
@@ -7247,43 +7741,26 @@
           </a:bodyPr>
           <a:lstStyle/>
           <a:p>
-            <a:pPr algn="ctr">
-              <a:defRPr sz="1800" b="1">
-                <a:solidFill>
-                  <a:srgbClr val="FFFFFF"/>
+            <a:pPr>
+              <a:spcAft>
+                <a:spcPts val="100"/>
+              </a:spcAft>
+              <a:defRPr sz="1400" b="1">
+                <a:solidFill>
+                  <a:srgbClr val="1E293B"/>
                 </a:solidFill>
                 <a:latin typeface="Calibri"/>
               </a:defRPr>
             </a:pPr>
             <a:r>
-              <a:t>1</a:t>
-            </a:r>
-          </a:p>
-        </p:txBody>
-      </p:sp>
-      <p:sp>
-        <p:nvSpPr>
-          <p:cNvPr id="11" name="TextBox 10"/>
-          <p:cNvSpPr txBox="1"/>
-          <p:nvPr/>
-        </p:nvSpPr>
-        <p:spPr>
-          <a:xfrm>
-            <a:off x="1600200" y="1664208"/>
-            <a:ext cx="9814255" cy="731520"/>
-          </a:xfrm>
-          <a:prstGeom prst="rect">
-            <a:avLst/>
-          </a:prstGeom>
-          <a:noFill/>
-        </p:spPr>
-        <p:txBody>
-          <a:bodyPr wrap="square">
-            <a:spAutoFit/>
-          </a:bodyPr>
-          <a:lstStyle/>
-          <a:p>
-            <a:pPr algn="l">
+              <a:t>Menyusun strategi, rencana aksi,</a:t>
+            </a:r>
+          </a:p>
+          <a:p>
+            <a:pPr>
+              <a:spcAft>
+                <a:spcPts val="100"/>
+              </a:spcAft>
               <a:defRPr sz="1300" b="0">
                 <a:solidFill>
                   <a:srgbClr val="1E293B"/>
@@ -7292,31 +7769,29 @@
               </a:defRPr>
             </a:pPr>
             <a:r>
-              <a:t>Menyusun strategi, rencana aksi,</a:t>
-            </a:r>
-            <a:br/>
-            <a:r>
-              <a:t> dan masterplan Kota Cerdas</a:t>
-            </a:r>
-          </a:p>
-        </p:txBody>
-      </p:sp>
-      <p:sp>
-        <p:nvSpPr>
-          <p:cNvPr id="12" name="Rectangle 11"/>
+              <a:t>dan masterplan Kota Cerdas</a:t>
+            </a:r>
+          </a:p>
+        </p:txBody>
+      </p:sp>
+      <p:sp>
+        <p:nvSpPr>
+          <p:cNvPr id="12" name="Rounded Rectangle 11"/>
           <p:cNvSpPr/>
           <p:nvPr/>
         </p:nvSpPr>
         <p:spPr>
           <a:xfrm>
-            <a:off x="1143000" y="2148840"/>
-            <a:ext cx="17419320000" cy="457200"/>
-          </a:xfrm>
-          <a:prstGeom prst="rect">
-            <a:avLst/>
-          </a:prstGeom>
-          <a:solidFill>
-            <a:srgbClr val="E2E8F0"/>
+            <a:off x="868680" y="2651760"/>
+            <a:ext cx="457200" cy="457200"/>
+          </a:xfrm>
+          <a:prstGeom prst="roundRect">
+            <a:avLst>
+              <a:gd name="adj" fmla="val 15000"/>
+            </a:avLst>
+          </a:prstGeom>
+          <a:solidFill>
+            <a:srgbClr val="0D9488"/>
           </a:solidFill>
           <a:ln>
             <a:noFill/>
@@ -7346,20 +7821,56 @@
       </p:sp>
       <p:sp>
         <p:nvSpPr>
-          <p:cNvPr id="13" name="Rectangle 12"/>
+          <p:cNvPr id="13" name="TextBox 12"/>
+          <p:cNvSpPr txBox="1"/>
+          <p:nvPr/>
+        </p:nvSpPr>
+        <p:spPr>
+          <a:xfrm>
+            <a:off x="868680" y="2720340"/>
+            <a:ext cx="457200" cy="320040"/>
+          </a:xfrm>
+          <a:prstGeom prst="rect">
+            <a:avLst/>
+          </a:prstGeom>
+          <a:noFill/>
+        </p:spPr>
+        <p:txBody>
+          <a:bodyPr wrap="square">
+            <a:spAutoFit/>
+          </a:bodyPr>
+          <a:lstStyle/>
+          <a:p>
+            <a:pPr algn="ctr">
+              <a:defRPr sz="1600">
+                <a:solidFill>
+                  <a:srgbClr val="FFFFFF"/>
+                </a:solidFill>
+                <a:latin typeface="Calibri"/>
+              </a:defRPr>
+            </a:pPr>
+            <a:r>
+              <a:t>🏛</a:t>
+            </a:r>
+          </a:p>
+        </p:txBody>
+      </p:sp>
+      <p:sp>
+        <p:nvSpPr>
+          <p:cNvPr id="14" name="Rectangle 13"/>
           <p:cNvSpPr/>
           <p:nvPr/>
         </p:nvSpPr>
         <p:spPr>
           <a:xfrm>
-            <a:off x="914400" y="2651760"/>
-            <a:ext cx="457200" cy="457200"/>
-          </a:xfrm>
-          <a:prstGeom prst="rect">
-            <a:avLst/>
-          </a:prstGeom>
-          <a:solidFill>
-            <a:srgbClr val="0D9488"/>
+            <a:off x="1078992" y="3154680"/>
+            <a:ext cx="17419320000" cy="502920"/>
+          </a:xfrm>
+          <a:prstGeom prst="rect">
+            <a:avLst/>
+          </a:prstGeom>
+          <a:solidFill>
+            <a:srgbClr val="E2E8F0"/>
           </a:solidFill>
           <a:ln>
             <a:noFill/>
@@ -7389,14 +7900,14 @@
       </p:sp>
       <p:sp>
         <p:nvSpPr>
-          <p:cNvPr id="14" name="TextBox 13"/>
+          <p:cNvPr id="15" name="TextBox 14"/>
           <p:cNvSpPr txBox="1"/>
           <p:nvPr/>
         </p:nvSpPr>
         <p:spPr>
           <a:xfrm>
-            <a:off x="914400" y="2706624"/>
-            <a:ext cx="457200" cy="365760"/>
+            <a:off x="1554480" y="2670048"/>
+            <a:ext cx="9814255" cy="731520"/>
           </a:xfrm>
           <a:prstGeom prst="rect">
             <a:avLst/>
@@ -7409,43 +7920,26 @@
           </a:bodyPr>
           <a:lstStyle/>
           <a:p>
-            <a:pPr algn="ctr">
-              <a:defRPr sz="1800" b="1">
-                <a:solidFill>
-                  <a:srgbClr val="FFFFFF"/>
+            <a:pPr>
+              <a:spcAft>
+                <a:spcPts val="100"/>
+              </a:spcAft>
+              <a:defRPr sz="1400" b="1">
+                <a:solidFill>
+                  <a:srgbClr val="1E293B"/>
                 </a:solidFill>
                 <a:latin typeface="Calibri"/>
               </a:defRPr>
             </a:pPr>
             <a:r>
-              <a:t>2</a:t>
-            </a:r>
-          </a:p>
-        </p:txBody>
-      </p:sp>
-      <p:sp>
-        <p:nvSpPr>
-          <p:cNvPr id="15" name="TextBox 14"/>
-          <p:cNvSpPr txBox="1"/>
-          <p:nvPr/>
-        </p:nvSpPr>
-        <p:spPr>
-          <a:xfrm>
-            <a:off x="1600200" y="2670048"/>
-            <a:ext cx="9814255" cy="731520"/>
-          </a:xfrm>
-          <a:prstGeom prst="rect">
-            <a:avLst/>
-          </a:prstGeom>
-          <a:noFill/>
-        </p:spPr>
-        <p:txBody>
-          <a:bodyPr wrap="square">
-            <a:spAutoFit/>
-          </a:bodyPr>
-          <a:lstStyle/>
-          <a:p>
-            <a:pPr algn="l">
+              <a:t>Membangun kolaborasi dengan pemangku</a:t>
+            </a:r>
+          </a:p>
+          <a:p>
+            <a:pPr>
+              <a:spcAft>
+                <a:spcPts val="100"/>
+              </a:spcAft>
               <a:defRPr sz="1300" b="0">
                 <a:solidFill>
                   <a:srgbClr val="1E293B"/>
@@ -7454,31 +7948,29 @@
               </a:defRPr>
             </a:pPr>
             <a:r>
-              <a:t>Membangun kolaborasi dengan pemangku</a:t>
-            </a:r>
-            <a:br/>
-            <a:r>
-              <a:t> kepentingan lintas sektor</a:t>
-            </a:r>
-          </a:p>
-        </p:txBody>
-      </p:sp>
-      <p:sp>
-        <p:nvSpPr>
-          <p:cNvPr id="16" name="Rectangle 15"/>
+              <a:t>kepentingan lintas sektor</a:t>
+            </a:r>
+          </a:p>
+        </p:txBody>
+      </p:sp>
+      <p:sp>
+        <p:nvSpPr>
+          <p:cNvPr id="16" name="Rounded Rectangle 15"/>
           <p:cNvSpPr/>
           <p:nvPr/>
         </p:nvSpPr>
         <p:spPr>
           <a:xfrm>
-            <a:off x="1143000" y="3154680"/>
-            <a:ext cx="17419320000" cy="457200"/>
-          </a:xfrm>
-          <a:prstGeom prst="rect">
-            <a:avLst/>
-          </a:prstGeom>
-          <a:solidFill>
-            <a:srgbClr val="E2E8F0"/>
+            <a:off x="868680" y="3703320"/>
+            <a:ext cx="457200" cy="457200"/>
+          </a:xfrm>
+          <a:prstGeom prst="roundRect">
+            <a:avLst>
+              <a:gd name="adj" fmla="val 15000"/>
+            </a:avLst>
+          </a:prstGeom>
+          <a:solidFill>
+            <a:srgbClr val="0D9488"/>
           </a:solidFill>
           <a:ln>
             <a:noFill/>
@@ -7508,20 +8000,56 @@
       </p:sp>
       <p:sp>
         <p:nvSpPr>
-          <p:cNvPr id="17" name="Rectangle 16"/>
+          <p:cNvPr id="17" name="TextBox 16"/>
+          <p:cNvSpPr txBox="1"/>
+          <p:nvPr/>
+        </p:nvSpPr>
+        <p:spPr>
+          <a:xfrm>
+            <a:off x="868680" y="3771900"/>
+            <a:ext cx="457200" cy="320040"/>
+          </a:xfrm>
+          <a:prstGeom prst="rect">
+            <a:avLst/>
+          </a:prstGeom>
+          <a:noFill/>
+        </p:spPr>
+        <p:txBody>
+          <a:bodyPr wrap="square">
+            <a:spAutoFit/>
+          </a:bodyPr>
+          <a:lstStyle/>
+          <a:p>
+            <a:pPr algn="ctr">
+              <a:defRPr sz="1600">
+                <a:solidFill>
+                  <a:srgbClr val="FFFFFF"/>
+                </a:solidFill>
+                <a:latin typeface="Calibri"/>
+              </a:defRPr>
+            </a:pPr>
+            <a:r>
+              <a:t>▣</a:t>
+            </a:r>
+          </a:p>
+        </p:txBody>
+      </p:sp>
+      <p:sp>
+        <p:nvSpPr>
+          <p:cNvPr id="18" name="Rectangle 17"/>
           <p:cNvSpPr/>
           <p:nvPr/>
         </p:nvSpPr>
         <p:spPr>
           <a:xfrm>
-            <a:off x="914400" y="3657600"/>
-            <a:ext cx="457200" cy="457200"/>
-          </a:xfrm>
-          <a:prstGeom prst="rect">
-            <a:avLst/>
-          </a:prstGeom>
-          <a:solidFill>
-            <a:srgbClr val="0D9488"/>
+            <a:off x="1078992" y="4206240"/>
+            <a:ext cx="17419320000" cy="502920"/>
+          </a:xfrm>
+          <a:prstGeom prst="rect">
+            <a:avLst/>
+          </a:prstGeom>
+          <a:solidFill>
+            <a:srgbClr val="E2E8F0"/>
           </a:solidFill>
           <a:ln>
             <a:noFill/>
@@ -7551,14 +8079,14 @@
       </p:sp>
       <p:sp>
         <p:nvSpPr>
-          <p:cNvPr id="18" name="TextBox 17"/>
+          <p:cNvPr id="19" name="TextBox 18"/>
           <p:cNvSpPr txBox="1"/>
           <p:nvPr/>
         </p:nvSpPr>
         <p:spPr>
           <a:xfrm>
-            <a:off x="914400" y="3712463"/>
-            <a:ext cx="457200" cy="365760"/>
+            <a:off x="1554480" y="3721607"/>
+            <a:ext cx="9814255" cy="731520"/>
           </a:xfrm>
           <a:prstGeom prst="rect">
             <a:avLst/>
@@ -7571,43 +8099,26 @@
           </a:bodyPr>
           <a:lstStyle/>
           <a:p>
-            <a:pPr algn="ctr">
-              <a:defRPr sz="1800" b="1">
-                <a:solidFill>
-                  <a:srgbClr val="FFFFFF"/>
+            <a:pPr>
+              <a:spcAft>
+                <a:spcPts val="100"/>
+              </a:spcAft>
+              <a:defRPr sz="1400" b="1">
+                <a:solidFill>
+                  <a:srgbClr val="1E293B"/>
                 </a:solidFill>
                 <a:latin typeface="Calibri"/>
               </a:defRPr>
             </a:pPr>
             <a:r>
-              <a:t>3</a:t>
-            </a:r>
-          </a:p>
-        </p:txBody>
-      </p:sp>
-      <p:sp>
-        <p:nvSpPr>
-          <p:cNvPr id="19" name="TextBox 18"/>
-          <p:cNvSpPr txBox="1"/>
-          <p:nvPr/>
-        </p:nvSpPr>
-        <p:spPr>
-          <a:xfrm>
-            <a:off x="1600200" y="3675887"/>
-            <a:ext cx="9814255" cy="731520"/>
-          </a:xfrm>
-          <a:prstGeom prst="rect">
-            <a:avLst/>
-          </a:prstGeom>
-          <a:noFill/>
-        </p:spPr>
-        <p:txBody>
-          <a:bodyPr wrap="square">
-            <a:spAutoFit/>
-          </a:bodyPr>
-          <a:lstStyle/>
-          <a:p>
-            <a:pPr algn="l">
+              <a:t>Mengoordinasikan &amp; mengevaluasi</a:t>
+            </a:r>
+          </a:p>
+          <a:p>
+            <a:pPr>
+              <a:spcAft>
+                <a:spcPts val="100"/>
+              </a:spcAft>
               <a:defRPr sz="1300" b="0">
                 <a:solidFill>
                   <a:srgbClr val="1E293B"/>
@@ -7616,31 +8127,29 @@
               </a:defRPr>
             </a:pPr>
             <a:r>
-              <a:t>Mengoordinasikan dan mengevaluasi</a:t>
-            </a:r>
-            <a:br/>
-            <a:r>
-              <a:t> program Kota Cerdas</a:t>
-            </a:r>
-          </a:p>
-        </p:txBody>
-      </p:sp>
-      <p:sp>
-        <p:nvSpPr>
-          <p:cNvPr id="20" name="Rectangle 19"/>
+              <a:t>program Kota Cerdas secara berkala</a:t>
+            </a:r>
+          </a:p>
+        </p:txBody>
+      </p:sp>
+      <p:sp>
+        <p:nvSpPr>
+          <p:cNvPr id="20" name="Rounded Rectangle 19"/>
           <p:cNvSpPr/>
           <p:nvPr/>
         </p:nvSpPr>
         <p:spPr>
           <a:xfrm>
-            <a:off x="1143000" y="4160520"/>
-            <a:ext cx="17419320000" cy="457200"/>
-          </a:xfrm>
-          <a:prstGeom prst="rect">
-            <a:avLst/>
-          </a:prstGeom>
-          <a:solidFill>
-            <a:srgbClr val="E2E8F0"/>
+            <a:off x="868680" y="4754879"/>
+            <a:ext cx="457200" cy="457200"/>
+          </a:xfrm>
+          <a:prstGeom prst="roundRect">
+            <a:avLst>
+              <a:gd name="adj" fmla="val 15000"/>
+            </a:avLst>
+          </a:prstGeom>
+          <a:solidFill>
+            <a:srgbClr val="0D9488"/>
           </a:solidFill>
           <a:ln>
             <a:noFill/>
@@ -7670,20 +8179,111 @@
       </p:sp>
       <p:sp>
         <p:nvSpPr>
-          <p:cNvPr id="21" name="Rectangle 20"/>
+          <p:cNvPr id="21" name="TextBox 20"/>
+          <p:cNvSpPr txBox="1"/>
+          <p:nvPr/>
+        </p:nvSpPr>
+        <p:spPr>
+          <a:xfrm>
+            <a:off x="868680" y="4823459"/>
+            <a:ext cx="457200" cy="320040"/>
+          </a:xfrm>
+          <a:prstGeom prst="rect">
+            <a:avLst/>
+          </a:prstGeom>
+          <a:noFill/>
+        </p:spPr>
+        <p:txBody>
+          <a:bodyPr wrap="square">
+            <a:spAutoFit/>
+          </a:bodyPr>
+          <a:lstStyle/>
+          <a:p>
+            <a:pPr algn="ctr">
+              <a:defRPr sz="1600">
+                <a:solidFill>
+                  <a:srgbClr val="FFFFFF"/>
+                </a:solidFill>
+                <a:latin typeface="Calibri"/>
+              </a:defRPr>
+            </a:pPr>
+            <a:r>
+              <a:t>🔗</a:t>
+            </a:r>
+          </a:p>
+        </p:txBody>
+      </p:sp>
+      <p:sp>
+        <p:nvSpPr>
+          <p:cNvPr id="22" name="TextBox 21"/>
+          <p:cNvSpPr txBox="1"/>
+          <p:nvPr/>
+        </p:nvSpPr>
+        <p:spPr>
+          <a:xfrm>
+            <a:off x="1554480" y="4773167"/>
+            <a:ext cx="9814255" cy="731520"/>
+          </a:xfrm>
+          <a:prstGeom prst="rect">
+            <a:avLst/>
+          </a:prstGeom>
+          <a:noFill/>
+        </p:spPr>
+        <p:txBody>
+          <a:bodyPr wrap="square">
+            <a:spAutoFit/>
+          </a:bodyPr>
+          <a:lstStyle/>
+          <a:p>
+            <a:pPr>
+              <a:spcAft>
+                <a:spcPts val="100"/>
+              </a:spcAft>
+              <a:defRPr sz="1400" b="1">
+                <a:solidFill>
+                  <a:srgbClr val="1E293B"/>
+                </a:solidFill>
+                <a:latin typeface="Calibri"/>
+              </a:defRPr>
+            </a:pPr>
+            <a:r>
+              <a:t>Menyelaraskan rencana induk dengan</a:t>
+            </a:r>
+          </a:p>
+          <a:p>
+            <a:pPr>
+              <a:spcAft>
+                <a:spcPts val="100"/>
+              </a:spcAft>
+              <a:defRPr sz="1300" b="0">
+                <a:solidFill>
+                  <a:srgbClr val="1E293B"/>
+                </a:solidFill>
+                <a:latin typeface="Calibri"/>
+              </a:defRPr>
+            </a:pPr>
+            <a:r>
+              <a:t>dokumen perencanaan daerah</a:t>
+            </a:r>
+          </a:p>
+        </p:txBody>
+      </p:sp>
+      <p:sp>
+        <p:nvSpPr>
+          <p:cNvPr id="23" name="Rectangle 22"/>
           <p:cNvSpPr/>
           <p:nvPr/>
         </p:nvSpPr>
         <p:spPr>
           <a:xfrm>
-            <a:off x="914400" y="4663440"/>
-            <a:ext cx="457200" cy="457200"/>
-          </a:xfrm>
-          <a:prstGeom prst="rect">
-            <a:avLst/>
-          </a:prstGeom>
-          <a:solidFill>
-            <a:srgbClr val="0D9488"/>
+            <a:off x="0" y="6446520"/>
+            <a:ext cx="12191695" cy="411480"/>
+          </a:xfrm>
+          <a:prstGeom prst="rect">
+            <a:avLst/>
+          </a:prstGeom>
+          <a:solidFill>
+            <a:srgbClr val="F8FAFC"/>
           </a:solidFill>
           <a:ln>
             <a:noFill/>
@@ -7713,82 +8313,6 @@
       </p:sp>
       <p:sp>
         <p:nvSpPr>
-          <p:cNvPr id="22" name="TextBox 21"/>
-          <p:cNvSpPr txBox="1"/>
-          <p:nvPr/>
-        </p:nvSpPr>
-        <p:spPr>
-          <a:xfrm>
-            <a:off x="914400" y="4718304"/>
-            <a:ext cx="457200" cy="365760"/>
-          </a:xfrm>
-          <a:prstGeom prst="rect">
-            <a:avLst/>
-          </a:prstGeom>
-          <a:noFill/>
-        </p:spPr>
-        <p:txBody>
-          <a:bodyPr wrap="square">
-            <a:spAutoFit/>
-          </a:bodyPr>
-          <a:lstStyle/>
-          <a:p>
-            <a:pPr algn="ctr">
-              <a:defRPr sz="1800" b="1">
-                <a:solidFill>
-                  <a:srgbClr val="FFFFFF"/>
-                </a:solidFill>
-                <a:latin typeface="Calibri"/>
-              </a:defRPr>
-            </a:pPr>
-            <a:r>
-              <a:t>4</a:t>
-            </a:r>
-          </a:p>
-        </p:txBody>
-      </p:sp>
-      <p:sp>
-        <p:nvSpPr>
-          <p:cNvPr id="23" name="TextBox 22"/>
-          <p:cNvSpPr txBox="1"/>
-          <p:nvPr/>
-        </p:nvSpPr>
-        <p:spPr>
-          <a:xfrm>
-            <a:off x="1600200" y="4681728"/>
-            <a:ext cx="9814255" cy="731520"/>
-          </a:xfrm>
-          <a:prstGeom prst="rect">
-            <a:avLst/>
-          </a:prstGeom>
-          <a:noFill/>
-        </p:spPr>
-        <p:txBody>
-          <a:bodyPr wrap="square">
-            <a:spAutoFit/>
-          </a:bodyPr>
-          <a:lstStyle/>
-          <a:p>
-            <a:pPr algn="l">
-              <a:defRPr sz="1300" b="0">
-                <a:solidFill>
-                  <a:srgbClr val="1E293B"/>
-                </a:solidFill>
-                <a:latin typeface="Calibri"/>
-              </a:defRPr>
-            </a:pPr>
-            <a:r>
-              <a:t>Menyelaraskan rencana induk dengan</a:t>
-            </a:r>
-            <a:br/>
-            <a:r>
-              <a:t> dokumen perencanaan daerah</a:t>
-            </a:r>
-          </a:p>
-        </p:txBody>
-      </p:sp>
-      <p:sp>
-        <p:nvSpPr>
           <p:cNvPr id="24" name="Rectangle 23"/>
           <p:cNvSpPr/>
           <p:nvPr/>
@@ -7796,13 +8320,13 @@
         <p:spPr>
           <a:xfrm>
             <a:off x="0" y="6446520"/>
-            <a:ext cx="12191695" cy="411480"/>
-          </a:xfrm>
-          <a:prstGeom prst="rect">
-            <a:avLst/>
-          </a:prstGeom>
-          <a:solidFill>
-            <a:srgbClr val="F8FAFC"/>
+            <a:ext cx="12191695" cy="17419320000"/>
+          </a:xfrm>
+          <a:prstGeom prst="rect">
+            <a:avLst/>
+          </a:prstGeom>
+          <a:solidFill>
+            <a:srgbClr val="E2E8F0"/>
           </a:solidFill>
           <a:ln>
             <a:noFill/>
@@ -7832,50 +8356,7 @@
       </p:sp>
       <p:sp>
         <p:nvSpPr>
-          <p:cNvPr id="25" name="Rectangle 24"/>
-          <p:cNvSpPr/>
-          <p:nvPr/>
-        </p:nvSpPr>
-        <p:spPr>
-          <a:xfrm>
-            <a:off x="0" y="6446520"/>
-            <a:ext cx="12191695" cy="17419320000"/>
-          </a:xfrm>
-          <a:prstGeom prst="rect">
-            <a:avLst/>
-          </a:prstGeom>
-          <a:solidFill>
-            <a:srgbClr val="E2E8F0"/>
-          </a:solidFill>
-          <a:ln>
-            <a:noFill/>
-          </a:ln>
-        </p:spPr>
-        <p:style>
-          <a:lnRef idx="1">
-            <a:schemeClr val="accent1"/>
-          </a:lnRef>
-          <a:fillRef idx="3">
-            <a:schemeClr val="accent1"/>
-          </a:fillRef>
-          <a:effectRef idx="2">
-            <a:schemeClr val="accent1"/>
-          </a:effectRef>
-          <a:fontRef idx="minor">
-            <a:schemeClr val="lt1"/>
-          </a:fontRef>
-        </p:style>
-        <p:txBody>
-          <a:bodyPr rtlCol="0" anchor="ctr"/>
-          <a:lstStyle/>
-          <a:p>
-            <a:pPr algn="ctr"/>
-          </a:p>
-        </p:txBody>
-      </p:sp>
-      <p:sp>
-        <p:nvSpPr>
-          <p:cNvPr id="26" name="TextBox 25"/>
+          <p:cNvPr id="25" name="TextBox 24"/>
           <p:cNvSpPr txBox="1"/>
           <p:nvPr/>
         </p:nvSpPr>
@@ -7911,7 +8392,7 @@
       </p:sp>
       <p:sp>
         <p:nvSpPr>
-          <p:cNvPr id="27" name="TextBox 26"/>
+          <p:cNvPr id="26" name="TextBox 25"/>
           <p:cNvSpPr txBox="1"/>
           <p:nvPr/>
         </p:nvSpPr>
@@ -8167,11 +8648,7 @@
               </a:defRPr>
             </a:pPr>
             <a:r>
-              <a:t>Kerangka kerja menuju Sistem Pemerintahan</a:t>
-            </a:r>
-            <a:br/>
-            <a:r>
-              <a:t> Berbasis Elektronik yang matang</a:t>
+              <a:t>Kerangka kerja menuju Sistem Pemerintahan Berbasis Elektronik yang matang</a:t>
             </a:r>
           </a:p>
         </p:txBody>
@@ -8185,7 +8662,7 @@
         <p:spPr>
           <a:xfrm>
             <a:off x="548640" y="1371600"/>
-            <a:ext cx="109728" cy="4389120"/>
+            <a:ext cx="91440" cy="4572000"/>
           </a:xfrm>
           <a:prstGeom prst="rect">
             <a:avLst/>
@@ -8221,17 +8698,19 @@
       </p:sp>
       <p:sp>
         <p:nvSpPr>
-          <p:cNvPr id="8" name="Rectangle 7"/>
+          <p:cNvPr id="8" name="Rounded Rectangle 7"/>
           <p:cNvSpPr/>
           <p:nvPr/>
         </p:nvSpPr>
         <p:spPr>
           <a:xfrm>
-            <a:off x="548640" y="1371600"/>
-            <a:ext cx="1645920" cy="54864"/>
-          </a:xfrm>
-          <a:prstGeom prst="rect">
-            <a:avLst/>
+            <a:off x="868680" y="1600200"/>
+            <a:ext cx="457200" cy="457200"/>
+          </a:xfrm>
+          <a:prstGeom prst="roundRect">
+            <a:avLst>
+              <a:gd name="adj" fmla="val 15000"/>
+            </a:avLst>
           </a:prstGeom>
           <a:solidFill>
             <a:srgbClr val="1A5676"/>
@@ -8264,20 +8743,56 @@
       </p:sp>
       <p:sp>
         <p:nvSpPr>
-          <p:cNvPr id="9" name="Rectangle 8"/>
+          <p:cNvPr id="9" name="TextBox 8"/>
+          <p:cNvSpPr txBox="1"/>
+          <p:nvPr/>
+        </p:nvSpPr>
+        <p:spPr>
+          <a:xfrm>
+            <a:off x="868680" y="1668780"/>
+            <a:ext cx="457200" cy="320040"/>
+          </a:xfrm>
+          <a:prstGeom prst="rect">
+            <a:avLst/>
+          </a:prstGeom>
+          <a:noFill/>
+        </p:spPr>
+        <p:txBody>
+          <a:bodyPr wrap="square">
+            <a:spAutoFit/>
+          </a:bodyPr>
+          <a:lstStyle/>
+          <a:p>
+            <a:pPr algn="ctr">
+              <a:defRPr sz="1600">
+                <a:solidFill>
+                  <a:srgbClr val="FFFFFF"/>
+                </a:solidFill>
+                <a:latin typeface="Calibri"/>
+              </a:defRPr>
+            </a:pPr>
+            <a:r>
+              <a:t>⚙</a:t>
+            </a:r>
+          </a:p>
+        </p:txBody>
+      </p:sp>
+      <p:sp>
+        <p:nvSpPr>
+          <p:cNvPr id="10" name="Rectangle 9"/>
           <p:cNvSpPr/>
           <p:nvPr/>
         </p:nvSpPr>
         <p:spPr>
           <a:xfrm>
-            <a:off x="914400" y="1645920"/>
-            <a:ext cx="457200" cy="457200"/>
-          </a:xfrm>
-          <a:prstGeom prst="rect">
-            <a:avLst/>
-          </a:prstGeom>
-          <a:solidFill>
-            <a:srgbClr val="1A5676"/>
+            <a:off x="1078992" y="2103120"/>
+            <a:ext cx="17419320000" cy="502920"/>
+          </a:xfrm>
+          <a:prstGeom prst="rect">
+            <a:avLst/>
+          </a:prstGeom>
+          <a:solidFill>
+            <a:srgbClr val="E2E8F0"/>
           </a:solidFill>
           <a:ln>
             <a:noFill/>
@@ -8307,14 +8822,14 @@
       </p:sp>
       <p:sp>
         <p:nvSpPr>
-          <p:cNvPr id="10" name="TextBox 9"/>
+          <p:cNvPr id="11" name="TextBox 10"/>
           <p:cNvSpPr txBox="1"/>
           <p:nvPr/>
         </p:nvSpPr>
         <p:spPr>
           <a:xfrm>
-            <a:off x="914400" y="1700784"/>
-            <a:ext cx="457200" cy="365760"/>
+            <a:off x="1554480" y="1618488"/>
+            <a:ext cx="9814255" cy="731520"/>
           </a:xfrm>
           <a:prstGeom prst="rect">
             <a:avLst/>
@@ -8327,43 +8842,26 @@
           </a:bodyPr>
           <a:lstStyle/>
           <a:p>
-            <a:pPr algn="ctr">
-              <a:defRPr sz="1800" b="1">
-                <a:solidFill>
-                  <a:srgbClr val="FFFFFF"/>
+            <a:pPr>
+              <a:spcAft>
+                <a:spcPts val="100"/>
+              </a:spcAft>
+              <a:defRPr sz="1400" b="1">
+                <a:solidFill>
+                  <a:srgbClr val="1E293B"/>
                 </a:solidFill>
                 <a:latin typeface="Calibri"/>
               </a:defRPr>
             </a:pPr>
             <a:r>
-              <a:t>1</a:t>
-            </a:r>
-          </a:p>
-        </p:txBody>
-      </p:sp>
-      <p:sp>
-        <p:nvSpPr>
-          <p:cNvPr id="11" name="TextBox 10"/>
-          <p:cNvSpPr txBox="1"/>
-          <p:nvPr/>
-        </p:nvSpPr>
-        <p:spPr>
-          <a:xfrm>
-            <a:off x="1600200" y="1664208"/>
-            <a:ext cx="9814255" cy="731520"/>
-          </a:xfrm>
-          <a:prstGeom prst="rect">
-            <a:avLst/>
-          </a:prstGeom>
-          <a:noFill/>
-        </p:spPr>
-        <p:txBody>
-          <a:bodyPr wrap="square">
-            <a:spAutoFit/>
-          </a:bodyPr>
-          <a:lstStyle/>
-          <a:p>
-            <a:pPr algn="l">
+              <a:t>Menyusun strategi, roadmap, arsitektur,</a:t>
+            </a:r>
+          </a:p>
+          <a:p>
+            <a:pPr>
+              <a:spcAft>
+                <a:spcPts val="100"/>
+              </a:spcAft>
               <a:defRPr sz="1300" b="0">
                 <a:solidFill>
                   <a:srgbClr val="1E293B"/>
@@ -8372,31 +8870,29 @@
               </a:defRPr>
             </a:pPr>
             <a:r>
-              <a:t>Menyusun strategi, roadmap, arsitektur,</a:t>
-            </a:r>
-            <a:br/>
-            <a:r>
-              <a:t> dan peta rencana SPBE</a:t>
-            </a:r>
-          </a:p>
-        </p:txBody>
-      </p:sp>
-      <p:sp>
-        <p:nvSpPr>
-          <p:cNvPr id="12" name="Rectangle 11"/>
+              <a:t>dan peta rencana SPBE</a:t>
+            </a:r>
+          </a:p>
+        </p:txBody>
+      </p:sp>
+      <p:sp>
+        <p:nvSpPr>
+          <p:cNvPr id="12" name="Rounded Rectangle 11"/>
           <p:cNvSpPr/>
           <p:nvPr/>
         </p:nvSpPr>
         <p:spPr>
           <a:xfrm>
-            <a:off x="1143000" y="2148840"/>
-            <a:ext cx="17419320000" cy="457200"/>
-          </a:xfrm>
-          <a:prstGeom prst="rect">
-            <a:avLst/>
-          </a:prstGeom>
-          <a:solidFill>
-            <a:srgbClr val="E2E8F0"/>
+            <a:off x="868680" y="2651760"/>
+            <a:ext cx="457200" cy="457200"/>
+          </a:xfrm>
+          <a:prstGeom prst="roundRect">
+            <a:avLst>
+              <a:gd name="adj" fmla="val 15000"/>
+            </a:avLst>
+          </a:prstGeom>
+          <a:solidFill>
+            <a:srgbClr val="1A5676"/>
           </a:solidFill>
           <a:ln>
             <a:noFill/>
@@ -8426,20 +8922,56 @@
       </p:sp>
       <p:sp>
         <p:nvSpPr>
-          <p:cNvPr id="13" name="Rectangle 12"/>
+          <p:cNvPr id="13" name="TextBox 12"/>
+          <p:cNvSpPr txBox="1"/>
+          <p:nvPr/>
+        </p:nvSpPr>
+        <p:spPr>
+          <a:xfrm>
+            <a:off x="868680" y="2720340"/>
+            <a:ext cx="457200" cy="320040"/>
+          </a:xfrm>
+          <a:prstGeom prst="rect">
+            <a:avLst/>
+          </a:prstGeom>
+          <a:noFill/>
+        </p:spPr>
+        <p:txBody>
+          <a:bodyPr wrap="square">
+            <a:spAutoFit/>
+          </a:bodyPr>
+          <a:lstStyle/>
+          <a:p>
+            <a:pPr algn="ctr">
+              <a:defRPr sz="1600">
+                <a:solidFill>
+                  <a:srgbClr val="FFFFFF"/>
+                </a:solidFill>
+                <a:latin typeface="Calibri"/>
+              </a:defRPr>
+            </a:pPr>
+            <a:r>
+              <a:t>▸</a:t>
+            </a:r>
+          </a:p>
+        </p:txBody>
+      </p:sp>
+      <p:sp>
+        <p:nvSpPr>
+          <p:cNvPr id="14" name="Rectangle 13"/>
           <p:cNvSpPr/>
           <p:nvPr/>
         </p:nvSpPr>
         <p:spPr>
           <a:xfrm>
-            <a:off x="914400" y="2651760"/>
-            <a:ext cx="457200" cy="457200"/>
-          </a:xfrm>
-          <a:prstGeom prst="rect">
-            <a:avLst/>
-          </a:prstGeom>
-          <a:solidFill>
-            <a:srgbClr val="1A5676"/>
+            <a:off x="1078992" y="3154680"/>
+            <a:ext cx="17419320000" cy="502920"/>
+          </a:xfrm>
+          <a:prstGeom prst="rect">
+            <a:avLst/>
+          </a:prstGeom>
+          <a:solidFill>
+            <a:srgbClr val="E2E8F0"/>
           </a:solidFill>
           <a:ln>
             <a:noFill/>
@@ -8469,14 +9001,14 @@
       </p:sp>
       <p:sp>
         <p:nvSpPr>
-          <p:cNvPr id="14" name="TextBox 13"/>
+          <p:cNvPr id="15" name="TextBox 14"/>
           <p:cNvSpPr txBox="1"/>
           <p:nvPr/>
         </p:nvSpPr>
         <p:spPr>
           <a:xfrm>
-            <a:off x="914400" y="2706624"/>
-            <a:ext cx="457200" cy="365760"/>
+            <a:off x="1554480" y="2670048"/>
+            <a:ext cx="9814255" cy="731520"/>
           </a:xfrm>
           <a:prstGeom prst="rect">
             <a:avLst/>
@@ -8489,43 +9021,26 @@
           </a:bodyPr>
           <a:lstStyle/>
           <a:p>
-            <a:pPr algn="ctr">
-              <a:defRPr sz="1800" b="1">
-                <a:solidFill>
-                  <a:srgbClr val="FFFFFF"/>
+            <a:pPr>
+              <a:spcAft>
+                <a:spcPts val="100"/>
+              </a:spcAft>
+              <a:defRPr sz="1400" b="1">
+                <a:solidFill>
+                  <a:srgbClr val="1E293B"/>
                 </a:solidFill>
                 <a:latin typeface="Calibri"/>
               </a:defRPr>
             </a:pPr>
             <a:r>
-              <a:t>2</a:t>
-            </a:r>
-          </a:p>
-        </p:txBody>
-      </p:sp>
-      <p:sp>
-        <p:nvSpPr>
-          <p:cNvPr id="15" name="TextBox 14"/>
-          <p:cNvSpPr txBox="1"/>
-          <p:nvPr/>
-        </p:nvSpPr>
-        <p:spPr>
-          <a:xfrm>
-            <a:off x="1600200" y="2670048"/>
-            <a:ext cx="9814255" cy="731520"/>
-          </a:xfrm>
-          <a:prstGeom prst="rect">
-            <a:avLst/>
-          </a:prstGeom>
-          <a:noFill/>
-        </p:spPr>
-        <p:txBody>
-          <a:bodyPr wrap="square">
-            <a:spAutoFit/>
-          </a:bodyPr>
-          <a:lstStyle/>
-          <a:p>
-            <a:pPr algn="l">
+              <a:t>Melaksanakan &amp; mengoordinasikan</a:t>
+            </a:r>
+          </a:p>
+          <a:p>
+            <a:pPr>
+              <a:spcAft>
+                <a:spcPts val="100"/>
+              </a:spcAft>
               <a:defRPr sz="1300" b="0">
                 <a:solidFill>
                   <a:srgbClr val="1E293B"/>
@@ -8534,31 +9049,29 @@
               </a:defRPr>
             </a:pPr>
             <a:r>
-              <a:t>Melaksanakan dan mengoordinasikan program</a:t>
-            </a:r>
-            <a:br/>
-            <a:r>
-              <a:t> SPBE lintas perangkat daerah</a:t>
-            </a:r>
-          </a:p>
-        </p:txBody>
-      </p:sp>
-      <p:sp>
-        <p:nvSpPr>
-          <p:cNvPr id="16" name="Rectangle 15"/>
+              <a:t>program SPBE lintas perangkat daerah</a:t>
+            </a:r>
+          </a:p>
+        </p:txBody>
+      </p:sp>
+      <p:sp>
+        <p:nvSpPr>
+          <p:cNvPr id="16" name="Rounded Rectangle 15"/>
           <p:cNvSpPr/>
           <p:nvPr/>
         </p:nvSpPr>
         <p:spPr>
           <a:xfrm>
-            <a:off x="1143000" y="3154680"/>
-            <a:ext cx="17419320000" cy="457200"/>
-          </a:xfrm>
-          <a:prstGeom prst="rect">
-            <a:avLst/>
-          </a:prstGeom>
-          <a:solidFill>
-            <a:srgbClr val="E2E8F0"/>
+            <a:off x="868680" y="3703320"/>
+            <a:ext cx="457200" cy="457200"/>
+          </a:xfrm>
+          <a:prstGeom prst="roundRect">
+            <a:avLst>
+              <a:gd name="adj" fmla="val 15000"/>
+            </a:avLst>
+          </a:prstGeom>
+          <a:solidFill>
+            <a:srgbClr val="1A5676"/>
           </a:solidFill>
           <a:ln>
             <a:noFill/>
@@ -8588,20 +9101,56 @@
       </p:sp>
       <p:sp>
         <p:nvSpPr>
-          <p:cNvPr id="17" name="Rectangle 16"/>
+          <p:cNvPr id="17" name="TextBox 16"/>
+          <p:cNvSpPr txBox="1"/>
+          <p:nvPr/>
+        </p:nvSpPr>
+        <p:spPr>
+          <a:xfrm>
+            <a:off x="868680" y="3771900"/>
+            <a:ext cx="457200" cy="320040"/>
+          </a:xfrm>
+          <a:prstGeom prst="rect">
+            <a:avLst/>
+          </a:prstGeom>
+          <a:noFill/>
+        </p:spPr>
+        <p:txBody>
+          <a:bodyPr wrap="square">
+            <a:spAutoFit/>
+          </a:bodyPr>
+          <a:lstStyle/>
+          <a:p>
+            <a:pPr algn="ctr">
+              <a:defRPr sz="1600">
+                <a:solidFill>
+                  <a:srgbClr val="FFFFFF"/>
+                </a:solidFill>
+                <a:latin typeface="Calibri"/>
+              </a:defRPr>
+            </a:pPr>
+            <a:r>
+              <a:t>▣</a:t>
+            </a:r>
+          </a:p>
+        </p:txBody>
+      </p:sp>
+      <p:sp>
+        <p:nvSpPr>
+          <p:cNvPr id="18" name="Rectangle 17"/>
           <p:cNvSpPr/>
           <p:nvPr/>
         </p:nvSpPr>
         <p:spPr>
           <a:xfrm>
-            <a:off x="914400" y="3657600"/>
-            <a:ext cx="457200" cy="457200"/>
-          </a:xfrm>
-          <a:prstGeom prst="rect">
-            <a:avLst/>
-          </a:prstGeom>
-          <a:solidFill>
-            <a:srgbClr val="1A5676"/>
+            <a:off x="1078992" y="4206240"/>
+            <a:ext cx="17419320000" cy="502920"/>
+          </a:xfrm>
+          <a:prstGeom prst="rect">
+            <a:avLst/>
+          </a:prstGeom>
+          <a:solidFill>
+            <a:srgbClr val="E2E8F0"/>
           </a:solidFill>
           <a:ln>
             <a:noFill/>
@@ -8631,14 +9180,14 @@
       </p:sp>
       <p:sp>
         <p:nvSpPr>
-          <p:cNvPr id="18" name="TextBox 17"/>
+          <p:cNvPr id="19" name="TextBox 18"/>
           <p:cNvSpPr txBox="1"/>
           <p:nvPr/>
         </p:nvSpPr>
         <p:spPr>
           <a:xfrm>
-            <a:off x="914400" y="3712463"/>
-            <a:ext cx="457200" cy="365760"/>
+            <a:off x="1554480" y="3721607"/>
+            <a:ext cx="9814255" cy="731520"/>
           </a:xfrm>
           <a:prstGeom prst="rect">
             <a:avLst/>
@@ -8651,43 +9200,26 @@
           </a:bodyPr>
           <a:lstStyle/>
           <a:p>
-            <a:pPr algn="ctr">
-              <a:defRPr sz="1800" b="1">
-                <a:solidFill>
-                  <a:srgbClr val="FFFFFF"/>
+            <a:pPr>
+              <a:spcAft>
+                <a:spcPts val="100"/>
+              </a:spcAft>
+              <a:defRPr sz="1400" b="1">
+                <a:solidFill>
+                  <a:srgbClr val="1E293B"/>
                 </a:solidFill>
                 <a:latin typeface="Calibri"/>
               </a:defRPr>
             </a:pPr>
             <a:r>
-              <a:t>3</a:t>
-            </a:r>
-          </a:p>
-        </p:txBody>
-      </p:sp>
-      <p:sp>
-        <p:nvSpPr>
-          <p:cNvPr id="19" name="TextBox 18"/>
-          <p:cNvSpPr txBox="1"/>
-          <p:nvPr/>
-        </p:nvSpPr>
-        <p:spPr>
-          <a:xfrm>
-            <a:off x="1600200" y="3675887"/>
-            <a:ext cx="9814255" cy="731520"/>
-          </a:xfrm>
-          <a:prstGeom prst="rect">
-            <a:avLst/>
-          </a:prstGeom>
-          <a:noFill/>
-        </p:spPr>
-        <p:txBody>
-          <a:bodyPr wrap="square">
-            <a:spAutoFit/>
-          </a:bodyPr>
-          <a:lstStyle/>
-          <a:p>
-            <a:pPr algn="l">
+              <a:t>Mengembangkan kebijakan &amp;</a:t>
+            </a:r>
+          </a:p>
+          <a:p>
+            <a:pPr>
+              <a:spcAft>
+                <a:spcPts val="100"/>
+              </a:spcAft>
               <a:defRPr sz="1300" b="0">
                 <a:solidFill>
                   <a:srgbClr val="1E293B"/>
@@ -8696,31 +9228,29 @@
               </a:defRPr>
             </a:pPr>
             <a:r>
-              <a:t>Mengembangkan kebijakan dan</a:t>
-            </a:r>
-            <a:br/>
-            <a:r>
-              <a:t> tata kelola SPBE</a:t>
-            </a:r>
-          </a:p>
-        </p:txBody>
-      </p:sp>
-      <p:sp>
-        <p:nvSpPr>
-          <p:cNvPr id="20" name="Rectangle 19"/>
+              <a:t>tata kelola SPBE yang adaptif</a:t>
+            </a:r>
+          </a:p>
+        </p:txBody>
+      </p:sp>
+      <p:sp>
+        <p:nvSpPr>
+          <p:cNvPr id="20" name="Rounded Rectangle 19"/>
           <p:cNvSpPr/>
           <p:nvPr/>
         </p:nvSpPr>
         <p:spPr>
           <a:xfrm>
-            <a:off x="1143000" y="4160520"/>
-            <a:ext cx="17419320000" cy="457200"/>
-          </a:xfrm>
-          <a:prstGeom prst="rect">
-            <a:avLst/>
-          </a:prstGeom>
-          <a:solidFill>
-            <a:srgbClr val="E2E8F0"/>
+            <a:off x="868680" y="4754879"/>
+            <a:ext cx="457200" cy="457200"/>
+          </a:xfrm>
+          <a:prstGeom prst="roundRect">
+            <a:avLst>
+              <a:gd name="adj" fmla="val 15000"/>
+            </a:avLst>
+          </a:prstGeom>
+          <a:solidFill>
+            <a:srgbClr val="1A5676"/>
           </a:solidFill>
           <a:ln>
             <a:noFill/>
@@ -8750,20 +9280,111 @@
       </p:sp>
       <p:sp>
         <p:nvSpPr>
-          <p:cNvPr id="21" name="Rectangle 20"/>
+          <p:cNvPr id="21" name="TextBox 20"/>
+          <p:cNvSpPr txBox="1"/>
+          <p:nvPr/>
+        </p:nvSpPr>
+        <p:spPr>
+          <a:xfrm>
+            <a:off x="868680" y="4823459"/>
+            <a:ext cx="457200" cy="320040"/>
+          </a:xfrm>
+          <a:prstGeom prst="rect">
+            <a:avLst/>
+          </a:prstGeom>
+          <a:noFill/>
+        </p:spPr>
+        <p:txBody>
+          <a:bodyPr wrap="square">
+            <a:spAutoFit/>
+          </a:bodyPr>
+          <a:lstStyle/>
+          <a:p>
+            <a:pPr algn="ctr">
+              <a:defRPr sz="1600">
+                <a:solidFill>
+                  <a:srgbClr val="FFFFFF"/>
+                </a:solidFill>
+                <a:latin typeface="Calibri"/>
+              </a:defRPr>
+            </a:pPr>
+            <a:r>
+              <a:t>◆</a:t>
+            </a:r>
+          </a:p>
+        </p:txBody>
+      </p:sp>
+      <p:sp>
+        <p:nvSpPr>
+          <p:cNvPr id="22" name="TextBox 21"/>
+          <p:cNvSpPr txBox="1"/>
+          <p:nvPr/>
+        </p:nvSpPr>
+        <p:spPr>
+          <a:xfrm>
+            <a:off x="1554480" y="4773167"/>
+            <a:ext cx="9814255" cy="731520"/>
+          </a:xfrm>
+          <a:prstGeom prst="rect">
+            <a:avLst/>
+          </a:prstGeom>
+          <a:noFill/>
+        </p:spPr>
+        <p:txBody>
+          <a:bodyPr wrap="square">
+            <a:spAutoFit/>
+          </a:bodyPr>
+          <a:lstStyle/>
+          <a:p>
+            <a:pPr>
+              <a:spcAft>
+                <a:spcPts val="100"/>
+              </a:spcAft>
+              <a:defRPr sz="1400" b="1">
+                <a:solidFill>
+                  <a:srgbClr val="1E293B"/>
+                </a:solidFill>
+                <a:latin typeface="Calibri"/>
+              </a:defRPr>
+            </a:pPr>
+            <a:r>
+              <a:t>Monitoring, evaluasi, &amp; rekomendasi</a:t>
+            </a:r>
+          </a:p>
+          <a:p>
+            <a:pPr>
+              <a:spcAft>
+                <a:spcPts val="100"/>
+              </a:spcAft>
+              <a:defRPr sz="1300" b="0">
+                <a:solidFill>
+                  <a:srgbClr val="1E293B"/>
+                </a:solidFill>
+                <a:latin typeface="Calibri"/>
+              </a:defRPr>
+            </a:pPr>
+            <a:r>
+              <a:t>perbaikan SPBE berkelanjutan</a:t>
+            </a:r>
+          </a:p>
+        </p:txBody>
+      </p:sp>
+      <p:sp>
+        <p:nvSpPr>
+          <p:cNvPr id="23" name="Rectangle 22"/>
           <p:cNvSpPr/>
           <p:nvPr/>
         </p:nvSpPr>
         <p:spPr>
           <a:xfrm>
-            <a:off x="914400" y="4663440"/>
-            <a:ext cx="457200" cy="457200"/>
-          </a:xfrm>
-          <a:prstGeom prst="rect">
-            <a:avLst/>
-          </a:prstGeom>
-          <a:solidFill>
-            <a:srgbClr val="1A5676"/>
+            <a:off x="0" y="6446520"/>
+            <a:ext cx="12191695" cy="411480"/>
+          </a:xfrm>
+          <a:prstGeom prst="rect">
+            <a:avLst/>
+          </a:prstGeom>
+          <a:solidFill>
+            <a:srgbClr val="F8FAFC"/>
           </a:solidFill>
           <a:ln>
             <a:noFill/>
@@ -8793,82 +9414,6 @@
       </p:sp>
       <p:sp>
         <p:nvSpPr>
-          <p:cNvPr id="22" name="TextBox 21"/>
-          <p:cNvSpPr txBox="1"/>
-          <p:nvPr/>
-        </p:nvSpPr>
-        <p:spPr>
-          <a:xfrm>
-            <a:off x="914400" y="4718304"/>
-            <a:ext cx="457200" cy="365760"/>
-          </a:xfrm>
-          <a:prstGeom prst="rect">
-            <a:avLst/>
-          </a:prstGeom>
-          <a:noFill/>
-        </p:spPr>
-        <p:txBody>
-          <a:bodyPr wrap="square">
-            <a:spAutoFit/>
-          </a:bodyPr>
-          <a:lstStyle/>
-          <a:p>
-            <a:pPr algn="ctr">
-              <a:defRPr sz="1800" b="1">
-                <a:solidFill>
-                  <a:srgbClr val="FFFFFF"/>
-                </a:solidFill>
-                <a:latin typeface="Calibri"/>
-              </a:defRPr>
-            </a:pPr>
-            <a:r>
-              <a:t>4</a:t>
-            </a:r>
-          </a:p>
-        </p:txBody>
-      </p:sp>
-      <p:sp>
-        <p:nvSpPr>
-          <p:cNvPr id="23" name="TextBox 22"/>
-          <p:cNvSpPr txBox="1"/>
-          <p:nvPr/>
-        </p:nvSpPr>
-        <p:spPr>
-          <a:xfrm>
-            <a:off x="1600200" y="4681728"/>
-            <a:ext cx="9814255" cy="731520"/>
-          </a:xfrm>
-          <a:prstGeom prst="rect">
-            <a:avLst/>
-          </a:prstGeom>
-          <a:noFill/>
-        </p:spPr>
-        <p:txBody>
-          <a:bodyPr wrap="square">
-            <a:spAutoFit/>
-          </a:bodyPr>
-          <a:lstStyle/>
-          <a:p>
-            <a:pPr algn="l">
-              <a:defRPr sz="1300" b="0">
-                <a:solidFill>
-                  <a:srgbClr val="1E293B"/>
-                </a:solidFill>
-                <a:latin typeface="Calibri"/>
-              </a:defRPr>
-            </a:pPr>
-            <a:r>
-              <a:t>Monitoring, evaluasi, dan rekomendasi</a:t>
-            </a:r>
-            <a:br/>
-            <a:r>
-              <a:t> perbaikan berkelanjutan</a:t>
-            </a:r>
-          </a:p>
-        </p:txBody>
-      </p:sp>
-      <p:sp>
-        <p:nvSpPr>
           <p:cNvPr id="24" name="Rectangle 23"/>
           <p:cNvSpPr/>
           <p:nvPr/>
@@ -8876,13 +9421,13 @@
         <p:spPr>
           <a:xfrm>
             <a:off x="0" y="6446520"/>
-            <a:ext cx="12191695" cy="411480"/>
-          </a:xfrm>
-          <a:prstGeom prst="rect">
-            <a:avLst/>
-          </a:prstGeom>
-          <a:solidFill>
-            <a:srgbClr val="F8FAFC"/>
+            <a:ext cx="12191695" cy="17419320000"/>
+          </a:xfrm>
+          <a:prstGeom prst="rect">
+            <a:avLst/>
+          </a:prstGeom>
+          <a:solidFill>
+            <a:srgbClr val="E2E8F0"/>
           </a:solidFill>
           <a:ln>
             <a:noFill/>
@@ -8912,50 +9457,7 @@
       </p:sp>
       <p:sp>
         <p:nvSpPr>
-          <p:cNvPr id="25" name="Rectangle 24"/>
-          <p:cNvSpPr/>
-          <p:nvPr/>
-        </p:nvSpPr>
-        <p:spPr>
-          <a:xfrm>
-            <a:off x="0" y="6446520"/>
-            <a:ext cx="12191695" cy="17419320000"/>
-          </a:xfrm>
-          <a:prstGeom prst="rect">
-            <a:avLst/>
-          </a:prstGeom>
-          <a:solidFill>
-            <a:srgbClr val="E2E8F0"/>
-          </a:solidFill>
-          <a:ln>
-            <a:noFill/>
-          </a:ln>
-        </p:spPr>
-        <p:style>
-          <a:lnRef idx="1">
-            <a:schemeClr val="accent1"/>
-          </a:lnRef>
-          <a:fillRef idx="3">
-            <a:schemeClr val="accent1"/>
-          </a:fillRef>
-          <a:effectRef idx="2">
-            <a:schemeClr val="accent1"/>
-          </a:effectRef>
-          <a:fontRef idx="minor">
-            <a:schemeClr val="lt1"/>
-          </a:fontRef>
-        </p:style>
-        <p:txBody>
-          <a:bodyPr rtlCol="0" anchor="ctr"/>
-          <a:lstStyle/>
-          <a:p>
-            <a:pPr algn="ctr"/>
-          </a:p>
-        </p:txBody>
-      </p:sp>
-      <p:sp>
-        <p:nvSpPr>
-          <p:cNvPr id="26" name="TextBox 25"/>
+          <p:cNvPr id="25" name="TextBox 24"/>
           <p:cNvSpPr txBox="1"/>
           <p:nvPr/>
         </p:nvSpPr>
@@ -8991,7 +9493,7 @@
       </p:sp>
       <p:sp>
         <p:nvSpPr>
-          <p:cNvPr id="27" name="TextBox 26"/>
+          <p:cNvPr id="26" name="TextBox 25"/>
           <p:cNvSpPr txBox="1"/>
           <p:nvPr/>
         </p:nvSpPr>
@@ -9102,8 +9604,8 @@
         </p:nvSpPr>
         <p:spPr>
           <a:xfrm>
-            <a:off x="8534095" y="-457200"/>
-            <a:ext cx="4572000" cy="3657600"/>
+            <a:off x="8076895" y="-457200"/>
+            <a:ext cx="4572000" cy="4572000"/>
           </a:xfrm>
           <a:prstGeom prst="rect">
             <a:avLst/>
@@ -9145,8 +9647,8 @@
         </p:nvSpPr>
         <p:spPr>
           <a:xfrm>
-            <a:off x="9448495" y="3657600"/>
-            <a:ext cx="3200400" cy="3657600"/>
+            <a:off x="9265615" y="3657600"/>
+            <a:ext cx="3657600" cy="3657600"/>
           </a:xfrm>
           <a:prstGeom prst="rect">
             <a:avLst/>
@@ -9188,8 +9690,8 @@
         </p:nvSpPr>
         <p:spPr>
           <a:xfrm>
-            <a:off x="0" y="6629400"/>
-            <a:ext cx="12191695" cy="228600"/>
+            <a:off x="0" y="6601968"/>
+            <a:ext cx="12191695" cy="256032"/>
           </a:xfrm>
           <a:prstGeom prst="rect">
             <a:avLst/>
@@ -9225,92 +9727,22 @@
       </p:sp>
       <p:sp>
         <p:nvSpPr>
-          <p:cNvPr id="6" name="TextBox 5"/>
-          <p:cNvSpPr txBox="1"/>
-          <p:nvPr/>
-        </p:nvSpPr>
-        <p:spPr>
-          <a:xfrm>
-            <a:off x="548640" y="2011680"/>
-            <a:ext cx="11094415" cy="914400"/>
-          </a:xfrm>
-          <a:prstGeom prst="rect">
-            <a:avLst/>
-          </a:prstGeom>
-          <a:noFill/>
-        </p:spPr>
-        <p:txBody>
-          <a:bodyPr wrap="square">
-            <a:spAutoFit/>
-          </a:bodyPr>
-          <a:lstStyle/>
-          <a:p>
-            <a:pPr algn="ctr">
-              <a:defRPr sz="4400" b="1">
-                <a:solidFill>
-                  <a:srgbClr val="FFFFFF"/>
-                </a:solidFill>
-                <a:latin typeface="Calibri"/>
-              </a:defRPr>
-            </a:pPr>
-            <a:r>
-              <a:t>Terima Kasih</a:t>
-            </a:r>
-          </a:p>
-        </p:txBody>
-      </p:sp>
-      <p:sp>
-        <p:nvSpPr>
-          <p:cNvPr id="7" name="TextBox 6"/>
-          <p:cNvSpPr txBox="1"/>
-          <p:nvPr/>
-        </p:nvSpPr>
-        <p:spPr>
-          <a:xfrm>
-            <a:off x="548640" y="3108960"/>
-            <a:ext cx="11094415" cy="457200"/>
-          </a:xfrm>
-          <a:prstGeom prst="rect">
-            <a:avLst/>
-          </a:prstGeom>
-          <a:noFill/>
-        </p:spPr>
-        <p:txBody>
-          <a:bodyPr wrap="square">
-            <a:spAutoFit/>
-          </a:bodyPr>
-          <a:lstStyle/>
-          <a:p>
-            <a:pPr algn="ctr">
-              <a:defRPr sz="1800" b="0">
-                <a:solidFill>
-                  <a:srgbClr val="E6F7F5"/>
-                </a:solidFill>
-                <a:latin typeface="Calibri"/>
-              </a:defRPr>
-            </a:pPr>
-            <a:r>
-              <a:t>Bidang e-Government — Diskominfostandi Kota Bekasi</a:t>
-            </a:r>
-          </a:p>
-        </p:txBody>
-      </p:sp>
-      <p:sp>
-        <p:nvSpPr>
-          <p:cNvPr id="8" name="Rectangle 7"/>
+          <p:cNvPr id="6" name="Rounded Rectangle 5"/>
           <p:cNvSpPr/>
           <p:nvPr/>
         </p:nvSpPr>
         <p:spPr>
           <a:xfrm>
-            <a:off x="5181447" y="3749039"/>
-            <a:ext cx="1828800" cy="23225760000"/>
-          </a:xfrm>
-          <a:prstGeom prst="rect">
-            <a:avLst/>
-          </a:prstGeom>
-          <a:solidFill>
-            <a:srgbClr val="F59E0B"/>
+            <a:off x="5684367" y="1188720"/>
+            <a:ext cx="822960" cy="822960"/>
+          </a:xfrm>
+          <a:prstGeom prst="roundRect">
+            <a:avLst>
+              <a:gd name="adj" fmla="val 15000"/>
+            </a:avLst>
+          </a:prstGeom>
+          <a:solidFill>
+            <a:srgbClr val="0D9488"/>
           </a:solidFill>
           <a:ln>
             <a:noFill/>
@@ -9340,14 +9772,14 @@
       </p:sp>
       <p:sp>
         <p:nvSpPr>
-          <p:cNvPr id="9" name="TextBox 8"/>
+          <p:cNvPr id="7" name="TextBox 6"/>
           <p:cNvSpPr txBox="1"/>
           <p:nvPr/>
         </p:nvSpPr>
         <p:spPr>
           <a:xfrm>
-            <a:off x="548640" y="4023360"/>
-            <a:ext cx="11094415" cy="457200"/>
+            <a:off x="5684367" y="1312164"/>
+            <a:ext cx="822960" cy="576072"/>
           </a:xfrm>
           <a:prstGeom prst="rect">
             <a:avLst/>
@@ -9361,6 +9793,157 @@
           <a:lstStyle/>
           <a:p>
             <a:pPr algn="ctr">
+              <a:defRPr sz="3000">
+                <a:solidFill>
+                  <a:srgbClr val="FFFFFF"/>
+                </a:solidFill>
+                <a:latin typeface="Calibri"/>
+              </a:defRPr>
+            </a:pPr>
+            <a:r>
+              <a:t>◆</a:t>
+            </a:r>
+          </a:p>
+        </p:txBody>
+      </p:sp>
+      <p:sp>
+        <p:nvSpPr>
+          <p:cNvPr id="8" name="TextBox 7"/>
+          <p:cNvSpPr txBox="1"/>
+          <p:nvPr/>
+        </p:nvSpPr>
+        <p:spPr>
+          <a:xfrm>
+            <a:off x="548640" y="2286000"/>
+            <a:ext cx="11094415" cy="914400"/>
+          </a:xfrm>
+          <a:prstGeom prst="rect">
+            <a:avLst/>
+          </a:prstGeom>
+          <a:noFill/>
+        </p:spPr>
+        <p:txBody>
+          <a:bodyPr wrap="square">
+            <a:spAutoFit/>
+          </a:bodyPr>
+          <a:lstStyle/>
+          <a:p>
+            <a:pPr algn="ctr">
+              <a:defRPr sz="4400" b="1">
+                <a:solidFill>
+                  <a:srgbClr val="FFFFFF"/>
+                </a:solidFill>
+                <a:latin typeface="Calibri"/>
+              </a:defRPr>
+            </a:pPr>
+            <a:r>
+              <a:t>Terima Kasih</a:t>
+            </a:r>
+          </a:p>
+        </p:txBody>
+      </p:sp>
+      <p:sp>
+        <p:nvSpPr>
+          <p:cNvPr id="9" name="TextBox 8"/>
+          <p:cNvSpPr txBox="1"/>
+          <p:nvPr/>
+        </p:nvSpPr>
+        <p:spPr>
+          <a:xfrm>
+            <a:off x="548640" y="3291840"/>
+            <a:ext cx="11094415" cy="457200"/>
+          </a:xfrm>
+          <a:prstGeom prst="rect">
+            <a:avLst/>
+          </a:prstGeom>
+          <a:noFill/>
+        </p:spPr>
+        <p:txBody>
+          <a:bodyPr wrap="square">
+            <a:spAutoFit/>
+          </a:bodyPr>
+          <a:lstStyle/>
+          <a:p>
+            <a:pPr algn="ctr">
+              <a:defRPr sz="1800" b="0">
+                <a:solidFill>
+                  <a:srgbClr val="E6F7F5"/>
+                </a:solidFill>
+                <a:latin typeface="Calibri"/>
+              </a:defRPr>
+            </a:pPr>
+            <a:r>
+              <a:t>Bidang e-Government — Diskominfostandi Kota Bekasi</a:t>
+            </a:r>
+          </a:p>
+        </p:txBody>
+      </p:sp>
+      <p:sp>
+        <p:nvSpPr>
+          <p:cNvPr id="10" name="Rectangle 9"/>
+          <p:cNvSpPr/>
+          <p:nvPr/>
+        </p:nvSpPr>
+        <p:spPr>
+          <a:xfrm>
+            <a:off x="5181447" y="3931920"/>
+            <a:ext cx="1828800" cy="23225760000"/>
+          </a:xfrm>
+          <a:prstGeom prst="rect">
+            <a:avLst/>
+          </a:prstGeom>
+          <a:solidFill>
+            <a:srgbClr val="F59E0B"/>
+          </a:solidFill>
+          <a:ln>
+            <a:noFill/>
+          </a:ln>
+        </p:spPr>
+        <p:style>
+          <a:lnRef idx="1">
+            <a:schemeClr val="accent1"/>
+          </a:lnRef>
+          <a:fillRef idx="3">
+            <a:schemeClr val="accent1"/>
+          </a:fillRef>
+          <a:effectRef idx="2">
+            <a:schemeClr val="accent1"/>
+          </a:effectRef>
+          <a:fontRef idx="minor">
+            <a:schemeClr val="lt1"/>
+          </a:fontRef>
+        </p:style>
+        <p:txBody>
+          <a:bodyPr rtlCol="0" anchor="ctr"/>
+          <a:lstStyle/>
+          <a:p>
+            <a:pPr algn="ctr"/>
+          </a:p>
+        </p:txBody>
+      </p:sp>
+      <p:sp>
+        <p:nvSpPr>
+          <p:cNvPr id="11" name="TextBox 10"/>
+          <p:cNvSpPr txBox="1"/>
+          <p:nvPr/>
+        </p:nvSpPr>
+        <p:spPr>
+          <a:xfrm>
+            <a:off x="548640" y="4206240"/>
+            <a:ext cx="11094415" cy="457200"/>
+          </a:xfrm>
+          <a:prstGeom prst="rect">
+            <a:avLst/>
+          </a:prstGeom>
+          <a:noFill/>
+        </p:spPr>
+        <p:txBody>
+          <a:bodyPr wrap="square">
+            <a:spAutoFit/>
+          </a:bodyPr>
+          <a:lstStyle/>
+          <a:p>
+            <a:pPr algn="ctr">
               <a:defRPr sz="1200" b="0">
                 <a:solidFill>
                   <a:srgbClr val="94A3B8"/>
@@ -9373,7 +9956,7 @@
             </a:r>
             <a:br/>
             <a:r>
-              <a:t> terpadu, dan berkelanjutan"</a:t>
+              <a:t>terpadu, dan berkelanjutan"</a:t>
             </a:r>
           </a:p>
         </p:txBody>

--- a/RESUME_TUPOKSI_egov.pptx
+++ b/RESUME_TUPOKSI_egov.pptx
@@ -3239,14 +3239,14 @@
         </p:nvSpPr>
         <p:spPr>
           <a:xfrm>
-            <a:off x="-457200" y="5486400"/>
-            <a:ext cx="3200400" cy="1828800"/>
-          </a:xfrm>
-          <a:prstGeom prst="rect">
-            <a:avLst/>
-          </a:prstGeom>
-          <a:solidFill>
-            <a:srgbClr val="0F2A4A"/>
+            <a:off x="0" y="6601968"/>
+            <a:ext cx="12191695" cy="256032"/>
+          </a:xfrm>
+          <a:prstGeom prst="rect">
+            <a:avLst/>
+          </a:prstGeom>
+          <a:solidFill>
+            <a:srgbClr val="0D9488"/>
           </a:solidFill>
           <a:ln>
             <a:noFill/>
@@ -3276,20 +3276,20 @@
       </p:sp>
       <p:sp>
         <p:nvSpPr>
-          <p:cNvPr id="6" name="Rectangle 5"/>
-          <p:cNvSpPr/>
-          <p:nvPr/>
-        </p:nvSpPr>
-        <p:spPr>
-          <a:xfrm>
-            <a:off x="-457200" y="0"/>
-            <a:ext cx="2286000" cy="1371600"/>
-          </a:xfrm>
-          <a:prstGeom prst="rect">
-            <a:avLst/>
-          </a:prstGeom>
-          <a:solidFill>
-            <a:srgbClr val="0F2A4A"/>
+          <p:cNvPr id="6" name="Rounded Rectangle 5"/>
+          <p:cNvSpPr/>
+          <p:nvPr/>
+        </p:nvSpPr>
+        <p:spPr>
+          <a:xfrm>
+            <a:off x="822959" y="1371600"/>
+            <a:ext cx="731520" cy="731520"/>
+          </a:xfrm>
+          <a:prstGeom prst="roundRect">
+            <a:avLst/>
+          </a:prstGeom>
+          <a:solidFill>
+            <a:srgbClr val="0D9488"/>
           </a:solidFill>
           <a:ln>
             <a:noFill/>
@@ -3325,14 +3325,14 @@
         </p:nvSpPr>
         <p:spPr>
           <a:xfrm>
-            <a:off x="0" y="6601968"/>
-            <a:ext cx="12191695" cy="256032"/>
-          </a:xfrm>
-          <a:prstGeom prst="rect">
-            <a:avLst/>
-          </a:prstGeom>
-          <a:solidFill>
-            <a:srgbClr val="0D9488"/>
+            <a:off x="1005839" y="1554480"/>
+            <a:ext cx="365760" cy="365760"/>
+          </a:xfrm>
+          <a:prstGeom prst="rect">
+            <a:avLst/>
+          </a:prstGeom>
+          <a:solidFill>
+            <a:srgbClr val="FFFFFF"/>
           </a:solidFill>
           <a:ln>
             <a:noFill/>
@@ -3362,19 +3362,17 @@
       </p:sp>
       <p:sp>
         <p:nvSpPr>
-          <p:cNvPr id="8" name="Rounded Rectangle 7"/>
-          <p:cNvSpPr/>
-          <p:nvPr/>
-        </p:nvSpPr>
-        <p:spPr>
-          <a:xfrm>
-            <a:off x="548640" y="1463040"/>
-            <a:ext cx="640080" cy="640080"/>
-          </a:xfrm>
-          <a:prstGeom prst="roundRect">
-            <a:avLst>
-              <a:gd name="adj" fmla="val 15000"/>
-            </a:avLst>
+          <p:cNvPr id="8" name="Rectangle 7"/>
+          <p:cNvSpPr/>
+          <p:nvPr/>
+        </p:nvSpPr>
+        <p:spPr>
+          <a:xfrm>
+            <a:off x="1120139" y="1668780"/>
+            <a:ext cx="137160" cy="137160"/>
+          </a:xfrm>
+          <a:prstGeom prst="rect">
+            <a:avLst/>
           </a:prstGeom>
           <a:solidFill>
             <a:srgbClr val="0D9488"/>
@@ -3413,44 +3411,8 @@
         </p:nvSpPr>
         <p:spPr>
           <a:xfrm>
-            <a:off x="548640" y="1559052"/>
-            <a:ext cx="640080" cy="448055"/>
-          </a:xfrm>
-          <a:prstGeom prst="rect">
-            <a:avLst/>
-          </a:prstGeom>
-          <a:noFill/>
-        </p:spPr>
-        <p:txBody>
-          <a:bodyPr wrap="square">
-            <a:spAutoFit/>
-          </a:bodyPr>
-          <a:lstStyle/>
-          <a:p>
-            <a:pPr algn="ctr">
-              <a:defRPr sz="2200">
-                <a:solidFill>
-                  <a:srgbClr val="FFFFFF"/>
-                </a:solidFill>
-                <a:latin typeface="Calibri"/>
-              </a:defRPr>
-            </a:pPr>
-            <a:r>
-              <a:t>▣</a:t>
-            </a:r>
-          </a:p>
-        </p:txBody>
-      </p:sp>
-      <p:sp>
-        <p:nvSpPr>
-          <p:cNvPr id="10" name="TextBox 9"/>
-          <p:cNvSpPr txBox="1"/>
-          <p:nvPr/>
-        </p:nvSpPr>
-        <p:spPr>
-          <a:xfrm>
-            <a:off x="1463040" y="1463040"/>
-            <a:ext cx="9722815" cy="731520"/>
+            <a:off x="1920240" y="1463040"/>
+            <a:ext cx="9265615" cy="731520"/>
           </a:xfrm>
           <a:prstGeom prst="rect">
             <a:avLst/>
@@ -3479,13 +3441,13 @@
       </p:sp>
       <p:sp>
         <p:nvSpPr>
-          <p:cNvPr id="11" name="TextBox 10"/>
+          <p:cNvPr id="10" name="TextBox 9"/>
           <p:cNvSpPr txBox="1"/>
           <p:nvPr/>
         </p:nvSpPr>
         <p:spPr>
           <a:xfrm>
-            <a:off x="548640" y="2560320"/>
+            <a:off x="548640" y="2651760"/>
             <a:ext cx="11094415" cy="457200"/>
           </a:xfrm>
           <a:prstGeom prst="rect">
@@ -3515,13 +3477,13 @@
       </p:sp>
       <p:sp>
         <p:nvSpPr>
-          <p:cNvPr id="12" name="TextBox 11"/>
+          <p:cNvPr id="11" name="TextBox 10"/>
           <p:cNvSpPr txBox="1"/>
           <p:nvPr/>
         </p:nvSpPr>
         <p:spPr>
           <a:xfrm>
-            <a:off x="548640" y="3108960"/>
+            <a:off x="548640" y="3200400"/>
             <a:ext cx="11094415" cy="365760"/>
           </a:xfrm>
           <a:prstGeom prst="rect">
@@ -3551,13 +3513,13 @@
       </p:sp>
       <p:sp>
         <p:nvSpPr>
-          <p:cNvPr id="13" name="Rectangle 12"/>
-          <p:cNvSpPr/>
-          <p:nvPr/>
-        </p:nvSpPr>
-        <p:spPr>
-          <a:xfrm>
-            <a:off x="548640" y="3657600"/>
+          <p:cNvPr id="12" name="Rectangle 11"/>
+          <p:cNvSpPr/>
+          <p:nvPr/>
+        </p:nvSpPr>
+        <p:spPr>
+          <a:xfrm>
+            <a:off x="548640" y="3749039"/>
             <a:ext cx="2286000" cy="34838640000"/>
           </a:xfrm>
           <a:prstGeom prst="rect">
@@ -3594,13 +3556,13 @@
       </p:sp>
       <p:sp>
         <p:nvSpPr>
-          <p:cNvPr id="14" name="TextBox 13"/>
+          <p:cNvPr id="13" name="TextBox 12"/>
           <p:cNvSpPr txBox="1"/>
           <p:nvPr/>
         </p:nvSpPr>
         <p:spPr>
           <a:xfrm>
-            <a:off x="548640" y="3931920"/>
+            <a:off x="548640" y="4023360"/>
             <a:ext cx="11094415" cy="274320"/>
           </a:xfrm>
           <a:prstGeom prst="rect">
@@ -3863,8 +3825,8 @@
         </p:nvSpPr>
         <p:spPr>
           <a:xfrm>
-            <a:off x="548639" y="1417320"/>
-            <a:ext cx="3484778" cy="3657600"/>
+            <a:off x="548639" y="1371600"/>
+            <a:ext cx="3484778" cy="3840480"/>
           </a:xfrm>
           <a:prstGeom prst="roundRect">
             <a:avLst>
@@ -3910,7 +3872,7 @@
         </p:nvSpPr>
         <p:spPr>
           <a:xfrm>
-            <a:off x="548639" y="1417320"/>
+            <a:off x="548639" y="1371600"/>
             <a:ext cx="3484778" cy="73152"/>
           </a:xfrm>
           <a:prstGeom prst="rect">
@@ -3953,13 +3915,11 @@
         </p:nvSpPr>
         <p:spPr>
           <a:xfrm>
-            <a:off x="777239" y="1691640"/>
+            <a:off x="777239" y="1645920"/>
             <a:ext cx="502920" cy="502920"/>
           </a:xfrm>
           <a:prstGeom prst="roundRect">
-            <a:avLst>
-              <a:gd name="adj" fmla="val 15000"/>
-            </a:avLst>
+            <a:avLst/>
           </a:prstGeom>
           <a:solidFill>
             <a:srgbClr val="0A1628"/>
@@ -3992,50 +3952,100 @@
       </p:sp>
       <p:sp>
         <p:nvSpPr>
-          <p:cNvPr id="10" name="TextBox 9"/>
+          <p:cNvPr id="10" name="Rectangle 9"/>
+          <p:cNvSpPr/>
+          <p:nvPr/>
+        </p:nvSpPr>
+        <p:spPr>
+          <a:xfrm>
+            <a:off x="960119" y="1828800"/>
+            <a:ext cx="137160" cy="137160"/>
+          </a:xfrm>
+          <a:prstGeom prst="rect">
+            <a:avLst/>
+          </a:prstGeom>
+          <a:solidFill>
+            <a:srgbClr val="FFFFFF"/>
+          </a:solidFill>
+          <a:ln>
+            <a:noFill/>
+          </a:ln>
+        </p:spPr>
+        <p:style>
+          <a:lnRef idx="1">
+            <a:schemeClr val="accent1"/>
+          </a:lnRef>
+          <a:fillRef idx="3">
+            <a:schemeClr val="accent1"/>
+          </a:fillRef>
+          <a:effectRef idx="2">
+            <a:schemeClr val="accent1"/>
+          </a:effectRef>
+          <a:fontRef idx="minor">
+            <a:schemeClr val="lt1"/>
+          </a:fontRef>
+        </p:style>
+        <p:txBody>
+          <a:bodyPr rtlCol="0" anchor="ctr"/>
+          <a:lstStyle/>
+          <a:p>
+            <a:pPr algn="ctr"/>
+          </a:p>
+        </p:txBody>
+      </p:sp>
+      <p:sp>
+        <p:nvSpPr>
+          <p:cNvPr id="11" name="Rectangle 10"/>
+          <p:cNvSpPr/>
+          <p:nvPr/>
+        </p:nvSpPr>
+        <p:spPr>
+          <a:xfrm>
+            <a:off x="960119" y="1828800"/>
+            <a:ext cx="137160" cy="137160"/>
+          </a:xfrm>
+          <a:prstGeom prst="rect">
+            <a:avLst/>
+          </a:prstGeom>
+          <a:solidFill>
+            <a:srgbClr val="0A1628"/>
+          </a:solidFill>
+          <a:ln>
+            <a:noFill/>
+          </a:ln>
+        </p:spPr>
+        <p:style>
+          <a:lnRef idx="1">
+            <a:schemeClr val="accent1"/>
+          </a:lnRef>
+          <a:fillRef idx="3">
+            <a:schemeClr val="accent1"/>
+          </a:fillRef>
+          <a:effectRef idx="2">
+            <a:schemeClr val="accent1"/>
+          </a:effectRef>
+          <a:fontRef idx="minor">
+            <a:schemeClr val="lt1"/>
+          </a:fontRef>
+        </p:style>
+        <p:txBody>
+          <a:bodyPr rtlCol="0" anchor="ctr"/>
+          <a:lstStyle/>
+          <a:p>
+            <a:pPr algn="ctr"/>
+          </a:p>
+        </p:txBody>
+      </p:sp>
+      <p:sp>
+        <p:nvSpPr>
+          <p:cNvPr id="12" name="TextBox 11"/>
           <p:cNvSpPr txBox="1"/>
           <p:nvPr/>
         </p:nvSpPr>
         <p:spPr>
           <a:xfrm>
-            <a:off x="777239" y="1767078"/>
-            <a:ext cx="502920" cy="352044"/>
-          </a:xfrm>
-          <a:prstGeom prst="rect">
-            <a:avLst/>
-          </a:prstGeom>
-          <a:noFill/>
-        </p:spPr>
-        <p:txBody>
-          <a:bodyPr wrap="square">
-            <a:spAutoFit/>
-          </a:bodyPr>
-          <a:lstStyle/>
-          <a:p>
-            <a:pPr algn="ctr">
-              <a:defRPr sz="2000">
-                <a:solidFill>
-                  <a:srgbClr val="FFFFFF"/>
-                </a:solidFill>
-                <a:latin typeface="Calibri"/>
-              </a:defRPr>
-            </a:pPr>
-            <a:r>
-              <a:t>▣</a:t>
-            </a:r>
-          </a:p>
-        </p:txBody>
-      </p:sp>
-      <p:sp>
-        <p:nvSpPr>
-          <p:cNvPr id="11" name="TextBox 10"/>
-          <p:cNvSpPr txBox="1"/>
-          <p:nvPr/>
-        </p:nvSpPr>
-        <p:spPr>
-          <a:xfrm>
-            <a:off x="1417319" y="1737360"/>
-            <a:ext cx="548640" cy="274320"/>
+            <a:off x="1417319" y="1719072"/>
+            <a:ext cx="457200" cy="274320"/>
           </a:xfrm>
           <a:prstGeom prst="rect">
             <a:avLst/>
@@ -4064,13 +4074,13 @@
       </p:sp>
       <p:sp>
         <p:nvSpPr>
-          <p:cNvPr id="12" name="TextBox 11"/>
+          <p:cNvPr id="13" name="TextBox 12"/>
           <p:cNvSpPr txBox="1"/>
           <p:nvPr/>
         </p:nvSpPr>
         <p:spPr>
           <a:xfrm>
-            <a:off x="777239" y="2377440"/>
+            <a:off x="777239" y="2423160"/>
             <a:ext cx="3027578" cy="777240"/>
           </a:xfrm>
           <a:prstGeom prst="rect">
@@ -4104,13 +4114,13 @@
       </p:sp>
       <p:sp>
         <p:nvSpPr>
-          <p:cNvPr id="13" name="Rectangle 12"/>
-          <p:cNvSpPr/>
-          <p:nvPr/>
-        </p:nvSpPr>
-        <p:spPr>
-          <a:xfrm>
-            <a:off x="777239" y="3246120"/>
+          <p:cNvPr id="14" name="Rectangle 13"/>
+          <p:cNvSpPr/>
+          <p:nvPr/>
+        </p:nvSpPr>
+        <p:spPr>
+          <a:xfrm>
+            <a:off x="777239" y="3291840"/>
             <a:ext cx="3027578" cy="17419320000"/>
           </a:xfrm>
           <a:prstGeom prst="rect">
@@ -4147,14 +4157,14 @@
       </p:sp>
       <p:sp>
         <p:nvSpPr>
-          <p:cNvPr id="14" name="TextBox 13"/>
+          <p:cNvPr id="15" name="TextBox 14"/>
           <p:cNvSpPr txBox="1"/>
           <p:nvPr/>
         </p:nvSpPr>
         <p:spPr>
           <a:xfrm>
-            <a:off x="777239" y="3429000"/>
-            <a:ext cx="3027578" cy="1371600"/>
+            <a:off x="777239" y="3474720"/>
+            <a:ext cx="3027578" cy="1463040"/>
           </a:xfrm>
           <a:prstGeom prst="rect">
             <a:avLst/>
@@ -4195,14 +4205,14 @@
       </p:sp>
       <p:sp>
         <p:nvSpPr>
-          <p:cNvPr id="15" name="Rounded Rectangle 14"/>
-          <p:cNvSpPr/>
-          <p:nvPr/>
-        </p:nvSpPr>
-        <p:spPr>
-          <a:xfrm>
-            <a:off x="4353458" y="1417320"/>
-            <a:ext cx="3484778" cy="3657600"/>
+          <p:cNvPr id="16" name="Rounded Rectangle 15"/>
+          <p:cNvSpPr/>
+          <p:nvPr/>
+        </p:nvSpPr>
+        <p:spPr>
+          <a:xfrm>
+            <a:off x="4353458" y="1371600"/>
+            <a:ext cx="3484778" cy="3840480"/>
           </a:xfrm>
           <a:prstGeom prst="roundRect">
             <a:avLst>
@@ -4242,13 +4252,13 @@
       </p:sp>
       <p:sp>
         <p:nvSpPr>
-          <p:cNvPr id="16" name="Rectangle 15"/>
-          <p:cNvSpPr/>
-          <p:nvPr/>
-        </p:nvSpPr>
-        <p:spPr>
-          <a:xfrm>
-            <a:off x="4353458" y="1417320"/>
+          <p:cNvPr id="17" name="Rectangle 16"/>
+          <p:cNvSpPr/>
+          <p:nvPr/>
+        </p:nvSpPr>
+        <p:spPr>
+          <a:xfrm>
+            <a:off x="4353458" y="1371600"/>
             <a:ext cx="3484778" cy="73152"/>
           </a:xfrm>
           <a:prstGeom prst="rect">
@@ -4285,19 +4295,17 @@
       </p:sp>
       <p:sp>
         <p:nvSpPr>
-          <p:cNvPr id="17" name="Rounded Rectangle 16"/>
-          <p:cNvSpPr/>
-          <p:nvPr/>
-        </p:nvSpPr>
-        <p:spPr>
-          <a:xfrm>
-            <a:off x="4582058" y="1691640"/>
+          <p:cNvPr id="18" name="Pentagon 17"/>
+          <p:cNvSpPr/>
+          <p:nvPr/>
+        </p:nvSpPr>
+        <p:spPr>
+          <a:xfrm>
+            <a:off x="4582058" y="1645920"/>
             <a:ext cx="502920" cy="502920"/>
           </a:xfrm>
-          <a:prstGeom prst="roundRect">
-            <a:avLst>
-              <a:gd name="adj" fmla="val 15000"/>
-            </a:avLst>
+          <a:prstGeom prst="homePlate">
+            <a:avLst/>
           </a:prstGeom>
           <a:solidFill>
             <a:srgbClr val="1A5676"/>
@@ -4330,50 +4338,57 @@
       </p:sp>
       <p:sp>
         <p:nvSpPr>
-          <p:cNvPr id="18" name="TextBox 17"/>
+          <p:cNvPr id="19" name="Rectangle 18"/>
+          <p:cNvSpPr/>
+          <p:nvPr/>
+        </p:nvSpPr>
+        <p:spPr>
+          <a:xfrm>
+            <a:off x="4732934" y="1796796"/>
+            <a:ext cx="201168" cy="201168"/>
+          </a:xfrm>
+          <a:prstGeom prst="rect">
+            <a:avLst/>
+          </a:prstGeom>
+          <a:solidFill>
+            <a:srgbClr val="FFFFFF"/>
+          </a:solidFill>
+          <a:ln>
+            <a:noFill/>
+          </a:ln>
+        </p:spPr>
+        <p:style>
+          <a:lnRef idx="1">
+            <a:schemeClr val="accent1"/>
+          </a:lnRef>
+          <a:fillRef idx="3">
+            <a:schemeClr val="accent1"/>
+          </a:fillRef>
+          <a:effectRef idx="2">
+            <a:schemeClr val="accent1"/>
+          </a:effectRef>
+          <a:fontRef idx="minor">
+            <a:schemeClr val="lt1"/>
+          </a:fontRef>
+        </p:style>
+        <p:txBody>
+          <a:bodyPr rtlCol="0" anchor="ctr"/>
+          <a:lstStyle/>
+          <a:p>
+            <a:pPr algn="ctr"/>
+          </a:p>
+        </p:txBody>
+      </p:sp>
+      <p:sp>
+        <p:nvSpPr>
+          <p:cNvPr id="20" name="TextBox 19"/>
           <p:cNvSpPr txBox="1"/>
           <p:nvPr/>
         </p:nvSpPr>
         <p:spPr>
           <a:xfrm>
-            <a:off x="4582058" y="1767078"/>
-            <a:ext cx="502920" cy="352044"/>
-          </a:xfrm>
-          <a:prstGeom prst="rect">
-            <a:avLst/>
-          </a:prstGeom>
-          <a:noFill/>
-        </p:spPr>
-        <p:txBody>
-          <a:bodyPr wrap="square">
-            <a:spAutoFit/>
-          </a:bodyPr>
-          <a:lstStyle/>
-          <a:p>
-            <a:pPr algn="ctr">
-              <a:defRPr sz="2000">
-                <a:solidFill>
-                  <a:srgbClr val="FFFFFF"/>
-                </a:solidFill>
-                <a:latin typeface="Calibri"/>
-              </a:defRPr>
-            </a:pPr>
-            <a:r>
-              <a:t>⚙</a:t>
-            </a:r>
-          </a:p>
-        </p:txBody>
-      </p:sp>
-      <p:sp>
-        <p:nvSpPr>
-          <p:cNvPr id="19" name="TextBox 18"/>
-          <p:cNvSpPr txBox="1"/>
-          <p:nvPr/>
-        </p:nvSpPr>
-        <p:spPr>
-          <a:xfrm>
-            <a:off x="5222138" y="1737360"/>
-            <a:ext cx="548640" cy="274320"/>
+            <a:off x="5222138" y="1719072"/>
+            <a:ext cx="457200" cy="274320"/>
           </a:xfrm>
           <a:prstGeom prst="rect">
             <a:avLst/>
@@ -4402,13 +4417,13 @@
       </p:sp>
       <p:sp>
         <p:nvSpPr>
-          <p:cNvPr id="20" name="TextBox 19"/>
+          <p:cNvPr id="21" name="TextBox 20"/>
           <p:cNvSpPr txBox="1"/>
           <p:nvPr/>
         </p:nvSpPr>
         <p:spPr>
           <a:xfrm>
-            <a:off x="4582058" y="2377440"/>
+            <a:off x="4582058" y="2423160"/>
             <a:ext cx="3027578" cy="777240"/>
           </a:xfrm>
           <a:prstGeom prst="rect">
@@ -4438,13 +4453,13 @@
       </p:sp>
       <p:sp>
         <p:nvSpPr>
-          <p:cNvPr id="21" name="Rectangle 20"/>
-          <p:cNvSpPr/>
-          <p:nvPr/>
-        </p:nvSpPr>
-        <p:spPr>
-          <a:xfrm>
-            <a:off x="4582058" y="3246120"/>
+          <p:cNvPr id="22" name="Rectangle 21"/>
+          <p:cNvSpPr/>
+          <p:nvPr/>
+        </p:nvSpPr>
+        <p:spPr>
+          <a:xfrm>
+            <a:off x="4582058" y="3291840"/>
             <a:ext cx="3027578" cy="17419320000"/>
           </a:xfrm>
           <a:prstGeom prst="rect">
@@ -4481,14 +4496,14 @@
       </p:sp>
       <p:sp>
         <p:nvSpPr>
-          <p:cNvPr id="22" name="TextBox 21"/>
+          <p:cNvPr id="23" name="TextBox 22"/>
           <p:cNvSpPr txBox="1"/>
           <p:nvPr/>
         </p:nvSpPr>
         <p:spPr>
           <a:xfrm>
-            <a:off x="4582058" y="3429000"/>
-            <a:ext cx="3027578" cy="1371600"/>
+            <a:off x="4582058" y="3474720"/>
+            <a:ext cx="3027578" cy="1463040"/>
           </a:xfrm>
           <a:prstGeom prst="rect">
             <a:avLst/>
@@ -4529,14 +4544,14 @@
       </p:sp>
       <p:sp>
         <p:nvSpPr>
-          <p:cNvPr id="23" name="Rounded Rectangle 22"/>
-          <p:cNvSpPr/>
-          <p:nvPr/>
-        </p:nvSpPr>
-        <p:spPr>
-          <a:xfrm>
-            <a:off x="8158276" y="1417320"/>
-            <a:ext cx="3484778" cy="3657600"/>
+          <p:cNvPr id="24" name="Rounded Rectangle 23"/>
+          <p:cNvSpPr/>
+          <p:nvPr/>
+        </p:nvSpPr>
+        <p:spPr>
+          <a:xfrm>
+            <a:off x="8158276" y="1371600"/>
+            <a:ext cx="3484778" cy="3840480"/>
           </a:xfrm>
           <a:prstGeom prst="roundRect">
             <a:avLst>
@@ -4576,13 +4591,13 @@
       </p:sp>
       <p:sp>
         <p:nvSpPr>
-          <p:cNvPr id="24" name="Rectangle 23"/>
-          <p:cNvSpPr/>
-          <p:nvPr/>
-        </p:nvSpPr>
-        <p:spPr>
-          <a:xfrm>
-            <a:off x="8158276" y="1417320"/>
+          <p:cNvPr id="25" name="Rectangle 24"/>
+          <p:cNvSpPr/>
+          <p:nvPr/>
+        </p:nvSpPr>
+        <p:spPr>
+          <a:xfrm>
+            <a:off x="8158276" y="1371600"/>
             <a:ext cx="3484778" cy="73152"/>
           </a:xfrm>
           <a:prstGeom prst="rect">
@@ -4619,19 +4634,17 @@
       </p:sp>
       <p:sp>
         <p:nvSpPr>
-          <p:cNvPr id="25" name="Rounded Rectangle 24"/>
-          <p:cNvSpPr/>
-          <p:nvPr/>
-        </p:nvSpPr>
-        <p:spPr>
-          <a:xfrm>
-            <a:off x="8386876" y="1691640"/>
-            <a:ext cx="502920" cy="502920"/>
-          </a:xfrm>
-          <a:prstGeom prst="roundRect">
-            <a:avLst>
-              <a:gd name="adj" fmla="val 15000"/>
-            </a:avLst>
+          <p:cNvPr id="26" name="Rectangle 25"/>
+          <p:cNvSpPr/>
+          <p:nvPr/>
+        </p:nvSpPr>
+        <p:spPr>
+          <a:xfrm>
+            <a:off x="8386876" y="1796796"/>
+            <a:ext cx="502920" cy="352044"/>
+          </a:xfrm>
+          <a:prstGeom prst="rect">
+            <a:avLst/>
           </a:prstGeom>
           <a:solidFill>
             <a:srgbClr val="0D9488"/>
@@ -4664,50 +4677,100 @@
       </p:sp>
       <p:sp>
         <p:nvSpPr>
-          <p:cNvPr id="26" name="TextBox 25"/>
+          <p:cNvPr id="27" name="Isosceles Triangle 26"/>
+          <p:cNvSpPr/>
+          <p:nvPr/>
+        </p:nvSpPr>
+        <p:spPr>
+          <a:xfrm>
+            <a:off x="8386876" y="1645920"/>
+            <a:ext cx="502920" cy="251460"/>
+          </a:xfrm>
+          <a:prstGeom prst="triangle">
+            <a:avLst/>
+          </a:prstGeom>
+          <a:solidFill>
+            <a:srgbClr val="0D9488"/>
+          </a:solidFill>
+          <a:ln>
+            <a:noFill/>
+          </a:ln>
+        </p:spPr>
+        <p:style>
+          <a:lnRef idx="1">
+            <a:schemeClr val="accent1"/>
+          </a:lnRef>
+          <a:fillRef idx="3">
+            <a:schemeClr val="accent1"/>
+          </a:fillRef>
+          <a:effectRef idx="2">
+            <a:schemeClr val="accent1"/>
+          </a:effectRef>
+          <a:fontRef idx="minor">
+            <a:schemeClr val="lt1"/>
+          </a:fontRef>
+        </p:style>
+        <p:txBody>
+          <a:bodyPr rtlCol="0" anchor="ctr"/>
+          <a:lstStyle/>
+          <a:p>
+            <a:pPr algn="ctr"/>
+          </a:p>
+        </p:txBody>
+      </p:sp>
+      <p:sp>
+        <p:nvSpPr>
+          <p:cNvPr id="28" name="Rectangle 27"/>
+          <p:cNvSpPr/>
+          <p:nvPr/>
+        </p:nvSpPr>
+        <p:spPr>
+          <a:xfrm>
+            <a:off x="8537752" y="1897380"/>
+            <a:ext cx="75438" cy="75438"/>
+          </a:xfrm>
+          <a:prstGeom prst="rect">
+            <a:avLst/>
+          </a:prstGeom>
+          <a:solidFill>
+            <a:srgbClr val="FFFFFF"/>
+          </a:solidFill>
+          <a:ln>
+            <a:noFill/>
+          </a:ln>
+        </p:spPr>
+        <p:style>
+          <a:lnRef idx="1">
+            <a:schemeClr val="accent1"/>
+          </a:lnRef>
+          <a:fillRef idx="3">
+            <a:schemeClr val="accent1"/>
+          </a:fillRef>
+          <a:effectRef idx="2">
+            <a:schemeClr val="accent1"/>
+          </a:effectRef>
+          <a:fontRef idx="minor">
+            <a:schemeClr val="lt1"/>
+          </a:fontRef>
+        </p:style>
+        <p:txBody>
+          <a:bodyPr rtlCol="0" anchor="ctr"/>
+          <a:lstStyle/>
+          <a:p>
+            <a:pPr algn="ctr"/>
+          </a:p>
+        </p:txBody>
+      </p:sp>
+      <p:sp>
+        <p:nvSpPr>
+          <p:cNvPr id="29" name="TextBox 28"/>
           <p:cNvSpPr txBox="1"/>
           <p:nvPr/>
         </p:nvSpPr>
         <p:spPr>
           <a:xfrm>
-            <a:off x="8386876" y="1767078"/>
-            <a:ext cx="502920" cy="352044"/>
-          </a:xfrm>
-          <a:prstGeom prst="rect">
-            <a:avLst/>
-          </a:prstGeom>
-          <a:noFill/>
-        </p:spPr>
-        <p:txBody>
-          <a:bodyPr wrap="square">
-            <a:spAutoFit/>
-          </a:bodyPr>
-          <a:lstStyle/>
-          <a:p>
-            <a:pPr algn="ctr">
-              <a:defRPr sz="2000">
-                <a:solidFill>
-                  <a:srgbClr val="FFFFFF"/>
-                </a:solidFill>
-                <a:latin typeface="Calibri"/>
-              </a:defRPr>
-            </a:pPr>
-            <a:r>
-              <a:t>🏛</a:t>
-            </a:r>
-          </a:p>
-        </p:txBody>
-      </p:sp>
-      <p:sp>
-        <p:nvSpPr>
-          <p:cNvPr id="27" name="TextBox 26"/>
-          <p:cNvSpPr txBox="1"/>
-          <p:nvPr/>
-        </p:nvSpPr>
-        <p:spPr>
-          <a:xfrm>
-            <a:off x="9026956" y="1737360"/>
-            <a:ext cx="548640" cy="274320"/>
+            <a:off x="9026956" y="1719072"/>
+            <a:ext cx="457200" cy="274320"/>
           </a:xfrm>
           <a:prstGeom prst="rect">
             <a:avLst/>
@@ -4736,13 +4799,13 @@
       </p:sp>
       <p:sp>
         <p:nvSpPr>
-          <p:cNvPr id="28" name="TextBox 27"/>
+          <p:cNvPr id="30" name="TextBox 29"/>
           <p:cNvSpPr txBox="1"/>
           <p:nvPr/>
         </p:nvSpPr>
         <p:spPr>
           <a:xfrm>
-            <a:off x="8386876" y="2377440"/>
+            <a:off x="8386876" y="2423160"/>
             <a:ext cx="3027578" cy="777240"/>
           </a:xfrm>
           <a:prstGeom prst="rect">
@@ -4776,13 +4839,13 @@
       </p:sp>
       <p:sp>
         <p:nvSpPr>
-          <p:cNvPr id="29" name="Rectangle 28"/>
-          <p:cNvSpPr/>
-          <p:nvPr/>
-        </p:nvSpPr>
-        <p:spPr>
-          <a:xfrm>
-            <a:off x="8386876" y="3246120"/>
+          <p:cNvPr id="31" name="Rectangle 30"/>
+          <p:cNvSpPr/>
+          <p:nvPr/>
+        </p:nvSpPr>
+        <p:spPr>
+          <a:xfrm>
+            <a:off x="8386876" y="3291840"/>
             <a:ext cx="3027578" cy="17419320000"/>
           </a:xfrm>
           <a:prstGeom prst="rect">
@@ -4819,14 +4882,14 @@
       </p:sp>
       <p:sp>
         <p:nvSpPr>
-          <p:cNvPr id="30" name="TextBox 29"/>
+          <p:cNvPr id="32" name="TextBox 31"/>
           <p:cNvSpPr txBox="1"/>
           <p:nvPr/>
         </p:nvSpPr>
         <p:spPr>
           <a:xfrm>
-            <a:off x="8386876" y="3429000"/>
-            <a:ext cx="3027578" cy="1371600"/>
+            <a:off x="8386876" y="3474720"/>
+            <a:ext cx="3027578" cy="1463040"/>
           </a:xfrm>
           <a:prstGeom prst="rect">
             <a:avLst/>
@@ -4867,7 +4930,7 @@
       </p:sp>
       <p:sp>
         <p:nvSpPr>
-          <p:cNvPr id="31" name="Rectangle 30"/>
+          <p:cNvPr id="33" name="Rectangle 32"/>
           <p:cNvSpPr/>
           <p:nvPr/>
         </p:nvSpPr>
@@ -4910,7 +4973,7 @@
       </p:sp>
       <p:sp>
         <p:nvSpPr>
-          <p:cNvPr id="32" name="Rectangle 31"/>
+          <p:cNvPr id="34" name="Rectangle 33"/>
           <p:cNvSpPr/>
           <p:nvPr/>
         </p:nvSpPr>
@@ -4953,7 +5016,7 @@
       </p:sp>
       <p:sp>
         <p:nvSpPr>
-          <p:cNvPr id="33" name="TextBox 32"/>
+          <p:cNvPr id="35" name="TextBox 34"/>
           <p:cNvSpPr txBox="1"/>
           <p:nvPr/>
         </p:nvSpPr>
@@ -4989,7 +5052,7 @@
       </p:sp>
       <p:sp>
         <p:nvSpPr>
-          <p:cNvPr id="34" name="TextBox 33"/>
+          <p:cNvPr id="36" name="TextBox 35"/>
           <p:cNvSpPr txBox="1"/>
           <p:nvPr/>
         </p:nvSpPr>
@@ -5299,19 +5362,17 @@
       </p:sp>
       <p:sp>
         <p:nvSpPr>
-          <p:cNvPr id="8" name="Rounded Rectangle 7"/>
+          <p:cNvPr id="8" name="Diamond 7"/>
           <p:cNvSpPr/>
           <p:nvPr/>
         </p:nvSpPr>
         <p:spPr>
           <a:xfrm>
             <a:off x="777239" y="1691640"/>
-            <a:ext cx="594360" cy="594360"/>
-          </a:xfrm>
-          <a:prstGeom prst="roundRect">
-            <a:avLst>
-              <a:gd name="adj" fmla="val 15000"/>
-            </a:avLst>
+            <a:ext cx="548640" cy="548640"/>
+          </a:xfrm>
+          <a:prstGeom prst="diamond">
+            <a:avLst/>
           </a:prstGeom>
           <a:solidFill>
             <a:srgbClr val="0A1628"/>
@@ -5344,37 +5405,44 @@
       </p:sp>
       <p:sp>
         <p:nvSpPr>
-          <p:cNvPr id="9" name="TextBox 8"/>
-          <p:cNvSpPr txBox="1"/>
-          <p:nvPr/>
-        </p:nvSpPr>
-        <p:spPr>
-          <a:xfrm>
-            <a:off x="777239" y="1780794"/>
-            <a:ext cx="594360" cy="416051"/>
-          </a:xfrm>
-          <a:prstGeom prst="rect">
-            <a:avLst/>
-          </a:prstGeom>
-          <a:noFill/>
-        </p:spPr>
-        <p:txBody>
-          <a:bodyPr wrap="square">
-            <a:spAutoFit/>
-          </a:bodyPr>
-          <a:lstStyle/>
-          <a:p>
-            <a:pPr algn="ctr">
-              <a:defRPr sz="2200">
-                <a:solidFill>
-                  <a:srgbClr val="FFFFFF"/>
-                </a:solidFill>
-                <a:latin typeface="Calibri"/>
-              </a:defRPr>
-            </a:pPr>
-            <a:r>
-              <a:t>🌐</a:t>
-            </a:r>
+          <p:cNvPr id="9" name="Rectangle 8"/>
+          <p:cNvSpPr/>
+          <p:nvPr/>
+        </p:nvSpPr>
+        <p:spPr>
+          <a:xfrm>
+            <a:off x="777239" y="1922068"/>
+            <a:ext cx="548640" cy="87782"/>
+          </a:xfrm>
+          <a:prstGeom prst="rect">
+            <a:avLst/>
+          </a:prstGeom>
+          <a:solidFill>
+            <a:srgbClr val="FFFFFF"/>
+          </a:solidFill>
+          <a:ln>
+            <a:noFill/>
+          </a:ln>
+        </p:spPr>
+        <p:style>
+          <a:lnRef idx="1">
+            <a:schemeClr val="accent1"/>
+          </a:lnRef>
+          <a:fillRef idx="3">
+            <a:schemeClr val="accent1"/>
+          </a:fillRef>
+          <a:effectRef idx="2">
+            <a:schemeClr val="accent1"/>
+          </a:effectRef>
+          <a:fontRef idx="minor">
+            <a:schemeClr val="lt1"/>
+          </a:fontRef>
+        </p:style>
+        <p:txBody>
+          <a:bodyPr rtlCol="0" anchor="ctr"/>
+          <a:lstStyle/>
+          <a:p>
+            <a:pPr algn="ctr"/>
           </a:p>
         </p:txBody>
       </p:sp>
@@ -5449,7 +5517,7 @@
             </a:r>
             <a:br/>
             <a:r>
-              <a:t>sebagai pusat informasi &amp; layanan publik</a:t>
+              <a:t>sebagai pusat info &amp; layanan publik</a:t>
             </a:r>
           </a:p>
         </p:txBody>
@@ -5509,13 +5577,11 @@
         </p:nvSpPr>
         <p:spPr>
           <a:xfrm>
-            <a:off x="6507327" y="1691640"/>
-            <a:ext cx="594360" cy="594360"/>
+            <a:off x="6630771" y="1691640"/>
+            <a:ext cx="301752" cy="548640"/>
           </a:xfrm>
           <a:prstGeom prst="roundRect">
-            <a:avLst>
-              <a:gd name="adj" fmla="val 15000"/>
-            </a:avLst>
+            <a:avLst/>
           </a:prstGeom>
           <a:solidFill>
             <a:srgbClr val="1A5676"/>
@@ -5548,43 +5614,93 @@
       </p:sp>
       <p:sp>
         <p:nvSpPr>
-          <p:cNvPr id="14" name="TextBox 13"/>
-          <p:cNvSpPr txBox="1"/>
-          <p:nvPr/>
-        </p:nvSpPr>
-        <p:spPr>
-          <a:xfrm>
-            <a:off x="6507327" y="1780794"/>
-            <a:ext cx="594360" cy="416051"/>
-          </a:xfrm>
-          <a:prstGeom prst="rect">
-            <a:avLst/>
-          </a:prstGeom>
-          <a:noFill/>
-        </p:spPr>
-        <p:txBody>
-          <a:bodyPr wrap="square">
-            <a:spAutoFit/>
-          </a:bodyPr>
-          <a:lstStyle/>
-          <a:p>
-            <a:pPr algn="ctr">
-              <a:defRPr sz="2200">
-                <a:solidFill>
-                  <a:srgbClr val="FFFFFF"/>
-                </a:solidFill>
-                <a:latin typeface="Calibri"/>
-              </a:defRPr>
-            </a:pPr>
-            <a:r>
-              <a:t>📱</a:t>
-            </a:r>
-          </a:p>
-        </p:txBody>
-      </p:sp>
-      <p:sp>
-        <p:nvSpPr>
-          <p:cNvPr id="15" name="TextBox 14"/>
+          <p:cNvPr id="14" name="Rectangle 13"/>
+          <p:cNvSpPr/>
+          <p:nvPr/>
+        </p:nvSpPr>
+        <p:spPr>
+          <a:xfrm>
+            <a:off x="6740499" y="1911095"/>
+            <a:ext cx="82296" cy="164592"/>
+          </a:xfrm>
+          <a:prstGeom prst="rect">
+            <a:avLst/>
+          </a:prstGeom>
+          <a:solidFill>
+            <a:srgbClr val="FFFFFF"/>
+          </a:solidFill>
+          <a:ln>
+            <a:noFill/>
+          </a:ln>
+        </p:spPr>
+        <p:style>
+          <a:lnRef idx="1">
+            <a:schemeClr val="accent1"/>
+          </a:lnRef>
+          <a:fillRef idx="3">
+            <a:schemeClr val="accent1"/>
+          </a:fillRef>
+          <a:effectRef idx="2">
+            <a:schemeClr val="accent1"/>
+          </a:effectRef>
+          <a:fontRef idx="minor">
+            <a:schemeClr val="lt1"/>
+          </a:fontRef>
+        </p:style>
+        <p:txBody>
+          <a:bodyPr rtlCol="0" anchor="ctr"/>
+          <a:lstStyle/>
+          <a:p>
+            <a:pPr algn="ctr"/>
+          </a:p>
+        </p:txBody>
+      </p:sp>
+      <p:sp>
+        <p:nvSpPr>
+          <p:cNvPr id="15" name="Rectangle 14"/>
+          <p:cNvSpPr/>
+          <p:nvPr/>
+        </p:nvSpPr>
+        <p:spPr>
+          <a:xfrm>
+            <a:off x="6721297" y="2130552"/>
+            <a:ext cx="120700" cy="87782"/>
+          </a:xfrm>
+          <a:prstGeom prst="rect">
+            <a:avLst/>
+          </a:prstGeom>
+          <a:solidFill>
+            <a:srgbClr val="FFFFFF"/>
+          </a:solidFill>
+          <a:ln>
+            <a:noFill/>
+          </a:ln>
+        </p:spPr>
+        <p:style>
+          <a:lnRef idx="1">
+            <a:schemeClr val="accent1"/>
+          </a:lnRef>
+          <a:fillRef idx="3">
+            <a:schemeClr val="accent1"/>
+          </a:fillRef>
+          <a:effectRef idx="2">
+            <a:schemeClr val="accent1"/>
+          </a:effectRef>
+          <a:fontRef idx="minor">
+            <a:schemeClr val="lt1"/>
+          </a:fontRef>
+        </p:style>
+        <p:txBody>
+          <a:bodyPr rtlCol="0" anchor="ctr"/>
+          <a:lstStyle/>
+          <a:p>
+            <a:pPr algn="ctr"/>
+          </a:p>
+        </p:txBody>
+      </p:sp>
+      <p:sp>
+        <p:nvSpPr>
+          <p:cNvPr id="16" name="TextBox 15"/>
           <p:cNvSpPr txBox="1"/>
           <p:nvPr/>
         </p:nvSpPr>
@@ -5620,7 +5736,7 @@
       </p:sp>
       <p:sp>
         <p:nvSpPr>
-          <p:cNvPr id="16" name="TextBox 15"/>
+          <p:cNvPr id="17" name="TextBox 16"/>
           <p:cNvSpPr txBox="1"/>
           <p:nvPr/>
         </p:nvSpPr>
@@ -5653,14 +5769,14 @@
             </a:r>
             <a:br/>
             <a:r>
-              <a:t>sebagai layanan kota cerdas terintegrasi</a:t>
-            </a:r>
-          </a:p>
-        </p:txBody>
-      </p:sp>
-      <p:sp>
-        <p:nvSpPr>
-          <p:cNvPr id="17" name="Rounded Rectangle 16"/>
+              <a:t>— layanan kota cerdas terintegrasi</a:t>
+            </a:r>
+          </a:p>
+        </p:txBody>
+      </p:sp>
+      <p:sp>
+        <p:nvSpPr>
+          <p:cNvPr id="18" name="Rounded Rectangle 17"/>
           <p:cNvSpPr/>
           <p:nvPr/>
         </p:nvSpPr>
@@ -5707,19 +5823,17 @@
       </p:sp>
       <p:sp>
         <p:nvSpPr>
-          <p:cNvPr id="18" name="Rounded Rectangle 17"/>
-          <p:cNvSpPr/>
-          <p:nvPr/>
-        </p:nvSpPr>
-        <p:spPr>
-          <a:xfrm>
-            <a:off x="777239" y="3657600"/>
-            <a:ext cx="594360" cy="594360"/>
-          </a:xfrm>
-          <a:prstGeom prst="roundRect">
-            <a:avLst>
-              <a:gd name="adj" fmla="val 15000"/>
-            </a:avLst>
+          <p:cNvPr id="19" name="Rectangle 18"/>
+          <p:cNvSpPr/>
+          <p:nvPr/>
+        </p:nvSpPr>
+        <p:spPr>
+          <a:xfrm>
+            <a:off x="777239" y="3822191"/>
+            <a:ext cx="548640" cy="384048"/>
+          </a:xfrm>
+          <a:prstGeom prst="rect">
+            <a:avLst/>
           </a:prstGeom>
           <a:solidFill>
             <a:srgbClr val="0D9488"/>
@@ -5752,43 +5866,93 @@
       </p:sp>
       <p:sp>
         <p:nvSpPr>
-          <p:cNvPr id="19" name="TextBox 18"/>
-          <p:cNvSpPr txBox="1"/>
-          <p:nvPr/>
-        </p:nvSpPr>
-        <p:spPr>
-          <a:xfrm>
-            <a:off x="777239" y="3746754"/>
-            <a:ext cx="594360" cy="416051"/>
-          </a:xfrm>
-          <a:prstGeom prst="rect">
-            <a:avLst/>
-          </a:prstGeom>
-          <a:noFill/>
-        </p:spPr>
-        <p:txBody>
-          <a:bodyPr wrap="square">
-            <a:spAutoFit/>
-          </a:bodyPr>
-          <a:lstStyle/>
-          <a:p>
-            <a:pPr algn="ctr">
-              <a:defRPr sz="2200">
-                <a:solidFill>
-                  <a:srgbClr val="FFFFFF"/>
-                </a:solidFill>
-                <a:latin typeface="Calibri"/>
-              </a:defRPr>
-            </a:pPr>
-            <a:r>
-              <a:t>🏛</a:t>
-            </a:r>
-          </a:p>
-        </p:txBody>
-      </p:sp>
-      <p:sp>
-        <p:nvSpPr>
-          <p:cNvPr id="20" name="TextBox 19"/>
+          <p:cNvPr id="20" name="Isosceles Triangle 19"/>
+          <p:cNvSpPr/>
+          <p:nvPr/>
+        </p:nvSpPr>
+        <p:spPr>
+          <a:xfrm>
+            <a:off x="777239" y="3657600"/>
+            <a:ext cx="548640" cy="274320"/>
+          </a:xfrm>
+          <a:prstGeom prst="triangle">
+            <a:avLst/>
+          </a:prstGeom>
+          <a:solidFill>
+            <a:srgbClr val="0D9488"/>
+          </a:solidFill>
+          <a:ln>
+            <a:noFill/>
+          </a:ln>
+        </p:spPr>
+        <p:style>
+          <a:lnRef idx="1">
+            <a:schemeClr val="accent1"/>
+          </a:lnRef>
+          <a:fillRef idx="3">
+            <a:schemeClr val="accent1"/>
+          </a:fillRef>
+          <a:effectRef idx="2">
+            <a:schemeClr val="accent1"/>
+          </a:effectRef>
+          <a:fontRef idx="minor">
+            <a:schemeClr val="lt1"/>
+          </a:fontRef>
+        </p:style>
+        <p:txBody>
+          <a:bodyPr rtlCol="0" anchor="ctr"/>
+          <a:lstStyle/>
+          <a:p>
+            <a:pPr algn="ctr"/>
+          </a:p>
+        </p:txBody>
+      </p:sp>
+      <p:sp>
+        <p:nvSpPr>
+          <p:cNvPr id="21" name="Rectangle 20"/>
+          <p:cNvSpPr/>
+          <p:nvPr/>
+        </p:nvSpPr>
+        <p:spPr>
+          <a:xfrm>
+            <a:off x="941831" y="3931920"/>
+            <a:ext cx="82296" cy="82296"/>
+          </a:xfrm>
+          <a:prstGeom prst="rect">
+            <a:avLst/>
+          </a:prstGeom>
+          <a:solidFill>
+            <a:srgbClr val="FFFFFF"/>
+          </a:solidFill>
+          <a:ln>
+            <a:noFill/>
+          </a:ln>
+        </p:spPr>
+        <p:style>
+          <a:lnRef idx="1">
+            <a:schemeClr val="accent1"/>
+          </a:lnRef>
+          <a:fillRef idx="3">
+            <a:schemeClr val="accent1"/>
+          </a:fillRef>
+          <a:effectRef idx="2">
+            <a:schemeClr val="accent1"/>
+          </a:effectRef>
+          <a:fontRef idx="minor">
+            <a:schemeClr val="lt1"/>
+          </a:fontRef>
+        </p:style>
+        <p:txBody>
+          <a:bodyPr rtlCol="0" anchor="ctr"/>
+          <a:lstStyle/>
+          <a:p>
+            <a:pPr algn="ctr"/>
+          </a:p>
+        </p:txBody>
+      </p:sp>
+      <p:sp>
+        <p:nvSpPr>
+          <p:cNvPr id="22" name="TextBox 21"/>
           <p:cNvSpPr txBox="1"/>
           <p:nvPr/>
         </p:nvSpPr>
@@ -5824,7 +5988,7 @@
       </p:sp>
       <p:sp>
         <p:nvSpPr>
-          <p:cNvPr id="21" name="TextBox 20"/>
+          <p:cNvPr id="23" name="TextBox 22"/>
           <p:cNvSpPr txBox="1"/>
           <p:nvPr/>
         </p:nvSpPr>
@@ -5864,7 +6028,7 @@
       </p:sp>
       <p:sp>
         <p:nvSpPr>
-          <p:cNvPr id="22" name="Rounded Rectangle 21"/>
+          <p:cNvPr id="24" name="Rounded Rectangle 23"/>
           <p:cNvSpPr/>
           <p:nvPr/>
         </p:nvSpPr>
@@ -5911,19 +6075,17 @@
       </p:sp>
       <p:sp>
         <p:nvSpPr>
-          <p:cNvPr id="23" name="Rounded Rectangle 22"/>
+          <p:cNvPr id="25" name="Parallelogram 24"/>
           <p:cNvSpPr/>
           <p:nvPr/>
         </p:nvSpPr>
         <p:spPr>
           <a:xfrm>
             <a:off x="6507327" y="3657600"/>
-            <a:ext cx="594360" cy="594360"/>
-          </a:xfrm>
-          <a:prstGeom prst="roundRect">
-            <a:avLst>
-              <a:gd name="adj" fmla="val 15000"/>
-            </a:avLst>
+            <a:ext cx="384048" cy="548640"/>
+          </a:xfrm>
+          <a:prstGeom prst="parallelogram">
+            <a:avLst/>
           </a:prstGeom>
           <a:solidFill>
             <a:srgbClr val="F59E0B"/>
@@ -5956,43 +6118,50 @@
       </p:sp>
       <p:sp>
         <p:nvSpPr>
-          <p:cNvPr id="24" name="TextBox 23"/>
-          <p:cNvSpPr txBox="1"/>
-          <p:nvPr/>
-        </p:nvSpPr>
-        <p:spPr>
-          <a:xfrm>
-            <a:off x="6507327" y="3746754"/>
-            <a:ext cx="594360" cy="416051"/>
-          </a:xfrm>
-          <a:prstGeom prst="rect">
-            <a:avLst/>
-          </a:prstGeom>
-          <a:noFill/>
-        </p:spPr>
-        <p:txBody>
-          <a:bodyPr wrap="square">
-            <a:spAutoFit/>
-          </a:bodyPr>
-          <a:lstStyle/>
-          <a:p>
-            <a:pPr algn="ctr">
-              <a:defRPr sz="2200">
-                <a:solidFill>
-                  <a:srgbClr val="FFFFFF"/>
-                </a:solidFill>
-                <a:latin typeface="Calibri"/>
-              </a:defRPr>
-            </a:pPr>
-            <a:r>
-              <a:t>🔗</a:t>
-            </a:r>
-          </a:p>
-        </p:txBody>
-      </p:sp>
-      <p:sp>
-        <p:nvSpPr>
-          <p:cNvPr id="25" name="TextBox 24"/>
+          <p:cNvPr id="26" name="Parallelogram 25"/>
+          <p:cNvSpPr/>
+          <p:nvPr/>
+        </p:nvSpPr>
+        <p:spPr>
+          <a:xfrm>
+            <a:off x="6671919" y="3657600"/>
+            <a:ext cx="384048" cy="548640"/>
+          </a:xfrm>
+          <a:prstGeom prst="parallelogram">
+            <a:avLst/>
+          </a:prstGeom>
+          <a:solidFill>
+            <a:srgbClr val="FFFFFF"/>
+          </a:solidFill>
+          <a:ln>
+            <a:noFill/>
+          </a:ln>
+        </p:spPr>
+        <p:style>
+          <a:lnRef idx="1">
+            <a:schemeClr val="accent1"/>
+          </a:lnRef>
+          <a:fillRef idx="3">
+            <a:schemeClr val="accent1"/>
+          </a:fillRef>
+          <a:effectRef idx="2">
+            <a:schemeClr val="accent1"/>
+          </a:effectRef>
+          <a:fontRef idx="minor">
+            <a:schemeClr val="lt1"/>
+          </a:fontRef>
+        </p:style>
+        <p:txBody>
+          <a:bodyPr rtlCol="0" anchor="ctr"/>
+          <a:lstStyle/>
+          <a:p>
+            <a:pPr algn="ctr"/>
+          </a:p>
+        </p:txBody>
+      </p:sp>
+      <p:sp>
+        <p:nvSpPr>
+          <p:cNvPr id="27" name="TextBox 26"/>
           <p:cNvSpPr txBox="1"/>
           <p:nvPr/>
         </p:nvSpPr>
@@ -6028,7 +6197,7 @@
       </p:sp>
       <p:sp>
         <p:nvSpPr>
-          <p:cNvPr id="26" name="TextBox 25"/>
+          <p:cNvPr id="28" name="TextBox 27"/>
           <p:cNvSpPr txBox="1"/>
           <p:nvPr/>
         </p:nvSpPr>
@@ -6057,18 +6226,18 @@
               </a:defRPr>
             </a:pPr>
             <a:r>
-              <a:t>Sistem Penghubung Layanan Pemerintah</a:t>
+              <a:t>Sistem Penghubung Layanan</a:t>
             </a:r>
             <a:br/>
             <a:r>
-              <a:t>terintegrasi dengan Kemenkomdigi</a:t>
-            </a:r>
-          </a:p>
-        </p:txBody>
-      </p:sp>
-      <p:sp>
-        <p:nvSpPr>
-          <p:cNvPr id="27" name="Rectangle 26"/>
+              <a:t>Pemerintah — terintegrasi Kemenkomdigi</a:t>
+            </a:r>
+          </a:p>
+        </p:txBody>
+      </p:sp>
+      <p:sp>
+        <p:nvSpPr>
+          <p:cNvPr id="29" name="Rectangle 28"/>
           <p:cNvSpPr/>
           <p:nvPr/>
         </p:nvSpPr>
@@ -6111,7 +6280,7 @@
       </p:sp>
       <p:sp>
         <p:nvSpPr>
-          <p:cNvPr id="28" name="Rectangle 27"/>
+          <p:cNvPr id="30" name="Rectangle 29"/>
           <p:cNvSpPr/>
           <p:nvPr/>
         </p:nvSpPr>
@@ -6154,7 +6323,7 @@
       </p:sp>
       <p:sp>
         <p:nvSpPr>
-          <p:cNvPr id="29" name="TextBox 28"/>
+          <p:cNvPr id="31" name="TextBox 30"/>
           <p:cNvSpPr txBox="1"/>
           <p:nvPr/>
         </p:nvSpPr>
@@ -6190,7 +6359,7 @@
       </p:sp>
       <p:sp>
         <p:nvSpPr>
-          <p:cNvPr id="30" name="TextBox 29"/>
+          <p:cNvPr id="32" name="TextBox 31"/>
           <p:cNvSpPr txBox="1"/>
           <p:nvPr/>
         </p:nvSpPr>
@@ -6460,7 +6629,7 @@
         <p:spPr>
           <a:xfrm>
             <a:off x="548640" y="1371600"/>
-            <a:ext cx="91440" cy="4572000"/>
+            <a:ext cx="91440" cy="4754880"/>
           </a:xfrm>
           <a:prstGeom prst="rect">
             <a:avLst/>
@@ -6502,13 +6671,11 @@
         </p:nvSpPr>
         <p:spPr>
           <a:xfrm>
-            <a:off x="868680" y="1600200"/>
+            <a:off x="868680" y="1645920"/>
             <a:ext cx="457200" cy="457200"/>
           </a:xfrm>
           <a:prstGeom prst="roundRect">
-            <a:avLst>
-              <a:gd name="adj" fmla="val 15000"/>
-            </a:avLst>
+            <a:avLst/>
           </a:prstGeom>
           <a:solidFill>
             <a:srgbClr val="0A1628"/>
@@ -6541,56 +6708,20 @@
       </p:sp>
       <p:sp>
         <p:nvSpPr>
-          <p:cNvPr id="9" name="TextBox 8"/>
-          <p:cNvSpPr txBox="1"/>
-          <p:nvPr/>
-        </p:nvSpPr>
-        <p:spPr>
-          <a:xfrm>
-            <a:off x="868680" y="1668780"/>
-            <a:ext cx="457200" cy="320040"/>
-          </a:xfrm>
-          <a:prstGeom prst="rect">
-            <a:avLst/>
-          </a:prstGeom>
-          <a:noFill/>
-        </p:spPr>
-        <p:txBody>
-          <a:bodyPr wrap="square">
-            <a:spAutoFit/>
-          </a:bodyPr>
-          <a:lstStyle/>
-          <a:p>
-            <a:pPr algn="ctr">
-              <a:defRPr sz="1600">
-                <a:solidFill>
-                  <a:srgbClr val="FFFFFF"/>
-                </a:solidFill>
-                <a:latin typeface="Calibri"/>
-              </a:defRPr>
-            </a:pPr>
-            <a:r>
-              <a:t>✓</a:t>
-            </a:r>
-          </a:p>
-        </p:txBody>
-      </p:sp>
-      <p:sp>
-        <p:nvSpPr>
-          <p:cNvPr id="10" name="Rectangle 9"/>
-          <p:cNvSpPr/>
-          <p:nvPr/>
-        </p:nvSpPr>
-        <p:spPr>
-          <a:xfrm>
-            <a:off x="1078992" y="2103120"/>
-            <a:ext cx="17419320000" cy="502920"/>
-          </a:xfrm>
-          <a:prstGeom prst="rect">
-            <a:avLst/>
-          </a:prstGeom>
-          <a:solidFill>
-            <a:srgbClr val="E2E8F0"/>
+          <p:cNvPr id="9" name="Diamond 8"/>
+          <p:cNvSpPr/>
+          <p:nvPr/>
+        </p:nvSpPr>
+        <p:spPr>
+          <a:xfrm>
+            <a:off x="960120" y="1737360"/>
+            <a:ext cx="274320" cy="274320"/>
+          </a:xfrm>
+          <a:prstGeom prst="diamond">
+            <a:avLst/>
+          </a:prstGeom>
+          <a:solidFill>
+            <a:srgbClr val="FFFFFF"/>
           </a:solidFill>
           <a:ln>
             <a:noFill/>
@@ -6620,13 +6751,56 @@
       </p:sp>
       <p:sp>
         <p:nvSpPr>
+          <p:cNvPr id="10" name="Rectangle 9"/>
+          <p:cNvSpPr/>
+          <p:nvPr/>
+        </p:nvSpPr>
+        <p:spPr>
+          <a:xfrm>
+            <a:off x="1078992" y="2194560"/>
+            <a:ext cx="17419320000" cy="457200"/>
+          </a:xfrm>
+          <a:prstGeom prst="rect">
+            <a:avLst/>
+          </a:prstGeom>
+          <a:solidFill>
+            <a:srgbClr val="E2E8F0"/>
+          </a:solidFill>
+          <a:ln>
+            <a:noFill/>
+          </a:ln>
+        </p:spPr>
+        <p:style>
+          <a:lnRef idx="1">
+            <a:schemeClr val="accent1"/>
+          </a:lnRef>
+          <a:fillRef idx="3">
+            <a:schemeClr val="accent1"/>
+          </a:fillRef>
+          <a:effectRef idx="2">
+            <a:schemeClr val="accent1"/>
+          </a:effectRef>
+          <a:fontRef idx="minor">
+            <a:schemeClr val="lt1"/>
+          </a:fontRef>
+        </p:style>
+        <p:txBody>
+          <a:bodyPr rtlCol="0" anchor="ctr"/>
+          <a:lstStyle/>
+          <a:p>
+            <a:pPr algn="ctr"/>
+          </a:p>
+        </p:txBody>
+      </p:sp>
+      <p:sp>
+        <p:nvSpPr>
           <p:cNvPr id="11" name="TextBox 10"/>
           <p:cNvSpPr txBox="1"/>
           <p:nvPr/>
         </p:nvSpPr>
         <p:spPr>
           <a:xfrm>
-            <a:off x="1554480" y="1618488"/>
+            <a:off x="1554480" y="1682496"/>
             <a:ext cx="9814255" cy="731520"/>
           </a:xfrm>
           <a:prstGeom prst="rect">
@@ -6675,19 +6849,17 @@
       </p:sp>
       <p:sp>
         <p:nvSpPr>
-          <p:cNvPr id="12" name="Rounded Rectangle 11"/>
-          <p:cNvSpPr/>
-          <p:nvPr/>
-        </p:nvSpPr>
-        <p:spPr>
-          <a:xfrm>
-            <a:off x="868680" y="2651760"/>
-            <a:ext cx="457200" cy="457200"/>
-          </a:xfrm>
-          <a:prstGeom prst="roundRect">
-            <a:avLst>
-              <a:gd name="adj" fmla="val 15000"/>
-            </a:avLst>
+          <p:cNvPr id="12" name="Parallelogram 11"/>
+          <p:cNvSpPr/>
+          <p:nvPr/>
+        </p:nvSpPr>
+        <p:spPr>
+          <a:xfrm>
+            <a:off x="868680" y="2697480"/>
+            <a:ext cx="320040" cy="457200"/>
+          </a:xfrm>
+          <a:prstGeom prst="parallelogram">
+            <a:avLst/>
           </a:prstGeom>
           <a:solidFill>
             <a:srgbClr val="0A1628"/>
@@ -6720,56 +6892,20 @@
       </p:sp>
       <p:sp>
         <p:nvSpPr>
-          <p:cNvPr id="13" name="TextBox 12"/>
-          <p:cNvSpPr txBox="1"/>
-          <p:nvPr/>
-        </p:nvSpPr>
-        <p:spPr>
-          <a:xfrm>
-            <a:off x="868680" y="2720340"/>
-            <a:ext cx="457200" cy="320040"/>
-          </a:xfrm>
-          <a:prstGeom prst="rect">
-            <a:avLst/>
-          </a:prstGeom>
-          <a:noFill/>
-        </p:spPr>
-        <p:txBody>
-          <a:bodyPr wrap="square">
-            <a:spAutoFit/>
-          </a:bodyPr>
-          <a:lstStyle/>
-          <a:p>
-            <a:pPr algn="ctr">
-              <a:defRPr sz="1600">
-                <a:solidFill>
-                  <a:srgbClr val="FFFFFF"/>
-                </a:solidFill>
-                <a:latin typeface="Calibri"/>
-              </a:defRPr>
-            </a:pPr>
-            <a:r>
-              <a:t>🔗</a:t>
-            </a:r>
-          </a:p>
-        </p:txBody>
-      </p:sp>
-      <p:sp>
-        <p:nvSpPr>
-          <p:cNvPr id="14" name="Rectangle 13"/>
-          <p:cNvSpPr/>
-          <p:nvPr/>
-        </p:nvSpPr>
-        <p:spPr>
-          <a:xfrm>
-            <a:off x="1078992" y="3154680"/>
-            <a:ext cx="17419320000" cy="502920"/>
-          </a:xfrm>
-          <a:prstGeom prst="rect">
-            <a:avLst/>
-          </a:prstGeom>
-          <a:solidFill>
-            <a:srgbClr val="E2E8F0"/>
+          <p:cNvPr id="13" name="Parallelogram 12"/>
+          <p:cNvSpPr/>
+          <p:nvPr/>
+        </p:nvSpPr>
+        <p:spPr>
+          <a:xfrm>
+            <a:off x="1005839" y="2697480"/>
+            <a:ext cx="320040" cy="457200"/>
+          </a:xfrm>
+          <a:prstGeom prst="parallelogram">
+            <a:avLst/>
+          </a:prstGeom>
+          <a:solidFill>
+            <a:srgbClr val="FFFFFF"/>
           </a:solidFill>
           <a:ln>
             <a:noFill/>
@@ -6799,13 +6935,56 @@
       </p:sp>
       <p:sp>
         <p:nvSpPr>
+          <p:cNvPr id="14" name="Rectangle 13"/>
+          <p:cNvSpPr/>
+          <p:nvPr/>
+        </p:nvSpPr>
+        <p:spPr>
+          <a:xfrm>
+            <a:off x="1078992" y="3246120"/>
+            <a:ext cx="17419320000" cy="457200"/>
+          </a:xfrm>
+          <a:prstGeom prst="rect">
+            <a:avLst/>
+          </a:prstGeom>
+          <a:solidFill>
+            <a:srgbClr val="E2E8F0"/>
+          </a:solidFill>
+          <a:ln>
+            <a:noFill/>
+          </a:ln>
+        </p:spPr>
+        <p:style>
+          <a:lnRef idx="1">
+            <a:schemeClr val="accent1"/>
+          </a:lnRef>
+          <a:fillRef idx="3">
+            <a:schemeClr val="accent1"/>
+          </a:fillRef>
+          <a:effectRef idx="2">
+            <a:schemeClr val="accent1"/>
+          </a:effectRef>
+          <a:fontRef idx="minor">
+            <a:schemeClr val="lt1"/>
+          </a:fontRef>
+        </p:style>
+        <p:txBody>
+          <a:bodyPr rtlCol="0" anchor="ctr"/>
+          <a:lstStyle/>
+          <a:p>
+            <a:pPr algn="ctr"/>
+          </a:p>
+        </p:txBody>
+      </p:sp>
+      <p:sp>
+        <p:nvSpPr>
           <p:cNvPr id="15" name="TextBox 14"/>
           <p:cNvSpPr txBox="1"/>
           <p:nvPr/>
         </p:nvSpPr>
         <p:spPr>
           <a:xfrm>
-            <a:off x="1554480" y="2670048"/>
+            <a:off x="1554480" y="2734056"/>
             <a:ext cx="9814255" cy="731520"/>
           </a:xfrm>
           <a:prstGeom prst="rect">
@@ -6854,19 +7033,17 @@
       </p:sp>
       <p:sp>
         <p:nvSpPr>
-          <p:cNvPr id="16" name="Rounded Rectangle 15"/>
-          <p:cNvSpPr/>
-          <p:nvPr/>
-        </p:nvSpPr>
-        <p:spPr>
-          <a:xfrm>
-            <a:off x="868680" y="3703320"/>
+          <p:cNvPr id="16" name="Diamond 15"/>
+          <p:cNvSpPr/>
+          <p:nvPr/>
+        </p:nvSpPr>
+        <p:spPr>
+          <a:xfrm>
+            <a:off x="868680" y="3749039"/>
             <a:ext cx="457200" cy="457200"/>
           </a:xfrm>
-          <a:prstGeom prst="roundRect">
-            <a:avLst>
-              <a:gd name="adj" fmla="val 15000"/>
-            </a:avLst>
+          <a:prstGeom prst="diamond">
+            <a:avLst/>
           </a:prstGeom>
           <a:solidFill>
             <a:srgbClr val="0A1628"/>
@@ -6899,56 +7076,20 @@
       </p:sp>
       <p:sp>
         <p:nvSpPr>
-          <p:cNvPr id="17" name="TextBox 16"/>
-          <p:cNvSpPr txBox="1"/>
-          <p:nvPr/>
-        </p:nvSpPr>
-        <p:spPr>
-          <a:xfrm>
-            <a:off x="868680" y="3771900"/>
-            <a:ext cx="457200" cy="320040"/>
-          </a:xfrm>
-          <a:prstGeom prst="rect">
-            <a:avLst/>
-          </a:prstGeom>
-          <a:noFill/>
-        </p:spPr>
-        <p:txBody>
-          <a:bodyPr wrap="square">
-            <a:spAutoFit/>
-          </a:bodyPr>
-          <a:lstStyle/>
-          <a:p>
-            <a:pPr algn="ctr">
-              <a:defRPr sz="1600">
-                <a:solidFill>
-                  <a:srgbClr val="FFFFFF"/>
-                </a:solidFill>
-                <a:latin typeface="Calibri"/>
-              </a:defRPr>
-            </a:pPr>
-            <a:r>
-              <a:t>🌐</a:t>
-            </a:r>
-          </a:p>
-        </p:txBody>
-      </p:sp>
-      <p:sp>
-        <p:nvSpPr>
-          <p:cNvPr id="18" name="Rectangle 17"/>
-          <p:cNvSpPr/>
-          <p:nvPr/>
-        </p:nvSpPr>
-        <p:spPr>
-          <a:xfrm>
-            <a:off x="1078992" y="4206240"/>
-            <a:ext cx="17419320000" cy="502920"/>
-          </a:xfrm>
-          <a:prstGeom prst="rect">
-            <a:avLst/>
-          </a:prstGeom>
-          <a:solidFill>
-            <a:srgbClr val="E2E8F0"/>
+          <p:cNvPr id="17" name="Rectangle 16"/>
+          <p:cNvSpPr/>
+          <p:nvPr/>
+        </p:nvSpPr>
+        <p:spPr>
+          <a:xfrm>
+            <a:off x="868680" y="3941063"/>
+            <a:ext cx="457200" cy="73152"/>
+          </a:xfrm>
+          <a:prstGeom prst="rect">
+            <a:avLst/>
+          </a:prstGeom>
+          <a:solidFill>
+            <a:srgbClr val="FFFFFF"/>
           </a:solidFill>
           <a:ln>
             <a:noFill/>
@@ -6978,13 +7119,56 @@
       </p:sp>
       <p:sp>
         <p:nvSpPr>
+          <p:cNvPr id="18" name="Rectangle 17"/>
+          <p:cNvSpPr/>
+          <p:nvPr/>
+        </p:nvSpPr>
+        <p:spPr>
+          <a:xfrm>
+            <a:off x="1078992" y="4297679"/>
+            <a:ext cx="17419320000" cy="457200"/>
+          </a:xfrm>
+          <a:prstGeom prst="rect">
+            <a:avLst/>
+          </a:prstGeom>
+          <a:solidFill>
+            <a:srgbClr val="E2E8F0"/>
+          </a:solidFill>
+          <a:ln>
+            <a:noFill/>
+          </a:ln>
+        </p:spPr>
+        <p:style>
+          <a:lnRef idx="1">
+            <a:schemeClr val="accent1"/>
+          </a:lnRef>
+          <a:fillRef idx="3">
+            <a:schemeClr val="accent1"/>
+          </a:fillRef>
+          <a:effectRef idx="2">
+            <a:schemeClr val="accent1"/>
+          </a:effectRef>
+          <a:fontRef idx="minor">
+            <a:schemeClr val="lt1"/>
+          </a:fontRef>
+        </p:style>
+        <p:txBody>
+          <a:bodyPr rtlCol="0" anchor="ctr"/>
+          <a:lstStyle/>
+          <a:p>
+            <a:pPr algn="ctr"/>
+          </a:p>
+        </p:txBody>
+      </p:sp>
+      <p:sp>
+        <p:nvSpPr>
           <p:cNvPr id="19" name="TextBox 18"/>
           <p:cNvSpPr txBox="1"/>
           <p:nvPr/>
         </p:nvSpPr>
         <p:spPr>
           <a:xfrm>
-            <a:off x="1554480" y="3721607"/>
+            <a:off x="1554480" y="3785615"/>
             <a:ext cx="9814255" cy="731520"/>
           </a:xfrm>
           <a:prstGeom prst="rect">
@@ -7010,7 +7194,7 @@
               </a:defRPr>
             </a:pPr>
             <a:r>
-              <a:t>Pengelolaan domain dan subdomain</a:t>
+              <a:t>Pengelolaan domain &amp; subdomain</a:t>
             </a:r>
           </a:p>
           <a:p>
@@ -7033,19 +7217,17 @@
       </p:sp>
       <p:sp>
         <p:nvSpPr>
-          <p:cNvPr id="20" name="Rounded Rectangle 19"/>
-          <p:cNvSpPr/>
-          <p:nvPr/>
-        </p:nvSpPr>
-        <p:spPr>
-          <a:xfrm>
-            <a:off x="868680" y="4754879"/>
+          <p:cNvPr id="20" name="Pentagon 19"/>
+          <p:cNvSpPr/>
+          <p:nvPr/>
+        </p:nvSpPr>
+        <p:spPr>
+          <a:xfrm>
+            <a:off x="868680" y="4800600"/>
             <a:ext cx="457200" cy="457200"/>
           </a:xfrm>
-          <a:prstGeom prst="roundRect">
-            <a:avLst>
-              <a:gd name="adj" fmla="val 15000"/>
-            </a:avLst>
+          <a:prstGeom prst="homePlate">
+            <a:avLst/>
           </a:prstGeom>
           <a:solidFill>
             <a:srgbClr val="0A1628"/>
@@ -7078,37 +7260,44 @@
       </p:sp>
       <p:sp>
         <p:nvSpPr>
-          <p:cNvPr id="21" name="TextBox 20"/>
-          <p:cNvSpPr txBox="1"/>
-          <p:nvPr/>
-        </p:nvSpPr>
-        <p:spPr>
-          <a:xfrm>
-            <a:off x="868680" y="4823459"/>
-            <a:ext cx="457200" cy="320040"/>
-          </a:xfrm>
-          <a:prstGeom prst="rect">
-            <a:avLst/>
-          </a:prstGeom>
-          <a:noFill/>
-        </p:spPr>
-        <p:txBody>
-          <a:bodyPr wrap="square">
-            <a:spAutoFit/>
-          </a:bodyPr>
-          <a:lstStyle/>
-          <a:p>
-            <a:pPr algn="ctr">
-              <a:defRPr sz="1600">
-                <a:solidFill>
-                  <a:srgbClr val="FFFFFF"/>
-                </a:solidFill>
-                <a:latin typeface="Calibri"/>
-              </a:defRPr>
-            </a:pPr>
-            <a:r>
-              <a:t>⚙</a:t>
-            </a:r>
+          <p:cNvPr id="21" name="Rectangle 20"/>
+          <p:cNvSpPr/>
+          <p:nvPr/>
+        </p:nvSpPr>
+        <p:spPr>
+          <a:xfrm>
+            <a:off x="1005839" y="4937760"/>
+            <a:ext cx="182880" cy="182880"/>
+          </a:xfrm>
+          <a:prstGeom prst="rect">
+            <a:avLst/>
+          </a:prstGeom>
+          <a:solidFill>
+            <a:srgbClr val="FFFFFF"/>
+          </a:solidFill>
+          <a:ln>
+            <a:noFill/>
+          </a:ln>
+        </p:spPr>
+        <p:style>
+          <a:lnRef idx="1">
+            <a:schemeClr val="accent1"/>
+          </a:lnRef>
+          <a:fillRef idx="3">
+            <a:schemeClr val="accent1"/>
+          </a:fillRef>
+          <a:effectRef idx="2">
+            <a:schemeClr val="accent1"/>
+          </a:effectRef>
+          <a:fontRef idx="minor">
+            <a:schemeClr val="lt1"/>
+          </a:fontRef>
+        </p:style>
+        <p:txBody>
+          <a:bodyPr rtlCol="0" anchor="ctr"/>
+          <a:lstStyle/>
+          <a:p>
+            <a:pPr algn="ctr"/>
           </a:p>
         </p:txBody>
       </p:sp>
@@ -7120,7 +7309,7 @@
         </p:nvSpPr>
         <p:spPr>
           <a:xfrm>
-            <a:off x="1554480" y="4773167"/>
+            <a:off x="1554480" y="4837176"/>
             <a:ext cx="9814255" cy="731520"/>
           </a:xfrm>
           <a:prstGeom prst="rect">
@@ -7561,7 +7750,7 @@
         <p:spPr>
           <a:xfrm>
             <a:off x="548640" y="1371600"/>
-            <a:ext cx="91440" cy="4572000"/>
+            <a:ext cx="91440" cy="4754880"/>
           </a:xfrm>
           <a:prstGeom prst="rect">
             <a:avLst/>
@@ -7597,19 +7786,17 @@
       </p:sp>
       <p:sp>
         <p:nvSpPr>
-          <p:cNvPr id="8" name="Rounded Rectangle 7"/>
-          <p:cNvSpPr/>
-          <p:nvPr/>
-        </p:nvSpPr>
-        <p:spPr>
-          <a:xfrm>
-            <a:off x="868680" y="1600200"/>
+          <p:cNvPr id="8" name="Diamond 7"/>
+          <p:cNvSpPr/>
+          <p:nvPr/>
+        </p:nvSpPr>
+        <p:spPr>
+          <a:xfrm>
+            <a:off x="868680" y="1645920"/>
             <a:ext cx="457200" cy="457200"/>
           </a:xfrm>
-          <a:prstGeom prst="roundRect">
-            <a:avLst>
-              <a:gd name="adj" fmla="val 15000"/>
-            </a:avLst>
+          <a:prstGeom prst="diamond">
+            <a:avLst/>
           </a:prstGeom>
           <a:solidFill>
             <a:srgbClr val="0D9488"/>
@@ -7642,56 +7829,20 @@
       </p:sp>
       <p:sp>
         <p:nvSpPr>
-          <p:cNvPr id="9" name="TextBox 8"/>
-          <p:cNvSpPr txBox="1"/>
-          <p:nvPr/>
-        </p:nvSpPr>
-        <p:spPr>
-          <a:xfrm>
-            <a:off x="868680" y="1668780"/>
-            <a:ext cx="457200" cy="320040"/>
-          </a:xfrm>
-          <a:prstGeom prst="rect">
-            <a:avLst/>
-          </a:prstGeom>
-          <a:noFill/>
-        </p:spPr>
-        <p:txBody>
-          <a:bodyPr wrap="square">
-            <a:spAutoFit/>
-          </a:bodyPr>
-          <a:lstStyle/>
-          <a:p>
-            <a:pPr algn="ctr">
-              <a:defRPr sz="1600">
-                <a:solidFill>
-                  <a:srgbClr val="FFFFFF"/>
-                </a:solidFill>
-                <a:latin typeface="Calibri"/>
-              </a:defRPr>
-            </a:pPr>
-            <a:r>
-              <a:t>◆</a:t>
-            </a:r>
-          </a:p>
-        </p:txBody>
-      </p:sp>
-      <p:sp>
-        <p:nvSpPr>
-          <p:cNvPr id="10" name="Rectangle 9"/>
-          <p:cNvSpPr/>
-          <p:nvPr/>
-        </p:nvSpPr>
-        <p:spPr>
-          <a:xfrm>
-            <a:off x="1078992" y="2103120"/>
-            <a:ext cx="17419320000" cy="502920"/>
-          </a:xfrm>
-          <a:prstGeom prst="rect">
-            <a:avLst/>
-          </a:prstGeom>
-          <a:solidFill>
-            <a:srgbClr val="E2E8F0"/>
+          <p:cNvPr id="9" name="Diamond 8"/>
+          <p:cNvSpPr/>
+          <p:nvPr/>
+        </p:nvSpPr>
+        <p:spPr>
+          <a:xfrm>
+            <a:off x="937259" y="1714500"/>
+            <a:ext cx="320040" cy="320040"/>
+          </a:xfrm>
+          <a:prstGeom prst="diamond">
+            <a:avLst/>
+          </a:prstGeom>
+          <a:solidFill>
+            <a:srgbClr val="FFFFFF"/>
           </a:solidFill>
           <a:ln>
             <a:noFill/>
@@ -7721,13 +7872,56 @@
       </p:sp>
       <p:sp>
         <p:nvSpPr>
+          <p:cNvPr id="10" name="Rectangle 9"/>
+          <p:cNvSpPr/>
+          <p:nvPr/>
+        </p:nvSpPr>
+        <p:spPr>
+          <a:xfrm>
+            <a:off x="1078992" y="2194560"/>
+            <a:ext cx="17419320000" cy="457200"/>
+          </a:xfrm>
+          <a:prstGeom prst="rect">
+            <a:avLst/>
+          </a:prstGeom>
+          <a:solidFill>
+            <a:srgbClr val="E2E8F0"/>
+          </a:solidFill>
+          <a:ln>
+            <a:noFill/>
+          </a:ln>
+        </p:spPr>
+        <p:style>
+          <a:lnRef idx="1">
+            <a:schemeClr val="accent1"/>
+          </a:lnRef>
+          <a:fillRef idx="3">
+            <a:schemeClr val="accent1"/>
+          </a:fillRef>
+          <a:effectRef idx="2">
+            <a:schemeClr val="accent1"/>
+          </a:effectRef>
+          <a:fontRef idx="minor">
+            <a:schemeClr val="lt1"/>
+          </a:fontRef>
+        </p:style>
+        <p:txBody>
+          <a:bodyPr rtlCol="0" anchor="ctr"/>
+          <a:lstStyle/>
+          <a:p>
+            <a:pPr algn="ctr"/>
+          </a:p>
+        </p:txBody>
+      </p:sp>
+      <p:sp>
+        <p:nvSpPr>
           <p:cNvPr id="11" name="TextBox 10"/>
           <p:cNvSpPr txBox="1"/>
           <p:nvPr/>
         </p:nvSpPr>
         <p:spPr>
           <a:xfrm>
-            <a:off x="1554480" y="1618488"/>
+            <a:off x="1554480" y="1682496"/>
             <a:ext cx="9814255" cy="731520"/>
           </a:xfrm>
           <a:prstGeom prst="rect">
@@ -7776,19 +7970,17 @@
       </p:sp>
       <p:sp>
         <p:nvSpPr>
-          <p:cNvPr id="12" name="Rounded Rectangle 11"/>
-          <p:cNvSpPr/>
-          <p:nvPr/>
-        </p:nvSpPr>
-        <p:spPr>
-          <a:xfrm>
-            <a:off x="868680" y="2651760"/>
-            <a:ext cx="457200" cy="457200"/>
-          </a:xfrm>
-          <a:prstGeom prst="roundRect">
-            <a:avLst>
-              <a:gd name="adj" fmla="val 15000"/>
-            </a:avLst>
+          <p:cNvPr id="12" name="Rectangle 11"/>
+          <p:cNvSpPr/>
+          <p:nvPr/>
+        </p:nvSpPr>
+        <p:spPr>
+          <a:xfrm>
+            <a:off x="868680" y="2834640"/>
+            <a:ext cx="457200" cy="320040"/>
+          </a:xfrm>
+          <a:prstGeom prst="rect">
+            <a:avLst/>
           </a:prstGeom>
           <a:solidFill>
             <a:srgbClr val="0D9488"/>
@@ -7821,56 +8013,20 @@
       </p:sp>
       <p:sp>
         <p:nvSpPr>
-          <p:cNvPr id="13" name="TextBox 12"/>
-          <p:cNvSpPr txBox="1"/>
-          <p:nvPr/>
-        </p:nvSpPr>
-        <p:spPr>
-          <a:xfrm>
-            <a:off x="868680" y="2720340"/>
-            <a:ext cx="457200" cy="320040"/>
-          </a:xfrm>
-          <a:prstGeom prst="rect">
-            <a:avLst/>
-          </a:prstGeom>
-          <a:noFill/>
-        </p:spPr>
-        <p:txBody>
-          <a:bodyPr wrap="square">
-            <a:spAutoFit/>
-          </a:bodyPr>
-          <a:lstStyle/>
-          <a:p>
-            <a:pPr algn="ctr">
-              <a:defRPr sz="1600">
-                <a:solidFill>
-                  <a:srgbClr val="FFFFFF"/>
-                </a:solidFill>
-                <a:latin typeface="Calibri"/>
-              </a:defRPr>
-            </a:pPr>
-            <a:r>
-              <a:t>🏛</a:t>
-            </a:r>
-          </a:p>
-        </p:txBody>
-      </p:sp>
-      <p:sp>
-        <p:nvSpPr>
-          <p:cNvPr id="14" name="Rectangle 13"/>
-          <p:cNvSpPr/>
-          <p:nvPr/>
-        </p:nvSpPr>
-        <p:spPr>
-          <a:xfrm>
-            <a:off x="1078992" y="3154680"/>
-            <a:ext cx="17419320000" cy="502920"/>
-          </a:xfrm>
-          <a:prstGeom prst="rect">
-            <a:avLst/>
-          </a:prstGeom>
-          <a:solidFill>
-            <a:srgbClr val="E2E8F0"/>
+          <p:cNvPr id="13" name="Isosceles Triangle 12"/>
+          <p:cNvSpPr/>
+          <p:nvPr/>
+        </p:nvSpPr>
+        <p:spPr>
+          <a:xfrm>
+            <a:off x="868680" y="2697480"/>
+            <a:ext cx="457200" cy="228600"/>
+          </a:xfrm>
+          <a:prstGeom prst="triangle">
+            <a:avLst/>
+          </a:prstGeom>
+          <a:solidFill>
+            <a:srgbClr val="0D9488"/>
           </a:solidFill>
           <a:ln>
             <a:noFill/>
@@ -7900,13 +8056,99 @@
       </p:sp>
       <p:sp>
         <p:nvSpPr>
-          <p:cNvPr id="15" name="TextBox 14"/>
+          <p:cNvPr id="14" name="Rectangle 13"/>
+          <p:cNvSpPr/>
+          <p:nvPr/>
+        </p:nvSpPr>
+        <p:spPr>
+          <a:xfrm>
+            <a:off x="1005839" y="2926080"/>
+            <a:ext cx="68580" cy="68580"/>
+          </a:xfrm>
+          <a:prstGeom prst="rect">
+            <a:avLst/>
+          </a:prstGeom>
+          <a:solidFill>
+            <a:srgbClr val="FFFFFF"/>
+          </a:solidFill>
+          <a:ln>
+            <a:noFill/>
+          </a:ln>
+        </p:spPr>
+        <p:style>
+          <a:lnRef idx="1">
+            <a:schemeClr val="accent1"/>
+          </a:lnRef>
+          <a:fillRef idx="3">
+            <a:schemeClr val="accent1"/>
+          </a:fillRef>
+          <a:effectRef idx="2">
+            <a:schemeClr val="accent1"/>
+          </a:effectRef>
+          <a:fontRef idx="minor">
+            <a:schemeClr val="lt1"/>
+          </a:fontRef>
+        </p:style>
+        <p:txBody>
+          <a:bodyPr rtlCol="0" anchor="ctr"/>
+          <a:lstStyle/>
+          <a:p>
+            <a:pPr algn="ctr"/>
+          </a:p>
+        </p:txBody>
+      </p:sp>
+      <p:sp>
+        <p:nvSpPr>
+          <p:cNvPr id="15" name="Rectangle 14"/>
+          <p:cNvSpPr/>
+          <p:nvPr/>
+        </p:nvSpPr>
+        <p:spPr>
+          <a:xfrm>
+            <a:off x="1078992" y="3246120"/>
+            <a:ext cx="17419320000" cy="457200"/>
+          </a:xfrm>
+          <a:prstGeom prst="rect">
+            <a:avLst/>
+          </a:prstGeom>
+          <a:solidFill>
+            <a:srgbClr val="E2E8F0"/>
+          </a:solidFill>
+          <a:ln>
+            <a:noFill/>
+          </a:ln>
+        </p:spPr>
+        <p:style>
+          <a:lnRef idx="1">
+            <a:schemeClr val="accent1"/>
+          </a:lnRef>
+          <a:fillRef idx="3">
+            <a:schemeClr val="accent1"/>
+          </a:fillRef>
+          <a:effectRef idx="2">
+            <a:schemeClr val="accent1"/>
+          </a:effectRef>
+          <a:fontRef idx="minor">
+            <a:schemeClr val="lt1"/>
+          </a:fontRef>
+        </p:style>
+        <p:txBody>
+          <a:bodyPr rtlCol="0" anchor="ctr"/>
+          <a:lstStyle/>
+          <a:p>
+            <a:pPr algn="ctr"/>
+          </a:p>
+        </p:txBody>
+      </p:sp>
+      <p:sp>
+        <p:nvSpPr>
+          <p:cNvPr id="16" name="TextBox 15"/>
           <p:cNvSpPr txBox="1"/>
           <p:nvPr/>
         </p:nvSpPr>
         <p:spPr>
           <a:xfrm>
-            <a:off x="1554480" y="2670048"/>
+            <a:off x="1554480" y="2734056"/>
             <a:ext cx="9814255" cy="731520"/>
           </a:xfrm>
           <a:prstGeom prst="rect">
@@ -7955,19 +8197,17 @@
       </p:sp>
       <p:sp>
         <p:nvSpPr>
-          <p:cNvPr id="16" name="Rounded Rectangle 15"/>
-          <p:cNvSpPr/>
-          <p:nvPr/>
-        </p:nvSpPr>
-        <p:spPr>
-          <a:xfrm>
-            <a:off x="868680" y="3703320"/>
+          <p:cNvPr id="17" name="Rounded Rectangle 16"/>
+          <p:cNvSpPr/>
+          <p:nvPr/>
+        </p:nvSpPr>
+        <p:spPr>
+          <a:xfrm>
+            <a:off x="868680" y="3749039"/>
             <a:ext cx="457200" cy="457200"/>
           </a:xfrm>
           <a:prstGeom prst="roundRect">
-            <a:avLst>
-              <a:gd name="adj" fmla="val 15000"/>
-            </a:avLst>
+            <a:avLst/>
           </a:prstGeom>
           <a:solidFill>
             <a:srgbClr val="0D9488"/>
@@ -8000,56 +8240,20 @@
       </p:sp>
       <p:sp>
         <p:nvSpPr>
-          <p:cNvPr id="17" name="TextBox 16"/>
-          <p:cNvSpPr txBox="1"/>
-          <p:nvPr/>
-        </p:nvSpPr>
-        <p:spPr>
-          <a:xfrm>
-            <a:off x="868680" y="3771900"/>
-            <a:ext cx="457200" cy="320040"/>
-          </a:xfrm>
-          <a:prstGeom prst="rect">
-            <a:avLst/>
-          </a:prstGeom>
-          <a:noFill/>
-        </p:spPr>
-        <p:txBody>
-          <a:bodyPr wrap="square">
-            <a:spAutoFit/>
-          </a:bodyPr>
-          <a:lstStyle/>
-          <a:p>
-            <a:pPr algn="ctr">
-              <a:defRPr sz="1600">
-                <a:solidFill>
-                  <a:srgbClr val="FFFFFF"/>
-                </a:solidFill>
-                <a:latin typeface="Calibri"/>
-              </a:defRPr>
-            </a:pPr>
-            <a:r>
-              <a:t>▣</a:t>
-            </a:r>
-          </a:p>
-        </p:txBody>
-      </p:sp>
-      <p:sp>
-        <p:nvSpPr>
           <p:cNvPr id="18" name="Rectangle 17"/>
           <p:cNvSpPr/>
           <p:nvPr/>
         </p:nvSpPr>
         <p:spPr>
           <a:xfrm>
-            <a:off x="1078992" y="4206240"/>
-            <a:ext cx="17419320000" cy="502920"/>
-          </a:xfrm>
-          <a:prstGeom prst="rect">
-            <a:avLst/>
-          </a:prstGeom>
-          <a:solidFill>
-            <a:srgbClr val="E2E8F0"/>
+            <a:off x="1051560" y="3931920"/>
+            <a:ext cx="91439" cy="91439"/>
+          </a:xfrm>
+          <a:prstGeom prst="rect">
+            <a:avLst/>
+          </a:prstGeom>
+          <a:solidFill>
+            <a:srgbClr val="FFFFFF"/>
           </a:solidFill>
           <a:ln>
             <a:noFill/>
@@ -8079,13 +8283,99 @@
       </p:sp>
       <p:sp>
         <p:nvSpPr>
-          <p:cNvPr id="19" name="TextBox 18"/>
+          <p:cNvPr id="19" name="Rectangle 18"/>
+          <p:cNvSpPr/>
+          <p:nvPr/>
+        </p:nvSpPr>
+        <p:spPr>
+          <a:xfrm>
+            <a:off x="1028700" y="3909059"/>
+            <a:ext cx="137160" cy="137160"/>
+          </a:xfrm>
+          <a:prstGeom prst="rect">
+            <a:avLst/>
+          </a:prstGeom>
+          <a:solidFill>
+            <a:srgbClr val="0D9488"/>
+          </a:solidFill>
+          <a:ln>
+            <a:noFill/>
+          </a:ln>
+        </p:spPr>
+        <p:style>
+          <a:lnRef idx="1">
+            <a:schemeClr val="accent1"/>
+          </a:lnRef>
+          <a:fillRef idx="3">
+            <a:schemeClr val="accent1"/>
+          </a:fillRef>
+          <a:effectRef idx="2">
+            <a:schemeClr val="accent1"/>
+          </a:effectRef>
+          <a:fontRef idx="minor">
+            <a:schemeClr val="lt1"/>
+          </a:fontRef>
+        </p:style>
+        <p:txBody>
+          <a:bodyPr rtlCol="0" anchor="ctr"/>
+          <a:lstStyle/>
+          <a:p>
+            <a:pPr algn="ctr"/>
+          </a:p>
+        </p:txBody>
+      </p:sp>
+      <p:sp>
+        <p:nvSpPr>
+          <p:cNvPr id="20" name="Rectangle 19"/>
+          <p:cNvSpPr/>
+          <p:nvPr/>
+        </p:nvSpPr>
+        <p:spPr>
+          <a:xfrm>
+            <a:off x="1078992" y="4297679"/>
+            <a:ext cx="17419320000" cy="457200"/>
+          </a:xfrm>
+          <a:prstGeom prst="rect">
+            <a:avLst/>
+          </a:prstGeom>
+          <a:solidFill>
+            <a:srgbClr val="E2E8F0"/>
+          </a:solidFill>
+          <a:ln>
+            <a:noFill/>
+          </a:ln>
+        </p:spPr>
+        <p:style>
+          <a:lnRef idx="1">
+            <a:schemeClr val="accent1"/>
+          </a:lnRef>
+          <a:fillRef idx="3">
+            <a:schemeClr val="accent1"/>
+          </a:fillRef>
+          <a:effectRef idx="2">
+            <a:schemeClr val="accent1"/>
+          </a:effectRef>
+          <a:fontRef idx="minor">
+            <a:schemeClr val="lt1"/>
+          </a:fontRef>
+        </p:style>
+        <p:txBody>
+          <a:bodyPr rtlCol="0" anchor="ctr"/>
+          <a:lstStyle/>
+          <a:p>
+            <a:pPr algn="ctr"/>
+          </a:p>
+        </p:txBody>
+      </p:sp>
+      <p:sp>
+        <p:nvSpPr>
+          <p:cNvPr id="21" name="TextBox 20"/>
           <p:cNvSpPr txBox="1"/>
           <p:nvPr/>
         </p:nvSpPr>
         <p:spPr>
           <a:xfrm>
-            <a:off x="1554480" y="3721607"/>
+            <a:off x="1554480" y="3785615"/>
             <a:ext cx="9814255" cy="731520"/>
           </a:xfrm>
           <a:prstGeom prst="rect">
@@ -8134,19 +8424,17 @@
       </p:sp>
       <p:sp>
         <p:nvSpPr>
-          <p:cNvPr id="20" name="Rounded Rectangle 19"/>
-          <p:cNvSpPr/>
-          <p:nvPr/>
-        </p:nvSpPr>
-        <p:spPr>
-          <a:xfrm>
-            <a:off x="868680" y="4754879"/>
-            <a:ext cx="457200" cy="457200"/>
-          </a:xfrm>
-          <a:prstGeom prst="roundRect">
-            <a:avLst>
-              <a:gd name="adj" fmla="val 15000"/>
-            </a:avLst>
+          <p:cNvPr id="22" name="Parallelogram 21"/>
+          <p:cNvSpPr/>
+          <p:nvPr/>
+        </p:nvSpPr>
+        <p:spPr>
+          <a:xfrm>
+            <a:off x="868680" y="4800600"/>
+            <a:ext cx="320040" cy="457200"/>
+          </a:xfrm>
+          <a:prstGeom prst="parallelogram">
+            <a:avLst/>
           </a:prstGeom>
           <a:solidFill>
             <a:srgbClr val="0D9488"/>
@@ -8179,49 +8467,56 @@
       </p:sp>
       <p:sp>
         <p:nvSpPr>
-          <p:cNvPr id="21" name="TextBox 20"/>
+          <p:cNvPr id="23" name="Parallelogram 22"/>
+          <p:cNvSpPr/>
+          <p:nvPr/>
+        </p:nvSpPr>
+        <p:spPr>
+          <a:xfrm>
+            <a:off x="1005839" y="4800600"/>
+            <a:ext cx="320040" cy="457200"/>
+          </a:xfrm>
+          <a:prstGeom prst="parallelogram">
+            <a:avLst/>
+          </a:prstGeom>
+          <a:solidFill>
+            <a:srgbClr val="FFFFFF"/>
+          </a:solidFill>
+          <a:ln>
+            <a:noFill/>
+          </a:ln>
+        </p:spPr>
+        <p:style>
+          <a:lnRef idx="1">
+            <a:schemeClr val="accent1"/>
+          </a:lnRef>
+          <a:fillRef idx="3">
+            <a:schemeClr val="accent1"/>
+          </a:fillRef>
+          <a:effectRef idx="2">
+            <a:schemeClr val="accent1"/>
+          </a:effectRef>
+          <a:fontRef idx="minor">
+            <a:schemeClr val="lt1"/>
+          </a:fontRef>
+        </p:style>
+        <p:txBody>
+          <a:bodyPr rtlCol="0" anchor="ctr"/>
+          <a:lstStyle/>
+          <a:p>
+            <a:pPr algn="ctr"/>
+          </a:p>
+        </p:txBody>
+      </p:sp>
+      <p:sp>
+        <p:nvSpPr>
+          <p:cNvPr id="24" name="TextBox 23"/>
           <p:cNvSpPr txBox="1"/>
           <p:nvPr/>
         </p:nvSpPr>
         <p:spPr>
           <a:xfrm>
-            <a:off x="868680" y="4823459"/>
-            <a:ext cx="457200" cy="320040"/>
-          </a:xfrm>
-          <a:prstGeom prst="rect">
-            <a:avLst/>
-          </a:prstGeom>
-          <a:noFill/>
-        </p:spPr>
-        <p:txBody>
-          <a:bodyPr wrap="square">
-            <a:spAutoFit/>
-          </a:bodyPr>
-          <a:lstStyle/>
-          <a:p>
-            <a:pPr algn="ctr">
-              <a:defRPr sz="1600">
-                <a:solidFill>
-                  <a:srgbClr val="FFFFFF"/>
-                </a:solidFill>
-                <a:latin typeface="Calibri"/>
-              </a:defRPr>
-            </a:pPr>
-            <a:r>
-              <a:t>🔗</a:t>
-            </a:r>
-          </a:p>
-        </p:txBody>
-      </p:sp>
-      <p:sp>
-        <p:nvSpPr>
-          <p:cNvPr id="22" name="TextBox 21"/>
-          <p:cNvSpPr txBox="1"/>
-          <p:nvPr/>
-        </p:nvSpPr>
-        <p:spPr>
-          <a:xfrm>
-            <a:off x="1554480" y="4773167"/>
+            <a:off x="1554480" y="4837176"/>
             <a:ext cx="9814255" cy="731520"/>
           </a:xfrm>
           <a:prstGeom prst="rect">
@@ -8270,7 +8565,7 @@
       </p:sp>
       <p:sp>
         <p:nvSpPr>
-          <p:cNvPr id="23" name="Rectangle 22"/>
+          <p:cNvPr id="25" name="Rectangle 24"/>
           <p:cNvSpPr/>
           <p:nvPr/>
         </p:nvSpPr>
@@ -8313,7 +8608,7 @@
       </p:sp>
       <p:sp>
         <p:nvSpPr>
-          <p:cNvPr id="24" name="Rectangle 23"/>
+          <p:cNvPr id="26" name="Rectangle 25"/>
           <p:cNvSpPr/>
           <p:nvPr/>
         </p:nvSpPr>
@@ -8356,7 +8651,7 @@
       </p:sp>
       <p:sp>
         <p:nvSpPr>
-          <p:cNvPr id="25" name="TextBox 24"/>
+          <p:cNvPr id="27" name="TextBox 26"/>
           <p:cNvSpPr txBox="1"/>
           <p:nvPr/>
         </p:nvSpPr>
@@ -8392,7 +8687,7 @@
       </p:sp>
       <p:sp>
         <p:nvSpPr>
-          <p:cNvPr id="26" name="TextBox 25"/>
+          <p:cNvPr id="28" name="TextBox 27"/>
           <p:cNvSpPr txBox="1"/>
           <p:nvPr/>
         </p:nvSpPr>
@@ -8648,7 +8943,7 @@
               </a:defRPr>
             </a:pPr>
             <a:r>
-              <a:t>Kerangka kerja menuju Sistem Pemerintahan Berbasis Elektronik yang matang</a:t>
+              <a:t>Kerangka kerja menuju SPBE yang matang</a:t>
             </a:r>
           </a:p>
         </p:txBody>
@@ -8662,7 +8957,7 @@
         <p:spPr>
           <a:xfrm>
             <a:off x="548640" y="1371600"/>
-            <a:ext cx="91440" cy="4572000"/>
+            <a:ext cx="91440" cy="4754880"/>
           </a:xfrm>
           <a:prstGeom prst="rect">
             <a:avLst/>
@@ -8698,19 +8993,17 @@
       </p:sp>
       <p:sp>
         <p:nvSpPr>
-          <p:cNvPr id="8" name="Rounded Rectangle 7"/>
-          <p:cNvSpPr/>
-          <p:nvPr/>
-        </p:nvSpPr>
-        <p:spPr>
-          <a:xfrm>
-            <a:off x="868680" y="1600200"/>
+          <p:cNvPr id="8" name="Pentagon 7"/>
+          <p:cNvSpPr/>
+          <p:nvPr/>
+        </p:nvSpPr>
+        <p:spPr>
+          <a:xfrm>
+            <a:off x="868680" y="1645920"/>
             <a:ext cx="457200" cy="457200"/>
           </a:xfrm>
-          <a:prstGeom prst="roundRect">
-            <a:avLst>
-              <a:gd name="adj" fmla="val 15000"/>
-            </a:avLst>
+          <a:prstGeom prst="homePlate">
+            <a:avLst/>
           </a:prstGeom>
           <a:solidFill>
             <a:srgbClr val="1A5676"/>
@@ -8743,56 +9036,20 @@
       </p:sp>
       <p:sp>
         <p:nvSpPr>
-          <p:cNvPr id="9" name="TextBox 8"/>
-          <p:cNvSpPr txBox="1"/>
-          <p:nvPr/>
-        </p:nvSpPr>
-        <p:spPr>
-          <a:xfrm>
-            <a:off x="868680" y="1668780"/>
-            <a:ext cx="457200" cy="320040"/>
-          </a:xfrm>
-          <a:prstGeom prst="rect">
-            <a:avLst/>
-          </a:prstGeom>
-          <a:noFill/>
-        </p:spPr>
-        <p:txBody>
-          <a:bodyPr wrap="square">
-            <a:spAutoFit/>
-          </a:bodyPr>
-          <a:lstStyle/>
-          <a:p>
-            <a:pPr algn="ctr">
-              <a:defRPr sz="1600">
-                <a:solidFill>
-                  <a:srgbClr val="FFFFFF"/>
-                </a:solidFill>
-                <a:latin typeface="Calibri"/>
-              </a:defRPr>
-            </a:pPr>
-            <a:r>
-              <a:t>⚙</a:t>
-            </a:r>
-          </a:p>
-        </p:txBody>
-      </p:sp>
-      <p:sp>
-        <p:nvSpPr>
-          <p:cNvPr id="10" name="Rectangle 9"/>
-          <p:cNvSpPr/>
-          <p:nvPr/>
-        </p:nvSpPr>
-        <p:spPr>
-          <a:xfrm>
-            <a:off x="1078992" y="2103120"/>
-            <a:ext cx="17419320000" cy="502920"/>
-          </a:xfrm>
-          <a:prstGeom prst="rect">
-            <a:avLst/>
-          </a:prstGeom>
-          <a:solidFill>
-            <a:srgbClr val="E2E8F0"/>
+          <p:cNvPr id="9" name="Rectangle 8"/>
+          <p:cNvSpPr/>
+          <p:nvPr/>
+        </p:nvSpPr>
+        <p:spPr>
+          <a:xfrm>
+            <a:off x="1005839" y="1783080"/>
+            <a:ext cx="182880" cy="182880"/>
+          </a:xfrm>
+          <a:prstGeom prst="rect">
+            <a:avLst/>
+          </a:prstGeom>
+          <a:solidFill>
+            <a:srgbClr val="FFFFFF"/>
           </a:solidFill>
           <a:ln>
             <a:noFill/>
@@ -8822,13 +9079,56 @@
       </p:sp>
       <p:sp>
         <p:nvSpPr>
+          <p:cNvPr id="10" name="Rectangle 9"/>
+          <p:cNvSpPr/>
+          <p:nvPr/>
+        </p:nvSpPr>
+        <p:spPr>
+          <a:xfrm>
+            <a:off x="1078992" y="2194560"/>
+            <a:ext cx="17419320000" cy="457200"/>
+          </a:xfrm>
+          <a:prstGeom prst="rect">
+            <a:avLst/>
+          </a:prstGeom>
+          <a:solidFill>
+            <a:srgbClr val="E2E8F0"/>
+          </a:solidFill>
+          <a:ln>
+            <a:noFill/>
+          </a:ln>
+        </p:spPr>
+        <p:style>
+          <a:lnRef idx="1">
+            <a:schemeClr val="accent1"/>
+          </a:lnRef>
+          <a:fillRef idx="3">
+            <a:schemeClr val="accent1"/>
+          </a:fillRef>
+          <a:effectRef idx="2">
+            <a:schemeClr val="accent1"/>
+          </a:effectRef>
+          <a:fontRef idx="minor">
+            <a:schemeClr val="lt1"/>
+          </a:fontRef>
+        </p:style>
+        <p:txBody>
+          <a:bodyPr rtlCol="0" anchor="ctr"/>
+          <a:lstStyle/>
+          <a:p>
+            <a:pPr algn="ctr"/>
+          </a:p>
+        </p:txBody>
+      </p:sp>
+      <p:sp>
+        <p:nvSpPr>
           <p:cNvPr id="11" name="TextBox 10"/>
           <p:cNvSpPr txBox="1"/>
           <p:nvPr/>
         </p:nvSpPr>
         <p:spPr>
           <a:xfrm>
-            <a:off x="1554480" y="1618488"/>
+            <a:off x="1554480" y="1682496"/>
             <a:ext cx="9814255" cy="731520"/>
           </a:xfrm>
           <a:prstGeom prst="rect">
@@ -8877,19 +9177,17 @@
       </p:sp>
       <p:sp>
         <p:nvSpPr>
-          <p:cNvPr id="12" name="Rounded Rectangle 11"/>
-          <p:cNvSpPr/>
-          <p:nvPr/>
-        </p:nvSpPr>
-        <p:spPr>
-          <a:xfrm>
-            <a:off x="868680" y="2651760"/>
+          <p:cNvPr id="12" name="Right Arrow 11"/>
+          <p:cNvSpPr/>
+          <p:nvPr/>
+        </p:nvSpPr>
+        <p:spPr>
+          <a:xfrm>
+            <a:off x="868680" y="2697480"/>
             <a:ext cx="457200" cy="457200"/>
           </a:xfrm>
-          <a:prstGeom prst="roundRect">
-            <a:avLst>
-              <a:gd name="adj" fmla="val 15000"/>
-            </a:avLst>
+          <a:prstGeom prst="rightArrow">
+            <a:avLst/>
           </a:prstGeom>
           <a:solidFill>
             <a:srgbClr val="1A5676"/>
@@ -8922,50 +9220,14 @@
       </p:sp>
       <p:sp>
         <p:nvSpPr>
-          <p:cNvPr id="13" name="TextBox 12"/>
-          <p:cNvSpPr txBox="1"/>
-          <p:nvPr/>
-        </p:nvSpPr>
-        <p:spPr>
-          <a:xfrm>
-            <a:off x="868680" y="2720340"/>
-            <a:ext cx="457200" cy="320040"/>
-          </a:xfrm>
-          <a:prstGeom prst="rect">
-            <a:avLst/>
-          </a:prstGeom>
-          <a:noFill/>
-        </p:spPr>
-        <p:txBody>
-          <a:bodyPr wrap="square">
-            <a:spAutoFit/>
-          </a:bodyPr>
-          <a:lstStyle/>
-          <a:p>
-            <a:pPr algn="ctr">
-              <a:defRPr sz="1600">
-                <a:solidFill>
-                  <a:srgbClr val="FFFFFF"/>
-                </a:solidFill>
-                <a:latin typeface="Calibri"/>
-              </a:defRPr>
-            </a:pPr>
-            <a:r>
-              <a:t>▸</a:t>
-            </a:r>
-          </a:p>
-        </p:txBody>
-      </p:sp>
-      <p:sp>
-        <p:nvSpPr>
-          <p:cNvPr id="14" name="Rectangle 13"/>
-          <p:cNvSpPr/>
-          <p:nvPr/>
-        </p:nvSpPr>
-        <p:spPr>
-          <a:xfrm>
-            <a:off x="1078992" y="3154680"/>
-            <a:ext cx="17419320000" cy="502920"/>
+          <p:cNvPr id="13" name="Rectangle 12"/>
+          <p:cNvSpPr/>
+          <p:nvPr/>
+        </p:nvSpPr>
+        <p:spPr>
+          <a:xfrm>
+            <a:off x="1078992" y="3246120"/>
+            <a:ext cx="17419320000" cy="457200"/>
           </a:xfrm>
           <a:prstGeom prst="rect">
             <a:avLst/>
@@ -9001,13 +9263,13 @@
       </p:sp>
       <p:sp>
         <p:nvSpPr>
-          <p:cNvPr id="15" name="TextBox 14"/>
+          <p:cNvPr id="14" name="TextBox 13"/>
           <p:cNvSpPr txBox="1"/>
           <p:nvPr/>
         </p:nvSpPr>
         <p:spPr>
           <a:xfrm>
-            <a:off x="1554480" y="2670048"/>
+            <a:off x="1554480" y="2734056"/>
             <a:ext cx="9814255" cy="731520"/>
           </a:xfrm>
           <a:prstGeom prst="rect">
@@ -9056,19 +9318,17 @@
       </p:sp>
       <p:sp>
         <p:nvSpPr>
-          <p:cNvPr id="16" name="Rounded Rectangle 15"/>
-          <p:cNvSpPr/>
-          <p:nvPr/>
-        </p:nvSpPr>
-        <p:spPr>
-          <a:xfrm>
-            <a:off x="868680" y="3703320"/>
+          <p:cNvPr id="15" name="Rounded Rectangle 14"/>
+          <p:cNvSpPr/>
+          <p:nvPr/>
+        </p:nvSpPr>
+        <p:spPr>
+          <a:xfrm>
+            <a:off x="868680" y="3749039"/>
             <a:ext cx="457200" cy="457200"/>
           </a:xfrm>
           <a:prstGeom prst="roundRect">
-            <a:avLst>
-              <a:gd name="adj" fmla="val 15000"/>
-            </a:avLst>
+            <a:avLst/>
           </a:prstGeom>
           <a:solidFill>
             <a:srgbClr val="1A5676"/>
@@ -9101,56 +9361,20 @@
       </p:sp>
       <p:sp>
         <p:nvSpPr>
-          <p:cNvPr id="17" name="TextBox 16"/>
-          <p:cNvSpPr txBox="1"/>
-          <p:nvPr/>
-        </p:nvSpPr>
-        <p:spPr>
-          <a:xfrm>
-            <a:off x="868680" y="3771900"/>
-            <a:ext cx="457200" cy="320040"/>
-          </a:xfrm>
-          <a:prstGeom prst="rect">
-            <a:avLst/>
-          </a:prstGeom>
-          <a:noFill/>
-        </p:spPr>
-        <p:txBody>
-          <a:bodyPr wrap="square">
-            <a:spAutoFit/>
-          </a:bodyPr>
-          <a:lstStyle/>
-          <a:p>
-            <a:pPr algn="ctr">
-              <a:defRPr sz="1600">
-                <a:solidFill>
-                  <a:srgbClr val="FFFFFF"/>
-                </a:solidFill>
-                <a:latin typeface="Calibri"/>
-              </a:defRPr>
-            </a:pPr>
-            <a:r>
-              <a:t>▣</a:t>
-            </a:r>
-          </a:p>
-        </p:txBody>
-      </p:sp>
-      <p:sp>
-        <p:nvSpPr>
-          <p:cNvPr id="18" name="Rectangle 17"/>
-          <p:cNvSpPr/>
-          <p:nvPr/>
-        </p:nvSpPr>
-        <p:spPr>
-          <a:xfrm>
-            <a:off x="1078992" y="4206240"/>
-            <a:ext cx="17419320000" cy="502920"/>
-          </a:xfrm>
-          <a:prstGeom prst="rect">
-            <a:avLst/>
-          </a:prstGeom>
-          <a:solidFill>
-            <a:srgbClr val="E2E8F0"/>
+          <p:cNvPr id="16" name="Rectangle 15"/>
+          <p:cNvSpPr/>
+          <p:nvPr/>
+        </p:nvSpPr>
+        <p:spPr>
+          <a:xfrm>
+            <a:off x="1051560" y="3931920"/>
+            <a:ext cx="91439" cy="91439"/>
+          </a:xfrm>
+          <a:prstGeom prst="rect">
+            <a:avLst/>
+          </a:prstGeom>
+          <a:solidFill>
+            <a:srgbClr val="FFFFFF"/>
           </a:solidFill>
           <a:ln>
             <a:noFill/>
@@ -9180,13 +9404,99 @@
       </p:sp>
       <p:sp>
         <p:nvSpPr>
+          <p:cNvPr id="17" name="Rectangle 16"/>
+          <p:cNvSpPr/>
+          <p:nvPr/>
+        </p:nvSpPr>
+        <p:spPr>
+          <a:xfrm>
+            <a:off x="1028700" y="3909059"/>
+            <a:ext cx="137160" cy="137160"/>
+          </a:xfrm>
+          <a:prstGeom prst="rect">
+            <a:avLst/>
+          </a:prstGeom>
+          <a:solidFill>
+            <a:srgbClr val="1A5676"/>
+          </a:solidFill>
+          <a:ln>
+            <a:noFill/>
+          </a:ln>
+        </p:spPr>
+        <p:style>
+          <a:lnRef idx="1">
+            <a:schemeClr val="accent1"/>
+          </a:lnRef>
+          <a:fillRef idx="3">
+            <a:schemeClr val="accent1"/>
+          </a:fillRef>
+          <a:effectRef idx="2">
+            <a:schemeClr val="accent1"/>
+          </a:effectRef>
+          <a:fontRef idx="minor">
+            <a:schemeClr val="lt1"/>
+          </a:fontRef>
+        </p:style>
+        <p:txBody>
+          <a:bodyPr rtlCol="0" anchor="ctr"/>
+          <a:lstStyle/>
+          <a:p>
+            <a:pPr algn="ctr"/>
+          </a:p>
+        </p:txBody>
+      </p:sp>
+      <p:sp>
+        <p:nvSpPr>
+          <p:cNvPr id="18" name="Rectangle 17"/>
+          <p:cNvSpPr/>
+          <p:nvPr/>
+        </p:nvSpPr>
+        <p:spPr>
+          <a:xfrm>
+            <a:off x="1078992" y="4297679"/>
+            <a:ext cx="17419320000" cy="457200"/>
+          </a:xfrm>
+          <a:prstGeom prst="rect">
+            <a:avLst/>
+          </a:prstGeom>
+          <a:solidFill>
+            <a:srgbClr val="E2E8F0"/>
+          </a:solidFill>
+          <a:ln>
+            <a:noFill/>
+          </a:ln>
+        </p:spPr>
+        <p:style>
+          <a:lnRef idx="1">
+            <a:schemeClr val="accent1"/>
+          </a:lnRef>
+          <a:fillRef idx="3">
+            <a:schemeClr val="accent1"/>
+          </a:fillRef>
+          <a:effectRef idx="2">
+            <a:schemeClr val="accent1"/>
+          </a:effectRef>
+          <a:fontRef idx="minor">
+            <a:schemeClr val="lt1"/>
+          </a:fontRef>
+        </p:style>
+        <p:txBody>
+          <a:bodyPr rtlCol="0" anchor="ctr"/>
+          <a:lstStyle/>
+          <a:p>
+            <a:pPr algn="ctr"/>
+          </a:p>
+        </p:txBody>
+      </p:sp>
+      <p:sp>
+        <p:nvSpPr>
           <p:cNvPr id="19" name="TextBox 18"/>
           <p:cNvSpPr txBox="1"/>
           <p:nvPr/>
         </p:nvSpPr>
         <p:spPr>
           <a:xfrm>
-            <a:off x="1554480" y="3721607"/>
+            <a:off x="1554480" y="3785615"/>
             <a:ext cx="9814255" cy="731520"/>
           </a:xfrm>
           <a:prstGeom prst="rect">
@@ -9235,19 +9545,17 @@
       </p:sp>
       <p:sp>
         <p:nvSpPr>
-          <p:cNvPr id="20" name="Rounded Rectangle 19"/>
-          <p:cNvSpPr/>
-          <p:nvPr/>
-        </p:nvSpPr>
-        <p:spPr>
-          <a:xfrm>
-            <a:off x="868680" y="4754879"/>
+          <p:cNvPr id="20" name="Diamond 19"/>
+          <p:cNvSpPr/>
+          <p:nvPr/>
+        </p:nvSpPr>
+        <p:spPr>
+          <a:xfrm>
+            <a:off x="868680" y="4800600"/>
             <a:ext cx="457200" cy="457200"/>
           </a:xfrm>
-          <a:prstGeom prst="roundRect">
-            <a:avLst>
-              <a:gd name="adj" fmla="val 15000"/>
-            </a:avLst>
+          <a:prstGeom prst="diamond">
+            <a:avLst/>
           </a:prstGeom>
           <a:solidFill>
             <a:srgbClr val="1A5676"/>
@@ -9280,37 +9588,44 @@
       </p:sp>
       <p:sp>
         <p:nvSpPr>
-          <p:cNvPr id="21" name="TextBox 20"/>
-          <p:cNvSpPr txBox="1"/>
-          <p:nvPr/>
-        </p:nvSpPr>
-        <p:spPr>
-          <a:xfrm>
-            <a:off x="868680" y="4823459"/>
-            <a:ext cx="457200" cy="320040"/>
-          </a:xfrm>
-          <a:prstGeom prst="rect">
-            <a:avLst/>
-          </a:prstGeom>
-          <a:noFill/>
-        </p:spPr>
-        <p:txBody>
-          <a:bodyPr wrap="square">
-            <a:spAutoFit/>
-          </a:bodyPr>
-          <a:lstStyle/>
-          <a:p>
-            <a:pPr algn="ctr">
-              <a:defRPr sz="1600">
-                <a:solidFill>
-                  <a:srgbClr val="FFFFFF"/>
-                </a:solidFill>
-                <a:latin typeface="Calibri"/>
-              </a:defRPr>
-            </a:pPr>
-            <a:r>
-              <a:t>◆</a:t>
-            </a:r>
+          <p:cNvPr id="21" name="Diamond 20"/>
+          <p:cNvSpPr/>
+          <p:nvPr/>
+        </p:nvSpPr>
+        <p:spPr>
+          <a:xfrm>
+            <a:off x="937259" y="4869180"/>
+            <a:ext cx="320040" cy="320040"/>
+          </a:xfrm>
+          <a:prstGeom prst="diamond">
+            <a:avLst/>
+          </a:prstGeom>
+          <a:solidFill>
+            <a:srgbClr val="FFFFFF"/>
+          </a:solidFill>
+          <a:ln>
+            <a:noFill/>
+          </a:ln>
+        </p:spPr>
+        <p:style>
+          <a:lnRef idx="1">
+            <a:schemeClr val="accent1"/>
+          </a:lnRef>
+          <a:fillRef idx="3">
+            <a:schemeClr val="accent1"/>
+          </a:fillRef>
+          <a:effectRef idx="2">
+            <a:schemeClr val="accent1"/>
+          </a:effectRef>
+          <a:fontRef idx="minor">
+            <a:schemeClr val="lt1"/>
+          </a:fontRef>
+        </p:style>
+        <p:txBody>
+          <a:bodyPr rtlCol="0" anchor="ctr"/>
+          <a:lstStyle/>
+          <a:p>
+            <a:pPr algn="ctr"/>
           </a:p>
         </p:txBody>
       </p:sp>
@@ -9322,7 +9637,7 @@
         </p:nvSpPr>
         <p:spPr>
           <a:xfrm>
-            <a:off x="1554480" y="4773167"/>
+            <a:off x="1554480" y="4837176"/>
             <a:ext cx="9814255" cy="731520"/>
           </a:xfrm>
           <a:prstGeom prst="rect">
@@ -9647,14 +9962,14 @@
         </p:nvSpPr>
         <p:spPr>
           <a:xfrm>
-            <a:off x="9265615" y="3657600"/>
-            <a:ext cx="3657600" cy="3657600"/>
-          </a:xfrm>
-          <a:prstGeom prst="rect">
-            <a:avLst/>
-          </a:prstGeom>
-          <a:solidFill>
-            <a:srgbClr val="0F2A4A"/>
+            <a:off x="0" y="6601968"/>
+            <a:ext cx="12191695" cy="256032"/>
+          </a:xfrm>
+          <a:prstGeom prst="rect">
+            <a:avLst/>
+          </a:prstGeom>
+          <a:solidFill>
+            <a:srgbClr val="0D9488"/>
           </a:solidFill>
           <a:ln>
             <a:noFill/>
@@ -9684,16 +9999,16 @@
       </p:sp>
       <p:sp>
         <p:nvSpPr>
-          <p:cNvPr id="5" name="Rectangle 4"/>
-          <p:cNvSpPr/>
-          <p:nvPr/>
-        </p:nvSpPr>
-        <p:spPr>
-          <a:xfrm>
-            <a:off x="0" y="6601968"/>
-            <a:ext cx="12191695" cy="256032"/>
-          </a:xfrm>
-          <a:prstGeom prst="rect">
+          <p:cNvPr id="5" name="Diamond 4"/>
+          <p:cNvSpPr/>
+          <p:nvPr/>
+        </p:nvSpPr>
+        <p:spPr>
+          <a:xfrm>
+            <a:off x="5730087" y="1097280"/>
+            <a:ext cx="731520" cy="731520"/>
+          </a:xfrm>
+          <a:prstGeom prst="diamond">
             <a:avLst/>
           </a:prstGeom>
           <a:solidFill>
@@ -9727,22 +10042,20 @@
       </p:sp>
       <p:sp>
         <p:nvSpPr>
-          <p:cNvPr id="6" name="Rounded Rectangle 5"/>
-          <p:cNvSpPr/>
-          <p:nvPr/>
-        </p:nvSpPr>
-        <p:spPr>
-          <a:xfrm>
-            <a:off x="5684367" y="1188720"/>
-            <a:ext cx="822960" cy="822960"/>
-          </a:xfrm>
-          <a:prstGeom prst="roundRect">
-            <a:avLst>
-              <a:gd name="adj" fmla="val 15000"/>
-            </a:avLst>
-          </a:prstGeom>
-          <a:solidFill>
-            <a:srgbClr val="0D9488"/>
+          <p:cNvPr id="6" name="Diamond 5"/>
+          <p:cNvSpPr/>
+          <p:nvPr/>
+        </p:nvSpPr>
+        <p:spPr>
+          <a:xfrm>
+            <a:off x="5839815" y="1207007"/>
+            <a:ext cx="512063" cy="512063"/>
+          </a:xfrm>
+          <a:prstGeom prst="diamond">
+            <a:avLst/>
+          </a:prstGeom>
+          <a:solidFill>
+            <a:srgbClr val="FFFFFF"/>
           </a:solidFill>
           <a:ln>
             <a:noFill/>
@@ -9773,42 +10086,6 @@
       <p:sp>
         <p:nvSpPr>
           <p:cNvPr id="7" name="TextBox 6"/>
-          <p:cNvSpPr txBox="1"/>
-          <p:nvPr/>
-        </p:nvSpPr>
-        <p:spPr>
-          <a:xfrm>
-            <a:off x="5684367" y="1312164"/>
-            <a:ext cx="822960" cy="576072"/>
-          </a:xfrm>
-          <a:prstGeom prst="rect">
-            <a:avLst/>
-          </a:prstGeom>
-          <a:noFill/>
-        </p:spPr>
-        <p:txBody>
-          <a:bodyPr wrap="square">
-            <a:spAutoFit/>
-          </a:bodyPr>
-          <a:lstStyle/>
-          <a:p>
-            <a:pPr algn="ctr">
-              <a:defRPr sz="3000">
-                <a:solidFill>
-                  <a:srgbClr val="FFFFFF"/>
-                </a:solidFill>
-                <a:latin typeface="Calibri"/>
-              </a:defRPr>
-            </a:pPr>
-            <a:r>
-              <a:t>◆</a:t>
-            </a:r>
-          </a:p>
-        </p:txBody>
-      </p:sp>
-      <p:sp>
-        <p:nvSpPr>
-          <p:cNvPr id="8" name="TextBox 7"/>
           <p:cNvSpPr txBox="1"/>
           <p:nvPr/>
         </p:nvSpPr>
@@ -9844,7 +10121,7 @@
       </p:sp>
       <p:sp>
         <p:nvSpPr>
-          <p:cNvPr id="9" name="TextBox 8"/>
+          <p:cNvPr id="8" name="TextBox 7"/>
           <p:cNvSpPr txBox="1"/>
           <p:nvPr/>
         </p:nvSpPr>
@@ -9880,7 +10157,7 @@
       </p:sp>
       <p:sp>
         <p:nvSpPr>
-          <p:cNvPr id="10" name="Rectangle 9"/>
+          <p:cNvPr id="9" name="Rectangle 8"/>
           <p:cNvSpPr/>
           <p:nvPr/>
         </p:nvSpPr>
@@ -9923,7 +10200,7 @@
       </p:sp>
       <p:sp>
         <p:nvSpPr>
-          <p:cNvPr id="11" name="TextBox 10"/>
+          <p:cNvPr id="10" name="TextBox 9"/>
           <p:cNvSpPr txBox="1"/>
           <p:nvPr/>
         </p:nvSpPr>

--- a/RESUME_TUPOKSI_egov.pptx
+++ b/RESUME_TUPOKSI_egov.pptx
@@ -3319,93 +3319,43 @@
       </p:sp>
       <p:sp>
         <p:nvSpPr>
-          <p:cNvPr id="7" name="Rectangle 6"/>
-          <p:cNvSpPr/>
-          <p:nvPr/>
-        </p:nvSpPr>
-        <p:spPr>
-          <a:xfrm>
-            <a:off x="1005839" y="1554480"/>
-            <a:ext cx="365760" cy="365760"/>
-          </a:xfrm>
-          <a:prstGeom prst="rect">
-            <a:avLst/>
-          </a:prstGeom>
-          <a:solidFill>
-            <a:srgbClr val="FFFFFF"/>
-          </a:solidFill>
-          <a:ln>
-            <a:noFill/>
-          </a:ln>
-        </p:spPr>
-        <p:style>
-          <a:lnRef idx="1">
-            <a:schemeClr val="accent1"/>
-          </a:lnRef>
-          <a:fillRef idx="3">
-            <a:schemeClr val="accent1"/>
-          </a:fillRef>
-          <a:effectRef idx="2">
-            <a:schemeClr val="accent1"/>
-          </a:effectRef>
-          <a:fontRef idx="minor">
-            <a:schemeClr val="lt1"/>
-          </a:fontRef>
-        </p:style>
-        <p:txBody>
-          <a:bodyPr rtlCol="0" anchor="ctr"/>
-          <a:lstStyle/>
-          <a:p>
-            <a:pPr algn="ctr"/>
-          </a:p>
-        </p:txBody>
-      </p:sp>
-      <p:sp>
-        <p:nvSpPr>
-          <p:cNvPr id="8" name="Rectangle 7"/>
-          <p:cNvSpPr/>
-          <p:nvPr/>
-        </p:nvSpPr>
-        <p:spPr>
-          <a:xfrm>
-            <a:off x="1120139" y="1668780"/>
-            <a:ext cx="137160" cy="137160"/>
-          </a:xfrm>
-          <a:prstGeom prst="rect">
-            <a:avLst/>
-          </a:prstGeom>
-          <a:solidFill>
-            <a:srgbClr val="0D9488"/>
-          </a:solidFill>
-          <a:ln>
-            <a:noFill/>
-          </a:ln>
-        </p:spPr>
-        <p:style>
-          <a:lnRef idx="1">
-            <a:schemeClr val="accent1"/>
-          </a:lnRef>
-          <a:fillRef idx="3">
-            <a:schemeClr val="accent1"/>
-          </a:fillRef>
-          <a:effectRef idx="2">
-            <a:schemeClr val="accent1"/>
-          </a:effectRef>
-          <a:fontRef idx="minor">
-            <a:schemeClr val="lt1"/>
-          </a:fontRef>
-        </p:style>
-        <p:txBody>
-          <a:bodyPr rtlCol="0" anchor="ctr"/>
-          <a:lstStyle/>
-          <a:p>
-            <a:pPr algn="ctr"/>
-          </a:p>
-        </p:txBody>
-      </p:sp>
-      <p:sp>
-        <p:nvSpPr>
-          <p:cNvPr id="9" name="TextBox 8"/>
+          <p:cNvPr id="7" name="TextBox 6"/>
+          <p:cNvSpPr txBox="1"/>
+          <p:nvPr/>
+        </p:nvSpPr>
+        <p:spPr>
+          <a:xfrm>
+            <a:off x="822959" y="1430121"/>
+            <a:ext cx="731520" cy="621792"/>
+          </a:xfrm>
+          <a:prstGeom prst="rect">
+            <a:avLst/>
+          </a:prstGeom>
+          <a:noFill/>
+        </p:spPr>
+        <p:txBody>
+          <a:bodyPr wrap="none">
+            <a:spAutoFit/>
+          </a:bodyPr>
+          <a:lstStyle/>
+          <a:p>
+            <a:pPr algn="ctr">
+              <a:defRPr sz="2800">
+                <a:solidFill>
+                  <a:srgbClr val="FFFFFF"/>
+                </a:solidFill>
+                <a:latin typeface="Segoe UI Emoji"/>
+              </a:defRPr>
+            </a:pPr>
+            <a:r>
+              <a:t>📊</a:t>
+            </a:r>
+          </a:p>
+        </p:txBody>
+      </p:sp>
+      <p:sp>
+        <p:nvSpPr>
+          <p:cNvPr id="8" name="TextBox 7"/>
           <p:cNvSpPr txBox="1"/>
           <p:nvPr/>
         </p:nvSpPr>
@@ -3441,7 +3391,7 @@
       </p:sp>
       <p:sp>
         <p:nvSpPr>
-          <p:cNvPr id="10" name="TextBox 9"/>
+          <p:cNvPr id="9" name="TextBox 8"/>
           <p:cNvSpPr txBox="1"/>
           <p:nvPr/>
         </p:nvSpPr>
@@ -3477,7 +3427,7 @@
       </p:sp>
       <p:sp>
         <p:nvSpPr>
-          <p:cNvPr id="11" name="TextBox 10"/>
+          <p:cNvPr id="10" name="TextBox 9"/>
           <p:cNvSpPr txBox="1"/>
           <p:nvPr/>
         </p:nvSpPr>
@@ -3513,7 +3463,7 @@
       </p:sp>
       <p:sp>
         <p:nvSpPr>
-          <p:cNvPr id="12" name="Rectangle 11"/>
+          <p:cNvPr id="11" name="Rectangle 10"/>
           <p:cNvSpPr/>
           <p:nvPr/>
         </p:nvSpPr>
@@ -3556,7 +3506,7 @@
       </p:sp>
       <p:sp>
         <p:nvSpPr>
-          <p:cNvPr id="13" name="TextBox 12"/>
+          <p:cNvPr id="12" name="TextBox 11"/>
           <p:cNvSpPr txBox="1"/>
           <p:nvPr/>
         </p:nvSpPr>
@@ -3825,8 +3775,8 @@
         </p:nvSpPr>
         <p:spPr>
           <a:xfrm>
-            <a:off x="548639" y="1371600"/>
-            <a:ext cx="3484778" cy="3840480"/>
+            <a:off x="548639" y="1417320"/>
+            <a:ext cx="3484778" cy="3657600"/>
           </a:xfrm>
           <a:prstGeom prst="roundRect">
             <a:avLst>
@@ -3872,7 +3822,7 @@
         </p:nvSpPr>
         <p:spPr>
           <a:xfrm>
-            <a:off x="548639" y="1371600"/>
+            <a:off x="548639" y="1417320"/>
             <a:ext cx="3484778" cy="73152"/>
           </a:xfrm>
           <a:prstGeom prst="rect">
@@ -3915,7 +3865,7 @@
         </p:nvSpPr>
         <p:spPr>
           <a:xfrm>
-            <a:off x="777239" y="1645920"/>
+            <a:off x="777239" y="1691640"/>
             <a:ext cx="502920" cy="502920"/>
           </a:xfrm>
           <a:prstGeom prst="roundRect">
@@ -3952,99 +3902,49 @@
       </p:sp>
       <p:sp>
         <p:nvSpPr>
-          <p:cNvPr id="10" name="Rectangle 9"/>
-          <p:cNvSpPr/>
-          <p:nvPr/>
-        </p:nvSpPr>
-        <p:spPr>
-          <a:xfrm>
-            <a:off x="960119" y="1828800"/>
-            <a:ext cx="137160" cy="137160"/>
-          </a:xfrm>
-          <a:prstGeom prst="rect">
-            <a:avLst/>
-          </a:prstGeom>
-          <a:solidFill>
-            <a:srgbClr val="FFFFFF"/>
-          </a:solidFill>
-          <a:ln>
-            <a:noFill/>
-          </a:ln>
-        </p:spPr>
-        <p:style>
-          <a:lnRef idx="1">
-            <a:schemeClr val="accent1"/>
-          </a:lnRef>
-          <a:fillRef idx="3">
-            <a:schemeClr val="accent1"/>
-          </a:fillRef>
-          <a:effectRef idx="2">
-            <a:schemeClr val="accent1"/>
-          </a:effectRef>
-          <a:fontRef idx="minor">
-            <a:schemeClr val="lt1"/>
-          </a:fontRef>
-        </p:style>
-        <p:txBody>
-          <a:bodyPr rtlCol="0" anchor="ctr"/>
-          <a:lstStyle/>
-          <a:p>
-            <a:pPr algn="ctr"/>
-          </a:p>
-        </p:txBody>
-      </p:sp>
-      <p:sp>
-        <p:nvSpPr>
-          <p:cNvPr id="11" name="Rectangle 10"/>
-          <p:cNvSpPr/>
-          <p:nvPr/>
-        </p:nvSpPr>
-        <p:spPr>
-          <a:xfrm>
-            <a:off x="960119" y="1828800"/>
-            <a:ext cx="137160" cy="137160"/>
-          </a:xfrm>
-          <a:prstGeom prst="rect">
-            <a:avLst/>
-          </a:prstGeom>
-          <a:solidFill>
-            <a:srgbClr val="0A1628"/>
-          </a:solidFill>
-          <a:ln>
-            <a:noFill/>
-          </a:ln>
-        </p:spPr>
-        <p:style>
-          <a:lnRef idx="1">
-            <a:schemeClr val="accent1"/>
-          </a:lnRef>
-          <a:fillRef idx="3">
-            <a:schemeClr val="accent1"/>
-          </a:fillRef>
-          <a:effectRef idx="2">
-            <a:schemeClr val="accent1"/>
-          </a:effectRef>
-          <a:fontRef idx="minor">
-            <a:schemeClr val="lt1"/>
-          </a:fontRef>
-        </p:style>
-        <p:txBody>
-          <a:bodyPr rtlCol="0" anchor="ctr"/>
-          <a:lstStyle/>
-          <a:p>
-            <a:pPr algn="ctr"/>
-          </a:p>
-        </p:txBody>
-      </p:sp>
-      <p:sp>
-        <p:nvSpPr>
-          <p:cNvPr id="12" name="TextBox 11"/>
+          <p:cNvPr id="10" name="TextBox 9"/>
           <p:cNvSpPr txBox="1"/>
           <p:nvPr/>
         </p:nvSpPr>
         <p:spPr>
           <a:xfrm>
-            <a:off x="1417319" y="1719072"/>
+            <a:off x="777239" y="1731873"/>
+            <a:ext cx="502920" cy="427482"/>
+          </a:xfrm>
+          <a:prstGeom prst="rect">
+            <a:avLst/>
+          </a:prstGeom>
+          <a:noFill/>
+        </p:spPr>
+        <p:txBody>
+          <a:bodyPr wrap="none">
+            <a:spAutoFit/>
+          </a:bodyPr>
+          <a:lstStyle/>
+          <a:p>
+            <a:pPr algn="ctr">
+              <a:defRPr sz="1900">
+                <a:solidFill>
+                  <a:srgbClr val="FFFFFF"/>
+                </a:solidFill>
+                <a:latin typeface="Segoe UI Emoji"/>
+              </a:defRPr>
+            </a:pPr>
+            <a:r>
+              <a:t>💻</a:t>
+            </a:r>
+          </a:p>
+        </p:txBody>
+      </p:sp>
+      <p:sp>
+        <p:nvSpPr>
+          <p:cNvPr id="11" name="TextBox 10"/>
+          <p:cNvSpPr txBox="1"/>
+          <p:nvPr/>
+        </p:nvSpPr>
+        <p:spPr>
+          <a:xfrm>
+            <a:off x="1417319" y="1764792"/>
             <a:ext cx="457200" cy="274320"/>
           </a:xfrm>
           <a:prstGeom prst="rect">
@@ -4074,7 +3974,7 @@
       </p:sp>
       <p:sp>
         <p:nvSpPr>
-          <p:cNvPr id="13" name="TextBox 12"/>
+          <p:cNvPr id="12" name="TextBox 11"/>
           <p:cNvSpPr txBox="1"/>
           <p:nvPr/>
         </p:nvSpPr>
@@ -4114,13 +4014,13 @@
       </p:sp>
       <p:sp>
         <p:nvSpPr>
-          <p:cNvPr id="14" name="Rectangle 13"/>
+          <p:cNvPr id="13" name="Rectangle 12"/>
           <p:cNvSpPr/>
           <p:nvPr/>
         </p:nvSpPr>
         <p:spPr>
           <a:xfrm>
-            <a:off x="777239" y="3291840"/>
+            <a:off x="777239" y="3291839"/>
             <a:ext cx="3027578" cy="17419320000"/>
           </a:xfrm>
           <a:prstGeom prst="rect">
@@ -4157,14 +4057,14 @@
       </p:sp>
       <p:sp>
         <p:nvSpPr>
-          <p:cNvPr id="15" name="TextBox 14"/>
+          <p:cNvPr id="14" name="TextBox 13"/>
           <p:cNvSpPr txBox="1"/>
           <p:nvPr/>
         </p:nvSpPr>
         <p:spPr>
           <a:xfrm>
             <a:off x="777239" y="3474720"/>
-            <a:ext cx="3027578" cy="1463040"/>
+            <a:ext cx="3027578" cy="1371600"/>
           </a:xfrm>
           <a:prstGeom prst="rect">
             <a:avLst/>
@@ -4205,14 +4105,14 @@
       </p:sp>
       <p:sp>
         <p:nvSpPr>
-          <p:cNvPr id="16" name="Rounded Rectangle 15"/>
+          <p:cNvPr id="15" name="Rounded Rectangle 14"/>
           <p:cNvSpPr/>
           <p:nvPr/>
         </p:nvSpPr>
         <p:spPr>
           <a:xfrm>
-            <a:off x="4353458" y="1371600"/>
-            <a:ext cx="3484778" cy="3840480"/>
+            <a:off x="4353458" y="1417320"/>
+            <a:ext cx="3484778" cy="3657600"/>
           </a:xfrm>
           <a:prstGeom prst="roundRect">
             <a:avLst>
@@ -4252,13 +4152,13 @@
       </p:sp>
       <p:sp>
         <p:nvSpPr>
-          <p:cNvPr id="17" name="Rectangle 16"/>
+          <p:cNvPr id="16" name="Rectangle 15"/>
           <p:cNvSpPr/>
           <p:nvPr/>
         </p:nvSpPr>
         <p:spPr>
           <a:xfrm>
-            <a:off x="4353458" y="1371600"/>
+            <a:off x="4353458" y="1417320"/>
             <a:ext cx="3484778" cy="73152"/>
           </a:xfrm>
           <a:prstGeom prst="rect">
@@ -4295,16 +4195,16 @@
       </p:sp>
       <p:sp>
         <p:nvSpPr>
-          <p:cNvPr id="18" name="Pentagon 17"/>
+          <p:cNvPr id="17" name="Rounded Rectangle 16"/>
           <p:cNvSpPr/>
           <p:nvPr/>
         </p:nvSpPr>
         <p:spPr>
           <a:xfrm>
-            <a:off x="4582058" y="1645920"/>
+            <a:off x="4582058" y="1691640"/>
             <a:ext cx="502920" cy="502920"/>
           </a:xfrm>
-          <a:prstGeom prst="homePlate">
+          <a:prstGeom prst="roundRect">
             <a:avLst/>
           </a:prstGeom>
           <a:solidFill>
@@ -4338,56 +4238,49 @@
       </p:sp>
       <p:sp>
         <p:nvSpPr>
-          <p:cNvPr id="19" name="Rectangle 18"/>
-          <p:cNvSpPr/>
-          <p:nvPr/>
-        </p:nvSpPr>
-        <p:spPr>
-          <a:xfrm>
-            <a:off x="4732934" y="1796796"/>
-            <a:ext cx="201168" cy="201168"/>
-          </a:xfrm>
-          <a:prstGeom prst="rect">
-            <a:avLst/>
-          </a:prstGeom>
-          <a:solidFill>
-            <a:srgbClr val="FFFFFF"/>
-          </a:solidFill>
-          <a:ln>
-            <a:noFill/>
-          </a:ln>
-        </p:spPr>
-        <p:style>
-          <a:lnRef idx="1">
-            <a:schemeClr val="accent1"/>
-          </a:lnRef>
-          <a:fillRef idx="3">
-            <a:schemeClr val="accent1"/>
-          </a:fillRef>
-          <a:effectRef idx="2">
-            <a:schemeClr val="accent1"/>
-          </a:effectRef>
-          <a:fontRef idx="minor">
-            <a:schemeClr val="lt1"/>
-          </a:fontRef>
-        </p:style>
-        <p:txBody>
-          <a:bodyPr rtlCol="0" anchor="ctr"/>
-          <a:lstStyle/>
-          <a:p>
-            <a:pPr algn="ctr"/>
-          </a:p>
-        </p:txBody>
-      </p:sp>
-      <p:sp>
-        <p:nvSpPr>
-          <p:cNvPr id="20" name="TextBox 19"/>
+          <p:cNvPr id="18" name="TextBox 17"/>
           <p:cNvSpPr txBox="1"/>
           <p:nvPr/>
         </p:nvSpPr>
         <p:spPr>
           <a:xfrm>
-            <a:off x="5222138" y="1719072"/>
+            <a:off x="4582058" y="1731873"/>
+            <a:ext cx="502920" cy="427482"/>
+          </a:xfrm>
+          <a:prstGeom prst="rect">
+            <a:avLst/>
+          </a:prstGeom>
+          <a:noFill/>
+        </p:spPr>
+        <p:txBody>
+          <a:bodyPr wrap="none">
+            <a:spAutoFit/>
+          </a:bodyPr>
+          <a:lstStyle/>
+          <a:p>
+            <a:pPr algn="ctr">
+              <a:defRPr sz="1900">
+                <a:solidFill>
+                  <a:srgbClr val="FFFFFF"/>
+                </a:solidFill>
+                <a:latin typeface="Segoe UI Emoji"/>
+              </a:defRPr>
+            </a:pPr>
+            <a:r>
+              <a:t>⚙️</a:t>
+            </a:r>
+          </a:p>
+        </p:txBody>
+      </p:sp>
+      <p:sp>
+        <p:nvSpPr>
+          <p:cNvPr id="19" name="TextBox 18"/>
+          <p:cNvSpPr txBox="1"/>
+          <p:nvPr/>
+        </p:nvSpPr>
+        <p:spPr>
+          <a:xfrm>
+            <a:off x="5222138" y="1764792"/>
             <a:ext cx="457200" cy="274320"/>
           </a:xfrm>
           <a:prstGeom prst="rect">
@@ -4417,7 +4310,7 @@
       </p:sp>
       <p:sp>
         <p:nvSpPr>
-          <p:cNvPr id="21" name="TextBox 20"/>
+          <p:cNvPr id="20" name="TextBox 19"/>
           <p:cNvSpPr txBox="1"/>
           <p:nvPr/>
         </p:nvSpPr>
@@ -4453,13 +4346,13 @@
       </p:sp>
       <p:sp>
         <p:nvSpPr>
-          <p:cNvPr id="22" name="Rectangle 21"/>
+          <p:cNvPr id="21" name="Rectangle 20"/>
           <p:cNvSpPr/>
           <p:nvPr/>
         </p:nvSpPr>
         <p:spPr>
           <a:xfrm>
-            <a:off x="4582058" y="3291840"/>
+            <a:off x="4582058" y="3291839"/>
             <a:ext cx="3027578" cy="17419320000"/>
           </a:xfrm>
           <a:prstGeom prst="rect">
@@ -4496,14 +4389,14 @@
       </p:sp>
       <p:sp>
         <p:nvSpPr>
-          <p:cNvPr id="23" name="TextBox 22"/>
+          <p:cNvPr id="22" name="TextBox 21"/>
           <p:cNvSpPr txBox="1"/>
           <p:nvPr/>
         </p:nvSpPr>
         <p:spPr>
           <a:xfrm>
             <a:off x="4582058" y="3474720"/>
-            <a:ext cx="3027578" cy="1463040"/>
+            <a:ext cx="3027578" cy="1371600"/>
           </a:xfrm>
           <a:prstGeom prst="rect">
             <a:avLst/>
@@ -4544,14 +4437,14 @@
       </p:sp>
       <p:sp>
         <p:nvSpPr>
-          <p:cNvPr id="24" name="Rounded Rectangle 23"/>
+          <p:cNvPr id="23" name="Rounded Rectangle 22"/>
           <p:cNvSpPr/>
           <p:nvPr/>
         </p:nvSpPr>
         <p:spPr>
           <a:xfrm>
-            <a:off x="8158276" y="1371600"/>
-            <a:ext cx="3484778" cy="3840480"/>
+            <a:off x="8158276" y="1417320"/>
+            <a:ext cx="3484778" cy="3657600"/>
           </a:xfrm>
           <a:prstGeom prst="roundRect">
             <a:avLst>
@@ -4591,13 +4484,13 @@
       </p:sp>
       <p:sp>
         <p:nvSpPr>
-          <p:cNvPr id="25" name="Rectangle 24"/>
+          <p:cNvPr id="24" name="Rectangle 23"/>
           <p:cNvSpPr/>
           <p:nvPr/>
         </p:nvSpPr>
         <p:spPr>
           <a:xfrm>
-            <a:off x="8158276" y="1371600"/>
+            <a:off x="8158276" y="1417320"/>
             <a:ext cx="3484778" cy="73152"/>
           </a:xfrm>
           <a:prstGeom prst="rect">
@@ -4634,16 +4527,16 @@
       </p:sp>
       <p:sp>
         <p:nvSpPr>
-          <p:cNvPr id="26" name="Rectangle 25"/>
+          <p:cNvPr id="25" name="Rounded Rectangle 24"/>
           <p:cNvSpPr/>
           <p:nvPr/>
         </p:nvSpPr>
         <p:spPr>
           <a:xfrm>
-            <a:off x="8386876" y="1796796"/>
-            <a:ext cx="502920" cy="352044"/>
-          </a:xfrm>
-          <a:prstGeom prst="rect">
+            <a:off x="8386876" y="1691640"/>
+            <a:ext cx="502920" cy="502920"/>
+          </a:xfrm>
+          <a:prstGeom prst="roundRect">
             <a:avLst/>
           </a:prstGeom>
           <a:solidFill>
@@ -4677,99 +4570,49 @@
       </p:sp>
       <p:sp>
         <p:nvSpPr>
-          <p:cNvPr id="27" name="Isosceles Triangle 26"/>
-          <p:cNvSpPr/>
-          <p:nvPr/>
-        </p:nvSpPr>
-        <p:spPr>
-          <a:xfrm>
-            <a:off x="8386876" y="1645920"/>
-            <a:ext cx="502920" cy="251460"/>
-          </a:xfrm>
-          <a:prstGeom prst="triangle">
-            <a:avLst/>
-          </a:prstGeom>
-          <a:solidFill>
-            <a:srgbClr val="0D9488"/>
-          </a:solidFill>
-          <a:ln>
-            <a:noFill/>
-          </a:ln>
-        </p:spPr>
-        <p:style>
-          <a:lnRef idx="1">
-            <a:schemeClr val="accent1"/>
-          </a:lnRef>
-          <a:fillRef idx="3">
-            <a:schemeClr val="accent1"/>
-          </a:fillRef>
-          <a:effectRef idx="2">
-            <a:schemeClr val="accent1"/>
-          </a:effectRef>
-          <a:fontRef idx="minor">
-            <a:schemeClr val="lt1"/>
-          </a:fontRef>
-        </p:style>
-        <p:txBody>
-          <a:bodyPr rtlCol="0" anchor="ctr"/>
-          <a:lstStyle/>
-          <a:p>
-            <a:pPr algn="ctr"/>
-          </a:p>
-        </p:txBody>
-      </p:sp>
-      <p:sp>
-        <p:nvSpPr>
-          <p:cNvPr id="28" name="Rectangle 27"/>
-          <p:cNvSpPr/>
-          <p:nvPr/>
-        </p:nvSpPr>
-        <p:spPr>
-          <a:xfrm>
-            <a:off x="8537752" y="1897380"/>
-            <a:ext cx="75438" cy="75438"/>
-          </a:xfrm>
-          <a:prstGeom prst="rect">
-            <a:avLst/>
-          </a:prstGeom>
-          <a:solidFill>
-            <a:srgbClr val="FFFFFF"/>
-          </a:solidFill>
-          <a:ln>
-            <a:noFill/>
-          </a:ln>
-        </p:spPr>
-        <p:style>
-          <a:lnRef idx="1">
-            <a:schemeClr val="accent1"/>
-          </a:lnRef>
-          <a:fillRef idx="3">
-            <a:schemeClr val="accent1"/>
-          </a:fillRef>
-          <a:effectRef idx="2">
-            <a:schemeClr val="accent1"/>
-          </a:effectRef>
-          <a:fontRef idx="minor">
-            <a:schemeClr val="lt1"/>
-          </a:fontRef>
-        </p:style>
-        <p:txBody>
-          <a:bodyPr rtlCol="0" anchor="ctr"/>
-          <a:lstStyle/>
-          <a:p>
-            <a:pPr algn="ctr"/>
-          </a:p>
-        </p:txBody>
-      </p:sp>
-      <p:sp>
-        <p:nvSpPr>
-          <p:cNvPr id="29" name="TextBox 28"/>
+          <p:cNvPr id="26" name="TextBox 25"/>
           <p:cNvSpPr txBox="1"/>
           <p:nvPr/>
         </p:nvSpPr>
         <p:spPr>
           <a:xfrm>
-            <a:off x="9026956" y="1719072"/>
+            <a:off x="8386876" y="1731873"/>
+            <a:ext cx="502920" cy="427482"/>
+          </a:xfrm>
+          <a:prstGeom prst="rect">
+            <a:avLst/>
+          </a:prstGeom>
+          <a:noFill/>
+        </p:spPr>
+        <p:txBody>
+          <a:bodyPr wrap="none">
+            <a:spAutoFit/>
+          </a:bodyPr>
+          <a:lstStyle/>
+          <a:p>
+            <a:pPr algn="ctr">
+              <a:defRPr sz="1900">
+                <a:solidFill>
+                  <a:srgbClr val="FFFFFF"/>
+                </a:solidFill>
+                <a:latin typeface="Segoe UI Emoji"/>
+              </a:defRPr>
+            </a:pPr>
+            <a:r>
+              <a:t>🌆</a:t>
+            </a:r>
+          </a:p>
+        </p:txBody>
+      </p:sp>
+      <p:sp>
+        <p:nvSpPr>
+          <p:cNvPr id="27" name="TextBox 26"/>
+          <p:cNvSpPr txBox="1"/>
+          <p:nvPr/>
+        </p:nvSpPr>
+        <p:spPr>
+          <a:xfrm>
+            <a:off x="9026956" y="1764792"/>
             <a:ext cx="457200" cy="274320"/>
           </a:xfrm>
           <a:prstGeom prst="rect">
@@ -4799,7 +4642,7 @@
       </p:sp>
       <p:sp>
         <p:nvSpPr>
-          <p:cNvPr id="30" name="TextBox 29"/>
+          <p:cNvPr id="28" name="TextBox 27"/>
           <p:cNvSpPr txBox="1"/>
           <p:nvPr/>
         </p:nvSpPr>
@@ -4839,13 +4682,13 @@
       </p:sp>
       <p:sp>
         <p:nvSpPr>
-          <p:cNvPr id="31" name="Rectangle 30"/>
+          <p:cNvPr id="29" name="Rectangle 28"/>
           <p:cNvSpPr/>
           <p:nvPr/>
         </p:nvSpPr>
         <p:spPr>
           <a:xfrm>
-            <a:off x="8386876" y="3291840"/>
+            <a:off x="8386876" y="3291839"/>
             <a:ext cx="3027578" cy="17419320000"/>
           </a:xfrm>
           <a:prstGeom prst="rect">
@@ -4882,14 +4725,14 @@
       </p:sp>
       <p:sp>
         <p:nvSpPr>
-          <p:cNvPr id="32" name="TextBox 31"/>
+          <p:cNvPr id="30" name="TextBox 29"/>
           <p:cNvSpPr txBox="1"/>
           <p:nvPr/>
         </p:nvSpPr>
         <p:spPr>
           <a:xfrm>
             <a:off x="8386876" y="3474720"/>
-            <a:ext cx="3027578" cy="1463040"/>
+            <a:ext cx="3027578" cy="1371600"/>
           </a:xfrm>
           <a:prstGeom prst="rect">
             <a:avLst/>
@@ -4930,7 +4773,7 @@
       </p:sp>
       <p:sp>
         <p:nvSpPr>
-          <p:cNvPr id="33" name="Rectangle 32"/>
+          <p:cNvPr id="31" name="Rectangle 30"/>
           <p:cNvSpPr/>
           <p:nvPr/>
         </p:nvSpPr>
@@ -4973,7 +4816,7 @@
       </p:sp>
       <p:sp>
         <p:nvSpPr>
-          <p:cNvPr id="34" name="Rectangle 33"/>
+          <p:cNvPr id="32" name="Rectangle 31"/>
           <p:cNvSpPr/>
           <p:nvPr/>
         </p:nvSpPr>
@@ -5016,7 +4859,7 @@
       </p:sp>
       <p:sp>
         <p:nvSpPr>
-          <p:cNvPr id="35" name="TextBox 34"/>
+          <p:cNvPr id="33" name="TextBox 32"/>
           <p:cNvSpPr txBox="1"/>
           <p:nvPr/>
         </p:nvSpPr>
@@ -5052,7 +4895,7 @@
       </p:sp>
       <p:sp>
         <p:nvSpPr>
-          <p:cNvPr id="36" name="TextBox 35"/>
+          <p:cNvPr id="34" name="TextBox 33"/>
           <p:cNvSpPr txBox="1"/>
           <p:nvPr/>
         </p:nvSpPr>
@@ -5362,16 +5205,16 @@
       </p:sp>
       <p:sp>
         <p:nvSpPr>
-          <p:cNvPr id="8" name="Diamond 7"/>
+          <p:cNvPr id="8" name="Rounded Rectangle 7"/>
           <p:cNvSpPr/>
           <p:nvPr/>
         </p:nvSpPr>
         <p:spPr>
           <a:xfrm>
             <a:off x="777239" y="1691640"/>
-            <a:ext cx="548640" cy="548640"/>
-          </a:xfrm>
-          <a:prstGeom prst="diamond">
+            <a:ext cx="594360" cy="594360"/>
+          </a:xfrm>
+          <a:prstGeom prst="roundRect">
             <a:avLst/>
           </a:prstGeom>
           <a:solidFill>
@@ -5405,44 +5248,37 @@
       </p:sp>
       <p:sp>
         <p:nvSpPr>
-          <p:cNvPr id="9" name="Rectangle 8"/>
-          <p:cNvSpPr/>
-          <p:nvPr/>
-        </p:nvSpPr>
-        <p:spPr>
-          <a:xfrm>
-            <a:off x="777239" y="1922068"/>
-            <a:ext cx="548640" cy="87782"/>
-          </a:xfrm>
-          <a:prstGeom prst="rect">
-            <a:avLst/>
-          </a:prstGeom>
-          <a:solidFill>
-            <a:srgbClr val="FFFFFF"/>
-          </a:solidFill>
-          <a:ln>
-            <a:noFill/>
-          </a:ln>
-        </p:spPr>
-        <p:style>
-          <a:lnRef idx="1">
-            <a:schemeClr val="accent1"/>
-          </a:lnRef>
-          <a:fillRef idx="3">
-            <a:schemeClr val="accent1"/>
-          </a:fillRef>
-          <a:effectRef idx="2">
-            <a:schemeClr val="accent1"/>
-          </a:effectRef>
-          <a:fontRef idx="minor">
-            <a:schemeClr val="lt1"/>
-          </a:fontRef>
-        </p:style>
-        <p:txBody>
-          <a:bodyPr rtlCol="0" anchor="ctr"/>
-          <a:lstStyle/>
-          <a:p>
-            <a:pPr algn="ctr"/>
+          <p:cNvPr id="9" name="TextBox 8"/>
+          <p:cNvSpPr txBox="1"/>
+          <p:nvPr/>
+        </p:nvSpPr>
+        <p:spPr>
+          <a:xfrm>
+            <a:off x="777239" y="1739188"/>
+            <a:ext cx="594360" cy="505206"/>
+          </a:xfrm>
+          <a:prstGeom prst="rect">
+            <a:avLst/>
+          </a:prstGeom>
+          <a:noFill/>
+        </p:spPr>
+        <p:txBody>
+          <a:bodyPr wrap="none">
+            <a:spAutoFit/>
+          </a:bodyPr>
+          <a:lstStyle/>
+          <a:p>
+            <a:pPr algn="ctr">
+              <a:defRPr sz="2300">
+                <a:solidFill>
+                  <a:srgbClr val="FFFFFF"/>
+                </a:solidFill>
+                <a:latin typeface="Segoe UI Emoji"/>
+              </a:defRPr>
+            </a:pPr>
+            <a:r>
+              <a:t>🌐</a:t>
+            </a:r>
           </a:p>
         </p:txBody>
       </p:sp>
@@ -5454,8 +5290,8 @@
         </p:nvSpPr>
         <p:spPr>
           <a:xfrm>
-            <a:off x="1554479" y="1691640"/>
-            <a:ext cx="4084167" cy="411480"/>
+            <a:off x="1600199" y="1691640"/>
+            <a:ext cx="3992727" cy="411480"/>
           </a:xfrm>
           <a:prstGeom prst="rect">
             <a:avLst/>
@@ -5490,8 +5326,8 @@
         </p:nvSpPr>
         <p:spPr>
           <a:xfrm>
-            <a:off x="1554479" y="2194560"/>
-            <a:ext cx="4084167" cy="640080"/>
+            <a:off x="1600199" y="2194560"/>
+            <a:ext cx="3992727" cy="640080"/>
           </a:xfrm>
           <a:prstGeom prst="rect">
             <a:avLst/>
@@ -5577,8 +5413,8 @@
         </p:nvSpPr>
         <p:spPr>
           <a:xfrm>
-            <a:off x="6630771" y="1691640"/>
-            <a:ext cx="301752" cy="548640"/>
+            <a:off x="6507327" y="1691640"/>
+            <a:ext cx="594360" cy="594360"/>
           </a:xfrm>
           <a:prstGeom prst="roundRect">
             <a:avLst/>
@@ -5614,100 +5450,50 @@
       </p:sp>
       <p:sp>
         <p:nvSpPr>
-          <p:cNvPr id="14" name="Rectangle 13"/>
-          <p:cNvSpPr/>
-          <p:nvPr/>
-        </p:nvSpPr>
-        <p:spPr>
-          <a:xfrm>
-            <a:off x="6740499" y="1911095"/>
-            <a:ext cx="82296" cy="164592"/>
-          </a:xfrm>
-          <a:prstGeom prst="rect">
-            <a:avLst/>
-          </a:prstGeom>
-          <a:solidFill>
-            <a:srgbClr val="FFFFFF"/>
-          </a:solidFill>
-          <a:ln>
-            <a:noFill/>
-          </a:ln>
-        </p:spPr>
-        <p:style>
-          <a:lnRef idx="1">
-            <a:schemeClr val="accent1"/>
-          </a:lnRef>
-          <a:fillRef idx="3">
-            <a:schemeClr val="accent1"/>
-          </a:fillRef>
-          <a:effectRef idx="2">
-            <a:schemeClr val="accent1"/>
-          </a:effectRef>
-          <a:fontRef idx="minor">
-            <a:schemeClr val="lt1"/>
-          </a:fontRef>
-        </p:style>
-        <p:txBody>
-          <a:bodyPr rtlCol="0" anchor="ctr"/>
-          <a:lstStyle/>
-          <a:p>
-            <a:pPr algn="ctr"/>
-          </a:p>
-        </p:txBody>
-      </p:sp>
-      <p:sp>
-        <p:nvSpPr>
-          <p:cNvPr id="15" name="Rectangle 14"/>
-          <p:cNvSpPr/>
-          <p:nvPr/>
-        </p:nvSpPr>
-        <p:spPr>
-          <a:xfrm>
-            <a:off x="6721297" y="2130552"/>
-            <a:ext cx="120700" cy="87782"/>
-          </a:xfrm>
-          <a:prstGeom prst="rect">
-            <a:avLst/>
-          </a:prstGeom>
-          <a:solidFill>
-            <a:srgbClr val="FFFFFF"/>
-          </a:solidFill>
-          <a:ln>
-            <a:noFill/>
-          </a:ln>
-        </p:spPr>
-        <p:style>
-          <a:lnRef idx="1">
-            <a:schemeClr val="accent1"/>
-          </a:lnRef>
-          <a:fillRef idx="3">
-            <a:schemeClr val="accent1"/>
-          </a:fillRef>
-          <a:effectRef idx="2">
-            <a:schemeClr val="accent1"/>
-          </a:effectRef>
-          <a:fontRef idx="minor">
-            <a:schemeClr val="lt1"/>
-          </a:fontRef>
-        </p:style>
-        <p:txBody>
-          <a:bodyPr rtlCol="0" anchor="ctr"/>
-          <a:lstStyle/>
-          <a:p>
-            <a:pPr algn="ctr"/>
-          </a:p>
-        </p:txBody>
-      </p:sp>
-      <p:sp>
-        <p:nvSpPr>
-          <p:cNvPr id="16" name="TextBox 15"/>
+          <p:cNvPr id="14" name="TextBox 13"/>
           <p:cNvSpPr txBox="1"/>
           <p:nvPr/>
         </p:nvSpPr>
         <p:spPr>
           <a:xfrm>
-            <a:off x="7284567" y="1691640"/>
-            <a:ext cx="4084167" cy="411480"/>
+            <a:off x="6507327" y="1739188"/>
+            <a:ext cx="594360" cy="505206"/>
+          </a:xfrm>
+          <a:prstGeom prst="rect">
+            <a:avLst/>
+          </a:prstGeom>
+          <a:noFill/>
+        </p:spPr>
+        <p:txBody>
+          <a:bodyPr wrap="none">
+            <a:spAutoFit/>
+          </a:bodyPr>
+          <a:lstStyle/>
+          <a:p>
+            <a:pPr algn="ctr">
+              <a:defRPr sz="2300">
+                <a:solidFill>
+                  <a:srgbClr val="FFFFFF"/>
+                </a:solidFill>
+                <a:latin typeface="Segoe UI Emoji"/>
+              </a:defRPr>
+            </a:pPr>
+            <a:r>
+              <a:t>📱</a:t>
+            </a:r>
+          </a:p>
+        </p:txBody>
+      </p:sp>
+      <p:sp>
+        <p:nvSpPr>
+          <p:cNvPr id="15" name="TextBox 14"/>
+          <p:cNvSpPr txBox="1"/>
+          <p:nvPr/>
+        </p:nvSpPr>
+        <p:spPr>
+          <a:xfrm>
+            <a:off x="7330287" y="1691640"/>
+            <a:ext cx="3992727" cy="411480"/>
           </a:xfrm>
           <a:prstGeom prst="rect">
             <a:avLst/>
@@ -5736,14 +5522,14 @@
       </p:sp>
       <p:sp>
         <p:nvSpPr>
-          <p:cNvPr id="17" name="TextBox 16"/>
+          <p:cNvPr id="16" name="TextBox 15"/>
           <p:cNvSpPr txBox="1"/>
           <p:nvPr/>
         </p:nvSpPr>
         <p:spPr>
           <a:xfrm>
-            <a:off x="7284567" y="2194560"/>
-            <a:ext cx="4084167" cy="640080"/>
+            <a:off x="7330287" y="2194560"/>
+            <a:ext cx="3992727" cy="640080"/>
           </a:xfrm>
           <a:prstGeom prst="rect">
             <a:avLst/>
@@ -5776,7 +5562,7 @@
       </p:sp>
       <p:sp>
         <p:nvSpPr>
-          <p:cNvPr id="18" name="Rounded Rectangle 17"/>
+          <p:cNvPr id="17" name="Rounded Rectangle 16"/>
           <p:cNvSpPr/>
           <p:nvPr/>
         </p:nvSpPr>
@@ -5823,16 +5609,16 @@
       </p:sp>
       <p:sp>
         <p:nvSpPr>
-          <p:cNvPr id="19" name="Rectangle 18"/>
+          <p:cNvPr id="18" name="Rounded Rectangle 17"/>
           <p:cNvSpPr/>
           <p:nvPr/>
         </p:nvSpPr>
         <p:spPr>
           <a:xfrm>
-            <a:off x="777239" y="3822191"/>
-            <a:ext cx="548640" cy="384048"/>
-          </a:xfrm>
-          <a:prstGeom prst="rect">
+            <a:off x="777239" y="3657600"/>
+            <a:ext cx="594360" cy="594360"/>
+          </a:xfrm>
+          <a:prstGeom prst="roundRect">
             <a:avLst/>
           </a:prstGeom>
           <a:solidFill>
@@ -5866,100 +5652,50 @@
       </p:sp>
       <p:sp>
         <p:nvSpPr>
-          <p:cNvPr id="20" name="Isosceles Triangle 19"/>
-          <p:cNvSpPr/>
-          <p:nvPr/>
-        </p:nvSpPr>
-        <p:spPr>
-          <a:xfrm>
-            <a:off x="777239" y="3657600"/>
-            <a:ext cx="548640" cy="274320"/>
-          </a:xfrm>
-          <a:prstGeom prst="triangle">
-            <a:avLst/>
-          </a:prstGeom>
-          <a:solidFill>
-            <a:srgbClr val="0D9488"/>
-          </a:solidFill>
-          <a:ln>
-            <a:noFill/>
-          </a:ln>
-        </p:spPr>
-        <p:style>
-          <a:lnRef idx="1">
-            <a:schemeClr val="accent1"/>
-          </a:lnRef>
-          <a:fillRef idx="3">
-            <a:schemeClr val="accent1"/>
-          </a:fillRef>
-          <a:effectRef idx="2">
-            <a:schemeClr val="accent1"/>
-          </a:effectRef>
-          <a:fontRef idx="minor">
-            <a:schemeClr val="lt1"/>
-          </a:fontRef>
-        </p:style>
-        <p:txBody>
-          <a:bodyPr rtlCol="0" anchor="ctr"/>
-          <a:lstStyle/>
-          <a:p>
-            <a:pPr algn="ctr"/>
-          </a:p>
-        </p:txBody>
-      </p:sp>
-      <p:sp>
-        <p:nvSpPr>
-          <p:cNvPr id="21" name="Rectangle 20"/>
-          <p:cNvSpPr/>
-          <p:nvPr/>
-        </p:nvSpPr>
-        <p:spPr>
-          <a:xfrm>
-            <a:off x="941831" y="3931920"/>
-            <a:ext cx="82296" cy="82296"/>
-          </a:xfrm>
-          <a:prstGeom prst="rect">
-            <a:avLst/>
-          </a:prstGeom>
-          <a:solidFill>
-            <a:srgbClr val="FFFFFF"/>
-          </a:solidFill>
-          <a:ln>
-            <a:noFill/>
-          </a:ln>
-        </p:spPr>
-        <p:style>
-          <a:lnRef idx="1">
-            <a:schemeClr val="accent1"/>
-          </a:lnRef>
-          <a:fillRef idx="3">
-            <a:schemeClr val="accent1"/>
-          </a:fillRef>
-          <a:effectRef idx="2">
-            <a:schemeClr val="accent1"/>
-          </a:effectRef>
-          <a:fontRef idx="minor">
-            <a:schemeClr val="lt1"/>
-          </a:fontRef>
-        </p:style>
-        <p:txBody>
-          <a:bodyPr rtlCol="0" anchor="ctr"/>
-          <a:lstStyle/>
-          <a:p>
-            <a:pPr algn="ctr"/>
-          </a:p>
-        </p:txBody>
-      </p:sp>
-      <p:sp>
-        <p:nvSpPr>
-          <p:cNvPr id="22" name="TextBox 21"/>
+          <p:cNvPr id="19" name="TextBox 18"/>
           <p:cNvSpPr txBox="1"/>
           <p:nvPr/>
         </p:nvSpPr>
         <p:spPr>
           <a:xfrm>
-            <a:off x="1554479" y="3657600"/>
-            <a:ext cx="4084167" cy="411480"/>
+            <a:off x="777239" y="3705148"/>
+            <a:ext cx="594360" cy="505206"/>
+          </a:xfrm>
+          <a:prstGeom prst="rect">
+            <a:avLst/>
+          </a:prstGeom>
+          <a:noFill/>
+        </p:spPr>
+        <p:txBody>
+          <a:bodyPr wrap="none">
+            <a:spAutoFit/>
+          </a:bodyPr>
+          <a:lstStyle/>
+          <a:p>
+            <a:pPr algn="ctr">
+              <a:defRPr sz="2300">
+                <a:solidFill>
+                  <a:srgbClr val="FFFFFF"/>
+                </a:solidFill>
+                <a:latin typeface="Segoe UI Emoji"/>
+              </a:defRPr>
+            </a:pPr>
+            <a:r>
+              <a:t>🌆</a:t>
+            </a:r>
+          </a:p>
+        </p:txBody>
+      </p:sp>
+      <p:sp>
+        <p:nvSpPr>
+          <p:cNvPr id="20" name="TextBox 19"/>
+          <p:cNvSpPr txBox="1"/>
+          <p:nvPr/>
+        </p:nvSpPr>
+        <p:spPr>
+          <a:xfrm>
+            <a:off x="1600199" y="3657600"/>
+            <a:ext cx="3992727" cy="411480"/>
           </a:xfrm>
           <a:prstGeom prst="rect">
             <a:avLst/>
@@ -5988,14 +5724,14 @@
       </p:sp>
       <p:sp>
         <p:nvSpPr>
-          <p:cNvPr id="23" name="TextBox 22"/>
+          <p:cNvPr id="21" name="TextBox 20"/>
           <p:cNvSpPr txBox="1"/>
           <p:nvPr/>
         </p:nvSpPr>
         <p:spPr>
           <a:xfrm>
-            <a:off x="1554479" y="4160520"/>
-            <a:ext cx="4084167" cy="640080"/>
+            <a:off x="1600199" y="4160520"/>
+            <a:ext cx="3992727" cy="640080"/>
           </a:xfrm>
           <a:prstGeom prst="rect">
             <a:avLst/>
@@ -6028,7 +5764,7 @@
       </p:sp>
       <p:sp>
         <p:nvSpPr>
-          <p:cNvPr id="24" name="Rounded Rectangle 23"/>
+          <p:cNvPr id="22" name="Rounded Rectangle 21"/>
           <p:cNvSpPr/>
           <p:nvPr/>
         </p:nvSpPr>
@@ -6075,16 +5811,16 @@
       </p:sp>
       <p:sp>
         <p:nvSpPr>
-          <p:cNvPr id="25" name="Parallelogram 24"/>
+          <p:cNvPr id="23" name="Rounded Rectangle 22"/>
           <p:cNvSpPr/>
           <p:nvPr/>
         </p:nvSpPr>
         <p:spPr>
           <a:xfrm>
             <a:off x="6507327" y="3657600"/>
-            <a:ext cx="384048" cy="548640"/>
-          </a:xfrm>
-          <a:prstGeom prst="parallelogram">
+            <a:ext cx="594360" cy="594360"/>
+          </a:xfrm>
+          <a:prstGeom prst="roundRect">
             <a:avLst/>
           </a:prstGeom>
           <a:solidFill>
@@ -6118,57 +5854,50 @@
       </p:sp>
       <p:sp>
         <p:nvSpPr>
-          <p:cNvPr id="26" name="Parallelogram 25"/>
-          <p:cNvSpPr/>
-          <p:nvPr/>
-        </p:nvSpPr>
-        <p:spPr>
-          <a:xfrm>
-            <a:off x="6671919" y="3657600"/>
-            <a:ext cx="384048" cy="548640"/>
-          </a:xfrm>
-          <a:prstGeom prst="parallelogram">
-            <a:avLst/>
-          </a:prstGeom>
-          <a:solidFill>
-            <a:srgbClr val="FFFFFF"/>
-          </a:solidFill>
-          <a:ln>
-            <a:noFill/>
-          </a:ln>
-        </p:spPr>
-        <p:style>
-          <a:lnRef idx="1">
-            <a:schemeClr val="accent1"/>
-          </a:lnRef>
-          <a:fillRef idx="3">
-            <a:schemeClr val="accent1"/>
-          </a:fillRef>
-          <a:effectRef idx="2">
-            <a:schemeClr val="accent1"/>
-          </a:effectRef>
-          <a:fontRef idx="minor">
-            <a:schemeClr val="lt1"/>
-          </a:fontRef>
-        </p:style>
-        <p:txBody>
-          <a:bodyPr rtlCol="0" anchor="ctr"/>
-          <a:lstStyle/>
-          <a:p>
-            <a:pPr algn="ctr"/>
-          </a:p>
-        </p:txBody>
-      </p:sp>
-      <p:sp>
-        <p:nvSpPr>
-          <p:cNvPr id="27" name="TextBox 26"/>
+          <p:cNvPr id="24" name="TextBox 23"/>
           <p:cNvSpPr txBox="1"/>
           <p:nvPr/>
         </p:nvSpPr>
         <p:spPr>
           <a:xfrm>
-            <a:off x="7284567" y="3657600"/>
-            <a:ext cx="4084167" cy="411480"/>
+            <a:off x="6507327" y="3705148"/>
+            <a:ext cx="594360" cy="505206"/>
+          </a:xfrm>
+          <a:prstGeom prst="rect">
+            <a:avLst/>
+          </a:prstGeom>
+          <a:noFill/>
+        </p:spPr>
+        <p:txBody>
+          <a:bodyPr wrap="none">
+            <a:spAutoFit/>
+          </a:bodyPr>
+          <a:lstStyle/>
+          <a:p>
+            <a:pPr algn="ctr">
+              <a:defRPr sz="2300">
+                <a:solidFill>
+                  <a:srgbClr val="FFFFFF"/>
+                </a:solidFill>
+                <a:latin typeface="Segoe UI Emoji"/>
+              </a:defRPr>
+            </a:pPr>
+            <a:r>
+              <a:t>🔗</a:t>
+            </a:r>
+          </a:p>
+        </p:txBody>
+      </p:sp>
+      <p:sp>
+        <p:nvSpPr>
+          <p:cNvPr id="25" name="TextBox 24"/>
+          <p:cNvSpPr txBox="1"/>
+          <p:nvPr/>
+        </p:nvSpPr>
+        <p:spPr>
+          <a:xfrm>
+            <a:off x="7330287" y="3657600"/>
+            <a:ext cx="3992727" cy="411480"/>
           </a:xfrm>
           <a:prstGeom prst="rect">
             <a:avLst/>
@@ -6197,14 +5926,14 @@
       </p:sp>
       <p:sp>
         <p:nvSpPr>
-          <p:cNvPr id="28" name="TextBox 27"/>
+          <p:cNvPr id="26" name="TextBox 25"/>
           <p:cNvSpPr txBox="1"/>
           <p:nvPr/>
         </p:nvSpPr>
         <p:spPr>
           <a:xfrm>
-            <a:off x="7284567" y="4160520"/>
-            <a:ext cx="4084167" cy="640080"/>
+            <a:off x="7330287" y="4160520"/>
+            <a:ext cx="3992727" cy="640080"/>
           </a:xfrm>
           <a:prstGeom prst="rect">
             <a:avLst/>
@@ -6237,7 +5966,7 @@
       </p:sp>
       <p:sp>
         <p:nvSpPr>
-          <p:cNvPr id="29" name="Rectangle 28"/>
+          <p:cNvPr id="27" name="Rectangle 26"/>
           <p:cNvSpPr/>
           <p:nvPr/>
         </p:nvSpPr>
@@ -6280,7 +6009,7 @@
       </p:sp>
       <p:sp>
         <p:nvSpPr>
-          <p:cNvPr id="30" name="Rectangle 29"/>
+          <p:cNvPr id="28" name="Rectangle 27"/>
           <p:cNvSpPr/>
           <p:nvPr/>
         </p:nvSpPr>
@@ -6323,7 +6052,7 @@
       </p:sp>
       <p:sp>
         <p:nvSpPr>
-          <p:cNvPr id="31" name="TextBox 30"/>
+          <p:cNvPr id="29" name="TextBox 28"/>
           <p:cNvSpPr txBox="1"/>
           <p:nvPr/>
         </p:nvSpPr>
@@ -6359,7 +6088,7 @@
       </p:sp>
       <p:sp>
         <p:nvSpPr>
-          <p:cNvPr id="32" name="TextBox 31"/>
+          <p:cNvPr id="30" name="TextBox 29"/>
           <p:cNvSpPr txBox="1"/>
           <p:nvPr/>
         </p:nvSpPr>
@@ -6708,44 +6437,37 @@
       </p:sp>
       <p:sp>
         <p:nvSpPr>
-          <p:cNvPr id="9" name="Diamond 8"/>
-          <p:cNvSpPr/>
-          <p:nvPr/>
-        </p:nvSpPr>
-        <p:spPr>
-          <a:xfrm>
-            <a:off x="960120" y="1737360"/>
-            <a:ext cx="274320" cy="274320"/>
-          </a:xfrm>
-          <a:prstGeom prst="diamond">
-            <a:avLst/>
-          </a:prstGeom>
-          <a:solidFill>
-            <a:srgbClr val="FFFFFF"/>
-          </a:solidFill>
-          <a:ln>
-            <a:noFill/>
-          </a:ln>
-        </p:spPr>
-        <p:style>
-          <a:lnRef idx="1">
-            <a:schemeClr val="accent1"/>
-          </a:lnRef>
-          <a:fillRef idx="3">
-            <a:schemeClr val="accent1"/>
-          </a:fillRef>
-          <a:effectRef idx="2">
-            <a:schemeClr val="accent1"/>
-          </a:effectRef>
-          <a:fontRef idx="minor">
-            <a:schemeClr val="lt1"/>
-          </a:fontRef>
-        </p:style>
-        <p:txBody>
-          <a:bodyPr rtlCol="0" anchor="ctr"/>
-          <a:lstStyle/>
-          <a:p>
-            <a:pPr algn="ctr"/>
+          <p:cNvPr id="9" name="TextBox 8"/>
+          <p:cNvSpPr txBox="1"/>
+          <p:nvPr/>
+        </p:nvSpPr>
+        <p:spPr>
+          <a:xfrm>
+            <a:off x="868680" y="1682496"/>
+            <a:ext cx="457200" cy="388620"/>
+          </a:xfrm>
+          <a:prstGeom prst="rect">
+            <a:avLst/>
+          </a:prstGeom>
+          <a:noFill/>
+        </p:spPr>
+        <p:txBody>
+          <a:bodyPr wrap="none">
+            <a:spAutoFit/>
+          </a:bodyPr>
+          <a:lstStyle/>
+          <a:p>
+            <a:pPr algn="ctr">
+              <a:defRPr sz="1800">
+                <a:solidFill>
+                  <a:srgbClr val="FFFFFF"/>
+                </a:solidFill>
+                <a:latin typeface="Segoe UI Emoji"/>
+              </a:defRPr>
+            </a:pPr>
+            <a:r>
+              <a:t>✅</a:t>
+            </a:r>
           </a:p>
         </p:txBody>
       </p:sp>
@@ -6757,7 +6479,7 @@
         </p:nvSpPr>
         <p:spPr>
           <a:xfrm>
-            <a:off x="1078992" y="2194560"/>
+            <a:off x="1097280" y="2194560"/>
             <a:ext cx="17419320000" cy="457200"/>
           </a:xfrm>
           <a:prstGeom prst="rect">
@@ -6800,8 +6522,8 @@
         </p:nvSpPr>
         <p:spPr>
           <a:xfrm>
-            <a:off x="1554480" y="1682496"/>
-            <a:ext cx="9814255" cy="731520"/>
+            <a:off x="1600200" y="1682496"/>
+            <a:ext cx="9722815" cy="731520"/>
           </a:xfrm>
           <a:prstGeom prst="rect">
             <a:avLst/>
@@ -6849,16 +6571,16 @@
       </p:sp>
       <p:sp>
         <p:nvSpPr>
-          <p:cNvPr id="12" name="Parallelogram 11"/>
+          <p:cNvPr id="12" name="Rounded Rectangle 11"/>
           <p:cNvSpPr/>
           <p:nvPr/>
         </p:nvSpPr>
         <p:spPr>
           <a:xfrm>
             <a:off x="868680" y="2697480"/>
-            <a:ext cx="320040" cy="457200"/>
-          </a:xfrm>
-          <a:prstGeom prst="parallelogram">
+            <a:ext cx="457200" cy="457200"/>
+          </a:xfrm>
+          <a:prstGeom prst="roundRect">
             <a:avLst/>
           </a:prstGeom>
           <a:solidFill>
@@ -6892,44 +6614,37 @@
       </p:sp>
       <p:sp>
         <p:nvSpPr>
-          <p:cNvPr id="13" name="Parallelogram 12"/>
-          <p:cNvSpPr/>
-          <p:nvPr/>
-        </p:nvSpPr>
-        <p:spPr>
-          <a:xfrm>
-            <a:off x="1005839" y="2697480"/>
-            <a:ext cx="320040" cy="457200"/>
-          </a:xfrm>
-          <a:prstGeom prst="parallelogram">
-            <a:avLst/>
-          </a:prstGeom>
-          <a:solidFill>
-            <a:srgbClr val="FFFFFF"/>
-          </a:solidFill>
-          <a:ln>
-            <a:noFill/>
-          </a:ln>
-        </p:spPr>
-        <p:style>
-          <a:lnRef idx="1">
-            <a:schemeClr val="accent1"/>
-          </a:lnRef>
-          <a:fillRef idx="3">
-            <a:schemeClr val="accent1"/>
-          </a:fillRef>
-          <a:effectRef idx="2">
-            <a:schemeClr val="accent1"/>
-          </a:effectRef>
-          <a:fontRef idx="minor">
-            <a:schemeClr val="lt1"/>
-          </a:fontRef>
-        </p:style>
-        <p:txBody>
-          <a:bodyPr rtlCol="0" anchor="ctr"/>
-          <a:lstStyle/>
-          <a:p>
-            <a:pPr algn="ctr"/>
+          <p:cNvPr id="13" name="TextBox 12"/>
+          <p:cNvSpPr txBox="1"/>
+          <p:nvPr/>
+        </p:nvSpPr>
+        <p:spPr>
+          <a:xfrm>
+            <a:off x="868680" y="2734056"/>
+            <a:ext cx="457200" cy="388620"/>
+          </a:xfrm>
+          <a:prstGeom prst="rect">
+            <a:avLst/>
+          </a:prstGeom>
+          <a:noFill/>
+        </p:spPr>
+        <p:txBody>
+          <a:bodyPr wrap="none">
+            <a:spAutoFit/>
+          </a:bodyPr>
+          <a:lstStyle/>
+          <a:p>
+            <a:pPr algn="ctr">
+              <a:defRPr sz="1800">
+                <a:solidFill>
+                  <a:srgbClr val="FFFFFF"/>
+                </a:solidFill>
+                <a:latin typeface="Segoe UI Emoji"/>
+              </a:defRPr>
+            </a:pPr>
+            <a:r>
+              <a:t>🔗</a:t>
+            </a:r>
           </a:p>
         </p:txBody>
       </p:sp>
@@ -6941,7 +6656,7 @@
         </p:nvSpPr>
         <p:spPr>
           <a:xfrm>
-            <a:off x="1078992" y="3246120"/>
+            <a:off x="1097280" y="3246120"/>
             <a:ext cx="17419320000" cy="457200"/>
           </a:xfrm>
           <a:prstGeom prst="rect">
@@ -6984,8 +6699,8 @@
         </p:nvSpPr>
         <p:spPr>
           <a:xfrm>
-            <a:off x="1554480" y="2734056"/>
-            <a:ext cx="9814255" cy="731520"/>
+            <a:off x="1600200" y="2734056"/>
+            <a:ext cx="9722815" cy="731520"/>
           </a:xfrm>
           <a:prstGeom prst="rect">
             <a:avLst/>
@@ -7033,7 +6748,7 @@
       </p:sp>
       <p:sp>
         <p:nvSpPr>
-          <p:cNvPr id="16" name="Diamond 15"/>
+          <p:cNvPr id="16" name="Rounded Rectangle 15"/>
           <p:cNvSpPr/>
           <p:nvPr/>
         </p:nvSpPr>
@@ -7042,7 +6757,7 @@
             <a:off x="868680" y="3749039"/>
             <a:ext cx="457200" cy="457200"/>
           </a:xfrm>
-          <a:prstGeom prst="diamond">
+          <a:prstGeom prst="roundRect">
             <a:avLst/>
           </a:prstGeom>
           <a:solidFill>
@@ -7076,44 +6791,37 @@
       </p:sp>
       <p:sp>
         <p:nvSpPr>
-          <p:cNvPr id="17" name="Rectangle 16"/>
-          <p:cNvSpPr/>
-          <p:nvPr/>
-        </p:nvSpPr>
-        <p:spPr>
-          <a:xfrm>
-            <a:off x="868680" y="3941063"/>
-            <a:ext cx="457200" cy="73152"/>
-          </a:xfrm>
-          <a:prstGeom prst="rect">
-            <a:avLst/>
-          </a:prstGeom>
-          <a:solidFill>
-            <a:srgbClr val="FFFFFF"/>
-          </a:solidFill>
-          <a:ln>
-            <a:noFill/>
-          </a:ln>
-        </p:spPr>
-        <p:style>
-          <a:lnRef idx="1">
-            <a:schemeClr val="accent1"/>
-          </a:lnRef>
-          <a:fillRef idx="3">
-            <a:schemeClr val="accent1"/>
-          </a:fillRef>
-          <a:effectRef idx="2">
-            <a:schemeClr val="accent1"/>
-          </a:effectRef>
-          <a:fontRef idx="minor">
-            <a:schemeClr val="lt1"/>
-          </a:fontRef>
-        </p:style>
-        <p:txBody>
-          <a:bodyPr rtlCol="0" anchor="ctr"/>
-          <a:lstStyle/>
-          <a:p>
-            <a:pPr algn="ctr"/>
+          <p:cNvPr id="17" name="TextBox 16"/>
+          <p:cNvSpPr txBox="1"/>
+          <p:nvPr/>
+        </p:nvSpPr>
+        <p:spPr>
+          <a:xfrm>
+            <a:off x="868680" y="3785615"/>
+            <a:ext cx="457200" cy="388620"/>
+          </a:xfrm>
+          <a:prstGeom prst="rect">
+            <a:avLst/>
+          </a:prstGeom>
+          <a:noFill/>
+        </p:spPr>
+        <p:txBody>
+          <a:bodyPr wrap="none">
+            <a:spAutoFit/>
+          </a:bodyPr>
+          <a:lstStyle/>
+          <a:p>
+            <a:pPr algn="ctr">
+              <a:defRPr sz="1800">
+                <a:solidFill>
+                  <a:srgbClr val="FFFFFF"/>
+                </a:solidFill>
+                <a:latin typeface="Segoe UI Emoji"/>
+              </a:defRPr>
+            </a:pPr>
+            <a:r>
+              <a:t>🌐</a:t>
+            </a:r>
           </a:p>
         </p:txBody>
       </p:sp>
@@ -7125,7 +6833,7 @@
         </p:nvSpPr>
         <p:spPr>
           <a:xfrm>
-            <a:off x="1078992" y="4297679"/>
+            <a:off x="1097280" y="4297679"/>
             <a:ext cx="17419320000" cy="457200"/>
           </a:xfrm>
           <a:prstGeom prst="rect">
@@ -7168,8 +6876,8 @@
         </p:nvSpPr>
         <p:spPr>
           <a:xfrm>
-            <a:off x="1554480" y="3785615"/>
-            <a:ext cx="9814255" cy="731520"/>
+            <a:off x="1600200" y="3785615"/>
+            <a:ext cx="9722815" cy="731520"/>
           </a:xfrm>
           <a:prstGeom prst="rect">
             <a:avLst/>
@@ -7217,7 +6925,7 @@
       </p:sp>
       <p:sp>
         <p:nvSpPr>
-          <p:cNvPr id="20" name="Pentagon 19"/>
+          <p:cNvPr id="20" name="Rounded Rectangle 19"/>
           <p:cNvSpPr/>
           <p:nvPr/>
         </p:nvSpPr>
@@ -7226,7 +6934,7 @@
             <a:off x="868680" y="4800600"/>
             <a:ext cx="457200" cy="457200"/>
           </a:xfrm>
-          <a:prstGeom prst="homePlate">
+          <a:prstGeom prst="roundRect">
             <a:avLst/>
           </a:prstGeom>
           <a:solidFill>
@@ -7260,44 +6968,37 @@
       </p:sp>
       <p:sp>
         <p:nvSpPr>
-          <p:cNvPr id="21" name="Rectangle 20"/>
-          <p:cNvSpPr/>
-          <p:nvPr/>
-        </p:nvSpPr>
-        <p:spPr>
-          <a:xfrm>
-            <a:off x="1005839" y="4937760"/>
-            <a:ext cx="182880" cy="182880"/>
-          </a:xfrm>
-          <a:prstGeom prst="rect">
-            <a:avLst/>
-          </a:prstGeom>
-          <a:solidFill>
-            <a:srgbClr val="FFFFFF"/>
-          </a:solidFill>
-          <a:ln>
-            <a:noFill/>
-          </a:ln>
-        </p:spPr>
-        <p:style>
-          <a:lnRef idx="1">
-            <a:schemeClr val="accent1"/>
-          </a:lnRef>
-          <a:fillRef idx="3">
-            <a:schemeClr val="accent1"/>
-          </a:fillRef>
-          <a:effectRef idx="2">
-            <a:schemeClr val="accent1"/>
-          </a:effectRef>
-          <a:fontRef idx="minor">
-            <a:schemeClr val="lt1"/>
-          </a:fontRef>
-        </p:style>
-        <p:txBody>
-          <a:bodyPr rtlCol="0" anchor="ctr"/>
-          <a:lstStyle/>
-          <a:p>
-            <a:pPr algn="ctr"/>
+          <p:cNvPr id="21" name="TextBox 20"/>
+          <p:cNvSpPr txBox="1"/>
+          <p:nvPr/>
+        </p:nvSpPr>
+        <p:spPr>
+          <a:xfrm>
+            <a:off x="868680" y="4837176"/>
+            <a:ext cx="457200" cy="388620"/>
+          </a:xfrm>
+          <a:prstGeom prst="rect">
+            <a:avLst/>
+          </a:prstGeom>
+          <a:noFill/>
+        </p:spPr>
+        <p:txBody>
+          <a:bodyPr wrap="none">
+            <a:spAutoFit/>
+          </a:bodyPr>
+          <a:lstStyle/>
+          <a:p>
+            <a:pPr algn="ctr">
+              <a:defRPr sz="1800">
+                <a:solidFill>
+                  <a:srgbClr val="FFFFFF"/>
+                </a:solidFill>
+                <a:latin typeface="Segoe UI Emoji"/>
+              </a:defRPr>
+            </a:pPr>
+            <a:r>
+              <a:t>👥</a:t>
+            </a:r>
           </a:p>
         </p:txBody>
       </p:sp>
@@ -7309,8 +7010,8 @@
         </p:nvSpPr>
         <p:spPr>
           <a:xfrm>
-            <a:off x="1554480" y="4837176"/>
-            <a:ext cx="9814255" cy="731520"/>
+            <a:off x="1600200" y="4837176"/>
+            <a:ext cx="9722815" cy="731520"/>
           </a:xfrm>
           <a:prstGeom prst="rect">
             <a:avLst/>
@@ -7786,7 +7487,7 @@
       </p:sp>
       <p:sp>
         <p:nvSpPr>
-          <p:cNvPr id="8" name="Diamond 7"/>
+          <p:cNvPr id="8" name="Rounded Rectangle 7"/>
           <p:cNvSpPr/>
           <p:nvPr/>
         </p:nvSpPr>
@@ -7795,7 +7496,7 @@
             <a:off x="868680" y="1645920"/>
             <a:ext cx="457200" cy="457200"/>
           </a:xfrm>
-          <a:prstGeom prst="diamond">
+          <a:prstGeom prst="roundRect">
             <a:avLst/>
           </a:prstGeom>
           <a:solidFill>
@@ -7829,44 +7530,37 @@
       </p:sp>
       <p:sp>
         <p:nvSpPr>
-          <p:cNvPr id="9" name="Diamond 8"/>
-          <p:cNvSpPr/>
-          <p:nvPr/>
-        </p:nvSpPr>
-        <p:spPr>
-          <a:xfrm>
-            <a:off x="937259" y="1714500"/>
-            <a:ext cx="320040" cy="320040"/>
-          </a:xfrm>
-          <a:prstGeom prst="diamond">
-            <a:avLst/>
-          </a:prstGeom>
-          <a:solidFill>
-            <a:srgbClr val="FFFFFF"/>
-          </a:solidFill>
-          <a:ln>
-            <a:noFill/>
-          </a:ln>
-        </p:spPr>
-        <p:style>
-          <a:lnRef idx="1">
-            <a:schemeClr val="accent1"/>
-          </a:lnRef>
-          <a:fillRef idx="3">
-            <a:schemeClr val="accent1"/>
-          </a:fillRef>
-          <a:effectRef idx="2">
-            <a:schemeClr val="accent1"/>
-          </a:effectRef>
-          <a:fontRef idx="minor">
-            <a:schemeClr val="lt1"/>
-          </a:fontRef>
-        </p:style>
-        <p:txBody>
-          <a:bodyPr rtlCol="0" anchor="ctr"/>
-          <a:lstStyle/>
-          <a:p>
-            <a:pPr algn="ctr"/>
+          <p:cNvPr id="9" name="TextBox 8"/>
+          <p:cNvSpPr txBox="1"/>
+          <p:nvPr/>
+        </p:nvSpPr>
+        <p:spPr>
+          <a:xfrm>
+            <a:off x="868680" y="1682496"/>
+            <a:ext cx="457200" cy="388620"/>
+          </a:xfrm>
+          <a:prstGeom prst="rect">
+            <a:avLst/>
+          </a:prstGeom>
+          <a:noFill/>
+        </p:spPr>
+        <p:txBody>
+          <a:bodyPr wrap="none">
+            <a:spAutoFit/>
+          </a:bodyPr>
+          <a:lstStyle/>
+          <a:p>
+            <a:pPr algn="ctr">
+              <a:defRPr sz="1800">
+                <a:solidFill>
+                  <a:srgbClr val="FFFFFF"/>
+                </a:solidFill>
+                <a:latin typeface="Segoe UI Emoji"/>
+              </a:defRPr>
+            </a:pPr>
+            <a:r>
+              <a:t>⭐</a:t>
+            </a:r>
           </a:p>
         </p:txBody>
       </p:sp>
@@ -7878,7 +7572,7 @@
         </p:nvSpPr>
         <p:spPr>
           <a:xfrm>
-            <a:off x="1078992" y="2194560"/>
+            <a:off x="1097280" y="2194560"/>
             <a:ext cx="17419320000" cy="457200"/>
           </a:xfrm>
           <a:prstGeom prst="rect">
@@ -7921,8 +7615,8 @@
         </p:nvSpPr>
         <p:spPr>
           <a:xfrm>
-            <a:off x="1554480" y="1682496"/>
-            <a:ext cx="9814255" cy="731520"/>
+            <a:off x="1600200" y="1682496"/>
+            <a:ext cx="9722815" cy="731520"/>
           </a:xfrm>
           <a:prstGeom prst="rect">
             <a:avLst/>
@@ -7970,16 +7664,16 @@
       </p:sp>
       <p:sp>
         <p:nvSpPr>
-          <p:cNvPr id="12" name="Rectangle 11"/>
+          <p:cNvPr id="12" name="Rounded Rectangle 11"/>
           <p:cNvSpPr/>
           <p:nvPr/>
         </p:nvSpPr>
         <p:spPr>
           <a:xfrm>
-            <a:off x="868680" y="2834640"/>
-            <a:ext cx="457200" cy="320040"/>
-          </a:xfrm>
-          <a:prstGeom prst="rect">
+            <a:off x="868680" y="2697480"/>
+            <a:ext cx="457200" cy="457200"/>
+          </a:xfrm>
+          <a:prstGeom prst="roundRect">
             <a:avLst/>
           </a:prstGeom>
           <a:solidFill>
@@ -8013,16 +7707,150 @@
       </p:sp>
       <p:sp>
         <p:nvSpPr>
-          <p:cNvPr id="13" name="Isosceles Triangle 12"/>
+          <p:cNvPr id="13" name="TextBox 12"/>
+          <p:cNvSpPr txBox="1"/>
+          <p:nvPr/>
+        </p:nvSpPr>
+        <p:spPr>
+          <a:xfrm>
+            <a:off x="868680" y="2734056"/>
+            <a:ext cx="457200" cy="388620"/>
+          </a:xfrm>
+          <a:prstGeom prst="rect">
+            <a:avLst/>
+          </a:prstGeom>
+          <a:noFill/>
+        </p:spPr>
+        <p:txBody>
+          <a:bodyPr wrap="none">
+            <a:spAutoFit/>
+          </a:bodyPr>
+          <a:lstStyle/>
+          <a:p>
+            <a:pPr algn="ctr">
+              <a:defRPr sz="1800">
+                <a:solidFill>
+                  <a:srgbClr val="FFFFFF"/>
+                </a:solidFill>
+                <a:latin typeface="Segoe UI Emoji"/>
+              </a:defRPr>
+            </a:pPr>
+            <a:r>
+              <a:t>🌆</a:t>
+            </a:r>
+          </a:p>
+        </p:txBody>
+      </p:sp>
+      <p:sp>
+        <p:nvSpPr>
+          <p:cNvPr id="14" name="Rectangle 13"/>
           <p:cNvSpPr/>
           <p:nvPr/>
         </p:nvSpPr>
         <p:spPr>
           <a:xfrm>
-            <a:off x="868680" y="2697480"/>
-            <a:ext cx="457200" cy="228600"/>
-          </a:xfrm>
-          <a:prstGeom prst="triangle">
+            <a:off x="1097280" y="3246120"/>
+            <a:ext cx="17419320000" cy="457200"/>
+          </a:xfrm>
+          <a:prstGeom prst="rect">
+            <a:avLst/>
+          </a:prstGeom>
+          <a:solidFill>
+            <a:srgbClr val="E2E8F0"/>
+          </a:solidFill>
+          <a:ln>
+            <a:noFill/>
+          </a:ln>
+        </p:spPr>
+        <p:style>
+          <a:lnRef idx="1">
+            <a:schemeClr val="accent1"/>
+          </a:lnRef>
+          <a:fillRef idx="3">
+            <a:schemeClr val="accent1"/>
+          </a:fillRef>
+          <a:effectRef idx="2">
+            <a:schemeClr val="accent1"/>
+          </a:effectRef>
+          <a:fontRef idx="minor">
+            <a:schemeClr val="lt1"/>
+          </a:fontRef>
+        </p:style>
+        <p:txBody>
+          <a:bodyPr rtlCol="0" anchor="ctr"/>
+          <a:lstStyle/>
+          <a:p>
+            <a:pPr algn="ctr"/>
+          </a:p>
+        </p:txBody>
+      </p:sp>
+      <p:sp>
+        <p:nvSpPr>
+          <p:cNvPr id="15" name="TextBox 14"/>
+          <p:cNvSpPr txBox="1"/>
+          <p:nvPr/>
+        </p:nvSpPr>
+        <p:spPr>
+          <a:xfrm>
+            <a:off x="1600200" y="2734056"/>
+            <a:ext cx="9722815" cy="731520"/>
+          </a:xfrm>
+          <a:prstGeom prst="rect">
+            <a:avLst/>
+          </a:prstGeom>
+          <a:noFill/>
+        </p:spPr>
+        <p:txBody>
+          <a:bodyPr wrap="square">
+            <a:spAutoFit/>
+          </a:bodyPr>
+          <a:lstStyle/>
+          <a:p>
+            <a:pPr>
+              <a:spcAft>
+                <a:spcPts val="100"/>
+              </a:spcAft>
+              <a:defRPr sz="1400" b="1">
+                <a:solidFill>
+                  <a:srgbClr val="1E293B"/>
+                </a:solidFill>
+                <a:latin typeface="Calibri"/>
+              </a:defRPr>
+            </a:pPr>
+            <a:r>
+              <a:t>Membangun kolaborasi dengan pemangku</a:t>
+            </a:r>
+          </a:p>
+          <a:p>
+            <a:pPr>
+              <a:spcAft>
+                <a:spcPts val="100"/>
+              </a:spcAft>
+              <a:defRPr sz="1300" b="0">
+                <a:solidFill>
+                  <a:srgbClr val="1E293B"/>
+                </a:solidFill>
+                <a:latin typeface="Calibri"/>
+              </a:defRPr>
+            </a:pPr>
+            <a:r>
+              <a:t>kepentingan lintas sektor</a:t>
+            </a:r>
+          </a:p>
+        </p:txBody>
+      </p:sp>
+      <p:sp>
+        <p:nvSpPr>
+          <p:cNvPr id="16" name="Rounded Rectangle 15"/>
+          <p:cNvSpPr/>
+          <p:nvPr/>
+        </p:nvSpPr>
+        <p:spPr>
+          <a:xfrm>
+            <a:off x="868680" y="3749039"/>
+            <a:ext cx="457200" cy="457200"/>
+          </a:xfrm>
+          <a:prstGeom prst="roundRect">
             <a:avLst/>
           </a:prstGeom>
           <a:solidFill>
@@ -8056,56 +7884,49 @@
       </p:sp>
       <p:sp>
         <p:nvSpPr>
-          <p:cNvPr id="14" name="Rectangle 13"/>
+          <p:cNvPr id="17" name="TextBox 16"/>
+          <p:cNvSpPr txBox="1"/>
+          <p:nvPr/>
+        </p:nvSpPr>
+        <p:spPr>
+          <a:xfrm>
+            <a:off x="868680" y="3785615"/>
+            <a:ext cx="457200" cy="388620"/>
+          </a:xfrm>
+          <a:prstGeom prst="rect">
+            <a:avLst/>
+          </a:prstGeom>
+          <a:noFill/>
+        </p:spPr>
+        <p:txBody>
+          <a:bodyPr wrap="none">
+            <a:spAutoFit/>
+          </a:bodyPr>
+          <a:lstStyle/>
+          <a:p>
+            <a:pPr algn="ctr">
+              <a:defRPr sz="1800">
+                <a:solidFill>
+                  <a:srgbClr val="FFFFFF"/>
+                </a:solidFill>
+                <a:latin typeface="Segoe UI Emoji"/>
+              </a:defRPr>
+            </a:pPr>
+            <a:r>
+              <a:t>💻</a:t>
+            </a:r>
+          </a:p>
+        </p:txBody>
+      </p:sp>
+      <p:sp>
+        <p:nvSpPr>
+          <p:cNvPr id="18" name="Rectangle 17"/>
           <p:cNvSpPr/>
           <p:nvPr/>
         </p:nvSpPr>
         <p:spPr>
           <a:xfrm>
-            <a:off x="1005839" y="2926080"/>
-            <a:ext cx="68580" cy="68580"/>
-          </a:xfrm>
-          <a:prstGeom prst="rect">
-            <a:avLst/>
-          </a:prstGeom>
-          <a:solidFill>
-            <a:srgbClr val="FFFFFF"/>
-          </a:solidFill>
-          <a:ln>
-            <a:noFill/>
-          </a:ln>
-        </p:spPr>
-        <p:style>
-          <a:lnRef idx="1">
-            <a:schemeClr val="accent1"/>
-          </a:lnRef>
-          <a:fillRef idx="3">
-            <a:schemeClr val="accent1"/>
-          </a:fillRef>
-          <a:effectRef idx="2">
-            <a:schemeClr val="accent1"/>
-          </a:effectRef>
-          <a:fontRef idx="minor">
-            <a:schemeClr val="lt1"/>
-          </a:fontRef>
-        </p:style>
-        <p:txBody>
-          <a:bodyPr rtlCol="0" anchor="ctr"/>
-          <a:lstStyle/>
-          <a:p>
-            <a:pPr algn="ctr"/>
-          </a:p>
-        </p:txBody>
-      </p:sp>
-      <p:sp>
-        <p:nvSpPr>
-          <p:cNvPr id="15" name="Rectangle 14"/>
-          <p:cNvSpPr/>
-          <p:nvPr/>
-        </p:nvSpPr>
-        <p:spPr>
-          <a:xfrm>
-            <a:off x="1078992" y="3246120"/>
+            <a:off x="1097280" y="4297679"/>
             <a:ext cx="17419320000" cy="457200"/>
           </a:xfrm>
           <a:prstGeom prst="rect">
@@ -8142,14 +7963,14 @@
       </p:sp>
       <p:sp>
         <p:nvSpPr>
-          <p:cNvPr id="16" name="TextBox 15"/>
+          <p:cNvPr id="19" name="TextBox 18"/>
           <p:cNvSpPr txBox="1"/>
           <p:nvPr/>
         </p:nvSpPr>
         <p:spPr>
           <a:xfrm>
-            <a:off x="1554480" y="2734056"/>
-            <a:ext cx="9814255" cy="731520"/>
+            <a:off x="1600200" y="3785615"/>
+            <a:ext cx="9722815" cy="731520"/>
           </a:xfrm>
           <a:prstGeom prst="rect">
             <a:avLst/>
@@ -8174,7 +7995,7 @@
               </a:defRPr>
             </a:pPr>
             <a:r>
-              <a:t>Membangun kolaborasi dengan pemangku</a:t>
+              <a:t>Mengoordinasikan &amp; mengevaluasi</a:t>
             </a:r>
           </a:p>
           <a:p>
@@ -8190,20 +8011,20 @@
               </a:defRPr>
             </a:pPr>
             <a:r>
-              <a:t>kepentingan lintas sektor</a:t>
-            </a:r>
-          </a:p>
-        </p:txBody>
-      </p:sp>
-      <p:sp>
-        <p:nvSpPr>
-          <p:cNvPr id="17" name="Rounded Rectangle 16"/>
+              <a:t>program Kota Cerdas secara berkala</a:t>
+            </a:r>
+          </a:p>
+        </p:txBody>
+      </p:sp>
+      <p:sp>
+        <p:nvSpPr>
+          <p:cNvPr id="20" name="Rounded Rectangle 19"/>
           <p:cNvSpPr/>
           <p:nvPr/>
         </p:nvSpPr>
         <p:spPr>
           <a:xfrm>
-            <a:off x="868680" y="3749039"/>
+            <a:off x="868680" y="4800600"/>
             <a:ext cx="457200" cy="457200"/>
           </a:xfrm>
           <a:prstGeom prst="roundRect">
@@ -8240,20 +8061,111 @@
       </p:sp>
       <p:sp>
         <p:nvSpPr>
-          <p:cNvPr id="18" name="Rectangle 17"/>
+          <p:cNvPr id="21" name="TextBox 20"/>
+          <p:cNvSpPr txBox="1"/>
+          <p:nvPr/>
+        </p:nvSpPr>
+        <p:spPr>
+          <a:xfrm>
+            <a:off x="868680" y="4837176"/>
+            <a:ext cx="457200" cy="388620"/>
+          </a:xfrm>
+          <a:prstGeom prst="rect">
+            <a:avLst/>
+          </a:prstGeom>
+          <a:noFill/>
+        </p:spPr>
+        <p:txBody>
+          <a:bodyPr wrap="none">
+            <a:spAutoFit/>
+          </a:bodyPr>
+          <a:lstStyle/>
+          <a:p>
+            <a:pPr algn="ctr">
+              <a:defRPr sz="1800">
+                <a:solidFill>
+                  <a:srgbClr val="FFFFFF"/>
+                </a:solidFill>
+                <a:latin typeface="Segoe UI Emoji"/>
+              </a:defRPr>
+            </a:pPr>
+            <a:r>
+              <a:t>🔗</a:t>
+            </a:r>
+          </a:p>
+        </p:txBody>
+      </p:sp>
+      <p:sp>
+        <p:nvSpPr>
+          <p:cNvPr id="22" name="TextBox 21"/>
+          <p:cNvSpPr txBox="1"/>
+          <p:nvPr/>
+        </p:nvSpPr>
+        <p:spPr>
+          <a:xfrm>
+            <a:off x="1600200" y="4837176"/>
+            <a:ext cx="9722815" cy="731520"/>
+          </a:xfrm>
+          <a:prstGeom prst="rect">
+            <a:avLst/>
+          </a:prstGeom>
+          <a:noFill/>
+        </p:spPr>
+        <p:txBody>
+          <a:bodyPr wrap="square">
+            <a:spAutoFit/>
+          </a:bodyPr>
+          <a:lstStyle/>
+          <a:p>
+            <a:pPr>
+              <a:spcAft>
+                <a:spcPts val="100"/>
+              </a:spcAft>
+              <a:defRPr sz="1400" b="1">
+                <a:solidFill>
+                  <a:srgbClr val="1E293B"/>
+                </a:solidFill>
+                <a:latin typeface="Calibri"/>
+              </a:defRPr>
+            </a:pPr>
+            <a:r>
+              <a:t>Menyelaraskan rencana induk dengan</a:t>
+            </a:r>
+          </a:p>
+          <a:p>
+            <a:pPr>
+              <a:spcAft>
+                <a:spcPts val="100"/>
+              </a:spcAft>
+              <a:defRPr sz="1300" b="0">
+                <a:solidFill>
+                  <a:srgbClr val="1E293B"/>
+                </a:solidFill>
+                <a:latin typeface="Calibri"/>
+              </a:defRPr>
+            </a:pPr>
+            <a:r>
+              <a:t>dokumen perencanaan daerah</a:t>
+            </a:r>
+          </a:p>
+        </p:txBody>
+      </p:sp>
+      <p:sp>
+        <p:nvSpPr>
+          <p:cNvPr id="23" name="Rectangle 22"/>
           <p:cNvSpPr/>
           <p:nvPr/>
         </p:nvSpPr>
         <p:spPr>
           <a:xfrm>
-            <a:off x="1051560" y="3931920"/>
-            <a:ext cx="91439" cy="91439"/>
+            <a:off x="0" y="6446520"/>
+            <a:ext cx="12191695" cy="411480"/>
           </a:xfrm>
           <a:prstGeom prst="rect">
             <a:avLst/>
           </a:prstGeom>
           <a:solidFill>
-            <a:srgbClr val="FFFFFF"/>
+            <a:srgbClr val="F8FAFC"/>
           </a:solidFill>
           <a:ln>
             <a:noFill/>
@@ -8283,57 +8195,14 @@
       </p:sp>
       <p:sp>
         <p:nvSpPr>
-          <p:cNvPr id="19" name="Rectangle 18"/>
+          <p:cNvPr id="24" name="Rectangle 23"/>
           <p:cNvSpPr/>
           <p:nvPr/>
         </p:nvSpPr>
         <p:spPr>
           <a:xfrm>
-            <a:off x="1028700" y="3909059"/>
-            <a:ext cx="137160" cy="137160"/>
-          </a:xfrm>
-          <a:prstGeom prst="rect">
-            <a:avLst/>
-          </a:prstGeom>
-          <a:solidFill>
-            <a:srgbClr val="0D9488"/>
-          </a:solidFill>
-          <a:ln>
-            <a:noFill/>
-          </a:ln>
-        </p:spPr>
-        <p:style>
-          <a:lnRef idx="1">
-            <a:schemeClr val="accent1"/>
-          </a:lnRef>
-          <a:fillRef idx="3">
-            <a:schemeClr val="accent1"/>
-          </a:fillRef>
-          <a:effectRef idx="2">
-            <a:schemeClr val="accent1"/>
-          </a:effectRef>
-          <a:fontRef idx="minor">
-            <a:schemeClr val="lt1"/>
-          </a:fontRef>
-        </p:style>
-        <p:txBody>
-          <a:bodyPr rtlCol="0" anchor="ctr"/>
-          <a:lstStyle/>
-          <a:p>
-            <a:pPr algn="ctr"/>
-          </a:p>
-        </p:txBody>
-      </p:sp>
-      <p:sp>
-        <p:nvSpPr>
-          <p:cNvPr id="20" name="Rectangle 19"/>
-          <p:cNvSpPr/>
-          <p:nvPr/>
-        </p:nvSpPr>
-        <p:spPr>
-          <a:xfrm>
-            <a:off x="1078992" y="4297679"/>
-            <a:ext cx="17419320000" cy="457200"/>
+            <a:off x="0" y="6446520"/>
+            <a:ext cx="12191695" cy="17419320000"/>
           </a:xfrm>
           <a:prstGeom prst="rect">
             <a:avLst/>
@@ -8369,14 +8238,14 @@
       </p:sp>
       <p:sp>
         <p:nvSpPr>
-          <p:cNvPr id="21" name="TextBox 20"/>
+          <p:cNvPr id="25" name="TextBox 24"/>
           <p:cNvSpPr txBox="1"/>
           <p:nvPr/>
         </p:nvSpPr>
         <p:spPr>
           <a:xfrm>
-            <a:off x="1554480" y="3785615"/>
-            <a:ext cx="9814255" cy="731520"/>
+            <a:off x="548640" y="6510528"/>
+            <a:ext cx="3657600" cy="201168"/>
           </a:xfrm>
           <a:prstGeom prst="rect">
             <a:avLst/>
@@ -8389,288 +8258,6 @@
           </a:bodyPr>
           <a:lstStyle/>
           <a:p>
-            <a:pPr>
-              <a:spcAft>
-                <a:spcPts val="100"/>
-              </a:spcAft>
-              <a:defRPr sz="1400" b="1">
-                <a:solidFill>
-                  <a:srgbClr val="1E293B"/>
-                </a:solidFill>
-                <a:latin typeface="Calibri"/>
-              </a:defRPr>
-            </a:pPr>
-            <a:r>
-              <a:t>Mengoordinasikan &amp; mengevaluasi</a:t>
-            </a:r>
-          </a:p>
-          <a:p>
-            <a:pPr>
-              <a:spcAft>
-                <a:spcPts val="100"/>
-              </a:spcAft>
-              <a:defRPr sz="1300" b="0">
-                <a:solidFill>
-                  <a:srgbClr val="1E293B"/>
-                </a:solidFill>
-                <a:latin typeface="Calibri"/>
-              </a:defRPr>
-            </a:pPr>
-            <a:r>
-              <a:t>program Kota Cerdas secara berkala</a:t>
-            </a:r>
-          </a:p>
-        </p:txBody>
-      </p:sp>
-      <p:sp>
-        <p:nvSpPr>
-          <p:cNvPr id="22" name="Parallelogram 21"/>
-          <p:cNvSpPr/>
-          <p:nvPr/>
-        </p:nvSpPr>
-        <p:spPr>
-          <a:xfrm>
-            <a:off x="868680" y="4800600"/>
-            <a:ext cx="320040" cy="457200"/>
-          </a:xfrm>
-          <a:prstGeom prst="parallelogram">
-            <a:avLst/>
-          </a:prstGeom>
-          <a:solidFill>
-            <a:srgbClr val="0D9488"/>
-          </a:solidFill>
-          <a:ln>
-            <a:noFill/>
-          </a:ln>
-        </p:spPr>
-        <p:style>
-          <a:lnRef idx="1">
-            <a:schemeClr val="accent1"/>
-          </a:lnRef>
-          <a:fillRef idx="3">
-            <a:schemeClr val="accent1"/>
-          </a:fillRef>
-          <a:effectRef idx="2">
-            <a:schemeClr val="accent1"/>
-          </a:effectRef>
-          <a:fontRef idx="minor">
-            <a:schemeClr val="lt1"/>
-          </a:fontRef>
-        </p:style>
-        <p:txBody>
-          <a:bodyPr rtlCol="0" anchor="ctr"/>
-          <a:lstStyle/>
-          <a:p>
-            <a:pPr algn="ctr"/>
-          </a:p>
-        </p:txBody>
-      </p:sp>
-      <p:sp>
-        <p:nvSpPr>
-          <p:cNvPr id="23" name="Parallelogram 22"/>
-          <p:cNvSpPr/>
-          <p:nvPr/>
-        </p:nvSpPr>
-        <p:spPr>
-          <a:xfrm>
-            <a:off x="1005839" y="4800600"/>
-            <a:ext cx="320040" cy="457200"/>
-          </a:xfrm>
-          <a:prstGeom prst="parallelogram">
-            <a:avLst/>
-          </a:prstGeom>
-          <a:solidFill>
-            <a:srgbClr val="FFFFFF"/>
-          </a:solidFill>
-          <a:ln>
-            <a:noFill/>
-          </a:ln>
-        </p:spPr>
-        <p:style>
-          <a:lnRef idx="1">
-            <a:schemeClr val="accent1"/>
-          </a:lnRef>
-          <a:fillRef idx="3">
-            <a:schemeClr val="accent1"/>
-          </a:fillRef>
-          <a:effectRef idx="2">
-            <a:schemeClr val="accent1"/>
-          </a:effectRef>
-          <a:fontRef idx="minor">
-            <a:schemeClr val="lt1"/>
-          </a:fontRef>
-        </p:style>
-        <p:txBody>
-          <a:bodyPr rtlCol="0" anchor="ctr"/>
-          <a:lstStyle/>
-          <a:p>
-            <a:pPr algn="ctr"/>
-          </a:p>
-        </p:txBody>
-      </p:sp>
-      <p:sp>
-        <p:nvSpPr>
-          <p:cNvPr id="24" name="TextBox 23"/>
-          <p:cNvSpPr txBox="1"/>
-          <p:nvPr/>
-        </p:nvSpPr>
-        <p:spPr>
-          <a:xfrm>
-            <a:off x="1554480" y="4837176"/>
-            <a:ext cx="9814255" cy="731520"/>
-          </a:xfrm>
-          <a:prstGeom prst="rect">
-            <a:avLst/>
-          </a:prstGeom>
-          <a:noFill/>
-        </p:spPr>
-        <p:txBody>
-          <a:bodyPr wrap="square">
-            <a:spAutoFit/>
-          </a:bodyPr>
-          <a:lstStyle/>
-          <a:p>
-            <a:pPr>
-              <a:spcAft>
-                <a:spcPts val="100"/>
-              </a:spcAft>
-              <a:defRPr sz="1400" b="1">
-                <a:solidFill>
-                  <a:srgbClr val="1E293B"/>
-                </a:solidFill>
-                <a:latin typeface="Calibri"/>
-              </a:defRPr>
-            </a:pPr>
-            <a:r>
-              <a:t>Menyelaraskan rencana induk dengan</a:t>
-            </a:r>
-          </a:p>
-          <a:p>
-            <a:pPr>
-              <a:spcAft>
-                <a:spcPts val="100"/>
-              </a:spcAft>
-              <a:defRPr sz="1300" b="0">
-                <a:solidFill>
-                  <a:srgbClr val="1E293B"/>
-                </a:solidFill>
-                <a:latin typeface="Calibri"/>
-              </a:defRPr>
-            </a:pPr>
-            <a:r>
-              <a:t>dokumen perencanaan daerah</a:t>
-            </a:r>
-          </a:p>
-        </p:txBody>
-      </p:sp>
-      <p:sp>
-        <p:nvSpPr>
-          <p:cNvPr id="25" name="Rectangle 24"/>
-          <p:cNvSpPr/>
-          <p:nvPr/>
-        </p:nvSpPr>
-        <p:spPr>
-          <a:xfrm>
-            <a:off x="0" y="6446520"/>
-            <a:ext cx="12191695" cy="411480"/>
-          </a:xfrm>
-          <a:prstGeom prst="rect">
-            <a:avLst/>
-          </a:prstGeom>
-          <a:solidFill>
-            <a:srgbClr val="F8FAFC"/>
-          </a:solidFill>
-          <a:ln>
-            <a:noFill/>
-          </a:ln>
-        </p:spPr>
-        <p:style>
-          <a:lnRef idx="1">
-            <a:schemeClr val="accent1"/>
-          </a:lnRef>
-          <a:fillRef idx="3">
-            <a:schemeClr val="accent1"/>
-          </a:fillRef>
-          <a:effectRef idx="2">
-            <a:schemeClr val="accent1"/>
-          </a:effectRef>
-          <a:fontRef idx="minor">
-            <a:schemeClr val="lt1"/>
-          </a:fontRef>
-        </p:style>
-        <p:txBody>
-          <a:bodyPr rtlCol="0" anchor="ctr"/>
-          <a:lstStyle/>
-          <a:p>
-            <a:pPr algn="ctr"/>
-          </a:p>
-        </p:txBody>
-      </p:sp>
-      <p:sp>
-        <p:nvSpPr>
-          <p:cNvPr id="26" name="Rectangle 25"/>
-          <p:cNvSpPr/>
-          <p:nvPr/>
-        </p:nvSpPr>
-        <p:spPr>
-          <a:xfrm>
-            <a:off x="0" y="6446520"/>
-            <a:ext cx="12191695" cy="17419320000"/>
-          </a:xfrm>
-          <a:prstGeom prst="rect">
-            <a:avLst/>
-          </a:prstGeom>
-          <a:solidFill>
-            <a:srgbClr val="E2E8F0"/>
-          </a:solidFill>
-          <a:ln>
-            <a:noFill/>
-          </a:ln>
-        </p:spPr>
-        <p:style>
-          <a:lnRef idx="1">
-            <a:schemeClr val="accent1"/>
-          </a:lnRef>
-          <a:fillRef idx="3">
-            <a:schemeClr val="accent1"/>
-          </a:fillRef>
-          <a:effectRef idx="2">
-            <a:schemeClr val="accent1"/>
-          </a:effectRef>
-          <a:fontRef idx="minor">
-            <a:schemeClr val="lt1"/>
-          </a:fontRef>
-        </p:style>
-        <p:txBody>
-          <a:bodyPr rtlCol="0" anchor="ctr"/>
-          <a:lstStyle/>
-          <a:p>
-            <a:pPr algn="ctr"/>
-          </a:p>
-        </p:txBody>
-      </p:sp>
-      <p:sp>
-        <p:nvSpPr>
-          <p:cNvPr id="27" name="TextBox 26"/>
-          <p:cNvSpPr txBox="1"/>
-          <p:nvPr/>
-        </p:nvSpPr>
-        <p:spPr>
-          <a:xfrm>
-            <a:off x="548640" y="6510528"/>
-            <a:ext cx="3657600" cy="201168"/>
-          </a:xfrm>
-          <a:prstGeom prst="rect">
-            <a:avLst/>
-          </a:prstGeom>
-          <a:noFill/>
-        </p:spPr>
-        <p:txBody>
-          <a:bodyPr wrap="square">
-            <a:spAutoFit/>
-          </a:bodyPr>
-          <a:lstStyle/>
-          <a:p>
             <a:pPr algn="l">
               <a:defRPr sz="700" b="0">
                 <a:solidFill>
@@ -8687,7 +8274,7 @@
       </p:sp>
       <p:sp>
         <p:nvSpPr>
-          <p:cNvPr id="28" name="TextBox 27"/>
+          <p:cNvPr id="26" name="TextBox 25"/>
           <p:cNvSpPr txBox="1"/>
           <p:nvPr/>
         </p:nvSpPr>
@@ -8993,7 +8580,7 @@
       </p:sp>
       <p:sp>
         <p:nvSpPr>
-          <p:cNvPr id="8" name="Pentagon 7"/>
+          <p:cNvPr id="8" name="Rounded Rectangle 7"/>
           <p:cNvSpPr/>
           <p:nvPr/>
         </p:nvSpPr>
@@ -9002,7 +8589,7 @@
             <a:off x="868680" y="1645920"/>
             <a:ext cx="457200" cy="457200"/>
           </a:xfrm>
-          <a:prstGeom prst="homePlate">
+          <a:prstGeom prst="roundRect">
             <a:avLst/>
           </a:prstGeom>
           <a:solidFill>
@@ -9036,44 +8623,37 @@
       </p:sp>
       <p:sp>
         <p:nvSpPr>
-          <p:cNvPr id="9" name="Rectangle 8"/>
-          <p:cNvSpPr/>
-          <p:nvPr/>
-        </p:nvSpPr>
-        <p:spPr>
-          <a:xfrm>
-            <a:off x="1005839" y="1783080"/>
-            <a:ext cx="182880" cy="182880"/>
-          </a:xfrm>
-          <a:prstGeom prst="rect">
-            <a:avLst/>
-          </a:prstGeom>
-          <a:solidFill>
-            <a:srgbClr val="FFFFFF"/>
-          </a:solidFill>
-          <a:ln>
-            <a:noFill/>
-          </a:ln>
-        </p:spPr>
-        <p:style>
-          <a:lnRef idx="1">
-            <a:schemeClr val="accent1"/>
-          </a:lnRef>
-          <a:fillRef idx="3">
-            <a:schemeClr val="accent1"/>
-          </a:fillRef>
-          <a:effectRef idx="2">
-            <a:schemeClr val="accent1"/>
-          </a:effectRef>
-          <a:fontRef idx="minor">
-            <a:schemeClr val="lt1"/>
-          </a:fontRef>
-        </p:style>
-        <p:txBody>
-          <a:bodyPr rtlCol="0" anchor="ctr"/>
-          <a:lstStyle/>
-          <a:p>
-            <a:pPr algn="ctr"/>
+          <p:cNvPr id="9" name="TextBox 8"/>
+          <p:cNvSpPr txBox="1"/>
+          <p:nvPr/>
+        </p:nvSpPr>
+        <p:spPr>
+          <a:xfrm>
+            <a:off x="868680" y="1682496"/>
+            <a:ext cx="457200" cy="388620"/>
+          </a:xfrm>
+          <a:prstGeom prst="rect">
+            <a:avLst/>
+          </a:prstGeom>
+          <a:noFill/>
+        </p:spPr>
+        <p:txBody>
+          <a:bodyPr wrap="none">
+            <a:spAutoFit/>
+          </a:bodyPr>
+          <a:lstStyle/>
+          <a:p>
+            <a:pPr algn="ctr">
+              <a:defRPr sz="1800">
+                <a:solidFill>
+                  <a:srgbClr val="FFFFFF"/>
+                </a:solidFill>
+                <a:latin typeface="Segoe UI Emoji"/>
+              </a:defRPr>
+            </a:pPr>
+            <a:r>
+              <a:t>⚙️</a:t>
+            </a:r>
           </a:p>
         </p:txBody>
       </p:sp>
@@ -9085,7 +8665,7 @@
         </p:nvSpPr>
         <p:spPr>
           <a:xfrm>
-            <a:off x="1078992" y="2194560"/>
+            <a:off x="1097280" y="2194560"/>
             <a:ext cx="17419320000" cy="457200"/>
           </a:xfrm>
           <a:prstGeom prst="rect">
@@ -9128,8 +8708,8 @@
         </p:nvSpPr>
         <p:spPr>
           <a:xfrm>
-            <a:off x="1554480" y="1682496"/>
-            <a:ext cx="9814255" cy="731520"/>
+            <a:off x="1600200" y="1682496"/>
+            <a:ext cx="9722815" cy="731520"/>
           </a:xfrm>
           <a:prstGeom prst="rect">
             <a:avLst/>
@@ -9177,7 +8757,7 @@
       </p:sp>
       <p:sp>
         <p:nvSpPr>
-          <p:cNvPr id="12" name="Right Arrow 11"/>
+          <p:cNvPr id="12" name="Rounded Rectangle 11"/>
           <p:cNvSpPr/>
           <p:nvPr/>
         </p:nvSpPr>
@@ -9186,7 +8766,7 @@
             <a:off x="868680" y="2697480"/>
             <a:ext cx="457200" cy="457200"/>
           </a:xfrm>
-          <a:prstGeom prst="rightArrow">
+          <a:prstGeom prst="roundRect">
             <a:avLst/>
           </a:prstGeom>
           <a:solidFill>
@@ -9220,13 +8800,49 @@
       </p:sp>
       <p:sp>
         <p:nvSpPr>
-          <p:cNvPr id="13" name="Rectangle 12"/>
+          <p:cNvPr id="13" name="TextBox 12"/>
+          <p:cNvSpPr txBox="1"/>
+          <p:nvPr/>
+        </p:nvSpPr>
+        <p:spPr>
+          <a:xfrm>
+            <a:off x="868680" y="2734056"/>
+            <a:ext cx="457200" cy="388620"/>
+          </a:xfrm>
+          <a:prstGeom prst="rect">
+            <a:avLst/>
+          </a:prstGeom>
+          <a:noFill/>
+        </p:spPr>
+        <p:txBody>
+          <a:bodyPr wrap="none">
+            <a:spAutoFit/>
+          </a:bodyPr>
+          <a:lstStyle/>
+          <a:p>
+            <a:pPr algn="ctr">
+              <a:defRPr sz="1800">
+                <a:solidFill>
+                  <a:srgbClr val="FFFFFF"/>
+                </a:solidFill>
+                <a:latin typeface="Segoe UI Emoji"/>
+              </a:defRPr>
+            </a:pPr>
+            <a:r>
+              <a:t>📋</a:t>
+            </a:r>
+          </a:p>
+        </p:txBody>
+      </p:sp>
+      <p:sp>
+        <p:nvSpPr>
+          <p:cNvPr id="14" name="Rectangle 13"/>
           <p:cNvSpPr/>
           <p:nvPr/>
         </p:nvSpPr>
         <p:spPr>
           <a:xfrm>
-            <a:off x="1078992" y="3246120"/>
+            <a:off x="1097280" y="3246120"/>
             <a:ext cx="17419320000" cy="457200"/>
           </a:xfrm>
           <a:prstGeom prst="rect">
@@ -9263,14 +8879,14 @@
       </p:sp>
       <p:sp>
         <p:nvSpPr>
-          <p:cNvPr id="14" name="TextBox 13"/>
+          <p:cNvPr id="15" name="TextBox 14"/>
           <p:cNvSpPr txBox="1"/>
           <p:nvPr/>
         </p:nvSpPr>
         <p:spPr>
           <a:xfrm>
-            <a:off x="1554480" y="2734056"/>
-            <a:ext cx="9814255" cy="731520"/>
+            <a:off x="1600200" y="2734056"/>
+            <a:ext cx="9722815" cy="731520"/>
           </a:xfrm>
           <a:prstGeom prst="rect">
             <a:avLst/>
@@ -9318,7 +8934,7 @@
       </p:sp>
       <p:sp>
         <p:nvSpPr>
-          <p:cNvPr id="15" name="Rounded Rectangle 14"/>
+          <p:cNvPr id="16" name="Rounded Rectangle 15"/>
           <p:cNvSpPr/>
           <p:nvPr/>
         </p:nvSpPr>
@@ -9361,20 +8977,56 @@
       </p:sp>
       <p:sp>
         <p:nvSpPr>
-          <p:cNvPr id="16" name="Rectangle 15"/>
+          <p:cNvPr id="17" name="TextBox 16"/>
+          <p:cNvSpPr txBox="1"/>
+          <p:nvPr/>
+        </p:nvSpPr>
+        <p:spPr>
+          <a:xfrm>
+            <a:off x="868680" y="3785615"/>
+            <a:ext cx="457200" cy="388620"/>
+          </a:xfrm>
+          <a:prstGeom prst="rect">
+            <a:avLst/>
+          </a:prstGeom>
+          <a:noFill/>
+        </p:spPr>
+        <p:txBody>
+          <a:bodyPr wrap="none">
+            <a:spAutoFit/>
+          </a:bodyPr>
+          <a:lstStyle/>
+          <a:p>
+            <a:pPr algn="ctr">
+              <a:defRPr sz="1800">
+                <a:solidFill>
+                  <a:srgbClr val="FFFFFF"/>
+                </a:solidFill>
+                <a:latin typeface="Segoe UI Emoji"/>
+              </a:defRPr>
+            </a:pPr>
+            <a:r>
+              <a:t>📝</a:t>
+            </a:r>
+          </a:p>
+        </p:txBody>
+      </p:sp>
+      <p:sp>
+        <p:nvSpPr>
+          <p:cNvPr id="18" name="Rectangle 17"/>
           <p:cNvSpPr/>
           <p:nvPr/>
         </p:nvSpPr>
         <p:spPr>
           <a:xfrm>
-            <a:off x="1051560" y="3931920"/>
-            <a:ext cx="91439" cy="91439"/>
+            <a:off x="1097280" y="4297679"/>
+            <a:ext cx="17419320000" cy="457200"/>
           </a:xfrm>
           <a:prstGeom prst="rect">
             <a:avLst/>
           </a:prstGeom>
           <a:solidFill>
-            <a:srgbClr val="FFFFFF"/>
+            <a:srgbClr val="E2E8F0"/>
           </a:solidFill>
           <a:ln>
             <a:noFill/>
@@ -9404,16 +9056,71 @@
       </p:sp>
       <p:sp>
         <p:nvSpPr>
-          <p:cNvPr id="17" name="Rectangle 16"/>
+          <p:cNvPr id="19" name="TextBox 18"/>
+          <p:cNvSpPr txBox="1"/>
+          <p:nvPr/>
+        </p:nvSpPr>
+        <p:spPr>
+          <a:xfrm>
+            <a:off x="1600200" y="3785615"/>
+            <a:ext cx="9722815" cy="731520"/>
+          </a:xfrm>
+          <a:prstGeom prst="rect">
+            <a:avLst/>
+          </a:prstGeom>
+          <a:noFill/>
+        </p:spPr>
+        <p:txBody>
+          <a:bodyPr wrap="square">
+            <a:spAutoFit/>
+          </a:bodyPr>
+          <a:lstStyle/>
+          <a:p>
+            <a:pPr>
+              <a:spcAft>
+                <a:spcPts val="100"/>
+              </a:spcAft>
+              <a:defRPr sz="1400" b="1">
+                <a:solidFill>
+                  <a:srgbClr val="1E293B"/>
+                </a:solidFill>
+                <a:latin typeface="Calibri"/>
+              </a:defRPr>
+            </a:pPr>
+            <a:r>
+              <a:t>Mengembangkan kebijakan &amp;</a:t>
+            </a:r>
+          </a:p>
+          <a:p>
+            <a:pPr>
+              <a:spcAft>
+                <a:spcPts val="100"/>
+              </a:spcAft>
+              <a:defRPr sz="1300" b="0">
+                <a:solidFill>
+                  <a:srgbClr val="1E293B"/>
+                </a:solidFill>
+                <a:latin typeface="Calibri"/>
+              </a:defRPr>
+            </a:pPr>
+            <a:r>
+              <a:t>tata kelola SPBE yang adaptif</a:t>
+            </a:r>
+          </a:p>
+        </p:txBody>
+      </p:sp>
+      <p:sp>
+        <p:nvSpPr>
+          <p:cNvPr id="20" name="Rounded Rectangle 19"/>
           <p:cNvSpPr/>
           <p:nvPr/>
         </p:nvSpPr>
         <p:spPr>
           <a:xfrm>
-            <a:off x="1028700" y="3909059"/>
-            <a:ext cx="137160" cy="137160"/>
-          </a:xfrm>
-          <a:prstGeom prst="rect">
+            <a:off x="868680" y="4800600"/>
+            <a:ext cx="457200" cy="457200"/>
+          </a:xfrm>
+          <a:prstGeom prst="roundRect">
             <a:avLst/>
           </a:prstGeom>
           <a:solidFill>
@@ -9447,57 +9154,14 @@
       </p:sp>
       <p:sp>
         <p:nvSpPr>
-          <p:cNvPr id="18" name="Rectangle 17"/>
-          <p:cNvSpPr/>
-          <p:nvPr/>
-        </p:nvSpPr>
-        <p:spPr>
-          <a:xfrm>
-            <a:off x="1078992" y="4297679"/>
-            <a:ext cx="17419320000" cy="457200"/>
-          </a:xfrm>
-          <a:prstGeom prst="rect">
-            <a:avLst/>
-          </a:prstGeom>
-          <a:solidFill>
-            <a:srgbClr val="E2E8F0"/>
-          </a:solidFill>
-          <a:ln>
-            <a:noFill/>
-          </a:ln>
-        </p:spPr>
-        <p:style>
-          <a:lnRef idx="1">
-            <a:schemeClr val="accent1"/>
-          </a:lnRef>
-          <a:fillRef idx="3">
-            <a:schemeClr val="accent1"/>
-          </a:fillRef>
-          <a:effectRef idx="2">
-            <a:schemeClr val="accent1"/>
-          </a:effectRef>
-          <a:fontRef idx="minor">
-            <a:schemeClr val="lt1"/>
-          </a:fontRef>
-        </p:style>
-        <p:txBody>
-          <a:bodyPr rtlCol="0" anchor="ctr"/>
-          <a:lstStyle/>
-          <a:p>
-            <a:pPr algn="ctr"/>
-          </a:p>
-        </p:txBody>
-      </p:sp>
-      <p:sp>
-        <p:nvSpPr>
-          <p:cNvPr id="19" name="TextBox 18"/>
+          <p:cNvPr id="21" name="TextBox 20"/>
           <p:cNvSpPr txBox="1"/>
           <p:nvPr/>
         </p:nvSpPr>
         <p:spPr>
           <a:xfrm>
-            <a:off x="1554480" y="3785615"/>
-            <a:ext cx="9814255" cy="731520"/>
+            <a:off x="868680" y="4837176"/>
+            <a:ext cx="457200" cy="388620"/>
           </a:xfrm>
           <a:prstGeom prst="rect">
             <a:avLst/>
@@ -9505,127 +9169,22 @@
           <a:noFill/>
         </p:spPr>
         <p:txBody>
-          <a:bodyPr wrap="square">
+          <a:bodyPr wrap="none">
             <a:spAutoFit/>
           </a:bodyPr>
           <a:lstStyle/>
           <a:p>
-            <a:pPr>
-              <a:spcAft>
-                <a:spcPts val="100"/>
-              </a:spcAft>
-              <a:defRPr sz="1400" b="1">
-                <a:solidFill>
-                  <a:srgbClr val="1E293B"/>
-                </a:solidFill>
-                <a:latin typeface="Calibri"/>
+            <a:pPr algn="ctr">
+              <a:defRPr sz="1800">
+                <a:solidFill>
+                  <a:srgbClr val="FFFFFF"/>
+                </a:solidFill>
+                <a:latin typeface="Segoe UI Emoji"/>
               </a:defRPr>
             </a:pPr>
             <a:r>
-              <a:t>Mengembangkan kebijakan &amp;</a:t>
-            </a:r>
-          </a:p>
-          <a:p>
-            <a:pPr>
-              <a:spcAft>
-                <a:spcPts val="100"/>
-              </a:spcAft>
-              <a:defRPr sz="1300" b="0">
-                <a:solidFill>
-                  <a:srgbClr val="1E293B"/>
-                </a:solidFill>
-                <a:latin typeface="Calibri"/>
-              </a:defRPr>
-            </a:pPr>
-            <a:r>
-              <a:t>tata kelola SPBE yang adaptif</a:t>
-            </a:r>
-          </a:p>
-        </p:txBody>
-      </p:sp>
-      <p:sp>
-        <p:nvSpPr>
-          <p:cNvPr id="20" name="Diamond 19"/>
-          <p:cNvSpPr/>
-          <p:nvPr/>
-        </p:nvSpPr>
-        <p:spPr>
-          <a:xfrm>
-            <a:off x="868680" y="4800600"/>
-            <a:ext cx="457200" cy="457200"/>
-          </a:xfrm>
-          <a:prstGeom prst="diamond">
-            <a:avLst/>
-          </a:prstGeom>
-          <a:solidFill>
-            <a:srgbClr val="1A5676"/>
-          </a:solidFill>
-          <a:ln>
-            <a:noFill/>
-          </a:ln>
-        </p:spPr>
-        <p:style>
-          <a:lnRef idx="1">
-            <a:schemeClr val="accent1"/>
-          </a:lnRef>
-          <a:fillRef idx="3">
-            <a:schemeClr val="accent1"/>
-          </a:fillRef>
-          <a:effectRef idx="2">
-            <a:schemeClr val="accent1"/>
-          </a:effectRef>
-          <a:fontRef idx="minor">
-            <a:schemeClr val="lt1"/>
-          </a:fontRef>
-        </p:style>
-        <p:txBody>
-          <a:bodyPr rtlCol="0" anchor="ctr"/>
-          <a:lstStyle/>
-          <a:p>
-            <a:pPr algn="ctr"/>
-          </a:p>
-        </p:txBody>
-      </p:sp>
-      <p:sp>
-        <p:nvSpPr>
-          <p:cNvPr id="21" name="Diamond 20"/>
-          <p:cNvSpPr/>
-          <p:nvPr/>
-        </p:nvSpPr>
-        <p:spPr>
-          <a:xfrm>
-            <a:off x="937259" y="4869180"/>
-            <a:ext cx="320040" cy="320040"/>
-          </a:xfrm>
-          <a:prstGeom prst="diamond">
-            <a:avLst/>
-          </a:prstGeom>
-          <a:solidFill>
-            <a:srgbClr val="FFFFFF"/>
-          </a:solidFill>
-          <a:ln>
-            <a:noFill/>
-          </a:ln>
-        </p:spPr>
-        <p:style>
-          <a:lnRef idx="1">
-            <a:schemeClr val="accent1"/>
-          </a:lnRef>
-          <a:fillRef idx="3">
-            <a:schemeClr val="accent1"/>
-          </a:fillRef>
-          <a:effectRef idx="2">
-            <a:schemeClr val="accent1"/>
-          </a:effectRef>
-          <a:fontRef idx="minor">
-            <a:schemeClr val="lt1"/>
-          </a:fontRef>
-        </p:style>
-        <p:txBody>
-          <a:bodyPr rtlCol="0" anchor="ctr"/>
-          <a:lstStyle/>
-          <a:p>
-            <a:pPr algn="ctr"/>
+              <a:t>📊</a:t>
+            </a:r>
           </a:p>
         </p:txBody>
       </p:sp>
@@ -9637,8 +9196,8 @@
         </p:nvSpPr>
         <p:spPr>
           <a:xfrm>
-            <a:off x="1554480" y="4837176"/>
-            <a:ext cx="9814255" cy="731520"/>
+            <a:off x="1600200" y="4837176"/>
+            <a:ext cx="9722815" cy="731520"/>
           </a:xfrm>
           <a:prstGeom prst="rect">
             <a:avLst/>
@@ -9999,7 +9558,7 @@
       </p:sp>
       <p:sp>
         <p:nvSpPr>
-          <p:cNvPr id="5" name="Diamond 4"/>
+          <p:cNvPr id="5" name="Rounded Rectangle 4"/>
           <p:cNvSpPr/>
           <p:nvPr/>
         </p:nvSpPr>
@@ -10008,7 +9567,7 @@
             <a:off x="5730087" y="1097280"/>
             <a:ext cx="731520" cy="731520"/>
           </a:xfrm>
-          <a:prstGeom prst="diamond">
+          <a:prstGeom prst="roundRect">
             <a:avLst/>
           </a:prstGeom>
           <a:solidFill>
@@ -10042,44 +9601,37 @@
       </p:sp>
       <p:sp>
         <p:nvSpPr>
-          <p:cNvPr id="6" name="Diamond 5"/>
-          <p:cNvSpPr/>
-          <p:nvPr/>
-        </p:nvSpPr>
-        <p:spPr>
-          <a:xfrm>
-            <a:off x="5839815" y="1207007"/>
-            <a:ext cx="512063" cy="512063"/>
-          </a:xfrm>
-          <a:prstGeom prst="diamond">
-            <a:avLst/>
-          </a:prstGeom>
-          <a:solidFill>
-            <a:srgbClr val="FFFFFF"/>
-          </a:solidFill>
-          <a:ln>
-            <a:noFill/>
-          </a:ln>
-        </p:spPr>
-        <p:style>
-          <a:lnRef idx="1">
-            <a:schemeClr val="accent1"/>
-          </a:lnRef>
-          <a:fillRef idx="3">
-            <a:schemeClr val="accent1"/>
-          </a:fillRef>
-          <a:effectRef idx="2">
-            <a:schemeClr val="accent1"/>
-          </a:effectRef>
-          <a:fontRef idx="minor">
-            <a:schemeClr val="lt1"/>
-          </a:fontRef>
-        </p:style>
-        <p:txBody>
-          <a:bodyPr rtlCol="0" anchor="ctr"/>
-          <a:lstStyle/>
-          <a:p>
-            <a:pPr algn="ctr"/>
+          <p:cNvPr id="6" name="TextBox 5"/>
+          <p:cNvSpPr txBox="1"/>
+          <p:nvPr/>
+        </p:nvSpPr>
+        <p:spPr>
+          <a:xfrm>
+            <a:off x="5730087" y="1155801"/>
+            <a:ext cx="731520" cy="621792"/>
+          </a:xfrm>
+          <a:prstGeom prst="rect">
+            <a:avLst/>
+          </a:prstGeom>
+          <a:noFill/>
+        </p:spPr>
+        <p:txBody>
+          <a:bodyPr wrap="none">
+            <a:spAutoFit/>
+          </a:bodyPr>
+          <a:lstStyle/>
+          <a:p>
+            <a:pPr algn="ctr">
+              <a:defRPr sz="2800">
+                <a:solidFill>
+                  <a:srgbClr val="FFFFFF"/>
+                </a:solidFill>
+                <a:latin typeface="Segoe UI Emoji"/>
+              </a:defRPr>
+            </a:pPr>
+            <a:r>
+              <a:t>⭐</a:t>
+            </a:r>
           </a:p>
         </p:txBody>
       </p:sp>

--- a/RESUME_TUPOKSI_egov.pptx
+++ b/RESUME_TUPOKSI_egov.pptx
@@ -3456,7 +3456,7 @@
               </a:defRPr>
             </a:pPr>
             <a:r>
-              <a:t>Diskominfostandi Kota Bekasi</a:t>
+              <a:t>DISKOMINFOSTANDI Kota Bekasi</a:t>
             </a:r>
           </a:p>
         </p:txBody>
@@ -9702,7 +9702,7 @@
               </a:defRPr>
             </a:pPr>
             <a:r>
-              <a:t>Bidang e-Government — Diskominfostandi Kota Bekasi</a:t>
+              <a:t>Bidang e-Government DISKOMINFOSTANDI Kota Bekasi</a:t>
             </a:r>
           </a:p>
         </p:txBody>
